--- a/docs/test/stress/e2e-outputs/owner_occupied_basic_pr03.pptx
+++ b/docs/test/stress/e2e-outputs/owner_occupied_basic_pr03.pptx
@@ -16,9 +16,10 @@
     <p:sldId id="264" r:id="rId10"/>
     <p:sldId id="265" r:id="rId11"/>
     <p:sldId id="266" r:id="rId12"/>
+    <p:sldId id="267" r:id="rId13"/>
   </p:sldIdLst>
   <p:notesMasterIdLst>
-    <p:notesMasterId r:id="rId13"/>
+    <p:notesMasterId r:id="rId14"/>
   </p:notesMasterIdLst>
   <p:sldSz cx="12192000" cy="6858000"/>
   <p:notesSz cx="6858000" cy="12192000"/>
@@ -712,6 +713,94 @@
             <a:fld id="{F7021451-1387-4CA6-816F-3879F97B5CBC}" type="slidenum">
               <a:rPr lang="en-US"/>
               <a:t>11</a:t>
+            </a:fld>
+            <a:endParaRPr lang="en-US"/>
+          </a:p>
+        </p:txBody>
+      </p:sp>
+    </p:spTree>
+    <p:extLst>
+      <p:ext uri="{BB962C8B-B14F-4D97-AF65-F5344CB8AC3E}">
+        <p14:creationId xmlns:p14="http://schemas.microsoft.com/office/powerpoint/2010/main" val="1024086991"/>
+      </p:ext>
+    </p:extLst>
+  </p:cSld>
+  <p:clrMapOvr>
+    <a:masterClrMapping/>
+  </p:clrMapOvr>
+</p:notes>
+</file>
+
+<file path=ppt/notesSlides/notesSlide12.xml><?xml version="1.0" encoding="utf-8"?>
+<p:notes xmlns:a="http://schemas.openxmlformats.org/drawingml/2006/main" xmlns:r="http://schemas.openxmlformats.org/officeDocument/2006/relationships" xmlns:p="http://schemas.openxmlformats.org/presentationml/2006/main">
+  <p:cSld>
+    <p:spTree>
+      <p:nvGrpSpPr>
+        <p:cNvPr id="1" name=""/>
+        <p:cNvGrpSpPr/>
+        <p:nvPr/>
+      </p:nvGrpSpPr>
+      <p:grpSpPr>
+        <a:xfrm>
+          <a:off x="0" y="0"/>
+          <a:ext cx="0" cy="0"/>
+          <a:chOff x="0" y="0"/>
+          <a:chExt cx="0" cy="0"/>
+        </a:xfrm>
+      </p:grpSpPr>
+      <p:sp>
+        <p:nvSpPr>
+          <p:cNvPr id="2" name="Slide Image Placeholder 1"/>
+          <p:cNvSpPr>
+            <a:spLocks noGrp="1" noRot="1" noChangeAspect="1"/>
+          </p:cNvSpPr>
+          <p:nvPr>
+            <p:ph type="sldImg"/>
+          </p:nvPr>
+        </p:nvSpPr>
+        <p:spPr/>
+      </p:sp>
+      <p:sp>
+        <p:nvSpPr>
+          <p:cNvPr id="3" name="Notes Placeholder 2"/>
+          <p:cNvSpPr>
+            <a:spLocks noGrp="1"/>
+          </p:cNvSpPr>
+          <p:nvPr>
+            <p:ph type="body" idx="1"/>
+          </p:nvPr>
+        </p:nvSpPr>
+        <p:spPr/>
+        <p:txBody>
+          <a:bodyPr/>
+          <a:lstStyle/>
+          <a:p>
+            <a:r>
+              <a:rPr lang="en-US" dirty="0"/>
+              <a:t/>
+            </a:r>
+            <a:endParaRPr lang="en-US" dirty="0"/>
+          </a:p>
+        </p:txBody>
+      </p:sp>
+      <p:sp>
+        <p:nvSpPr>
+          <p:cNvPr id="4" name="Slide Number Placeholder 3"/>
+          <p:cNvSpPr>
+            <a:spLocks noGrp="1"/>
+          </p:cNvSpPr>
+          <p:nvPr>
+            <p:ph type="sldNum" sz="quarter" idx="10"/>
+          </p:nvPr>
+        </p:nvSpPr>
+        <p:spPr/>
+        <p:txBody>
+          <a:bodyPr/>
+          <a:lstStyle/>
+          <a:p>
+            <a:fld id="{F7021451-1387-4CA6-816F-3879F97B5CBC}" type="slidenum">
+              <a:rPr lang="en-US"/>
+              <a:t>12</a:t>
             </a:fld>
             <a:endParaRPr lang="en-US"/>
           </a:p>
@@ -1780,7 +1869,7 @@
             <a:avLst/>
           </a:prstGeom>
           <a:solidFill>
-            <a:srgbClr val="2A2118"/>
+            <a:srgbClr val="0D2233"/>
           </a:solidFill>
           <a:ln/>
         </p:spPr>
@@ -1800,7 +1889,7 @@
             <a:avLst/>
           </a:prstGeom>
           <a:solidFill>
-            <a:srgbClr val="3D2E1A"/>
+            <a:srgbClr val="1A3A4A"/>
           </a:solidFill>
           <a:ln/>
         </p:spPr>
@@ -1820,7 +1909,7 @@
             <a:avLst/>
           </a:prstGeom>
           <a:solidFill>
-            <a:srgbClr val="33271A"/>
+            <a:srgbClr val="132A3A"/>
           </a:solidFill>
           <a:ln/>
         </p:spPr>
@@ -1916,7 +2005,7 @@
         </p:nvSpPr>
         <p:spPr>
           <a:xfrm>
-            <a:off x="566928" y="475488"/>
+            <a:off x="502920" y="475488"/>
             <a:ext cx="2743200" cy="365760"/>
           </a:xfrm>
           <a:prstGeom prst="rect">
@@ -1969,7 +2058,7 @@
         </p:nvSpPr>
         <p:spPr>
           <a:xfrm>
-            <a:off x="566928" y="2029968"/>
+            <a:off x="502920" y="2029968"/>
             <a:ext cx="7315200" cy="274320"/>
           </a:xfrm>
           <a:prstGeom prst="rect">
@@ -2008,7 +2097,7 @@
         </p:nvSpPr>
         <p:spPr>
           <a:xfrm>
-            <a:off x="566928" y="2304288"/>
+            <a:off x="502920" y="2304288"/>
             <a:ext cx="7315200" cy="731520"/>
           </a:xfrm>
           <a:prstGeom prst="rect">
@@ -2047,7 +2136,7 @@
         </p:nvSpPr>
         <p:spPr>
           <a:xfrm>
-            <a:off x="566928" y="3090672"/>
+            <a:off x="502920" y="3090672"/>
             <a:ext cx="7315200" cy="365760"/>
           </a:xfrm>
           <a:prstGeom prst="rect">
@@ -2086,7 +2175,7 @@
         </p:nvSpPr>
         <p:spPr>
           <a:xfrm>
-            <a:off x="566928" y="3685032"/>
+            <a:off x="502920" y="3685032"/>
             <a:ext cx="1005840" cy="292608"/>
           </a:xfrm>
           <a:prstGeom prst="roundRect">
@@ -2108,7 +2197,7 @@
         </p:nvSpPr>
         <p:spPr>
           <a:xfrm>
-            <a:off x="566928" y="3685032"/>
+            <a:off x="502920" y="3685032"/>
             <a:ext cx="1005840" cy="292608"/>
           </a:xfrm>
           <a:prstGeom prst="rect">
@@ -2147,7 +2236,7 @@
         </p:nvSpPr>
         <p:spPr>
           <a:xfrm>
-            <a:off x="1664208" y="3685032"/>
+            <a:off x="1600200" y="3685032"/>
             <a:ext cx="1005840" cy="292608"/>
           </a:xfrm>
           <a:prstGeom prst="roundRect">
@@ -2169,7 +2258,7 @@
         </p:nvSpPr>
         <p:spPr>
           <a:xfrm>
-            <a:off x="1664208" y="3685032"/>
+            <a:off x="1600200" y="3685032"/>
             <a:ext cx="1005840" cy="292608"/>
           </a:xfrm>
           <a:prstGeom prst="rect">
@@ -2208,7 +2297,7 @@
         </p:nvSpPr>
         <p:spPr>
           <a:xfrm>
-            <a:off x="566928" y="4187952"/>
+            <a:off x="502920" y="4187952"/>
             <a:ext cx="6858000" cy="1051560"/>
           </a:xfrm>
           <a:prstGeom prst="roundRect">
@@ -2235,7 +2324,7 @@
         </p:nvSpPr>
         <p:spPr>
           <a:xfrm>
-            <a:off x="822960" y="4297680"/>
+            <a:off x="758952" y="4297680"/>
             <a:ext cx="6345936" cy="832104"/>
           </a:xfrm>
           <a:prstGeom prst="rect">
@@ -2274,7 +2363,7 @@
         </p:nvSpPr>
         <p:spPr>
           <a:xfrm>
-            <a:off x="566928" y="1700784"/>
+            <a:off x="502920" y="1700784"/>
             <a:ext cx="7315200" cy="256032"/>
           </a:xfrm>
           <a:prstGeom prst="rect">
@@ -2313,7 +2402,7 @@
         </p:nvSpPr>
         <p:spPr>
           <a:xfrm>
-            <a:off x="566928" y="6035040"/>
+            <a:off x="502920" y="6035040"/>
             <a:ext cx="11057839" cy="274320"/>
           </a:xfrm>
           <a:prstGeom prst="rect">
@@ -2352,7 +2441,7 @@
         </p:nvSpPr>
         <p:spPr>
           <a:xfrm>
-            <a:off x="566928" y="6382512"/>
+            <a:off x="502920" y="6382512"/>
             <a:ext cx="7315200" cy="219456"/>
           </a:xfrm>
           <a:prstGeom prst="rect">
@@ -2391,7 +2480,7 @@
         </p:nvSpPr>
         <p:spPr>
           <a:xfrm>
-            <a:off x="10710367" y="6382512"/>
+            <a:off x="10774375" y="6382512"/>
             <a:ext cx="914400" cy="219456"/>
           </a:xfrm>
           <a:prstGeom prst="rect">
@@ -2462,7 +2551,7 @@
         </p:nvSpPr>
         <p:spPr>
           <a:xfrm>
-            <a:off x="566928" y="457200"/>
+            <a:off x="502920" y="457200"/>
             <a:ext cx="384048" cy="384048"/>
           </a:xfrm>
           <a:prstGeom prst="ellipse">
@@ -2482,7 +2571,7 @@
         </p:nvSpPr>
         <p:spPr>
           <a:xfrm>
-            <a:off x="566928" y="457200"/>
+            <a:off x="502920" y="457200"/>
             <a:ext cx="384048" cy="384048"/>
           </a:xfrm>
           <a:prstGeom prst="rect">
@@ -2521,7 +2610,7 @@
         </p:nvSpPr>
         <p:spPr>
           <a:xfrm>
-            <a:off x="1133856" y="457200"/>
+            <a:off x="1069848" y="457200"/>
             <a:ext cx="10490911" cy="182880"/>
           </a:xfrm>
           <a:prstGeom prst="rect">
@@ -2546,7 +2635,7 @@
                 <a:ea typeface="Arial" pitchFamily="34" charset="-122"/>
                 <a:cs typeface="Arial" pitchFamily="34" charset="-120"/>
               </a:rPr>
-              <a:t>Process</a:t>
+              <a:t>Checklist</a:t>
             </a:r>
             <a:endParaRPr lang="en-US" sz="950" dirty="0"/>
           </a:p>
@@ -2560,7 +2649,7 @@
         </p:nvSpPr>
         <p:spPr>
           <a:xfrm>
-            <a:off x="1133856" y="640080"/>
+            <a:off x="1069848" y="640080"/>
             <a:ext cx="10490911" cy="365760"/>
           </a:xfrm>
           <a:prstGeom prst="rect">
@@ -2585,7 +2674,7 @@
                 <a:ea typeface="Pretendard" pitchFamily="34" charset="-122"/>
                 <a:cs typeface="Pretendard" pitchFamily="34" charset="-120"/>
               </a:rPr>
-              <a:t>진행 절차</a:t>
+              <a:t>실사 체크리스트</a:t>
             </a:r>
             <a:endParaRPr lang="en-US" sz="2300" dirty="0"/>
           </a:p>
@@ -2593,26 +2682,63 @@
       </p:sp>
       <p:sp>
         <p:nvSpPr>
-          <p:cNvPr id="6" name="Shape 4"/>
-          <p:cNvSpPr/>
-          <p:nvPr/>
-        </p:nvSpPr>
-        <p:spPr>
-          <a:xfrm>
-            <a:off x="566928" y="1572768"/>
-            <a:ext cx="11057839" cy="3200400"/>
-          </a:xfrm>
-          <a:prstGeom prst="roundRect">
-            <a:avLst>
-              <a:gd name="adj" fmla="val 1714"/>
-            </a:avLst>
+          <p:cNvPr id="6" name="Text 4"/>
+          <p:cNvSpPr/>
+          <p:nvPr/>
+        </p:nvSpPr>
+        <p:spPr>
+          <a:xfrm>
+            <a:off x="502920" y="1371600"/>
+            <a:ext cx="11057839" cy="237744"/>
+          </a:xfrm>
+          <a:prstGeom prst="rect">
+            <a:avLst/>
+          </a:prstGeom>
+          <a:noFill/>
+          <a:ln/>
+        </p:spPr>
+        <p:txBody>
+          <a:bodyPr wrap="square" lIns="0" tIns="0" rIns="0" bIns="0" rtlCol="0" anchor="ctr"/>
+          <a:lstStyle/>
+          <a:p>
+            <a:pPr indent="0" marL="0">
+              <a:buNone/>
+            </a:pPr>
+            <a:r>
+              <a:rPr lang="en-US" sz="1100" b="1" dirty="0">
+                <a:solidFill>
+                  <a:srgbClr val="10161F"/>
+                </a:solidFill>
+                <a:latin typeface="Pretendard" pitchFamily="34" charset="0"/>
+                <a:ea typeface="Pretendard" pitchFamily="34" charset="-122"/>
+                <a:cs typeface="Pretendard" pitchFamily="34" charset="-120"/>
+              </a:rPr>
+              <a:t>거래 안정성 확보를 위한 필수 법률·물리·임대차 실사 점검 항목 (총 6건)</a:t>
+            </a:r>
+            <a:endParaRPr lang="en-US" sz="1100" dirty="0"/>
+          </a:p>
+        </p:txBody>
+      </p:sp>
+      <p:sp>
+        <p:nvSpPr>
+          <p:cNvPr id="7" name="Shape 5"/>
+          <p:cNvSpPr/>
+          <p:nvPr/>
+        </p:nvSpPr>
+        <p:spPr>
+          <a:xfrm>
+            <a:off x="502920" y="1719072"/>
+            <a:ext cx="5368900" cy="868680"/>
+          </a:xfrm>
+          <a:prstGeom prst="rect">
+            <a:avLst/>
           </a:prstGeom>
           <a:solidFill>
             <a:srgbClr val="F7FAFC"/>
           </a:solidFill>
           <a:ln w="6350">
             <a:solidFill>
-              <a:srgbClr val="CBD5E0"/>
+              <a:srgbClr val="D9B668"/>
             </a:solidFill>
             <a:prstDash val="solid"/>
           </a:ln>
@@ -2620,99 +2746,60 @@
       </p:sp>
       <p:sp>
         <p:nvSpPr>
-          <p:cNvPr id="7" name="Shape 5"/>
-          <p:cNvSpPr/>
-          <p:nvPr/>
-        </p:nvSpPr>
-        <p:spPr>
-          <a:xfrm>
-            <a:off x="786384" y="1792224"/>
-            <a:ext cx="438912" cy="438912"/>
-          </a:xfrm>
-          <a:prstGeom prst="ellipse">
+          <p:cNvPr id="8" name="Shape 6"/>
+          <p:cNvSpPr/>
+          <p:nvPr/>
+        </p:nvSpPr>
+        <p:spPr>
+          <a:xfrm>
+            <a:off x="640080" y="1883664"/>
+            <a:ext cx="320040" cy="320040"/>
+          </a:xfrm>
+          <a:prstGeom prst="rect">
             <a:avLst/>
           </a:prstGeom>
           <a:solidFill>
-            <a:srgbClr val="B98A2E"/>
+            <a:srgbClr val="977024"/>
           </a:solidFill>
           <a:ln/>
         </p:spPr>
       </p:sp>
       <p:sp>
         <p:nvSpPr>
-          <p:cNvPr id="8" name="Text 6"/>
-          <p:cNvSpPr/>
-          <p:nvPr/>
-        </p:nvSpPr>
-        <p:spPr>
-          <a:xfrm>
-            <a:off x="786384" y="1792224"/>
-            <a:ext cx="438912" cy="438912"/>
-          </a:xfrm>
-          <a:prstGeom prst="rect">
-            <a:avLst/>
-          </a:prstGeom>
-          <a:noFill/>
-          <a:ln/>
-        </p:spPr>
-        <p:txBody>
-          <a:bodyPr wrap="square" lIns="0" tIns="0" rIns="0" bIns="0" rtlCol="0" anchor="ctr"/>
+          <p:cNvPr id="9" name="Text 7"/>
+          <p:cNvSpPr/>
+          <p:nvPr/>
+        </p:nvSpPr>
+        <p:spPr>
+          <a:xfrm>
+            <a:off x="640080" y="1883664"/>
+            <a:ext cx="320040" cy="320040"/>
+          </a:xfrm>
+          <a:prstGeom prst="rect">
+            <a:avLst/>
+          </a:prstGeom>
+          <a:noFill/>
+          <a:ln/>
+        </p:spPr>
+        <p:txBody>
+          <a:bodyPr wrap="square" rtlCol="0" anchor="ctr"/>
           <a:lstStyle/>
           <a:p>
             <a:pPr algn="ctr" indent="0" marL="0">
               <a:buNone/>
             </a:pPr>
             <a:r>
-              <a:rPr lang="en-US" sz="1400" b="1" dirty="0">
+              <a:rPr lang="en-US" sz="1100" b="1" dirty="0">
                 <a:solidFill>
                   <a:srgbClr val="FFFFFF"/>
-                </a:solidFill>
-                <a:latin typeface="Arial" pitchFamily="34" charset="0"/>
-                <a:ea typeface="Arial" pitchFamily="34" charset="-122"/>
-                <a:cs typeface="Arial" pitchFamily="34" charset="-120"/>
-              </a:rPr>
-              <a:t>01</a:t>
-            </a:r>
-            <a:endParaRPr lang="en-US" sz="1400" dirty="0"/>
-          </a:p>
-        </p:txBody>
-      </p:sp>
-      <p:sp>
-        <p:nvSpPr>
-          <p:cNvPr id="9" name="Text 7"/>
-          <p:cNvSpPr/>
-          <p:nvPr/>
-        </p:nvSpPr>
-        <p:spPr>
-          <a:xfrm>
-            <a:off x="786384" y="2304288"/>
-            <a:ext cx="10618927" cy="365760"/>
-          </a:xfrm>
-          <a:prstGeom prst="rect">
-            <a:avLst/>
-          </a:prstGeom>
-          <a:noFill/>
-          <a:ln/>
-        </p:spPr>
-        <p:txBody>
-          <a:bodyPr wrap="square" rtlCol="0" anchor="ctr"/>
-          <a:lstStyle/>
-          <a:p>
-            <a:pPr indent="0" marL="0">
-              <a:buNone/>
-            </a:pPr>
-            <a:r>
-              <a:rPr lang="en-US" sz="1600" b="1" dirty="0">
-                <a:solidFill>
-                  <a:srgbClr val="10161F"/>
                 </a:solidFill>
                 <a:latin typeface="Pretendard" pitchFamily="34" charset="0"/>
                 <a:ea typeface="Pretendard" pitchFamily="34" charset="-122"/>
                 <a:cs typeface="Pretendard" pitchFamily="34" charset="-120"/>
               </a:rPr>
-              <a:t>1단계</a:t>
-            </a:r>
-            <a:endParaRPr lang="en-US" sz="1600" dirty="0"/>
+              <a:t>✓</a:t>
+            </a:r>
+            <a:endParaRPr lang="en-US" sz="1100" dirty="0"/>
           </a:p>
         </p:txBody>
       </p:sp>
@@ -2724,24 +2811,27 @@
         </p:nvSpPr>
         <p:spPr>
           <a:xfrm>
-            <a:off x="786384" y="2761488"/>
-            <a:ext cx="10618927" cy="1828800"/>
-          </a:xfrm>
-          <a:prstGeom prst="rect">
-            <a:avLst/>
-          </a:prstGeom>
-          <a:noFill/>
-          <a:ln/>
-        </p:spPr>
-        <p:txBody>
-          <a:bodyPr wrap="square" rtlCol="0" anchor="t"/>
+            <a:off x="1051560" y="1810512"/>
+            <a:ext cx="4683100" cy="722376"/>
+          </a:xfrm>
+          <a:prstGeom prst="rect">
+            <a:avLst/>
+          </a:prstGeom>
+          <a:noFill/>
+          <a:ln/>
+        </p:spPr>
+        <p:txBody>
+          <a:bodyPr wrap="square" rtlCol="0" anchor="ctr"/>
           <a:lstStyle/>
           <a:p>
             <a:pPr indent="0" marL="0">
-              <a:buNone/>
-            </a:pPr>
-            <a:r>
-              <a:rPr lang="en-US" sz="1100" dirty="0">
+              <a:lnSpc>
+                <a:spcPct val="110000"/>
+              </a:lnSpc>
+              <a:buNone/>
+            </a:pPr>
+            <a:r>
+              <a:rPr lang="en-US" sz="950" dirty="0">
                 <a:solidFill>
                   <a:srgbClr val="10161F"/>
                 </a:solidFill>
@@ -2749,24 +2839,91 @@
                 <a:ea typeface="Pretendard" pitchFamily="34" charset="-122"/>
                 <a:cs typeface="Pretendard" pitchFamily="34" charset="-120"/>
               </a:rPr>
-              <a:t>사옥 활용 레이아웃 설계 및 인테리어 비용 산정을 권장</a:t>
-            </a:r>
-            <a:endParaRPr lang="en-US" sz="1100" dirty="0"/>
-          </a:p>
-          <a:p>
-            <a:pPr indent="0" marL="0">
-              <a:buNone/>
-            </a:pPr>
-            <a:r>
-              <a:rPr lang="en-US" sz="1100" dirty="0">
-                <a:solidFill>
-                  <a:srgbClr val="10161F"/>
+              <a:t>등기부등본 갑구/을구 권리관계 및 근저당 채권최고액 전액 말소 조건 원본 대조</a:t>
+            </a:r>
+            <a:endParaRPr lang="en-US" sz="950" dirty="0"/>
+          </a:p>
+        </p:txBody>
+      </p:sp>
+      <p:sp>
+        <p:nvSpPr>
+          <p:cNvPr id="11" name="Shape 9"/>
+          <p:cNvSpPr/>
+          <p:nvPr/>
+        </p:nvSpPr>
+        <p:spPr>
+          <a:xfrm>
+            <a:off x="502920" y="2715768"/>
+            <a:ext cx="5368900" cy="868680"/>
+          </a:xfrm>
+          <a:prstGeom prst="rect">
+            <a:avLst/>
+          </a:prstGeom>
+          <a:solidFill>
+            <a:srgbClr val="F7FAFC"/>
+          </a:solidFill>
+          <a:ln w="6350">
+            <a:solidFill>
+              <a:srgbClr val="D9B668"/>
+            </a:solidFill>
+            <a:prstDash val="solid"/>
+          </a:ln>
+        </p:spPr>
+      </p:sp>
+      <p:sp>
+        <p:nvSpPr>
+          <p:cNvPr id="12" name="Shape 10"/>
+          <p:cNvSpPr/>
+          <p:nvPr/>
+        </p:nvSpPr>
+        <p:spPr>
+          <a:xfrm>
+            <a:off x="640080" y="2880360"/>
+            <a:ext cx="320040" cy="320040"/>
+          </a:xfrm>
+          <a:prstGeom prst="rect">
+            <a:avLst/>
+          </a:prstGeom>
+          <a:solidFill>
+            <a:srgbClr val="977024"/>
+          </a:solidFill>
+          <a:ln/>
+        </p:spPr>
+      </p:sp>
+      <p:sp>
+        <p:nvSpPr>
+          <p:cNvPr id="13" name="Text 11"/>
+          <p:cNvSpPr/>
+          <p:nvPr/>
+        </p:nvSpPr>
+        <p:spPr>
+          <a:xfrm>
+            <a:off x="640080" y="2880360"/>
+            <a:ext cx="320040" cy="320040"/>
+          </a:xfrm>
+          <a:prstGeom prst="rect">
+            <a:avLst/>
+          </a:prstGeom>
+          <a:noFill/>
+          <a:ln/>
+        </p:spPr>
+        <p:txBody>
+          <a:bodyPr wrap="square" rtlCol="0" anchor="ctr"/>
+          <a:lstStyle/>
+          <a:p>
+            <a:pPr algn="ctr" indent="0" marL="0">
+              <a:buNone/>
+            </a:pPr>
+            <a:r>
+              <a:rPr lang="en-US" sz="1100" b="1" dirty="0">
+                <a:solidFill>
+                  <a:srgbClr val="FFFFFF"/>
                 </a:solidFill>
                 <a:latin typeface="Pretendard" pitchFamily="34" charset="0"/>
                 <a:ea typeface="Pretendard" pitchFamily="34" charset="-122"/>
                 <a:cs typeface="Pretendard" pitchFamily="34" charset="-120"/>
               </a:rPr>
-              <a:t>사옥 활용 레이아웃 설계 및 인테리어 비용 산정을 권장합니다.</a:t>
+              <a:t>✓</a:t>
             </a:r>
             <a:endParaRPr lang="en-US" sz="1100" dirty="0"/>
           </a:p>
@@ -2774,37 +2931,642 @@
       </p:sp>
       <p:sp>
         <p:nvSpPr>
-          <p:cNvPr id="11" name="Text 9"/>
-          <p:cNvSpPr/>
-          <p:nvPr/>
-        </p:nvSpPr>
-        <p:spPr>
-          <a:xfrm>
-            <a:off x="566928" y="6382512"/>
-            <a:ext cx="7315200" cy="219456"/>
-          </a:xfrm>
-          <a:prstGeom prst="rect">
-            <a:avLst/>
-          </a:prstGeom>
-          <a:noFill/>
-          <a:ln/>
-        </p:spPr>
-        <p:txBody>
-          <a:bodyPr wrap="square" lIns="0" tIns="0" rIns="0" bIns="0" rtlCol="0" anchor="ctr"/>
+          <p:cNvPr id="14" name="Text 12"/>
+          <p:cNvSpPr/>
+          <p:nvPr/>
+        </p:nvSpPr>
+        <p:spPr>
+          <a:xfrm>
+            <a:off x="1051560" y="2807208"/>
+            <a:ext cx="4683100" cy="722376"/>
+          </a:xfrm>
+          <a:prstGeom prst="rect">
+            <a:avLst/>
+          </a:prstGeom>
+          <a:noFill/>
+          <a:ln/>
+        </p:spPr>
+        <p:txBody>
+          <a:bodyPr wrap="square" rtlCol="0" anchor="ctr"/>
           <a:lstStyle/>
           <a:p>
             <a:pPr indent="0" marL="0">
-              <a:buNone/>
-            </a:pPr>
-            <a:r>
-              <a:rPr lang="en-US" sz="800" dirty="0">
-                <a:solidFill>
-                  <a:srgbClr val="718096"/>
+              <a:lnSpc>
+                <a:spcPct val="110000"/>
+              </a:lnSpc>
+              <a:buNone/>
+            </a:pPr>
+            <a:r>
+              <a:rPr lang="en-US" sz="950" dirty="0">
+                <a:solidFill>
+                  <a:srgbClr val="10161F"/>
                 </a:solidFill>
                 <a:latin typeface="Pretendard" pitchFamily="34" charset="0"/>
                 <a:ea typeface="Pretendard" pitchFamily="34" charset="-122"/>
                 <a:cs typeface="Pretendard" pitchFamily="34" charset="-120"/>
               </a:rPr>
+              <a:t>임대차 원본 계약서 대조 (보증금, 월임대료, 관리비 실입금 내역 및 제소전화해조서)</a:t>
+            </a:r>
+            <a:endParaRPr lang="en-US" sz="950" dirty="0"/>
+          </a:p>
+        </p:txBody>
+      </p:sp>
+      <p:sp>
+        <p:nvSpPr>
+          <p:cNvPr id="15" name="Shape 13"/>
+          <p:cNvSpPr/>
+          <p:nvPr/>
+        </p:nvSpPr>
+        <p:spPr>
+          <a:xfrm>
+            <a:off x="502920" y="3712464"/>
+            <a:ext cx="5368900" cy="868680"/>
+          </a:xfrm>
+          <a:prstGeom prst="rect">
+            <a:avLst/>
+          </a:prstGeom>
+          <a:solidFill>
+            <a:srgbClr val="F7FAFC"/>
+          </a:solidFill>
+          <a:ln w="6350">
+            <a:solidFill>
+              <a:srgbClr val="D9B668"/>
+            </a:solidFill>
+            <a:prstDash val="solid"/>
+          </a:ln>
+        </p:spPr>
+      </p:sp>
+      <p:sp>
+        <p:nvSpPr>
+          <p:cNvPr id="16" name="Shape 14"/>
+          <p:cNvSpPr/>
+          <p:nvPr/>
+        </p:nvSpPr>
+        <p:spPr>
+          <a:xfrm>
+            <a:off x="640080" y="3877056"/>
+            <a:ext cx="320040" cy="320040"/>
+          </a:xfrm>
+          <a:prstGeom prst="rect">
+            <a:avLst/>
+          </a:prstGeom>
+          <a:solidFill>
+            <a:srgbClr val="977024"/>
+          </a:solidFill>
+          <a:ln/>
+        </p:spPr>
+      </p:sp>
+      <p:sp>
+        <p:nvSpPr>
+          <p:cNvPr id="17" name="Text 15"/>
+          <p:cNvSpPr/>
+          <p:nvPr/>
+        </p:nvSpPr>
+        <p:spPr>
+          <a:xfrm>
+            <a:off x="640080" y="3877056"/>
+            <a:ext cx="320040" cy="320040"/>
+          </a:xfrm>
+          <a:prstGeom prst="rect">
+            <a:avLst/>
+          </a:prstGeom>
+          <a:noFill/>
+          <a:ln/>
+        </p:spPr>
+        <p:txBody>
+          <a:bodyPr wrap="square" rtlCol="0" anchor="ctr"/>
+          <a:lstStyle/>
+          <a:p>
+            <a:pPr algn="ctr" indent="0" marL="0">
+              <a:buNone/>
+            </a:pPr>
+            <a:r>
+              <a:rPr lang="en-US" sz="1100" b="1" dirty="0">
+                <a:solidFill>
+                  <a:srgbClr val="FFFFFF"/>
+                </a:solidFill>
+                <a:latin typeface="Pretendard" pitchFamily="34" charset="0"/>
+                <a:ea typeface="Pretendard" pitchFamily="34" charset="-122"/>
+                <a:cs typeface="Pretendard" pitchFamily="34" charset="-120"/>
+              </a:rPr>
+              <a:t>✓</a:t>
+            </a:r>
+            <a:endParaRPr lang="en-US" sz="1100" dirty="0"/>
+          </a:p>
+        </p:txBody>
+      </p:sp>
+      <p:sp>
+        <p:nvSpPr>
+          <p:cNvPr id="18" name="Text 16"/>
+          <p:cNvSpPr/>
+          <p:nvPr/>
+        </p:nvSpPr>
+        <p:spPr>
+          <a:xfrm>
+            <a:off x="1051560" y="3803904"/>
+            <a:ext cx="4683100" cy="722376"/>
+          </a:xfrm>
+          <a:prstGeom prst="rect">
+            <a:avLst/>
+          </a:prstGeom>
+          <a:noFill/>
+          <a:ln/>
+        </p:spPr>
+        <p:txBody>
+          <a:bodyPr wrap="square" rtlCol="0" anchor="ctr"/>
+          <a:lstStyle/>
+          <a:p>
+            <a:pPr indent="0" marL="0">
+              <a:lnSpc>
+                <a:spcPct val="110000"/>
+              </a:lnSpc>
+              <a:buNone/>
+            </a:pPr>
+            <a:r>
+              <a:rPr lang="en-US" sz="950" dirty="0">
+                <a:solidFill>
+                  <a:srgbClr val="10161F"/>
+                </a:solidFill>
+                <a:latin typeface="Pretendard" pitchFamily="34" charset="0"/>
+                <a:ea typeface="Pretendard" pitchFamily="34" charset="-122"/>
+                <a:cs typeface="Pretendard" pitchFamily="34" charset="-120"/>
+              </a:rPr>
+              <a:t>건축물대장상 위반건축물 등재 여부 및 불법 증축·용도변경 이행강제금 납부 이력 점검</a:t>
+            </a:r>
+            <a:endParaRPr lang="en-US" sz="950" dirty="0"/>
+          </a:p>
+        </p:txBody>
+      </p:sp>
+      <p:sp>
+        <p:nvSpPr>
+          <p:cNvPr id="19" name="Shape 17"/>
+          <p:cNvSpPr/>
+          <p:nvPr/>
+        </p:nvSpPr>
+        <p:spPr>
+          <a:xfrm>
+            <a:off x="6191860" y="1719072"/>
+            <a:ext cx="5368900" cy="868680"/>
+          </a:xfrm>
+          <a:prstGeom prst="rect">
+            <a:avLst/>
+          </a:prstGeom>
+          <a:solidFill>
+            <a:srgbClr val="F7FAFC"/>
+          </a:solidFill>
+          <a:ln w="6350">
+            <a:solidFill>
+              <a:srgbClr val="D9B668"/>
+            </a:solidFill>
+            <a:prstDash val="solid"/>
+          </a:ln>
+        </p:spPr>
+      </p:sp>
+      <p:sp>
+        <p:nvSpPr>
+          <p:cNvPr id="20" name="Shape 18"/>
+          <p:cNvSpPr/>
+          <p:nvPr/>
+        </p:nvSpPr>
+        <p:spPr>
+          <a:xfrm>
+            <a:off x="6329020" y="1883664"/>
+            <a:ext cx="320040" cy="320040"/>
+          </a:xfrm>
+          <a:prstGeom prst="rect">
+            <a:avLst/>
+          </a:prstGeom>
+          <a:solidFill>
+            <a:srgbClr val="977024"/>
+          </a:solidFill>
+          <a:ln/>
+        </p:spPr>
+      </p:sp>
+      <p:sp>
+        <p:nvSpPr>
+          <p:cNvPr id="21" name="Text 19"/>
+          <p:cNvSpPr/>
+          <p:nvPr/>
+        </p:nvSpPr>
+        <p:spPr>
+          <a:xfrm>
+            <a:off x="6329020" y="1883664"/>
+            <a:ext cx="320040" cy="320040"/>
+          </a:xfrm>
+          <a:prstGeom prst="rect">
+            <a:avLst/>
+          </a:prstGeom>
+          <a:noFill/>
+          <a:ln/>
+        </p:spPr>
+        <p:txBody>
+          <a:bodyPr wrap="square" rtlCol="0" anchor="ctr"/>
+          <a:lstStyle/>
+          <a:p>
+            <a:pPr algn="ctr" indent="0" marL="0">
+              <a:buNone/>
+            </a:pPr>
+            <a:r>
+              <a:rPr lang="en-US" sz="1100" b="1" dirty="0">
+                <a:solidFill>
+                  <a:srgbClr val="FFFFFF"/>
+                </a:solidFill>
+                <a:latin typeface="Pretendard" pitchFamily="34" charset="0"/>
+                <a:ea typeface="Pretendard" pitchFamily="34" charset="-122"/>
+                <a:cs typeface="Pretendard" pitchFamily="34" charset="-120"/>
+              </a:rPr>
+              <a:t>✓</a:t>
+            </a:r>
+            <a:endParaRPr lang="en-US" sz="1100" dirty="0"/>
+          </a:p>
+        </p:txBody>
+      </p:sp>
+      <p:sp>
+        <p:nvSpPr>
+          <p:cNvPr id="22" name="Text 20"/>
+          <p:cNvSpPr/>
+          <p:nvPr/>
+        </p:nvSpPr>
+        <p:spPr>
+          <a:xfrm>
+            <a:off x="6740500" y="1810512"/>
+            <a:ext cx="4683100" cy="722376"/>
+          </a:xfrm>
+          <a:prstGeom prst="rect">
+            <a:avLst/>
+          </a:prstGeom>
+          <a:noFill/>
+          <a:ln/>
+        </p:spPr>
+        <p:txBody>
+          <a:bodyPr wrap="square" rtlCol="0" anchor="ctr"/>
+          <a:lstStyle/>
+          <a:p>
+            <a:pPr indent="0" marL="0">
+              <a:lnSpc>
+                <a:spcPct val="110000"/>
+              </a:lnSpc>
+              <a:buNone/>
+            </a:pPr>
+            <a:r>
+              <a:rPr lang="en-US" sz="950" dirty="0">
+                <a:solidFill>
+                  <a:srgbClr val="10161F"/>
+                </a:solidFill>
+                <a:latin typeface="Pretendard" pitchFamily="34" charset="0"/>
+                <a:ea typeface="Pretendard" pitchFamily="34" charset="-122"/>
+                <a:cs typeface="Pretendard" pitchFamily="34" charset="-120"/>
+              </a:rPr>
+              <a:t>토지이용계획확인원상 도시계획시설 저촉, 건축선 후퇴, 지구단위계획 특별계획구역 확인</a:t>
+            </a:r>
+            <a:endParaRPr lang="en-US" sz="950" dirty="0"/>
+          </a:p>
+        </p:txBody>
+      </p:sp>
+      <p:sp>
+        <p:nvSpPr>
+          <p:cNvPr id="23" name="Shape 21"/>
+          <p:cNvSpPr/>
+          <p:nvPr/>
+        </p:nvSpPr>
+        <p:spPr>
+          <a:xfrm>
+            <a:off x="6191860" y="2715768"/>
+            <a:ext cx="5368900" cy="868680"/>
+          </a:xfrm>
+          <a:prstGeom prst="rect">
+            <a:avLst/>
+          </a:prstGeom>
+          <a:solidFill>
+            <a:srgbClr val="F7FAFC"/>
+          </a:solidFill>
+          <a:ln w="6350">
+            <a:solidFill>
+              <a:srgbClr val="D9B668"/>
+            </a:solidFill>
+            <a:prstDash val="solid"/>
+          </a:ln>
+        </p:spPr>
+      </p:sp>
+      <p:sp>
+        <p:nvSpPr>
+          <p:cNvPr id="24" name="Shape 22"/>
+          <p:cNvSpPr/>
+          <p:nvPr/>
+        </p:nvSpPr>
+        <p:spPr>
+          <a:xfrm>
+            <a:off x="6329020" y="2880360"/>
+            <a:ext cx="320040" cy="320040"/>
+          </a:xfrm>
+          <a:prstGeom prst="rect">
+            <a:avLst/>
+          </a:prstGeom>
+          <a:solidFill>
+            <a:srgbClr val="977024"/>
+          </a:solidFill>
+          <a:ln/>
+        </p:spPr>
+      </p:sp>
+      <p:sp>
+        <p:nvSpPr>
+          <p:cNvPr id="25" name="Text 23"/>
+          <p:cNvSpPr/>
+          <p:nvPr/>
+        </p:nvSpPr>
+        <p:spPr>
+          <a:xfrm>
+            <a:off x="6329020" y="2880360"/>
+            <a:ext cx="320040" cy="320040"/>
+          </a:xfrm>
+          <a:prstGeom prst="rect">
+            <a:avLst/>
+          </a:prstGeom>
+          <a:noFill/>
+          <a:ln/>
+        </p:spPr>
+        <p:txBody>
+          <a:bodyPr wrap="square" rtlCol="0" anchor="ctr"/>
+          <a:lstStyle/>
+          <a:p>
+            <a:pPr algn="ctr" indent="0" marL="0">
+              <a:buNone/>
+            </a:pPr>
+            <a:r>
+              <a:rPr lang="en-US" sz="1100" b="1" dirty="0">
+                <a:solidFill>
+                  <a:srgbClr val="FFFFFF"/>
+                </a:solidFill>
+                <a:latin typeface="Pretendard" pitchFamily="34" charset="0"/>
+                <a:ea typeface="Pretendard" pitchFamily="34" charset="-122"/>
+                <a:cs typeface="Pretendard" pitchFamily="34" charset="-120"/>
+              </a:rPr>
+              <a:t>✓</a:t>
+            </a:r>
+            <a:endParaRPr lang="en-US" sz="1100" dirty="0"/>
+          </a:p>
+        </p:txBody>
+      </p:sp>
+      <p:sp>
+        <p:nvSpPr>
+          <p:cNvPr id="26" name="Text 24"/>
+          <p:cNvSpPr/>
+          <p:nvPr/>
+        </p:nvSpPr>
+        <p:spPr>
+          <a:xfrm>
+            <a:off x="6740500" y="2807208"/>
+            <a:ext cx="4683100" cy="722376"/>
+          </a:xfrm>
+          <a:prstGeom prst="rect">
+            <a:avLst/>
+          </a:prstGeom>
+          <a:noFill/>
+          <a:ln/>
+        </p:spPr>
+        <p:txBody>
+          <a:bodyPr wrap="square" rtlCol="0" anchor="ctr"/>
+          <a:lstStyle/>
+          <a:p>
+            <a:pPr indent="0" marL="0">
+              <a:lnSpc>
+                <a:spcPct val="110000"/>
+              </a:lnSpc>
+              <a:buNone/>
+            </a:pPr>
+            <a:r>
+              <a:rPr lang="en-US" sz="950" dirty="0">
+                <a:solidFill>
+                  <a:srgbClr val="10161F"/>
+                </a:solidFill>
+                <a:latin typeface="Pretendard" pitchFamily="34" charset="0"/>
+                <a:ea typeface="Pretendard" pitchFamily="34" charset="-122"/>
+                <a:cs typeface="Pretendard" pitchFamily="34" charset="-120"/>
+              </a:rPr>
+              <a:t>기계식 주차기 정기 안전점검 합격증, 승강기 검사필증, 소방 완비증명서 실물 실사</a:t>
+            </a:r>
+            <a:endParaRPr lang="en-US" sz="950" dirty="0"/>
+          </a:p>
+        </p:txBody>
+      </p:sp>
+      <p:sp>
+        <p:nvSpPr>
+          <p:cNvPr id="27" name="Shape 25"/>
+          <p:cNvSpPr/>
+          <p:nvPr/>
+        </p:nvSpPr>
+        <p:spPr>
+          <a:xfrm>
+            <a:off x="6191860" y="3712464"/>
+            <a:ext cx="5368900" cy="868680"/>
+          </a:xfrm>
+          <a:prstGeom prst="rect">
+            <a:avLst/>
+          </a:prstGeom>
+          <a:solidFill>
+            <a:srgbClr val="F7FAFC"/>
+          </a:solidFill>
+          <a:ln w="6350">
+            <a:solidFill>
+              <a:srgbClr val="D9B668"/>
+            </a:solidFill>
+            <a:prstDash val="solid"/>
+          </a:ln>
+        </p:spPr>
+      </p:sp>
+      <p:sp>
+        <p:nvSpPr>
+          <p:cNvPr id="28" name="Shape 26"/>
+          <p:cNvSpPr/>
+          <p:nvPr/>
+        </p:nvSpPr>
+        <p:spPr>
+          <a:xfrm>
+            <a:off x="6329020" y="3877056"/>
+            <a:ext cx="320040" cy="320040"/>
+          </a:xfrm>
+          <a:prstGeom prst="rect">
+            <a:avLst/>
+          </a:prstGeom>
+          <a:solidFill>
+            <a:srgbClr val="977024"/>
+          </a:solidFill>
+          <a:ln/>
+        </p:spPr>
+      </p:sp>
+      <p:sp>
+        <p:nvSpPr>
+          <p:cNvPr id="29" name="Text 27"/>
+          <p:cNvSpPr/>
+          <p:nvPr/>
+        </p:nvSpPr>
+        <p:spPr>
+          <a:xfrm>
+            <a:off x="6329020" y="3877056"/>
+            <a:ext cx="320040" cy="320040"/>
+          </a:xfrm>
+          <a:prstGeom prst="rect">
+            <a:avLst/>
+          </a:prstGeom>
+          <a:noFill/>
+          <a:ln/>
+        </p:spPr>
+        <p:txBody>
+          <a:bodyPr wrap="square" rtlCol="0" anchor="ctr"/>
+          <a:lstStyle/>
+          <a:p>
+            <a:pPr algn="ctr" indent="0" marL="0">
+              <a:buNone/>
+            </a:pPr>
+            <a:r>
+              <a:rPr lang="en-US" sz="1100" b="1" dirty="0">
+                <a:solidFill>
+                  <a:srgbClr val="FFFFFF"/>
+                </a:solidFill>
+                <a:latin typeface="Pretendard" pitchFamily="34" charset="0"/>
+                <a:ea typeface="Pretendard" pitchFamily="34" charset="-122"/>
+                <a:cs typeface="Pretendard" pitchFamily="34" charset="-120"/>
+              </a:rPr>
+              <a:t>✓</a:t>
+            </a:r>
+            <a:endParaRPr lang="en-US" sz="1100" dirty="0"/>
+          </a:p>
+        </p:txBody>
+      </p:sp>
+      <p:sp>
+        <p:nvSpPr>
+          <p:cNvPr id="30" name="Text 28"/>
+          <p:cNvSpPr/>
+          <p:nvPr/>
+        </p:nvSpPr>
+        <p:spPr>
+          <a:xfrm>
+            <a:off x="6740500" y="3803904"/>
+            <a:ext cx="4683100" cy="722376"/>
+          </a:xfrm>
+          <a:prstGeom prst="rect">
+            <a:avLst/>
+          </a:prstGeom>
+          <a:noFill/>
+          <a:ln/>
+        </p:spPr>
+        <p:txBody>
+          <a:bodyPr wrap="square" rtlCol="0" anchor="ctr"/>
+          <a:lstStyle/>
+          <a:p>
+            <a:pPr indent="0" marL="0">
+              <a:lnSpc>
+                <a:spcPct val="110000"/>
+              </a:lnSpc>
+              <a:buNone/>
+            </a:pPr>
+            <a:r>
+              <a:rPr lang="en-US" sz="950" dirty="0">
+                <a:solidFill>
+                  <a:srgbClr val="10161F"/>
+                </a:solidFill>
+                <a:latin typeface="Pretendard" pitchFamily="34" charset="0"/>
+                <a:ea typeface="Pretendard" pitchFamily="34" charset="-122"/>
+                <a:cs typeface="Pretendard" pitchFamily="34" charset="-120"/>
+              </a:rPr>
+              <a:t>정화조 용량 대비 현 업종 적합성 및 하수도 원인자부담금 추가 부과 대상 여부 확인</a:t>
+            </a:r>
+            <a:endParaRPr lang="en-US" sz="950" dirty="0"/>
+          </a:p>
+        </p:txBody>
+      </p:sp>
+      <p:sp>
+        <p:nvSpPr>
+          <p:cNvPr id="31" name="Shape 29"/>
+          <p:cNvSpPr/>
+          <p:nvPr/>
+        </p:nvSpPr>
+        <p:spPr>
+          <a:xfrm>
+            <a:off x="502920" y="5349240"/>
+            <a:ext cx="11057839" cy="457200"/>
+          </a:xfrm>
+          <a:prstGeom prst="rect">
+            <a:avLst/>
+          </a:prstGeom>
+          <a:solidFill>
+            <a:srgbClr val="D9B668"/>
+          </a:solidFill>
+          <a:ln/>
+        </p:spPr>
+      </p:sp>
+      <p:sp>
+        <p:nvSpPr>
+          <p:cNvPr id="32" name="Text 30"/>
+          <p:cNvSpPr/>
+          <p:nvPr/>
+        </p:nvSpPr>
+        <p:spPr>
+          <a:xfrm>
+            <a:off x="685800" y="5422392"/>
+            <a:ext cx="10692079" cy="310896"/>
+          </a:xfrm>
+          <a:prstGeom prst="rect">
+            <a:avLst/>
+          </a:prstGeom>
+          <a:noFill/>
+          <a:ln/>
+        </p:spPr>
+        <p:txBody>
+          <a:bodyPr wrap="square" rtlCol="0" anchor="ctr"/>
+          <a:lstStyle/>
+          <a:p>
+            <a:pPr indent="0" marL="0">
+              <a:buNone/>
+            </a:pPr>
+            <a:r>
+              <a:rPr lang="en-US" sz="950" b="1" dirty="0">
+                <a:solidFill>
+                  <a:srgbClr val="977024"/>
+                </a:solidFill>
+                <a:latin typeface="Pretendard" pitchFamily="34" charset="0"/>
+                <a:ea typeface="Pretendard" pitchFamily="34" charset="-122"/>
+                <a:cs typeface="Pretendard" pitchFamily="34" charset="-120"/>
+              </a:rPr>
+              <a:t>※ 본 체크리스트는 계약 전 매수인의 안전한 자산 인수를 위한 필수 확인 사항이며, 실사(Due Diligence) 결과에 따라 매매 조건 및 잔금 일정이 조정될 수 있습니다.</a:t>
+            </a:r>
+            <a:endParaRPr lang="en-US" sz="950" dirty="0"/>
+          </a:p>
+        </p:txBody>
+      </p:sp>
+      <p:sp>
+        <p:nvSpPr>
+          <p:cNvPr id="33" name="Text 31"/>
+          <p:cNvSpPr/>
+          <p:nvPr/>
+        </p:nvSpPr>
+        <p:spPr>
+          <a:xfrm>
+            <a:off x="502920" y="6382512"/>
+            <a:ext cx="7315200" cy="219456"/>
+          </a:xfrm>
+          <a:prstGeom prst="rect">
+            <a:avLst/>
+          </a:prstGeom>
+          <a:noFill/>
+          <a:ln/>
+        </p:spPr>
+        <p:txBody>
+          <a:bodyPr wrap="square" lIns="0" tIns="0" rIns="0" bIns="0" rtlCol="0" anchor="ctr"/>
+          <a:lstStyle/>
+          <a:p>
+            <a:pPr indent="0" marL="0">
+              <a:buNone/>
+            </a:pPr>
+            <a:r>
+              <a:rPr lang="en-US" sz="800" dirty="0">
+                <a:solidFill>
+                  <a:srgbClr val="718096"/>
+                </a:solidFill>
+                <a:latin typeface="Pretendard" pitchFamily="34" charset="0"/>
+                <a:ea typeface="Pretendard" pitchFamily="34" charset="-122"/>
+                <a:cs typeface="Pretendard" pitchFamily="34" charset="-120"/>
+              </a:rPr>
               <a:t>크리딜   |   </a:t>
             </a:r>
             <a:endParaRPr lang="en-US" sz="800" dirty="0"/>
@@ -2813,13 +3575,13 @@
       </p:sp>
       <p:sp>
         <p:nvSpPr>
-          <p:cNvPr id="12" name="Text 10"/>
-          <p:cNvSpPr/>
-          <p:nvPr/>
-        </p:nvSpPr>
-        <p:spPr>
-          <a:xfrm>
-            <a:off x="10710367" y="6382512"/>
+          <p:cNvPr id="34" name="Text 32"/>
+          <p:cNvSpPr/>
+          <p:nvPr/>
+        </p:nvSpPr>
+        <p:spPr>
+          <a:xfrm>
+            <a:off x="10774375" y="6382512"/>
             <a:ext cx="914400" cy="219456"/>
           </a:xfrm>
           <a:prstGeom prst="rect">
@@ -2861,6 +3623,434 @@
 <file path=ppt/slides/slide11.xml><?xml version="1.0" encoding="utf-8"?>
 <p:sld xmlns:a="http://schemas.openxmlformats.org/drawingml/2006/main" xmlns:r="http://schemas.openxmlformats.org/officeDocument/2006/relationships" xmlns:p="http://schemas.openxmlformats.org/presentationml/2006/main">
   <p:cSld name="Slide 11">
+    <p:bg>
+      <p:bgPr>
+        <a:solidFill>
+          <a:srgbClr val="FFFFFF"/>
+        </a:solidFill>
+      </p:bgPr>
+    </p:bg>
+    <p:spTree>
+      <p:nvGrpSpPr>
+        <p:cNvPr id="1" name=""/>
+        <p:cNvGrpSpPr/>
+        <p:nvPr/>
+      </p:nvGrpSpPr>
+      <p:grpSpPr>
+        <a:xfrm>
+          <a:off x="0" y="0"/>
+          <a:ext cx="0" cy="0"/>
+          <a:chOff x="0" y="0"/>
+          <a:chExt cx="0" cy="0"/>
+        </a:xfrm>
+      </p:grpSpPr>
+      <p:sp>
+        <p:nvSpPr>
+          <p:cNvPr id="2" name="Shape 0"/>
+          <p:cNvSpPr/>
+          <p:nvPr/>
+        </p:nvSpPr>
+        <p:spPr>
+          <a:xfrm>
+            <a:off x="502920" y="457200"/>
+            <a:ext cx="384048" cy="384048"/>
+          </a:xfrm>
+          <a:prstGeom prst="ellipse">
+            <a:avLst/>
+          </a:prstGeom>
+          <a:solidFill>
+            <a:srgbClr val="B98A2E"/>
+          </a:solidFill>
+          <a:ln/>
+        </p:spPr>
+      </p:sp>
+      <p:sp>
+        <p:nvSpPr>
+          <p:cNvPr id="3" name="Text 1"/>
+          <p:cNvSpPr/>
+          <p:nvPr/>
+        </p:nvSpPr>
+        <p:spPr>
+          <a:xfrm>
+            <a:off x="502920" y="457200"/>
+            <a:ext cx="384048" cy="384048"/>
+          </a:xfrm>
+          <a:prstGeom prst="rect">
+            <a:avLst/>
+          </a:prstGeom>
+          <a:noFill/>
+          <a:ln/>
+        </p:spPr>
+        <p:txBody>
+          <a:bodyPr wrap="square" lIns="0" tIns="0" rIns="0" bIns="0" rtlCol="0" anchor="ctr"/>
+          <a:lstStyle/>
+          <a:p>
+            <a:pPr algn="ctr" indent="0" marL="0">
+              <a:buNone/>
+            </a:pPr>
+            <a:r>
+              <a:rPr lang="en-US" sz="1300" b="1" dirty="0">
+                <a:solidFill>
+                  <a:srgbClr val="FFFFFF"/>
+                </a:solidFill>
+                <a:latin typeface="Arial" pitchFamily="34" charset="0"/>
+                <a:ea typeface="Arial" pitchFamily="34" charset="-122"/>
+                <a:cs typeface="Arial" pitchFamily="34" charset="-120"/>
+              </a:rPr>
+              <a:t>11</a:t>
+            </a:r>
+            <a:endParaRPr lang="en-US" sz="1300" dirty="0"/>
+          </a:p>
+        </p:txBody>
+      </p:sp>
+      <p:sp>
+        <p:nvSpPr>
+          <p:cNvPr id="4" name="Text 2"/>
+          <p:cNvSpPr/>
+          <p:nvPr/>
+        </p:nvSpPr>
+        <p:spPr>
+          <a:xfrm>
+            <a:off x="1069848" y="457200"/>
+            <a:ext cx="10490911" cy="182880"/>
+          </a:xfrm>
+          <a:prstGeom prst="rect">
+            <a:avLst/>
+          </a:prstGeom>
+          <a:noFill/>
+          <a:ln/>
+        </p:spPr>
+        <p:txBody>
+          <a:bodyPr wrap="square" lIns="0" tIns="0" rIns="0" bIns="0" rtlCol="0" anchor="ctr"/>
+          <a:lstStyle/>
+          <a:p>
+            <a:pPr indent="0" marL="0">
+              <a:buNone/>
+            </a:pPr>
+            <a:r>
+              <a:rPr lang="en-US" sz="950" b="1" spc="200" kern="0" dirty="0">
+                <a:solidFill>
+                  <a:srgbClr val="B98A2E"/>
+                </a:solidFill>
+                <a:latin typeface="Arial" pitchFamily="34" charset="0"/>
+                <a:ea typeface="Arial" pitchFamily="34" charset="-122"/>
+                <a:cs typeface="Arial" pitchFamily="34" charset="-120"/>
+              </a:rPr>
+              <a:t>Process</a:t>
+            </a:r>
+            <a:endParaRPr lang="en-US" sz="950" dirty="0"/>
+          </a:p>
+        </p:txBody>
+      </p:sp>
+      <p:sp>
+        <p:nvSpPr>
+          <p:cNvPr id="5" name="Text 3"/>
+          <p:cNvSpPr/>
+          <p:nvPr/>
+        </p:nvSpPr>
+        <p:spPr>
+          <a:xfrm>
+            <a:off x="1069848" y="640080"/>
+            <a:ext cx="10490911" cy="365760"/>
+          </a:xfrm>
+          <a:prstGeom prst="rect">
+            <a:avLst/>
+          </a:prstGeom>
+          <a:noFill/>
+          <a:ln/>
+        </p:spPr>
+        <p:txBody>
+          <a:bodyPr wrap="square" lIns="0" tIns="0" rIns="0" bIns="0" rtlCol="0" anchor="ctr"/>
+          <a:lstStyle/>
+          <a:p>
+            <a:pPr indent="0" marL="0">
+              <a:buNone/>
+            </a:pPr>
+            <a:r>
+              <a:rPr lang="en-US" sz="2300" b="1" dirty="0">
+                <a:solidFill>
+                  <a:srgbClr val="10161F"/>
+                </a:solidFill>
+                <a:latin typeface="Pretendard" pitchFamily="34" charset="0"/>
+                <a:ea typeface="Pretendard" pitchFamily="34" charset="-122"/>
+                <a:cs typeface="Pretendard" pitchFamily="34" charset="-120"/>
+              </a:rPr>
+              <a:t>진행 절차</a:t>
+            </a:r>
+            <a:endParaRPr lang="en-US" sz="2300" dirty="0"/>
+          </a:p>
+        </p:txBody>
+      </p:sp>
+      <p:sp>
+        <p:nvSpPr>
+          <p:cNvPr id="6" name="Shape 4"/>
+          <p:cNvSpPr/>
+          <p:nvPr/>
+        </p:nvSpPr>
+        <p:spPr>
+          <a:xfrm>
+            <a:off x="502920" y="1572768"/>
+            <a:ext cx="11057839" cy="3200400"/>
+          </a:xfrm>
+          <a:prstGeom prst="roundRect">
+            <a:avLst>
+              <a:gd name="adj" fmla="val 1714"/>
+            </a:avLst>
+          </a:prstGeom>
+          <a:solidFill>
+            <a:srgbClr val="F7FAFC"/>
+          </a:solidFill>
+          <a:ln w="6350">
+            <a:solidFill>
+              <a:srgbClr val="CBD5E0"/>
+            </a:solidFill>
+            <a:prstDash val="solid"/>
+          </a:ln>
+        </p:spPr>
+      </p:sp>
+      <p:sp>
+        <p:nvSpPr>
+          <p:cNvPr id="7" name="Shape 5"/>
+          <p:cNvSpPr/>
+          <p:nvPr/>
+        </p:nvSpPr>
+        <p:spPr>
+          <a:xfrm>
+            <a:off x="722376" y="1792224"/>
+            <a:ext cx="438912" cy="438912"/>
+          </a:xfrm>
+          <a:prstGeom prst="ellipse">
+            <a:avLst/>
+          </a:prstGeom>
+          <a:solidFill>
+            <a:srgbClr val="B98A2E"/>
+          </a:solidFill>
+          <a:ln/>
+        </p:spPr>
+      </p:sp>
+      <p:sp>
+        <p:nvSpPr>
+          <p:cNvPr id="8" name="Text 6"/>
+          <p:cNvSpPr/>
+          <p:nvPr/>
+        </p:nvSpPr>
+        <p:spPr>
+          <a:xfrm>
+            <a:off x="722376" y="1792224"/>
+            <a:ext cx="438912" cy="438912"/>
+          </a:xfrm>
+          <a:prstGeom prst="rect">
+            <a:avLst/>
+          </a:prstGeom>
+          <a:noFill/>
+          <a:ln/>
+        </p:spPr>
+        <p:txBody>
+          <a:bodyPr wrap="square" lIns="0" tIns="0" rIns="0" bIns="0" rtlCol="0" anchor="ctr"/>
+          <a:lstStyle/>
+          <a:p>
+            <a:pPr algn="ctr" indent="0" marL="0">
+              <a:buNone/>
+            </a:pPr>
+            <a:r>
+              <a:rPr lang="en-US" sz="1400" b="1" dirty="0">
+                <a:solidFill>
+                  <a:srgbClr val="FFFFFF"/>
+                </a:solidFill>
+                <a:latin typeface="Arial" pitchFamily="34" charset="0"/>
+                <a:ea typeface="Arial" pitchFamily="34" charset="-122"/>
+                <a:cs typeface="Arial" pitchFamily="34" charset="-120"/>
+              </a:rPr>
+              <a:t>01</a:t>
+            </a:r>
+            <a:endParaRPr lang="en-US" sz="1400" dirty="0"/>
+          </a:p>
+        </p:txBody>
+      </p:sp>
+      <p:sp>
+        <p:nvSpPr>
+          <p:cNvPr id="9" name="Text 7"/>
+          <p:cNvSpPr/>
+          <p:nvPr/>
+        </p:nvSpPr>
+        <p:spPr>
+          <a:xfrm>
+            <a:off x="722376" y="2304288"/>
+            <a:ext cx="10618927" cy="365760"/>
+          </a:xfrm>
+          <a:prstGeom prst="rect">
+            <a:avLst/>
+          </a:prstGeom>
+          <a:noFill/>
+          <a:ln/>
+        </p:spPr>
+        <p:txBody>
+          <a:bodyPr wrap="square" rtlCol="0" anchor="ctr"/>
+          <a:lstStyle/>
+          <a:p>
+            <a:pPr indent="0" marL="0">
+              <a:buNone/>
+            </a:pPr>
+            <a:r>
+              <a:rPr lang="en-US" sz="1600" b="1" dirty="0">
+                <a:solidFill>
+                  <a:srgbClr val="10161F"/>
+                </a:solidFill>
+                <a:latin typeface="Pretendard" pitchFamily="34" charset="0"/>
+                <a:ea typeface="Pretendard" pitchFamily="34" charset="-122"/>
+                <a:cs typeface="Pretendard" pitchFamily="34" charset="-120"/>
+              </a:rPr>
+              <a:t>1단계</a:t>
+            </a:r>
+            <a:endParaRPr lang="en-US" sz="1600" dirty="0"/>
+          </a:p>
+        </p:txBody>
+      </p:sp>
+      <p:sp>
+        <p:nvSpPr>
+          <p:cNvPr id="10" name="Text 8"/>
+          <p:cNvSpPr/>
+          <p:nvPr/>
+        </p:nvSpPr>
+        <p:spPr>
+          <a:xfrm>
+            <a:off x="722376" y="2761488"/>
+            <a:ext cx="10618927" cy="1828800"/>
+          </a:xfrm>
+          <a:prstGeom prst="rect">
+            <a:avLst/>
+          </a:prstGeom>
+          <a:noFill/>
+          <a:ln/>
+        </p:spPr>
+        <p:txBody>
+          <a:bodyPr wrap="square" rtlCol="0" anchor="t"/>
+          <a:lstStyle/>
+          <a:p>
+            <a:pPr indent="0" marL="0">
+              <a:buNone/>
+            </a:pPr>
+            <a:r>
+              <a:rPr lang="en-US" sz="1100" dirty="0">
+                <a:solidFill>
+                  <a:srgbClr val="10161F"/>
+                </a:solidFill>
+                <a:latin typeface="Pretendard" pitchFamily="34" charset="0"/>
+                <a:ea typeface="Pretendard" pitchFamily="34" charset="-122"/>
+                <a:cs typeface="Pretendard" pitchFamily="34" charset="-120"/>
+              </a:rPr>
+              <a:t>사옥 활용 레이아웃 설계 및 인테리어 비용 산정을 권장</a:t>
+            </a:r>
+            <a:endParaRPr lang="en-US" sz="1100" dirty="0"/>
+          </a:p>
+          <a:p>
+            <a:pPr indent="0" marL="0">
+              <a:buNone/>
+            </a:pPr>
+            <a:r>
+              <a:rPr lang="en-US" sz="1100" dirty="0">
+                <a:solidFill>
+                  <a:srgbClr val="10161F"/>
+                </a:solidFill>
+                <a:latin typeface="Pretendard" pitchFamily="34" charset="0"/>
+                <a:ea typeface="Pretendard" pitchFamily="34" charset="-122"/>
+                <a:cs typeface="Pretendard" pitchFamily="34" charset="-120"/>
+              </a:rPr>
+              <a:t>사옥 활용 레이아웃 설계 및 인테리어 비용 산정을 권장합니다.</a:t>
+            </a:r>
+            <a:endParaRPr lang="en-US" sz="1100" dirty="0"/>
+          </a:p>
+        </p:txBody>
+      </p:sp>
+      <p:sp>
+        <p:nvSpPr>
+          <p:cNvPr id="11" name="Text 9"/>
+          <p:cNvSpPr/>
+          <p:nvPr/>
+        </p:nvSpPr>
+        <p:spPr>
+          <a:xfrm>
+            <a:off x="502920" y="6382512"/>
+            <a:ext cx="7315200" cy="219456"/>
+          </a:xfrm>
+          <a:prstGeom prst="rect">
+            <a:avLst/>
+          </a:prstGeom>
+          <a:noFill/>
+          <a:ln/>
+        </p:spPr>
+        <p:txBody>
+          <a:bodyPr wrap="square" lIns="0" tIns="0" rIns="0" bIns="0" rtlCol="0" anchor="ctr"/>
+          <a:lstStyle/>
+          <a:p>
+            <a:pPr indent="0" marL="0">
+              <a:buNone/>
+            </a:pPr>
+            <a:r>
+              <a:rPr lang="en-US" sz="800" dirty="0">
+                <a:solidFill>
+                  <a:srgbClr val="718096"/>
+                </a:solidFill>
+                <a:latin typeface="Pretendard" pitchFamily="34" charset="0"/>
+                <a:ea typeface="Pretendard" pitchFamily="34" charset="-122"/>
+                <a:cs typeface="Pretendard" pitchFamily="34" charset="-120"/>
+              </a:rPr>
+              <a:t>크리딜   |   </a:t>
+            </a:r>
+            <a:endParaRPr lang="en-US" sz="800" dirty="0"/>
+          </a:p>
+        </p:txBody>
+      </p:sp>
+      <p:sp>
+        <p:nvSpPr>
+          <p:cNvPr id="12" name="Text 10"/>
+          <p:cNvSpPr/>
+          <p:nvPr/>
+        </p:nvSpPr>
+        <p:spPr>
+          <a:xfrm>
+            <a:off x="10774375" y="6382512"/>
+            <a:ext cx="914400" cy="219456"/>
+          </a:xfrm>
+          <a:prstGeom prst="rect">
+            <a:avLst/>
+          </a:prstGeom>
+          <a:noFill/>
+          <a:ln/>
+        </p:spPr>
+        <p:txBody>
+          <a:bodyPr wrap="square" lIns="0" tIns="0" rIns="0" bIns="0" rtlCol="0" anchor="ctr"/>
+          <a:lstStyle/>
+          <a:p>
+            <a:pPr algn="r" indent="0" marL="0">
+              <a:buNone/>
+            </a:pPr>
+            <a:r>
+              <a:rPr lang="en-US" sz="900" b="1" dirty="0">
+                <a:solidFill>
+                  <a:srgbClr val="B98A2E"/>
+                </a:solidFill>
+                <a:latin typeface="Arial" pitchFamily="34" charset="0"/>
+                <a:ea typeface="Arial" pitchFamily="34" charset="-122"/>
+                <a:cs typeface="Arial" pitchFamily="34" charset="-120"/>
+              </a:rPr>
+              <a:t>11</a:t>
+            </a:r>
+            <a:endParaRPr lang="en-US" sz="900" dirty="0"/>
+          </a:p>
+        </p:txBody>
+      </p:sp>
+    </p:spTree>
+  </p:cSld>
+  <p:clrMapOvr>
+    <a:masterClrMapping/>
+  </p:clrMapOvr>
+</p:sld>
+</file>
+
+<file path=ppt/slides/slide12.xml><?xml version="1.0" encoding="utf-8"?>
+<p:sld xmlns:a="http://schemas.openxmlformats.org/drawingml/2006/main" xmlns:r="http://schemas.openxmlformats.org/officeDocument/2006/relationships" xmlns:p="http://schemas.openxmlformats.org/presentationml/2006/main">
+  <p:cSld name="Slide 12">
     <p:bg>
       <p:bgPr>
         <a:solidFill>
@@ -2890,7 +4080,7 @@
         </p:nvSpPr>
         <p:spPr>
           <a:xfrm>
-            <a:off x="566928" y="457200"/>
+            <a:off x="502920" y="457200"/>
             <a:ext cx="384048" cy="384048"/>
           </a:xfrm>
           <a:prstGeom prst="ellipse">
@@ -2910,7 +4100,7 @@
         </p:nvSpPr>
         <p:spPr>
           <a:xfrm>
-            <a:off x="566928" y="457200"/>
+            <a:off x="502920" y="457200"/>
             <a:ext cx="384048" cy="384048"/>
           </a:xfrm>
           <a:prstGeom prst="rect">
@@ -2935,7 +4125,7 @@
                 <a:ea typeface="Arial" pitchFamily="34" charset="-122"/>
                 <a:cs typeface="Arial" pitchFamily="34" charset="-120"/>
               </a:rPr>
-              <a:t>11</a:t>
+              <a:t>12</a:t>
             </a:r>
             <a:endParaRPr lang="en-US" sz="1300" dirty="0"/>
           </a:p>
@@ -2949,7 +4139,7 @@
         </p:nvSpPr>
         <p:spPr>
           <a:xfrm>
-            <a:off x="1133856" y="457200"/>
+            <a:off x="1069848" y="457200"/>
             <a:ext cx="10490911" cy="182880"/>
           </a:xfrm>
           <a:prstGeom prst="rect">
@@ -2988,7 +4178,7 @@
         </p:nvSpPr>
         <p:spPr>
           <a:xfrm>
-            <a:off x="1133856" y="658368"/>
+            <a:off x="1069848" y="658368"/>
             <a:ext cx="10490911" cy="420624"/>
           </a:xfrm>
           <a:prstGeom prst="rect">
@@ -3027,7 +4217,7 @@
         </p:nvSpPr>
         <p:spPr>
           <a:xfrm>
-            <a:off x="566928" y="1463040"/>
+            <a:off x="502920" y="1463040"/>
             <a:ext cx="3588410" cy="658368"/>
           </a:xfrm>
           <a:prstGeom prst="roundRect">
@@ -3049,7 +4239,7 @@
         </p:nvSpPr>
         <p:spPr>
           <a:xfrm>
-            <a:off x="676656" y="1572768"/>
+            <a:off x="612648" y="1572768"/>
             <a:ext cx="438912" cy="438912"/>
           </a:xfrm>
           <a:prstGeom prst="ellipse">
@@ -3069,7 +4259,7 @@
         </p:nvSpPr>
         <p:spPr>
           <a:xfrm>
-            <a:off x="676656" y="1572768"/>
+            <a:off x="612648" y="1572768"/>
             <a:ext cx="438912" cy="438912"/>
           </a:xfrm>
           <a:prstGeom prst="rect">
@@ -3108,7 +4298,7 @@
         </p:nvSpPr>
         <p:spPr>
           <a:xfrm>
-            <a:off x="1225296" y="1554480"/>
+            <a:off x="1161288" y="1554480"/>
             <a:ext cx="2820314" cy="237744"/>
           </a:xfrm>
           <a:prstGeom prst="rect">
@@ -3147,7 +4337,7 @@
         </p:nvSpPr>
         <p:spPr>
           <a:xfrm>
-            <a:off x="1225296" y="1792224"/>
+            <a:off x="1161288" y="1792224"/>
             <a:ext cx="2820314" cy="256032"/>
           </a:xfrm>
           <a:prstGeom prst="rect">
@@ -3186,7 +4376,7 @@
         </p:nvSpPr>
         <p:spPr>
           <a:xfrm>
-            <a:off x="4155338" y="1600200"/>
+            <a:off x="4091330" y="1600200"/>
             <a:ext cx="146304" cy="384048"/>
           </a:xfrm>
           <a:prstGeom prst="rect">
@@ -3225,7 +4415,7 @@
         </p:nvSpPr>
         <p:spPr>
           <a:xfrm>
-            <a:off x="4301642" y="1463040"/>
+            <a:off x="4237634" y="1463040"/>
             <a:ext cx="3588410" cy="658368"/>
           </a:xfrm>
           <a:prstGeom prst="roundRect">
@@ -3247,7 +4437,7 @@
         </p:nvSpPr>
         <p:spPr>
           <a:xfrm>
-            <a:off x="4411370" y="1572768"/>
+            <a:off x="4347362" y="1572768"/>
             <a:ext cx="438912" cy="438912"/>
           </a:xfrm>
           <a:prstGeom prst="ellipse">
@@ -3267,7 +4457,7 @@
         </p:nvSpPr>
         <p:spPr>
           <a:xfrm>
-            <a:off x="4411370" y="1572768"/>
+            <a:off x="4347362" y="1572768"/>
             <a:ext cx="438912" cy="438912"/>
           </a:xfrm>
           <a:prstGeom prst="rect">
@@ -3306,7 +4496,7 @@
         </p:nvSpPr>
         <p:spPr>
           <a:xfrm>
-            <a:off x="4960010" y="1554480"/>
+            <a:off x="4896002" y="1554480"/>
             <a:ext cx="2820314" cy="237744"/>
           </a:xfrm>
           <a:prstGeom prst="rect">
@@ -3345,7 +4535,7 @@
         </p:nvSpPr>
         <p:spPr>
           <a:xfrm>
-            <a:off x="4960010" y="1792224"/>
+            <a:off x="4896002" y="1792224"/>
             <a:ext cx="2820314" cy="256032"/>
           </a:xfrm>
           <a:prstGeom prst="rect">
@@ -3384,7 +4574,7 @@
         </p:nvSpPr>
         <p:spPr>
           <a:xfrm>
-            <a:off x="7890053" y="1600200"/>
+            <a:off x="7826045" y="1600200"/>
             <a:ext cx="146304" cy="384048"/>
           </a:xfrm>
           <a:prstGeom prst="rect">
@@ -3423,7 +4613,7 @@
         </p:nvSpPr>
         <p:spPr>
           <a:xfrm>
-            <a:off x="8036357" y="1463040"/>
+            <a:off x="7972349" y="1463040"/>
             <a:ext cx="3588410" cy="658368"/>
           </a:xfrm>
           <a:prstGeom prst="roundRect">
@@ -3445,7 +4635,7 @@
         </p:nvSpPr>
         <p:spPr>
           <a:xfrm>
-            <a:off x="8146085" y="1572768"/>
+            <a:off x="8082077" y="1572768"/>
             <a:ext cx="438912" cy="438912"/>
           </a:xfrm>
           <a:prstGeom prst="ellipse">
@@ -3465,7 +4655,7 @@
         </p:nvSpPr>
         <p:spPr>
           <a:xfrm>
-            <a:off x="8146085" y="1572768"/>
+            <a:off x="8082077" y="1572768"/>
             <a:ext cx="438912" cy="438912"/>
           </a:xfrm>
           <a:prstGeom prst="rect">
@@ -3504,7 +4694,7 @@
         </p:nvSpPr>
         <p:spPr>
           <a:xfrm>
-            <a:off x="8694725" y="1554480"/>
+            <a:off x="8630717" y="1554480"/>
             <a:ext cx="2820314" cy="237744"/>
           </a:xfrm>
           <a:prstGeom prst="rect">
@@ -3543,7 +4733,7 @@
         </p:nvSpPr>
         <p:spPr>
           <a:xfrm>
-            <a:off x="8694725" y="1792224"/>
+            <a:off x="8630717" y="1792224"/>
             <a:ext cx="2820314" cy="256032"/>
           </a:xfrm>
           <a:prstGeom prst="rect">
@@ -3582,7 +4772,7 @@
         </p:nvSpPr>
         <p:spPr>
           <a:xfrm>
-            <a:off x="566928" y="2395728"/>
+            <a:off x="502920" y="2395728"/>
             <a:ext cx="5486400" cy="237744"/>
           </a:xfrm>
           <a:prstGeom prst="rect">
@@ -3621,7 +4811,7 @@
         </p:nvSpPr>
         <p:spPr>
           <a:xfrm>
-            <a:off x="566928" y="2724912"/>
+            <a:off x="502920" y="2724912"/>
             <a:ext cx="1280160" cy="292608"/>
           </a:xfrm>
           <a:prstGeom prst="roundRect">
@@ -3643,7 +4833,7 @@
         </p:nvSpPr>
         <p:spPr>
           <a:xfrm>
-            <a:off x="566928" y="2724912"/>
+            <a:off x="502920" y="2724912"/>
             <a:ext cx="1280160" cy="292608"/>
           </a:xfrm>
           <a:prstGeom prst="rect">
@@ -3682,7 +4872,7 @@
         </p:nvSpPr>
         <p:spPr>
           <a:xfrm>
-            <a:off x="1993392" y="2706624"/>
+            <a:off x="1929384" y="2706624"/>
             <a:ext cx="3840480" cy="329184"/>
           </a:xfrm>
           <a:prstGeom prst="rect">
@@ -3721,7 +4911,7 @@
         </p:nvSpPr>
         <p:spPr>
           <a:xfrm>
-            <a:off x="566928" y="3200400"/>
+            <a:off x="502920" y="3127248"/>
             <a:ext cx="1280160" cy="292608"/>
           </a:xfrm>
           <a:prstGeom prst="roundRect">
@@ -3743,7 +4933,7 @@
         </p:nvSpPr>
         <p:spPr>
           <a:xfrm>
-            <a:off x="566928" y="3200400"/>
+            <a:off x="502920" y="3127248"/>
             <a:ext cx="1280160" cy="292608"/>
           </a:xfrm>
           <a:prstGeom prst="rect">
@@ -3782,7 +4972,7 @@
         </p:nvSpPr>
         <p:spPr>
           <a:xfrm>
-            <a:off x="1993392" y="3182112"/>
+            <a:off x="1929384" y="3108960"/>
             <a:ext cx="3840480" cy="329184"/>
           </a:xfrm>
           <a:prstGeom prst="rect">
@@ -3821,7 +5011,7 @@
         </p:nvSpPr>
         <p:spPr>
           <a:xfrm>
-            <a:off x="566928" y="3675888"/>
+            <a:off x="502920" y="3529584"/>
             <a:ext cx="1280160" cy="292608"/>
           </a:xfrm>
           <a:prstGeom prst="roundRect">
@@ -3843,7 +5033,7 @@
         </p:nvSpPr>
         <p:spPr>
           <a:xfrm>
-            <a:off x="566928" y="3675888"/>
+            <a:off x="502920" y="3529584"/>
             <a:ext cx="1280160" cy="292608"/>
           </a:xfrm>
           <a:prstGeom prst="rect">
@@ -3882,7 +5072,7 @@
         </p:nvSpPr>
         <p:spPr>
           <a:xfrm>
-            <a:off x="1993392" y="3657600"/>
+            <a:off x="1929384" y="3511296"/>
             <a:ext cx="3840480" cy="329184"/>
           </a:xfrm>
           <a:prstGeom prst="rect">
@@ -3921,7 +5111,7 @@
         </p:nvSpPr>
         <p:spPr>
           <a:xfrm>
-            <a:off x="566928" y="4151376"/>
+            <a:off x="502920" y="3931920"/>
             <a:ext cx="1280160" cy="292608"/>
           </a:xfrm>
           <a:prstGeom prst="roundRect">
@@ -3943,7 +5133,7 @@
         </p:nvSpPr>
         <p:spPr>
           <a:xfrm>
-            <a:off x="566928" y="4151376"/>
+            <a:off x="502920" y="3931920"/>
             <a:ext cx="1280160" cy="292608"/>
           </a:xfrm>
           <a:prstGeom prst="rect">
@@ -3982,7 +5172,7 @@
         </p:nvSpPr>
         <p:spPr>
           <a:xfrm>
-            <a:off x="1993392" y="4133088"/>
+            <a:off x="1929384" y="3913632"/>
             <a:ext cx="3840480" cy="329184"/>
           </a:xfrm>
           <a:prstGeom prst="rect">
@@ -4021,7 +5211,7 @@
         </p:nvSpPr>
         <p:spPr>
           <a:xfrm>
-            <a:off x="566928" y="4626864"/>
+            <a:off x="502920" y="4334256"/>
             <a:ext cx="1280160" cy="292608"/>
           </a:xfrm>
           <a:prstGeom prst="roundRect">
@@ -4043,7 +5233,7 @@
         </p:nvSpPr>
         <p:spPr>
           <a:xfrm>
-            <a:off x="566928" y="4626864"/>
+            <a:off x="502920" y="4334256"/>
             <a:ext cx="1280160" cy="292608"/>
           </a:xfrm>
           <a:prstGeom prst="rect">
@@ -4082,7 +5272,7 @@
         </p:nvSpPr>
         <p:spPr>
           <a:xfrm>
-            <a:off x="1993392" y="4608576"/>
+            <a:off x="1929384" y="4315968"/>
             <a:ext cx="3840480" cy="329184"/>
           </a:xfrm>
           <a:prstGeom prst="rect">
@@ -4224,7 +5414,7 @@
         </p:nvSpPr>
         <p:spPr>
           <a:xfrm>
-            <a:off x="566928" y="5760720"/>
+            <a:off x="502920" y="5760720"/>
             <a:ext cx="11057839" cy="457200"/>
           </a:xfrm>
           <a:prstGeom prst="rect">
@@ -4244,7 +5434,7 @@
         </p:nvSpPr>
         <p:spPr>
           <a:xfrm>
-            <a:off x="749808" y="5806440"/>
+            <a:off x="685800" y="5806440"/>
             <a:ext cx="10692079" cy="365760"/>
           </a:xfrm>
           <a:prstGeom prst="rect">
@@ -4283,7 +5473,7 @@
         </p:nvSpPr>
         <p:spPr>
           <a:xfrm>
-            <a:off x="566928" y="6382512"/>
+            <a:off x="502920" y="6382512"/>
             <a:ext cx="7315200" cy="219456"/>
           </a:xfrm>
           <a:prstGeom prst="rect">
@@ -4322,7 +5512,7 @@
         </p:nvSpPr>
         <p:spPr>
           <a:xfrm>
-            <a:off x="10710367" y="6382512"/>
+            <a:off x="10774375" y="6382512"/>
             <a:ext cx="914400" cy="219456"/>
           </a:xfrm>
           <a:prstGeom prst="rect">
@@ -4347,7 +5537,7 @@
                 <a:ea typeface="Arial" pitchFamily="34" charset="-122"/>
                 <a:cs typeface="Arial" pitchFamily="34" charset="-120"/>
               </a:rPr>
-              <a:t>11</a:t>
+              <a:t>12</a:t>
             </a:r>
             <a:endParaRPr lang="en-US" sz="900" dirty="0"/>
           </a:p>
@@ -4393,7 +5583,7 @@
         </p:nvSpPr>
         <p:spPr>
           <a:xfrm>
-            <a:off x="566928" y="457200"/>
+            <a:off x="502920" y="457200"/>
             <a:ext cx="384048" cy="384048"/>
           </a:xfrm>
           <a:prstGeom prst="ellipse">
@@ -4413,7 +5603,7 @@
         </p:nvSpPr>
         <p:spPr>
           <a:xfrm>
-            <a:off x="566928" y="457200"/>
+            <a:off x="502920" y="457200"/>
             <a:ext cx="384048" cy="384048"/>
           </a:xfrm>
           <a:prstGeom prst="rect">
@@ -4452,7 +5642,7 @@
         </p:nvSpPr>
         <p:spPr>
           <a:xfrm>
-            <a:off x="1133856" y="457200"/>
+            <a:off x="1069848" y="457200"/>
             <a:ext cx="10490911" cy="182880"/>
           </a:xfrm>
           <a:prstGeom prst="rect">
@@ -4491,7 +5681,7 @@
         </p:nvSpPr>
         <p:spPr>
           <a:xfrm>
-            <a:off x="1133856" y="640080"/>
+            <a:off x="1069848" y="640080"/>
             <a:ext cx="10490911" cy="365760"/>
           </a:xfrm>
           <a:prstGeom prst="rect">
@@ -4530,7 +5720,7 @@
         </p:nvSpPr>
         <p:spPr>
           <a:xfrm>
-            <a:off x="566928" y="1188720"/>
+            <a:off x="502920" y="1188720"/>
             <a:ext cx="11057839" cy="457200"/>
           </a:xfrm>
           <a:prstGeom prst="rect">
@@ -4569,7 +5759,7 @@
         </p:nvSpPr>
         <p:spPr>
           <a:xfrm>
-            <a:off x="566928" y="1691640"/>
+            <a:off x="502920" y="1691640"/>
             <a:ext cx="11057839" cy="0"/>
           </a:xfrm>
           <a:prstGeom prst="line">
@@ -4592,7 +5782,7 @@
         </p:nvSpPr>
         <p:spPr>
           <a:xfrm>
-            <a:off x="566928" y="1965960"/>
+            <a:off x="502920" y="1965960"/>
             <a:ext cx="2641016" cy="960120"/>
           </a:xfrm>
           <a:prstGeom prst="roundRect">
@@ -4619,7 +5809,7 @@
         </p:nvSpPr>
         <p:spPr>
           <a:xfrm>
-            <a:off x="731520" y="2093976"/>
+            <a:off x="667512" y="2093976"/>
             <a:ext cx="2311832" cy="201168"/>
           </a:xfrm>
           <a:prstGeom prst="rect">
@@ -4658,7 +5848,7 @@
         </p:nvSpPr>
         <p:spPr>
           <a:xfrm>
-            <a:off x="731520" y="2313432"/>
+            <a:off x="667512" y="2313432"/>
             <a:ext cx="2311832" cy="274320"/>
           </a:xfrm>
           <a:prstGeom prst="rect">
@@ -4699,7 +5889,7 @@
         </p:nvSpPr>
         <p:spPr>
           <a:xfrm>
-            <a:off x="3372536" y="1965960"/>
+            <a:off x="3308528" y="1965960"/>
             <a:ext cx="2641016" cy="960120"/>
           </a:xfrm>
           <a:prstGeom prst="roundRect">
@@ -4726,7 +5916,7 @@
         </p:nvSpPr>
         <p:spPr>
           <a:xfrm>
-            <a:off x="3537128" y="2093976"/>
+            <a:off x="3473120" y="2093976"/>
             <a:ext cx="2311832" cy="201168"/>
           </a:xfrm>
           <a:prstGeom prst="rect">
@@ -4765,7 +5955,7 @@
         </p:nvSpPr>
         <p:spPr>
           <a:xfrm>
-            <a:off x="3537128" y="2313432"/>
+            <a:off x="3473120" y="2313432"/>
             <a:ext cx="2311832" cy="274320"/>
           </a:xfrm>
           <a:prstGeom prst="rect">
@@ -4806,7 +5996,7 @@
         </p:nvSpPr>
         <p:spPr>
           <a:xfrm>
-            <a:off x="6178144" y="1965960"/>
+            <a:off x="6114136" y="1965960"/>
             <a:ext cx="2641016" cy="960120"/>
           </a:xfrm>
           <a:prstGeom prst="roundRect">
@@ -4833,7 +6023,7 @@
         </p:nvSpPr>
         <p:spPr>
           <a:xfrm>
-            <a:off x="6342736" y="2093976"/>
+            <a:off x="6278728" y="2093976"/>
             <a:ext cx="2311832" cy="201168"/>
           </a:xfrm>
           <a:prstGeom prst="rect">
@@ -4872,7 +6062,7 @@
         </p:nvSpPr>
         <p:spPr>
           <a:xfrm>
-            <a:off x="6342736" y="2313432"/>
+            <a:off x="6278728" y="2313432"/>
             <a:ext cx="2311832" cy="274320"/>
           </a:xfrm>
           <a:prstGeom prst="rect">
@@ -4913,7 +6103,7 @@
         </p:nvSpPr>
         <p:spPr>
           <a:xfrm>
-            <a:off x="8983751" y="1965960"/>
+            <a:off x="8919743" y="1965960"/>
             <a:ext cx="2641016" cy="960120"/>
           </a:xfrm>
           <a:prstGeom prst="roundRect">
@@ -4940,7 +6130,7 @@
         </p:nvSpPr>
         <p:spPr>
           <a:xfrm>
-            <a:off x="9148343" y="2093976"/>
+            <a:off x="9084335" y="2093976"/>
             <a:ext cx="2311832" cy="201168"/>
           </a:xfrm>
           <a:prstGeom prst="rect">
@@ -4979,7 +6169,7 @@
         </p:nvSpPr>
         <p:spPr>
           <a:xfrm>
-            <a:off x="9148343" y="2313432"/>
+            <a:off x="9084335" y="2313432"/>
             <a:ext cx="2311832" cy="274320"/>
           </a:xfrm>
           <a:prstGeom prst="rect">
@@ -5020,7 +6210,7 @@
         </p:nvSpPr>
         <p:spPr>
           <a:xfrm>
-            <a:off x="566928" y="3090672"/>
+            <a:off x="502920" y="3090672"/>
             <a:ext cx="2641016" cy="960120"/>
           </a:xfrm>
           <a:prstGeom prst="roundRect">
@@ -5047,7 +6237,7 @@
         </p:nvSpPr>
         <p:spPr>
           <a:xfrm>
-            <a:off x="731520" y="3218688"/>
+            <a:off x="667512" y="3218688"/>
             <a:ext cx="2311832" cy="201168"/>
           </a:xfrm>
           <a:prstGeom prst="rect">
@@ -5086,7 +6276,7 @@
         </p:nvSpPr>
         <p:spPr>
           <a:xfrm>
-            <a:off x="731520" y="3438144"/>
+            <a:off x="667512" y="3438144"/>
             <a:ext cx="2311832" cy="274320"/>
           </a:xfrm>
           <a:prstGeom prst="rect">
@@ -5127,7 +6317,7 @@
         </p:nvSpPr>
         <p:spPr>
           <a:xfrm>
-            <a:off x="3372536" y="3090672"/>
+            <a:off x="3308528" y="3090672"/>
             <a:ext cx="2641016" cy="960120"/>
           </a:xfrm>
           <a:prstGeom prst="roundRect">
@@ -5154,7 +6344,7 @@
         </p:nvSpPr>
         <p:spPr>
           <a:xfrm>
-            <a:off x="3537128" y="3218688"/>
+            <a:off x="3473120" y="3218688"/>
             <a:ext cx="2311832" cy="201168"/>
           </a:xfrm>
           <a:prstGeom prst="rect">
@@ -5193,7 +6383,7 @@
         </p:nvSpPr>
         <p:spPr>
           <a:xfrm>
-            <a:off x="3537128" y="3438144"/>
+            <a:off x="3473120" y="3438144"/>
             <a:ext cx="2311832" cy="274320"/>
           </a:xfrm>
           <a:prstGeom prst="rect">
@@ -5234,7 +6424,7 @@
         </p:nvSpPr>
         <p:spPr>
           <a:xfrm>
-            <a:off x="6178144" y="3090672"/>
+            <a:off x="6114136" y="3090672"/>
             <a:ext cx="2641016" cy="960120"/>
           </a:xfrm>
           <a:prstGeom prst="roundRect">
@@ -5261,7 +6451,7 @@
         </p:nvSpPr>
         <p:spPr>
           <a:xfrm>
-            <a:off x="6342736" y="3218688"/>
+            <a:off x="6278728" y="3218688"/>
             <a:ext cx="2311832" cy="201168"/>
           </a:xfrm>
           <a:prstGeom prst="rect">
@@ -5300,7 +6490,7 @@
         </p:nvSpPr>
         <p:spPr>
           <a:xfrm>
-            <a:off x="6342736" y="3438144"/>
+            <a:off x="6278728" y="3438144"/>
             <a:ext cx="2311832" cy="274320"/>
           </a:xfrm>
           <a:prstGeom prst="rect">
@@ -5341,7 +6531,7 @@
         </p:nvSpPr>
         <p:spPr>
           <a:xfrm>
-            <a:off x="566928" y="4306824"/>
+            <a:off x="502920" y="4306824"/>
             <a:ext cx="11057839" cy="274320"/>
           </a:xfrm>
           <a:prstGeom prst="rect">
@@ -5380,7 +6570,7 @@
         </p:nvSpPr>
         <p:spPr>
           <a:xfrm>
-            <a:off x="566928" y="4636008"/>
+            <a:off x="502920" y="4636008"/>
             <a:ext cx="11057839" cy="396240"/>
           </a:xfrm>
           <a:prstGeom prst="roundRect">
@@ -5407,7 +6597,7 @@
         </p:nvSpPr>
         <p:spPr>
           <a:xfrm>
-            <a:off x="676656" y="4709160"/>
+            <a:off x="612648" y="4709160"/>
             <a:ext cx="411480" cy="249936"/>
           </a:xfrm>
           <a:prstGeom prst="roundRect">
@@ -5434,7 +6624,7 @@
         </p:nvSpPr>
         <p:spPr>
           <a:xfrm>
-            <a:off x="676656" y="4709160"/>
+            <a:off x="612648" y="4709160"/>
             <a:ext cx="411480" cy="249936"/>
           </a:xfrm>
           <a:prstGeom prst="rect">
@@ -5473,7 +6663,7 @@
         </p:nvSpPr>
         <p:spPr>
           <a:xfrm>
-            <a:off x="1207008" y="4672584"/>
+            <a:off x="1143000" y="4672584"/>
             <a:ext cx="10280599" cy="323088"/>
           </a:xfrm>
           <a:prstGeom prst="rect">
@@ -5512,7 +6702,7 @@
         </p:nvSpPr>
         <p:spPr>
           <a:xfrm>
-            <a:off x="566928" y="5114544"/>
+            <a:off x="502920" y="5114544"/>
             <a:ext cx="11057839" cy="396240"/>
           </a:xfrm>
           <a:prstGeom prst="roundRect">
@@ -5539,7 +6729,7 @@
         </p:nvSpPr>
         <p:spPr>
           <a:xfrm>
-            <a:off x="676656" y="5187696"/>
+            <a:off x="612648" y="5187696"/>
             <a:ext cx="411480" cy="249936"/>
           </a:xfrm>
           <a:prstGeom prst="roundRect">
@@ -5566,7 +6756,7 @@
         </p:nvSpPr>
         <p:spPr>
           <a:xfrm>
-            <a:off x="676656" y="5187696"/>
+            <a:off x="612648" y="5187696"/>
             <a:ext cx="411480" cy="249936"/>
           </a:xfrm>
           <a:prstGeom prst="rect">
@@ -5605,7 +6795,7 @@
         </p:nvSpPr>
         <p:spPr>
           <a:xfrm>
-            <a:off x="1207008" y="5151120"/>
+            <a:off x="1143000" y="5151120"/>
             <a:ext cx="10280599" cy="323088"/>
           </a:xfrm>
           <a:prstGeom prst="rect">
@@ -5644,7 +6834,7 @@
         </p:nvSpPr>
         <p:spPr>
           <a:xfrm>
-            <a:off x="566928" y="5593080"/>
+            <a:off x="502920" y="5593080"/>
             <a:ext cx="11057839" cy="396240"/>
           </a:xfrm>
           <a:prstGeom prst="roundRect">
@@ -5671,7 +6861,7 @@
         </p:nvSpPr>
         <p:spPr>
           <a:xfrm>
-            <a:off x="676656" y="5666232"/>
+            <a:off x="612648" y="5666232"/>
             <a:ext cx="411480" cy="249936"/>
           </a:xfrm>
           <a:prstGeom prst="roundRect">
@@ -5698,7 +6888,7 @@
         </p:nvSpPr>
         <p:spPr>
           <a:xfrm>
-            <a:off x="676656" y="5666232"/>
+            <a:off x="612648" y="5666232"/>
             <a:ext cx="411480" cy="249936"/>
           </a:xfrm>
           <a:prstGeom prst="rect">
@@ -5737,7 +6927,7 @@
         </p:nvSpPr>
         <p:spPr>
           <a:xfrm>
-            <a:off x="1207008" y="5629656"/>
+            <a:off x="1143000" y="5629656"/>
             <a:ext cx="10280599" cy="323088"/>
           </a:xfrm>
           <a:prstGeom prst="rect">
@@ -5776,7 +6966,7 @@
         </p:nvSpPr>
         <p:spPr>
           <a:xfrm>
-            <a:off x="566928" y="6382512"/>
+            <a:off x="502920" y="6382512"/>
             <a:ext cx="7315200" cy="219456"/>
           </a:xfrm>
           <a:prstGeom prst="rect">
@@ -5815,7 +7005,7 @@
         </p:nvSpPr>
         <p:spPr>
           <a:xfrm>
-            <a:off x="10710367" y="6382512"/>
+            <a:off x="10774375" y="6382512"/>
             <a:ext cx="914400" cy="219456"/>
           </a:xfrm>
           <a:prstGeom prst="rect">
@@ -5886,7 +7076,7 @@
         </p:nvSpPr>
         <p:spPr>
           <a:xfrm>
-            <a:off x="566928" y="457200"/>
+            <a:off x="502920" y="457200"/>
             <a:ext cx="384048" cy="384048"/>
           </a:xfrm>
           <a:prstGeom prst="ellipse">
@@ -5906,7 +7096,7 @@
         </p:nvSpPr>
         <p:spPr>
           <a:xfrm>
-            <a:off x="566928" y="457200"/>
+            <a:off x="502920" y="457200"/>
             <a:ext cx="384048" cy="384048"/>
           </a:xfrm>
           <a:prstGeom prst="rect">
@@ -5945,7 +7135,7 @@
         </p:nvSpPr>
         <p:spPr>
           <a:xfrm>
-            <a:off x="1133856" y="457200"/>
+            <a:off x="1069848" y="457200"/>
             <a:ext cx="10490911" cy="182880"/>
           </a:xfrm>
           <a:prstGeom prst="rect">
@@ -5970,7 +7160,7 @@
                 <a:ea typeface="Arial" pitchFamily="34" charset="-122"/>
                 <a:cs typeface="Arial" pitchFamily="34" charset="-120"/>
               </a:rPr>
-              <a:t>Land</a:t>
+              <a:t>Location</a:t>
             </a:r>
             <a:endParaRPr lang="en-US" sz="950" dirty="0"/>
           </a:p>
@@ -5984,7 +7174,7 @@
         </p:nvSpPr>
         <p:spPr>
           <a:xfrm>
-            <a:off x="1133856" y="640080"/>
+            <a:off x="1069848" y="640080"/>
             <a:ext cx="10490911" cy="365760"/>
           </a:xfrm>
           <a:prstGeom prst="rect">
@@ -6009,22 +7199,46 @@
                 <a:ea typeface="Pretendard" pitchFamily="34" charset="-122"/>
                 <a:cs typeface="Pretendard" pitchFamily="34" charset="-120"/>
               </a:rPr>
-              <a:t>토지 현황</a:t>
+              <a:t>입지 분석</a:t>
             </a:r>
             <a:endParaRPr lang="en-US" sz="2300" dirty="0"/>
           </a:p>
         </p:txBody>
       </p:sp>
-      <p:sp>
-        <p:nvSpPr>
-          <p:cNvPr id="6" name="Text 4"/>
-          <p:cNvSpPr/>
-          <p:nvPr/>
-        </p:nvSpPr>
-        <p:spPr>
-          <a:xfrm>
-            <a:off x="566928" y="1371600"/>
-            <a:ext cx="6858000" cy="237744"/>
+      <p:pic>
+        <p:nvPicPr>
+          <p:cNvPr id="6" name="Image 0" descr="preencoded.png">    </p:cNvPr>
+          <p:cNvPicPr>
+            <a:picLocks noChangeAspect="1"/>
+          </p:cNvPicPr>
+          <p:nvPr/>
+        </p:nvPicPr>
+        <p:blipFill>
+          <a:blip r:embed="rId1"/>
+          <a:stretch>
+            <a:fillRect/>
+          </a:stretch>
+        </p:blipFill>
+        <p:spPr>
+          <a:xfrm>
+            <a:off x="502920" y="1481328"/>
+            <a:ext cx="5120640" cy="4114800"/>
+          </a:xfrm>
+          <a:prstGeom prst="rect">
+            <a:avLst/>
+          </a:prstGeom>
+        </p:spPr>
+      </p:pic>
+      <p:sp>
+        <p:nvSpPr>
+          <p:cNvPr id="7" name="Text 4"/>
+          <p:cNvSpPr/>
+          <p:nvPr/>
+        </p:nvSpPr>
+        <p:spPr>
+          <a:xfrm>
+            <a:off x="5989320" y="1481328"/>
+            <a:ext cx="1560003" cy="493776"/>
           </a:xfrm>
           <a:prstGeom prst="rect">
             <a:avLst/>
@@ -6037,33 +7251,36 @@
           <a:lstStyle/>
           <a:p>
             <a:pPr indent="0" marL="0">
-              <a:buNone/>
-            </a:pPr>
-            <a:r>
-              <a:rPr lang="en-US" sz="1100" b="1" dirty="0">
-                <a:solidFill>
-                  <a:srgbClr val="10161F"/>
+              <a:lnSpc>
+                <a:spcPct val="115000"/>
+              </a:lnSpc>
+              <a:buNone/>
+            </a:pPr>
+            <a:r>
+              <a:rPr lang="en-US" sz="1300" dirty="0">
+                <a:solidFill>
+                  <a:srgbClr val="718096"/>
                 </a:solidFill>
                 <a:latin typeface="Pretendard" pitchFamily="34" charset="0"/>
                 <a:ea typeface="Pretendard" pitchFamily="34" charset="-122"/>
                 <a:cs typeface="Pretendard" pitchFamily="34" charset="-120"/>
               </a:rPr>
-              <a:t>토지 현황</a:t>
-            </a:r>
-            <a:endParaRPr lang="en-US" sz="1100" dirty="0"/>
-          </a:p>
-        </p:txBody>
-      </p:sp>
-      <p:sp>
-        <p:nvSpPr>
-          <p:cNvPr id="7" name="Text 5"/>
-          <p:cNvSpPr/>
-          <p:nvPr/>
-        </p:nvSpPr>
-        <p:spPr>
-          <a:xfrm>
-            <a:off x="566928" y="1645920"/>
-            <a:ext cx="2606040" cy="438912"/>
+              <a:t>대중교통</a:t>
+            </a:r>
+            <a:endParaRPr lang="en-US" sz="1300" dirty="0"/>
+          </a:p>
+        </p:txBody>
+      </p:sp>
+      <p:sp>
+        <p:nvSpPr>
+          <p:cNvPr id="8" name="Text 5"/>
+          <p:cNvSpPr/>
+          <p:nvPr/>
+        </p:nvSpPr>
+        <p:spPr>
+          <a:xfrm>
+            <a:off x="7549323" y="1481328"/>
+            <a:ext cx="4011436" cy="493776"/>
           </a:xfrm>
           <a:prstGeom prst="rect">
             <a:avLst/>
@@ -6077,35 +7294,58 @@
           <a:p>
             <a:pPr indent="0" marL="0">
               <a:lnSpc>
-                <a:spcPct val="120000"/>
+                <a:spcPct val="115000"/>
               </a:lnSpc>
               <a:buNone/>
             </a:pPr>
             <a:r>
-              <a:rPr lang="en-US" sz="1350" dirty="0">
-                <a:solidFill>
-                  <a:srgbClr val="718096"/>
+              <a:rPr lang="en-US" sz="1300" b="1" dirty="0">
+                <a:solidFill>
+                  <a:srgbClr val="10161F"/>
                 </a:solidFill>
                 <a:latin typeface="Pretendard" pitchFamily="34" charset="0"/>
                 <a:ea typeface="Pretendard" pitchFamily="34" charset="-122"/>
                 <a:cs typeface="Pretendard" pitchFamily="34" charset="-120"/>
               </a:rPr>
-              <a:t>연면적</a:t>
-            </a:r>
-            <a:endParaRPr lang="en-US" sz="1350" dirty="0"/>
-          </a:p>
-        </p:txBody>
-      </p:sp>
-      <p:sp>
-        <p:nvSpPr>
-          <p:cNvPr id="8" name="Text 6"/>
-          <p:cNvSpPr/>
-          <p:nvPr/>
-        </p:nvSpPr>
-        <p:spPr>
-          <a:xfrm>
-            <a:off x="3172968" y="1645920"/>
-            <a:ext cx="4251960" cy="438912"/>
+              <a:t>인접 지하철역 역세권 (상세 확인 필요)</a:t>
+            </a:r>
+            <a:endParaRPr lang="en-US" sz="1300" dirty="0"/>
+          </a:p>
+        </p:txBody>
+      </p:sp>
+      <p:sp>
+        <p:nvSpPr>
+          <p:cNvPr id="9" name="Shape 6"/>
+          <p:cNvSpPr/>
+          <p:nvPr/>
+        </p:nvSpPr>
+        <p:spPr>
+          <a:xfrm>
+            <a:off x="5989320" y="1975104"/>
+            <a:ext cx="5571439" cy="0"/>
+          </a:xfrm>
+          <a:prstGeom prst="line">
+            <a:avLst/>
+          </a:prstGeom>
+          <a:noFill/>
+          <a:ln w="3810">
+            <a:solidFill>
+              <a:srgbClr val="CBD5E0"/>
+            </a:solidFill>
+            <a:prstDash val="solid"/>
+          </a:ln>
+        </p:spPr>
+      </p:sp>
+      <p:sp>
+        <p:nvSpPr>
+          <p:cNvPr id="10" name="Text 7"/>
+          <p:cNvSpPr/>
+          <p:nvPr/>
+        </p:nvSpPr>
+        <p:spPr>
+          <a:xfrm>
+            <a:off x="5989320" y="1975104"/>
+            <a:ext cx="1560003" cy="493776"/>
           </a:xfrm>
           <a:prstGeom prst="rect">
             <a:avLst/>
@@ -6119,62 +7359,81 @@
           <a:p>
             <a:pPr indent="0" marL="0">
               <a:lnSpc>
-                <a:spcPct val="120000"/>
+                <a:spcPct val="115000"/>
               </a:lnSpc>
               <a:buNone/>
             </a:pPr>
             <a:r>
-              <a:rPr lang="en-US" sz="1350" b="1" dirty="0">
-                <a:solidFill>
-                  <a:srgbClr val="10161F"/>
+              <a:rPr lang="en-US" sz="1300" dirty="0">
+                <a:solidFill>
+                  <a:srgbClr val="718096"/>
                 </a:solidFill>
                 <a:latin typeface="Pretendard" pitchFamily="34" charset="0"/>
                 <a:ea typeface="Pretendard" pitchFamily="34" charset="-122"/>
                 <a:cs typeface="Pretendard" pitchFamily="34" charset="-120"/>
               </a:rPr>
-              <a:t>512.4평</a:t>
-            </a:r>
-            <a:endParaRPr lang="en-US" sz="1350" dirty="0"/>
-          </a:p>
-        </p:txBody>
-      </p:sp>
-      <p:sp>
-        <p:nvSpPr>
-          <p:cNvPr id="9" name="Shape 7"/>
-          <p:cNvSpPr/>
-          <p:nvPr/>
-        </p:nvSpPr>
-        <p:spPr>
-          <a:xfrm>
-            <a:off x="7604608" y="1371600"/>
-            <a:ext cx="0" cy="4754880"/>
-          </a:xfrm>
-          <a:prstGeom prst="line">
-            <a:avLst/>
-          </a:prstGeom>
-          <a:noFill/>
-          <a:ln w="8890">
-            <a:solidFill>
-              <a:srgbClr val="B98A2E"/>
-            </a:solidFill>
-            <a:prstDash val="solid"/>
-          </a:ln>
-        </p:spPr>
-      </p:sp>
-      <p:sp>
-        <p:nvSpPr>
-          <p:cNvPr id="10" name="Shape 8"/>
-          <p:cNvSpPr/>
-          <p:nvPr/>
-        </p:nvSpPr>
-        <p:spPr>
-          <a:xfrm>
-            <a:off x="7784287" y="1645920"/>
-            <a:ext cx="3840480" cy="2103120"/>
+              <a:t>상권권역</a:t>
+            </a:r>
+            <a:endParaRPr lang="en-US" sz="1300" dirty="0"/>
+          </a:p>
+        </p:txBody>
+      </p:sp>
+      <p:sp>
+        <p:nvSpPr>
+          <p:cNvPr id="11" name="Text 8"/>
+          <p:cNvSpPr/>
+          <p:nvPr/>
+        </p:nvSpPr>
+        <p:spPr>
+          <a:xfrm>
+            <a:off x="7549323" y="1975104"/>
+            <a:ext cx="4011436" cy="493776"/>
+          </a:xfrm>
+          <a:prstGeom prst="rect">
+            <a:avLst/>
+          </a:prstGeom>
+          <a:noFill/>
+          <a:ln/>
+        </p:spPr>
+        <p:txBody>
+          <a:bodyPr wrap="square" lIns="0" tIns="0" rIns="0" bIns="0" rtlCol="0" anchor="ctr"/>
+          <a:lstStyle/>
+          <a:p>
+            <a:pPr indent="0" marL="0">
+              <a:lnSpc>
+                <a:spcPct val="115000"/>
+              </a:lnSpc>
+              <a:buNone/>
+            </a:pPr>
+            <a:r>
+              <a:rPr lang="en-US" sz="1300" b="1" dirty="0">
+                <a:solidFill>
+                  <a:srgbClr val="10161F"/>
+                </a:solidFill>
+                <a:latin typeface="Pretendard" pitchFamily="34" charset="0"/>
+                <a:ea typeface="Pretendard" pitchFamily="34" charset="-122"/>
+                <a:cs typeface="Pretendard" pitchFamily="34" charset="-120"/>
+              </a:rPr>
+              <a:t>성수권역 주요 상업·업무 권역</a:t>
+            </a:r>
+            <a:endParaRPr lang="en-US" sz="1300" dirty="0"/>
+          </a:p>
+        </p:txBody>
+      </p:sp>
+      <p:sp>
+        <p:nvSpPr>
+          <p:cNvPr id="12" name="Shape 9"/>
+          <p:cNvSpPr/>
+          <p:nvPr/>
+        </p:nvSpPr>
+        <p:spPr>
+          <a:xfrm>
+            <a:off x="5989320" y="2606040"/>
+            <a:ext cx="5571439" cy="658368"/>
           </a:xfrm>
           <a:prstGeom prst="roundRect">
             <a:avLst>
-              <a:gd name="adj" fmla="val 2609"/>
+              <a:gd name="adj" fmla="val 8333"/>
             </a:avLst>
           </a:prstGeom>
           <a:solidFill>
@@ -6185,14 +7444,14 @@
       </p:sp>
       <p:sp>
         <p:nvSpPr>
-          <p:cNvPr id="11" name="Shape 9"/>
-          <p:cNvSpPr/>
-          <p:nvPr/>
-        </p:nvSpPr>
-        <p:spPr>
-          <a:xfrm>
-            <a:off x="7784287" y="1700784"/>
-            <a:ext cx="36576" cy="1993392"/>
+          <p:cNvPr id="13" name="Shape 10"/>
+          <p:cNvSpPr/>
+          <p:nvPr/>
+        </p:nvSpPr>
+        <p:spPr>
+          <a:xfrm>
+            <a:off x="5989320" y="2660904"/>
+            <a:ext cx="36576" cy="548640"/>
           </a:xfrm>
           <a:prstGeom prst="rect">
             <a:avLst/>
@@ -6205,14 +7464,14 @@
       </p:sp>
       <p:sp>
         <p:nvSpPr>
-          <p:cNvPr id="12" name="Text 10"/>
-          <p:cNvSpPr/>
-          <p:nvPr/>
-        </p:nvSpPr>
-        <p:spPr>
-          <a:xfrm>
-            <a:off x="7967167" y="1755648"/>
-            <a:ext cx="3511296" cy="201168"/>
+          <p:cNvPr id="14" name="Text 11"/>
+          <p:cNvSpPr/>
+          <p:nvPr/>
+        </p:nvSpPr>
+        <p:spPr>
+          <a:xfrm>
+            <a:off x="6135624" y="2697480"/>
+            <a:ext cx="5315407" cy="201168"/>
           </a:xfrm>
           <a:prstGeom prst="rect">
             <a:avLst/>
@@ -6236,7 +7495,7 @@
                 <a:ea typeface="Pretendard" pitchFamily="34" charset="-122"/>
                 <a:cs typeface="Pretendard" pitchFamily="34" charset="-120"/>
               </a:rPr>
-              <a:t>토지 및 건축 규제 포인트</a:t>
+              <a:t>입지 종합 분석</a:t>
             </a:r>
             <a:endParaRPr lang="en-US" sz="1050" dirty="0"/>
           </a:p>
@@ -6244,14 +7503,14 @@
       </p:sp>
       <p:sp>
         <p:nvSpPr>
-          <p:cNvPr id="13" name="Text 11"/>
-          <p:cNvSpPr/>
-          <p:nvPr/>
-        </p:nvSpPr>
-        <p:spPr>
-          <a:xfrm>
-            <a:off x="7967167" y="1975104"/>
-            <a:ext cx="3511296" cy="1700784"/>
+          <p:cNvPr id="15" name="Text 12"/>
+          <p:cNvSpPr/>
+          <p:nvPr/>
+        </p:nvSpPr>
+        <p:spPr>
+          <a:xfrm>
+            <a:off x="6135624" y="2898648"/>
+            <a:ext cx="5315407" cy="329184"/>
           </a:xfrm>
           <a:prstGeom prst="rect">
             <a:avLst/>
@@ -6265,13 +7524,13 @@
           <a:p>
             <a:pPr marL="342900" indent="-342900">
               <a:lnSpc>
-                <a:spcPct val="120000"/>
+                <a:spcPct val="108000"/>
               </a:lnSpc>
               <a:buSzPct val="100000"/>
               <a:buChar char="•"/>
             </a:pPr>
             <a:r>
-              <a:rPr lang="en-US" sz="930" dirty="0">
+              <a:rPr lang="en-US" sz="980" dirty="0">
                 <a:solidFill>
                   <a:srgbClr val="10161F"/>
                 </a:solidFill>
@@ -6279,253 +7538,45 @@
                 <a:ea typeface="Pretendard" pitchFamily="34" charset="-122"/>
                 <a:cs typeface="Pretendard" pitchFamily="34" charset="-120"/>
               </a:rPr>
-              <a:t>용도지역·용도지구 기준 건폐율/용적률 상한 확인</a:t>
-            </a:r>
-            <a:endParaRPr lang="en-US" sz="930" dirty="0"/>
-          </a:p>
-          <a:p>
-            <a:pPr marL="342900" indent="-342900">
-              <a:lnSpc>
-                <a:spcPct val="120000"/>
-              </a:lnSpc>
-              <a:buSzPct val="100000"/>
-              <a:buChar char="•"/>
-            </a:pPr>
-            <a:r>
-              <a:rPr lang="en-US" sz="930" dirty="0">
-                <a:solidFill>
-                  <a:srgbClr val="10161F"/>
+              <a:t>성수권역 배후 상권 기반 안정적 임대 수요</a:t>
+            </a:r>
+            <a:endParaRPr lang="en-US" sz="980" dirty="0"/>
+          </a:p>
+        </p:txBody>
+      </p:sp>
+      <p:sp>
+        <p:nvSpPr>
+          <p:cNvPr id="16" name="Text 13"/>
+          <p:cNvSpPr/>
+          <p:nvPr/>
+        </p:nvSpPr>
+        <p:spPr>
+          <a:xfrm>
+            <a:off x="502920" y="6382512"/>
+            <a:ext cx="7315200" cy="219456"/>
+          </a:xfrm>
+          <a:prstGeom prst="rect">
+            <a:avLst/>
+          </a:prstGeom>
+          <a:noFill/>
+          <a:ln/>
+        </p:spPr>
+        <p:txBody>
+          <a:bodyPr wrap="square" lIns="0" tIns="0" rIns="0" bIns="0" rtlCol="0" anchor="ctr"/>
+          <a:lstStyle/>
+          <a:p>
+            <a:pPr indent="0" marL="0">
+              <a:buNone/>
+            </a:pPr>
+            <a:r>
+              <a:rPr lang="en-US" sz="800" dirty="0">
+                <a:solidFill>
+                  <a:srgbClr val="718096"/>
                 </a:solidFill>
                 <a:latin typeface="Pretendard" pitchFamily="34" charset="0"/>
                 <a:ea typeface="Pretendard" pitchFamily="34" charset="-122"/>
                 <a:cs typeface="Pretendard" pitchFamily="34" charset="-120"/>
               </a:rPr>
-              <a:t>필지 형상 및 접도 조건에 따른 건축 가능 면적 검토</a:t>
-            </a:r>
-            <a:endParaRPr lang="en-US" sz="930" dirty="0"/>
-          </a:p>
-          <a:p>
-            <a:pPr marL="342900" indent="-342900">
-              <a:lnSpc>
-                <a:spcPct val="120000"/>
-              </a:lnSpc>
-              <a:buSzPct val="100000"/>
-              <a:buChar char="•"/>
-            </a:pPr>
-            <a:r>
-              <a:rPr lang="en-US" sz="930" dirty="0">
-                <a:solidFill>
-                  <a:srgbClr val="10161F"/>
-                </a:solidFill>
-                <a:latin typeface="Pretendard" pitchFamily="34" charset="0"/>
-                <a:ea typeface="Pretendard" pitchFamily="34" charset="-122"/>
-                <a:cs typeface="Pretendard" pitchFamily="34" charset="-120"/>
-              </a:rPr>
-              <a:t>토지이용계획 열람 및 개발행위허가 제한 여부 확인</a:t>
-            </a:r>
-            <a:endParaRPr lang="en-US" sz="930" dirty="0"/>
-          </a:p>
-        </p:txBody>
-      </p:sp>
-      <p:sp>
-        <p:nvSpPr>
-          <p:cNvPr id="14" name="Shape 12"/>
-          <p:cNvSpPr/>
-          <p:nvPr/>
-        </p:nvSpPr>
-        <p:spPr>
-          <a:xfrm>
-            <a:off x="7784287" y="3977640"/>
-            <a:ext cx="3840480" cy="2148840"/>
-          </a:xfrm>
-          <a:prstGeom prst="roundRect">
-            <a:avLst>
-              <a:gd name="adj" fmla="val 2553"/>
-            </a:avLst>
-          </a:prstGeom>
-          <a:solidFill>
-            <a:srgbClr val="BEE3F8"/>
-          </a:solidFill>
-          <a:ln/>
-        </p:spPr>
-      </p:sp>
-      <p:sp>
-        <p:nvSpPr>
-          <p:cNvPr id="15" name="Shape 13"/>
-          <p:cNvSpPr/>
-          <p:nvPr/>
-        </p:nvSpPr>
-        <p:spPr>
-          <a:xfrm>
-            <a:off x="7784287" y="4032504"/>
-            <a:ext cx="36576" cy="2039112"/>
-          </a:xfrm>
-          <a:prstGeom prst="rect">
-            <a:avLst/>
-          </a:prstGeom>
-          <a:solidFill>
-            <a:srgbClr val="2B6CB0"/>
-          </a:solidFill>
-          <a:ln/>
-        </p:spPr>
-      </p:sp>
-      <p:sp>
-        <p:nvSpPr>
-          <p:cNvPr id="16" name="Text 14"/>
-          <p:cNvSpPr/>
-          <p:nvPr/>
-        </p:nvSpPr>
-        <p:spPr>
-          <a:xfrm>
-            <a:off x="7967167" y="4087368"/>
-            <a:ext cx="3511296" cy="201168"/>
-          </a:xfrm>
-          <a:prstGeom prst="rect">
-            <a:avLst/>
-          </a:prstGeom>
-          <a:noFill/>
-          <a:ln/>
-        </p:spPr>
-        <p:txBody>
-          <a:bodyPr wrap="square" lIns="0" tIns="0" rIns="0" bIns="0" rtlCol="0" anchor="ctr"/>
-          <a:lstStyle/>
-          <a:p>
-            <a:pPr indent="0" marL="0">
-              <a:buNone/>
-            </a:pPr>
-            <a:r>
-              <a:rPr lang="en-US" sz="1050" b="1" dirty="0">
-                <a:solidFill>
-                  <a:srgbClr val="2B6CB0"/>
-                </a:solidFill>
-                <a:latin typeface="Pretendard" pitchFamily="34" charset="0"/>
-                <a:ea typeface="Pretendard" pitchFamily="34" charset="-122"/>
-                <a:cs typeface="Pretendard" pitchFamily="34" charset="-120"/>
-              </a:rPr>
-              <a:t>권리관계 및 공적장부</a:t>
-            </a:r>
-            <a:endParaRPr lang="en-US" sz="1050" dirty="0"/>
-          </a:p>
-        </p:txBody>
-      </p:sp>
-      <p:sp>
-        <p:nvSpPr>
-          <p:cNvPr id="17" name="Text 15"/>
-          <p:cNvSpPr/>
-          <p:nvPr/>
-        </p:nvSpPr>
-        <p:spPr>
-          <a:xfrm>
-            <a:off x="7967167" y="4306824"/>
-            <a:ext cx="3511296" cy="1746504"/>
-          </a:xfrm>
-          <a:prstGeom prst="rect">
-            <a:avLst/>
-          </a:prstGeom>
-          <a:noFill/>
-          <a:ln/>
-        </p:spPr>
-        <p:txBody>
-          <a:bodyPr wrap="square" lIns="0" tIns="0" rIns="0" bIns="0" rtlCol="0" anchor="t"/>
-          <a:lstStyle/>
-          <a:p>
-            <a:pPr marL="342900" indent="-342900">
-              <a:lnSpc>
-                <a:spcPct val="120000"/>
-              </a:lnSpc>
-              <a:buSzPct val="100000"/>
-              <a:buChar char="•"/>
-            </a:pPr>
-            <a:r>
-              <a:rPr lang="en-US" sz="930" dirty="0">
-                <a:solidFill>
-                  <a:srgbClr val="10161F"/>
-                </a:solidFill>
-                <a:latin typeface="Pretendard" pitchFamily="34" charset="0"/>
-                <a:ea typeface="Pretendard" pitchFamily="34" charset="-122"/>
-                <a:cs typeface="Pretendard" pitchFamily="34" charset="-120"/>
-              </a:rPr>
-              <a:t>등기부등본 갑구 소유권 및 을구 근저당·가압류 확인</a:t>
-            </a:r>
-            <a:endParaRPr lang="en-US" sz="930" dirty="0"/>
-          </a:p>
-          <a:p>
-            <a:pPr marL="342900" indent="-342900">
-              <a:lnSpc>
-                <a:spcPct val="120000"/>
-              </a:lnSpc>
-              <a:buSzPct val="100000"/>
-              <a:buChar char="•"/>
-            </a:pPr>
-            <a:r>
-              <a:rPr lang="en-US" sz="930" dirty="0">
-                <a:solidFill>
-                  <a:srgbClr val="10161F"/>
-                </a:solidFill>
-                <a:latin typeface="Pretendard" pitchFamily="34" charset="0"/>
-                <a:ea typeface="Pretendard" pitchFamily="34" charset="-122"/>
-                <a:cs typeface="Pretendard" pitchFamily="34" charset="-120"/>
-              </a:rPr>
-              <a:t>건축물대장 기재 사항과 실물 현황 대조 점검</a:t>
-            </a:r>
-            <a:endParaRPr lang="en-US" sz="930" dirty="0"/>
-          </a:p>
-          <a:p>
-            <a:pPr marL="342900" indent="-342900">
-              <a:lnSpc>
-                <a:spcPct val="120000"/>
-              </a:lnSpc>
-              <a:buSzPct val="100000"/>
-              <a:buChar char="•"/>
-            </a:pPr>
-            <a:r>
-              <a:rPr lang="en-US" sz="930" dirty="0">
-                <a:solidFill>
-                  <a:srgbClr val="10161F"/>
-                </a:solidFill>
-                <a:latin typeface="Pretendard" pitchFamily="34" charset="0"/>
-                <a:ea typeface="Pretendard" pitchFamily="34" charset="-122"/>
-                <a:cs typeface="Pretendard" pitchFamily="34" charset="-120"/>
-              </a:rPr>
-              <a:t>개별공시지가 및 실거래가 비교 분석</a:t>
-            </a:r>
-            <a:endParaRPr lang="en-US" sz="930" dirty="0"/>
-          </a:p>
-        </p:txBody>
-      </p:sp>
-      <p:sp>
-        <p:nvSpPr>
-          <p:cNvPr id="18" name="Text 16"/>
-          <p:cNvSpPr/>
-          <p:nvPr/>
-        </p:nvSpPr>
-        <p:spPr>
-          <a:xfrm>
-            <a:off x="566928" y="6382512"/>
-            <a:ext cx="7315200" cy="219456"/>
-          </a:xfrm>
-          <a:prstGeom prst="rect">
-            <a:avLst/>
-          </a:prstGeom>
-          <a:noFill/>
-          <a:ln/>
-        </p:spPr>
-        <p:txBody>
-          <a:bodyPr wrap="square" lIns="0" tIns="0" rIns="0" bIns="0" rtlCol="0" anchor="ctr"/>
-          <a:lstStyle/>
-          <a:p>
-            <a:pPr indent="0" marL="0">
-              <a:buNone/>
-            </a:pPr>
-            <a:r>
-              <a:rPr lang="en-US" sz="800" dirty="0">
-                <a:solidFill>
-                  <a:srgbClr val="718096"/>
-                </a:solidFill>
-                <a:latin typeface="Pretendard" pitchFamily="34" charset="0"/>
-                <a:ea typeface="Pretendard" pitchFamily="34" charset="-122"/>
-                <a:cs typeface="Pretendard" pitchFamily="34" charset="-120"/>
-              </a:rPr>
               <a:t>크리딜   |   </a:t>
             </a:r>
             <a:endParaRPr lang="en-US" sz="800" dirty="0"/>
@@ -6534,13 +7585,13 @@
       </p:sp>
       <p:sp>
         <p:nvSpPr>
-          <p:cNvPr id="19" name="Text 17"/>
-          <p:cNvSpPr/>
-          <p:nvPr/>
-        </p:nvSpPr>
-        <p:spPr>
-          <a:xfrm>
-            <a:off x="10710367" y="6382512"/>
+          <p:cNvPr id="17" name="Text 14"/>
+          <p:cNvSpPr/>
+          <p:nvPr/>
+        </p:nvSpPr>
+        <p:spPr>
+          <a:xfrm>
+            <a:off x="10774375" y="6382512"/>
             <a:ext cx="914400" cy="219456"/>
           </a:xfrm>
           <a:prstGeom prst="rect">
@@ -6611,7 +7662,7 @@
         </p:nvSpPr>
         <p:spPr>
           <a:xfrm>
-            <a:off x="566928" y="457200"/>
+            <a:off x="502920" y="457200"/>
             <a:ext cx="384048" cy="384048"/>
           </a:xfrm>
           <a:prstGeom prst="ellipse">
@@ -6631,7 +7682,7 @@
         </p:nvSpPr>
         <p:spPr>
           <a:xfrm>
-            <a:off x="566928" y="457200"/>
+            <a:off x="502920" y="457200"/>
             <a:ext cx="384048" cy="384048"/>
           </a:xfrm>
           <a:prstGeom prst="rect">
@@ -6670,7 +7721,7 @@
         </p:nvSpPr>
         <p:spPr>
           <a:xfrm>
-            <a:off x="1133856" y="457200"/>
+            <a:off x="1069848" y="457200"/>
             <a:ext cx="10490911" cy="182880"/>
           </a:xfrm>
           <a:prstGeom prst="rect">
@@ -6695,7 +7746,7 @@
                 <a:ea typeface="Arial" pitchFamily="34" charset="-122"/>
                 <a:cs typeface="Arial" pitchFamily="34" charset="-120"/>
               </a:rPr>
-              <a:t>Building</a:t>
+              <a:t>Land</a:t>
             </a:r>
             <a:endParaRPr lang="en-US" sz="950" dirty="0"/>
           </a:p>
@@ -6709,7 +7760,7 @@
         </p:nvSpPr>
         <p:spPr>
           <a:xfrm>
-            <a:off x="1133856" y="640080"/>
+            <a:off x="1069848" y="640080"/>
             <a:ext cx="10490911" cy="365760"/>
           </a:xfrm>
           <a:prstGeom prst="rect">
@@ -6734,7 +7785,7 @@
                 <a:ea typeface="Pretendard" pitchFamily="34" charset="-122"/>
                 <a:cs typeface="Pretendard" pitchFamily="34" charset="-120"/>
               </a:rPr>
-              <a:t>건물 개요</a:t>
+              <a:t>토지 현황</a:t>
             </a:r>
             <a:endParaRPr lang="en-US" sz="2300" dirty="0"/>
           </a:p>
@@ -6748,7 +7799,7 @@
         </p:nvSpPr>
         <p:spPr>
           <a:xfrm>
-            <a:off x="566928" y="1371600"/>
+            <a:off x="502920" y="1371600"/>
             <a:ext cx="6858000" cy="237744"/>
           </a:xfrm>
           <a:prstGeom prst="rect">
@@ -6773,7 +7824,7 @@
                 <a:ea typeface="Pretendard" pitchFamily="34" charset="-122"/>
                 <a:cs typeface="Pretendard" pitchFamily="34" charset="-120"/>
               </a:rPr>
-              <a:t>건축물 개요 및 물리 스펙</a:t>
+              <a:t>토지 현황</a:t>
             </a:r>
             <a:endParaRPr lang="en-US" sz="1100" dirty="0"/>
           </a:p>
@@ -6787,8 +7838,8 @@
         </p:nvSpPr>
         <p:spPr>
           <a:xfrm>
-            <a:off x="566928" y="1645920"/>
-            <a:ext cx="2606040" cy="438912"/>
+            <a:off x="502920" y="1645920"/>
+            <a:ext cx="1920240" cy="420624"/>
           </a:xfrm>
           <a:prstGeom prst="rect">
             <a:avLst/>
@@ -6802,7 +7853,7 @@
           <a:p>
             <a:pPr indent="0" marL="0">
               <a:lnSpc>
-                <a:spcPct val="120000"/>
+                <a:spcPct val="115000"/>
               </a:lnSpc>
               <a:buNone/>
             </a:pPr>
@@ -6829,8 +7880,8 @@
         </p:nvSpPr>
         <p:spPr>
           <a:xfrm>
-            <a:off x="3172968" y="1645920"/>
-            <a:ext cx="4251960" cy="438912"/>
+            <a:off x="2423160" y="1645920"/>
+            <a:ext cx="4937760" cy="420624"/>
           </a:xfrm>
           <a:prstGeom prst="rect">
             <a:avLst/>
@@ -6844,7 +7895,7 @@
           <a:p>
             <a:pPr indent="0" marL="0">
               <a:lnSpc>
-                <a:spcPct val="120000"/>
+                <a:spcPct val="115000"/>
               </a:lnSpc>
               <a:buNone/>
             </a:pPr>
@@ -6871,114 +7922,7 @@
         </p:nvSpPr>
         <p:spPr>
           <a:xfrm>
-            <a:off x="566928" y="2084832"/>
-            <a:ext cx="6858000" cy="0"/>
-          </a:xfrm>
-          <a:prstGeom prst="line">
-            <a:avLst/>
-          </a:prstGeom>
-          <a:noFill/>
-          <a:ln w="3810">
-            <a:solidFill>
-              <a:srgbClr val="CBD5E0"/>
-            </a:solidFill>
-            <a:prstDash val="solid"/>
-          </a:ln>
-        </p:spPr>
-      </p:sp>
-      <p:sp>
-        <p:nvSpPr>
-          <p:cNvPr id="10" name="Text 8"/>
-          <p:cNvSpPr/>
-          <p:nvPr/>
-        </p:nvSpPr>
-        <p:spPr>
-          <a:xfrm>
-            <a:off x="566928" y="2084832"/>
-            <a:ext cx="2606040" cy="438912"/>
-          </a:xfrm>
-          <a:prstGeom prst="rect">
-            <a:avLst/>
-          </a:prstGeom>
-          <a:noFill/>
-          <a:ln/>
-        </p:spPr>
-        <p:txBody>
-          <a:bodyPr wrap="square" lIns="0" tIns="0" rIns="0" bIns="0" rtlCol="0" anchor="ctr"/>
-          <a:lstStyle/>
-          <a:p>
-            <a:pPr indent="0" marL="0">
-              <a:lnSpc>
-                <a:spcPct val="120000"/>
-              </a:lnSpc>
-              <a:buNone/>
-            </a:pPr>
-            <a:r>
-              <a:rPr lang="en-US" sz="1350" dirty="0">
-                <a:solidFill>
-                  <a:srgbClr val="718096"/>
-                </a:solidFill>
-                <a:latin typeface="Pretendard" pitchFamily="34" charset="0"/>
-                <a:ea typeface="Pretendard" pitchFamily="34" charset="-122"/>
-                <a:cs typeface="Pretendard" pitchFamily="34" charset="-120"/>
-              </a:rPr>
-              <a:t>층고</a:t>
-            </a:r>
-            <a:endParaRPr lang="en-US" sz="1350" dirty="0"/>
-          </a:p>
-        </p:txBody>
-      </p:sp>
-      <p:sp>
-        <p:nvSpPr>
-          <p:cNvPr id="11" name="Text 9"/>
-          <p:cNvSpPr/>
-          <p:nvPr/>
-        </p:nvSpPr>
-        <p:spPr>
-          <a:xfrm>
-            <a:off x="3172968" y="2084832"/>
-            <a:ext cx="4251960" cy="438912"/>
-          </a:xfrm>
-          <a:prstGeom prst="rect">
-            <a:avLst/>
-          </a:prstGeom>
-          <a:noFill/>
-          <a:ln/>
-        </p:spPr>
-        <p:txBody>
-          <a:bodyPr wrap="square" lIns="0" tIns="0" rIns="0" bIns="0" rtlCol="0" anchor="ctr"/>
-          <a:lstStyle/>
-          <a:p>
-            <a:pPr indent="0" marL="0">
-              <a:lnSpc>
-                <a:spcPct val="120000"/>
-              </a:lnSpc>
-              <a:buNone/>
-            </a:pPr>
-            <a:r>
-              <a:rPr lang="en-US" sz="1350" b="1" dirty="0">
-                <a:solidFill>
-                  <a:srgbClr val="10161F"/>
-                </a:solidFill>
-                <a:latin typeface="Pretendard" pitchFamily="34" charset="0"/>
-                <a:ea typeface="Pretendard" pitchFamily="34" charset="-122"/>
-                <a:cs typeface="Pretendard" pitchFamily="34" charset="-120"/>
-              </a:rPr>
-              <a:t>4.2m</a:t>
-            </a:r>
-            <a:endParaRPr lang="en-US" sz="1350" dirty="0"/>
-          </a:p>
-        </p:txBody>
-      </p:sp>
-      <p:sp>
-        <p:nvSpPr>
-          <p:cNvPr id="12" name="Shape 10"/>
-          <p:cNvSpPr/>
-          <p:nvPr/>
-        </p:nvSpPr>
-        <p:spPr>
-          <a:xfrm>
-            <a:off x="7604608" y="1371600"/>
+            <a:off x="7540600" y="1371600"/>
             <a:ext cx="0" cy="4754880"/>
           </a:xfrm>
           <a:prstGeom prst="line">
@@ -6995,56 +7939,56 @@
       </p:sp>
       <p:sp>
         <p:nvSpPr>
-          <p:cNvPr id="13" name="Shape 11"/>
-          <p:cNvSpPr/>
-          <p:nvPr/>
-        </p:nvSpPr>
-        <p:spPr>
-          <a:xfrm>
-            <a:off x="7784287" y="1645920"/>
-            <a:ext cx="3840480" cy="1645920"/>
+          <p:cNvPr id="10" name="Shape 8"/>
+          <p:cNvSpPr/>
+          <p:nvPr/>
+        </p:nvSpPr>
+        <p:spPr>
+          <a:xfrm>
+            <a:off x="7720279" y="1645920"/>
+            <a:ext cx="3840480" cy="2103120"/>
           </a:xfrm>
           <a:prstGeom prst="roundRect">
             <a:avLst>
-              <a:gd name="adj" fmla="val 3333"/>
+              <a:gd name="adj" fmla="val 2609"/>
             </a:avLst>
           </a:prstGeom>
           <a:solidFill>
-            <a:srgbClr val="F3EBDA"/>
+            <a:srgbClr val="BEE3F8"/>
           </a:solidFill>
           <a:ln/>
         </p:spPr>
       </p:sp>
       <p:sp>
         <p:nvSpPr>
-          <p:cNvPr id="14" name="Shape 12"/>
-          <p:cNvSpPr/>
-          <p:nvPr/>
-        </p:nvSpPr>
-        <p:spPr>
-          <a:xfrm>
-            <a:off x="7784287" y="1700784"/>
-            <a:ext cx="36576" cy="1536192"/>
+          <p:cNvPr id="11" name="Shape 9"/>
+          <p:cNvSpPr/>
+          <p:nvPr/>
+        </p:nvSpPr>
+        <p:spPr>
+          <a:xfrm>
+            <a:off x="7720279" y="1700784"/>
+            <a:ext cx="36576" cy="1993392"/>
           </a:xfrm>
           <a:prstGeom prst="rect">
             <a:avLst/>
           </a:prstGeom>
           <a:solidFill>
-            <a:srgbClr val="977024"/>
+            <a:srgbClr val="2B6CB0"/>
           </a:solidFill>
           <a:ln/>
         </p:spPr>
       </p:sp>
       <p:sp>
         <p:nvSpPr>
-          <p:cNvPr id="15" name="Text 13"/>
-          <p:cNvSpPr/>
-          <p:nvPr/>
-        </p:nvSpPr>
-        <p:spPr>
-          <a:xfrm>
-            <a:off x="7967167" y="1755648"/>
-            <a:ext cx="3511296" cy="201168"/>
+          <p:cNvPr id="12" name="Text 10"/>
+          <p:cNvSpPr/>
+          <p:nvPr/>
+        </p:nvSpPr>
+        <p:spPr>
+          <a:xfrm>
+            <a:off x="7866583" y="1737360"/>
+            <a:ext cx="3584448" cy="201168"/>
           </a:xfrm>
           <a:prstGeom prst="rect">
             <a:avLst/>
@@ -7059,85 +8003,317 @@
             <a:pPr indent="0" marL="0">
               <a:buNone/>
             </a:pPr>
-            <a:endParaRPr lang="en-US" sz="1050" dirty="0"/>
-          </a:p>
-        </p:txBody>
-      </p:sp>
-      <p:sp>
-        <p:nvSpPr>
-          <p:cNvPr id="16" name="Text 14"/>
-          <p:cNvSpPr/>
-          <p:nvPr/>
-        </p:nvSpPr>
-        <p:spPr>
-          <a:xfrm>
-            <a:off x="7967167" y="1975104"/>
-            <a:ext cx="3511296" cy="1243584"/>
-          </a:xfrm>
-          <a:prstGeom prst="rect">
-            <a:avLst/>
-          </a:prstGeom>
-          <a:noFill/>
-          <a:ln/>
-        </p:spPr>
-        <p:txBody>
-          <a:bodyPr wrap="square" lIns="0" tIns="0" rIns="0" bIns="0" rtlCol="0" anchor="t"/>
-          <a:lstStyle/>
-          <a:p>
-            <a:pPr indent="0" marL="0">
-              <a:lnSpc>
-                <a:spcPct val="120000"/>
-              </a:lnSpc>
-              <a:buNone/>
-            </a:pPr>
-            <a:r>
-              <a:rPr lang="en-US" sz="930" dirty="0">
-                <a:solidFill>
-                  <a:srgbClr val="10161F"/>
+            <a:r>
+              <a:rPr lang="en-US" sz="1050" b="1" dirty="0">
+                <a:solidFill>
+                  <a:srgbClr val="2B6CB0"/>
                 </a:solidFill>
                 <a:latin typeface="Pretendard" pitchFamily="34" charset="0"/>
                 <a:ea typeface="Pretendard" pitchFamily="34" charset="-122"/>
                 <a:cs typeface="Pretendard" pitchFamily="34" charset="-120"/>
               </a:rPr>
-              <a:t>성수 IT밸리 단독 통사옥 빌딩입니다.</a:t>
-            </a:r>
-            <a:endParaRPr lang="en-US" sz="930" dirty="0"/>
-          </a:p>
-        </p:txBody>
-      </p:sp>
-      <p:sp>
-        <p:nvSpPr>
-          <p:cNvPr id="17" name="Text 15"/>
-          <p:cNvSpPr/>
-          <p:nvPr/>
-        </p:nvSpPr>
-        <p:spPr>
-          <a:xfrm>
-            <a:off x="566928" y="6382512"/>
-            <a:ext cx="7315200" cy="219456"/>
-          </a:xfrm>
-          <a:prstGeom prst="rect">
-            <a:avLst/>
-          </a:prstGeom>
-          <a:noFill/>
-          <a:ln/>
-        </p:spPr>
-        <p:txBody>
-          <a:bodyPr wrap="square" lIns="0" tIns="0" rIns="0" bIns="0" rtlCol="0" anchor="ctr"/>
-          <a:lstStyle/>
-          <a:p>
-            <a:pPr indent="0" marL="0">
-              <a:buNone/>
-            </a:pPr>
-            <a:r>
-              <a:rPr lang="en-US" sz="800" dirty="0">
-                <a:solidFill>
-                  <a:srgbClr val="718096"/>
+              <a:t>토지 및 건축 규제 포인트</a:t>
+            </a:r>
+            <a:endParaRPr lang="en-US" sz="1050" dirty="0"/>
+          </a:p>
+        </p:txBody>
+      </p:sp>
+      <p:sp>
+        <p:nvSpPr>
+          <p:cNvPr id="13" name="Text 11"/>
+          <p:cNvSpPr/>
+          <p:nvPr/>
+        </p:nvSpPr>
+        <p:spPr>
+          <a:xfrm>
+            <a:off x="7866583" y="1938528"/>
+            <a:ext cx="3584448" cy="1773936"/>
+          </a:xfrm>
+          <a:prstGeom prst="rect">
+            <a:avLst/>
+          </a:prstGeom>
+          <a:noFill/>
+          <a:ln/>
+        </p:spPr>
+        <p:txBody>
+          <a:bodyPr wrap="square" lIns="0" tIns="0" rIns="0" bIns="0" rtlCol="0" anchor="t"/>
+          <a:lstStyle/>
+          <a:p>
+            <a:pPr marL="342900" indent="-342900">
+              <a:lnSpc>
+                <a:spcPct val="108000"/>
+              </a:lnSpc>
+              <a:buSzPct val="100000"/>
+              <a:buChar char="•"/>
+            </a:pPr>
+            <a:r>
+              <a:rPr lang="en-US" sz="980" dirty="0">
+                <a:solidFill>
+                  <a:srgbClr val="10161F"/>
                 </a:solidFill>
                 <a:latin typeface="Pretendard" pitchFamily="34" charset="0"/>
                 <a:ea typeface="Pretendard" pitchFamily="34" charset="-122"/>
                 <a:cs typeface="Pretendard" pitchFamily="34" charset="-120"/>
               </a:rPr>
+              <a:t>용도지역·용도지구 기준 건폐율/용적률 상한 확인</a:t>
+            </a:r>
+            <a:endParaRPr lang="en-US" sz="980" dirty="0"/>
+          </a:p>
+          <a:p>
+            <a:pPr marL="342900" indent="-342900">
+              <a:lnSpc>
+                <a:spcPct val="108000"/>
+              </a:lnSpc>
+              <a:spcBef>
+                <a:spcPts val="300"/>
+              </a:spcBef>
+              <a:buSzPct val="100000"/>
+              <a:buChar char="•"/>
+            </a:pPr>
+            <a:r>
+              <a:rPr lang="en-US" sz="980" dirty="0">
+                <a:solidFill>
+                  <a:srgbClr val="10161F"/>
+                </a:solidFill>
+                <a:latin typeface="Pretendard" pitchFamily="34" charset="0"/>
+                <a:ea typeface="Pretendard" pitchFamily="34" charset="-122"/>
+                <a:cs typeface="Pretendard" pitchFamily="34" charset="-120"/>
+              </a:rPr>
+              <a:t>필지 형상 및 접도 조건에 따른 건축 가능 면적 검토</a:t>
+            </a:r>
+            <a:endParaRPr lang="en-US" sz="980" dirty="0"/>
+          </a:p>
+          <a:p>
+            <a:pPr marL="342900" indent="-342900">
+              <a:lnSpc>
+                <a:spcPct val="108000"/>
+              </a:lnSpc>
+              <a:spcBef>
+                <a:spcPts val="300"/>
+              </a:spcBef>
+              <a:buSzPct val="100000"/>
+              <a:buChar char="•"/>
+            </a:pPr>
+            <a:r>
+              <a:rPr lang="en-US" sz="980" dirty="0">
+                <a:solidFill>
+                  <a:srgbClr val="10161F"/>
+                </a:solidFill>
+                <a:latin typeface="Pretendard" pitchFamily="34" charset="0"/>
+                <a:ea typeface="Pretendard" pitchFamily="34" charset="-122"/>
+                <a:cs typeface="Pretendard" pitchFamily="34" charset="-120"/>
+              </a:rPr>
+              <a:t>토지이용계획 열람 및 개발행위허가 제한 여부 확인</a:t>
+            </a:r>
+            <a:endParaRPr lang="en-US" sz="980" dirty="0"/>
+          </a:p>
+        </p:txBody>
+      </p:sp>
+      <p:sp>
+        <p:nvSpPr>
+          <p:cNvPr id="14" name="Shape 12"/>
+          <p:cNvSpPr/>
+          <p:nvPr/>
+        </p:nvSpPr>
+        <p:spPr>
+          <a:xfrm>
+            <a:off x="7720279" y="3977640"/>
+            <a:ext cx="3840480" cy="2148840"/>
+          </a:xfrm>
+          <a:prstGeom prst="roundRect">
+            <a:avLst>
+              <a:gd name="adj" fmla="val 2553"/>
+            </a:avLst>
+          </a:prstGeom>
+          <a:solidFill>
+            <a:srgbClr val="BEE3F8"/>
+          </a:solidFill>
+          <a:ln/>
+        </p:spPr>
+      </p:sp>
+      <p:sp>
+        <p:nvSpPr>
+          <p:cNvPr id="15" name="Shape 13"/>
+          <p:cNvSpPr/>
+          <p:nvPr/>
+        </p:nvSpPr>
+        <p:spPr>
+          <a:xfrm>
+            <a:off x="7720279" y="4032504"/>
+            <a:ext cx="36576" cy="2039112"/>
+          </a:xfrm>
+          <a:prstGeom prst="rect">
+            <a:avLst/>
+          </a:prstGeom>
+          <a:solidFill>
+            <a:srgbClr val="2B6CB0"/>
+          </a:solidFill>
+          <a:ln/>
+        </p:spPr>
+      </p:sp>
+      <p:sp>
+        <p:nvSpPr>
+          <p:cNvPr id="16" name="Text 14"/>
+          <p:cNvSpPr/>
+          <p:nvPr/>
+        </p:nvSpPr>
+        <p:spPr>
+          <a:xfrm>
+            <a:off x="7866583" y="4069080"/>
+            <a:ext cx="3584448" cy="201168"/>
+          </a:xfrm>
+          <a:prstGeom prst="rect">
+            <a:avLst/>
+          </a:prstGeom>
+          <a:noFill/>
+          <a:ln/>
+        </p:spPr>
+        <p:txBody>
+          <a:bodyPr wrap="square" lIns="0" tIns="0" rIns="0" bIns="0" rtlCol="0" anchor="ctr"/>
+          <a:lstStyle/>
+          <a:p>
+            <a:pPr indent="0" marL="0">
+              <a:buNone/>
+            </a:pPr>
+            <a:r>
+              <a:rPr lang="en-US" sz="1050" b="1" dirty="0">
+                <a:solidFill>
+                  <a:srgbClr val="2B6CB0"/>
+                </a:solidFill>
+                <a:latin typeface="Pretendard" pitchFamily="34" charset="0"/>
+                <a:ea typeface="Pretendard" pitchFamily="34" charset="-122"/>
+                <a:cs typeface="Pretendard" pitchFamily="34" charset="-120"/>
+              </a:rPr>
+              <a:t>권리관계 및 공적장부</a:t>
+            </a:r>
+            <a:endParaRPr lang="en-US" sz="1050" dirty="0"/>
+          </a:p>
+        </p:txBody>
+      </p:sp>
+      <p:sp>
+        <p:nvSpPr>
+          <p:cNvPr id="17" name="Text 15"/>
+          <p:cNvSpPr/>
+          <p:nvPr/>
+        </p:nvSpPr>
+        <p:spPr>
+          <a:xfrm>
+            <a:off x="7866583" y="4270248"/>
+            <a:ext cx="3584448" cy="1819656"/>
+          </a:xfrm>
+          <a:prstGeom prst="rect">
+            <a:avLst/>
+          </a:prstGeom>
+          <a:noFill/>
+          <a:ln/>
+        </p:spPr>
+        <p:txBody>
+          <a:bodyPr wrap="square" lIns="0" tIns="0" rIns="0" bIns="0" rtlCol="0" anchor="t"/>
+          <a:lstStyle/>
+          <a:p>
+            <a:pPr marL="342900" indent="-342900">
+              <a:lnSpc>
+                <a:spcPct val="108000"/>
+              </a:lnSpc>
+              <a:buSzPct val="100000"/>
+              <a:buChar char="•"/>
+            </a:pPr>
+            <a:r>
+              <a:rPr lang="en-US" sz="980" dirty="0">
+                <a:solidFill>
+                  <a:srgbClr val="10161F"/>
+                </a:solidFill>
+                <a:latin typeface="Pretendard" pitchFamily="34" charset="0"/>
+                <a:ea typeface="Pretendard" pitchFamily="34" charset="-122"/>
+                <a:cs typeface="Pretendard" pitchFamily="34" charset="-120"/>
+              </a:rPr>
+              <a:t>등기부등본 갑구 소유권 및 을구 근저당·가압류 확인</a:t>
+            </a:r>
+            <a:endParaRPr lang="en-US" sz="980" dirty="0"/>
+          </a:p>
+          <a:p>
+            <a:pPr marL="342900" indent="-342900">
+              <a:lnSpc>
+                <a:spcPct val="108000"/>
+              </a:lnSpc>
+              <a:spcBef>
+                <a:spcPts val="300"/>
+              </a:spcBef>
+              <a:buSzPct val="100000"/>
+              <a:buChar char="•"/>
+            </a:pPr>
+            <a:r>
+              <a:rPr lang="en-US" sz="980" dirty="0">
+                <a:solidFill>
+                  <a:srgbClr val="10161F"/>
+                </a:solidFill>
+                <a:latin typeface="Pretendard" pitchFamily="34" charset="0"/>
+                <a:ea typeface="Pretendard" pitchFamily="34" charset="-122"/>
+                <a:cs typeface="Pretendard" pitchFamily="34" charset="-120"/>
+              </a:rPr>
+              <a:t>건축물대장 기재 사항과 실물 현황 대조 점검</a:t>
+            </a:r>
+            <a:endParaRPr lang="en-US" sz="980" dirty="0"/>
+          </a:p>
+          <a:p>
+            <a:pPr marL="342900" indent="-342900">
+              <a:lnSpc>
+                <a:spcPct val="108000"/>
+              </a:lnSpc>
+              <a:spcBef>
+                <a:spcPts val="300"/>
+              </a:spcBef>
+              <a:buSzPct val="100000"/>
+              <a:buChar char="•"/>
+            </a:pPr>
+            <a:r>
+              <a:rPr lang="en-US" sz="980" dirty="0">
+                <a:solidFill>
+                  <a:srgbClr val="10161F"/>
+                </a:solidFill>
+                <a:latin typeface="Pretendard" pitchFamily="34" charset="0"/>
+                <a:ea typeface="Pretendard" pitchFamily="34" charset="-122"/>
+                <a:cs typeface="Pretendard" pitchFamily="34" charset="-120"/>
+              </a:rPr>
+              <a:t>개별공시지가 및 실거래가 비교 분석</a:t>
+            </a:r>
+            <a:endParaRPr lang="en-US" sz="980" dirty="0"/>
+          </a:p>
+        </p:txBody>
+      </p:sp>
+      <p:sp>
+        <p:nvSpPr>
+          <p:cNvPr id="18" name="Text 16"/>
+          <p:cNvSpPr/>
+          <p:nvPr/>
+        </p:nvSpPr>
+        <p:spPr>
+          <a:xfrm>
+            <a:off x="502920" y="6382512"/>
+            <a:ext cx="7315200" cy="219456"/>
+          </a:xfrm>
+          <a:prstGeom prst="rect">
+            <a:avLst/>
+          </a:prstGeom>
+          <a:noFill/>
+          <a:ln/>
+        </p:spPr>
+        <p:txBody>
+          <a:bodyPr wrap="square" lIns="0" tIns="0" rIns="0" bIns="0" rtlCol="0" anchor="ctr"/>
+          <a:lstStyle/>
+          <a:p>
+            <a:pPr indent="0" marL="0">
+              <a:buNone/>
+            </a:pPr>
+            <a:r>
+              <a:rPr lang="en-US" sz="800" dirty="0">
+                <a:solidFill>
+                  <a:srgbClr val="718096"/>
+                </a:solidFill>
+                <a:latin typeface="Pretendard" pitchFamily="34" charset="0"/>
+                <a:ea typeface="Pretendard" pitchFamily="34" charset="-122"/>
+                <a:cs typeface="Pretendard" pitchFamily="34" charset="-120"/>
+              </a:rPr>
               <a:t>크리딜   |   </a:t>
             </a:r>
             <a:endParaRPr lang="en-US" sz="800" dirty="0"/>
@@ -7146,13 +8322,13 @@
       </p:sp>
       <p:sp>
         <p:nvSpPr>
-          <p:cNvPr id="18" name="Text 16"/>
-          <p:cNvSpPr/>
-          <p:nvPr/>
-        </p:nvSpPr>
-        <p:spPr>
-          <a:xfrm>
-            <a:off x="10710367" y="6382512"/>
+          <p:cNvPr id="19" name="Text 17"/>
+          <p:cNvSpPr/>
+          <p:nvPr/>
+        </p:nvSpPr>
+        <p:spPr>
+          <a:xfrm>
+            <a:off x="10774375" y="6382512"/>
             <a:ext cx="914400" cy="219456"/>
           </a:xfrm>
           <a:prstGeom prst="rect">
@@ -7223,7 +8399,7 @@
         </p:nvSpPr>
         <p:spPr>
           <a:xfrm>
-            <a:off x="566928" y="457200"/>
+            <a:off x="502920" y="457200"/>
             <a:ext cx="384048" cy="384048"/>
           </a:xfrm>
           <a:prstGeom prst="ellipse">
@@ -7243,7 +8419,7 @@
         </p:nvSpPr>
         <p:spPr>
           <a:xfrm>
-            <a:off x="566928" y="457200"/>
+            <a:off x="502920" y="457200"/>
             <a:ext cx="384048" cy="384048"/>
           </a:xfrm>
           <a:prstGeom prst="rect">
@@ -7282,7 +8458,7 @@
         </p:nvSpPr>
         <p:spPr>
           <a:xfrm>
-            <a:off x="1133856" y="457200"/>
+            <a:off x="1069848" y="457200"/>
             <a:ext cx="10490911" cy="182880"/>
           </a:xfrm>
           <a:prstGeom prst="rect">
@@ -7307,7 +8483,7 @@
                 <a:ea typeface="Arial" pitchFamily="34" charset="-122"/>
                 <a:cs typeface="Arial" pitchFamily="34" charset="-120"/>
               </a:rPr>
-              <a:t>Plan</a:t>
+              <a:t>Building</a:t>
             </a:r>
             <a:endParaRPr lang="en-US" sz="950" dirty="0"/>
           </a:p>
@@ -7321,7 +8497,7 @@
         </p:nvSpPr>
         <p:spPr>
           <a:xfrm>
-            <a:off x="1133856" y="640080"/>
+            <a:off x="1069848" y="640080"/>
             <a:ext cx="10490911" cy="365760"/>
           </a:xfrm>
           <a:prstGeom prst="rect">
@@ -7346,7 +8522,7 @@
                 <a:ea typeface="Pretendard" pitchFamily="34" charset="-122"/>
                 <a:cs typeface="Pretendard" pitchFamily="34" charset="-120"/>
               </a:rPr>
-              <a:t>사용계획</a:t>
+              <a:t>건물 개요</a:t>
             </a:r>
             <a:endParaRPr lang="en-US" sz="2300" dirty="0"/>
           </a:p>
@@ -7360,7 +8536,7 @@
         </p:nvSpPr>
         <p:spPr>
           <a:xfrm>
-            <a:off x="566928" y="1371600"/>
+            <a:off x="502920" y="1371600"/>
             <a:ext cx="6858000" cy="237744"/>
           </a:xfrm>
           <a:prstGeom prst="rect">
@@ -7399,8 +8575,8 @@
         </p:nvSpPr>
         <p:spPr>
           <a:xfrm>
-            <a:off x="566928" y="1645920"/>
-            <a:ext cx="6858000" cy="438912"/>
+            <a:off x="502920" y="1645920"/>
+            <a:ext cx="1920240" cy="420624"/>
           </a:xfrm>
           <a:prstGeom prst="rect">
             <a:avLst/>
@@ -7414,20 +8590,20 @@
           <a:p>
             <a:pPr indent="0" marL="0">
               <a:lnSpc>
-                <a:spcPct val="120000"/>
+                <a:spcPct val="115000"/>
               </a:lnSpc>
               <a:buNone/>
             </a:pPr>
             <a:r>
               <a:rPr lang="en-US" sz="1350" dirty="0">
                 <a:solidFill>
-                  <a:srgbClr val="10161F"/>
+                  <a:srgbClr val="718096"/>
                 </a:solidFill>
                 <a:latin typeface="Pretendard" pitchFamily="34" charset="0"/>
                 <a:ea typeface="Pretendard" pitchFamily="34" charset="-122"/>
                 <a:cs typeface="Pretendard" pitchFamily="34" charset="-120"/>
               </a:rPr>
-              <a:t>자주식 주차 12대</a:t>
+              <a:t>연면적</a:t>
             </a:r>
             <a:endParaRPr lang="en-US" sz="1350" dirty="0"/>
           </a:p>
@@ -7435,13 +8611,55 @@
       </p:sp>
       <p:sp>
         <p:nvSpPr>
-          <p:cNvPr id="8" name="Shape 6"/>
-          <p:cNvSpPr/>
-          <p:nvPr/>
-        </p:nvSpPr>
-        <p:spPr>
-          <a:xfrm>
-            <a:off x="566928" y="2084832"/>
+          <p:cNvPr id="8" name="Text 6"/>
+          <p:cNvSpPr/>
+          <p:nvPr/>
+        </p:nvSpPr>
+        <p:spPr>
+          <a:xfrm>
+            <a:off x="2423160" y="1645920"/>
+            <a:ext cx="4937760" cy="420624"/>
+          </a:xfrm>
+          <a:prstGeom prst="rect">
+            <a:avLst/>
+          </a:prstGeom>
+          <a:noFill/>
+          <a:ln/>
+        </p:spPr>
+        <p:txBody>
+          <a:bodyPr wrap="square" lIns="0" tIns="0" rIns="0" bIns="0" rtlCol="0" anchor="ctr"/>
+          <a:lstStyle/>
+          <a:p>
+            <a:pPr indent="0" marL="0">
+              <a:lnSpc>
+                <a:spcPct val="115000"/>
+              </a:lnSpc>
+              <a:buNone/>
+            </a:pPr>
+            <a:r>
+              <a:rPr lang="en-US" sz="1350" b="1" dirty="0">
+                <a:solidFill>
+                  <a:srgbClr val="10161F"/>
+                </a:solidFill>
+                <a:latin typeface="Pretendard" pitchFamily="34" charset="0"/>
+                <a:ea typeface="Pretendard" pitchFamily="34" charset="-122"/>
+                <a:cs typeface="Pretendard" pitchFamily="34" charset="-120"/>
+              </a:rPr>
+              <a:t>512.4평</a:t>
+            </a:r>
+            <a:endParaRPr lang="en-US" sz="1350" dirty="0"/>
+          </a:p>
+        </p:txBody>
+      </p:sp>
+      <p:sp>
+        <p:nvSpPr>
+          <p:cNvPr id="9" name="Shape 7"/>
+          <p:cNvSpPr/>
+          <p:nvPr/>
+        </p:nvSpPr>
+        <p:spPr>
+          <a:xfrm>
+            <a:off x="502920" y="2066544"/>
             <a:ext cx="6858000" cy="0"/>
           </a:xfrm>
           <a:prstGeom prst="line">
@@ -7458,14 +8676,14 @@
       </p:sp>
       <p:sp>
         <p:nvSpPr>
-          <p:cNvPr id="9" name="Text 7"/>
-          <p:cNvSpPr/>
-          <p:nvPr/>
-        </p:nvSpPr>
-        <p:spPr>
-          <a:xfrm>
-            <a:off x="566928" y="2084832"/>
-            <a:ext cx="6858000" cy="438912"/>
+          <p:cNvPr id="10" name="Text 8"/>
+          <p:cNvSpPr/>
+          <p:nvPr/>
+        </p:nvSpPr>
+        <p:spPr>
+          <a:xfrm>
+            <a:off x="502920" y="2066544"/>
+            <a:ext cx="1920240" cy="420624"/>
           </a:xfrm>
           <a:prstGeom prst="rect">
             <a:avLst/>
@@ -7479,20 +8697,20 @@
           <a:p>
             <a:pPr indent="0" marL="0">
               <a:lnSpc>
-                <a:spcPct val="120000"/>
+                <a:spcPct val="115000"/>
               </a:lnSpc>
               <a:buNone/>
             </a:pPr>
             <a:r>
               <a:rPr lang="en-US" sz="1350" dirty="0">
                 <a:solidFill>
-                  <a:srgbClr val="10161F"/>
+                  <a:srgbClr val="718096"/>
                 </a:solidFill>
                 <a:latin typeface="Pretendard" pitchFamily="34" charset="0"/>
                 <a:ea typeface="Pretendard" pitchFamily="34" charset="-122"/>
                 <a:cs typeface="Pretendard" pitchFamily="34" charset="-120"/>
               </a:rPr>
-              <a:t>옥상 휴게정원</a:t>
+              <a:t>층고</a:t>
             </a:r>
             <a:endParaRPr lang="en-US" sz="1350" dirty="0"/>
           </a:p>
@@ -7500,13 +8718,55 @@
       </p:sp>
       <p:sp>
         <p:nvSpPr>
-          <p:cNvPr id="10" name="Shape 8"/>
-          <p:cNvSpPr/>
-          <p:nvPr/>
-        </p:nvSpPr>
-        <p:spPr>
-          <a:xfrm>
-            <a:off x="7604608" y="1371600"/>
+          <p:cNvPr id="11" name="Text 9"/>
+          <p:cNvSpPr/>
+          <p:nvPr/>
+        </p:nvSpPr>
+        <p:spPr>
+          <a:xfrm>
+            <a:off x="2423160" y="2066544"/>
+            <a:ext cx="4937760" cy="420624"/>
+          </a:xfrm>
+          <a:prstGeom prst="rect">
+            <a:avLst/>
+          </a:prstGeom>
+          <a:noFill/>
+          <a:ln/>
+        </p:spPr>
+        <p:txBody>
+          <a:bodyPr wrap="square" lIns="0" tIns="0" rIns="0" bIns="0" rtlCol="0" anchor="ctr"/>
+          <a:lstStyle/>
+          <a:p>
+            <a:pPr indent="0" marL="0">
+              <a:lnSpc>
+                <a:spcPct val="115000"/>
+              </a:lnSpc>
+              <a:buNone/>
+            </a:pPr>
+            <a:r>
+              <a:rPr lang="en-US" sz="1350" b="1" dirty="0">
+                <a:solidFill>
+                  <a:srgbClr val="10161F"/>
+                </a:solidFill>
+                <a:latin typeface="Pretendard" pitchFamily="34" charset="0"/>
+                <a:ea typeface="Pretendard" pitchFamily="34" charset="-122"/>
+                <a:cs typeface="Pretendard" pitchFamily="34" charset="-120"/>
+              </a:rPr>
+              <a:t>4.2m</a:t>
+            </a:r>
+            <a:endParaRPr lang="en-US" sz="1350" dirty="0"/>
+          </a:p>
+        </p:txBody>
+      </p:sp>
+      <p:sp>
+        <p:nvSpPr>
+          <p:cNvPr id="12" name="Shape 10"/>
+          <p:cNvSpPr/>
+          <p:nvPr/>
+        </p:nvSpPr>
+        <p:spPr>
+          <a:xfrm>
+            <a:off x="7540600" y="1371600"/>
             <a:ext cx="0" cy="4754880"/>
           </a:xfrm>
           <a:prstGeom prst="line">
@@ -7523,13 +8783,13 @@
       </p:sp>
       <p:sp>
         <p:nvSpPr>
-          <p:cNvPr id="11" name="Shape 9"/>
-          <p:cNvSpPr/>
-          <p:nvPr/>
-        </p:nvSpPr>
-        <p:spPr>
-          <a:xfrm>
-            <a:off x="7784287" y="1645920"/>
+          <p:cNvPr id="13" name="Shape 11"/>
+          <p:cNvSpPr/>
+          <p:nvPr/>
+        </p:nvSpPr>
+        <p:spPr>
+          <a:xfrm>
+            <a:off x="7720279" y="1645920"/>
             <a:ext cx="3840480" cy="1645920"/>
           </a:xfrm>
           <a:prstGeom prst="roundRect">
@@ -7545,13 +8805,13 @@
       </p:sp>
       <p:sp>
         <p:nvSpPr>
-          <p:cNvPr id="12" name="Shape 10"/>
-          <p:cNvSpPr/>
-          <p:nvPr/>
-        </p:nvSpPr>
-        <p:spPr>
-          <a:xfrm>
-            <a:off x="7784287" y="1700784"/>
+          <p:cNvPr id="14" name="Shape 12"/>
+          <p:cNvSpPr/>
+          <p:nvPr/>
+        </p:nvSpPr>
+        <p:spPr>
+          <a:xfrm>
+            <a:off x="7720279" y="1700784"/>
             <a:ext cx="36576" cy="1536192"/>
           </a:xfrm>
           <a:prstGeom prst="rect">
@@ -7565,14 +8825,14 @@
       </p:sp>
       <p:sp>
         <p:nvSpPr>
-          <p:cNvPr id="13" name="Text 11"/>
-          <p:cNvSpPr/>
-          <p:nvPr/>
-        </p:nvSpPr>
-        <p:spPr>
-          <a:xfrm>
-            <a:off x="7967167" y="1755648"/>
-            <a:ext cx="3511296" cy="201168"/>
+          <p:cNvPr id="15" name="Text 13"/>
+          <p:cNvSpPr/>
+          <p:nvPr/>
+        </p:nvSpPr>
+        <p:spPr>
+          <a:xfrm>
+            <a:off x="7866583" y="1737360"/>
+            <a:ext cx="3584448" cy="201168"/>
           </a:xfrm>
           <a:prstGeom prst="rect">
             <a:avLst/>
@@ -7593,14 +8853,14 @@
       </p:sp>
       <p:sp>
         <p:nvSpPr>
-          <p:cNvPr id="14" name="Text 12"/>
-          <p:cNvSpPr/>
-          <p:nvPr/>
-        </p:nvSpPr>
-        <p:spPr>
-          <a:xfrm>
-            <a:off x="7967167" y="1975104"/>
-            <a:ext cx="3511296" cy="1243584"/>
+          <p:cNvPr id="16" name="Text 14"/>
+          <p:cNvSpPr/>
+          <p:nvPr/>
+        </p:nvSpPr>
+        <p:spPr>
+          <a:xfrm>
+            <a:off x="7866583" y="1938528"/>
+            <a:ext cx="3584448" cy="1316736"/>
           </a:xfrm>
           <a:prstGeom prst="rect">
             <a:avLst/>
@@ -7614,12 +8874,12 @@
           <a:p>
             <a:pPr indent="0" marL="0">
               <a:lnSpc>
-                <a:spcPct val="120000"/>
+                <a:spcPct val="108000"/>
               </a:lnSpc>
               <a:buNone/>
             </a:pPr>
             <a:r>
-              <a:rPr lang="en-US" sz="930" dirty="0">
+              <a:rPr lang="en-US" sz="980" dirty="0">
                 <a:solidFill>
                   <a:srgbClr val="10161F"/>
                 </a:solidFill>
@@ -7627,21 +8887,21 @@
                 <a:ea typeface="Pretendard" pitchFamily="34" charset="-122"/>
                 <a:cs typeface="Pretendard" pitchFamily="34" charset="-120"/>
               </a:rPr>
-              <a:t>전층 명도 완료, 즉시 사옥 입주 가능합니다.</a:t>
-            </a:r>
-            <a:endParaRPr lang="en-US" sz="930" dirty="0"/>
-          </a:p>
-        </p:txBody>
-      </p:sp>
-      <p:sp>
-        <p:nvSpPr>
-          <p:cNvPr id="15" name="Text 13"/>
-          <p:cNvSpPr/>
-          <p:nvPr/>
-        </p:nvSpPr>
-        <p:spPr>
-          <a:xfrm>
-            <a:off x="566928" y="6382512"/>
+              <a:t>성수 IT밸리 단독 통사옥 빌딩입니다.</a:t>
+            </a:r>
+            <a:endParaRPr lang="en-US" sz="980" dirty="0"/>
+          </a:p>
+        </p:txBody>
+      </p:sp>
+      <p:sp>
+        <p:nvSpPr>
+          <p:cNvPr id="17" name="Text 15"/>
+          <p:cNvSpPr/>
+          <p:nvPr/>
+        </p:nvSpPr>
+        <p:spPr>
+          <a:xfrm>
+            <a:off x="502920" y="6382512"/>
             <a:ext cx="7315200" cy="219456"/>
           </a:xfrm>
           <a:prstGeom prst="rect">
@@ -7674,13 +8934,13 @@
       </p:sp>
       <p:sp>
         <p:nvSpPr>
-          <p:cNvPr id="16" name="Text 14"/>
-          <p:cNvSpPr/>
-          <p:nvPr/>
-        </p:nvSpPr>
-        <p:spPr>
-          <a:xfrm>
-            <a:off x="10710367" y="6382512"/>
+          <p:cNvPr id="18" name="Text 16"/>
+          <p:cNvSpPr/>
+          <p:nvPr/>
+        </p:nvSpPr>
+        <p:spPr>
+          <a:xfrm>
+            <a:off x="10774375" y="6382512"/>
             <a:ext cx="914400" cy="219456"/>
           </a:xfrm>
           <a:prstGeom prst="rect">
@@ -7751,7 +9011,7 @@
         </p:nvSpPr>
         <p:spPr>
           <a:xfrm>
-            <a:off x="566928" y="457200"/>
+            <a:off x="502920" y="457200"/>
             <a:ext cx="384048" cy="384048"/>
           </a:xfrm>
           <a:prstGeom prst="ellipse">
@@ -7771,7 +9031,7 @@
         </p:nvSpPr>
         <p:spPr>
           <a:xfrm>
-            <a:off x="566928" y="457200"/>
+            <a:off x="502920" y="457200"/>
             <a:ext cx="384048" cy="384048"/>
           </a:xfrm>
           <a:prstGeom prst="rect">
@@ -7810,7 +9070,7 @@
         </p:nvSpPr>
         <p:spPr>
           <a:xfrm>
-            <a:off x="1133856" y="457200"/>
+            <a:off x="1069848" y="457200"/>
             <a:ext cx="10490911" cy="182880"/>
           </a:xfrm>
           <a:prstGeom prst="rect">
@@ -7835,7 +9095,7 @@
                 <a:ea typeface="Arial" pitchFamily="34" charset="-122"/>
                 <a:cs typeface="Arial" pitchFamily="34" charset="-120"/>
               </a:rPr>
-              <a:t>Capital</a:t>
+              <a:t>Plan</a:t>
             </a:r>
             <a:endParaRPr lang="en-US" sz="950" dirty="0"/>
           </a:p>
@@ -7849,7 +9109,7 @@
         </p:nvSpPr>
         <p:spPr>
           <a:xfrm>
-            <a:off x="1133856" y="640080"/>
+            <a:off x="1069848" y="640080"/>
             <a:ext cx="10490911" cy="365760"/>
           </a:xfrm>
           <a:prstGeom prst="rect">
@@ -7874,6 +9134,534 @@
                 <a:ea typeface="Pretendard" pitchFamily="34" charset="-122"/>
                 <a:cs typeface="Pretendard" pitchFamily="34" charset="-120"/>
               </a:rPr>
+              <a:t>사용계획</a:t>
+            </a:r>
+            <a:endParaRPr lang="en-US" sz="2300" dirty="0"/>
+          </a:p>
+        </p:txBody>
+      </p:sp>
+      <p:sp>
+        <p:nvSpPr>
+          <p:cNvPr id="6" name="Text 4"/>
+          <p:cNvSpPr/>
+          <p:nvPr/>
+        </p:nvSpPr>
+        <p:spPr>
+          <a:xfrm>
+            <a:off x="502920" y="1371600"/>
+            <a:ext cx="6858000" cy="237744"/>
+          </a:xfrm>
+          <a:prstGeom prst="rect">
+            <a:avLst/>
+          </a:prstGeom>
+          <a:noFill/>
+          <a:ln/>
+        </p:spPr>
+        <p:txBody>
+          <a:bodyPr wrap="square" lIns="0" tIns="0" rIns="0" bIns="0" rtlCol="0" anchor="ctr"/>
+          <a:lstStyle/>
+          <a:p>
+            <a:pPr indent="0" marL="0">
+              <a:buNone/>
+            </a:pPr>
+            <a:r>
+              <a:rPr lang="en-US" sz="1100" b="1" dirty="0">
+                <a:solidFill>
+                  <a:srgbClr val="10161F"/>
+                </a:solidFill>
+                <a:latin typeface="Pretendard" pitchFamily="34" charset="0"/>
+                <a:ea typeface="Pretendard" pitchFamily="34" charset="-122"/>
+                <a:cs typeface="Pretendard" pitchFamily="34" charset="-120"/>
+              </a:rPr>
+              <a:t>건축물 개요 및 물리 스펙</a:t>
+            </a:r>
+            <a:endParaRPr lang="en-US" sz="1100" dirty="0"/>
+          </a:p>
+        </p:txBody>
+      </p:sp>
+      <p:sp>
+        <p:nvSpPr>
+          <p:cNvPr id="7" name="Text 5"/>
+          <p:cNvSpPr/>
+          <p:nvPr/>
+        </p:nvSpPr>
+        <p:spPr>
+          <a:xfrm>
+            <a:off x="502920" y="1645920"/>
+            <a:ext cx="6858000" cy="420624"/>
+          </a:xfrm>
+          <a:prstGeom prst="rect">
+            <a:avLst/>
+          </a:prstGeom>
+          <a:noFill/>
+          <a:ln/>
+        </p:spPr>
+        <p:txBody>
+          <a:bodyPr wrap="square" lIns="0" tIns="0" rIns="0" bIns="0" rtlCol="0" anchor="ctr"/>
+          <a:lstStyle/>
+          <a:p>
+            <a:pPr indent="0" marL="0">
+              <a:lnSpc>
+                <a:spcPct val="115000"/>
+              </a:lnSpc>
+              <a:buNone/>
+            </a:pPr>
+            <a:r>
+              <a:rPr lang="en-US" sz="1350" dirty="0">
+                <a:solidFill>
+                  <a:srgbClr val="10161F"/>
+                </a:solidFill>
+                <a:latin typeface="Pretendard" pitchFamily="34" charset="0"/>
+                <a:ea typeface="Pretendard" pitchFamily="34" charset="-122"/>
+                <a:cs typeface="Pretendard" pitchFamily="34" charset="-120"/>
+              </a:rPr>
+              <a:t>자주식 주차 12대</a:t>
+            </a:r>
+            <a:endParaRPr lang="en-US" sz="1350" dirty="0"/>
+          </a:p>
+        </p:txBody>
+      </p:sp>
+      <p:sp>
+        <p:nvSpPr>
+          <p:cNvPr id="8" name="Shape 6"/>
+          <p:cNvSpPr/>
+          <p:nvPr/>
+        </p:nvSpPr>
+        <p:spPr>
+          <a:xfrm>
+            <a:off x="502920" y="2066544"/>
+            <a:ext cx="6858000" cy="0"/>
+          </a:xfrm>
+          <a:prstGeom prst="line">
+            <a:avLst/>
+          </a:prstGeom>
+          <a:noFill/>
+          <a:ln w="3810">
+            <a:solidFill>
+              <a:srgbClr val="CBD5E0"/>
+            </a:solidFill>
+            <a:prstDash val="solid"/>
+          </a:ln>
+        </p:spPr>
+      </p:sp>
+      <p:sp>
+        <p:nvSpPr>
+          <p:cNvPr id="9" name="Text 7"/>
+          <p:cNvSpPr/>
+          <p:nvPr/>
+        </p:nvSpPr>
+        <p:spPr>
+          <a:xfrm>
+            <a:off x="502920" y="2066544"/>
+            <a:ext cx="6858000" cy="420624"/>
+          </a:xfrm>
+          <a:prstGeom prst="rect">
+            <a:avLst/>
+          </a:prstGeom>
+          <a:noFill/>
+          <a:ln/>
+        </p:spPr>
+        <p:txBody>
+          <a:bodyPr wrap="square" lIns="0" tIns="0" rIns="0" bIns="0" rtlCol="0" anchor="ctr"/>
+          <a:lstStyle/>
+          <a:p>
+            <a:pPr indent="0" marL="0">
+              <a:lnSpc>
+                <a:spcPct val="115000"/>
+              </a:lnSpc>
+              <a:buNone/>
+            </a:pPr>
+            <a:r>
+              <a:rPr lang="en-US" sz="1350" dirty="0">
+                <a:solidFill>
+                  <a:srgbClr val="10161F"/>
+                </a:solidFill>
+                <a:latin typeface="Pretendard" pitchFamily="34" charset="0"/>
+                <a:ea typeface="Pretendard" pitchFamily="34" charset="-122"/>
+                <a:cs typeface="Pretendard" pitchFamily="34" charset="-120"/>
+              </a:rPr>
+              <a:t>옥상 휴게정원</a:t>
+            </a:r>
+            <a:endParaRPr lang="en-US" sz="1350" dirty="0"/>
+          </a:p>
+        </p:txBody>
+      </p:sp>
+      <p:sp>
+        <p:nvSpPr>
+          <p:cNvPr id="10" name="Shape 8"/>
+          <p:cNvSpPr/>
+          <p:nvPr/>
+        </p:nvSpPr>
+        <p:spPr>
+          <a:xfrm>
+            <a:off x="7540600" y="1371600"/>
+            <a:ext cx="0" cy="4754880"/>
+          </a:xfrm>
+          <a:prstGeom prst="line">
+            <a:avLst/>
+          </a:prstGeom>
+          <a:noFill/>
+          <a:ln w="8890">
+            <a:solidFill>
+              <a:srgbClr val="B98A2E"/>
+            </a:solidFill>
+            <a:prstDash val="solid"/>
+          </a:ln>
+        </p:spPr>
+      </p:sp>
+      <p:sp>
+        <p:nvSpPr>
+          <p:cNvPr id="11" name="Shape 9"/>
+          <p:cNvSpPr/>
+          <p:nvPr/>
+        </p:nvSpPr>
+        <p:spPr>
+          <a:xfrm>
+            <a:off x="7720279" y="1645920"/>
+            <a:ext cx="3840480" cy="1645920"/>
+          </a:xfrm>
+          <a:prstGeom prst="roundRect">
+            <a:avLst>
+              <a:gd name="adj" fmla="val 3333"/>
+            </a:avLst>
+          </a:prstGeom>
+          <a:solidFill>
+            <a:srgbClr val="F3EBDA"/>
+          </a:solidFill>
+          <a:ln/>
+        </p:spPr>
+      </p:sp>
+      <p:sp>
+        <p:nvSpPr>
+          <p:cNvPr id="12" name="Shape 10"/>
+          <p:cNvSpPr/>
+          <p:nvPr/>
+        </p:nvSpPr>
+        <p:spPr>
+          <a:xfrm>
+            <a:off x="7720279" y="1700784"/>
+            <a:ext cx="36576" cy="1536192"/>
+          </a:xfrm>
+          <a:prstGeom prst="rect">
+            <a:avLst/>
+          </a:prstGeom>
+          <a:solidFill>
+            <a:srgbClr val="977024"/>
+          </a:solidFill>
+          <a:ln/>
+        </p:spPr>
+      </p:sp>
+      <p:sp>
+        <p:nvSpPr>
+          <p:cNvPr id="13" name="Text 11"/>
+          <p:cNvSpPr/>
+          <p:nvPr/>
+        </p:nvSpPr>
+        <p:spPr>
+          <a:xfrm>
+            <a:off x="7866583" y="1737360"/>
+            <a:ext cx="3584448" cy="201168"/>
+          </a:xfrm>
+          <a:prstGeom prst="rect">
+            <a:avLst/>
+          </a:prstGeom>
+          <a:noFill/>
+          <a:ln/>
+        </p:spPr>
+        <p:txBody>
+          <a:bodyPr wrap="square" lIns="0" tIns="0" rIns="0" bIns="0" rtlCol="0" anchor="ctr"/>
+          <a:lstStyle/>
+          <a:p>
+            <a:pPr indent="0" marL="0">
+              <a:buNone/>
+            </a:pPr>
+            <a:endParaRPr lang="en-US" sz="1050" dirty="0"/>
+          </a:p>
+        </p:txBody>
+      </p:sp>
+      <p:sp>
+        <p:nvSpPr>
+          <p:cNvPr id="14" name="Text 12"/>
+          <p:cNvSpPr/>
+          <p:nvPr/>
+        </p:nvSpPr>
+        <p:spPr>
+          <a:xfrm>
+            <a:off x="7866583" y="1938528"/>
+            <a:ext cx="3584448" cy="1316736"/>
+          </a:xfrm>
+          <a:prstGeom prst="rect">
+            <a:avLst/>
+          </a:prstGeom>
+          <a:noFill/>
+          <a:ln/>
+        </p:spPr>
+        <p:txBody>
+          <a:bodyPr wrap="square" lIns="0" tIns="0" rIns="0" bIns="0" rtlCol="0" anchor="t"/>
+          <a:lstStyle/>
+          <a:p>
+            <a:pPr indent="0" marL="0">
+              <a:lnSpc>
+                <a:spcPct val="108000"/>
+              </a:lnSpc>
+              <a:buNone/>
+            </a:pPr>
+            <a:r>
+              <a:rPr lang="en-US" sz="980" dirty="0">
+                <a:solidFill>
+                  <a:srgbClr val="10161F"/>
+                </a:solidFill>
+                <a:latin typeface="Pretendard" pitchFamily="34" charset="0"/>
+                <a:ea typeface="Pretendard" pitchFamily="34" charset="-122"/>
+                <a:cs typeface="Pretendard" pitchFamily="34" charset="-120"/>
+              </a:rPr>
+              <a:t>전층 명도 완료, 즉시 사옥 입주 가능합니다.</a:t>
+            </a:r>
+            <a:endParaRPr lang="en-US" sz="980" dirty="0"/>
+          </a:p>
+        </p:txBody>
+      </p:sp>
+      <p:sp>
+        <p:nvSpPr>
+          <p:cNvPr id="15" name="Text 13"/>
+          <p:cNvSpPr/>
+          <p:nvPr/>
+        </p:nvSpPr>
+        <p:spPr>
+          <a:xfrm>
+            <a:off x="502920" y="6382512"/>
+            <a:ext cx="7315200" cy="219456"/>
+          </a:xfrm>
+          <a:prstGeom prst="rect">
+            <a:avLst/>
+          </a:prstGeom>
+          <a:noFill/>
+          <a:ln/>
+        </p:spPr>
+        <p:txBody>
+          <a:bodyPr wrap="square" lIns="0" tIns="0" rIns="0" bIns="0" rtlCol="0" anchor="ctr"/>
+          <a:lstStyle/>
+          <a:p>
+            <a:pPr indent="0" marL="0">
+              <a:buNone/>
+            </a:pPr>
+            <a:r>
+              <a:rPr lang="en-US" sz="800" dirty="0">
+                <a:solidFill>
+                  <a:srgbClr val="718096"/>
+                </a:solidFill>
+                <a:latin typeface="Pretendard" pitchFamily="34" charset="0"/>
+                <a:ea typeface="Pretendard" pitchFamily="34" charset="-122"/>
+                <a:cs typeface="Pretendard" pitchFamily="34" charset="-120"/>
+              </a:rPr>
+              <a:t>크리딜   |   </a:t>
+            </a:r>
+            <a:endParaRPr lang="en-US" sz="800" dirty="0"/>
+          </a:p>
+        </p:txBody>
+      </p:sp>
+      <p:sp>
+        <p:nvSpPr>
+          <p:cNvPr id="16" name="Text 14"/>
+          <p:cNvSpPr/>
+          <p:nvPr/>
+        </p:nvSpPr>
+        <p:spPr>
+          <a:xfrm>
+            <a:off x="10774375" y="6382512"/>
+            <a:ext cx="914400" cy="219456"/>
+          </a:xfrm>
+          <a:prstGeom prst="rect">
+            <a:avLst/>
+          </a:prstGeom>
+          <a:noFill/>
+          <a:ln/>
+        </p:spPr>
+        <p:txBody>
+          <a:bodyPr wrap="square" lIns="0" tIns="0" rIns="0" bIns="0" rtlCol="0" anchor="ctr"/>
+          <a:lstStyle/>
+          <a:p>
+            <a:pPr algn="r" indent="0" marL="0">
+              <a:buNone/>
+            </a:pPr>
+            <a:r>
+              <a:rPr lang="en-US" sz="900" b="1" dirty="0">
+                <a:solidFill>
+                  <a:srgbClr val="B98A2E"/>
+                </a:solidFill>
+                <a:latin typeface="Arial" pitchFamily="34" charset="0"/>
+                <a:ea typeface="Arial" pitchFamily="34" charset="-122"/>
+                <a:cs typeface="Arial" pitchFamily="34" charset="-120"/>
+              </a:rPr>
+              <a:t>6</a:t>
+            </a:r>
+            <a:endParaRPr lang="en-US" sz="900" dirty="0"/>
+          </a:p>
+        </p:txBody>
+      </p:sp>
+    </p:spTree>
+  </p:cSld>
+  <p:clrMapOvr>
+    <a:masterClrMapping/>
+  </p:clrMapOvr>
+</p:sld>
+</file>
+
+<file path=ppt/slides/slide7.xml><?xml version="1.0" encoding="utf-8"?>
+<p:sld xmlns:a="http://schemas.openxmlformats.org/drawingml/2006/main" xmlns:r="http://schemas.openxmlformats.org/officeDocument/2006/relationships" xmlns:p="http://schemas.openxmlformats.org/presentationml/2006/main">
+  <p:cSld name="Slide 7">
+    <p:bg>
+      <p:bgPr>
+        <a:solidFill>
+          <a:srgbClr val="FFFFFF"/>
+        </a:solidFill>
+      </p:bgPr>
+    </p:bg>
+    <p:spTree>
+      <p:nvGrpSpPr>
+        <p:cNvPr id="1" name=""/>
+        <p:cNvGrpSpPr/>
+        <p:nvPr/>
+      </p:nvGrpSpPr>
+      <p:grpSpPr>
+        <a:xfrm>
+          <a:off x="0" y="0"/>
+          <a:ext cx="0" cy="0"/>
+          <a:chOff x="0" y="0"/>
+          <a:chExt cx="0" cy="0"/>
+        </a:xfrm>
+      </p:grpSpPr>
+      <p:sp>
+        <p:nvSpPr>
+          <p:cNvPr id="2" name="Shape 0"/>
+          <p:cNvSpPr/>
+          <p:nvPr/>
+        </p:nvSpPr>
+        <p:spPr>
+          <a:xfrm>
+            <a:off x="502920" y="457200"/>
+            <a:ext cx="384048" cy="384048"/>
+          </a:xfrm>
+          <a:prstGeom prst="ellipse">
+            <a:avLst/>
+          </a:prstGeom>
+          <a:solidFill>
+            <a:srgbClr val="B98A2E"/>
+          </a:solidFill>
+          <a:ln/>
+        </p:spPr>
+      </p:sp>
+      <p:sp>
+        <p:nvSpPr>
+          <p:cNvPr id="3" name="Text 1"/>
+          <p:cNvSpPr/>
+          <p:nvPr/>
+        </p:nvSpPr>
+        <p:spPr>
+          <a:xfrm>
+            <a:off x="502920" y="457200"/>
+            <a:ext cx="384048" cy="384048"/>
+          </a:xfrm>
+          <a:prstGeom prst="rect">
+            <a:avLst/>
+          </a:prstGeom>
+          <a:noFill/>
+          <a:ln/>
+        </p:spPr>
+        <p:txBody>
+          <a:bodyPr wrap="square" lIns="0" tIns="0" rIns="0" bIns="0" rtlCol="0" anchor="ctr"/>
+          <a:lstStyle/>
+          <a:p>
+            <a:pPr algn="ctr" indent="0" marL="0">
+              <a:buNone/>
+            </a:pPr>
+            <a:r>
+              <a:rPr lang="en-US" sz="1300" b="1" dirty="0">
+                <a:solidFill>
+                  <a:srgbClr val="FFFFFF"/>
+                </a:solidFill>
+                <a:latin typeface="Arial" pitchFamily="34" charset="0"/>
+                <a:ea typeface="Arial" pitchFamily="34" charset="-122"/>
+                <a:cs typeface="Arial" pitchFamily="34" charset="-120"/>
+              </a:rPr>
+              <a:t>07</a:t>
+            </a:r>
+            <a:endParaRPr lang="en-US" sz="1300" dirty="0"/>
+          </a:p>
+        </p:txBody>
+      </p:sp>
+      <p:sp>
+        <p:nvSpPr>
+          <p:cNvPr id="4" name="Text 2"/>
+          <p:cNvSpPr/>
+          <p:nvPr/>
+        </p:nvSpPr>
+        <p:spPr>
+          <a:xfrm>
+            <a:off x="1069848" y="457200"/>
+            <a:ext cx="10490911" cy="182880"/>
+          </a:xfrm>
+          <a:prstGeom prst="rect">
+            <a:avLst/>
+          </a:prstGeom>
+          <a:noFill/>
+          <a:ln/>
+        </p:spPr>
+        <p:txBody>
+          <a:bodyPr wrap="square" lIns="0" tIns="0" rIns="0" bIns="0" rtlCol="0" anchor="ctr"/>
+          <a:lstStyle/>
+          <a:p>
+            <a:pPr indent="0" marL="0">
+              <a:buNone/>
+            </a:pPr>
+            <a:r>
+              <a:rPr lang="en-US" sz="950" b="1" spc="200" kern="0" dirty="0">
+                <a:solidFill>
+                  <a:srgbClr val="B98A2E"/>
+                </a:solidFill>
+                <a:latin typeface="Arial" pitchFamily="34" charset="0"/>
+                <a:ea typeface="Arial" pitchFamily="34" charset="-122"/>
+                <a:cs typeface="Arial" pitchFamily="34" charset="-120"/>
+              </a:rPr>
+              <a:t>Capital</a:t>
+            </a:r>
+            <a:endParaRPr lang="en-US" sz="950" dirty="0"/>
+          </a:p>
+        </p:txBody>
+      </p:sp>
+      <p:sp>
+        <p:nvSpPr>
+          <p:cNvPr id="5" name="Text 3"/>
+          <p:cNvSpPr/>
+          <p:nvPr/>
+        </p:nvSpPr>
+        <p:spPr>
+          <a:xfrm>
+            <a:off x="1069848" y="640080"/>
+            <a:ext cx="10490911" cy="365760"/>
+          </a:xfrm>
+          <a:prstGeom prst="rect">
+            <a:avLst/>
+          </a:prstGeom>
+          <a:noFill/>
+          <a:ln/>
+        </p:spPr>
+        <p:txBody>
+          <a:bodyPr wrap="square" lIns="0" tIns="0" rIns="0" bIns="0" rtlCol="0" anchor="ctr"/>
+          <a:lstStyle/>
+          <a:p>
+            <a:pPr indent="0" marL="0">
+              <a:buNone/>
+            </a:pPr>
+            <a:r>
+              <a:rPr lang="en-US" sz="2300" b="1" dirty="0">
+                <a:solidFill>
+                  <a:srgbClr val="10161F"/>
+                </a:solidFill>
+                <a:latin typeface="Pretendard" pitchFamily="34" charset="0"/>
+                <a:ea typeface="Pretendard" pitchFamily="34" charset="-122"/>
+                <a:cs typeface="Pretendard" pitchFamily="34" charset="-120"/>
+              </a:rPr>
               <a:t>자본구조</a:t>
             </a:r>
             <a:endParaRPr lang="en-US" sz="2300" dirty="0"/>
@@ -7888,7 +9676,7 @@
         </p:nvSpPr>
         <p:spPr>
           <a:xfrm>
-            <a:off x="566928" y="1417320"/>
+            <a:off x="502920" y="1417320"/>
             <a:ext cx="5391760" cy="4389120"/>
           </a:xfrm>
           <a:prstGeom prst="roundRect">
@@ -7915,7 +9703,7 @@
         </p:nvSpPr>
         <p:spPr>
           <a:xfrm>
-            <a:off x="795528" y="1618488"/>
+            <a:off x="731520" y="1618488"/>
             <a:ext cx="4934560" cy="320040"/>
           </a:xfrm>
           <a:prstGeom prst="rect">
@@ -7954,8 +9742,8 @@
         </p:nvSpPr>
         <p:spPr>
           <a:xfrm>
-            <a:off x="795528" y="2011680"/>
-            <a:ext cx="1875133" cy="475488"/>
+            <a:off x="731520" y="2011680"/>
+            <a:ext cx="2269897" cy="475488"/>
           </a:xfrm>
           <a:prstGeom prst="rect">
             <a:avLst/>
@@ -7969,7 +9757,7 @@
           <a:p>
             <a:pPr indent="0" marL="0">
               <a:lnSpc>
-                <a:spcPct val="120000"/>
+                <a:spcPct val="115000"/>
               </a:lnSpc>
               <a:buNone/>
             </a:pPr>
@@ -7996,8 +9784,8 @@
         </p:nvSpPr>
         <p:spPr>
           <a:xfrm>
-            <a:off x="2670661" y="2011680"/>
-            <a:ext cx="3059427" cy="475488"/>
+            <a:off x="3001417" y="2011680"/>
+            <a:ext cx="2664662" cy="475488"/>
           </a:xfrm>
           <a:prstGeom prst="rect">
             <a:avLst/>
@@ -8011,7 +9799,7 @@
           <a:p>
             <a:pPr indent="0" marL="0">
               <a:lnSpc>
-                <a:spcPct val="120000"/>
+                <a:spcPct val="115000"/>
               </a:lnSpc>
               <a:buNone/>
             </a:pPr>
@@ -8038,7 +9826,7 @@
         </p:nvSpPr>
         <p:spPr>
           <a:xfrm>
-            <a:off x="795528" y="2487168"/>
+            <a:off x="731520" y="2487168"/>
             <a:ext cx="4934560" cy="0"/>
           </a:xfrm>
           <a:prstGeom prst="line">
@@ -8061,8 +9849,8 @@
         </p:nvSpPr>
         <p:spPr>
           <a:xfrm>
-            <a:off x="795528" y="2487168"/>
-            <a:ext cx="1875133" cy="475488"/>
+            <a:off x="731520" y="2487168"/>
+            <a:ext cx="2269897" cy="475488"/>
           </a:xfrm>
           <a:prstGeom prst="rect">
             <a:avLst/>
@@ -8076,7 +9864,7 @@
           <a:p>
             <a:pPr indent="0" marL="0">
               <a:lnSpc>
-                <a:spcPct val="120000"/>
+                <a:spcPct val="115000"/>
               </a:lnSpc>
               <a:buNone/>
             </a:pPr>
@@ -8103,8 +9891,8 @@
         </p:nvSpPr>
         <p:spPr>
           <a:xfrm>
-            <a:off x="2670661" y="2487168"/>
-            <a:ext cx="3059427" cy="475488"/>
+            <a:off x="3001417" y="2487168"/>
+            <a:ext cx="2664662" cy="475488"/>
           </a:xfrm>
           <a:prstGeom prst="rect">
             <a:avLst/>
@@ -8118,7 +9906,7 @@
           <a:p>
             <a:pPr indent="0" marL="0">
               <a:lnSpc>
-                <a:spcPct val="120000"/>
+                <a:spcPct val="115000"/>
               </a:lnSpc>
               <a:buNone/>
             </a:pPr>
@@ -8145,7 +9933,7 @@
         </p:nvSpPr>
         <p:spPr>
           <a:xfrm>
-            <a:off x="795528" y="2962656"/>
+            <a:off x="731520" y="2962656"/>
             <a:ext cx="4934560" cy="0"/>
           </a:xfrm>
           <a:prstGeom prst="line">
@@ -8168,8 +9956,8 @@
         </p:nvSpPr>
         <p:spPr>
           <a:xfrm>
-            <a:off x="795528" y="2962656"/>
-            <a:ext cx="1875133" cy="475488"/>
+            <a:off x="731520" y="2962656"/>
+            <a:ext cx="2269897" cy="475488"/>
           </a:xfrm>
           <a:prstGeom prst="rect">
             <a:avLst/>
@@ -8183,7 +9971,7 @@
           <a:p>
             <a:pPr indent="0" marL="0">
               <a:lnSpc>
-                <a:spcPct val="120000"/>
+                <a:spcPct val="115000"/>
               </a:lnSpc>
               <a:buNone/>
             </a:pPr>
@@ -8210,8 +9998,8 @@
         </p:nvSpPr>
         <p:spPr>
           <a:xfrm>
-            <a:off x="2670661" y="2962656"/>
-            <a:ext cx="3059427" cy="475488"/>
+            <a:off x="3001417" y="2962656"/>
+            <a:ext cx="2664662" cy="475488"/>
           </a:xfrm>
           <a:prstGeom prst="rect">
             <a:avLst/>
@@ -8225,7 +10013,7 @@
           <a:p>
             <a:pPr indent="0" marL="0">
               <a:lnSpc>
-                <a:spcPct val="120000"/>
+                <a:spcPct val="115000"/>
               </a:lnSpc>
               <a:buNone/>
             </a:pPr>
@@ -8252,7 +10040,7 @@
         </p:nvSpPr>
         <p:spPr>
           <a:xfrm>
-            <a:off x="795528" y="3438144"/>
+            <a:off x="731520" y="3438144"/>
             <a:ext cx="4934560" cy="0"/>
           </a:xfrm>
           <a:prstGeom prst="line">
@@ -8275,8 +10063,8 @@
         </p:nvSpPr>
         <p:spPr>
           <a:xfrm>
-            <a:off x="795528" y="3438144"/>
-            <a:ext cx="1875133" cy="475488"/>
+            <a:off x="731520" y="3438144"/>
+            <a:ext cx="2269897" cy="475488"/>
           </a:xfrm>
           <a:prstGeom prst="rect">
             <a:avLst/>
@@ -8290,7 +10078,7 @@
           <a:p>
             <a:pPr indent="0" marL="0">
               <a:lnSpc>
-                <a:spcPct val="120000"/>
+                <a:spcPct val="115000"/>
               </a:lnSpc>
               <a:buNone/>
             </a:pPr>
@@ -8317,8 +10105,8 @@
         </p:nvSpPr>
         <p:spPr>
           <a:xfrm>
-            <a:off x="2670661" y="3438144"/>
-            <a:ext cx="3059427" cy="475488"/>
+            <a:off x="3001417" y="3438144"/>
+            <a:ext cx="2664662" cy="475488"/>
           </a:xfrm>
           <a:prstGeom prst="rect">
             <a:avLst/>
@@ -8332,7 +10120,7 @@
           <a:p>
             <a:pPr indent="0" marL="0">
               <a:lnSpc>
-                <a:spcPct val="120000"/>
+                <a:spcPct val="115000"/>
               </a:lnSpc>
               <a:buNone/>
             </a:pPr>
@@ -8359,7 +10147,7 @@
         </p:nvSpPr>
         <p:spPr>
           <a:xfrm>
-            <a:off x="795528" y="3913632"/>
+            <a:off x="731520" y="3913632"/>
             <a:ext cx="4934560" cy="0"/>
           </a:xfrm>
           <a:prstGeom prst="line">
@@ -8382,8 +10170,8 @@
         </p:nvSpPr>
         <p:spPr>
           <a:xfrm>
-            <a:off x="795528" y="3913632"/>
-            <a:ext cx="1875133" cy="475488"/>
+            <a:off x="731520" y="3913632"/>
+            <a:ext cx="2269897" cy="475488"/>
           </a:xfrm>
           <a:prstGeom prst="rect">
             <a:avLst/>
@@ -8397,7 +10185,7 @@
           <a:p>
             <a:pPr indent="0" marL="0">
               <a:lnSpc>
-                <a:spcPct val="120000"/>
+                <a:spcPct val="115000"/>
               </a:lnSpc>
               <a:buNone/>
             </a:pPr>
@@ -8424,8 +10212,8 @@
         </p:nvSpPr>
         <p:spPr>
           <a:xfrm>
-            <a:off x="2670661" y="3913632"/>
-            <a:ext cx="3059427" cy="475488"/>
+            <a:off x="3001417" y="3913632"/>
+            <a:ext cx="2664662" cy="475488"/>
           </a:xfrm>
           <a:prstGeom prst="rect">
             <a:avLst/>
@@ -8439,7 +10227,7 @@
           <a:p>
             <a:pPr indent="0" marL="0">
               <a:lnSpc>
-                <a:spcPct val="120000"/>
+                <a:spcPct val="115000"/>
               </a:lnSpc>
               <a:buNone/>
             </a:pPr>
@@ -8452,7 +10240,7 @@
                 <a:ea typeface="Pretendard" pitchFamily="34" charset="-122"/>
                 <a:cs typeface="Pretendard" pitchFamily="34" charset="-120"/>
               </a:rPr>
-              <a:t>6.8억 원</a:t>
+              <a:t>0.0억 원</a:t>
             </a:r>
             <a:endParaRPr lang="en-US" sz="1150" dirty="0"/>
           </a:p>
@@ -8466,7 +10254,7 @@
         </p:nvSpPr>
         <p:spPr>
           <a:xfrm>
-            <a:off x="795528" y="4389120"/>
+            <a:off x="731520" y="4389120"/>
             <a:ext cx="4934560" cy="0"/>
           </a:xfrm>
           <a:prstGeom prst="line">
@@ -8489,8 +10277,8 @@
         </p:nvSpPr>
         <p:spPr>
           <a:xfrm>
-            <a:off x="795528" y="4389120"/>
-            <a:ext cx="1875133" cy="475488"/>
+            <a:off x="731520" y="4389120"/>
+            <a:ext cx="2269897" cy="475488"/>
           </a:xfrm>
           <a:prstGeom prst="rect">
             <a:avLst/>
@@ -8504,7 +10292,7 @@
           <a:p>
             <a:pPr indent="0" marL="0">
               <a:lnSpc>
-                <a:spcPct val="120000"/>
+                <a:spcPct val="115000"/>
               </a:lnSpc>
               <a:buNone/>
             </a:pPr>
@@ -8531,8 +10319,8 @@
         </p:nvSpPr>
         <p:spPr>
           <a:xfrm>
-            <a:off x="2670661" y="4389120"/>
-            <a:ext cx="3059427" cy="475488"/>
+            <a:off x="3001417" y="4389120"/>
+            <a:ext cx="2664662" cy="475488"/>
           </a:xfrm>
           <a:prstGeom prst="rect">
             <a:avLst/>
@@ -8546,7 +10334,7 @@
           <a:p>
             <a:pPr indent="0" marL="0">
               <a:lnSpc>
-                <a:spcPct val="120000"/>
+                <a:spcPct val="115000"/>
               </a:lnSpc>
               <a:buNone/>
             </a:pPr>
@@ -8573,7 +10361,7 @@
         </p:nvSpPr>
         <p:spPr>
           <a:xfrm>
-            <a:off x="795528" y="4864608"/>
+            <a:off x="731520" y="4864608"/>
             <a:ext cx="4934560" cy="0"/>
           </a:xfrm>
           <a:prstGeom prst="line">
@@ -8596,8 +10384,8 @@
         </p:nvSpPr>
         <p:spPr>
           <a:xfrm>
-            <a:off x="795528" y="4864608"/>
-            <a:ext cx="1875133" cy="475488"/>
+            <a:off x="731520" y="4864608"/>
+            <a:ext cx="2269897" cy="475488"/>
           </a:xfrm>
           <a:prstGeom prst="rect">
             <a:avLst/>
@@ -8611,7 +10399,7 @@
           <a:p>
             <a:pPr indent="0" marL="0">
               <a:lnSpc>
-                <a:spcPct val="120000"/>
+                <a:spcPct val="115000"/>
               </a:lnSpc>
               <a:buNone/>
             </a:pPr>
@@ -8638,8 +10426,8 @@
         </p:nvSpPr>
         <p:spPr>
           <a:xfrm>
-            <a:off x="2670661" y="4864608"/>
-            <a:ext cx="3059427" cy="475488"/>
+            <a:off x="3001417" y="4864608"/>
+            <a:ext cx="2664662" cy="475488"/>
           </a:xfrm>
           <a:prstGeom prst="rect">
             <a:avLst/>
@@ -8653,7 +10441,7 @@
           <a:p>
             <a:pPr indent="0" marL="0">
               <a:lnSpc>
-                <a:spcPct val="120000"/>
+                <a:spcPct val="115000"/>
               </a:lnSpc>
               <a:buNone/>
             </a:pPr>
@@ -8666,7 +10454,7 @@
                 <a:ea typeface="Pretendard" pitchFamily="34" charset="-122"/>
                 <a:cs typeface="Pretendard" pitchFamily="34" charset="-120"/>
               </a:rPr>
-              <a:t>68.2억 원</a:t>
+              <a:t>74.9억 원</a:t>
             </a:r>
             <a:endParaRPr lang="en-US" sz="1150" dirty="0"/>
           </a:p>
@@ -8680,7 +10468,7 @@
         </p:nvSpPr>
         <p:spPr>
           <a:xfrm>
-            <a:off x="6233008" y="1417320"/>
+            <a:off x="6169000" y="1417320"/>
             <a:ext cx="5391760" cy="4389120"/>
           </a:xfrm>
           <a:prstGeom prst="roundRect">
@@ -8707,7 +10495,7 @@
         </p:nvSpPr>
         <p:spPr>
           <a:xfrm>
-            <a:off x="6461608" y="1618488"/>
+            <a:off x="6397600" y="1618488"/>
             <a:ext cx="4934560" cy="320040"/>
           </a:xfrm>
           <a:prstGeom prst="rect">
@@ -8740,7 +10528,7 @@
       </p:sp>
       <p:graphicFrame>
         <p:nvGraphicFramePr>
-          <p:cNvPr id="7" name="Table 0"/>
+          <p:cNvPr id="8" name="Table 0"/>
           <p:cNvGraphicFramePr>
             <a:graphicFrameLocks noGrp="1"/>
           </p:cNvGraphicFramePr>
@@ -8753,7 +10541,7 @@
           </p:nvPr>
         </p:nvGraphicFramePr>
         <p:xfrm>
-          <a:off x="6461608" y="2057400"/>
+          <a:off x="6397600" y="2057400"/>
           <a:ext cx="4934560" cy="914400"/>
         </p:xfrm>
         <a:graphic>
@@ -8778,7 +10566,7 @@
                       <a:r>
                         <a:rPr lang="en-US" sz="1100" b="1" dirty="0">
                           <a:solidFill>
-                            <a:srgbClr val="718096"/>
+                            <a:srgbClr val="FFFFFF"/>
                           </a:solidFill>
                           <a:latin typeface="Pretendard" pitchFamily="34" charset="0"/>
                           <a:ea typeface="Pretendard" pitchFamily="34" charset="-122"/>
@@ -8831,7 +10619,7 @@
                       <a:tailEnd type="none" w="med" len="med"/>
                     </a:lnB>
                     <a:solidFill>
-                      <a:srgbClr val="F7FAFC"/>
+                      <a:srgbClr val="10161F"/>
                     </a:solidFill>
                   </a:tcPr>
                 </a:tc>
@@ -8846,7 +10634,7 @@
                       <a:r>
                         <a:rPr lang="en-US" sz="1100" b="1" dirty="0">
                           <a:solidFill>
-                            <a:srgbClr val="718096"/>
+                            <a:srgbClr val="FFFFFF"/>
                           </a:solidFill>
                           <a:latin typeface="Pretendard" pitchFamily="34" charset="0"/>
                           <a:ea typeface="Pretendard" pitchFamily="34" charset="-122"/>
@@ -8899,7 +10687,7 @@
                       <a:tailEnd type="none" w="med" len="med"/>
                     </a:lnB>
                     <a:solidFill>
-                      <a:srgbClr val="F7FAFC"/>
+                      <a:srgbClr val="10161F"/>
                     </a:solidFill>
                   </a:tcPr>
                 </a:tc>
@@ -8914,7 +10702,7 @@
                       <a:r>
                         <a:rPr lang="en-US" sz="1100" b="1" dirty="0">
                           <a:solidFill>
-                            <a:srgbClr val="718096"/>
+                            <a:srgbClr val="FFFFFF"/>
                           </a:solidFill>
                           <a:latin typeface="Pretendard" pitchFamily="34" charset="0"/>
                           <a:ea typeface="Pretendard" pitchFamily="34" charset="-122"/>
@@ -8967,7 +10755,7 @@
                       <a:tailEnd type="none" w="med" len="med"/>
                     </a:lnB>
                     <a:solidFill>
-                      <a:srgbClr val="F7FAFC"/>
+                      <a:srgbClr val="10161F"/>
                     </a:solidFill>
                   </a:tcPr>
                 </a:tc>
@@ -8982,7 +10770,7 @@
                       <a:r>
                         <a:rPr lang="en-US" sz="1100" b="1" dirty="0">
                           <a:solidFill>
-                            <a:srgbClr val="718096"/>
+                            <a:srgbClr val="FFFFFF"/>
                           </a:solidFill>
                           <a:latin typeface="Pretendard" pitchFamily="34" charset="0"/>
                           <a:ea typeface="Pretendard" pitchFamily="34" charset="-122"/>
@@ -9035,7 +10823,7 @@
                       <a:tailEnd type="none" w="med" len="med"/>
                     </a:lnB>
                     <a:solidFill>
-                      <a:srgbClr val="F7FAFC"/>
+                      <a:srgbClr val="10161F"/>
                     </a:solidFill>
                   </a:tcPr>
                 </a:tc>
@@ -9222,7 +11010,7 @@
                           <a:ea typeface="Pretendard" pitchFamily="34" charset="-122"/>
                           <a:cs typeface="Pretendard" pitchFamily="34" charset="-120"/>
                         </a:rPr>
-                        <a:t>135.7억</a:t>
+                        <a:t>142.4억</a:t>
                       </a:r>
                       <a:endParaRPr lang="en-US" sz="1100" dirty="0">
                         <a:latin typeface="Pretendard" charset="0"/>
@@ -9290,7 +11078,7 @@
                           <a:ea typeface="Pretendard" pitchFamily="34" charset="-122"/>
                           <a:cs typeface="Pretendard" pitchFamily="34" charset="-120"/>
                         </a:rPr>
-                        <a:t>3.78%</a:t>
+                        <a:t>0.00%</a:t>
                       </a:r>
                       <a:endParaRPr lang="en-US" sz="1100" dirty="0">
                         <a:latin typeface="Pretendard" charset="0"/>
@@ -9524,7 +11312,7 @@
                           <a:ea typeface="Pretendard" pitchFamily="34" charset="-122"/>
                           <a:cs typeface="Pretendard" pitchFamily="34" charset="-120"/>
                         </a:rPr>
-                        <a:t>81.7억</a:t>
+                        <a:t>88.4억</a:t>
                       </a:r>
                       <a:endParaRPr lang="en-US" sz="1100" dirty="0">
                         <a:latin typeface="Pretendard" charset="0"/>
@@ -9592,7 +11380,7 @@
                           <a:ea typeface="Pretendard" pitchFamily="34" charset="-122"/>
                           <a:cs typeface="Pretendard" pitchFamily="34" charset="-120"/>
                         </a:rPr>
-                        <a:t>3.11%</a:t>
+                        <a:t>0.00%</a:t>
                       </a:r>
                       <a:endParaRPr lang="en-US" sz="1100" dirty="0">
                         <a:latin typeface="Pretendard" charset="0"/>
@@ -9826,7 +11614,7 @@
                           <a:ea typeface="Pretendard" pitchFamily="34" charset="-122"/>
                           <a:cs typeface="Pretendard" pitchFamily="34" charset="-120"/>
                         </a:rPr>
-                        <a:t>68.2억</a:t>
+                        <a:t>74.9억</a:t>
                       </a:r>
                       <a:endParaRPr lang="en-US" sz="1100" dirty="0">
                         <a:latin typeface="Pretendard" charset="0"/>
@@ -9894,7 +11682,7 @@
                           <a:ea typeface="Pretendard" pitchFamily="34" charset="-122"/>
                           <a:cs typeface="Pretendard" pitchFamily="34" charset="-120"/>
                         </a:rPr>
-                        <a:t>2.77%</a:t>
+                        <a:t>0.00%</a:t>
                       </a:r>
                       <a:endParaRPr lang="en-US" sz="1100" dirty="0">
                         <a:latin typeface="Pretendard" charset="0"/>
@@ -10128,7 +11916,7 @@
                           <a:ea typeface="Pretendard" pitchFamily="34" charset="-122"/>
                           <a:cs typeface="Pretendard" pitchFamily="34" charset="-120"/>
                         </a:rPr>
-                        <a:t>54.7억</a:t>
+                        <a:t>61.4억</a:t>
                       </a:r>
                       <a:endParaRPr lang="en-US" sz="1100" dirty="0">
                         <a:latin typeface="Pretendard" charset="0"/>
@@ -10196,7 +11984,7 @@
                           <a:ea typeface="Pretendard" pitchFamily="34" charset="-122"/>
                           <a:cs typeface="Pretendard" pitchFamily="34" charset="-120"/>
                         </a:rPr>
-                        <a:t>2.27%</a:t>
+                        <a:t>0.00%</a:t>
                       </a:r>
                       <a:endParaRPr lang="en-US" sz="1100" dirty="0">
                         <a:latin typeface="Pretendard" charset="0"/>
@@ -10260,7 +12048,7 @@
         </p:nvSpPr>
         <p:spPr>
           <a:xfrm>
-            <a:off x="6461608" y="4069080"/>
+            <a:off x="6397600" y="4069080"/>
             <a:ext cx="4934560" cy="1463040"/>
           </a:xfrm>
           <a:prstGeom prst="roundRect">
@@ -10282,7 +12070,7 @@
         </p:nvSpPr>
         <p:spPr>
           <a:xfrm>
-            <a:off x="6461608" y="4123944"/>
+            <a:off x="6397600" y="4123944"/>
             <a:ext cx="36576" cy="1353312"/>
           </a:xfrm>
           <a:prstGeom prst="rect">
@@ -10302,8 +12090,8 @@
         </p:nvSpPr>
         <p:spPr>
           <a:xfrm>
-            <a:off x="6644488" y="4178808"/>
-            <a:ext cx="4605376" cy="201168"/>
+            <a:off x="6543904" y="4160520"/>
+            <a:ext cx="4678528" cy="201168"/>
           </a:xfrm>
           <a:prstGeom prst="rect">
             <a:avLst/>
@@ -10341,8 +12129,8 @@
         </p:nvSpPr>
         <p:spPr>
           <a:xfrm>
-            <a:off x="6644488" y="4398264"/>
-            <a:ext cx="4605376" cy="1060704"/>
+            <a:off x="6543904" y="4361688"/>
+            <a:ext cx="4678528" cy="1133856"/>
           </a:xfrm>
           <a:prstGeom prst="rect">
             <a:avLst/>
@@ -10356,12 +12144,12 @@
           <a:p>
             <a:pPr indent="0" marL="0">
               <a:lnSpc>
-                <a:spcPct val="120000"/>
+                <a:spcPct val="108000"/>
               </a:lnSpc>
               <a:buNone/>
             </a:pPr>
             <a:r>
-              <a:rPr lang="en-US" sz="930" dirty="0">
+              <a:rPr lang="en-US" sz="980" dirty="0">
                 <a:solidFill>
                   <a:srgbClr val="10161F"/>
                 </a:solidFill>
@@ -10371,7 +12159,7 @@
               </a:rPr>
               <a:t>차입 금리가 자산 총수익률을 상회하여 대출 실행 시 자기자본수익률이 하락할 수 있습니다. 에쿼티 비중 확대를 권장합니다.</a:t>
             </a:r>
-            <a:endParaRPr lang="en-US" sz="930" dirty="0"/>
+            <a:endParaRPr lang="en-US" sz="980" dirty="0"/>
           </a:p>
         </p:txBody>
       </p:sp>
@@ -10383,7 +12171,7 @@
         </p:nvSpPr>
         <p:spPr>
           <a:xfrm>
-            <a:off x="566928" y="6382512"/>
+            <a:off x="502920" y="6382512"/>
             <a:ext cx="7315200" cy="219456"/>
           </a:xfrm>
           <a:prstGeom prst="rect">
@@ -10422,362 +12210,7 @@
         </p:nvSpPr>
         <p:spPr>
           <a:xfrm>
-            <a:off x="10710367" y="6382512"/>
-            <a:ext cx="914400" cy="219456"/>
-          </a:xfrm>
-          <a:prstGeom prst="rect">
-            <a:avLst/>
-          </a:prstGeom>
-          <a:noFill/>
-          <a:ln/>
-        </p:spPr>
-        <p:txBody>
-          <a:bodyPr wrap="square" lIns="0" tIns="0" rIns="0" bIns="0" rtlCol="0" anchor="ctr"/>
-          <a:lstStyle/>
-          <a:p>
-            <a:pPr algn="r" indent="0" marL="0">
-              <a:buNone/>
-            </a:pPr>
-            <a:r>
-              <a:rPr lang="en-US" sz="900" b="1" dirty="0">
-                <a:solidFill>
-                  <a:srgbClr val="B98A2E"/>
-                </a:solidFill>
-                <a:latin typeface="Arial" pitchFamily="34" charset="0"/>
-                <a:ea typeface="Arial" pitchFamily="34" charset="-122"/>
-                <a:cs typeface="Arial" pitchFamily="34" charset="-120"/>
-              </a:rPr>
-              <a:t>6</a:t>
-            </a:r>
-            <a:endParaRPr lang="en-US" sz="900" dirty="0"/>
-          </a:p>
-        </p:txBody>
-      </p:sp>
-    </p:spTree>
-  </p:cSld>
-  <p:clrMapOvr>
-    <a:masterClrMapping/>
-  </p:clrMapOvr>
-</p:sld>
-</file>
-
-<file path=ppt/slides/slide7.xml><?xml version="1.0" encoding="utf-8"?>
-<p:sld xmlns:a="http://schemas.openxmlformats.org/drawingml/2006/main" xmlns:r="http://schemas.openxmlformats.org/officeDocument/2006/relationships" xmlns:p="http://schemas.openxmlformats.org/presentationml/2006/main">
-  <p:cSld name="Slide 7">
-    <p:bg>
-      <p:bgPr>
-        <a:solidFill>
-          <a:srgbClr val="FFFFFF"/>
-        </a:solidFill>
-      </p:bgPr>
-    </p:bg>
-    <p:spTree>
-      <p:nvGrpSpPr>
-        <p:cNvPr id="1" name=""/>
-        <p:cNvGrpSpPr/>
-        <p:nvPr/>
-      </p:nvGrpSpPr>
-      <p:grpSpPr>
-        <a:xfrm>
-          <a:off x="0" y="0"/>
-          <a:ext cx="0" cy="0"/>
-          <a:chOff x="0" y="0"/>
-          <a:chExt cx="0" cy="0"/>
-        </a:xfrm>
-      </p:grpSpPr>
-      <p:sp>
-        <p:nvSpPr>
-          <p:cNvPr id="2" name="Shape 0"/>
-          <p:cNvSpPr/>
-          <p:nvPr/>
-        </p:nvSpPr>
-        <p:spPr>
-          <a:xfrm>
-            <a:off x="566928" y="457200"/>
-            <a:ext cx="384048" cy="384048"/>
-          </a:xfrm>
-          <a:prstGeom prst="ellipse">
-            <a:avLst/>
-          </a:prstGeom>
-          <a:solidFill>
-            <a:srgbClr val="B98A2E"/>
-          </a:solidFill>
-          <a:ln/>
-        </p:spPr>
-      </p:sp>
-      <p:sp>
-        <p:nvSpPr>
-          <p:cNvPr id="3" name="Text 1"/>
-          <p:cNvSpPr/>
-          <p:nvPr/>
-        </p:nvSpPr>
-        <p:spPr>
-          <a:xfrm>
-            <a:off x="566928" y="457200"/>
-            <a:ext cx="384048" cy="384048"/>
-          </a:xfrm>
-          <a:prstGeom prst="rect">
-            <a:avLst/>
-          </a:prstGeom>
-          <a:noFill/>
-          <a:ln/>
-        </p:spPr>
-        <p:txBody>
-          <a:bodyPr wrap="square" lIns="0" tIns="0" rIns="0" bIns="0" rtlCol="0" anchor="ctr"/>
-          <a:lstStyle/>
-          <a:p>
-            <a:pPr algn="ctr" indent="0" marL="0">
-              <a:buNone/>
-            </a:pPr>
-            <a:r>
-              <a:rPr lang="en-US" sz="1300" b="1" dirty="0">
-                <a:solidFill>
-                  <a:srgbClr val="FFFFFF"/>
-                </a:solidFill>
-                <a:latin typeface="Arial" pitchFamily="34" charset="0"/>
-                <a:ea typeface="Arial" pitchFamily="34" charset="-122"/>
-                <a:cs typeface="Arial" pitchFamily="34" charset="-120"/>
-              </a:rPr>
-              <a:t>07</a:t>
-            </a:r>
-            <a:endParaRPr lang="en-US" sz="1300" dirty="0"/>
-          </a:p>
-        </p:txBody>
-      </p:sp>
-      <p:sp>
-        <p:nvSpPr>
-          <p:cNvPr id="4" name="Text 2"/>
-          <p:cNvSpPr/>
-          <p:nvPr/>
-        </p:nvSpPr>
-        <p:spPr>
-          <a:xfrm>
-            <a:off x="1133856" y="457200"/>
-            <a:ext cx="10490911" cy="182880"/>
-          </a:xfrm>
-          <a:prstGeom prst="rect">
-            <a:avLst/>
-          </a:prstGeom>
-          <a:noFill/>
-          <a:ln/>
-        </p:spPr>
-        <p:txBody>
-          <a:bodyPr wrap="square" lIns="0" tIns="0" rIns="0" bIns="0" rtlCol="0" anchor="ctr"/>
-          <a:lstStyle/>
-          <a:p>
-            <a:pPr indent="0" marL="0">
-              <a:buNone/>
-            </a:pPr>
-            <a:r>
-              <a:rPr lang="en-US" sz="950" b="1" spc="200" kern="0" dirty="0">
-                <a:solidFill>
-                  <a:srgbClr val="B98A2E"/>
-                </a:solidFill>
-                <a:latin typeface="Arial" pitchFamily="34" charset="0"/>
-                <a:ea typeface="Arial" pitchFamily="34" charset="-122"/>
-                <a:cs typeface="Arial" pitchFamily="34" charset="-120"/>
-              </a:rPr>
-              <a:t>Thesis</a:t>
-            </a:r>
-            <a:endParaRPr lang="en-US" sz="950" dirty="0"/>
-          </a:p>
-        </p:txBody>
-      </p:sp>
-      <p:sp>
-        <p:nvSpPr>
-          <p:cNvPr id="5" name="Text 3"/>
-          <p:cNvSpPr/>
-          <p:nvPr/>
-        </p:nvSpPr>
-        <p:spPr>
-          <a:xfrm>
-            <a:off x="1133856" y="640080"/>
-            <a:ext cx="10490911" cy="365760"/>
-          </a:xfrm>
-          <a:prstGeom prst="rect">
-            <a:avLst/>
-          </a:prstGeom>
-          <a:noFill/>
-          <a:ln/>
-        </p:spPr>
-        <p:txBody>
-          <a:bodyPr wrap="square" lIns="0" tIns="0" rIns="0" bIns="0" rtlCol="0" anchor="ctr"/>
-          <a:lstStyle/>
-          <a:p>
-            <a:pPr indent="0" marL="0">
-              <a:buNone/>
-            </a:pPr>
-            <a:r>
-              <a:rPr lang="en-US" sz="2300" b="1" dirty="0">
-                <a:solidFill>
-                  <a:srgbClr val="10161F"/>
-                </a:solidFill>
-                <a:latin typeface="Pretendard" pitchFamily="34" charset="0"/>
-                <a:ea typeface="Pretendard" pitchFamily="34" charset="-122"/>
-                <a:cs typeface="Pretendard" pitchFamily="34" charset="-120"/>
-              </a:rPr>
-              <a:t>투자 논거</a:t>
-            </a:r>
-            <a:endParaRPr lang="en-US" sz="2300" dirty="0"/>
-          </a:p>
-        </p:txBody>
-      </p:sp>
-      <p:sp>
-        <p:nvSpPr>
-          <p:cNvPr id="6" name="Shape 4"/>
-          <p:cNvSpPr/>
-          <p:nvPr/>
-        </p:nvSpPr>
-        <p:spPr>
-          <a:xfrm>
-            <a:off x="566928" y="4983480"/>
-            <a:ext cx="11057839" cy="804672"/>
-          </a:xfrm>
-          <a:prstGeom prst="roundRect">
-            <a:avLst>
-              <a:gd name="adj" fmla="val 6818"/>
-            </a:avLst>
-          </a:prstGeom>
-          <a:solidFill>
-            <a:srgbClr val="F3EBDA"/>
-          </a:solidFill>
-          <a:ln w="10160">
-            <a:solidFill>
-              <a:srgbClr val="D9B668"/>
-            </a:solidFill>
-            <a:prstDash val="solid"/>
-          </a:ln>
-        </p:spPr>
-      </p:sp>
-      <p:sp>
-        <p:nvSpPr>
-          <p:cNvPr id="7" name="Text 5"/>
-          <p:cNvSpPr/>
-          <p:nvPr/>
-        </p:nvSpPr>
-        <p:spPr>
-          <a:xfrm>
-            <a:off x="749808" y="5093208"/>
-            <a:ext cx="1691640" cy="256032"/>
-          </a:xfrm>
-          <a:prstGeom prst="rect">
-            <a:avLst/>
-          </a:prstGeom>
-          <a:noFill/>
-          <a:ln/>
-        </p:spPr>
-        <p:txBody>
-          <a:bodyPr wrap="square" lIns="0" tIns="0" rIns="0" bIns="0" rtlCol="0" anchor="ctr"/>
-          <a:lstStyle/>
-          <a:p>
-            <a:pPr indent="0" marL="0">
-              <a:buNone/>
-            </a:pPr>
-            <a:r>
-              <a:rPr lang="en-US" sz="1050" b="1" dirty="0">
-                <a:solidFill>
-                  <a:srgbClr val="977024"/>
-                </a:solidFill>
-                <a:latin typeface="Pretendard" pitchFamily="34" charset="0"/>
-                <a:ea typeface="Pretendard" pitchFamily="34" charset="-122"/>
-                <a:cs typeface="Pretendard" pitchFamily="34" charset="-120"/>
-              </a:rPr>
-              <a:t>종합 가치 제안</a:t>
-            </a:r>
-            <a:endParaRPr lang="en-US" sz="1050" dirty="0"/>
-          </a:p>
-        </p:txBody>
-      </p:sp>
-      <p:sp>
-        <p:nvSpPr>
-          <p:cNvPr id="8" name="Text 6"/>
-          <p:cNvSpPr/>
-          <p:nvPr/>
-        </p:nvSpPr>
-        <p:spPr>
-          <a:xfrm>
-            <a:off x="2487168" y="5056632"/>
-            <a:ext cx="8954719" cy="658368"/>
-          </a:xfrm>
-          <a:prstGeom prst="rect">
-            <a:avLst/>
-          </a:prstGeom>
-          <a:noFill/>
-          <a:ln/>
-        </p:spPr>
-        <p:txBody>
-          <a:bodyPr wrap="square" lIns="0" tIns="0" rIns="0" bIns="0" rtlCol="0" anchor="ctr"/>
-          <a:lstStyle/>
-          <a:p>
-            <a:pPr indent="0" marL="0">
-              <a:lnSpc>
-                <a:spcPct val="125000"/>
-              </a:lnSpc>
-              <a:buNone/>
-            </a:pPr>
-            <a:r>
-              <a:rPr lang="en-US" sz="1100" dirty="0">
-                <a:solidFill>
-                  <a:srgbClr val="10161F"/>
-                </a:solidFill>
-                <a:latin typeface="Pretendard" pitchFamily="34" charset="0"/>
-                <a:ea typeface="Pretendard" pitchFamily="34" charset="-122"/>
-                <a:cs typeface="Pretendard" pitchFamily="34" charset="-120"/>
-              </a:rPr>
-              <a:t>성수 IT산업 거점으로서의 입지 가치와 통사옥 희소성을 갖추고 있습니다.</a:t>
-            </a:r>
-            <a:endParaRPr lang="en-US" sz="1100" dirty="0"/>
-          </a:p>
-        </p:txBody>
-      </p:sp>
-      <p:sp>
-        <p:nvSpPr>
-          <p:cNvPr id="9" name="Text 7"/>
-          <p:cNvSpPr/>
-          <p:nvPr/>
-        </p:nvSpPr>
-        <p:spPr>
-          <a:xfrm>
-            <a:off x="566928" y="6382512"/>
-            <a:ext cx="7315200" cy="219456"/>
-          </a:xfrm>
-          <a:prstGeom prst="rect">
-            <a:avLst/>
-          </a:prstGeom>
-          <a:noFill/>
-          <a:ln/>
-        </p:spPr>
-        <p:txBody>
-          <a:bodyPr wrap="square" lIns="0" tIns="0" rIns="0" bIns="0" rtlCol="0" anchor="ctr"/>
-          <a:lstStyle/>
-          <a:p>
-            <a:pPr indent="0" marL="0">
-              <a:buNone/>
-            </a:pPr>
-            <a:r>
-              <a:rPr lang="en-US" sz="800" dirty="0">
-                <a:solidFill>
-                  <a:srgbClr val="718096"/>
-                </a:solidFill>
-                <a:latin typeface="Pretendard" pitchFamily="34" charset="0"/>
-                <a:ea typeface="Pretendard" pitchFamily="34" charset="-122"/>
-                <a:cs typeface="Pretendard" pitchFamily="34" charset="-120"/>
-              </a:rPr>
-              <a:t>크리딜   |   </a:t>
-            </a:r>
-            <a:endParaRPr lang="en-US" sz="800" dirty="0"/>
-          </a:p>
-        </p:txBody>
-      </p:sp>
-      <p:sp>
-        <p:nvSpPr>
-          <p:cNvPr id="10" name="Text 8"/>
-          <p:cNvSpPr/>
-          <p:nvPr/>
-        </p:nvSpPr>
-        <p:spPr>
-          <a:xfrm>
-            <a:off x="10710367" y="6382512"/>
+            <a:off x="10774375" y="6382512"/>
             <a:ext cx="914400" cy="219456"/>
           </a:xfrm>
           <a:prstGeom prst="rect">
@@ -10848,7 +12281,7 @@
         </p:nvSpPr>
         <p:spPr>
           <a:xfrm>
-            <a:off x="566928" y="457200"/>
+            <a:off x="502920" y="457200"/>
             <a:ext cx="384048" cy="384048"/>
           </a:xfrm>
           <a:prstGeom prst="ellipse">
@@ -10868,7 +12301,7 @@
         </p:nvSpPr>
         <p:spPr>
           <a:xfrm>
-            <a:off x="566928" y="457200"/>
+            <a:off x="502920" y="457200"/>
             <a:ext cx="384048" cy="384048"/>
           </a:xfrm>
           <a:prstGeom prst="rect">
@@ -10907,7 +12340,7 @@
         </p:nvSpPr>
         <p:spPr>
           <a:xfrm>
-            <a:off x="1133856" y="457200"/>
+            <a:off x="1069848" y="457200"/>
             <a:ext cx="10490911" cy="182880"/>
           </a:xfrm>
           <a:prstGeom prst="rect">
@@ -10932,7 +12365,7 @@
                 <a:ea typeface="Arial" pitchFamily="34" charset="-122"/>
                 <a:cs typeface="Arial" pitchFamily="34" charset="-120"/>
               </a:rPr>
-              <a:t>Risk</a:t>
+              <a:t>Thesis</a:t>
             </a:r>
             <a:endParaRPr lang="en-US" sz="950" dirty="0"/>
           </a:p>
@@ -10946,7 +12379,7 @@
         </p:nvSpPr>
         <p:spPr>
           <a:xfrm>
-            <a:off x="1133856" y="640080"/>
+            <a:off x="1069848" y="640080"/>
             <a:ext cx="10490911" cy="365760"/>
           </a:xfrm>
           <a:prstGeom prst="rect">
@@ -10971,7 +12404,7 @@
                 <a:ea typeface="Pretendard" pitchFamily="34" charset="-122"/>
                 <a:cs typeface="Pretendard" pitchFamily="34" charset="-120"/>
               </a:rPr>
-              <a:t>리스크</a:t>
+              <a:t>투자 논거</a:t>
             </a:r>
             <a:endParaRPr lang="en-US" sz="2300" dirty="0"/>
           </a:p>
@@ -10985,20 +12418,20 @@
         </p:nvSpPr>
         <p:spPr>
           <a:xfrm>
-            <a:off x="566928" y="1417320"/>
-            <a:ext cx="11057839" cy="3657600"/>
+            <a:off x="502920" y="4937760"/>
+            <a:ext cx="11057839" cy="804672"/>
           </a:xfrm>
           <a:prstGeom prst="roundRect">
             <a:avLst>
-              <a:gd name="adj" fmla="val 1500"/>
+              <a:gd name="adj" fmla="val 6818"/>
             </a:avLst>
           </a:prstGeom>
           <a:solidFill>
-            <a:srgbClr val="F7FAFC"/>
+            <a:srgbClr val="F3EBDA"/>
           </a:solidFill>
-          <a:ln w="6350">
+          <a:ln w="10160">
             <a:solidFill>
-              <a:srgbClr val="CBD5E0"/>
+              <a:srgbClr val="D9B668"/>
             </a:solidFill>
             <a:prstDash val="solid"/>
           </a:ln>
@@ -11006,34 +12439,14 @@
       </p:sp>
       <p:sp>
         <p:nvSpPr>
-          <p:cNvPr id="7" name="Shape 5"/>
-          <p:cNvSpPr/>
-          <p:nvPr/>
-        </p:nvSpPr>
-        <p:spPr>
-          <a:xfrm>
-            <a:off x="566928" y="1417320"/>
-            <a:ext cx="11057839" cy="45720"/>
-          </a:xfrm>
-          <a:prstGeom prst="rect">
-            <a:avLst/>
-          </a:prstGeom>
-          <a:solidFill>
-            <a:srgbClr val="B98A2E"/>
-          </a:solidFill>
-          <a:ln/>
-        </p:spPr>
-      </p:sp>
-      <p:sp>
-        <p:nvSpPr>
-          <p:cNvPr id="8" name="Text 6"/>
-          <p:cNvSpPr/>
-          <p:nvPr/>
-        </p:nvSpPr>
-        <p:spPr>
-          <a:xfrm>
-            <a:off x="795528" y="1618488"/>
-            <a:ext cx="10600639" cy="292608"/>
+          <p:cNvPr id="7" name="Text 5"/>
+          <p:cNvSpPr/>
+          <p:nvPr/>
+        </p:nvSpPr>
+        <p:spPr>
+          <a:xfrm>
+            <a:off x="685800" y="5047488"/>
+            <a:ext cx="1691640" cy="256032"/>
           </a:xfrm>
           <a:prstGeom prst="rect">
             <a:avLst/>
@@ -11049,7 +12462,7 @@
               <a:buNone/>
             </a:pPr>
             <a:r>
-              <a:rPr lang="en-US" sz="1350" b="1" dirty="0">
+              <a:rPr lang="en-US" sz="1050" b="1" dirty="0">
                 <a:solidFill>
                   <a:srgbClr val="977024"/>
                 </a:solidFill>
@@ -11057,40 +12470,41 @@
                 <a:ea typeface="Pretendard" pitchFamily="34" charset="-122"/>
                 <a:cs typeface="Pretendard" pitchFamily="34" charset="-120"/>
               </a:rPr>
-              <a:t>준공업 용도제한</a:t>
-            </a:r>
-            <a:endParaRPr lang="en-US" sz="1350" dirty="0"/>
-          </a:p>
-        </p:txBody>
-      </p:sp>
-      <p:sp>
-        <p:nvSpPr>
-          <p:cNvPr id="9" name="Text 7"/>
-          <p:cNvSpPr/>
-          <p:nvPr/>
-        </p:nvSpPr>
-        <p:spPr>
-          <a:xfrm>
-            <a:off x="795528" y="1947672"/>
-            <a:ext cx="10600639" cy="365760"/>
-          </a:xfrm>
-          <a:prstGeom prst="rect">
-            <a:avLst/>
-          </a:prstGeom>
-          <a:noFill/>
-          <a:ln/>
-        </p:spPr>
-        <p:txBody>
-          <a:bodyPr wrap="square" lIns="0" tIns="0" rIns="0" bIns="0" rtlCol="0" anchor="ctr">
-            <a:normAutofit/>
-          </a:bodyPr>
+              <a:t>종합 가치 제안</a:t>
+            </a:r>
+            <a:endParaRPr lang="en-US" sz="1050" dirty="0"/>
+          </a:p>
+        </p:txBody>
+      </p:sp>
+      <p:sp>
+        <p:nvSpPr>
+          <p:cNvPr id="8" name="Text 6"/>
+          <p:cNvSpPr/>
+          <p:nvPr/>
+        </p:nvSpPr>
+        <p:spPr>
+          <a:xfrm>
+            <a:off x="2423160" y="5010912"/>
+            <a:ext cx="8954719" cy="658368"/>
+          </a:xfrm>
+          <a:prstGeom prst="rect">
+            <a:avLst/>
+          </a:prstGeom>
+          <a:noFill/>
+          <a:ln/>
+        </p:spPr>
+        <p:txBody>
+          <a:bodyPr wrap="square" lIns="0" tIns="0" rIns="0" bIns="0" rtlCol="0" anchor="ctr"/>
           <a:lstStyle/>
           <a:p>
             <a:pPr indent="0" marL="0">
-              <a:buNone/>
-            </a:pPr>
-            <a:r>
-              <a:rPr lang="en-US" sz="1250" b="1" dirty="0">
+              <a:lnSpc>
+                <a:spcPct val="125000"/>
+              </a:lnSpc>
+              <a:buNone/>
+            </a:pPr>
+            <a:r>
+              <a:rPr lang="en-US" sz="1100" dirty="0">
                 <a:solidFill>
                   <a:srgbClr val="10161F"/>
                 </a:solidFill>
@@ -11098,156 +12512,45 @@
                 <a:ea typeface="Pretendard" pitchFamily="34" charset="-122"/>
                 <a:cs typeface="Pretendard" pitchFamily="34" charset="-120"/>
               </a:rPr>
-              <a:t>IT 허용</a:t>
-            </a:r>
-            <a:endParaRPr lang="en-US" sz="1250" dirty="0"/>
-          </a:p>
-        </p:txBody>
-      </p:sp>
-      <p:sp>
-        <p:nvSpPr>
-          <p:cNvPr id="10" name="Text 8"/>
-          <p:cNvSpPr/>
-          <p:nvPr/>
-        </p:nvSpPr>
-        <p:spPr>
-          <a:xfrm>
-            <a:off x="795528" y="2377440"/>
-            <a:ext cx="10600639" cy="2606040"/>
-          </a:xfrm>
-          <a:prstGeom prst="rect">
-            <a:avLst/>
-          </a:prstGeom>
-          <a:noFill/>
-          <a:ln/>
-        </p:spPr>
-        <p:txBody>
-          <a:bodyPr wrap="square" lIns="0" tIns="0" rIns="0" bIns="0" rtlCol="0" anchor="t">
-            <a:normAutofit/>
-          </a:bodyPr>
-          <a:lstStyle/>
-          <a:p>
-            <a:pPr marL="342900" indent="-342900">
-              <a:lnSpc>
-                <a:spcPct val="125000"/>
-              </a:lnSpc>
-              <a:buSzPct val="100000"/>
-              <a:buChar char="•"/>
-            </a:pPr>
-            <a:r>
-              <a:rPr lang="en-US" sz="1100" dirty="0">
-                <a:solidFill>
-                  <a:srgbClr val="10161F"/>
+              <a:t>성수 IT산업 거점으로서의 입지 가치와 통사옥 희소성을 갖추고 있습니다.</a:t>
+            </a:r>
+            <a:endParaRPr lang="en-US" sz="1100" dirty="0"/>
+          </a:p>
+        </p:txBody>
+      </p:sp>
+      <p:sp>
+        <p:nvSpPr>
+          <p:cNvPr id="9" name="Text 7"/>
+          <p:cNvSpPr/>
+          <p:nvPr/>
+        </p:nvSpPr>
+        <p:spPr>
+          <a:xfrm>
+            <a:off x="502920" y="6382512"/>
+            <a:ext cx="7315200" cy="219456"/>
+          </a:xfrm>
+          <a:prstGeom prst="rect">
+            <a:avLst/>
+          </a:prstGeom>
+          <a:noFill/>
+          <a:ln/>
+        </p:spPr>
+        <p:txBody>
+          <a:bodyPr wrap="square" lIns="0" tIns="0" rIns="0" bIns="0" rtlCol="0" anchor="ctr"/>
+          <a:lstStyle/>
+          <a:p>
+            <a:pPr indent="0" marL="0">
+              <a:buNone/>
+            </a:pPr>
+            <a:r>
+              <a:rPr lang="en-US" sz="800" dirty="0">
+                <a:solidFill>
+                  <a:srgbClr val="718096"/>
                 </a:solidFill>
                 <a:latin typeface="Pretendard" pitchFamily="34" charset="0"/>
                 <a:ea typeface="Pretendard" pitchFamily="34" charset="-122"/>
                 <a:cs typeface="Pretendard" pitchFamily="34" charset="-120"/>
               </a:rPr>
-              <a:t>사전 확인 완료</a:t>
-            </a:r>
-            <a:endParaRPr lang="en-US" sz="1100" dirty="0"/>
-          </a:p>
-        </p:txBody>
-      </p:sp>
-      <p:sp>
-        <p:nvSpPr>
-          <p:cNvPr id="11" name="Shape 9"/>
-          <p:cNvSpPr/>
-          <p:nvPr/>
-        </p:nvSpPr>
-        <p:spPr>
-          <a:xfrm>
-            <a:off x="566928" y="5193792"/>
-            <a:ext cx="11057839" cy="621792"/>
-          </a:xfrm>
-          <a:prstGeom prst="roundRect">
-            <a:avLst>
-              <a:gd name="adj" fmla="val 8824"/>
-            </a:avLst>
-          </a:prstGeom>
-          <a:solidFill>
-            <a:srgbClr val="F7FAFC"/>
-          </a:solidFill>
-          <a:ln w="6350">
-            <a:solidFill>
-              <a:srgbClr val="CBD5E0"/>
-            </a:solidFill>
-            <a:prstDash val="solid"/>
-          </a:ln>
-        </p:spPr>
-      </p:sp>
-      <p:sp>
-        <p:nvSpPr>
-          <p:cNvPr id="12" name="Text 10"/>
-          <p:cNvSpPr/>
-          <p:nvPr/>
-        </p:nvSpPr>
-        <p:spPr>
-          <a:xfrm>
-            <a:off x="795528" y="5193792"/>
-            <a:ext cx="10600639" cy="621792"/>
-          </a:xfrm>
-          <a:prstGeom prst="rect">
-            <a:avLst/>
-          </a:prstGeom>
-          <a:noFill/>
-          <a:ln/>
-        </p:spPr>
-        <p:txBody>
-          <a:bodyPr wrap="square" lIns="0" tIns="0" rIns="0" bIns="0" rtlCol="0" anchor="ctr"/>
-          <a:lstStyle/>
-          <a:p>
-            <a:pPr indent="0" marL="0">
-              <a:buNone/>
-            </a:pPr>
-            <a:r>
-              <a:rPr lang="en-US" sz="1100" dirty="0">
-                <a:solidFill>
-                  <a:srgbClr val="10161F"/>
-                </a:solidFill>
-                <a:latin typeface="Pretendard" pitchFamily="34" charset="0"/>
-                <a:ea typeface="Pretendard" pitchFamily="34" charset="-122"/>
-                <a:cs typeface="Pretendard" pitchFamily="34" charset="-120"/>
-              </a:rPr>
-              <a:t>※ 본 리스크 체크는 공부 및 브로커 확인 기반이며, 매수 전 전문 실사팀(변호사/건축사)을 통한 정밀 실사가 필요합니다.</a:t>
-            </a:r>
-            <a:endParaRPr lang="en-US" sz="1100" dirty="0"/>
-          </a:p>
-        </p:txBody>
-      </p:sp>
-      <p:sp>
-        <p:nvSpPr>
-          <p:cNvPr id="13" name="Text 11"/>
-          <p:cNvSpPr/>
-          <p:nvPr/>
-        </p:nvSpPr>
-        <p:spPr>
-          <a:xfrm>
-            <a:off x="566928" y="6382512"/>
-            <a:ext cx="7315200" cy="219456"/>
-          </a:xfrm>
-          <a:prstGeom prst="rect">
-            <a:avLst/>
-          </a:prstGeom>
-          <a:noFill/>
-          <a:ln/>
-        </p:spPr>
-        <p:txBody>
-          <a:bodyPr wrap="square" lIns="0" tIns="0" rIns="0" bIns="0" rtlCol="0" anchor="ctr"/>
-          <a:lstStyle/>
-          <a:p>
-            <a:pPr indent="0" marL="0">
-              <a:buNone/>
-            </a:pPr>
-            <a:r>
-              <a:rPr lang="en-US" sz="800" dirty="0">
-                <a:solidFill>
-                  <a:srgbClr val="718096"/>
-                </a:solidFill>
-                <a:latin typeface="Pretendard" pitchFamily="34" charset="0"/>
-                <a:ea typeface="Pretendard" pitchFamily="34" charset="-122"/>
-                <a:cs typeface="Pretendard" pitchFamily="34" charset="-120"/>
-              </a:rPr>
               <a:t>크리딜   |   </a:t>
             </a:r>
             <a:endParaRPr lang="en-US" sz="800" dirty="0"/>
@@ -11256,13 +12559,13 @@
       </p:sp>
       <p:sp>
         <p:nvSpPr>
-          <p:cNvPr id="14" name="Text 12"/>
-          <p:cNvSpPr/>
-          <p:nvPr/>
-        </p:nvSpPr>
-        <p:spPr>
-          <a:xfrm>
-            <a:off x="10710367" y="6382512"/>
+          <p:cNvPr id="10" name="Text 8"/>
+          <p:cNvSpPr/>
+          <p:nvPr/>
+        </p:nvSpPr>
+        <p:spPr>
+          <a:xfrm>
+            <a:off x="10774375" y="6382512"/>
             <a:ext cx="914400" cy="219456"/>
           </a:xfrm>
           <a:prstGeom prst="rect">
@@ -11333,7 +12636,7 @@
         </p:nvSpPr>
         <p:spPr>
           <a:xfrm>
-            <a:off x="566928" y="457200"/>
+            <a:off x="502920" y="457200"/>
             <a:ext cx="384048" cy="384048"/>
           </a:xfrm>
           <a:prstGeom prst="ellipse">
@@ -11353,7 +12656,7 @@
         </p:nvSpPr>
         <p:spPr>
           <a:xfrm>
-            <a:off x="566928" y="457200"/>
+            <a:off x="502920" y="457200"/>
             <a:ext cx="384048" cy="384048"/>
           </a:xfrm>
           <a:prstGeom prst="rect">
@@ -11392,7 +12695,7 @@
         </p:nvSpPr>
         <p:spPr>
           <a:xfrm>
-            <a:off x="1133856" y="457200"/>
+            <a:off x="1069848" y="457200"/>
             <a:ext cx="10490911" cy="182880"/>
           </a:xfrm>
           <a:prstGeom prst="rect">
@@ -11417,7 +12720,7 @@
                 <a:ea typeface="Arial" pitchFamily="34" charset="-122"/>
                 <a:cs typeface="Arial" pitchFamily="34" charset="-120"/>
               </a:rPr>
-              <a:t>Checklist</a:t>
+              <a:t>Risk</a:t>
             </a:r>
             <a:endParaRPr lang="en-US" sz="950" dirty="0"/>
           </a:p>
@@ -11431,7 +12734,7 @@
         </p:nvSpPr>
         <p:spPr>
           <a:xfrm>
-            <a:off x="1133856" y="640080"/>
+            <a:off x="1069848" y="640080"/>
             <a:ext cx="10490911" cy="365760"/>
           </a:xfrm>
           <a:prstGeom prst="rect">
@@ -11456,7 +12759,7 @@
                 <a:ea typeface="Pretendard" pitchFamily="34" charset="-122"/>
                 <a:cs typeface="Pretendard" pitchFamily="34" charset="-120"/>
               </a:rPr>
-              <a:t>실사 체크리스트</a:t>
+              <a:t>리스크</a:t>
             </a:r>
             <a:endParaRPr lang="en-US" sz="2300" dirty="0"/>
           </a:p>
@@ -11464,63 +12767,26 @@
       </p:sp>
       <p:sp>
         <p:nvSpPr>
-          <p:cNvPr id="6" name="Text 4"/>
-          <p:cNvSpPr/>
-          <p:nvPr/>
-        </p:nvSpPr>
-        <p:spPr>
-          <a:xfrm>
-            <a:off x="566928" y="1371600"/>
-            <a:ext cx="11057839" cy="237744"/>
-          </a:xfrm>
-          <a:prstGeom prst="rect">
-            <a:avLst/>
-          </a:prstGeom>
-          <a:noFill/>
-          <a:ln/>
-        </p:spPr>
-        <p:txBody>
-          <a:bodyPr wrap="square" lIns="0" tIns="0" rIns="0" bIns="0" rtlCol="0" anchor="ctr"/>
-          <a:lstStyle/>
-          <a:p>
-            <a:pPr indent="0" marL="0">
-              <a:buNone/>
-            </a:pPr>
-            <a:r>
-              <a:rPr lang="en-US" sz="1100" b="1" dirty="0">
-                <a:solidFill>
-                  <a:srgbClr val="10161F"/>
-                </a:solidFill>
-                <a:latin typeface="Pretendard" pitchFamily="34" charset="0"/>
-                <a:ea typeface="Pretendard" pitchFamily="34" charset="-122"/>
-                <a:cs typeface="Pretendard" pitchFamily="34" charset="-120"/>
-              </a:rPr>
-              <a:t>거래 안정성 확보를 위한 필수 법률·물리·임대차 실사 점검 항목 (총 6건)</a:t>
-            </a:r>
-            <a:endParaRPr lang="en-US" sz="1100" dirty="0"/>
-          </a:p>
-        </p:txBody>
-      </p:sp>
-      <p:sp>
-        <p:nvSpPr>
-          <p:cNvPr id="7" name="Shape 5"/>
-          <p:cNvSpPr/>
-          <p:nvPr/>
-        </p:nvSpPr>
-        <p:spPr>
-          <a:xfrm>
-            <a:off x="566928" y="1719072"/>
-            <a:ext cx="5368900" cy="868680"/>
-          </a:xfrm>
-          <a:prstGeom prst="rect">
-            <a:avLst/>
+          <p:cNvPr id="6" name="Shape 4"/>
+          <p:cNvSpPr/>
+          <p:nvPr/>
+        </p:nvSpPr>
+        <p:spPr>
+          <a:xfrm>
+            <a:off x="502920" y="1417320"/>
+            <a:ext cx="11057839" cy="3657600"/>
+          </a:xfrm>
+          <a:prstGeom prst="roundRect">
+            <a:avLst>
+              <a:gd name="adj" fmla="val 1500"/>
+            </a:avLst>
           </a:prstGeom>
           <a:solidFill>
             <a:srgbClr val="F7FAFC"/>
           </a:solidFill>
           <a:ln w="6350">
             <a:solidFill>
-              <a:srgbClr val="D9B668"/>
+              <a:srgbClr val="CBD5E0"/>
             </a:solidFill>
             <a:prstDash val="solid"/>
           </a:ln>
@@ -11528,92 +12794,91 @@
       </p:sp>
       <p:sp>
         <p:nvSpPr>
-          <p:cNvPr id="8" name="Shape 6"/>
-          <p:cNvSpPr/>
-          <p:nvPr/>
-        </p:nvSpPr>
-        <p:spPr>
-          <a:xfrm>
-            <a:off x="704088" y="1883664"/>
-            <a:ext cx="320040" cy="320040"/>
+          <p:cNvPr id="7" name="Shape 5"/>
+          <p:cNvSpPr/>
+          <p:nvPr/>
+        </p:nvSpPr>
+        <p:spPr>
+          <a:xfrm>
+            <a:off x="502920" y="1417320"/>
+            <a:ext cx="11057839" cy="45720"/>
           </a:xfrm>
           <a:prstGeom prst="rect">
             <a:avLst/>
           </a:prstGeom>
           <a:solidFill>
-            <a:srgbClr val="977024"/>
+            <a:srgbClr val="B98A2E"/>
           </a:solidFill>
           <a:ln/>
         </p:spPr>
       </p:sp>
       <p:sp>
         <p:nvSpPr>
-          <p:cNvPr id="9" name="Text 7"/>
-          <p:cNvSpPr/>
-          <p:nvPr/>
-        </p:nvSpPr>
-        <p:spPr>
-          <a:xfrm>
-            <a:off x="704088" y="1883664"/>
-            <a:ext cx="320040" cy="320040"/>
-          </a:xfrm>
-          <a:prstGeom prst="rect">
-            <a:avLst/>
-          </a:prstGeom>
-          <a:noFill/>
-          <a:ln/>
-        </p:spPr>
-        <p:txBody>
-          <a:bodyPr wrap="square" rtlCol="0" anchor="ctr"/>
-          <a:lstStyle/>
-          <a:p>
-            <a:pPr algn="ctr" indent="0" marL="0">
-              <a:buNone/>
-            </a:pPr>
-            <a:r>
-              <a:rPr lang="en-US" sz="1100" b="1" dirty="0">
-                <a:solidFill>
-                  <a:srgbClr val="000000"/>
+          <p:cNvPr id="8" name="Text 6"/>
+          <p:cNvSpPr/>
+          <p:nvPr/>
+        </p:nvSpPr>
+        <p:spPr>
+          <a:xfrm>
+            <a:off x="731520" y="1618488"/>
+            <a:ext cx="10600639" cy="292608"/>
+          </a:xfrm>
+          <a:prstGeom prst="rect">
+            <a:avLst/>
+          </a:prstGeom>
+          <a:noFill/>
+          <a:ln/>
+        </p:spPr>
+        <p:txBody>
+          <a:bodyPr wrap="square" lIns="0" tIns="0" rIns="0" bIns="0" rtlCol="0" anchor="ctr"/>
+          <a:lstStyle/>
+          <a:p>
+            <a:pPr indent="0" marL="0">
+              <a:buNone/>
+            </a:pPr>
+            <a:r>
+              <a:rPr lang="en-US" sz="1350" b="1" dirty="0">
+                <a:solidFill>
+                  <a:srgbClr val="977024"/>
                 </a:solidFill>
                 <a:latin typeface="Pretendard" pitchFamily="34" charset="0"/>
                 <a:ea typeface="Pretendard" pitchFamily="34" charset="-122"/>
                 <a:cs typeface="Pretendard" pitchFamily="34" charset="-120"/>
               </a:rPr>
-              <a:t>✓</a:t>
-            </a:r>
-            <a:endParaRPr lang="en-US" sz="1100" dirty="0"/>
-          </a:p>
-        </p:txBody>
-      </p:sp>
-      <p:sp>
-        <p:nvSpPr>
-          <p:cNvPr id="10" name="Text 8"/>
-          <p:cNvSpPr/>
-          <p:nvPr/>
-        </p:nvSpPr>
-        <p:spPr>
-          <a:xfrm>
-            <a:off x="1115568" y="1810512"/>
-            <a:ext cx="4683100" cy="722376"/>
-          </a:xfrm>
-          <a:prstGeom prst="rect">
-            <a:avLst/>
-          </a:prstGeom>
-          <a:noFill/>
-          <a:ln/>
-        </p:spPr>
-        <p:txBody>
-          <a:bodyPr wrap="square" rtlCol="0" anchor="ctr"/>
+              <a:t>준공업 용도제한</a:t>
+            </a:r>
+            <a:endParaRPr lang="en-US" sz="1350" dirty="0"/>
+          </a:p>
+        </p:txBody>
+      </p:sp>
+      <p:sp>
+        <p:nvSpPr>
+          <p:cNvPr id="9" name="Text 7"/>
+          <p:cNvSpPr/>
+          <p:nvPr/>
+        </p:nvSpPr>
+        <p:spPr>
+          <a:xfrm>
+            <a:off x="731520" y="1947672"/>
+            <a:ext cx="10600639" cy="365760"/>
+          </a:xfrm>
+          <a:prstGeom prst="rect">
+            <a:avLst/>
+          </a:prstGeom>
+          <a:noFill/>
+          <a:ln/>
+        </p:spPr>
+        <p:txBody>
+          <a:bodyPr wrap="square" lIns="0" tIns="0" rIns="0" bIns="0" rtlCol="0" anchor="ctr">
+            <a:normAutofit/>
+          </a:bodyPr>
           <a:lstStyle/>
           <a:p>
             <a:pPr indent="0" marL="0">
-              <a:lnSpc>
-                <a:spcPct val="110000"/>
-              </a:lnSpc>
-              <a:buNone/>
-            </a:pPr>
-            <a:r>
-              <a:rPr lang="en-US" sz="950" dirty="0">
+              <a:buNone/>
+            </a:pPr>
+            <a:r>
+              <a:rPr lang="en-US" sz="1250" b="1" dirty="0">
                 <a:solidFill>
                   <a:srgbClr val="10161F"/>
                 </a:solidFill>
@@ -11621,9 +12886,54 @@
                 <a:ea typeface="Pretendard" pitchFamily="34" charset="-122"/>
                 <a:cs typeface="Pretendard" pitchFamily="34" charset="-120"/>
               </a:rPr>
-              <a:t>등기부등본 갑구/을구 권리관계 및 근저당 채권최고액 전액 말소 조건 원본 대조</a:t>
-            </a:r>
-            <a:endParaRPr lang="en-US" sz="950" dirty="0"/>
+              <a:t>IT 허용</a:t>
+            </a:r>
+            <a:endParaRPr lang="en-US" sz="1250" dirty="0"/>
+          </a:p>
+        </p:txBody>
+      </p:sp>
+      <p:sp>
+        <p:nvSpPr>
+          <p:cNvPr id="10" name="Text 8"/>
+          <p:cNvSpPr/>
+          <p:nvPr/>
+        </p:nvSpPr>
+        <p:spPr>
+          <a:xfrm>
+            <a:off x="731520" y="2377440"/>
+            <a:ext cx="10600639" cy="2606040"/>
+          </a:xfrm>
+          <a:prstGeom prst="rect">
+            <a:avLst/>
+          </a:prstGeom>
+          <a:noFill/>
+          <a:ln/>
+        </p:spPr>
+        <p:txBody>
+          <a:bodyPr wrap="square" lIns="0" tIns="0" rIns="0" bIns="0" rtlCol="0" anchor="t">
+            <a:normAutofit/>
+          </a:bodyPr>
+          <a:lstStyle/>
+          <a:p>
+            <a:pPr marL="342900" indent="-342900">
+              <a:lnSpc>
+                <a:spcPct val="115000"/>
+              </a:lnSpc>
+              <a:buSzPct val="100000"/>
+              <a:buChar char="•"/>
+            </a:pPr>
+            <a:r>
+              <a:rPr lang="en-US" sz="1100" dirty="0">
+                <a:solidFill>
+                  <a:srgbClr val="10161F"/>
+                </a:solidFill>
+                <a:latin typeface="Pretendard" pitchFamily="34" charset="0"/>
+                <a:ea typeface="Pretendard" pitchFamily="34" charset="-122"/>
+                <a:cs typeface="Pretendard" pitchFamily="34" charset="-120"/>
+              </a:rPr>
+              <a:t>사전 확인 완료</a:t>
+            </a:r>
+            <a:endParaRPr lang="en-US" sz="1100" dirty="0"/>
           </a:p>
         </p:txBody>
       </p:sp>
@@ -11635,18 +12945,20 @@
         </p:nvSpPr>
         <p:spPr>
           <a:xfrm>
-            <a:off x="566928" y="2715768"/>
-            <a:ext cx="5368900" cy="868680"/>
-          </a:xfrm>
-          <a:prstGeom prst="rect">
-            <a:avLst/>
+            <a:off x="502920" y="5193792"/>
+            <a:ext cx="11057839" cy="621792"/>
+          </a:xfrm>
+          <a:prstGeom prst="roundRect">
+            <a:avLst>
+              <a:gd name="adj" fmla="val 8824"/>
+            </a:avLst>
           </a:prstGeom>
           <a:solidFill>
             <a:srgbClr val="F7FAFC"/>
           </a:solidFill>
           <a:ln w="6350">
             <a:solidFill>
-              <a:srgbClr val="D9B668"/>
+              <a:srgbClr val="CBD5E0"/>
             </a:solidFill>
             <a:prstDash val="solid"/>
           </a:ln>
@@ -11654,58 +12966,38 @@
       </p:sp>
       <p:sp>
         <p:nvSpPr>
-          <p:cNvPr id="12" name="Shape 10"/>
-          <p:cNvSpPr/>
-          <p:nvPr/>
-        </p:nvSpPr>
-        <p:spPr>
-          <a:xfrm>
-            <a:off x="704088" y="2880360"/>
-            <a:ext cx="320040" cy="320040"/>
-          </a:xfrm>
-          <a:prstGeom prst="rect">
-            <a:avLst/>
-          </a:prstGeom>
-          <a:solidFill>
-            <a:srgbClr val="977024"/>
-          </a:solidFill>
-          <a:ln/>
-        </p:spPr>
-      </p:sp>
-      <p:sp>
-        <p:nvSpPr>
-          <p:cNvPr id="13" name="Text 11"/>
-          <p:cNvSpPr/>
-          <p:nvPr/>
-        </p:nvSpPr>
-        <p:spPr>
-          <a:xfrm>
-            <a:off x="704088" y="2880360"/>
-            <a:ext cx="320040" cy="320040"/>
-          </a:xfrm>
-          <a:prstGeom prst="rect">
-            <a:avLst/>
-          </a:prstGeom>
-          <a:noFill/>
-          <a:ln/>
-        </p:spPr>
-        <p:txBody>
-          <a:bodyPr wrap="square" rtlCol="0" anchor="ctr"/>
-          <a:lstStyle/>
-          <a:p>
-            <a:pPr algn="ctr" indent="0" marL="0">
-              <a:buNone/>
-            </a:pPr>
-            <a:r>
-              <a:rPr lang="en-US" sz="1100" b="1" dirty="0">
-                <a:solidFill>
-                  <a:srgbClr val="000000"/>
+          <p:cNvPr id="12" name="Text 10"/>
+          <p:cNvSpPr/>
+          <p:nvPr/>
+        </p:nvSpPr>
+        <p:spPr>
+          <a:xfrm>
+            <a:off x="731520" y="5193792"/>
+            <a:ext cx="10600639" cy="621792"/>
+          </a:xfrm>
+          <a:prstGeom prst="rect">
+            <a:avLst/>
+          </a:prstGeom>
+          <a:noFill/>
+          <a:ln/>
+        </p:spPr>
+        <p:txBody>
+          <a:bodyPr wrap="square" lIns="0" tIns="0" rIns="0" bIns="0" rtlCol="0" anchor="ctr"/>
+          <a:lstStyle/>
+          <a:p>
+            <a:pPr indent="0" marL="0">
+              <a:buNone/>
+            </a:pPr>
+            <a:r>
+              <a:rPr lang="en-US" sz="1100" dirty="0">
+                <a:solidFill>
+                  <a:srgbClr val="10161F"/>
                 </a:solidFill>
                 <a:latin typeface="Pretendard" pitchFamily="34" charset="0"/>
                 <a:ea typeface="Pretendard" pitchFamily="34" charset="-122"/>
                 <a:cs typeface="Pretendard" pitchFamily="34" charset="-120"/>
               </a:rPr>
-              <a:t>✓</a:t>
+              <a:t>※ 본 리스크 체크는 공부 및 브로커 확인 기반이며, 매수 전 전문 실사팀(변호사/건축사)을 통한 정밀 실사가 필요합니다.</a:t>
             </a:r>
             <a:endParaRPr lang="en-US" sz="1100" dirty="0"/>
           </a:p>
@@ -11713,642 +13005,37 @@
       </p:sp>
       <p:sp>
         <p:nvSpPr>
-          <p:cNvPr id="14" name="Text 12"/>
-          <p:cNvSpPr/>
-          <p:nvPr/>
-        </p:nvSpPr>
-        <p:spPr>
-          <a:xfrm>
-            <a:off x="1115568" y="2807208"/>
-            <a:ext cx="4683100" cy="722376"/>
-          </a:xfrm>
-          <a:prstGeom prst="rect">
-            <a:avLst/>
-          </a:prstGeom>
-          <a:noFill/>
-          <a:ln/>
-        </p:spPr>
-        <p:txBody>
-          <a:bodyPr wrap="square" rtlCol="0" anchor="ctr"/>
+          <p:cNvPr id="13" name="Text 11"/>
+          <p:cNvSpPr/>
+          <p:nvPr/>
+        </p:nvSpPr>
+        <p:spPr>
+          <a:xfrm>
+            <a:off x="502920" y="6382512"/>
+            <a:ext cx="7315200" cy="219456"/>
+          </a:xfrm>
+          <a:prstGeom prst="rect">
+            <a:avLst/>
+          </a:prstGeom>
+          <a:noFill/>
+          <a:ln/>
+        </p:spPr>
+        <p:txBody>
+          <a:bodyPr wrap="square" lIns="0" tIns="0" rIns="0" bIns="0" rtlCol="0" anchor="ctr"/>
           <a:lstStyle/>
           <a:p>
             <a:pPr indent="0" marL="0">
-              <a:lnSpc>
-                <a:spcPct val="110000"/>
-              </a:lnSpc>
-              <a:buNone/>
-            </a:pPr>
-            <a:r>
-              <a:rPr lang="en-US" sz="950" dirty="0">
-                <a:solidFill>
-                  <a:srgbClr val="10161F"/>
+              <a:buNone/>
+            </a:pPr>
+            <a:r>
+              <a:rPr lang="en-US" sz="800" dirty="0">
+                <a:solidFill>
+                  <a:srgbClr val="718096"/>
                 </a:solidFill>
                 <a:latin typeface="Pretendard" pitchFamily="34" charset="0"/>
                 <a:ea typeface="Pretendard" pitchFamily="34" charset="-122"/>
                 <a:cs typeface="Pretendard" pitchFamily="34" charset="-120"/>
               </a:rPr>
-              <a:t>임대차 원본 계약서 대조 (보증금, 월임대료, 관리비 실입금 내역 및 제소전화해조서)</a:t>
-            </a:r>
-            <a:endParaRPr lang="en-US" sz="950" dirty="0"/>
-          </a:p>
-        </p:txBody>
-      </p:sp>
-      <p:sp>
-        <p:nvSpPr>
-          <p:cNvPr id="15" name="Shape 13"/>
-          <p:cNvSpPr/>
-          <p:nvPr/>
-        </p:nvSpPr>
-        <p:spPr>
-          <a:xfrm>
-            <a:off x="566928" y="3712464"/>
-            <a:ext cx="5368900" cy="868680"/>
-          </a:xfrm>
-          <a:prstGeom prst="rect">
-            <a:avLst/>
-          </a:prstGeom>
-          <a:solidFill>
-            <a:srgbClr val="F7FAFC"/>
-          </a:solidFill>
-          <a:ln w="6350">
-            <a:solidFill>
-              <a:srgbClr val="D9B668"/>
-            </a:solidFill>
-            <a:prstDash val="solid"/>
-          </a:ln>
-        </p:spPr>
-      </p:sp>
-      <p:sp>
-        <p:nvSpPr>
-          <p:cNvPr id="16" name="Shape 14"/>
-          <p:cNvSpPr/>
-          <p:nvPr/>
-        </p:nvSpPr>
-        <p:spPr>
-          <a:xfrm>
-            <a:off x="704088" y="3877056"/>
-            <a:ext cx="320040" cy="320040"/>
-          </a:xfrm>
-          <a:prstGeom prst="rect">
-            <a:avLst/>
-          </a:prstGeom>
-          <a:solidFill>
-            <a:srgbClr val="977024"/>
-          </a:solidFill>
-          <a:ln/>
-        </p:spPr>
-      </p:sp>
-      <p:sp>
-        <p:nvSpPr>
-          <p:cNvPr id="17" name="Text 15"/>
-          <p:cNvSpPr/>
-          <p:nvPr/>
-        </p:nvSpPr>
-        <p:spPr>
-          <a:xfrm>
-            <a:off x="704088" y="3877056"/>
-            <a:ext cx="320040" cy="320040"/>
-          </a:xfrm>
-          <a:prstGeom prst="rect">
-            <a:avLst/>
-          </a:prstGeom>
-          <a:noFill/>
-          <a:ln/>
-        </p:spPr>
-        <p:txBody>
-          <a:bodyPr wrap="square" rtlCol="0" anchor="ctr"/>
-          <a:lstStyle/>
-          <a:p>
-            <a:pPr algn="ctr" indent="0" marL="0">
-              <a:buNone/>
-            </a:pPr>
-            <a:r>
-              <a:rPr lang="en-US" sz="1100" b="1" dirty="0">
-                <a:solidFill>
-                  <a:srgbClr val="000000"/>
-                </a:solidFill>
-                <a:latin typeface="Pretendard" pitchFamily="34" charset="0"/>
-                <a:ea typeface="Pretendard" pitchFamily="34" charset="-122"/>
-                <a:cs typeface="Pretendard" pitchFamily="34" charset="-120"/>
-              </a:rPr>
-              <a:t>✓</a:t>
-            </a:r>
-            <a:endParaRPr lang="en-US" sz="1100" dirty="0"/>
-          </a:p>
-        </p:txBody>
-      </p:sp>
-      <p:sp>
-        <p:nvSpPr>
-          <p:cNvPr id="18" name="Text 16"/>
-          <p:cNvSpPr/>
-          <p:nvPr/>
-        </p:nvSpPr>
-        <p:spPr>
-          <a:xfrm>
-            <a:off x="1115568" y="3803904"/>
-            <a:ext cx="4683100" cy="722376"/>
-          </a:xfrm>
-          <a:prstGeom prst="rect">
-            <a:avLst/>
-          </a:prstGeom>
-          <a:noFill/>
-          <a:ln/>
-        </p:spPr>
-        <p:txBody>
-          <a:bodyPr wrap="square" rtlCol="0" anchor="ctr"/>
-          <a:lstStyle/>
-          <a:p>
-            <a:pPr indent="0" marL="0">
-              <a:lnSpc>
-                <a:spcPct val="110000"/>
-              </a:lnSpc>
-              <a:buNone/>
-            </a:pPr>
-            <a:r>
-              <a:rPr lang="en-US" sz="950" dirty="0">
-                <a:solidFill>
-                  <a:srgbClr val="10161F"/>
-                </a:solidFill>
-                <a:latin typeface="Pretendard" pitchFamily="34" charset="0"/>
-                <a:ea typeface="Pretendard" pitchFamily="34" charset="-122"/>
-                <a:cs typeface="Pretendard" pitchFamily="34" charset="-120"/>
-              </a:rPr>
-              <a:t>건축물대장상 위반건축물 등재 여부 및 불법 증축·용도변경 이행강제금 납부 이력 점검</a:t>
-            </a:r>
-            <a:endParaRPr lang="en-US" sz="950" dirty="0"/>
-          </a:p>
-        </p:txBody>
-      </p:sp>
-      <p:sp>
-        <p:nvSpPr>
-          <p:cNvPr id="19" name="Shape 17"/>
-          <p:cNvSpPr/>
-          <p:nvPr/>
-        </p:nvSpPr>
-        <p:spPr>
-          <a:xfrm>
-            <a:off x="6255868" y="1719072"/>
-            <a:ext cx="5368900" cy="868680"/>
-          </a:xfrm>
-          <a:prstGeom prst="rect">
-            <a:avLst/>
-          </a:prstGeom>
-          <a:solidFill>
-            <a:srgbClr val="F7FAFC"/>
-          </a:solidFill>
-          <a:ln w="6350">
-            <a:solidFill>
-              <a:srgbClr val="D9B668"/>
-            </a:solidFill>
-            <a:prstDash val="solid"/>
-          </a:ln>
-        </p:spPr>
-      </p:sp>
-      <p:sp>
-        <p:nvSpPr>
-          <p:cNvPr id="20" name="Shape 18"/>
-          <p:cNvSpPr/>
-          <p:nvPr/>
-        </p:nvSpPr>
-        <p:spPr>
-          <a:xfrm>
-            <a:off x="6393028" y="1883664"/>
-            <a:ext cx="320040" cy="320040"/>
-          </a:xfrm>
-          <a:prstGeom prst="rect">
-            <a:avLst/>
-          </a:prstGeom>
-          <a:solidFill>
-            <a:srgbClr val="977024"/>
-          </a:solidFill>
-          <a:ln/>
-        </p:spPr>
-      </p:sp>
-      <p:sp>
-        <p:nvSpPr>
-          <p:cNvPr id="21" name="Text 19"/>
-          <p:cNvSpPr/>
-          <p:nvPr/>
-        </p:nvSpPr>
-        <p:spPr>
-          <a:xfrm>
-            <a:off x="6393028" y="1883664"/>
-            <a:ext cx="320040" cy="320040"/>
-          </a:xfrm>
-          <a:prstGeom prst="rect">
-            <a:avLst/>
-          </a:prstGeom>
-          <a:noFill/>
-          <a:ln/>
-        </p:spPr>
-        <p:txBody>
-          <a:bodyPr wrap="square" rtlCol="0" anchor="ctr"/>
-          <a:lstStyle/>
-          <a:p>
-            <a:pPr algn="ctr" indent="0" marL="0">
-              <a:buNone/>
-            </a:pPr>
-            <a:r>
-              <a:rPr lang="en-US" sz="1100" b="1" dirty="0">
-                <a:solidFill>
-                  <a:srgbClr val="000000"/>
-                </a:solidFill>
-                <a:latin typeface="Pretendard" pitchFamily="34" charset="0"/>
-                <a:ea typeface="Pretendard" pitchFamily="34" charset="-122"/>
-                <a:cs typeface="Pretendard" pitchFamily="34" charset="-120"/>
-              </a:rPr>
-              <a:t>✓</a:t>
-            </a:r>
-            <a:endParaRPr lang="en-US" sz="1100" dirty="0"/>
-          </a:p>
-        </p:txBody>
-      </p:sp>
-      <p:sp>
-        <p:nvSpPr>
-          <p:cNvPr id="22" name="Text 20"/>
-          <p:cNvSpPr/>
-          <p:nvPr/>
-        </p:nvSpPr>
-        <p:spPr>
-          <a:xfrm>
-            <a:off x="6804508" y="1810512"/>
-            <a:ext cx="4683100" cy="722376"/>
-          </a:xfrm>
-          <a:prstGeom prst="rect">
-            <a:avLst/>
-          </a:prstGeom>
-          <a:noFill/>
-          <a:ln/>
-        </p:spPr>
-        <p:txBody>
-          <a:bodyPr wrap="square" rtlCol="0" anchor="ctr"/>
-          <a:lstStyle/>
-          <a:p>
-            <a:pPr indent="0" marL="0">
-              <a:lnSpc>
-                <a:spcPct val="110000"/>
-              </a:lnSpc>
-              <a:buNone/>
-            </a:pPr>
-            <a:r>
-              <a:rPr lang="en-US" sz="950" dirty="0">
-                <a:solidFill>
-                  <a:srgbClr val="10161F"/>
-                </a:solidFill>
-                <a:latin typeface="Pretendard" pitchFamily="34" charset="0"/>
-                <a:ea typeface="Pretendard" pitchFamily="34" charset="-122"/>
-                <a:cs typeface="Pretendard" pitchFamily="34" charset="-120"/>
-              </a:rPr>
-              <a:t>토지이용계획확인원상 도시계획시설 저촉, 건축선 후퇴, 지구단위계획 특별계획구역 확인</a:t>
-            </a:r>
-            <a:endParaRPr lang="en-US" sz="950" dirty="0"/>
-          </a:p>
-        </p:txBody>
-      </p:sp>
-      <p:sp>
-        <p:nvSpPr>
-          <p:cNvPr id="23" name="Shape 21"/>
-          <p:cNvSpPr/>
-          <p:nvPr/>
-        </p:nvSpPr>
-        <p:spPr>
-          <a:xfrm>
-            <a:off x="6255868" y="2715768"/>
-            <a:ext cx="5368900" cy="868680"/>
-          </a:xfrm>
-          <a:prstGeom prst="rect">
-            <a:avLst/>
-          </a:prstGeom>
-          <a:solidFill>
-            <a:srgbClr val="F7FAFC"/>
-          </a:solidFill>
-          <a:ln w="6350">
-            <a:solidFill>
-              <a:srgbClr val="D9B668"/>
-            </a:solidFill>
-            <a:prstDash val="solid"/>
-          </a:ln>
-        </p:spPr>
-      </p:sp>
-      <p:sp>
-        <p:nvSpPr>
-          <p:cNvPr id="24" name="Shape 22"/>
-          <p:cNvSpPr/>
-          <p:nvPr/>
-        </p:nvSpPr>
-        <p:spPr>
-          <a:xfrm>
-            <a:off x="6393028" y="2880360"/>
-            <a:ext cx="320040" cy="320040"/>
-          </a:xfrm>
-          <a:prstGeom prst="rect">
-            <a:avLst/>
-          </a:prstGeom>
-          <a:solidFill>
-            <a:srgbClr val="977024"/>
-          </a:solidFill>
-          <a:ln/>
-        </p:spPr>
-      </p:sp>
-      <p:sp>
-        <p:nvSpPr>
-          <p:cNvPr id="25" name="Text 23"/>
-          <p:cNvSpPr/>
-          <p:nvPr/>
-        </p:nvSpPr>
-        <p:spPr>
-          <a:xfrm>
-            <a:off x="6393028" y="2880360"/>
-            <a:ext cx="320040" cy="320040"/>
-          </a:xfrm>
-          <a:prstGeom prst="rect">
-            <a:avLst/>
-          </a:prstGeom>
-          <a:noFill/>
-          <a:ln/>
-        </p:spPr>
-        <p:txBody>
-          <a:bodyPr wrap="square" rtlCol="0" anchor="ctr"/>
-          <a:lstStyle/>
-          <a:p>
-            <a:pPr algn="ctr" indent="0" marL="0">
-              <a:buNone/>
-            </a:pPr>
-            <a:r>
-              <a:rPr lang="en-US" sz="1100" b="1" dirty="0">
-                <a:solidFill>
-                  <a:srgbClr val="000000"/>
-                </a:solidFill>
-                <a:latin typeface="Pretendard" pitchFamily="34" charset="0"/>
-                <a:ea typeface="Pretendard" pitchFamily="34" charset="-122"/>
-                <a:cs typeface="Pretendard" pitchFamily="34" charset="-120"/>
-              </a:rPr>
-              <a:t>✓</a:t>
-            </a:r>
-            <a:endParaRPr lang="en-US" sz="1100" dirty="0"/>
-          </a:p>
-        </p:txBody>
-      </p:sp>
-      <p:sp>
-        <p:nvSpPr>
-          <p:cNvPr id="26" name="Text 24"/>
-          <p:cNvSpPr/>
-          <p:nvPr/>
-        </p:nvSpPr>
-        <p:spPr>
-          <a:xfrm>
-            <a:off x="6804508" y="2807208"/>
-            <a:ext cx="4683100" cy="722376"/>
-          </a:xfrm>
-          <a:prstGeom prst="rect">
-            <a:avLst/>
-          </a:prstGeom>
-          <a:noFill/>
-          <a:ln/>
-        </p:spPr>
-        <p:txBody>
-          <a:bodyPr wrap="square" rtlCol="0" anchor="ctr"/>
-          <a:lstStyle/>
-          <a:p>
-            <a:pPr indent="0" marL="0">
-              <a:lnSpc>
-                <a:spcPct val="110000"/>
-              </a:lnSpc>
-              <a:buNone/>
-            </a:pPr>
-            <a:r>
-              <a:rPr lang="en-US" sz="950" dirty="0">
-                <a:solidFill>
-                  <a:srgbClr val="10161F"/>
-                </a:solidFill>
-                <a:latin typeface="Pretendard" pitchFamily="34" charset="0"/>
-                <a:ea typeface="Pretendard" pitchFamily="34" charset="-122"/>
-                <a:cs typeface="Pretendard" pitchFamily="34" charset="-120"/>
-              </a:rPr>
-              <a:t>기계식 주차기 정기 안전점검 합격증, 승강기 검사필증, 소방 완비증명서 실물 실사</a:t>
-            </a:r>
-            <a:endParaRPr lang="en-US" sz="950" dirty="0"/>
-          </a:p>
-        </p:txBody>
-      </p:sp>
-      <p:sp>
-        <p:nvSpPr>
-          <p:cNvPr id="27" name="Shape 25"/>
-          <p:cNvSpPr/>
-          <p:nvPr/>
-        </p:nvSpPr>
-        <p:spPr>
-          <a:xfrm>
-            <a:off x="6255868" y="3712464"/>
-            <a:ext cx="5368900" cy="868680"/>
-          </a:xfrm>
-          <a:prstGeom prst="rect">
-            <a:avLst/>
-          </a:prstGeom>
-          <a:solidFill>
-            <a:srgbClr val="F7FAFC"/>
-          </a:solidFill>
-          <a:ln w="6350">
-            <a:solidFill>
-              <a:srgbClr val="D9B668"/>
-            </a:solidFill>
-            <a:prstDash val="solid"/>
-          </a:ln>
-        </p:spPr>
-      </p:sp>
-      <p:sp>
-        <p:nvSpPr>
-          <p:cNvPr id="28" name="Shape 26"/>
-          <p:cNvSpPr/>
-          <p:nvPr/>
-        </p:nvSpPr>
-        <p:spPr>
-          <a:xfrm>
-            <a:off x="6393028" y="3877056"/>
-            <a:ext cx="320040" cy="320040"/>
-          </a:xfrm>
-          <a:prstGeom prst="rect">
-            <a:avLst/>
-          </a:prstGeom>
-          <a:solidFill>
-            <a:srgbClr val="977024"/>
-          </a:solidFill>
-          <a:ln/>
-        </p:spPr>
-      </p:sp>
-      <p:sp>
-        <p:nvSpPr>
-          <p:cNvPr id="29" name="Text 27"/>
-          <p:cNvSpPr/>
-          <p:nvPr/>
-        </p:nvSpPr>
-        <p:spPr>
-          <a:xfrm>
-            <a:off x="6393028" y="3877056"/>
-            <a:ext cx="320040" cy="320040"/>
-          </a:xfrm>
-          <a:prstGeom prst="rect">
-            <a:avLst/>
-          </a:prstGeom>
-          <a:noFill/>
-          <a:ln/>
-        </p:spPr>
-        <p:txBody>
-          <a:bodyPr wrap="square" rtlCol="0" anchor="ctr"/>
-          <a:lstStyle/>
-          <a:p>
-            <a:pPr algn="ctr" indent="0" marL="0">
-              <a:buNone/>
-            </a:pPr>
-            <a:r>
-              <a:rPr lang="en-US" sz="1100" b="1" dirty="0">
-                <a:solidFill>
-                  <a:srgbClr val="000000"/>
-                </a:solidFill>
-                <a:latin typeface="Pretendard" pitchFamily="34" charset="0"/>
-                <a:ea typeface="Pretendard" pitchFamily="34" charset="-122"/>
-                <a:cs typeface="Pretendard" pitchFamily="34" charset="-120"/>
-              </a:rPr>
-              <a:t>✓</a:t>
-            </a:r>
-            <a:endParaRPr lang="en-US" sz="1100" dirty="0"/>
-          </a:p>
-        </p:txBody>
-      </p:sp>
-      <p:sp>
-        <p:nvSpPr>
-          <p:cNvPr id="30" name="Text 28"/>
-          <p:cNvSpPr/>
-          <p:nvPr/>
-        </p:nvSpPr>
-        <p:spPr>
-          <a:xfrm>
-            <a:off x="6804508" y="3803904"/>
-            <a:ext cx="4683100" cy="722376"/>
-          </a:xfrm>
-          <a:prstGeom prst="rect">
-            <a:avLst/>
-          </a:prstGeom>
-          <a:noFill/>
-          <a:ln/>
-        </p:spPr>
-        <p:txBody>
-          <a:bodyPr wrap="square" rtlCol="0" anchor="ctr"/>
-          <a:lstStyle/>
-          <a:p>
-            <a:pPr indent="0" marL="0">
-              <a:lnSpc>
-                <a:spcPct val="110000"/>
-              </a:lnSpc>
-              <a:buNone/>
-            </a:pPr>
-            <a:r>
-              <a:rPr lang="en-US" sz="950" dirty="0">
-                <a:solidFill>
-                  <a:srgbClr val="10161F"/>
-                </a:solidFill>
-                <a:latin typeface="Pretendard" pitchFamily="34" charset="0"/>
-                <a:ea typeface="Pretendard" pitchFamily="34" charset="-122"/>
-                <a:cs typeface="Pretendard" pitchFamily="34" charset="-120"/>
-              </a:rPr>
-              <a:t>정화조 용량 대비 현 업종 적합성 및 하수도 원인자부담금 추가 부과 대상 여부 확인</a:t>
-            </a:r>
-            <a:endParaRPr lang="en-US" sz="950" dirty="0"/>
-          </a:p>
-        </p:txBody>
-      </p:sp>
-      <p:sp>
-        <p:nvSpPr>
-          <p:cNvPr id="31" name="Shape 29"/>
-          <p:cNvSpPr/>
-          <p:nvPr/>
-        </p:nvSpPr>
-        <p:spPr>
-          <a:xfrm>
-            <a:off x="566928" y="5760720"/>
-            <a:ext cx="11057839" cy="594360"/>
-          </a:xfrm>
-          <a:prstGeom prst="rect">
-            <a:avLst/>
-          </a:prstGeom>
-          <a:solidFill>
-            <a:srgbClr val="D9B668"/>
-          </a:solidFill>
-          <a:ln/>
-        </p:spPr>
-      </p:sp>
-      <p:sp>
-        <p:nvSpPr>
-          <p:cNvPr id="32" name="Text 30"/>
-          <p:cNvSpPr/>
-          <p:nvPr/>
-        </p:nvSpPr>
-        <p:spPr>
-          <a:xfrm>
-            <a:off x="749808" y="5833872"/>
-            <a:ext cx="10692079" cy="448056"/>
-          </a:xfrm>
-          <a:prstGeom prst="rect">
-            <a:avLst/>
-          </a:prstGeom>
-          <a:noFill/>
-          <a:ln/>
-        </p:spPr>
-        <p:txBody>
-          <a:bodyPr wrap="square" rtlCol="0" anchor="ctr"/>
-          <a:lstStyle/>
-          <a:p>
-            <a:pPr indent="0" marL="0">
-              <a:buNone/>
-            </a:pPr>
-            <a:r>
-              <a:rPr lang="en-US" sz="950" b="1" dirty="0">
-                <a:solidFill>
-                  <a:srgbClr val="977024"/>
-                </a:solidFill>
-                <a:latin typeface="Pretendard" pitchFamily="34" charset="0"/>
-                <a:ea typeface="Pretendard" pitchFamily="34" charset="-122"/>
-                <a:cs typeface="Pretendard" pitchFamily="34" charset="-120"/>
-              </a:rPr>
-              <a:t>※ 본 체크리스트는 계약 전 매수인의 안전한 자산 인수를 위한 필수 확인 사항이며, 실사(Due Diligence) 결과에 따라 매매 조건 및 잔금 일정이 조정될 수 있습니다.</a:t>
-            </a:r>
-            <a:endParaRPr lang="en-US" sz="950" dirty="0"/>
-          </a:p>
-        </p:txBody>
-      </p:sp>
-      <p:sp>
-        <p:nvSpPr>
-          <p:cNvPr id="33" name="Text 31"/>
-          <p:cNvSpPr/>
-          <p:nvPr/>
-        </p:nvSpPr>
-        <p:spPr>
-          <a:xfrm>
-            <a:off x="566928" y="6382512"/>
-            <a:ext cx="7315200" cy="219456"/>
-          </a:xfrm>
-          <a:prstGeom prst="rect">
-            <a:avLst/>
-          </a:prstGeom>
-          <a:noFill/>
-          <a:ln/>
-        </p:spPr>
-        <p:txBody>
-          <a:bodyPr wrap="square" lIns="0" tIns="0" rIns="0" bIns="0" rtlCol="0" anchor="ctr"/>
-          <a:lstStyle/>
-          <a:p>
-            <a:pPr indent="0" marL="0">
-              <a:buNone/>
-            </a:pPr>
-            <a:r>
-              <a:rPr lang="en-US" sz="800" dirty="0">
-                <a:solidFill>
-                  <a:srgbClr val="718096"/>
-                </a:solidFill>
-                <a:latin typeface="Pretendard" pitchFamily="34" charset="0"/>
-                <a:ea typeface="Pretendard" pitchFamily="34" charset="-122"/>
-                <a:cs typeface="Pretendard" pitchFamily="34" charset="-120"/>
-              </a:rPr>
               <a:t>크리딜   |   </a:t>
             </a:r>
             <a:endParaRPr lang="en-US" sz="800" dirty="0"/>
@@ -12357,13 +13044,13 @@
       </p:sp>
       <p:sp>
         <p:nvSpPr>
-          <p:cNvPr id="34" name="Text 32"/>
-          <p:cNvSpPr/>
-          <p:nvPr/>
-        </p:nvSpPr>
-        <p:spPr>
-          <a:xfrm>
-            <a:off x="10710367" y="6382512"/>
+          <p:cNvPr id="14" name="Text 12"/>
+          <p:cNvSpPr/>
+          <p:nvPr/>
+        </p:nvSpPr>
+        <p:spPr>
+          <a:xfrm>
+            <a:off x="10774375" y="6382512"/>
             <a:ext cx="914400" cy="219456"/>
           </a:xfrm>
           <a:prstGeom prst="rect">

--- a/docs/test/stress/e2e-outputs/owner_occupied_basic_pr03.pptx
+++ b/docs/test/stress/e2e-outputs/owner_occupied_basic_pr03.pptx
@@ -2137,7 +2137,7 @@
         <p:spPr>
           <a:xfrm>
             <a:off x="502920" y="3090672"/>
-            <a:ext cx="7315200" cy="365760"/>
+            <a:ext cx="7315200" cy="329184"/>
           </a:xfrm>
           <a:prstGeom prst="rect">
             <a:avLst/>
@@ -2175,7 +2175,7 @@
         </p:nvSpPr>
         <p:spPr>
           <a:xfrm>
-            <a:off x="502920" y="3685032"/>
+            <a:off x="502920" y="3639312"/>
             <a:ext cx="1005840" cy="292608"/>
           </a:xfrm>
           <a:prstGeom prst="roundRect">
@@ -2197,7 +2197,7 @@
         </p:nvSpPr>
         <p:spPr>
           <a:xfrm>
-            <a:off x="502920" y="3685032"/>
+            <a:off x="502920" y="3639312"/>
             <a:ext cx="1005840" cy="292608"/>
           </a:xfrm>
           <a:prstGeom prst="rect">
@@ -2236,7 +2236,7 @@
         </p:nvSpPr>
         <p:spPr>
           <a:xfrm>
-            <a:off x="1600200" y="3685032"/>
+            <a:off x="1600200" y="3639312"/>
             <a:ext cx="1005840" cy="292608"/>
           </a:xfrm>
           <a:prstGeom prst="roundRect">
@@ -2258,7 +2258,7 @@
         </p:nvSpPr>
         <p:spPr>
           <a:xfrm>
-            <a:off x="1600200" y="3685032"/>
+            <a:off x="1600200" y="3639312"/>
             <a:ext cx="1005840" cy="292608"/>
           </a:xfrm>
           <a:prstGeom prst="rect">
@@ -2297,7 +2297,7 @@
         </p:nvSpPr>
         <p:spPr>
           <a:xfrm>
-            <a:off x="502920" y="4187952"/>
+            <a:off x="502920" y="4078224"/>
             <a:ext cx="6858000" cy="1051560"/>
           </a:xfrm>
           <a:prstGeom prst="roundRect">
@@ -2324,7 +2324,7 @@
         </p:nvSpPr>
         <p:spPr>
           <a:xfrm>
-            <a:off x="758952" y="4297680"/>
+            <a:off x="758952" y="4187952"/>
             <a:ext cx="6345936" cy="832104"/>
           </a:xfrm>
           <a:prstGeom prst="rect">
@@ -2466,7 +2466,7 @@
                 <a:ea typeface="Pretendard" pitchFamily="34" charset="-122"/>
                 <a:cs typeface="Pretendard" pitchFamily="34" charset="-120"/>
               </a:rPr>
-              <a:t>크리딜   |   </a:t>
+              <a:t>크리딜</a:t>
             </a:r>
             <a:endParaRPr lang="en-US" sz="800" dirty="0"/>
           </a:p>
@@ -2728,7 +2728,7 @@
         <p:spPr>
           <a:xfrm>
             <a:off x="502920" y="1719072"/>
-            <a:ext cx="5368900" cy="868680"/>
+            <a:ext cx="5368900" cy="749808"/>
           </a:xfrm>
           <a:prstGeom prst="rect">
             <a:avLst/>
@@ -2752,8 +2752,8 @@
         </p:nvSpPr>
         <p:spPr>
           <a:xfrm>
-            <a:off x="640080" y="1883664"/>
-            <a:ext cx="320040" cy="320040"/>
+            <a:off x="640080" y="1947672"/>
+            <a:ext cx="292608" cy="292608"/>
           </a:xfrm>
           <a:prstGeom prst="rect">
             <a:avLst/>
@@ -2772,8 +2772,8 @@
         </p:nvSpPr>
         <p:spPr>
           <a:xfrm>
-            <a:off x="640080" y="1883664"/>
-            <a:ext cx="320040" cy="320040"/>
+            <a:off x="640080" y="1947672"/>
+            <a:ext cx="292608" cy="292608"/>
           </a:xfrm>
           <a:prstGeom prst="rect">
             <a:avLst/>
@@ -2789,7 +2789,7 @@
               <a:buNone/>
             </a:pPr>
             <a:r>
-              <a:rPr lang="en-US" sz="1100" b="1" dirty="0">
+              <a:rPr lang="en-US" sz="1050" b="1" dirty="0">
                 <a:solidFill>
                   <a:srgbClr val="FFFFFF"/>
                 </a:solidFill>
@@ -2799,7 +2799,7 @@
               </a:rPr>
               <a:t>✓</a:t>
             </a:r>
-            <a:endParaRPr lang="en-US" sz="1100" dirty="0"/>
+            <a:endParaRPr lang="en-US" sz="1050" dirty="0"/>
           </a:p>
         </p:txBody>
       </p:sp>
@@ -2811,8 +2811,8 @@
         </p:nvSpPr>
         <p:spPr>
           <a:xfrm>
-            <a:off x="1051560" y="1810512"/>
-            <a:ext cx="4683100" cy="722376"/>
+            <a:off x="1033272" y="1792224"/>
+            <a:ext cx="4710532" cy="603504"/>
           </a:xfrm>
           <a:prstGeom prst="rect">
             <a:avLst/>
@@ -2853,8 +2853,8 @@
         </p:nvSpPr>
         <p:spPr>
           <a:xfrm>
-            <a:off x="502920" y="2715768"/>
-            <a:ext cx="5368900" cy="868680"/>
+            <a:off x="502920" y="2542032"/>
+            <a:ext cx="5368900" cy="749808"/>
           </a:xfrm>
           <a:prstGeom prst="rect">
             <a:avLst/>
@@ -2878,8 +2878,8 @@
         </p:nvSpPr>
         <p:spPr>
           <a:xfrm>
-            <a:off x="640080" y="2880360"/>
-            <a:ext cx="320040" cy="320040"/>
+            <a:off x="640080" y="2770632"/>
+            <a:ext cx="292608" cy="292608"/>
           </a:xfrm>
           <a:prstGeom prst="rect">
             <a:avLst/>
@@ -2898,8 +2898,8 @@
         </p:nvSpPr>
         <p:spPr>
           <a:xfrm>
-            <a:off x="640080" y="2880360"/>
-            <a:ext cx="320040" cy="320040"/>
+            <a:off x="640080" y="2770632"/>
+            <a:ext cx="292608" cy="292608"/>
           </a:xfrm>
           <a:prstGeom prst="rect">
             <a:avLst/>
@@ -2915,7 +2915,7 @@
               <a:buNone/>
             </a:pPr>
             <a:r>
-              <a:rPr lang="en-US" sz="1100" b="1" dirty="0">
+              <a:rPr lang="en-US" sz="1050" b="1" dirty="0">
                 <a:solidFill>
                   <a:srgbClr val="FFFFFF"/>
                 </a:solidFill>
@@ -2925,7 +2925,7 @@
               </a:rPr>
               <a:t>✓</a:t>
             </a:r>
-            <a:endParaRPr lang="en-US" sz="1100" dirty="0"/>
+            <a:endParaRPr lang="en-US" sz="1050" dirty="0"/>
           </a:p>
         </p:txBody>
       </p:sp>
@@ -2937,8 +2937,8 @@
         </p:nvSpPr>
         <p:spPr>
           <a:xfrm>
-            <a:off x="1051560" y="2807208"/>
-            <a:ext cx="4683100" cy="722376"/>
+            <a:off x="1033272" y="2615184"/>
+            <a:ext cx="4710532" cy="603504"/>
           </a:xfrm>
           <a:prstGeom prst="rect">
             <a:avLst/>
@@ -2979,8 +2979,8 @@
         </p:nvSpPr>
         <p:spPr>
           <a:xfrm>
-            <a:off x="502920" y="3712464"/>
-            <a:ext cx="5368900" cy="868680"/>
+            <a:off x="502920" y="3364992"/>
+            <a:ext cx="5368900" cy="749808"/>
           </a:xfrm>
           <a:prstGeom prst="rect">
             <a:avLst/>
@@ -3004,8 +3004,8 @@
         </p:nvSpPr>
         <p:spPr>
           <a:xfrm>
-            <a:off x="640080" y="3877056"/>
-            <a:ext cx="320040" cy="320040"/>
+            <a:off x="640080" y="3593592"/>
+            <a:ext cx="292608" cy="292608"/>
           </a:xfrm>
           <a:prstGeom prst="rect">
             <a:avLst/>
@@ -3024,8 +3024,8 @@
         </p:nvSpPr>
         <p:spPr>
           <a:xfrm>
-            <a:off x="640080" y="3877056"/>
-            <a:ext cx="320040" cy="320040"/>
+            <a:off x="640080" y="3593592"/>
+            <a:ext cx="292608" cy="292608"/>
           </a:xfrm>
           <a:prstGeom prst="rect">
             <a:avLst/>
@@ -3041,7 +3041,7 @@
               <a:buNone/>
             </a:pPr>
             <a:r>
-              <a:rPr lang="en-US" sz="1100" b="1" dirty="0">
+              <a:rPr lang="en-US" sz="1050" b="1" dirty="0">
                 <a:solidFill>
                   <a:srgbClr val="FFFFFF"/>
                 </a:solidFill>
@@ -3051,7 +3051,7 @@
               </a:rPr>
               <a:t>✓</a:t>
             </a:r>
-            <a:endParaRPr lang="en-US" sz="1100" dirty="0"/>
+            <a:endParaRPr lang="en-US" sz="1050" dirty="0"/>
           </a:p>
         </p:txBody>
       </p:sp>
@@ -3063,8 +3063,8 @@
         </p:nvSpPr>
         <p:spPr>
           <a:xfrm>
-            <a:off x="1051560" y="3803904"/>
-            <a:ext cx="4683100" cy="722376"/>
+            <a:off x="1033272" y="3438144"/>
+            <a:ext cx="4710532" cy="603504"/>
           </a:xfrm>
           <a:prstGeom prst="rect">
             <a:avLst/>
@@ -3106,7 +3106,7 @@
         <p:spPr>
           <a:xfrm>
             <a:off x="6191860" y="1719072"/>
-            <a:ext cx="5368900" cy="868680"/>
+            <a:ext cx="5368900" cy="749808"/>
           </a:xfrm>
           <a:prstGeom prst="rect">
             <a:avLst/>
@@ -3130,8 +3130,8 @@
         </p:nvSpPr>
         <p:spPr>
           <a:xfrm>
-            <a:off x="6329020" y="1883664"/>
-            <a:ext cx="320040" cy="320040"/>
+            <a:off x="6329020" y="1947672"/>
+            <a:ext cx="292608" cy="292608"/>
           </a:xfrm>
           <a:prstGeom prst="rect">
             <a:avLst/>
@@ -3150,8 +3150,8 @@
         </p:nvSpPr>
         <p:spPr>
           <a:xfrm>
-            <a:off x="6329020" y="1883664"/>
-            <a:ext cx="320040" cy="320040"/>
+            <a:off x="6329020" y="1947672"/>
+            <a:ext cx="292608" cy="292608"/>
           </a:xfrm>
           <a:prstGeom prst="rect">
             <a:avLst/>
@@ -3167,7 +3167,7 @@
               <a:buNone/>
             </a:pPr>
             <a:r>
-              <a:rPr lang="en-US" sz="1100" b="1" dirty="0">
+              <a:rPr lang="en-US" sz="1050" b="1" dirty="0">
                 <a:solidFill>
                   <a:srgbClr val="FFFFFF"/>
                 </a:solidFill>
@@ -3177,7 +3177,7 @@
               </a:rPr>
               <a:t>✓</a:t>
             </a:r>
-            <a:endParaRPr lang="en-US" sz="1100" dirty="0"/>
+            <a:endParaRPr lang="en-US" sz="1050" dirty="0"/>
           </a:p>
         </p:txBody>
       </p:sp>
@@ -3189,8 +3189,8 @@
         </p:nvSpPr>
         <p:spPr>
           <a:xfrm>
-            <a:off x="6740500" y="1810512"/>
-            <a:ext cx="4683100" cy="722376"/>
+            <a:off x="6722212" y="1792224"/>
+            <a:ext cx="4710532" cy="603504"/>
           </a:xfrm>
           <a:prstGeom prst="rect">
             <a:avLst/>
@@ -3231,8 +3231,8 @@
         </p:nvSpPr>
         <p:spPr>
           <a:xfrm>
-            <a:off x="6191860" y="2715768"/>
-            <a:ext cx="5368900" cy="868680"/>
+            <a:off x="6191860" y="2542032"/>
+            <a:ext cx="5368900" cy="749808"/>
           </a:xfrm>
           <a:prstGeom prst="rect">
             <a:avLst/>
@@ -3256,8 +3256,8 @@
         </p:nvSpPr>
         <p:spPr>
           <a:xfrm>
-            <a:off x="6329020" y="2880360"/>
-            <a:ext cx="320040" cy="320040"/>
+            <a:off x="6329020" y="2770632"/>
+            <a:ext cx="292608" cy="292608"/>
           </a:xfrm>
           <a:prstGeom prst="rect">
             <a:avLst/>
@@ -3276,8 +3276,8 @@
         </p:nvSpPr>
         <p:spPr>
           <a:xfrm>
-            <a:off x="6329020" y="2880360"/>
-            <a:ext cx="320040" cy="320040"/>
+            <a:off x="6329020" y="2770632"/>
+            <a:ext cx="292608" cy="292608"/>
           </a:xfrm>
           <a:prstGeom prst="rect">
             <a:avLst/>
@@ -3293,7 +3293,7 @@
               <a:buNone/>
             </a:pPr>
             <a:r>
-              <a:rPr lang="en-US" sz="1100" b="1" dirty="0">
+              <a:rPr lang="en-US" sz="1050" b="1" dirty="0">
                 <a:solidFill>
                   <a:srgbClr val="FFFFFF"/>
                 </a:solidFill>
@@ -3303,7 +3303,7 @@
               </a:rPr>
               <a:t>✓</a:t>
             </a:r>
-            <a:endParaRPr lang="en-US" sz="1100" dirty="0"/>
+            <a:endParaRPr lang="en-US" sz="1050" dirty="0"/>
           </a:p>
         </p:txBody>
       </p:sp>
@@ -3315,8 +3315,8 @@
         </p:nvSpPr>
         <p:spPr>
           <a:xfrm>
-            <a:off x="6740500" y="2807208"/>
-            <a:ext cx="4683100" cy="722376"/>
+            <a:off x="6722212" y="2615184"/>
+            <a:ext cx="4710532" cy="603504"/>
           </a:xfrm>
           <a:prstGeom prst="rect">
             <a:avLst/>
@@ -3357,8 +3357,8 @@
         </p:nvSpPr>
         <p:spPr>
           <a:xfrm>
-            <a:off x="6191860" y="3712464"/>
-            <a:ext cx="5368900" cy="868680"/>
+            <a:off x="6191860" y="3364992"/>
+            <a:ext cx="5368900" cy="749808"/>
           </a:xfrm>
           <a:prstGeom prst="rect">
             <a:avLst/>
@@ -3382,8 +3382,8 @@
         </p:nvSpPr>
         <p:spPr>
           <a:xfrm>
-            <a:off x="6329020" y="3877056"/>
-            <a:ext cx="320040" cy="320040"/>
+            <a:off x="6329020" y="3593592"/>
+            <a:ext cx="292608" cy="292608"/>
           </a:xfrm>
           <a:prstGeom prst="rect">
             <a:avLst/>
@@ -3402,8 +3402,8 @@
         </p:nvSpPr>
         <p:spPr>
           <a:xfrm>
-            <a:off x="6329020" y="3877056"/>
-            <a:ext cx="320040" cy="320040"/>
+            <a:off x="6329020" y="3593592"/>
+            <a:ext cx="292608" cy="292608"/>
           </a:xfrm>
           <a:prstGeom prst="rect">
             <a:avLst/>
@@ -3419,7 +3419,7 @@
               <a:buNone/>
             </a:pPr>
             <a:r>
-              <a:rPr lang="en-US" sz="1100" b="1" dirty="0">
+              <a:rPr lang="en-US" sz="1050" b="1" dirty="0">
                 <a:solidFill>
                   <a:srgbClr val="FFFFFF"/>
                 </a:solidFill>
@@ -3429,7 +3429,7 @@
               </a:rPr>
               <a:t>✓</a:t>
             </a:r>
-            <a:endParaRPr lang="en-US" sz="1100" dirty="0"/>
+            <a:endParaRPr lang="en-US" sz="1050" dirty="0"/>
           </a:p>
         </p:txBody>
       </p:sp>
@@ -3441,8 +3441,8 @@
         </p:nvSpPr>
         <p:spPr>
           <a:xfrm>
-            <a:off x="6740500" y="3803904"/>
-            <a:ext cx="4683100" cy="722376"/>
+            <a:off x="6722212" y="3438144"/>
+            <a:ext cx="4710532" cy="603504"/>
           </a:xfrm>
           <a:prstGeom prst="rect">
             <a:avLst/>
@@ -3567,7 +3567,7 @@
                 <a:ea typeface="Pretendard" pitchFamily="34" charset="-122"/>
                 <a:cs typeface="Pretendard" pitchFamily="34" charset="-120"/>
               </a:rPr>
-              <a:t>크리딜   |   </a:t>
+              <a:t>크리딜</a:t>
             </a:r>
             <a:endParaRPr lang="en-US" sz="800" dirty="0"/>
           </a:p>
@@ -3995,7 +3995,7 @@
                 <a:ea typeface="Pretendard" pitchFamily="34" charset="-122"/>
                 <a:cs typeface="Pretendard" pitchFamily="34" charset="-120"/>
               </a:rPr>
-              <a:t>크리딜   |   </a:t>
+              <a:t>크리딜</a:t>
             </a:r>
             <a:endParaRPr lang="en-US" sz="800" dirty="0"/>
           </a:p>
@@ -5498,7 +5498,7 @@
                 <a:ea typeface="Pretendard" pitchFamily="34" charset="-122"/>
                 <a:cs typeface="Pretendard" pitchFamily="34" charset="-120"/>
               </a:rPr>
-              <a:t>크리딜   |   </a:t>
+              <a:t>크리딜</a:t>
             </a:r>
             <a:endParaRPr lang="en-US" sz="800" dirty="0"/>
           </a:p>
@@ -5864,10 +5864,13 @@
           <a:lstStyle/>
           <a:p>
             <a:pPr indent="0" marL="0">
-              <a:buNone/>
-            </a:pPr>
-            <a:r>
-              <a:rPr lang="en-US" sz="1700" b="1" dirty="0">
+              <a:lnSpc>
+                <a:spcPct val="100000"/>
+              </a:lnSpc>
+              <a:buNone/>
+            </a:pPr>
+            <a:r>
+              <a:rPr lang="en-US" sz="2200" b="1" dirty="0">
                 <a:solidFill>
                   <a:srgbClr val="10161F"/>
                 </a:solidFill>
@@ -5877,7 +5880,7 @@
               </a:rPr>
               <a:t>-</a:t>
             </a:r>
-            <a:endParaRPr lang="en-US" sz="1700" dirty="0"/>
+            <a:endParaRPr lang="en-US" sz="2200" dirty="0"/>
           </a:p>
         </p:txBody>
       </p:sp>
@@ -5971,10 +5974,13 @@
           <a:lstStyle/>
           <a:p>
             <a:pPr indent="0" marL="0">
-              <a:buNone/>
-            </a:pPr>
-            <a:r>
-              <a:rPr lang="en-US" sz="1700" b="1" dirty="0">
+              <a:lnSpc>
+                <a:spcPct val="100000"/>
+              </a:lnSpc>
+              <a:buNone/>
+            </a:pPr>
+            <a:r>
+              <a:rPr lang="en-US" sz="2200" b="1" dirty="0">
                 <a:solidFill>
                   <a:srgbClr val="10161F"/>
                 </a:solidFill>
@@ -5984,7 +5990,7 @@
               </a:rPr>
               <a:t>512.4평</a:t>
             </a:r>
-            <a:endParaRPr lang="en-US" sz="1700" dirty="0"/>
+            <a:endParaRPr lang="en-US" sz="2200" dirty="0"/>
           </a:p>
         </p:txBody>
       </p:sp>
@@ -6078,10 +6084,13 @@
           <a:lstStyle/>
           <a:p>
             <a:pPr indent="0" marL="0">
-              <a:buNone/>
-            </a:pPr>
-            <a:r>
-              <a:rPr lang="en-US" sz="1700" b="1" dirty="0">
+              <a:lnSpc>
+                <a:spcPct val="100000"/>
+              </a:lnSpc>
+              <a:buNone/>
+            </a:pPr>
+            <a:r>
+              <a:rPr lang="en-US" sz="2200" b="1" dirty="0">
                 <a:solidFill>
                   <a:srgbClr val="10161F"/>
                 </a:solidFill>
@@ -6091,7 +6100,7 @@
               </a:rPr>
               <a:t>4.2m</a:t>
             </a:r>
-            <a:endParaRPr lang="en-US" sz="1700" dirty="0"/>
+            <a:endParaRPr lang="en-US" sz="2200" dirty="0"/>
           </a:p>
         </p:txBody>
       </p:sp>
@@ -6147,7 +6156,7 @@
               <a:buNone/>
             </a:pPr>
             <a:r>
-              <a:rPr lang="en-US" sz="950" dirty="0">
+              <a:rPr lang="en-US" sz="850" dirty="0">
                 <a:solidFill>
                   <a:srgbClr val="718096"/>
                 </a:solidFill>
@@ -6157,7 +6166,7 @@
               </a:rPr>
               <a:t>연 수익률(Cap Rate)</a:t>
             </a:r>
-            <a:endParaRPr lang="en-US" sz="950" dirty="0"/>
+            <a:endParaRPr lang="en-US" sz="850" dirty="0"/>
           </a:p>
         </p:txBody>
       </p:sp>
@@ -6185,10 +6194,13 @@
           <a:lstStyle/>
           <a:p>
             <a:pPr indent="0" marL="0">
-              <a:buNone/>
-            </a:pPr>
-            <a:r>
-              <a:rPr lang="en-US" sz="1700" b="1" dirty="0">
+              <a:lnSpc>
+                <a:spcPct val="100000"/>
+              </a:lnSpc>
+              <a:buNone/>
+            </a:pPr>
+            <a:r>
+              <a:rPr lang="en-US" sz="2200" b="1" dirty="0">
                 <a:solidFill>
                   <a:srgbClr val="10161F"/>
                 </a:solidFill>
@@ -6198,7 +6210,7 @@
               </a:rPr>
               <a:t>-</a:t>
             </a:r>
-            <a:endParaRPr lang="en-US" sz="1700" dirty="0"/>
+            <a:endParaRPr lang="en-US" sz="2200" dirty="0"/>
           </a:p>
         </p:txBody>
       </p:sp>
@@ -6292,10 +6304,13 @@
           <a:lstStyle/>
           <a:p>
             <a:pPr indent="0" marL="0">
-              <a:buNone/>
-            </a:pPr>
-            <a:r>
-              <a:rPr lang="en-US" sz="1700" b="1" dirty="0">
+              <a:lnSpc>
+                <a:spcPct val="100000"/>
+              </a:lnSpc>
+              <a:buNone/>
+            </a:pPr>
+            <a:r>
+              <a:rPr lang="en-US" sz="2200" b="1" dirty="0">
                 <a:solidFill>
                   <a:srgbClr val="10161F"/>
                 </a:solidFill>
@@ -6305,7 +6320,7 @@
               </a:rPr>
               <a:t>-</a:t>
             </a:r>
-            <a:endParaRPr lang="en-US" sz="1700" dirty="0"/>
+            <a:endParaRPr lang="en-US" sz="2200" dirty="0"/>
           </a:p>
         </p:txBody>
       </p:sp>
@@ -6399,10 +6414,13 @@
           <a:lstStyle/>
           <a:p>
             <a:pPr indent="0" marL="0">
-              <a:buNone/>
-            </a:pPr>
-            <a:r>
-              <a:rPr lang="en-US" sz="1700" b="1" dirty="0">
+              <a:lnSpc>
+                <a:spcPct val="100000"/>
+              </a:lnSpc>
+              <a:buNone/>
+            </a:pPr>
+            <a:r>
+              <a:rPr lang="en-US" sz="2200" b="1" dirty="0">
                 <a:solidFill>
                   <a:srgbClr val="10161F"/>
                 </a:solidFill>
@@ -6412,7 +6430,7 @@
               </a:rPr>
               <a:t>-</a:t>
             </a:r>
-            <a:endParaRPr lang="en-US" sz="1700" dirty="0"/>
+            <a:endParaRPr lang="en-US" sz="2200" dirty="0"/>
           </a:p>
         </p:txBody>
       </p:sp>
@@ -6506,10 +6524,13 @@
           <a:lstStyle/>
           <a:p>
             <a:pPr indent="0" marL="0">
-              <a:buNone/>
-            </a:pPr>
-            <a:r>
-              <a:rPr lang="en-US" sz="1700" b="1" dirty="0">
+              <a:lnSpc>
+                <a:spcPct val="100000"/>
+              </a:lnSpc>
+              <a:buNone/>
+            </a:pPr>
+            <a:r>
+              <a:rPr lang="en-US" sz="2200" b="1" dirty="0">
                 <a:solidFill>
                   <a:srgbClr val="10161F"/>
                 </a:solidFill>
@@ -6519,7 +6540,7 @@
               </a:rPr>
               <a:t>확인 중</a:t>
             </a:r>
-            <a:endParaRPr lang="en-US" sz="1700" dirty="0"/>
+            <a:endParaRPr lang="en-US" sz="2200" dirty="0"/>
           </a:p>
         </p:txBody>
       </p:sp>
@@ -6991,7 +7012,7 @@
                 <a:ea typeface="Pretendard" pitchFamily="34" charset="-122"/>
                 <a:cs typeface="Pretendard" pitchFamily="34" charset="-120"/>
               </a:rPr>
-              <a:t>크리딜   |   </a:t>
+              <a:t>크리딜</a:t>
             </a:r>
             <a:endParaRPr lang="en-US" sz="800" dirty="0"/>
           </a:p>
@@ -7238,7 +7259,7 @@
         <p:spPr>
           <a:xfrm>
             <a:off x="5989320" y="1481328"/>
-            <a:ext cx="1560003" cy="493776"/>
+            <a:ext cx="1560003" cy="457200"/>
           </a:xfrm>
           <a:prstGeom prst="rect">
             <a:avLst/>
@@ -7257,7 +7278,7 @@
               <a:buNone/>
             </a:pPr>
             <a:r>
-              <a:rPr lang="en-US" sz="1300" dirty="0">
+              <a:rPr lang="en-US" sz="1250" dirty="0">
                 <a:solidFill>
                   <a:srgbClr val="718096"/>
                 </a:solidFill>
@@ -7267,7 +7288,7 @@
               </a:rPr>
               <a:t>대중교통</a:t>
             </a:r>
-            <a:endParaRPr lang="en-US" sz="1300" dirty="0"/>
+            <a:endParaRPr lang="en-US" sz="1250" dirty="0"/>
           </a:p>
         </p:txBody>
       </p:sp>
@@ -7280,7 +7301,7 @@
         <p:spPr>
           <a:xfrm>
             <a:off x="7549323" y="1481328"/>
-            <a:ext cx="4011436" cy="493776"/>
+            <a:ext cx="4011436" cy="457200"/>
           </a:xfrm>
           <a:prstGeom prst="rect">
             <a:avLst/>
@@ -7299,7 +7320,7 @@
               <a:buNone/>
             </a:pPr>
             <a:r>
-              <a:rPr lang="en-US" sz="1300" b="1" dirty="0">
+              <a:rPr lang="en-US" sz="1250" b="1" dirty="0">
                 <a:solidFill>
                   <a:srgbClr val="10161F"/>
                 </a:solidFill>
@@ -7307,9 +7328,9 @@
                 <a:ea typeface="Pretendard" pitchFamily="34" charset="-122"/>
                 <a:cs typeface="Pretendard" pitchFamily="34" charset="-120"/>
               </a:rPr>
-              <a:t>인접 지하철역 역세권 (상세 확인 필요)</a:t>
-            </a:r>
-            <a:endParaRPr lang="en-US" sz="1300" dirty="0"/>
+              <a:t>지하철 및 간선버스 인접</a:t>
+            </a:r>
+            <a:endParaRPr lang="en-US" sz="1250" dirty="0"/>
           </a:p>
         </p:txBody>
       </p:sp>
@@ -7321,7 +7342,7 @@
         </p:nvSpPr>
         <p:spPr>
           <a:xfrm>
-            <a:off x="5989320" y="1975104"/>
+            <a:off x="5989320" y="1938528"/>
             <a:ext cx="5571439" cy="0"/>
           </a:xfrm>
           <a:prstGeom prst="line">
@@ -7344,8 +7365,8 @@
         </p:nvSpPr>
         <p:spPr>
           <a:xfrm>
-            <a:off x="5989320" y="1975104"/>
-            <a:ext cx="1560003" cy="493776"/>
+            <a:off x="5989320" y="1938528"/>
+            <a:ext cx="1560003" cy="457200"/>
           </a:xfrm>
           <a:prstGeom prst="rect">
             <a:avLst/>
@@ -7364,7 +7385,7 @@
               <a:buNone/>
             </a:pPr>
             <a:r>
-              <a:rPr lang="en-US" sz="1300" dirty="0">
+              <a:rPr lang="en-US" sz="1250" dirty="0">
                 <a:solidFill>
                   <a:srgbClr val="718096"/>
                 </a:solidFill>
@@ -7374,7 +7395,7 @@
               </a:rPr>
               <a:t>상권권역</a:t>
             </a:r>
-            <a:endParaRPr lang="en-US" sz="1300" dirty="0"/>
+            <a:endParaRPr lang="en-US" sz="1250" dirty="0"/>
           </a:p>
         </p:txBody>
       </p:sp>
@@ -7386,8 +7407,8 @@
         </p:nvSpPr>
         <p:spPr>
           <a:xfrm>
-            <a:off x="7549323" y="1975104"/>
-            <a:ext cx="4011436" cy="493776"/>
+            <a:off x="7549323" y="1938528"/>
+            <a:ext cx="4011436" cy="457200"/>
           </a:xfrm>
           <a:prstGeom prst="rect">
             <a:avLst/>
@@ -7406,7 +7427,7 @@
               <a:buNone/>
             </a:pPr>
             <a:r>
-              <a:rPr lang="en-US" sz="1300" b="1" dirty="0">
+              <a:rPr lang="en-US" sz="1250" b="1" dirty="0">
                 <a:solidFill>
                   <a:srgbClr val="10161F"/>
                 </a:solidFill>
@@ -7416,7 +7437,7 @@
               </a:rPr>
               <a:t>성수권역 주요 상업·업무 권역</a:t>
             </a:r>
-            <a:endParaRPr lang="en-US" sz="1300" dirty="0"/>
+            <a:endParaRPr lang="en-US" sz="1250" dirty="0"/>
           </a:p>
         </p:txBody>
       </p:sp>
@@ -7428,7 +7449,7 @@
         </p:nvSpPr>
         <p:spPr>
           <a:xfrm>
-            <a:off x="5989320" y="2606040"/>
+            <a:off x="5989320" y="2505456"/>
             <a:ext cx="5571439" cy="658368"/>
           </a:xfrm>
           <a:prstGeom prst="roundRect">
@@ -7450,7 +7471,7 @@
         </p:nvSpPr>
         <p:spPr>
           <a:xfrm>
-            <a:off x="5989320" y="2660904"/>
+            <a:off x="5989320" y="2560320"/>
             <a:ext cx="36576" cy="548640"/>
           </a:xfrm>
           <a:prstGeom prst="rect">
@@ -7470,7 +7491,7 @@
         </p:nvSpPr>
         <p:spPr>
           <a:xfrm>
-            <a:off x="6135624" y="2697480"/>
+            <a:off x="6135624" y="2596896"/>
             <a:ext cx="5315407" cy="201168"/>
           </a:xfrm>
           <a:prstGeom prst="rect">
@@ -7509,7 +7530,7 @@
         </p:nvSpPr>
         <p:spPr>
           <a:xfrm>
-            <a:off x="6135624" y="2898648"/>
+            <a:off x="6135624" y="2798064"/>
             <a:ext cx="5315407" cy="329184"/>
           </a:xfrm>
           <a:prstGeom prst="rect">
@@ -7577,7 +7598,7 @@
                 <a:ea typeface="Pretendard" pitchFamily="34" charset="-122"/>
                 <a:cs typeface="Pretendard" pitchFamily="34" charset="-120"/>
               </a:rPr>
-              <a:t>크리딜   |   </a:t>
+              <a:t>크리딜</a:t>
             </a:r>
             <a:endParaRPr lang="en-US" sz="800" dirty="0"/>
           </a:p>
@@ -7839,7 +7860,7 @@
         <p:spPr>
           <a:xfrm>
             <a:off x="502920" y="1645920"/>
-            <a:ext cx="1920240" cy="420624"/>
+            <a:ext cx="1920240" cy="402336"/>
           </a:xfrm>
           <a:prstGeom prst="rect">
             <a:avLst/>
@@ -7881,7 +7902,7 @@
         <p:spPr>
           <a:xfrm>
             <a:off x="2423160" y="1645920"/>
-            <a:ext cx="4937760" cy="420624"/>
+            <a:ext cx="4937760" cy="402336"/>
           </a:xfrm>
           <a:prstGeom prst="rect">
             <a:avLst/>
@@ -8012,7 +8033,7 @@
                 <a:ea typeface="Pretendard" pitchFamily="34" charset="-122"/>
                 <a:cs typeface="Pretendard" pitchFamily="34" charset="-120"/>
               </a:rPr>
-              <a:t>토지 및 건축 규제 포인트</a:t>
+              <a:t>토지 및 건축 규제</a:t>
             </a:r>
             <a:endParaRPr lang="en-US" sz="1050" dirty="0"/>
           </a:p>
@@ -8055,7 +8076,131 @@
                 <a:ea typeface="Pretendard" pitchFamily="34" charset="-122"/>
                 <a:cs typeface="Pretendard" pitchFamily="34" charset="-120"/>
               </a:rPr>
-              <a:t>용도지역·용도지구 기준 건폐율/용적률 상한 확인</a:t>
+              <a:t>토지이용계획 열람 및 건축 규제 확인 필요</a:t>
+            </a:r>
+            <a:endParaRPr lang="en-US" sz="980" dirty="0"/>
+          </a:p>
+        </p:txBody>
+      </p:sp>
+      <p:sp>
+        <p:nvSpPr>
+          <p:cNvPr id="14" name="Shape 12"/>
+          <p:cNvSpPr/>
+          <p:nvPr/>
+        </p:nvSpPr>
+        <p:spPr>
+          <a:xfrm>
+            <a:off x="7720279" y="3977640"/>
+            <a:ext cx="3840480" cy="2148840"/>
+          </a:xfrm>
+          <a:prstGeom prst="roundRect">
+            <a:avLst>
+              <a:gd name="adj" fmla="val 2553"/>
+            </a:avLst>
+          </a:prstGeom>
+          <a:solidFill>
+            <a:srgbClr val="BEE3F8"/>
+          </a:solidFill>
+          <a:ln/>
+        </p:spPr>
+      </p:sp>
+      <p:sp>
+        <p:nvSpPr>
+          <p:cNvPr id="15" name="Shape 13"/>
+          <p:cNvSpPr/>
+          <p:nvPr/>
+        </p:nvSpPr>
+        <p:spPr>
+          <a:xfrm>
+            <a:off x="7720279" y="4032504"/>
+            <a:ext cx="36576" cy="2039112"/>
+          </a:xfrm>
+          <a:prstGeom prst="rect">
+            <a:avLst/>
+          </a:prstGeom>
+          <a:solidFill>
+            <a:srgbClr val="2B6CB0"/>
+          </a:solidFill>
+          <a:ln/>
+        </p:spPr>
+      </p:sp>
+      <p:sp>
+        <p:nvSpPr>
+          <p:cNvPr id="16" name="Text 14"/>
+          <p:cNvSpPr/>
+          <p:nvPr/>
+        </p:nvSpPr>
+        <p:spPr>
+          <a:xfrm>
+            <a:off x="7866583" y="4069080"/>
+            <a:ext cx="3584448" cy="201168"/>
+          </a:xfrm>
+          <a:prstGeom prst="rect">
+            <a:avLst/>
+          </a:prstGeom>
+          <a:noFill/>
+          <a:ln/>
+        </p:spPr>
+        <p:txBody>
+          <a:bodyPr wrap="square" lIns="0" tIns="0" rIns="0" bIns="0" rtlCol="0" anchor="ctr"/>
+          <a:lstStyle/>
+          <a:p>
+            <a:pPr indent="0" marL="0">
+              <a:buNone/>
+            </a:pPr>
+            <a:r>
+              <a:rPr lang="en-US" sz="1050" b="1" dirty="0">
+                <a:solidFill>
+                  <a:srgbClr val="2B6CB0"/>
+                </a:solidFill>
+                <a:latin typeface="Pretendard" pitchFamily="34" charset="0"/>
+                <a:ea typeface="Pretendard" pitchFamily="34" charset="-122"/>
+                <a:cs typeface="Pretendard" pitchFamily="34" charset="-120"/>
+              </a:rPr>
+              <a:t>권리관계 및 공적장부</a:t>
+            </a:r>
+            <a:endParaRPr lang="en-US" sz="1050" dirty="0"/>
+          </a:p>
+        </p:txBody>
+      </p:sp>
+      <p:sp>
+        <p:nvSpPr>
+          <p:cNvPr id="17" name="Text 15"/>
+          <p:cNvSpPr/>
+          <p:nvPr/>
+        </p:nvSpPr>
+        <p:spPr>
+          <a:xfrm>
+            <a:off x="7866583" y="4270248"/>
+            <a:ext cx="3584448" cy="1819656"/>
+          </a:xfrm>
+          <a:prstGeom prst="rect">
+            <a:avLst/>
+          </a:prstGeom>
+          <a:noFill/>
+          <a:ln/>
+        </p:spPr>
+        <p:txBody>
+          <a:bodyPr wrap="square" lIns="0" tIns="0" rIns="0" bIns="0" rtlCol="0" anchor="t"/>
+          <a:lstStyle/>
+          <a:p>
+            <a:pPr marL="342900" indent="-342900">
+              <a:lnSpc>
+                <a:spcPct val="108000"/>
+              </a:lnSpc>
+              <a:buSzPct val="100000"/>
+              <a:buChar char="•"/>
+            </a:pPr>
+            <a:r>
+              <a:rPr lang="en-US" sz="980" dirty="0">
+                <a:solidFill>
+                  <a:srgbClr val="10161F"/>
+                </a:solidFill>
+                <a:latin typeface="Pretendard" pitchFamily="34" charset="0"/>
+                <a:ea typeface="Pretendard" pitchFamily="34" charset="-122"/>
+                <a:cs typeface="Pretendard" pitchFamily="34" charset="-120"/>
+              </a:rPr>
+              <a:t>등기부등본 갑구 소유권 확인</a:t>
             </a:r>
             <a:endParaRPr lang="en-US" sz="980" dirty="0"/>
           </a:p>
@@ -8079,7 +8224,7 @@
                 <a:ea typeface="Pretendard" pitchFamily="34" charset="-122"/>
                 <a:cs typeface="Pretendard" pitchFamily="34" charset="-120"/>
               </a:rPr>
-              <a:t>필지 형상 및 접도 조건에 따른 건축 가능 면적 검토</a:t>
+              <a:t>건축물대장 기재 사항 실물 대조</a:t>
             </a:r>
             <a:endParaRPr lang="en-US" sz="980" dirty="0"/>
           </a:p>
@@ -8103,7 +8248,7 @@
                 <a:ea typeface="Pretendard" pitchFamily="34" charset="-122"/>
                 <a:cs typeface="Pretendard" pitchFamily="34" charset="-120"/>
               </a:rPr>
-              <a:t>토지이용계획 열람 및 개발행위허가 제한 여부 확인</a:t>
+              <a:t>개별공시지가 및 실거래가 비교</a:t>
             </a:r>
             <a:endParaRPr lang="en-US" sz="980" dirty="0"/>
           </a:p>
@@ -8111,56 +8256,14 @@
       </p:sp>
       <p:sp>
         <p:nvSpPr>
-          <p:cNvPr id="14" name="Shape 12"/>
-          <p:cNvSpPr/>
-          <p:nvPr/>
-        </p:nvSpPr>
-        <p:spPr>
-          <a:xfrm>
-            <a:off x="7720279" y="3977640"/>
-            <a:ext cx="3840480" cy="2148840"/>
-          </a:xfrm>
-          <a:prstGeom prst="roundRect">
-            <a:avLst>
-              <a:gd name="adj" fmla="val 2553"/>
-            </a:avLst>
-          </a:prstGeom>
-          <a:solidFill>
-            <a:srgbClr val="BEE3F8"/>
-          </a:solidFill>
-          <a:ln/>
-        </p:spPr>
-      </p:sp>
-      <p:sp>
-        <p:nvSpPr>
-          <p:cNvPr id="15" name="Shape 13"/>
-          <p:cNvSpPr/>
-          <p:nvPr/>
-        </p:nvSpPr>
-        <p:spPr>
-          <a:xfrm>
-            <a:off x="7720279" y="4032504"/>
-            <a:ext cx="36576" cy="2039112"/>
-          </a:xfrm>
-          <a:prstGeom prst="rect">
-            <a:avLst/>
-          </a:prstGeom>
-          <a:solidFill>
-            <a:srgbClr val="2B6CB0"/>
-          </a:solidFill>
-          <a:ln/>
-        </p:spPr>
-      </p:sp>
-      <p:sp>
-        <p:nvSpPr>
-          <p:cNvPr id="16" name="Text 14"/>
-          <p:cNvSpPr/>
-          <p:nvPr/>
-        </p:nvSpPr>
-        <p:spPr>
-          <a:xfrm>
-            <a:off x="7866583" y="4069080"/>
-            <a:ext cx="3584448" cy="201168"/>
+          <p:cNvPr id="18" name="Text 16"/>
+          <p:cNvSpPr/>
+          <p:nvPr/>
+        </p:nvSpPr>
+        <p:spPr>
+          <a:xfrm>
+            <a:off x="502920" y="6382512"/>
+            <a:ext cx="7315200" cy="219456"/>
           </a:xfrm>
           <a:prstGeom prst="rect">
             <a:avLst/>
@@ -8176,145 +8279,15 @@
               <a:buNone/>
             </a:pPr>
             <a:r>
-              <a:rPr lang="en-US" sz="1050" b="1" dirty="0">
-                <a:solidFill>
-                  <a:srgbClr val="2B6CB0"/>
+              <a:rPr lang="en-US" sz="800" dirty="0">
+                <a:solidFill>
+                  <a:srgbClr val="718096"/>
                 </a:solidFill>
                 <a:latin typeface="Pretendard" pitchFamily="34" charset="0"/>
                 <a:ea typeface="Pretendard" pitchFamily="34" charset="-122"/>
                 <a:cs typeface="Pretendard" pitchFamily="34" charset="-120"/>
               </a:rPr>
-              <a:t>권리관계 및 공적장부</a:t>
-            </a:r>
-            <a:endParaRPr lang="en-US" sz="1050" dirty="0"/>
-          </a:p>
-        </p:txBody>
-      </p:sp>
-      <p:sp>
-        <p:nvSpPr>
-          <p:cNvPr id="17" name="Text 15"/>
-          <p:cNvSpPr/>
-          <p:nvPr/>
-        </p:nvSpPr>
-        <p:spPr>
-          <a:xfrm>
-            <a:off x="7866583" y="4270248"/>
-            <a:ext cx="3584448" cy="1819656"/>
-          </a:xfrm>
-          <a:prstGeom prst="rect">
-            <a:avLst/>
-          </a:prstGeom>
-          <a:noFill/>
-          <a:ln/>
-        </p:spPr>
-        <p:txBody>
-          <a:bodyPr wrap="square" lIns="0" tIns="0" rIns="0" bIns="0" rtlCol="0" anchor="t"/>
-          <a:lstStyle/>
-          <a:p>
-            <a:pPr marL="342900" indent="-342900">
-              <a:lnSpc>
-                <a:spcPct val="108000"/>
-              </a:lnSpc>
-              <a:buSzPct val="100000"/>
-              <a:buChar char="•"/>
-            </a:pPr>
-            <a:r>
-              <a:rPr lang="en-US" sz="980" dirty="0">
-                <a:solidFill>
-                  <a:srgbClr val="10161F"/>
-                </a:solidFill>
-                <a:latin typeface="Pretendard" pitchFamily="34" charset="0"/>
-                <a:ea typeface="Pretendard" pitchFamily="34" charset="-122"/>
-                <a:cs typeface="Pretendard" pitchFamily="34" charset="-120"/>
-              </a:rPr>
-              <a:t>등기부등본 갑구 소유권 및 을구 근저당·가압류 확인</a:t>
-            </a:r>
-            <a:endParaRPr lang="en-US" sz="980" dirty="0"/>
-          </a:p>
-          <a:p>
-            <a:pPr marL="342900" indent="-342900">
-              <a:lnSpc>
-                <a:spcPct val="108000"/>
-              </a:lnSpc>
-              <a:spcBef>
-                <a:spcPts val="300"/>
-              </a:spcBef>
-              <a:buSzPct val="100000"/>
-              <a:buChar char="•"/>
-            </a:pPr>
-            <a:r>
-              <a:rPr lang="en-US" sz="980" dirty="0">
-                <a:solidFill>
-                  <a:srgbClr val="10161F"/>
-                </a:solidFill>
-                <a:latin typeface="Pretendard" pitchFamily="34" charset="0"/>
-                <a:ea typeface="Pretendard" pitchFamily="34" charset="-122"/>
-                <a:cs typeface="Pretendard" pitchFamily="34" charset="-120"/>
-              </a:rPr>
-              <a:t>건축물대장 기재 사항과 실물 현황 대조 점검</a:t>
-            </a:r>
-            <a:endParaRPr lang="en-US" sz="980" dirty="0"/>
-          </a:p>
-          <a:p>
-            <a:pPr marL="342900" indent="-342900">
-              <a:lnSpc>
-                <a:spcPct val="108000"/>
-              </a:lnSpc>
-              <a:spcBef>
-                <a:spcPts val="300"/>
-              </a:spcBef>
-              <a:buSzPct val="100000"/>
-              <a:buChar char="•"/>
-            </a:pPr>
-            <a:r>
-              <a:rPr lang="en-US" sz="980" dirty="0">
-                <a:solidFill>
-                  <a:srgbClr val="10161F"/>
-                </a:solidFill>
-                <a:latin typeface="Pretendard" pitchFamily="34" charset="0"/>
-                <a:ea typeface="Pretendard" pitchFamily="34" charset="-122"/>
-                <a:cs typeface="Pretendard" pitchFamily="34" charset="-120"/>
-              </a:rPr>
-              <a:t>개별공시지가 및 실거래가 비교 분석</a:t>
-            </a:r>
-            <a:endParaRPr lang="en-US" sz="980" dirty="0"/>
-          </a:p>
-        </p:txBody>
-      </p:sp>
-      <p:sp>
-        <p:nvSpPr>
-          <p:cNvPr id="18" name="Text 16"/>
-          <p:cNvSpPr/>
-          <p:nvPr/>
-        </p:nvSpPr>
-        <p:spPr>
-          <a:xfrm>
-            <a:off x="502920" y="6382512"/>
-            <a:ext cx="7315200" cy="219456"/>
-          </a:xfrm>
-          <a:prstGeom prst="rect">
-            <a:avLst/>
-          </a:prstGeom>
-          <a:noFill/>
-          <a:ln/>
-        </p:spPr>
-        <p:txBody>
-          <a:bodyPr wrap="square" lIns="0" tIns="0" rIns="0" bIns="0" rtlCol="0" anchor="ctr"/>
-          <a:lstStyle/>
-          <a:p>
-            <a:pPr indent="0" marL="0">
-              <a:buNone/>
-            </a:pPr>
-            <a:r>
-              <a:rPr lang="en-US" sz="800" dirty="0">
-                <a:solidFill>
-                  <a:srgbClr val="718096"/>
-                </a:solidFill>
-                <a:latin typeface="Pretendard" pitchFamily="34" charset="0"/>
-                <a:ea typeface="Pretendard" pitchFamily="34" charset="-122"/>
-                <a:cs typeface="Pretendard" pitchFamily="34" charset="-120"/>
-              </a:rPr>
-              <a:t>크리딜   |   </a:t>
+              <a:t>크리딜</a:t>
             </a:r>
             <a:endParaRPr lang="en-US" sz="800" dirty="0"/>
           </a:p>
@@ -8576,7 +8549,7 @@
         <p:spPr>
           <a:xfrm>
             <a:off x="502920" y="1645920"/>
-            <a:ext cx="1920240" cy="420624"/>
+            <a:ext cx="1920240" cy="402336"/>
           </a:xfrm>
           <a:prstGeom prst="rect">
             <a:avLst/>
@@ -8618,7 +8591,7 @@
         <p:spPr>
           <a:xfrm>
             <a:off x="2423160" y="1645920"/>
-            <a:ext cx="4937760" cy="420624"/>
+            <a:ext cx="4937760" cy="402336"/>
           </a:xfrm>
           <a:prstGeom prst="rect">
             <a:avLst/>
@@ -8659,7 +8632,7 @@
         </p:nvSpPr>
         <p:spPr>
           <a:xfrm>
-            <a:off x="502920" y="2066544"/>
+            <a:off x="502920" y="2048256"/>
             <a:ext cx="6858000" cy="0"/>
           </a:xfrm>
           <a:prstGeom prst="line">
@@ -8682,8 +8655,8 @@
         </p:nvSpPr>
         <p:spPr>
           <a:xfrm>
-            <a:off x="502920" y="2066544"/>
-            <a:ext cx="1920240" cy="420624"/>
+            <a:off x="502920" y="2048256"/>
+            <a:ext cx="1920240" cy="402336"/>
           </a:xfrm>
           <a:prstGeom prst="rect">
             <a:avLst/>
@@ -8724,8 +8697,8 @@
         </p:nvSpPr>
         <p:spPr>
           <a:xfrm>
-            <a:off x="2423160" y="2066544"/>
-            <a:ext cx="4937760" cy="420624"/>
+            <a:off x="2423160" y="2048256"/>
+            <a:ext cx="4937760" cy="402336"/>
           </a:xfrm>
           <a:prstGeom prst="rect">
             <a:avLst/>
@@ -8926,7 +8899,7 @@
                 <a:ea typeface="Pretendard" pitchFamily="34" charset="-122"/>
                 <a:cs typeface="Pretendard" pitchFamily="34" charset="-120"/>
               </a:rPr>
-              <a:t>크리딜   |   </a:t>
+              <a:t>크리딜</a:t>
             </a:r>
             <a:endParaRPr lang="en-US" sz="800" dirty="0"/>
           </a:p>
@@ -9188,7 +9161,7 @@
         <p:spPr>
           <a:xfrm>
             <a:off x="502920" y="1645920"/>
-            <a:ext cx="6858000" cy="420624"/>
+            <a:ext cx="6858000" cy="402336"/>
           </a:xfrm>
           <a:prstGeom prst="rect">
             <a:avLst/>
@@ -9229,7 +9202,7 @@
         </p:nvSpPr>
         <p:spPr>
           <a:xfrm>
-            <a:off x="502920" y="2066544"/>
+            <a:off x="502920" y="2048256"/>
             <a:ext cx="6858000" cy="0"/>
           </a:xfrm>
           <a:prstGeom prst="line">
@@ -9252,8 +9225,8 @@
         </p:nvSpPr>
         <p:spPr>
           <a:xfrm>
-            <a:off x="502920" y="2066544"/>
-            <a:ext cx="6858000" cy="420624"/>
+            <a:off x="502920" y="2048256"/>
+            <a:ext cx="6858000" cy="402336"/>
           </a:xfrm>
           <a:prstGeom prst="rect">
             <a:avLst/>
@@ -9454,7 +9427,7 @@
                 <a:ea typeface="Pretendard" pitchFamily="34" charset="-122"/>
                 <a:cs typeface="Pretendard" pitchFamily="34" charset="-120"/>
               </a:rPr>
-              <a:t>크리딜   |   </a:t>
+              <a:t>크리딜</a:t>
             </a:r>
             <a:endParaRPr lang="en-US" sz="800" dirty="0"/>
           </a:p>
@@ -9812,7 +9785,7 @@
                 <a:ea typeface="Pretendard" pitchFamily="34" charset="-122"/>
                 <a:cs typeface="Pretendard" pitchFamily="34" charset="-120"/>
               </a:rPr>
-              <a:t>135.0억 원</a:t>
+              <a:t>135억 원</a:t>
             </a:r>
             <a:endParaRPr lang="en-US" sz="1150" dirty="0"/>
           </a:p>
@@ -10240,7 +10213,7 @@
                 <a:ea typeface="Pretendard" pitchFamily="34" charset="-122"/>
                 <a:cs typeface="Pretendard" pitchFamily="34" charset="-120"/>
               </a:rPr>
-              <a:t>0.0억 원</a:t>
+              <a:t>-</a:t>
             </a:r>
             <a:endParaRPr lang="en-US" sz="1150" dirty="0"/>
           </a:p>
@@ -11078,7 +11051,7 @@
                           <a:ea typeface="Pretendard" pitchFamily="34" charset="-122"/>
                           <a:cs typeface="Pretendard" pitchFamily="34" charset="-120"/>
                         </a:rPr>
-                        <a:t>0.00%</a:t>
+                        <a:t>-</a:t>
                       </a:r>
                       <a:endParaRPr lang="en-US" sz="1100" dirty="0">
                         <a:latin typeface="Pretendard" charset="0"/>
@@ -11380,7 +11353,7 @@
                           <a:ea typeface="Pretendard" pitchFamily="34" charset="-122"/>
                           <a:cs typeface="Pretendard" pitchFamily="34" charset="-120"/>
                         </a:rPr>
-                        <a:t>0.00%</a:t>
+                        <a:t>-</a:t>
                       </a:r>
                       <a:endParaRPr lang="en-US" sz="1100" dirty="0">
                         <a:latin typeface="Pretendard" charset="0"/>
@@ -11682,7 +11655,7 @@
                           <a:ea typeface="Pretendard" pitchFamily="34" charset="-122"/>
                           <a:cs typeface="Pretendard" pitchFamily="34" charset="-120"/>
                         </a:rPr>
-                        <a:t>0.00%</a:t>
+                        <a:t>-</a:t>
                       </a:r>
                       <a:endParaRPr lang="en-US" sz="1100" dirty="0">
                         <a:latin typeface="Pretendard" charset="0"/>
@@ -11984,7 +11957,7 @@
                           <a:ea typeface="Pretendard" pitchFamily="34" charset="-122"/>
                           <a:cs typeface="Pretendard" pitchFamily="34" charset="-120"/>
                         </a:rPr>
-                        <a:t>0.00%</a:t>
+                        <a:t>-</a:t>
                       </a:r>
                       <a:endParaRPr lang="en-US" sz="1100" dirty="0">
                         <a:latin typeface="Pretendard" charset="0"/>
@@ -12196,7 +12169,7 @@
                 <a:ea typeface="Pretendard" pitchFamily="34" charset="-122"/>
                 <a:cs typeface="Pretendard" pitchFamily="34" charset="-120"/>
               </a:rPr>
-              <a:t>크리딜   |   </a:t>
+              <a:t>크리딜</a:t>
             </a:r>
             <a:endParaRPr lang="en-US" sz="800" dirty="0"/>
           </a:p>
@@ -12551,7 +12524,7 @@
                 <a:ea typeface="Pretendard" pitchFamily="34" charset="-122"/>
                 <a:cs typeface="Pretendard" pitchFamily="34" charset="-120"/>
               </a:rPr>
-              <a:t>크리딜   |   </a:t>
+              <a:t>크리딜</a:t>
             </a:r>
             <a:endParaRPr lang="en-US" sz="800" dirty="0"/>
           </a:p>
@@ -13036,7 +13009,7 @@
                 <a:ea typeface="Pretendard" pitchFamily="34" charset="-122"/>
                 <a:cs typeface="Pretendard" pitchFamily="34" charset="-120"/>
               </a:rPr>
-              <a:t>크리딜   |   </a:t>
+              <a:t>크리딜</a:t>
             </a:r>
             <a:endParaRPr lang="en-US" sz="800" dirty="0"/>
           </a:p>

--- a/docs/test/stress/e2e-outputs/owner_occupied_basic_pr03.pptx
+++ b/docs/test/stress/e2e-outputs/owner_occupied_basic_pr03.pptx
@@ -2965,7 +2965,7 @@
                 <a:ea typeface="Pretendard" pitchFamily="34" charset="-122"/>
                 <a:cs typeface="Pretendard" pitchFamily="34" charset="-120"/>
               </a:rPr>
-              <a:t>임대차 원본 계약서 대조 (보증금, 월임대료, 관리비 실입금 내역 및 제소전화해조서)</a:t>
+              <a:t>임대차 원본 계약서 검토 (보증금, 월임대료, 관리비 실입금 내역 및 제소전화해조서)</a:t>
             </a:r>
             <a:endParaRPr lang="en-US" sz="950" dirty="0"/>
           </a:p>

--- a/docs/test/stress/e2e-outputs/owner_occupied_basic_pr03.pptx
+++ b/docs/test/stress/e2e-outputs/owner_occupied_basic_pr03.pptx
@@ -17,9 +17,10 @@
     <p:sldId id="265" r:id="rId11"/>
     <p:sldId id="266" r:id="rId12"/>
     <p:sldId id="267" r:id="rId13"/>
+    <p:sldId id="268" r:id="rId14"/>
   </p:sldIdLst>
   <p:notesMasterIdLst>
-    <p:notesMasterId r:id="rId14"/>
+    <p:notesMasterId r:id="rId15"/>
   </p:notesMasterIdLst>
   <p:sldSz cx="12192000" cy="6858000"/>
   <p:notesSz cx="6858000" cy="12192000"/>
@@ -801,6 +802,94 @@
             <a:fld id="{F7021451-1387-4CA6-816F-3879F97B5CBC}" type="slidenum">
               <a:rPr lang="en-US"/>
               <a:t>12</a:t>
+            </a:fld>
+            <a:endParaRPr lang="en-US"/>
+          </a:p>
+        </p:txBody>
+      </p:sp>
+    </p:spTree>
+    <p:extLst>
+      <p:ext uri="{BB962C8B-B14F-4D97-AF65-F5344CB8AC3E}">
+        <p14:creationId xmlns:p14="http://schemas.microsoft.com/office/powerpoint/2010/main" val="1024086991"/>
+      </p:ext>
+    </p:extLst>
+  </p:cSld>
+  <p:clrMapOvr>
+    <a:masterClrMapping/>
+  </p:clrMapOvr>
+</p:notes>
+</file>
+
+<file path=ppt/notesSlides/notesSlide13.xml><?xml version="1.0" encoding="utf-8"?>
+<p:notes xmlns:a="http://schemas.openxmlformats.org/drawingml/2006/main" xmlns:r="http://schemas.openxmlformats.org/officeDocument/2006/relationships" xmlns:p="http://schemas.openxmlformats.org/presentationml/2006/main">
+  <p:cSld>
+    <p:spTree>
+      <p:nvGrpSpPr>
+        <p:cNvPr id="1" name=""/>
+        <p:cNvGrpSpPr/>
+        <p:nvPr/>
+      </p:nvGrpSpPr>
+      <p:grpSpPr>
+        <a:xfrm>
+          <a:off x="0" y="0"/>
+          <a:ext cx="0" cy="0"/>
+          <a:chOff x="0" y="0"/>
+          <a:chExt cx="0" cy="0"/>
+        </a:xfrm>
+      </p:grpSpPr>
+      <p:sp>
+        <p:nvSpPr>
+          <p:cNvPr id="2" name="Slide Image Placeholder 1"/>
+          <p:cNvSpPr>
+            <a:spLocks noGrp="1" noRot="1" noChangeAspect="1"/>
+          </p:cNvSpPr>
+          <p:nvPr>
+            <p:ph type="sldImg"/>
+          </p:nvPr>
+        </p:nvSpPr>
+        <p:spPr/>
+      </p:sp>
+      <p:sp>
+        <p:nvSpPr>
+          <p:cNvPr id="3" name="Notes Placeholder 2"/>
+          <p:cNvSpPr>
+            <a:spLocks noGrp="1"/>
+          </p:cNvSpPr>
+          <p:nvPr>
+            <p:ph type="body" idx="1"/>
+          </p:nvPr>
+        </p:nvSpPr>
+        <p:spPr/>
+        <p:txBody>
+          <a:bodyPr/>
+          <a:lstStyle/>
+          <a:p>
+            <a:r>
+              <a:rPr lang="en-US" dirty="0"/>
+              <a:t/>
+            </a:r>
+            <a:endParaRPr lang="en-US" dirty="0"/>
+          </a:p>
+        </p:txBody>
+      </p:sp>
+      <p:sp>
+        <p:nvSpPr>
+          <p:cNvPr id="4" name="Slide Number Placeholder 3"/>
+          <p:cNvSpPr>
+            <a:spLocks noGrp="1"/>
+          </p:cNvSpPr>
+          <p:nvPr>
+            <p:ph type="sldNum" sz="quarter" idx="10"/>
+          </p:nvPr>
+        </p:nvSpPr>
+        <p:spPr/>
+        <p:txBody>
+          <a:bodyPr/>
+          <a:lstStyle/>
+          <a:p>
+            <a:fld id="{F7021451-1387-4CA6-816F-3879F97B5CBC}" type="slidenum">
+              <a:rPr lang="en-US"/>
+              <a:t>13</a:t>
             </a:fld>
             <a:endParaRPr lang="en-US"/>
           </a:p>
@@ -2005,7 +2094,7 @@
         </p:nvSpPr>
         <p:spPr>
           <a:xfrm>
-            <a:off x="502920" y="475488"/>
+            <a:off x="566928" y="475488"/>
             <a:ext cx="2743200" cy="365760"/>
           </a:xfrm>
           <a:prstGeom prst="rect">
@@ -2058,7 +2147,7 @@
         </p:nvSpPr>
         <p:spPr>
           <a:xfrm>
-            <a:off x="502920" y="2029968"/>
+            <a:off x="566928" y="2029968"/>
             <a:ext cx="7315200" cy="274320"/>
           </a:xfrm>
           <a:prstGeom prst="rect">
@@ -2097,8 +2186,8 @@
         </p:nvSpPr>
         <p:spPr>
           <a:xfrm>
-            <a:off x="502920" y="2304288"/>
-            <a:ext cx="7315200" cy="731520"/>
+            <a:off x="566928" y="2304288"/>
+            <a:ext cx="7315200" cy="1051560"/>
           </a:xfrm>
           <a:prstGeom prst="rect">
             <a:avLst/>
@@ -2114,7 +2203,7 @@
               <a:buNone/>
             </a:pPr>
             <a:r>
-              <a:rPr lang="en-US" sz="3000" b="1" dirty="0">
+              <a:rPr lang="en-US" sz="2600" b="1" dirty="0">
                 <a:solidFill>
                   <a:srgbClr val="FFFFFF"/>
                 </a:solidFill>
@@ -2124,7 +2213,7 @@
               </a:rPr>
               <a:t>owner_occupied 포스처 테스트 문서</a:t>
             </a:r>
-            <a:endParaRPr lang="en-US" sz="3000" dirty="0"/>
+            <a:endParaRPr lang="en-US" sz="2600" dirty="0"/>
           </a:p>
         </p:txBody>
       </p:sp>
@@ -2136,7 +2225,7 @@
         </p:nvSpPr>
         <p:spPr>
           <a:xfrm>
-            <a:off x="502920" y="3090672"/>
+            <a:off x="566928" y="3410712"/>
             <a:ext cx="7315200" cy="329184"/>
           </a:xfrm>
           <a:prstGeom prst="rect">
@@ -2175,7 +2264,7 @@
         </p:nvSpPr>
         <p:spPr>
           <a:xfrm>
-            <a:off x="502920" y="3639312"/>
+            <a:off x="566928" y="3959352"/>
             <a:ext cx="1005840" cy="292608"/>
           </a:xfrm>
           <a:prstGeom prst="roundRect">
@@ -2197,7 +2286,7 @@
         </p:nvSpPr>
         <p:spPr>
           <a:xfrm>
-            <a:off x="502920" y="3639312"/>
+            <a:off x="566928" y="3959352"/>
             <a:ext cx="1005840" cy="292608"/>
           </a:xfrm>
           <a:prstGeom prst="rect">
@@ -2236,7 +2325,7 @@
         </p:nvSpPr>
         <p:spPr>
           <a:xfrm>
-            <a:off x="1600200" y="3639312"/>
+            <a:off x="1664208" y="3959352"/>
             <a:ext cx="1005840" cy="292608"/>
           </a:xfrm>
           <a:prstGeom prst="roundRect">
@@ -2258,7 +2347,7 @@
         </p:nvSpPr>
         <p:spPr>
           <a:xfrm>
-            <a:off x="1600200" y="3639312"/>
+            <a:off x="1664208" y="3959352"/>
             <a:ext cx="1005840" cy="292608"/>
           </a:xfrm>
           <a:prstGeom prst="rect">
@@ -2297,7 +2386,7 @@
         </p:nvSpPr>
         <p:spPr>
           <a:xfrm>
-            <a:off x="502920" y="4078224"/>
+            <a:off x="566928" y="4398264"/>
             <a:ext cx="6858000" cy="1051560"/>
           </a:xfrm>
           <a:prstGeom prst="roundRect">
@@ -2324,7 +2413,7 @@
         </p:nvSpPr>
         <p:spPr>
           <a:xfrm>
-            <a:off x="758952" y="4187952"/>
+            <a:off x="822960" y="4507992"/>
             <a:ext cx="6345936" cy="832104"/>
           </a:xfrm>
           <a:prstGeom prst="rect">
@@ -2363,7 +2452,7 @@
         </p:nvSpPr>
         <p:spPr>
           <a:xfrm>
-            <a:off x="502920" y="1700784"/>
+            <a:off x="566928" y="1700784"/>
             <a:ext cx="7315200" cy="256032"/>
           </a:xfrm>
           <a:prstGeom prst="rect">
@@ -2402,8 +2491,8 @@
         </p:nvSpPr>
         <p:spPr>
           <a:xfrm>
-            <a:off x="502920" y="6035040"/>
-            <a:ext cx="11057839" cy="274320"/>
+            <a:off x="566928" y="5943600"/>
+            <a:ext cx="11057839" cy="201168"/>
           </a:xfrm>
           <a:prstGeom prst="rect">
             <a:avLst/>
@@ -2441,7 +2530,7 @@
         </p:nvSpPr>
         <p:spPr>
           <a:xfrm>
-            <a:off x="502920" y="6382512"/>
+            <a:off x="566928" y="6382512"/>
             <a:ext cx="7315200" cy="219456"/>
           </a:xfrm>
           <a:prstGeom prst="rect">
@@ -2480,7 +2569,7 @@
         </p:nvSpPr>
         <p:spPr>
           <a:xfrm>
-            <a:off x="10774375" y="6382512"/>
+            <a:off x="10710367" y="6382512"/>
             <a:ext cx="914400" cy="219456"/>
           </a:xfrm>
           <a:prstGeom prst="rect">
@@ -2551,7 +2640,7 @@
         </p:nvSpPr>
         <p:spPr>
           <a:xfrm>
-            <a:off x="502920" y="457200"/>
+            <a:off x="566928" y="457200"/>
             <a:ext cx="384048" cy="384048"/>
           </a:xfrm>
           <a:prstGeom prst="ellipse">
@@ -2571,7 +2660,7 @@
         </p:nvSpPr>
         <p:spPr>
           <a:xfrm>
-            <a:off x="502920" y="457200"/>
+            <a:off x="566928" y="457200"/>
             <a:ext cx="384048" cy="384048"/>
           </a:xfrm>
           <a:prstGeom prst="rect">
@@ -2610,7 +2699,7 @@
         </p:nvSpPr>
         <p:spPr>
           <a:xfrm>
-            <a:off x="1069848" y="457200"/>
+            <a:off x="1133856" y="457200"/>
             <a:ext cx="10490911" cy="182880"/>
           </a:xfrm>
           <a:prstGeom prst="rect">
@@ -2635,7 +2724,7 @@
                 <a:ea typeface="Arial" pitchFamily="34" charset="-122"/>
                 <a:cs typeface="Arial" pitchFamily="34" charset="-120"/>
               </a:rPr>
-              <a:t>Checklist</a:t>
+              <a:t>Risk</a:t>
             </a:r>
             <a:endParaRPr lang="en-US" sz="950" dirty="0"/>
           </a:p>
@@ -2649,7 +2738,7 @@
         </p:nvSpPr>
         <p:spPr>
           <a:xfrm>
-            <a:off x="1069848" y="640080"/>
+            <a:off x="1133856" y="640080"/>
             <a:ext cx="10490911" cy="365760"/>
           </a:xfrm>
           <a:prstGeom prst="rect">
@@ -2659,7 +2748,9 @@
           <a:ln/>
         </p:spPr>
         <p:txBody>
-          <a:bodyPr wrap="square" lIns="0" tIns="0" rIns="0" bIns="0" rtlCol="0" anchor="ctr"/>
+          <a:bodyPr wrap="square" lIns="0" tIns="0" rIns="0" bIns="0" rtlCol="0" anchor="ctr">
+            <a:normAutofit/>
+          </a:bodyPr>
           <a:lstStyle/>
           <a:p>
             <a:pPr indent="0" marL="0">
@@ -2674,7 +2765,7 @@
                 <a:ea typeface="Pretendard" pitchFamily="34" charset="-122"/>
                 <a:cs typeface="Pretendard" pitchFamily="34" charset="-120"/>
               </a:rPr>
-              <a:t>실사 체크리스트</a:t>
+              <a:t>리스크</a:t>
             </a:r>
             <a:endParaRPr lang="en-US" sz="2300" dirty="0"/>
           </a:p>
@@ -2682,63 +2773,26 @@
       </p:sp>
       <p:sp>
         <p:nvSpPr>
-          <p:cNvPr id="6" name="Text 4"/>
-          <p:cNvSpPr/>
-          <p:nvPr/>
-        </p:nvSpPr>
-        <p:spPr>
-          <a:xfrm>
-            <a:off x="502920" y="1371600"/>
-            <a:ext cx="11057839" cy="237744"/>
-          </a:xfrm>
-          <a:prstGeom prst="rect">
-            <a:avLst/>
-          </a:prstGeom>
-          <a:noFill/>
-          <a:ln/>
-        </p:spPr>
-        <p:txBody>
-          <a:bodyPr wrap="square" lIns="0" tIns="0" rIns="0" bIns="0" rtlCol="0" anchor="ctr"/>
-          <a:lstStyle/>
-          <a:p>
-            <a:pPr indent="0" marL="0">
-              <a:buNone/>
-            </a:pPr>
-            <a:r>
-              <a:rPr lang="en-US" sz="1100" b="1" dirty="0">
-                <a:solidFill>
-                  <a:srgbClr val="10161F"/>
-                </a:solidFill>
-                <a:latin typeface="Pretendard" pitchFamily="34" charset="0"/>
-                <a:ea typeface="Pretendard" pitchFamily="34" charset="-122"/>
-                <a:cs typeface="Pretendard" pitchFamily="34" charset="-120"/>
-              </a:rPr>
-              <a:t>거래 안정성 확보를 위한 필수 법률·물리·임대차 실사 점검 항목 (총 6건)</a:t>
-            </a:r>
-            <a:endParaRPr lang="en-US" sz="1100" dirty="0"/>
-          </a:p>
-        </p:txBody>
-      </p:sp>
-      <p:sp>
-        <p:nvSpPr>
-          <p:cNvPr id="7" name="Shape 5"/>
-          <p:cNvSpPr/>
-          <p:nvPr/>
-        </p:nvSpPr>
-        <p:spPr>
-          <a:xfrm>
-            <a:off x="502920" y="1719072"/>
-            <a:ext cx="5368900" cy="749808"/>
-          </a:xfrm>
-          <a:prstGeom prst="rect">
-            <a:avLst/>
+          <p:cNvPr id="6" name="Shape 4"/>
+          <p:cNvSpPr/>
+          <p:nvPr/>
+        </p:nvSpPr>
+        <p:spPr>
+          <a:xfrm>
+            <a:off x="566928" y="1417320"/>
+            <a:ext cx="11057839" cy="3657600"/>
+          </a:xfrm>
+          <a:prstGeom prst="roundRect">
+            <a:avLst>
+              <a:gd name="adj" fmla="val 1500"/>
+            </a:avLst>
           </a:prstGeom>
           <a:solidFill>
             <a:srgbClr val="F7FAFC"/>
           </a:solidFill>
           <a:ln w="6350">
             <a:solidFill>
-              <a:srgbClr val="D9B668"/>
+              <a:srgbClr val="CBD5E0"/>
             </a:solidFill>
             <a:prstDash val="solid"/>
           </a:ln>
@@ -2746,60 +2800,101 @@
       </p:sp>
       <p:sp>
         <p:nvSpPr>
-          <p:cNvPr id="8" name="Shape 6"/>
-          <p:cNvSpPr/>
-          <p:nvPr/>
-        </p:nvSpPr>
-        <p:spPr>
-          <a:xfrm>
-            <a:off x="640080" y="1947672"/>
-            <a:ext cx="292608" cy="292608"/>
+          <p:cNvPr id="7" name="Shape 5"/>
+          <p:cNvSpPr/>
+          <p:nvPr/>
+        </p:nvSpPr>
+        <p:spPr>
+          <a:xfrm>
+            <a:off x="566928" y="1417320"/>
+            <a:ext cx="11057839" cy="45720"/>
           </a:xfrm>
           <a:prstGeom prst="rect">
             <a:avLst/>
           </a:prstGeom>
           <a:solidFill>
-            <a:srgbClr val="977024"/>
+            <a:srgbClr val="B98A2E"/>
           </a:solidFill>
           <a:ln/>
         </p:spPr>
       </p:sp>
       <p:sp>
         <p:nvSpPr>
+          <p:cNvPr id="8" name="Text 6"/>
+          <p:cNvSpPr/>
+          <p:nvPr/>
+        </p:nvSpPr>
+        <p:spPr>
+          <a:xfrm>
+            <a:off x="795528" y="1618488"/>
+            <a:ext cx="10600639" cy="292608"/>
+          </a:xfrm>
+          <a:prstGeom prst="rect">
+            <a:avLst/>
+          </a:prstGeom>
+          <a:noFill/>
+          <a:ln/>
+        </p:spPr>
+        <p:txBody>
+          <a:bodyPr wrap="square" lIns="0" tIns="0" rIns="0" bIns="0" rtlCol="0" anchor="ctr"/>
+          <a:lstStyle/>
+          <a:p>
+            <a:pPr indent="0" marL="0">
+              <a:buNone/>
+            </a:pPr>
+            <a:r>
+              <a:rPr lang="en-US" sz="1350" b="1" dirty="0">
+                <a:solidFill>
+                  <a:srgbClr val="977024"/>
+                </a:solidFill>
+                <a:latin typeface="Pretendard" pitchFamily="34" charset="0"/>
+                <a:ea typeface="Pretendard" pitchFamily="34" charset="-122"/>
+                <a:cs typeface="Pretendard" pitchFamily="34" charset="-120"/>
+              </a:rPr>
+              <a:t>준공업 용도제한</a:t>
+            </a:r>
+            <a:endParaRPr lang="en-US" sz="1350" dirty="0"/>
+          </a:p>
+        </p:txBody>
+      </p:sp>
+      <p:sp>
+        <p:nvSpPr>
           <p:cNvPr id="9" name="Text 7"/>
           <p:cNvSpPr/>
           <p:nvPr/>
         </p:nvSpPr>
         <p:spPr>
           <a:xfrm>
-            <a:off x="640080" y="1947672"/>
-            <a:ext cx="292608" cy="292608"/>
-          </a:xfrm>
-          <a:prstGeom prst="rect">
-            <a:avLst/>
-          </a:prstGeom>
-          <a:noFill/>
-          <a:ln/>
-        </p:spPr>
-        <p:txBody>
-          <a:bodyPr wrap="square" rtlCol="0" anchor="ctr"/>
-          <a:lstStyle/>
-          <a:p>
-            <a:pPr algn="ctr" indent="0" marL="0">
-              <a:buNone/>
-            </a:pPr>
-            <a:r>
-              <a:rPr lang="en-US" sz="1050" b="1" dirty="0">
-                <a:solidFill>
-                  <a:srgbClr val="FFFFFF"/>
-                </a:solidFill>
-                <a:latin typeface="Pretendard" pitchFamily="34" charset="0"/>
-                <a:ea typeface="Pretendard" pitchFamily="34" charset="-122"/>
-                <a:cs typeface="Pretendard" pitchFamily="34" charset="-120"/>
-              </a:rPr>
-              <a:t>✓</a:t>
-            </a:r>
-            <a:endParaRPr lang="en-US" sz="1050" dirty="0"/>
+            <a:off x="795528" y="1947672"/>
+            <a:ext cx="10600639" cy="365760"/>
+          </a:xfrm>
+          <a:prstGeom prst="rect">
+            <a:avLst/>
+          </a:prstGeom>
+          <a:noFill/>
+          <a:ln/>
+        </p:spPr>
+        <p:txBody>
+          <a:bodyPr wrap="square" lIns="0" tIns="0" rIns="0" bIns="0" rtlCol="0" anchor="ctr">
+            <a:normAutofit/>
+          </a:bodyPr>
+          <a:lstStyle/>
+          <a:p>
+            <a:pPr indent="0" marL="0">
+              <a:buNone/>
+            </a:pPr>
+            <a:r>
+              <a:rPr lang="en-US" sz="1250" b="1" dirty="0">
+                <a:solidFill>
+                  <a:srgbClr val="10161F"/>
+                </a:solidFill>
+                <a:latin typeface="Pretendard" pitchFamily="34" charset="0"/>
+                <a:ea typeface="Pretendard" pitchFamily="34" charset="-122"/>
+                <a:cs typeface="Pretendard" pitchFamily="34" charset="-120"/>
+              </a:rPr>
+              <a:t>IT 허용</a:t>
+            </a:r>
+            <a:endParaRPr lang="en-US" sz="1250" dirty="0"/>
           </a:p>
         </p:txBody>
       </p:sp>
@@ -2811,27 +2906,30 @@
         </p:nvSpPr>
         <p:spPr>
           <a:xfrm>
-            <a:off x="1033272" y="1792224"/>
-            <a:ext cx="4710532" cy="603504"/>
-          </a:xfrm>
-          <a:prstGeom prst="rect">
-            <a:avLst/>
-          </a:prstGeom>
-          <a:noFill/>
-          <a:ln/>
-        </p:spPr>
-        <p:txBody>
-          <a:bodyPr wrap="square" rtlCol="0" anchor="ctr"/>
-          <a:lstStyle/>
-          <a:p>
-            <a:pPr indent="0" marL="0">
+            <a:off x="795528" y="2377440"/>
+            <a:ext cx="10600639" cy="2606040"/>
+          </a:xfrm>
+          <a:prstGeom prst="rect">
+            <a:avLst/>
+          </a:prstGeom>
+          <a:noFill/>
+          <a:ln/>
+        </p:spPr>
+        <p:txBody>
+          <a:bodyPr wrap="square" lIns="0" tIns="0" rIns="0" bIns="0" rtlCol="0" anchor="t">
+            <a:normAutofit/>
+          </a:bodyPr>
+          <a:lstStyle/>
+          <a:p>
+            <a:pPr marL="342900" indent="-342900">
               <a:lnSpc>
-                <a:spcPct val="110000"/>
+                <a:spcPct val="115000"/>
               </a:lnSpc>
-              <a:buNone/>
-            </a:pPr>
-            <a:r>
-              <a:rPr lang="en-US" sz="950" dirty="0">
+              <a:buSzPct val="100000"/>
+              <a:buChar char="•"/>
+            </a:pPr>
+            <a:r>
+              <a:rPr lang="en-US" sz="1100" dirty="0">
                 <a:solidFill>
                   <a:srgbClr val="10161F"/>
                 </a:solidFill>
@@ -2839,9 +2937,9 @@
                 <a:ea typeface="Pretendard" pitchFamily="34" charset="-122"/>
                 <a:cs typeface="Pretendard" pitchFamily="34" charset="-120"/>
               </a:rPr>
-              <a:t>등기부등본 갑구/을구 권리관계 및 근저당 채권최고액 전액 말소 조건 원본 대조</a:t>
-            </a:r>
-            <a:endParaRPr lang="en-US" sz="950" dirty="0"/>
+              <a:t>사전 확인 완료</a:t>
+            </a:r>
+            <a:endParaRPr lang="en-US" sz="1100" dirty="0"/>
           </a:p>
         </p:txBody>
       </p:sp>
@@ -2853,18 +2951,20 @@
         </p:nvSpPr>
         <p:spPr>
           <a:xfrm>
-            <a:off x="502920" y="2542032"/>
-            <a:ext cx="5368900" cy="749808"/>
-          </a:xfrm>
-          <a:prstGeom prst="rect">
-            <a:avLst/>
+            <a:off x="566928" y="5193792"/>
+            <a:ext cx="11057839" cy="621792"/>
+          </a:xfrm>
+          <a:prstGeom prst="roundRect">
+            <a:avLst>
+              <a:gd name="adj" fmla="val 8824"/>
+            </a:avLst>
           </a:prstGeom>
           <a:solidFill>
             <a:srgbClr val="F7FAFC"/>
           </a:solidFill>
           <a:ln w="6350">
             <a:solidFill>
-              <a:srgbClr val="D9B668"/>
+              <a:srgbClr val="CBD5E0"/>
             </a:solidFill>
             <a:prstDash val="solid"/>
           </a:ln>
@@ -2872,23 +2972,42 @@
       </p:sp>
       <p:sp>
         <p:nvSpPr>
-          <p:cNvPr id="12" name="Shape 10"/>
-          <p:cNvSpPr/>
-          <p:nvPr/>
-        </p:nvSpPr>
-        <p:spPr>
-          <a:xfrm>
-            <a:off x="640080" y="2770632"/>
-            <a:ext cx="292608" cy="292608"/>
-          </a:xfrm>
-          <a:prstGeom prst="rect">
-            <a:avLst/>
-          </a:prstGeom>
-          <a:solidFill>
-            <a:srgbClr val="977024"/>
-          </a:solidFill>
-          <a:ln/>
-        </p:spPr>
+          <p:cNvPr id="12" name="Text 10"/>
+          <p:cNvSpPr/>
+          <p:nvPr/>
+        </p:nvSpPr>
+        <p:spPr>
+          <a:xfrm>
+            <a:off x="795528" y="5193792"/>
+            <a:ext cx="10600639" cy="621792"/>
+          </a:xfrm>
+          <a:prstGeom prst="rect">
+            <a:avLst/>
+          </a:prstGeom>
+          <a:noFill/>
+          <a:ln/>
+        </p:spPr>
+        <p:txBody>
+          <a:bodyPr wrap="square" lIns="0" tIns="0" rIns="0" bIns="0" rtlCol="0" anchor="ctr"/>
+          <a:lstStyle/>
+          <a:p>
+            <a:pPr indent="0" marL="0">
+              <a:buNone/>
+            </a:pPr>
+            <a:r>
+              <a:rPr lang="en-US" sz="1100" dirty="0">
+                <a:solidFill>
+                  <a:srgbClr val="10161F"/>
+                </a:solidFill>
+                <a:latin typeface="Pretendard" pitchFamily="34" charset="0"/>
+                <a:ea typeface="Pretendard" pitchFamily="34" charset="-122"/>
+                <a:cs typeface="Pretendard" pitchFamily="34" charset="-120"/>
+              </a:rPr>
+              <a:t>※ 본 리스크 체크는 공부 및 브로커 확인 기반이며, 매수 전 전문 실사팀(변호사/건축사)을 통한 정밀 실사가 필요합니다.</a:t>
+            </a:r>
+            <a:endParaRPr lang="en-US" sz="1100" dirty="0"/>
+          </a:p>
+        </p:txBody>
       </p:sp>
       <p:sp>
         <p:nvSpPr>
@@ -2898,34 +3017,34 @@
         </p:nvSpPr>
         <p:spPr>
           <a:xfrm>
-            <a:off x="640080" y="2770632"/>
-            <a:ext cx="292608" cy="292608"/>
-          </a:xfrm>
-          <a:prstGeom prst="rect">
-            <a:avLst/>
-          </a:prstGeom>
-          <a:noFill/>
-          <a:ln/>
-        </p:spPr>
-        <p:txBody>
-          <a:bodyPr wrap="square" rtlCol="0" anchor="ctr"/>
-          <a:lstStyle/>
-          <a:p>
-            <a:pPr algn="ctr" indent="0" marL="0">
-              <a:buNone/>
-            </a:pPr>
-            <a:r>
-              <a:rPr lang="en-US" sz="1050" b="1" dirty="0">
-                <a:solidFill>
-                  <a:srgbClr val="FFFFFF"/>
-                </a:solidFill>
-                <a:latin typeface="Pretendard" pitchFamily="34" charset="0"/>
-                <a:ea typeface="Pretendard" pitchFamily="34" charset="-122"/>
-                <a:cs typeface="Pretendard" pitchFamily="34" charset="-120"/>
-              </a:rPr>
-              <a:t>✓</a:t>
-            </a:r>
-            <a:endParaRPr lang="en-US" sz="1050" dirty="0"/>
+            <a:off x="566928" y="6382512"/>
+            <a:ext cx="7315200" cy="219456"/>
+          </a:xfrm>
+          <a:prstGeom prst="rect">
+            <a:avLst/>
+          </a:prstGeom>
+          <a:noFill/>
+          <a:ln/>
+        </p:spPr>
+        <p:txBody>
+          <a:bodyPr wrap="square" lIns="0" tIns="0" rIns="0" bIns="0" rtlCol="0" anchor="ctr"/>
+          <a:lstStyle/>
+          <a:p>
+            <a:pPr indent="0" marL="0">
+              <a:buNone/>
+            </a:pPr>
+            <a:r>
+              <a:rPr lang="en-US" sz="800" dirty="0">
+                <a:solidFill>
+                  <a:srgbClr val="718096"/>
+                </a:solidFill>
+                <a:latin typeface="Pretendard" pitchFamily="34" charset="0"/>
+                <a:ea typeface="Pretendard" pitchFamily="34" charset="-122"/>
+                <a:cs typeface="Pretendard" pitchFamily="34" charset="-120"/>
+              </a:rPr>
+              <a:t>크리딜</a:t>
+            </a:r>
+            <a:endParaRPr lang="en-US" sz="800" dirty="0"/>
           </a:p>
         </p:txBody>
       </p:sp>
@@ -2937,651 +3056,7 @@
         </p:nvSpPr>
         <p:spPr>
           <a:xfrm>
-            <a:off x="1033272" y="2615184"/>
-            <a:ext cx="4710532" cy="603504"/>
-          </a:xfrm>
-          <a:prstGeom prst="rect">
-            <a:avLst/>
-          </a:prstGeom>
-          <a:noFill/>
-          <a:ln/>
-        </p:spPr>
-        <p:txBody>
-          <a:bodyPr wrap="square" rtlCol="0" anchor="ctr"/>
-          <a:lstStyle/>
-          <a:p>
-            <a:pPr indent="0" marL="0">
-              <a:lnSpc>
-                <a:spcPct val="110000"/>
-              </a:lnSpc>
-              <a:buNone/>
-            </a:pPr>
-            <a:r>
-              <a:rPr lang="en-US" sz="950" dirty="0">
-                <a:solidFill>
-                  <a:srgbClr val="10161F"/>
-                </a:solidFill>
-                <a:latin typeface="Pretendard" pitchFamily="34" charset="0"/>
-                <a:ea typeface="Pretendard" pitchFamily="34" charset="-122"/>
-                <a:cs typeface="Pretendard" pitchFamily="34" charset="-120"/>
-              </a:rPr>
-              <a:t>임대차 원본 계약서 검토 (보증금, 월임대료, 관리비 실입금 내역 및 제소전화해조서)</a:t>
-            </a:r>
-            <a:endParaRPr lang="en-US" sz="950" dirty="0"/>
-          </a:p>
-        </p:txBody>
-      </p:sp>
-      <p:sp>
-        <p:nvSpPr>
-          <p:cNvPr id="15" name="Shape 13"/>
-          <p:cNvSpPr/>
-          <p:nvPr/>
-        </p:nvSpPr>
-        <p:spPr>
-          <a:xfrm>
-            <a:off x="502920" y="3364992"/>
-            <a:ext cx="5368900" cy="749808"/>
-          </a:xfrm>
-          <a:prstGeom prst="rect">
-            <a:avLst/>
-          </a:prstGeom>
-          <a:solidFill>
-            <a:srgbClr val="F7FAFC"/>
-          </a:solidFill>
-          <a:ln w="6350">
-            <a:solidFill>
-              <a:srgbClr val="D9B668"/>
-            </a:solidFill>
-            <a:prstDash val="solid"/>
-          </a:ln>
-        </p:spPr>
-      </p:sp>
-      <p:sp>
-        <p:nvSpPr>
-          <p:cNvPr id="16" name="Shape 14"/>
-          <p:cNvSpPr/>
-          <p:nvPr/>
-        </p:nvSpPr>
-        <p:spPr>
-          <a:xfrm>
-            <a:off x="640080" y="3593592"/>
-            <a:ext cx="292608" cy="292608"/>
-          </a:xfrm>
-          <a:prstGeom prst="rect">
-            <a:avLst/>
-          </a:prstGeom>
-          <a:solidFill>
-            <a:srgbClr val="977024"/>
-          </a:solidFill>
-          <a:ln/>
-        </p:spPr>
-      </p:sp>
-      <p:sp>
-        <p:nvSpPr>
-          <p:cNvPr id="17" name="Text 15"/>
-          <p:cNvSpPr/>
-          <p:nvPr/>
-        </p:nvSpPr>
-        <p:spPr>
-          <a:xfrm>
-            <a:off x="640080" y="3593592"/>
-            <a:ext cx="292608" cy="292608"/>
-          </a:xfrm>
-          <a:prstGeom prst="rect">
-            <a:avLst/>
-          </a:prstGeom>
-          <a:noFill/>
-          <a:ln/>
-        </p:spPr>
-        <p:txBody>
-          <a:bodyPr wrap="square" rtlCol="0" anchor="ctr"/>
-          <a:lstStyle/>
-          <a:p>
-            <a:pPr algn="ctr" indent="0" marL="0">
-              <a:buNone/>
-            </a:pPr>
-            <a:r>
-              <a:rPr lang="en-US" sz="1050" b="1" dirty="0">
-                <a:solidFill>
-                  <a:srgbClr val="FFFFFF"/>
-                </a:solidFill>
-                <a:latin typeface="Pretendard" pitchFamily="34" charset="0"/>
-                <a:ea typeface="Pretendard" pitchFamily="34" charset="-122"/>
-                <a:cs typeface="Pretendard" pitchFamily="34" charset="-120"/>
-              </a:rPr>
-              <a:t>✓</a:t>
-            </a:r>
-            <a:endParaRPr lang="en-US" sz="1050" dirty="0"/>
-          </a:p>
-        </p:txBody>
-      </p:sp>
-      <p:sp>
-        <p:nvSpPr>
-          <p:cNvPr id="18" name="Text 16"/>
-          <p:cNvSpPr/>
-          <p:nvPr/>
-        </p:nvSpPr>
-        <p:spPr>
-          <a:xfrm>
-            <a:off x="1033272" y="3438144"/>
-            <a:ext cx="4710532" cy="603504"/>
-          </a:xfrm>
-          <a:prstGeom prst="rect">
-            <a:avLst/>
-          </a:prstGeom>
-          <a:noFill/>
-          <a:ln/>
-        </p:spPr>
-        <p:txBody>
-          <a:bodyPr wrap="square" rtlCol="0" anchor="ctr"/>
-          <a:lstStyle/>
-          <a:p>
-            <a:pPr indent="0" marL="0">
-              <a:lnSpc>
-                <a:spcPct val="110000"/>
-              </a:lnSpc>
-              <a:buNone/>
-            </a:pPr>
-            <a:r>
-              <a:rPr lang="en-US" sz="950" dirty="0">
-                <a:solidFill>
-                  <a:srgbClr val="10161F"/>
-                </a:solidFill>
-                <a:latin typeface="Pretendard" pitchFamily="34" charset="0"/>
-                <a:ea typeface="Pretendard" pitchFamily="34" charset="-122"/>
-                <a:cs typeface="Pretendard" pitchFamily="34" charset="-120"/>
-              </a:rPr>
-              <a:t>건축물대장상 위반건축물 등재 여부 및 불법 증축·용도변경 이행강제금 납부 이력 점검</a:t>
-            </a:r>
-            <a:endParaRPr lang="en-US" sz="950" dirty="0"/>
-          </a:p>
-        </p:txBody>
-      </p:sp>
-      <p:sp>
-        <p:nvSpPr>
-          <p:cNvPr id="19" name="Shape 17"/>
-          <p:cNvSpPr/>
-          <p:nvPr/>
-        </p:nvSpPr>
-        <p:spPr>
-          <a:xfrm>
-            <a:off x="6191860" y="1719072"/>
-            <a:ext cx="5368900" cy="749808"/>
-          </a:xfrm>
-          <a:prstGeom prst="rect">
-            <a:avLst/>
-          </a:prstGeom>
-          <a:solidFill>
-            <a:srgbClr val="F7FAFC"/>
-          </a:solidFill>
-          <a:ln w="6350">
-            <a:solidFill>
-              <a:srgbClr val="D9B668"/>
-            </a:solidFill>
-            <a:prstDash val="solid"/>
-          </a:ln>
-        </p:spPr>
-      </p:sp>
-      <p:sp>
-        <p:nvSpPr>
-          <p:cNvPr id="20" name="Shape 18"/>
-          <p:cNvSpPr/>
-          <p:nvPr/>
-        </p:nvSpPr>
-        <p:spPr>
-          <a:xfrm>
-            <a:off x="6329020" y="1947672"/>
-            <a:ext cx="292608" cy="292608"/>
-          </a:xfrm>
-          <a:prstGeom prst="rect">
-            <a:avLst/>
-          </a:prstGeom>
-          <a:solidFill>
-            <a:srgbClr val="977024"/>
-          </a:solidFill>
-          <a:ln/>
-        </p:spPr>
-      </p:sp>
-      <p:sp>
-        <p:nvSpPr>
-          <p:cNvPr id="21" name="Text 19"/>
-          <p:cNvSpPr/>
-          <p:nvPr/>
-        </p:nvSpPr>
-        <p:spPr>
-          <a:xfrm>
-            <a:off x="6329020" y="1947672"/>
-            <a:ext cx="292608" cy="292608"/>
-          </a:xfrm>
-          <a:prstGeom prst="rect">
-            <a:avLst/>
-          </a:prstGeom>
-          <a:noFill/>
-          <a:ln/>
-        </p:spPr>
-        <p:txBody>
-          <a:bodyPr wrap="square" rtlCol="0" anchor="ctr"/>
-          <a:lstStyle/>
-          <a:p>
-            <a:pPr algn="ctr" indent="0" marL="0">
-              <a:buNone/>
-            </a:pPr>
-            <a:r>
-              <a:rPr lang="en-US" sz="1050" b="1" dirty="0">
-                <a:solidFill>
-                  <a:srgbClr val="FFFFFF"/>
-                </a:solidFill>
-                <a:latin typeface="Pretendard" pitchFamily="34" charset="0"/>
-                <a:ea typeface="Pretendard" pitchFamily="34" charset="-122"/>
-                <a:cs typeface="Pretendard" pitchFamily="34" charset="-120"/>
-              </a:rPr>
-              <a:t>✓</a:t>
-            </a:r>
-            <a:endParaRPr lang="en-US" sz="1050" dirty="0"/>
-          </a:p>
-        </p:txBody>
-      </p:sp>
-      <p:sp>
-        <p:nvSpPr>
-          <p:cNvPr id="22" name="Text 20"/>
-          <p:cNvSpPr/>
-          <p:nvPr/>
-        </p:nvSpPr>
-        <p:spPr>
-          <a:xfrm>
-            <a:off x="6722212" y="1792224"/>
-            <a:ext cx="4710532" cy="603504"/>
-          </a:xfrm>
-          <a:prstGeom prst="rect">
-            <a:avLst/>
-          </a:prstGeom>
-          <a:noFill/>
-          <a:ln/>
-        </p:spPr>
-        <p:txBody>
-          <a:bodyPr wrap="square" rtlCol="0" anchor="ctr"/>
-          <a:lstStyle/>
-          <a:p>
-            <a:pPr indent="0" marL="0">
-              <a:lnSpc>
-                <a:spcPct val="110000"/>
-              </a:lnSpc>
-              <a:buNone/>
-            </a:pPr>
-            <a:r>
-              <a:rPr lang="en-US" sz="950" dirty="0">
-                <a:solidFill>
-                  <a:srgbClr val="10161F"/>
-                </a:solidFill>
-                <a:latin typeface="Pretendard" pitchFamily="34" charset="0"/>
-                <a:ea typeface="Pretendard" pitchFamily="34" charset="-122"/>
-                <a:cs typeface="Pretendard" pitchFamily="34" charset="-120"/>
-              </a:rPr>
-              <a:t>토지이용계획확인원상 도시계획시설 저촉, 건축선 후퇴, 지구단위계획 특별계획구역 확인</a:t>
-            </a:r>
-            <a:endParaRPr lang="en-US" sz="950" dirty="0"/>
-          </a:p>
-        </p:txBody>
-      </p:sp>
-      <p:sp>
-        <p:nvSpPr>
-          <p:cNvPr id="23" name="Shape 21"/>
-          <p:cNvSpPr/>
-          <p:nvPr/>
-        </p:nvSpPr>
-        <p:spPr>
-          <a:xfrm>
-            <a:off x="6191860" y="2542032"/>
-            <a:ext cx="5368900" cy="749808"/>
-          </a:xfrm>
-          <a:prstGeom prst="rect">
-            <a:avLst/>
-          </a:prstGeom>
-          <a:solidFill>
-            <a:srgbClr val="F7FAFC"/>
-          </a:solidFill>
-          <a:ln w="6350">
-            <a:solidFill>
-              <a:srgbClr val="D9B668"/>
-            </a:solidFill>
-            <a:prstDash val="solid"/>
-          </a:ln>
-        </p:spPr>
-      </p:sp>
-      <p:sp>
-        <p:nvSpPr>
-          <p:cNvPr id="24" name="Shape 22"/>
-          <p:cNvSpPr/>
-          <p:nvPr/>
-        </p:nvSpPr>
-        <p:spPr>
-          <a:xfrm>
-            <a:off x="6329020" y="2770632"/>
-            <a:ext cx="292608" cy="292608"/>
-          </a:xfrm>
-          <a:prstGeom prst="rect">
-            <a:avLst/>
-          </a:prstGeom>
-          <a:solidFill>
-            <a:srgbClr val="977024"/>
-          </a:solidFill>
-          <a:ln/>
-        </p:spPr>
-      </p:sp>
-      <p:sp>
-        <p:nvSpPr>
-          <p:cNvPr id="25" name="Text 23"/>
-          <p:cNvSpPr/>
-          <p:nvPr/>
-        </p:nvSpPr>
-        <p:spPr>
-          <a:xfrm>
-            <a:off x="6329020" y="2770632"/>
-            <a:ext cx="292608" cy="292608"/>
-          </a:xfrm>
-          <a:prstGeom prst="rect">
-            <a:avLst/>
-          </a:prstGeom>
-          <a:noFill/>
-          <a:ln/>
-        </p:spPr>
-        <p:txBody>
-          <a:bodyPr wrap="square" rtlCol="0" anchor="ctr"/>
-          <a:lstStyle/>
-          <a:p>
-            <a:pPr algn="ctr" indent="0" marL="0">
-              <a:buNone/>
-            </a:pPr>
-            <a:r>
-              <a:rPr lang="en-US" sz="1050" b="1" dirty="0">
-                <a:solidFill>
-                  <a:srgbClr val="FFFFFF"/>
-                </a:solidFill>
-                <a:latin typeface="Pretendard" pitchFamily="34" charset="0"/>
-                <a:ea typeface="Pretendard" pitchFamily="34" charset="-122"/>
-                <a:cs typeface="Pretendard" pitchFamily="34" charset="-120"/>
-              </a:rPr>
-              <a:t>✓</a:t>
-            </a:r>
-            <a:endParaRPr lang="en-US" sz="1050" dirty="0"/>
-          </a:p>
-        </p:txBody>
-      </p:sp>
-      <p:sp>
-        <p:nvSpPr>
-          <p:cNvPr id="26" name="Text 24"/>
-          <p:cNvSpPr/>
-          <p:nvPr/>
-        </p:nvSpPr>
-        <p:spPr>
-          <a:xfrm>
-            <a:off x="6722212" y="2615184"/>
-            <a:ext cx="4710532" cy="603504"/>
-          </a:xfrm>
-          <a:prstGeom prst="rect">
-            <a:avLst/>
-          </a:prstGeom>
-          <a:noFill/>
-          <a:ln/>
-        </p:spPr>
-        <p:txBody>
-          <a:bodyPr wrap="square" rtlCol="0" anchor="ctr"/>
-          <a:lstStyle/>
-          <a:p>
-            <a:pPr indent="0" marL="0">
-              <a:lnSpc>
-                <a:spcPct val="110000"/>
-              </a:lnSpc>
-              <a:buNone/>
-            </a:pPr>
-            <a:r>
-              <a:rPr lang="en-US" sz="950" dirty="0">
-                <a:solidFill>
-                  <a:srgbClr val="10161F"/>
-                </a:solidFill>
-                <a:latin typeface="Pretendard" pitchFamily="34" charset="0"/>
-                <a:ea typeface="Pretendard" pitchFamily="34" charset="-122"/>
-                <a:cs typeface="Pretendard" pitchFamily="34" charset="-120"/>
-              </a:rPr>
-              <a:t>기계식 주차기 정기 안전점검 합격증, 승강기 검사필증, 소방 완비증명서 실물 실사</a:t>
-            </a:r>
-            <a:endParaRPr lang="en-US" sz="950" dirty="0"/>
-          </a:p>
-        </p:txBody>
-      </p:sp>
-      <p:sp>
-        <p:nvSpPr>
-          <p:cNvPr id="27" name="Shape 25"/>
-          <p:cNvSpPr/>
-          <p:nvPr/>
-        </p:nvSpPr>
-        <p:spPr>
-          <a:xfrm>
-            <a:off x="6191860" y="3364992"/>
-            <a:ext cx="5368900" cy="749808"/>
-          </a:xfrm>
-          <a:prstGeom prst="rect">
-            <a:avLst/>
-          </a:prstGeom>
-          <a:solidFill>
-            <a:srgbClr val="F7FAFC"/>
-          </a:solidFill>
-          <a:ln w="6350">
-            <a:solidFill>
-              <a:srgbClr val="D9B668"/>
-            </a:solidFill>
-            <a:prstDash val="solid"/>
-          </a:ln>
-        </p:spPr>
-      </p:sp>
-      <p:sp>
-        <p:nvSpPr>
-          <p:cNvPr id="28" name="Shape 26"/>
-          <p:cNvSpPr/>
-          <p:nvPr/>
-        </p:nvSpPr>
-        <p:spPr>
-          <a:xfrm>
-            <a:off x="6329020" y="3593592"/>
-            <a:ext cx="292608" cy="292608"/>
-          </a:xfrm>
-          <a:prstGeom prst="rect">
-            <a:avLst/>
-          </a:prstGeom>
-          <a:solidFill>
-            <a:srgbClr val="977024"/>
-          </a:solidFill>
-          <a:ln/>
-        </p:spPr>
-      </p:sp>
-      <p:sp>
-        <p:nvSpPr>
-          <p:cNvPr id="29" name="Text 27"/>
-          <p:cNvSpPr/>
-          <p:nvPr/>
-        </p:nvSpPr>
-        <p:spPr>
-          <a:xfrm>
-            <a:off x="6329020" y="3593592"/>
-            <a:ext cx="292608" cy="292608"/>
-          </a:xfrm>
-          <a:prstGeom prst="rect">
-            <a:avLst/>
-          </a:prstGeom>
-          <a:noFill/>
-          <a:ln/>
-        </p:spPr>
-        <p:txBody>
-          <a:bodyPr wrap="square" rtlCol="0" anchor="ctr"/>
-          <a:lstStyle/>
-          <a:p>
-            <a:pPr algn="ctr" indent="0" marL="0">
-              <a:buNone/>
-            </a:pPr>
-            <a:r>
-              <a:rPr lang="en-US" sz="1050" b="1" dirty="0">
-                <a:solidFill>
-                  <a:srgbClr val="FFFFFF"/>
-                </a:solidFill>
-                <a:latin typeface="Pretendard" pitchFamily="34" charset="0"/>
-                <a:ea typeface="Pretendard" pitchFamily="34" charset="-122"/>
-                <a:cs typeface="Pretendard" pitchFamily="34" charset="-120"/>
-              </a:rPr>
-              <a:t>✓</a:t>
-            </a:r>
-            <a:endParaRPr lang="en-US" sz="1050" dirty="0"/>
-          </a:p>
-        </p:txBody>
-      </p:sp>
-      <p:sp>
-        <p:nvSpPr>
-          <p:cNvPr id="30" name="Text 28"/>
-          <p:cNvSpPr/>
-          <p:nvPr/>
-        </p:nvSpPr>
-        <p:spPr>
-          <a:xfrm>
-            <a:off x="6722212" y="3438144"/>
-            <a:ext cx="4710532" cy="603504"/>
-          </a:xfrm>
-          <a:prstGeom prst="rect">
-            <a:avLst/>
-          </a:prstGeom>
-          <a:noFill/>
-          <a:ln/>
-        </p:spPr>
-        <p:txBody>
-          <a:bodyPr wrap="square" rtlCol="0" anchor="ctr"/>
-          <a:lstStyle/>
-          <a:p>
-            <a:pPr indent="0" marL="0">
-              <a:lnSpc>
-                <a:spcPct val="110000"/>
-              </a:lnSpc>
-              <a:buNone/>
-            </a:pPr>
-            <a:r>
-              <a:rPr lang="en-US" sz="950" dirty="0">
-                <a:solidFill>
-                  <a:srgbClr val="10161F"/>
-                </a:solidFill>
-                <a:latin typeface="Pretendard" pitchFamily="34" charset="0"/>
-                <a:ea typeface="Pretendard" pitchFamily="34" charset="-122"/>
-                <a:cs typeface="Pretendard" pitchFamily="34" charset="-120"/>
-              </a:rPr>
-              <a:t>정화조 용량 대비 현 업종 적합성 및 하수도 원인자부담금 추가 부과 대상 여부 확인</a:t>
-            </a:r>
-            <a:endParaRPr lang="en-US" sz="950" dirty="0"/>
-          </a:p>
-        </p:txBody>
-      </p:sp>
-      <p:sp>
-        <p:nvSpPr>
-          <p:cNvPr id="31" name="Shape 29"/>
-          <p:cNvSpPr/>
-          <p:nvPr/>
-        </p:nvSpPr>
-        <p:spPr>
-          <a:xfrm>
-            <a:off x="502920" y="5349240"/>
-            <a:ext cx="11057839" cy="457200"/>
-          </a:xfrm>
-          <a:prstGeom prst="rect">
-            <a:avLst/>
-          </a:prstGeom>
-          <a:solidFill>
-            <a:srgbClr val="D9B668"/>
-          </a:solidFill>
-          <a:ln/>
-        </p:spPr>
-      </p:sp>
-      <p:sp>
-        <p:nvSpPr>
-          <p:cNvPr id="32" name="Text 30"/>
-          <p:cNvSpPr/>
-          <p:nvPr/>
-        </p:nvSpPr>
-        <p:spPr>
-          <a:xfrm>
-            <a:off x="685800" y="5422392"/>
-            <a:ext cx="10692079" cy="310896"/>
-          </a:xfrm>
-          <a:prstGeom prst="rect">
-            <a:avLst/>
-          </a:prstGeom>
-          <a:noFill/>
-          <a:ln/>
-        </p:spPr>
-        <p:txBody>
-          <a:bodyPr wrap="square" rtlCol="0" anchor="ctr"/>
-          <a:lstStyle/>
-          <a:p>
-            <a:pPr indent="0" marL="0">
-              <a:buNone/>
-            </a:pPr>
-            <a:r>
-              <a:rPr lang="en-US" sz="950" b="1" dirty="0">
-                <a:solidFill>
-                  <a:srgbClr val="977024"/>
-                </a:solidFill>
-                <a:latin typeface="Pretendard" pitchFamily="34" charset="0"/>
-                <a:ea typeface="Pretendard" pitchFamily="34" charset="-122"/>
-                <a:cs typeface="Pretendard" pitchFamily="34" charset="-120"/>
-              </a:rPr>
-              <a:t>※ 본 체크리스트는 계약 전 매수인의 안전한 자산 인수를 위한 필수 확인 사항이며, 실사(Due Diligence) 결과에 따라 매매 조건 및 잔금 일정이 조정될 수 있습니다.</a:t>
-            </a:r>
-            <a:endParaRPr lang="en-US" sz="950" dirty="0"/>
-          </a:p>
-        </p:txBody>
-      </p:sp>
-      <p:sp>
-        <p:nvSpPr>
-          <p:cNvPr id="33" name="Text 31"/>
-          <p:cNvSpPr/>
-          <p:nvPr/>
-        </p:nvSpPr>
-        <p:spPr>
-          <a:xfrm>
-            <a:off x="502920" y="6382512"/>
-            <a:ext cx="7315200" cy="219456"/>
-          </a:xfrm>
-          <a:prstGeom prst="rect">
-            <a:avLst/>
-          </a:prstGeom>
-          <a:noFill/>
-          <a:ln/>
-        </p:spPr>
-        <p:txBody>
-          <a:bodyPr wrap="square" lIns="0" tIns="0" rIns="0" bIns="0" rtlCol="0" anchor="ctr"/>
-          <a:lstStyle/>
-          <a:p>
-            <a:pPr indent="0" marL="0">
-              <a:buNone/>
-            </a:pPr>
-            <a:r>
-              <a:rPr lang="en-US" sz="800" dirty="0">
-                <a:solidFill>
-                  <a:srgbClr val="718096"/>
-                </a:solidFill>
-                <a:latin typeface="Pretendard" pitchFamily="34" charset="0"/>
-                <a:ea typeface="Pretendard" pitchFamily="34" charset="-122"/>
-                <a:cs typeface="Pretendard" pitchFamily="34" charset="-120"/>
-              </a:rPr>
-              <a:t>크리딜</a:t>
-            </a:r>
-            <a:endParaRPr lang="en-US" sz="800" dirty="0"/>
-          </a:p>
-        </p:txBody>
-      </p:sp>
-      <p:sp>
-        <p:nvSpPr>
-          <p:cNvPr id="34" name="Text 32"/>
-          <p:cNvSpPr/>
-          <p:nvPr/>
-        </p:nvSpPr>
-        <p:spPr>
-          <a:xfrm>
-            <a:off x="10774375" y="6382512"/>
+            <a:off x="10710367" y="6382512"/>
             <a:ext cx="914400" cy="219456"/>
           </a:xfrm>
           <a:prstGeom prst="rect">
@@ -3652,7 +3127,7 @@
         </p:nvSpPr>
         <p:spPr>
           <a:xfrm>
-            <a:off x="502920" y="457200"/>
+            <a:off x="566928" y="457200"/>
             <a:ext cx="384048" cy="384048"/>
           </a:xfrm>
           <a:prstGeom prst="ellipse">
@@ -3672,7 +3147,7 @@
         </p:nvSpPr>
         <p:spPr>
           <a:xfrm>
-            <a:off x="502920" y="457200"/>
+            <a:off x="566928" y="457200"/>
             <a:ext cx="384048" cy="384048"/>
           </a:xfrm>
           <a:prstGeom prst="rect">
@@ -3711,7 +3186,7 @@
         </p:nvSpPr>
         <p:spPr>
           <a:xfrm>
-            <a:off x="1069848" y="457200"/>
+            <a:off x="1133856" y="457200"/>
             <a:ext cx="10490911" cy="182880"/>
           </a:xfrm>
           <a:prstGeom prst="rect">
@@ -3736,7 +3211,7 @@
                 <a:ea typeface="Arial" pitchFamily="34" charset="-122"/>
                 <a:cs typeface="Arial" pitchFamily="34" charset="-120"/>
               </a:rPr>
-              <a:t>Process</a:t>
+              <a:t>Checklist</a:t>
             </a:r>
             <a:endParaRPr lang="en-US" sz="950" dirty="0"/>
           </a:p>
@@ -3750,7 +3225,7 @@
         </p:nvSpPr>
         <p:spPr>
           <a:xfrm>
-            <a:off x="1069848" y="640080"/>
+            <a:off x="1133856" y="640080"/>
             <a:ext cx="10490911" cy="365760"/>
           </a:xfrm>
           <a:prstGeom prst="rect">
@@ -3760,6 +3235,47 @@
           <a:ln/>
         </p:spPr>
         <p:txBody>
+          <a:bodyPr wrap="square" lIns="0" tIns="0" rIns="0" bIns="0" rtlCol="0" anchor="ctr">
+            <a:normAutofit/>
+          </a:bodyPr>
+          <a:lstStyle/>
+          <a:p>
+            <a:pPr indent="0" marL="0">
+              <a:buNone/>
+            </a:pPr>
+            <a:r>
+              <a:rPr lang="en-US" sz="2300" b="1" dirty="0">
+                <a:solidFill>
+                  <a:srgbClr val="10161F"/>
+                </a:solidFill>
+                <a:latin typeface="Pretendard" pitchFamily="34" charset="0"/>
+                <a:ea typeface="Pretendard" pitchFamily="34" charset="-122"/>
+                <a:cs typeface="Pretendard" pitchFamily="34" charset="-120"/>
+              </a:rPr>
+              <a:t>실사 체크리스트</a:t>
+            </a:r>
+            <a:endParaRPr lang="en-US" sz="2300" dirty="0"/>
+          </a:p>
+        </p:txBody>
+      </p:sp>
+      <p:sp>
+        <p:nvSpPr>
+          <p:cNvPr id="6" name="Text 4"/>
+          <p:cNvSpPr/>
+          <p:nvPr/>
+        </p:nvSpPr>
+        <p:spPr>
+          <a:xfrm>
+            <a:off x="566928" y="1371600"/>
+            <a:ext cx="11057839" cy="237744"/>
+          </a:xfrm>
+          <a:prstGeom prst="rect">
+            <a:avLst/>
+          </a:prstGeom>
+          <a:noFill/>
+          <a:ln/>
+        </p:spPr>
+        <p:txBody>
           <a:bodyPr wrap="square" lIns="0" tIns="0" rIns="0" bIns="0" rtlCol="0" anchor="ctr"/>
           <a:lstStyle/>
           <a:p>
@@ -3767,7 +3283,7 @@
               <a:buNone/>
             </a:pPr>
             <a:r>
-              <a:rPr lang="en-US" sz="2300" b="1" dirty="0">
+              <a:rPr lang="en-US" sz="1100" b="1" dirty="0">
                 <a:solidFill>
                   <a:srgbClr val="10161F"/>
                 </a:solidFill>
@@ -3775,34 +3291,32 @@
                 <a:ea typeface="Pretendard" pitchFamily="34" charset="-122"/>
                 <a:cs typeface="Pretendard" pitchFamily="34" charset="-120"/>
               </a:rPr>
-              <a:t>진행 절차</a:t>
-            </a:r>
-            <a:endParaRPr lang="en-US" sz="2300" dirty="0"/>
-          </a:p>
-        </p:txBody>
-      </p:sp>
-      <p:sp>
-        <p:nvSpPr>
-          <p:cNvPr id="6" name="Shape 4"/>
-          <p:cNvSpPr/>
-          <p:nvPr/>
-        </p:nvSpPr>
-        <p:spPr>
-          <a:xfrm>
-            <a:off x="502920" y="1572768"/>
-            <a:ext cx="11057839" cy="3200400"/>
-          </a:xfrm>
-          <a:prstGeom prst="roundRect">
-            <a:avLst>
-              <a:gd name="adj" fmla="val 1714"/>
-            </a:avLst>
+              <a:t>거래 안정성 확보를 위한 필수 법률·물리·임대차 실사 점검 항목 (총 6건)</a:t>
+            </a:r>
+            <a:endParaRPr lang="en-US" sz="1100" dirty="0"/>
+          </a:p>
+        </p:txBody>
+      </p:sp>
+      <p:sp>
+        <p:nvSpPr>
+          <p:cNvPr id="7" name="Shape 5"/>
+          <p:cNvSpPr/>
+          <p:nvPr/>
+        </p:nvSpPr>
+        <p:spPr>
+          <a:xfrm>
+            <a:off x="566928" y="1719072"/>
+            <a:ext cx="5368900" cy="749808"/>
+          </a:xfrm>
+          <a:prstGeom prst="rect">
+            <a:avLst/>
           </a:prstGeom>
           <a:solidFill>
             <a:srgbClr val="F7FAFC"/>
           </a:solidFill>
           <a:ln w="6350">
             <a:solidFill>
-              <a:srgbClr val="CBD5E0"/>
+              <a:srgbClr val="D9B668"/>
             </a:solidFill>
             <a:prstDash val="solid"/>
           </a:ln>
@@ -3810,34 +3324,804 @@
       </p:sp>
       <p:sp>
         <p:nvSpPr>
-          <p:cNvPr id="7" name="Shape 5"/>
-          <p:cNvSpPr/>
-          <p:nvPr/>
-        </p:nvSpPr>
-        <p:spPr>
-          <a:xfrm>
-            <a:off x="722376" y="1792224"/>
-            <a:ext cx="438912" cy="438912"/>
-          </a:xfrm>
-          <a:prstGeom prst="ellipse">
+          <p:cNvPr id="8" name="Shape 6"/>
+          <p:cNvSpPr/>
+          <p:nvPr/>
+        </p:nvSpPr>
+        <p:spPr>
+          <a:xfrm>
+            <a:off x="704088" y="1947672"/>
+            <a:ext cx="292608" cy="292608"/>
+          </a:xfrm>
+          <a:prstGeom prst="rect">
             <a:avLst/>
           </a:prstGeom>
           <a:solidFill>
-            <a:srgbClr val="B98A2E"/>
+            <a:srgbClr val="977024"/>
           </a:solidFill>
           <a:ln/>
         </p:spPr>
       </p:sp>
       <p:sp>
         <p:nvSpPr>
-          <p:cNvPr id="8" name="Text 6"/>
-          <p:cNvSpPr/>
-          <p:nvPr/>
-        </p:nvSpPr>
-        <p:spPr>
-          <a:xfrm>
-            <a:off x="722376" y="1792224"/>
-            <a:ext cx="438912" cy="438912"/>
+          <p:cNvPr id="9" name="Text 7"/>
+          <p:cNvSpPr/>
+          <p:nvPr/>
+        </p:nvSpPr>
+        <p:spPr>
+          <a:xfrm>
+            <a:off x="704088" y="1947672"/>
+            <a:ext cx="292608" cy="292608"/>
+          </a:xfrm>
+          <a:prstGeom prst="rect">
+            <a:avLst/>
+          </a:prstGeom>
+          <a:noFill/>
+          <a:ln/>
+        </p:spPr>
+        <p:txBody>
+          <a:bodyPr wrap="square" rtlCol="0" anchor="ctr"/>
+          <a:lstStyle/>
+          <a:p>
+            <a:pPr algn="ctr" indent="0" marL="0">
+              <a:buNone/>
+            </a:pPr>
+            <a:r>
+              <a:rPr lang="en-US" sz="1050" b="1" dirty="0">
+                <a:solidFill>
+                  <a:srgbClr val="FFFFFF"/>
+                </a:solidFill>
+                <a:latin typeface="Pretendard" pitchFamily="34" charset="0"/>
+                <a:ea typeface="Pretendard" pitchFamily="34" charset="-122"/>
+                <a:cs typeface="Pretendard" pitchFamily="34" charset="-120"/>
+              </a:rPr>
+              <a:t>✓</a:t>
+            </a:r>
+            <a:endParaRPr lang="en-US" sz="1050" dirty="0"/>
+          </a:p>
+        </p:txBody>
+      </p:sp>
+      <p:sp>
+        <p:nvSpPr>
+          <p:cNvPr id="10" name="Text 8"/>
+          <p:cNvSpPr/>
+          <p:nvPr/>
+        </p:nvSpPr>
+        <p:spPr>
+          <a:xfrm>
+            <a:off x="1097280" y="1792224"/>
+            <a:ext cx="4710532" cy="603504"/>
+          </a:xfrm>
+          <a:prstGeom prst="rect">
+            <a:avLst/>
+          </a:prstGeom>
+          <a:noFill/>
+          <a:ln/>
+        </p:spPr>
+        <p:txBody>
+          <a:bodyPr wrap="square" rtlCol="0" anchor="ctr"/>
+          <a:lstStyle/>
+          <a:p>
+            <a:pPr indent="0" marL="0">
+              <a:lnSpc>
+                <a:spcPct val="110000"/>
+              </a:lnSpc>
+              <a:buNone/>
+            </a:pPr>
+            <a:r>
+              <a:rPr lang="en-US" sz="950" dirty="0">
+                <a:solidFill>
+                  <a:srgbClr val="10161F"/>
+                </a:solidFill>
+                <a:latin typeface="Pretendard" pitchFamily="34" charset="0"/>
+                <a:ea typeface="Pretendard" pitchFamily="34" charset="-122"/>
+                <a:cs typeface="Pretendard" pitchFamily="34" charset="-120"/>
+              </a:rPr>
+              <a:t>등기부등본 갑구/을구 권리관계 및 근저당 채권최고액 전액 말소 조건 원본 대조</a:t>
+            </a:r>
+            <a:endParaRPr lang="en-US" sz="950" dirty="0"/>
+          </a:p>
+        </p:txBody>
+      </p:sp>
+      <p:sp>
+        <p:nvSpPr>
+          <p:cNvPr id="11" name="Shape 9"/>
+          <p:cNvSpPr/>
+          <p:nvPr/>
+        </p:nvSpPr>
+        <p:spPr>
+          <a:xfrm>
+            <a:off x="566928" y="2542032"/>
+            <a:ext cx="5368900" cy="749808"/>
+          </a:xfrm>
+          <a:prstGeom prst="rect">
+            <a:avLst/>
+          </a:prstGeom>
+          <a:solidFill>
+            <a:srgbClr val="F7FAFC"/>
+          </a:solidFill>
+          <a:ln w="6350">
+            <a:solidFill>
+              <a:srgbClr val="D9B668"/>
+            </a:solidFill>
+            <a:prstDash val="solid"/>
+          </a:ln>
+        </p:spPr>
+      </p:sp>
+      <p:sp>
+        <p:nvSpPr>
+          <p:cNvPr id="12" name="Shape 10"/>
+          <p:cNvSpPr/>
+          <p:nvPr/>
+        </p:nvSpPr>
+        <p:spPr>
+          <a:xfrm>
+            <a:off x="704088" y="2770632"/>
+            <a:ext cx="292608" cy="292608"/>
+          </a:xfrm>
+          <a:prstGeom prst="rect">
+            <a:avLst/>
+          </a:prstGeom>
+          <a:solidFill>
+            <a:srgbClr val="977024"/>
+          </a:solidFill>
+          <a:ln/>
+        </p:spPr>
+      </p:sp>
+      <p:sp>
+        <p:nvSpPr>
+          <p:cNvPr id="13" name="Text 11"/>
+          <p:cNvSpPr/>
+          <p:nvPr/>
+        </p:nvSpPr>
+        <p:spPr>
+          <a:xfrm>
+            <a:off x="704088" y="2770632"/>
+            <a:ext cx="292608" cy="292608"/>
+          </a:xfrm>
+          <a:prstGeom prst="rect">
+            <a:avLst/>
+          </a:prstGeom>
+          <a:noFill/>
+          <a:ln/>
+        </p:spPr>
+        <p:txBody>
+          <a:bodyPr wrap="square" rtlCol="0" anchor="ctr"/>
+          <a:lstStyle/>
+          <a:p>
+            <a:pPr algn="ctr" indent="0" marL="0">
+              <a:buNone/>
+            </a:pPr>
+            <a:r>
+              <a:rPr lang="en-US" sz="1050" b="1" dirty="0">
+                <a:solidFill>
+                  <a:srgbClr val="FFFFFF"/>
+                </a:solidFill>
+                <a:latin typeface="Pretendard" pitchFamily="34" charset="0"/>
+                <a:ea typeface="Pretendard" pitchFamily="34" charset="-122"/>
+                <a:cs typeface="Pretendard" pitchFamily="34" charset="-120"/>
+              </a:rPr>
+              <a:t>✓</a:t>
+            </a:r>
+            <a:endParaRPr lang="en-US" sz="1050" dirty="0"/>
+          </a:p>
+        </p:txBody>
+      </p:sp>
+      <p:sp>
+        <p:nvSpPr>
+          <p:cNvPr id="14" name="Text 12"/>
+          <p:cNvSpPr/>
+          <p:nvPr/>
+        </p:nvSpPr>
+        <p:spPr>
+          <a:xfrm>
+            <a:off x="1097280" y="2615184"/>
+            <a:ext cx="4710532" cy="603504"/>
+          </a:xfrm>
+          <a:prstGeom prst="rect">
+            <a:avLst/>
+          </a:prstGeom>
+          <a:noFill/>
+          <a:ln/>
+        </p:spPr>
+        <p:txBody>
+          <a:bodyPr wrap="square" rtlCol="0" anchor="ctr"/>
+          <a:lstStyle/>
+          <a:p>
+            <a:pPr indent="0" marL="0">
+              <a:lnSpc>
+                <a:spcPct val="110000"/>
+              </a:lnSpc>
+              <a:buNone/>
+            </a:pPr>
+            <a:r>
+              <a:rPr lang="en-US" sz="950" dirty="0">
+                <a:solidFill>
+                  <a:srgbClr val="10161F"/>
+                </a:solidFill>
+                <a:latin typeface="Pretendard" pitchFamily="34" charset="0"/>
+                <a:ea typeface="Pretendard" pitchFamily="34" charset="-122"/>
+                <a:cs typeface="Pretendard" pitchFamily="34" charset="-120"/>
+              </a:rPr>
+              <a:t>임대차 원본 계약서 검토 (보증금, 월임대료, 관리비 실입금 내역 및 제소전화해조서)</a:t>
+            </a:r>
+            <a:endParaRPr lang="en-US" sz="950" dirty="0"/>
+          </a:p>
+        </p:txBody>
+      </p:sp>
+      <p:sp>
+        <p:nvSpPr>
+          <p:cNvPr id="15" name="Shape 13"/>
+          <p:cNvSpPr/>
+          <p:nvPr/>
+        </p:nvSpPr>
+        <p:spPr>
+          <a:xfrm>
+            <a:off x="566928" y="3364992"/>
+            <a:ext cx="5368900" cy="749808"/>
+          </a:xfrm>
+          <a:prstGeom prst="rect">
+            <a:avLst/>
+          </a:prstGeom>
+          <a:solidFill>
+            <a:srgbClr val="F7FAFC"/>
+          </a:solidFill>
+          <a:ln w="6350">
+            <a:solidFill>
+              <a:srgbClr val="D9B668"/>
+            </a:solidFill>
+            <a:prstDash val="solid"/>
+          </a:ln>
+        </p:spPr>
+      </p:sp>
+      <p:sp>
+        <p:nvSpPr>
+          <p:cNvPr id="16" name="Shape 14"/>
+          <p:cNvSpPr/>
+          <p:nvPr/>
+        </p:nvSpPr>
+        <p:spPr>
+          <a:xfrm>
+            <a:off x="704088" y="3593592"/>
+            <a:ext cx="292608" cy="292608"/>
+          </a:xfrm>
+          <a:prstGeom prst="rect">
+            <a:avLst/>
+          </a:prstGeom>
+          <a:solidFill>
+            <a:srgbClr val="977024"/>
+          </a:solidFill>
+          <a:ln/>
+        </p:spPr>
+      </p:sp>
+      <p:sp>
+        <p:nvSpPr>
+          <p:cNvPr id="17" name="Text 15"/>
+          <p:cNvSpPr/>
+          <p:nvPr/>
+        </p:nvSpPr>
+        <p:spPr>
+          <a:xfrm>
+            <a:off x="704088" y="3593592"/>
+            <a:ext cx="292608" cy="292608"/>
+          </a:xfrm>
+          <a:prstGeom prst="rect">
+            <a:avLst/>
+          </a:prstGeom>
+          <a:noFill/>
+          <a:ln/>
+        </p:spPr>
+        <p:txBody>
+          <a:bodyPr wrap="square" rtlCol="0" anchor="ctr"/>
+          <a:lstStyle/>
+          <a:p>
+            <a:pPr algn="ctr" indent="0" marL="0">
+              <a:buNone/>
+            </a:pPr>
+            <a:r>
+              <a:rPr lang="en-US" sz="1050" b="1" dirty="0">
+                <a:solidFill>
+                  <a:srgbClr val="FFFFFF"/>
+                </a:solidFill>
+                <a:latin typeface="Pretendard" pitchFamily="34" charset="0"/>
+                <a:ea typeface="Pretendard" pitchFamily="34" charset="-122"/>
+                <a:cs typeface="Pretendard" pitchFamily="34" charset="-120"/>
+              </a:rPr>
+              <a:t>✓</a:t>
+            </a:r>
+            <a:endParaRPr lang="en-US" sz="1050" dirty="0"/>
+          </a:p>
+        </p:txBody>
+      </p:sp>
+      <p:sp>
+        <p:nvSpPr>
+          <p:cNvPr id="18" name="Text 16"/>
+          <p:cNvSpPr/>
+          <p:nvPr/>
+        </p:nvSpPr>
+        <p:spPr>
+          <a:xfrm>
+            <a:off x="1097280" y="3438144"/>
+            <a:ext cx="4710532" cy="603504"/>
+          </a:xfrm>
+          <a:prstGeom prst="rect">
+            <a:avLst/>
+          </a:prstGeom>
+          <a:noFill/>
+          <a:ln/>
+        </p:spPr>
+        <p:txBody>
+          <a:bodyPr wrap="square" rtlCol="0" anchor="ctr"/>
+          <a:lstStyle/>
+          <a:p>
+            <a:pPr indent="0" marL="0">
+              <a:lnSpc>
+                <a:spcPct val="110000"/>
+              </a:lnSpc>
+              <a:buNone/>
+            </a:pPr>
+            <a:r>
+              <a:rPr lang="en-US" sz="950" dirty="0">
+                <a:solidFill>
+                  <a:srgbClr val="10161F"/>
+                </a:solidFill>
+                <a:latin typeface="Pretendard" pitchFamily="34" charset="0"/>
+                <a:ea typeface="Pretendard" pitchFamily="34" charset="-122"/>
+                <a:cs typeface="Pretendard" pitchFamily="34" charset="-120"/>
+              </a:rPr>
+              <a:t>건축물대장상 위반건축물 등재 여부 및 불법 증축·용도변경 이행강제금 납부 이력 점검</a:t>
+            </a:r>
+            <a:endParaRPr lang="en-US" sz="950" dirty="0"/>
+          </a:p>
+        </p:txBody>
+      </p:sp>
+      <p:sp>
+        <p:nvSpPr>
+          <p:cNvPr id="19" name="Shape 17"/>
+          <p:cNvSpPr/>
+          <p:nvPr/>
+        </p:nvSpPr>
+        <p:spPr>
+          <a:xfrm>
+            <a:off x="6255868" y="1719072"/>
+            <a:ext cx="5368900" cy="749808"/>
+          </a:xfrm>
+          <a:prstGeom prst="rect">
+            <a:avLst/>
+          </a:prstGeom>
+          <a:solidFill>
+            <a:srgbClr val="F7FAFC"/>
+          </a:solidFill>
+          <a:ln w="6350">
+            <a:solidFill>
+              <a:srgbClr val="D9B668"/>
+            </a:solidFill>
+            <a:prstDash val="solid"/>
+          </a:ln>
+        </p:spPr>
+      </p:sp>
+      <p:sp>
+        <p:nvSpPr>
+          <p:cNvPr id="20" name="Shape 18"/>
+          <p:cNvSpPr/>
+          <p:nvPr/>
+        </p:nvSpPr>
+        <p:spPr>
+          <a:xfrm>
+            <a:off x="6393028" y="1947672"/>
+            <a:ext cx="292608" cy="292608"/>
+          </a:xfrm>
+          <a:prstGeom prst="rect">
+            <a:avLst/>
+          </a:prstGeom>
+          <a:solidFill>
+            <a:srgbClr val="977024"/>
+          </a:solidFill>
+          <a:ln/>
+        </p:spPr>
+      </p:sp>
+      <p:sp>
+        <p:nvSpPr>
+          <p:cNvPr id="21" name="Text 19"/>
+          <p:cNvSpPr/>
+          <p:nvPr/>
+        </p:nvSpPr>
+        <p:spPr>
+          <a:xfrm>
+            <a:off x="6393028" y="1947672"/>
+            <a:ext cx="292608" cy="292608"/>
+          </a:xfrm>
+          <a:prstGeom prst="rect">
+            <a:avLst/>
+          </a:prstGeom>
+          <a:noFill/>
+          <a:ln/>
+        </p:spPr>
+        <p:txBody>
+          <a:bodyPr wrap="square" rtlCol="0" anchor="ctr"/>
+          <a:lstStyle/>
+          <a:p>
+            <a:pPr algn="ctr" indent="0" marL="0">
+              <a:buNone/>
+            </a:pPr>
+            <a:r>
+              <a:rPr lang="en-US" sz="1050" b="1" dirty="0">
+                <a:solidFill>
+                  <a:srgbClr val="FFFFFF"/>
+                </a:solidFill>
+                <a:latin typeface="Pretendard" pitchFamily="34" charset="0"/>
+                <a:ea typeface="Pretendard" pitchFamily="34" charset="-122"/>
+                <a:cs typeface="Pretendard" pitchFamily="34" charset="-120"/>
+              </a:rPr>
+              <a:t>✓</a:t>
+            </a:r>
+            <a:endParaRPr lang="en-US" sz="1050" dirty="0"/>
+          </a:p>
+        </p:txBody>
+      </p:sp>
+      <p:sp>
+        <p:nvSpPr>
+          <p:cNvPr id="22" name="Text 20"/>
+          <p:cNvSpPr/>
+          <p:nvPr/>
+        </p:nvSpPr>
+        <p:spPr>
+          <a:xfrm>
+            <a:off x="6786220" y="1792224"/>
+            <a:ext cx="4710532" cy="603504"/>
+          </a:xfrm>
+          <a:prstGeom prst="rect">
+            <a:avLst/>
+          </a:prstGeom>
+          <a:noFill/>
+          <a:ln/>
+        </p:spPr>
+        <p:txBody>
+          <a:bodyPr wrap="square" rtlCol="0" anchor="ctr"/>
+          <a:lstStyle/>
+          <a:p>
+            <a:pPr indent="0" marL="0">
+              <a:lnSpc>
+                <a:spcPct val="110000"/>
+              </a:lnSpc>
+              <a:buNone/>
+            </a:pPr>
+            <a:r>
+              <a:rPr lang="en-US" sz="950" dirty="0">
+                <a:solidFill>
+                  <a:srgbClr val="10161F"/>
+                </a:solidFill>
+                <a:latin typeface="Pretendard" pitchFamily="34" charset="0"/>
+                <a:ea typeface="Pretendard" pitchFamily="34" charset="-122"/>
+                <a:cs typeface="Pretendard" pitchFamily="34" charset="-120"/>
+              </a:rPr>
+              <a:t>토지이용계획확인원상 도시계획시설 저촉, 건축선 후퇴, 지구단위계획 특별계획구역 확인</a:t>
+            </a:r>
+            <a:endParaRPr lang="en-US" sz="950" dirty="0"/>
+          </a:p>
+        </p:txBody>
+      </p:sp>
+      <p:sp>
+        <p:nvSpPr>
+          <p:cNvPr id="23" name="Shape 21"/>
+          <p:cNvSpPr/>
+          <p:nvPr/>
+        </p:nvSpPr>
+        <p:spPr>
+          <a:xfrm>
+            <a:off x="6255868" y="2542032"/>
+            <a:ext cx="5368900" cy="749808"/>
+          </a:xfrm>
+          <a:prstGeom prst="rect">
+            <a:avLst/>
+          </a:prstGeom>
+          <a:solidFill>
+            <a:srgbClr val="F7FAFC"/>
+          </a:solidFill>
+          <a:ln w="6350">
+            <a:solidFill>
+              <a:srgbClr val="D9B668"/>
+            </a:solidFill>
+            <a:prstDash val="solid"/>
+          </a:ln>
+        </p:spPr>
+      </p:sp>
+      <p:sp>
+        <p:nvSpPr>
+          <p:cNvPr id="24" name="Shape 22"/>
+          <p:cNvSpPr/>
+          <p:nvPr/>
+        </p:nvSpPr>
+        <p:spPr>
+          <a:xfrm>
+            <a:off x="6393028" y="2770632"/>
+            <a:ext cx="292608" cy="292608"/>
+          </a:xfrm>
+          <a:prstGeom prst="rect">
+            <a:avLst/>
+          </a:prstGeom>
+          <a:solidFill>
+            <a:srgbClr val="977024"/>
+          </a:solidFill>
+          <a:ln/>
+        </p:spPr>
+      </p:sp>
+      <p:sp>
+        <p:nvSpPr>
+          <p:cNvPr id="25" name="Text 23"/>
+          <p:cNvSpPr/>
+          <p:nvPr/>
+        </p:nvSpPr>
+        <p:spPr>
+          <a:xfrm>
+            <a:off x="6393028" y="2770632"/>
+            <a:ext cx="292608" cy="292608"/>
+          </a:xfrm>
+          <a:prstGeom prst="rect">
+            <a:avLst/>
+          </a:prstGeom>
+          <a:noFill/>
+          <a:ln/>
+        </p:spPr>
+        <p:txBody>
+          <a:bodyPr wrap="square" rtlCol="0" anchor="ctr"/>
+          <a:lstStyle/>
+          <a:p>
+            <a:pPr algn="ctr" indent="0" marL="0">
+              <a:buNone/>
+            </a:pPr>
+            <a:r>
+              <a:rPr lang="en-US" sz="1050" b="1" dirty="0">
+                <a:solidFill>
+                  <a:srgbClr val="FFFFFF"/>
+                </a:solidFill>
+                <a:latin typeface="Pretendard" pitchFamily="34" charset="0"/>
+                <a:ea typeface="Pretendard" pitchFamily="34" charset="-122"/>
+                <a:cs typeface="Pretendard" pitchFamily="34" charset="-120"/>
+              </a:rPr>
+              <a:t>✓</a:t>
+            </a:r>
+            <a:endParaRPr lang="en-US" sz="1050" dirty="0"/>
+          </a:p>
+        </p:txBody>
+      </p:sp>
+      <p:sp>
+        <p:nvSpPr>
+          <p:cNvPr id="26" name="Text 24"/>
+          <p:cNvSpPr/>
+          <p:nvPr/>
+        </p:nvSpPr>
+        <p:spPr>
+          <a:xfrm>
+            <a:off x="6786220" y="2615184"/>
+            <a:ext cx="4710532" cy="603504"/>
+          </a:xfrm>
+          <a:prstGeom prst="rect">
+            <a:avLst/>
+          </a:prstGeom>
+          <a:noFill/>
+          <a:ln/>
+        </p:spPr>
+        <p:txBody>
+          <a:bodyPr wrap="square" rtlCol="0" anchor="ctr"/>
+          <a:lstStyle/>
+          <a:p>
+            <a:pPr indent="0" marL="0">
+              <a:lnSpc>
+                <a:spcPct val="110000"/>
+              </a:lnSpc>
+              <a:buNone/>
+            </a:pPr>
+            <a:r>
+              <a:rPr lang="en-US" sz="950" dirty="0">
+                <a:solidFill>
+                  <a:srgbClr val="10161F"/>
+                </a:solidFill>
+                <a:latin typeface="Pretendard" pitchFamily="34" charset="0"/>
+                <a:ea typeface="Pretendard" pitchFamily="34" charset="-122"/>
+                <a:cs typeface="Pretendard" pitchFamily="34" charset="-120"/>
+              </a:rPr>
+              <a:t>기계식 주차기 정기 안전점검 합격증, 승강기 검사필증, 소방 완비증명서 실물 실사</a:t>
+            </a:r>
+            <a:endParaRPr lang="en-US" sz="950" dirty="0"/>
+          </a:p>
+        </p:txBody>
+      </p:sp>
+      <p:sp>
+        <p:nvSpPr>
+          <p:cNvPr id="27" name="Shape 25"/>
+          <p:cNvSpPr/>
+          <p:nvPr/>
+        </p:nvSpPr>
+        <p:spPr>
+          <a:xfrm>
+            <a:off x="6255868" y="3364992"/>
+            <a:ext cx="5368900" cy="749808"/>
+          </a:xfrm>
+          <a:prstGeom prst="rect">
+            <a:avLst/>
+          </a:prstGeom>
+          <a:solidFill>
+            <a:srgbClr val="F7FAFC"/>
+          </a:solidFill>
+          <a:ln w="6350">
+            <a:solidFill>
+              <a:srgbClr val="D9B668"/>
+            </a:solidFill>
+            <a:prstDash val="solid"/>
+          </a:ln>
+        </p:spPr>
+      </p:sp>
+      <p:sp>
+        <p:nvSpPr>
+          <p:cNvPr id="28" name="Shape 26"/>
+          <p:cNvSpPr/>
+          <p:nvPr/>
+        </p:nvSpPr>
+        <p:spPr>
+          <a:xfrm>
+            <a:off x="6393028" y="3593592"/>
+            <a:ext cx="292608" cy="292608"/>
+          </a:xfrm>
+          <a:prstGeom prst="rect">
+            <a:avLst/>
+          </a:prstGeom>
+          <a:solidFill>
+            <a:srgbClr val="977024"/>
+          </a:solidFill>
+          <a:ln/>
+        </p:spPr>
+      </p:sp>
+      <p:sp>
+        <p:nvSpPr>
+          <p:cNvPr id="29" name="Text 27"/>
+          <p:cNvSpPr/>
+          <p:nvPr/>
+        </p:nvSpPr>
+        <p:spPr>
+          <a:xfrm>
+            <a:off x="6393028" y="3593592"/>
+            <a:ext cx="292608" cy="292608"/>
+          </a:xfrm>
+          <a:prstGeom prst="rect">
+            <a:avLst/>
+          </a:prstGeom>
+          <a:noFill/>
+          <a:ln/>
+        </p:spPr>
+        <p:txBody>
+          <a:bodyPr wrap="square" rtlCol="0" anchor="ctr"/>
+          <a:lstStyle/>
+          <a:p>
+            <a:pPr algn="ctr" indent="0" marL="0">
+              <a:buNone/>
+            </a:pPr>
+            <a:r>
+              <a:rPr lang="en-US" sz="1050" b="1" dirty="0">
+                <a:solidFill>
+                  <a:srgbClr val="FFFFFF"/>
+                </a:solidFill>
+                <a:latin typeface="Pretendard" pitchFamily="34" charset="0"/>
+                <a:ea typeface="Pretendard" pitchFamily="34" charset="-122"/>
+                <a:cs typeface="Pretendard" pitchFamily="34" charset="-120"/>
+              </a:rPr>
+              <a:t>✓</a:t>
+            </a:r>
+            <a:endParaRPr lang="en-US" sz="1050" dirty="0"/>
+          </a:p>
+        </p:txBody>
+      </p:sp>
+      <p:sp>
+        <p:nvSpPr>
+          <p:cNvPr id="30" name="Text 28"/>
+          <p:cNvSpPr/>
+          <p:nvPr/>
+        </p:nvSpPr>
+        <p:spPr>
+          <a:xfrm>
+            <a:off x="6786220" y="3438144"/>
+            <a:ext cx="4710532" cy="603504"/>
+          </a:xfrm>
+          <a:prstGeom prst="rect">
+            <a:avLst/>
+          </a:prstGeom>
+          <a:noFill/>
+          <a:ln/>
+        </p:spPr>
+        <p:txBody>
+          <a:bodyPr wrap="square" rtlCol="0" anchor="ctr"/>
+          <a:lstStyle/>
+          <a:p>
+            <a:pPr indent="0" marL="0">
+              <a:lnSpc>
+                <a:spcPct val="110000"/>
+              </a:lnSpc>
+              <a:buNone/>
+            </a:pPr>
+            <a:r>
+              <a:rPr lang="en-US" sz="950" dirty="0">
+                <a:solidFill>
+                  <a:srgbClr val="10161F"/>
+                </a:solidFill>
+                <a:latin typeface="Pretendard" pitchFamily="34" charset="0"/>
+                <a:ea typeface="Pretendard" pitchFamily="34" charset="-122"/>
+                <a:cs typeface="Pretendard" pitchFamily="34" charset="-120"/>
+              </a:rPr>
+              <a:t>정화조 용량 대비 현 업종 적합성 및 하수도 원인자부담금 추가 부과 대상 여부 확인</a:t>
+            </a:r>
+            <a:endParaRPr lang="en-US" sz="950" dirty="0"/>
+          </a:p>
+        </p:txBody>
+      </p:sp>
+      <p:sp>
+        <p:nvSpPr>
+          <p:cNvPr id="31" name="Shape 29"/>
+          <p:cNvSpPr/>
+          <p:nvPr/>
+        </p:nvSpPr>
+        <p:spPr>
+          <a:xfrm>
+            <a:off x="566928" y="5349240"/>
+            <a:ext cx="11057839" cy="457200"/>
+          </a:xfrm>
+          <a:prstGeom prst="rect">
+            <a:avLst/>
+          </a:prstGeom>
+          <a:solidFill>
+            <a:srgbClr val="D9B668"/>
+          </a:solidFill>
+          <a:ln/>
+        </p:spPr>
+      </p:sp>
+      <p:sp>
+        <p:nvSpPr>
+          <p:cNvPr id="32" name="Text 30"/>
+          <p:cNvSpPr/>
+          <p:nvPr/>
+        </p:nvSpPr>
+        <p:spPr>
+          <a:xfrm>
+            <a:off x="749808" y="5422392"/>
+            <a:ext cx="10692079" cy="310896"/>
+          </a:xfrm>
+          <a:prstGeom prst="rect">
+            <a:avLst/>
+          </a:prstGeom>
+          <a:noFill/>
+          <a:ln/>
+        </p:spPr>
+        <p:txBody>
+          <a:bodyPr wrap="square" rtlCol="0" anchor="ctr"/>
+          <a:lstStyle/>
+          <a:p>
+            <a:pPr indent="0" marL="0">
+              <a:buNone/>
+            </a:pPr>
+            <a:r>
+              <a:rPr lang="en-US" sz="950" b="1" dirty="0">
+                <a:solidFill>
+                  <a:srgbClr val="977024"/>
+                </a:solidFill>
+                <a:latin typeface="Pretendard" pitchFamily="34" charset="0"/>
+                <a:ea typeface="Pretendard" pitchFamily="34" charset="-122"/>
+                <a:cs typeface="Pretendard" pitchFamily="34" charset="-120"/>
+              </a:rPr>
+              <a:t>※ 본 체크리스트는 계약 전 매수인의 안전한 자산 인수를 위한 필수 확인 사항이며, 실사(Due Diligence) 결과에 따라 매매 조건 및 잔금 일정이 조정될 수 있습니다.</a:t>
+            </a:r>
+            <a:endParaRPr lang="en-US" sz="950" dirty="0"/>
+          </a:p>
+        </p:txBody>
+      </p:sp>
+      <p:sp>
+        <p:nvSpPr>
+          <p:cNvPr id="33" name="Text 31"/>
+          <p:cNvSpPr/>
+          <p:nvPr/>
+        </p:nvSpPr>
+        <p:spPr>
+          <a:xfrm>
+            <a:off x="566928" y="6382512"/>
+            <a:ext cx="7315200" cy="219456"/>
           </a:xfrm>
           <a:prstGeom prst="rect">
             <a:avLst/>
@@ -3849,144 +4133,10 @@
           <a:bodyPr wrap="square" lIns="0" tIns="0" rIns="0" bIns="0" rtlCol="0" anchor="ctr"/>
           <a:lstStyle/>
           <a:p>
-            <a:pPr algn="ctr" indent="0" marL="0">
-              <a:buNone/>
-            </a:pPr>
-            <a:r>
-              <a:rPr lang="en-US" sz="1400" b="1" dirty="0">
-                <a:solidFill>
-                  <a:srgbClr val="FFFFFF"/>
-                </a:solidFill>
-                <a:latin typeface="Arial" pitchFamily="34" charset="0"/>
-                <a:ea typeface="Arial" pitchFamily="34" charset="-122"/>
-                <a:cs typeface="Arial" pitchFamily="34" charset="-120"/>
-              </a:rPr>
-              <a:t>01</a:t>
-            </a:r>
-            <a:endParaRPr lang="en-US" sz="1400" dirty="0"/>
-          </a:p>
-        </p:txBody>
-      </p:sp>
-      <p:sp>
-        <p:nvSpPr>
-          <p:cNvPr id="9" name="Text 7"/>
-          <p:cNvSpPr/>
-          <p:nvPr/>
-        </p:nvSpPr>
-        <p:spPr>
-          <a:xfrm>
-            <a:off x="722376" y="2304288"/>
-            <a:ext cx="10618927" cy="365760"/>
-          </a:xfrm>
-          <a:prstGeom prst="rect">
-            <a:avLst/>
-          </a:prstGeom>
-          <a:noFill/>
-          <a:ln/>
-        </p:spPr>
-        <p:txBody>
-          <a:bodyPr wrap="square" rtlCol="0" anchor="ctr"/>
-          <a:lstStyle/>
-          <a:p>
             <a:pPr indent="0" marL="0">
               <a:buNone/>
             </a:pPr>
             <a:r>
-              <a:rPr lang="en-US" sz="1600" b="1" dirty="0">
-                <a:solidFill>
-                  <a:srgbClr val="10161F"/>
-                </a:solidFill>
-                <a:latin typeface="Pretendard" pitchFamily="34" charset="0"/>
-                <a:ea typeface="Pretendard" pitchFamily="34" charset="-122"/>
-                <a:cs typeface="Pretendard" pitchFamily="34" charset="-120"/>
-              </a:rPr>
-              <a:t>1단계</a:t>
-            </a:r>
-            <a:endParaRPr lang="en-US" sz="1600" dirty="0"/>
-          </a:p>
-        </p:txBody>
-      </p:sp>
-      <p:sp>
-        <p:nvSpPr>
-          <p:cNvPr id="10" name="Text 8"/>
-          <p:cNvSpPr/>
-          <p:nvPr/>
-        </p:nvSpPr>
-        <p:spPr>
-          <a:xfrm>
-            <a:off x="722376" y="2761488"/>
-            <a:ext cx="10618927" cy="1828800"/>
-          </a:xfrm>
-          <a:prstGeom prst="rect">
-            <a:avLst/>
-          </a:prstGeom>
-          <a:noFill/>
-          <a:ln/>
-        </p:spPr>
-        <p:txBody>
-          <a:bodyPr wrap="square" rtlCol="0" anchor="t"/>
-          <a:lstStyle/>
-          <a:p>
-            <a:pPr indent="0" marL="0">
-              <a:buNone/>
-            </a:pPr>
-            <a:r>
-              <a:rPr lang="en-US" sz="1100" dirty="0">
-                <a:solidFill>
-                  <a:srgbClr val="10161F"/>
-                </a:solidFill>
-                <a:latin typeface="Pretendard" pitchFamily="34" charset="0"/>
-                <a:ea typeface="Pretendard" pitchFamily="34" charset="-122"/>
-                <a:cs typeface="Pretendard" pitchFamily="34" charset="-120"/>
-              </a:rPr>
-              <a:t>사옥 활용 레이아웃 설계 및 인테리어 비용 산정을 권장</a:t>
-            </a:r>
-            <a:endParaRPr lang="en-US" sz="1100" dirty="0"/>
-          </a:p>
-          <a:p>
-            <a:pPr indent="0" marL="0">
-              <a:buNone/>
-            </a:pPr>
-            <a:r>
-              <a:rPr lang="en-US" sz="1100" dirty="0">
-                <a:solidFill>
-                  <a:srgbClr val="10161F"/>
-                </a:solidFill>
-                <a:latin typeface="Pretendard" pitchFamily="34" charset="0"/>
-                <a:ea typeface="Pretendard" pitchFamily="34" charset="-122"/>
-                <a:cs typeface="Pretendard" pitchFamily="34" charset="-120"/>
-              </a:rPr>
-              <a:t>사옥 활용 레이아웃 설계 및 인테리어 비용 산정을 권장합니다.</a:t>
-            </a:r>
-            <a:endParaRPr lang="en-US" sz="1100" dirty="0"/>
-          </a:p>
-        </p:txBody>
-      </p:sp>
-      <p:sp>
-        <p:nvSpPr>
-          <p:cNvPr id="11" name="Text 9"/>
-          <p:cNvSpPr/>
-          <p:nvPr/>
-        </p:nvSpPr>
-        <p:spPr>
-          <a:xfrm>
-            <a:off x="502920" y="6382512"/>
-            <a:ext cx="7315200" cy="219456"/>
-          </a:xfrm>
-          <a:prstGeom prst="rect">
-            <a:avLst/>
-          </a:prstGeom>
-          <a:noFill/>
-          <a:ln/>
-        </p:spPr>
-        <p:txBody>
-          <a:bodyPr wrap="square" lIns="0" tIns="0" rIns="0" bIns="0" rtlCol="0" anchor="ctr"/>
-          <a:lstStyle/>
-          <a:p>
-            <a:pPr indent="0" marL="0">
-              <a:buNone/>
-            </a:pPr>
-            <a:r>
               <a:rPr lang="en-US" sz="800" dirty="0">
                 <a:solidFill>
                   <a:srgbClr val="718096"/>
@@ -4003,13 +4153,13 @@
       </p:sp>
       <p:sp>
         <p:nvSpPr>
-          <p:cNvPr id="12" name="Text 10"/>
-          <p:cNvSpPr/>
-          <p:nvPr/>
-        </p:nvSpPr>
-        <p:spPr>
-          <a:xfrm>
-            <a:off x="10774375" y="6382512"/>
+          <p:cNvPr id="34" name="Text 32"/>
+          <p:cNvSpPr/>
+          <p:nvPr/>
+        </p:nvSpPr>
+        <p:spPr>
+          <a:xfrm>
+            <a:off x="10710367" y="6382512"/>
             <a:ext cx="914400" cy="219456"/>
           </a:xfrm>
           <a:prstGeom prst="rect">
@@ -4051,6 +4201,436 @@
 <file path=ppt/slides/slide12.xml><?xml version="1.0" encoding="utf-8"?>
 <p:sld xmlns:a="http://schemas.openxmlformats.org/drawingml/2006/main" xmlns:r="http://schemas.openxmlformats.org/officeDocument/2006/relationships" xmlns:p="http://schemas.openxmlformats.org/presentationml/2006/main">
   <p:cSld name="Slide 12">
+    <p:bg>
+      <p:bgPr>
+        <a:solidFill>
+          <a:srgbClr val="FFFFFF"/>
+        </a:solidFill>
+      </p:bgPr>
+    </p:bg>
+    <p:spTree>
+      <p:nvGrpSpPr>
+        <p:cNvPr id="1" name=""/>
+        <p:cNvGrpSpPr/>
+        <p:nvPr/>
+      </p:nvGrpSpPr>
+      <p:grpSpPr>
+        <a:xfrm>
+          <a:off x="0" y="0"/>
+          <a:ext cx="0" cy="0"/>
+          <a:chOff x="0" y="0"/>
+          <a:chExt cx="0" cy="0"/>
+        </a:xfrm>
+      </p:grpSpPr>
+      <p:sp>
+        <p:nvSpPr>
+          <p:cNvPr id="2" name="Shape 0"/>
+          <p:cNvSpPr/>
+          <p:nvPr/>
+        </p:nvSpPr>
+        <p:spPr>
+          <a:xfrm>
+            <a:off x="566928" y="457200"/>
+            <a:ext cx="384048" cy="384048"/>
+          </a:xfrm>
+          <a:prstGeom prst="ellipse">
+            <a:avLst/>
+          </a:prstGeom>
+          <a:solidFill>
+            <a:srgbClr val="B98A2E"/>
+          </a:solidFill>
+          <a:ln/>
+        </p:spPr>
+      </p:sp>
+      <p:sp>
+        <p:nvSpPr>
+          <p:cNvPr id="3" name="Text 1"/>
+          <p:cNvSpPr/>
+          <p:nvPr/>
+        </p:nvSpPr>
+        <p:spPr>
+          <a:xfrm>
+            <a:off x="566928" y="457200"/>
+            <a:ext cx="384048" cy="384048"/>
+          </a:xfrm>
+          <a:prstGeom prst="rect">
+            <a:avLst/>
+          </a:prstGeom>
+          <a:noFill/>
+          <a:ln/>
+        </p:spPr>
+        <p:txBody>
+          <a:bodyPr wrap="square" lIns="0" tIns="0" rIns="0" bIns="0" rtlCol="0" anchor="ctr"/>
+          <a:lstStyle/>
+          <a:p>
+            <a:pPr algn="ctr" indent="0" marL="0">
+              <a:buNone/>
+            </a:pPr>
+            <a:r>
+              <a:rPr lang="en-US" sz="1300" b="1" dirty="0">
+                <a:solidFill>
+                  <a:srgbClr val="FFFFFF"/>
+                </a:solidFill>
+                <a:latin typeface="Arial" pitchFamily="34" charset="0"/>
+                <a:ea typeface="Arial" pitchFamily="34" charset="-122"/>
+                <a:cs typeface="Arial" pitchFamily="34" charset="-120"/>
+              </a:rPr>
+              <a:t>12</a:t>
+            </a:r>
+            <a:endParaRPr lang="en-US" sz="1300" dirty="0"/>
+          </a:p>
+        </p:txBody>
+      </p:sp>
+      <p:sp>
+        <p:nvSpPr>
+          <p:cNvPr id="4" name="Text 2"/>
+          <p:cNvSpPr/>
+          <p:nvPr/>
+        </p:nvSpPr>
+        <p:spPr>
+          <a:xfrm>
+            <a:off x="1133856" y="457200"/>
+            <a:ext cx="10490911" cy="182880"/>
+          </a:xfrm>
+          <a:prstGeom prst="rect">
+            <a:avLst/>
+          </a:prstGeom>
+          <a:noFill/>
+          <a:ln/>
+        </p:spPr>
+        <p:txBody>
+          <a:bodyPr wrap="square" lIns="0" tIns="0" rIns="0" bIns="0" rtlCol="0" anchor="ctr"/>
+          <a:lstStyle/>
+          <a:p>
+            <a:pPr indent="0" marL="0">
+              <a:buNone/>
+            </a:pPr>
+            <a:r>
+              <a:rPr lang="en-US" sz="950" b="1" spc="200" kern="0" dirty="0">
+                <a:solidFill>
+                  <a:srgbClr val="B98A2E"/>
+                </a:solidFill>
+                <a:latin typeface="Arial" pitchFamily="34" charset="0"/>
+                <a:ea typeface="Arial" pitchFamily="34" charset="-122"/>
+                <a:cs typeface="Arial" pitchFamily="34" charset="-120"/>
+              </a:rPr>
+              <a:t>Process</a:t>
+            </a:r>
+            <a:endParaRPr lang="en-US" sz="950" dirty="0"/>
+          </a:p>
+        </p:txBody>
+      </p:sp>
+      <p:sp>
+        <p:nvSpPr>
+          <p:cNvPr id="5" name="Text 3"/>
+          <p:cNvSpPr/>
+          <p:nvPr/>
+        </p:nvSpPr>
+        <p:spPr>
+          <a:xfrm>
+            <a:off x="1133856" y="640080"/>
+            <a:ext cx="10490911" cy="365760"/>
+          </a:xfrm>
+          <a:prstGeom prst="rect">
+            <a:avLst/>
+          </a:prstGeom>
+          <a:noFill/>
+          <a:ln/>
+        </p:spPr>
+        <p:txBody>
+          <a:bodyPr wrap="square" lIns="0" tIns="0" rIns="0" bIns="0" rtlCol="0" anchor="ctr">
+            <a:normAutofit/>
+          </a:bodyPr>
+          <a:lstStyle/>
+          <a:p>
+            <a:pPr indent="0" marL="0">
+              <a:buNone/>
+            </a:pPr>
+            <a:r>
+              <a:rPr lang="en-US" sz="2300" b="1" dirty="0">
+                <a:solidFill>
+                  <a:srgbClr val="10161F"/>
+                </a:solidFill>
+                <a:latin typeface="Pretendard" pitchFamily="34" charset="0"/>
+                <a:ea typeface="Pretendard" pitchFamily="34" charset="-122"/>
+                <a:cs typeface="Pretendard" pitchFamily="34" charset="-120"/>
+              </a:rPr>
+              <a:t>진행 절차</a:t>
+            </a:r>
+            <a:endParaRPr lang="en-US" sz="2300" dirty="0"/>
+          </a:p>
+        </p:txBody>
+      </p:sp>
+      <p:sp>
+        <p:nvSpPr>
+          <p:cNvPr id="6" name="Shape 4"/>
+          <p:cNvSpPr/>
+          <p:nvPr/>
+        </p:nvSpPr>
+        <p:spPr>
+          <a:xfrm>
+            <a:off x="566928" y="1572768"/>
+            <a:ext cx="11057839" cy="3200400"/>
+          </a:xfrm>
+          <a:prstGeom prst="roundRect">
+            <a:avLst>
+              <a:gd name="adj" fmla="val 1714"/>
+            </a:avLst>
+          </a:prstGeom>
+          <a:solidFill>
+            <a:srgbClr val="F7FAFC"/>
+          </a:solidFill>
+          <a:ln w="6350">
+            <a:solidFill>
+              <a:srgbClr val="CBD5E0"/>
+            </a:solidFill>
+            <a:prstDash val="solid"/>
+          </a:ln>
+        </p:spPr>
+      </p:sp>
+      <p:sp>
+        <p:nvSpPr>
+          <p:cNvPr id="7" name="Shape 5"/>
+          <p:cNvSpPr/>
+          <p:nvPr/>
+        </p:nvSpPr>
+        <p:spPr>
+          <a:xfrm>
+            <a:off x="786384" y="1792224"/>
+            <a:ext cx="438912" cy="438912"/>
+          </a:xfrm>
+          <a:prstGeom prst="ellipse">
+            <a:avLst/>
+          </a:prstGeom>
+          <a:solidFill>
+            <a:srgbClr val="B98A2E"/>
+          </a:solidFill>
+          <a:ln/>
+        </p:spPr>
+      </p:sp>
+      <p:sp>
+        <p:nvSpPr>
+          <p:cNvPr id="8" name="Text 6"/>
+          <p:cNvSpPr/>
+          <p:nvPr/>
+        </p:nvSpPr>
+        <p:spPr>
+          <a:xfrm>
+            <a:off x="786384" y="1792224"/>
+            <a:ext cx="438912" cy="438912"/>
+          </a:xfrm>
+          <a:prstGeom prst="rect">
+            <a:avLst/>
+          </a:prstGeom>
+          <a:noFill/>
+          <a:ln/>
+        </p:spPr>
+        <p:txBody>
+          <a:bodyPr wrap="square" lIns="0" tIns="0" rIns="0" bIns="0" rtlCol="0" anchor="ctr"/>
+          <a:lstStyle/>
+          <a:p>
+            <a:pPr algn="ctr" indent="0" marL="0">
+              <a:buNone/>
+            </a:pPr>
+            <a:r>
+              <a:rPr lang="en-US" sz="1400" b="1" dirty="0">
+                <a:solidFill>
+                  <a:srgbClr val="FFFFFF"/>
+                </a:solidFill>
+                <a:latin typeface="Arial" pitchFamily="34" charset="0"/>
+                <a:ea typeface="Arial" pitchFamily="34" charset="-122"/>
+                <a:cs typeface="Arial" pitchFamily="34" charset="-120"/>
+              </a:rPr>
+              <a:t>01</a:t>
+            </a:r>
+            <a:endParaRPr lang="en-US" sz="1400" dirty="0"/>
+          </a:p>
+        </p:txBody>
+      </p:sp>
+      <p:sp>
+        <p:nvSpPr>
+          <p:cNvPr id="9" name="Text 7"/>
+          <p:cNvSpPr/>
+          <p:nvPr/>
+        </p:nvSpPr>
+        <p:spPr>
+          <a:xfrm>
+            <a:off x="786384" y="2304288"/>
+            <a:ext cx="10618927" cy="365760"/>
+          </a:xfrm>
+          <a:prstGeom prst="rect">
+            <a:avLst/>
+          </a:prstGeom>
+          <a:noFill/>
+          <a:ln/>
+        </p:spPr>
+        <p:txBody>
+          <a:bodyPr wrap="square" rtlCol="0" anchor="ctr"/>
+          <a:lstStyle/>
+          <a:p>
+            <a:pPr indent="0" marL="0">
+              <a:buNone/>
+            </a:pPr>
+            <a:r>
+              <a:rPr lang="en-US" sz="1600" b="1" dirty="0">
+                <a:solidFill>
+                  <a:srgbClr val="10161F"/>
+                </a:solidFill>
+                <a:latin typeface="Pretendard" pitchFamily="34" charset="0"/>
+                <a:ea typeface="Pretendard" pitchFamily="34" charset="-122"/>
+                <a:cs typeface="Pretendard" pitchFamily="34" charset="-120"/>
+              </a:rPr>
+              <a:t>1단계</a:t>
+            </a:r>
+            <a:endParaRPr lang="en-US" sz="1600" dirty="0"/>
+          </a:p>
+        </p:txBody>
+      </p:sp>
+      <p:sp>
+        <p:nvSpPr>
+          <p:cNvPr id="10" name="Text 8"/>
+          <p:cNvSpPr/>
+          <p:nvPr/>
+        </p:nvSpPr>
+        <p:spPr>
+          <a:xfrm>
+            <a:off x="786384" y="2761488"/>
+            <a:ext cx="10618927" cy="1828800"/>
+          </a:xfrm>
+          <a:prstGeom prst="rect">
+            <a:avLst/>
+          </a:prstGeom>
+          <a:noFill/>
+          <a:ln/>
+        </p:spPr>
+        <p:txBody>
+          <a:bodyPr wrap="square" rtlCol="0" anchor="t"/>
+          <a:lstStyle/>
+          <a:p>
+            <a:pPr indent="0" marL="0">
+              <a:buNone/>
+            </a:pPr>
+            <a:r>
+              <a:rPr lang="en-US" sz="1100" dirty="0">
+                <a:solidFill>
+                  <a:srgbClr val="10161F"/>
+                </a:solidFill>
+                <a:latin typeface="Pretendard" pitchFamily="34" charset="0"/>
+                <a:ea typeface="Pretendard" pitchFamily="34" charset="-122"/>
+                <a:cs typeface="Pretendard" pitchFamily="34" charset="-120"/>
+              </a:rPr>
+              <a:t>사옥 활용 레이아웃 설계 및 인테리어 비용 산정을 권장</a:t>
+            </a:r>
+            <a:endParaRPr lang="en-US" sz="1100" dirty="0"/>
+          </a:p>
+          <a:p>
+            <a:pPr indent="0" marL="0">
+              <a:buNone/>
+            </a:pPr>
+            <a:r>
+              <a:rPr lang="en-US" sz="1100" dirty="0">
+                <a:solidFill>
+                  <a:srgbClr val="10161F"/>
+                </a:solidFill>
+                <a:latin typeface="Pretendard" pitchFamily="34" charset="0"/>
+                <a:ea typeface="Pretendard" pitchFamily="34" charset="-122"/>
+                <a:cs typeface="Pretendard" pitchFamily="34" charset="-120"/>
+              </a:rPr>
+              <a:t>사옥 활용 레이아웃 설계 및 인테리어 비용 산정을 권장합니다.</a:t>
+            </a:r>
+            <a:endParaRPr lang="en-US" sz="1100" dirty="0"/>
+          </a:p>
+        </p:txBody>
+      </p:sp>
+      <p:sp>
+        <p:nvSpPr>
+          <p:cNvPr id="11" name="Text 9"/>
+          <p:cNvSpPr/>
+          <p:nvPr/>
+        </p:nvSpPr>
+        <p:spPr>
+          <a:xfrm>
+            <a:off x="566928" y="6382512"/>
+            <a:ext cx="7315200" cy="219456"/>
+          </a:xfrm>
+          <a:prstGeom prst="rect">
+            <a:avLst/>
+          </a:prstGeom>
+          <a:noFill/>
+          <a:ln/>
+        </p:spPr>
+        <p:txBody>
+          <a:bodyPr wrap="square" lIns="0" tIns="0" rIns="0" bIns="0" rtlCol="0" anchor="ctr"/>
+          <a:lstStyle/>
+          <a:p>
+            <a:pPr indent="0" marL="0">
+              <a:buNone/>
+            </a:pPr>
+            <a:r>
+              <a:rPr lang="en-US" sz="800" dirty="0">
+                <a:solidFill>
+                  <a:srgbClr val="718096"/>
+                </a:solidFill>
+                <a:latin typeface="Pretendard" pitchFamily="34" charset="0"/>
+                <a:ea typeface="Pretendard" pitchFamily="34" charset="-122"/>
+                <a:cs typeface="Pretendard" pitchFamily="34" charset="-120"/>
+              </a:rPr>
+              <a:t>크리딜</a:t>
+            </a:r>
+            <a:endParaRPr lang="en-US" sz="800" dirty="0"/>
+          </a:p>
+        </p:txBody>
+      </p:sp>
+      <p:sp>
+        <p:nvSpPr>
+          <p:cNvPr id="12" name="Text 10"/>
+          <p:cNvSpPr/>
+          <p:nvPr/>
+        </p:nvSpPr>
+        <p:spPr>
+          <a:xfrm>
+            <a:off x="10710367" y="6382512"/>
+            <a:ext cx="914400" cy="219456"/>
+          </a:xfrm>
+          <a:prstGeom prst="rect">
+            <a:avLst/>
+          </a:prstGeom>
+          <a:noFill/>
+          <a:ln/>
+        </p:spPr>
+        <p:txBody>
+          <a:bodyPr wrap="square" lIns="0" tIns="0" rIns="0" bIns="0" rtlCol="0" anchor="ctr"/>
+          <a:lstStyle/>
+          <a:p>
+            <a:pPr algn="r" indent="0" marL="0">
+              <a:buNone/>
+            </a:pPr>
+            <a:r>
+              <a:rPr lang="en-US" sz="900" b="1" dirty="0">
+                <a:solidFill>
+                  <a:srgbClr val="B98A2E"/>
+                </a:solidFill>
+                <a:latin typeface="Arial" pitchFamily="34" charset="0"/>
+                <a:ea typeface="Arial" pitchFamily="34" charset="-122"/>
+                <a:cs typeface="Arial" pitchFamily="34" charset="-120"/>
+              </a:rPr>
+              <a:t>12</a:t>
+            </a:r>
+            <a:endParaRPr lang="en-US" sz="900" dirty="0"/>
+          </a:p>
+        </p:txBody>
+      </p:sp>
+    </p:spTree>
+  </p:cSld>
+  <p:clrMapOvr>
+    <a:masterClrMapping/>
+  </p:clrMapOvr>
+</p:sld>
+</file>
+
+<file path=ppt/slides/slide13.xml><?xml version="1.0" encoding="utf-8"?>
+<p:sld xmlns:a="http://schemas.openxmlformats.org/drawingml/2006/main" xmlns:r="http://schemas.openxmlformats.org/officeDocument/2006/relationships" xmlns:p="http://schemas.openxmlformats.org/presentationml/2006/main">
+  <p:cSld name="Slide 13">
     <p:bg>
       <p:bgPr>
         <a:solidFill>
@@ -4080,7 +4660,7 @@
         </p:nvSpPr>
         <p:spPr>
           <a:xfrm>
-            <a:off x="502920" y="457200"/>
+            <a:off x="566928" y="457200"/>
             <a:ext cx="384048" cy="384048"/>
           </a:xfrm>
           <a:prstGeom prst="ellipse">
@@ -4100,7 +4680,7 @@
         </p:nvSpPr>
         <p:spPr>
           <a:xfrm>
-            <a:off x="502920" y="457200"/>
+            <a:off x="566928" y="457200"/>
             <a:ext cx="384048" cy="384048"/>
           </a:xfrm>
           <a:prstGeom prst="rect">
@@ -4125,7 +4705,7 @@
                 <a:ea typeface="Arial" pitchFamily="34" charset="-122"/>
                 <a:cs typeface="Arial" pitchFamily="34" charset="-120"/>
               </a:rPr>
-              <a:t>12</a:t>
+              <a:t>13</a:t>
             </a:r>
             <a:endParaRPr lang="en-US" sz="1300" dirty="0"/>
           </a:p>
@@ -4139,7 +4719,7 @@
         </p:nvSpPr>
         <p:spPr>
           <a:xfrm>
-            <a:off x="1069848" y="457200"/>
+            <a:off x="1133856" y="457200"/>
             <a:ext cx="10490911" cy="182880"/>
           </a:xfrm>
           <a:prstGeom prst="rect">
@@ -4178,7 +4758,7 @@
         </p:nvSpPr>
         <p:spPr>
           <a:xfrm>
-            <a:off x="1069848" y="658368"/>
+            <a:off x="1133856" y="658368"/>
             <a:ext cx="10490911" cy="420624"/>
           </a:xfrm>
           <a:prstGeom prst="rect">
@@ -4188,7 +4768,9 @@
           <a:ln/>
         </p:spPr>
         <p:txBody>
-          <a:bodyPr wrap="square" lIns="0" tIns="0" rIns="0" bIns="0" rtlCol="0" anchor="ctr"/>
+          <a:bodyPr wrap="square" lIns="0" tIns="0" rIns="0" bIns="0" rtlCol="0" anchor="ctr">
+            <a:normAutofit/>
+          </a:bodyPr>
           <a:lstStyle/>
           <a:p>
             <a:pPr indent="0" marL="0">
@@ -4217,7 +4799,7 @@
         </p:nvSpPr>
         <p:spPr>
           <a:xfrm>
-            <a:off x="502920" y="1463040"/>
+            <a:off x="566928" y="1463040"/>
             <a:ext cx="3588410" cy="658368"/>
           </a:xfrm>
           <a:prstGeom prst="roundRect">
@@ -4239,7 +4821,7 @@
         </p:nvSpPr>
         <p:spPr>
           <a:xfrm>
-            <a:off x="612648" y="1572768"/>
+            <a:off x="676656" y="1572768"/>
             <a:ext cx="438912" cy="438912"/>
           </a:xfrm>
           <a:prstGeom prst="ellipse">
@@ -4259,7 +4841,7 @@
         </p:nvSpPr>
         <p:spPr>
           <a:xfrm>
-            <a:off x="612648" y="1572768"/>
+            <a:off x="676656" y="1572768"/>
             <a:ext cx="438912" cy="438912"/>
           </a:xfrm>
           <a:prstGeom prst="rect">
@@ -4298,7 +4880,7 @@
         </p:nvSpPr>
         <p:spPr>
           <a:xfrm>
-            <a:off x="1161288" y="1554480"/>
+            <a:off x="1225296" y="1554480"/>
             <a:ext cx="2820314" cy="237744"/>
           </a:xfrm>
           <a:prstGeom prst="rect">
@@ -4337,7 +4919,7 @@
         </p:nvSpPr>
         <p:spPr>
           <a:xfrm>
-            <a:off x="1161288" y="1792224"/>
+            <a:off x="1225296" y="1792224"/>
             <a:ext cx="2820314" cy="256032"/>
           </a:xfrm>
           <a:prstGeom prst="rect">
@@ -4376,7 +4958,7 @@
         </p:nvSpPr>
         <p:spPr>
           <a:xfrm>
-            <a:off x="4091330" y="1600200"/>
+            <a:off x="4155338" y="1600200"/>
             <a:ext cx="146304" cy="384048"/>
           </a:xfrm>
           <a:prstGeom prst="rect">
@@ -4415,7 +4997,7 @@
         </p:nvSpPr>
         <p:spPr>
           <a:xfrm>
-            <a:off x="4237634" y="1463040"/>
+            <a:off x="4301642" y="1463040"/>
             <a:ext cx="3588410" cy="658368"/>
           </a:xfrm>
           <a:prstGeom prst="roundRect">
@@ -4437,7 +5019,7 @@
         </p:nvSpPr>
         <p:spPr>
           <a:xfrm>
-            <a:off x="4347362" y="1572768"/>
+            <a:off x="4411370" y="1572768"/>
             <a:ext cx="438912" cy="438912"/>
           </a:xfrm>
           <a:prstGeom prst="ellipse">
@@ -4457,7 +5039,7 @@
         </p:nvSpPr>
         <p:spPr>
           <a:xfrm>
-            <a:off x="4347362" y="1572768"/>
+            <a:off x="4411370" y="1572768"/>
             <a:ext cx="438912" cy="438912"/>
           </a:xfrm>
           <a:prstGeom prst="rect">
@@ -4496,7 +5078,7 @@
         </p:nvSpPr>
         <p:spPr>
           <a:xfrm>
-            <a:off x="4896002" y="1554480"/>
+            <a:off x="4960010" y="1554480"/>
             <a:ext cx="2820314" cy="237744"/>
           </a:xfrm>
           <a:prstGeom prst="rect">
@@ -4535,7 +5117,7 @@
         </p:nvSpPr>
         <p:spPr>
           <a:xfrm>
-            <a:off x="4896002" y="1792224"/>
+            <a:off x="4960010" y="1792224"/>
             <a:ext cx="2820314" cy="256032"/>
           </a:xfrm>
           <a:prstGeom prst="rect">
@@ -4574,7 +5156,7 @@
         </p:nvSpPr>
         <p:spPr>
           <a:xfrm>
-            <a:off x="7826045" y="1600200"/>
+            <a:off x="7890053" y="1600200"/>
             <a:ext cx="146304" cy="384048"/>
           </a:xfrm>
           <a:prstGeom prst="rect">
@@ -4613,7 +5195,7 @@
         </p:nvSpPr>
         <p:spPr>
           <a:xfrm>
-            <a:off x="7972349" y="1463040"/>
+            <a:off x="8036357" y="1463040"/>
             <a:ext cx="3588410" cy="658368"/>
           </a:xfrm>
           <a:prstGeom prst="roundRect">
@@ -4635,7 +5217,7 @@
         </p:nvSpPr>
         <p:spPr>
           <a:xfrm>
-            <a:off x="8082077" y="1572768"/>
+            <a:off x="8146085" y="1572768"/>
             <a:ext cx="438912" cy="438912"/>
           </a:xfrm>
           <a:prstGeom prst="ellipse">
@@ -4655,7 +5237,7 @@
         </p:nvSpPr>
         <p:spPr>
           <a:xfrm>
-            <a:off x="8082077" y="1572768"/>
+            <a:off x="8146085" y="1572768"/>
             <a:ext cx="438912" cy="438912"/>
           </a:xfrm>
           <a:prstGeom prst="rect">
@@ -4694,7 +5276,7 @@
         </p:nvSpPr>
         <p:spPr>
           <a:xfrm>
-            <a:off x="8630717" y="1554480"/>
+            <a:off x="8694725" y="1554480"/>
             <a:ext cx="2820314" cy="237744"/>
           </a:xfrm>
           <a:prstGeom prst="rect">
@@ -4733,7 +5315,7 @@
         </p:nvSpPr>
         <p:spPr>
           <a:xfrm>
-            <a:off x="8630717" y="1792224"/>
+            <a:off x="8694725" y="1792224"/>
             <a:ext cx="2820314" cy="256032"/>
           </a:xfrm>
           <a:prstGeom prst="rect">
@@ -4772,7 +5354,7 @@
         </p:nvSpPr>
         <p:spPr>
           <a:xfrm>
-            <a:off x="502920" y="2395728"/>
+            <a:off x="566928" y="2395728"/>
             <a:ext cx="5486400" cy="237744"/>
           </a:xfrm>
           <a:prstGeom prst="rect">
@@ -4811,7 +5393,7 @@
         </p:nvSpPr>
         <p:spPr>
           <a:xfrm>
-            <a:off x="502920" y="2724912"/>
+            <a:off x="566928" y="2724912"/>
             <a:ext cx="1280160" cy="292608"/>
           </a:xfrm>
           <a:prstGeom prst="roundRect">
@@ -4833,7 +5415,7 @@
         </p:nvSpPr>
         <p:spPr>
           <a:xfrm>
-            <a:off x="502920" y="2724912"/>
+            <a:off x="566928" y="2724912"/>
             <a:ext cx="1280160" cy="292608"/>
           </a:xfrm>
           <a:prstGeom prst="rect">
@@ -4872,7 +5454,7 @@
         </p:nvSpPr>
         <p:spPr>
           <a:xfrm>
-            <a:off x="1929384" y="2706624"/>
+            <a:off x="1993392" y="2706624"/>
             <a:ext cx="3840480" cy="329184"/>
           </a:xfrm>
           <a:prstGeom prst="rect">
@@ -4911,7 +5493,7 @@
         </p:nvSpPr>
         <p:spPr>
           <a:xfrm>
-            <a:off x="502920" y="3127248"/>
+            <a:off x="566928" y="3127248"/>
             <a:ext cx="1280160" cy="292608"/>
           </a:xfrm>
           <a:prstGeom prst="roundRect">
@@ -4933,7 +5515,7 @@
         </p:nvSpPr>
         <p:spPr>
           <a:xfrm>
-            <a:off x="502920" y="3127248"/>
+            <a:off x="566928" y="3127248"/>
             <a:ext cx="1280160" cy="292608"/>
           </a:xfrm>
           <a:prstGeom prst="rect">
@@ -4972,7 +5554,7 @@
         </p:nvSpPr>
         <p:spPr>
           <a:xfrm>
-            <a:off x="1929384" y="3108960"/>
+            <a:off x="1993392" y="3108960"/>
             <a:ext cx="3840480" cy="329184"/>
           </a:xfrm>
           <a:prstGeom prst="rect">
@@ -5011,7 +5593,7 @@
         </p:nvSpPr>
         <p:spPr>
           <a:xfrm>
-            <a:off x="502920" y="3529584"/>
+            <a:off x="566928" y="3529584"/>
             <a:ext cx="1280160" cy="292608"/>
           </a:xfrm>
           <a:prstGeom prst="roundRect">
@@ -5033,7 +5615,7 @@
         </p:nvSpPr>
         <p:spPr>
           <a:xfrm>
-            <a:off x="502920" y="3529584"/>
+            <a:off x="566928" y="3529584"/>
             <a:ext cx="1280160" cy="292608"/>
           </a:xfrm>
           <a:prstGeom prst="rect">
@@ -5072,7 +5654,7 @@
         </p:nvSpPr>
         <p:spPr>
           <a:xfrm>
-            <a:off x="1929384" y="3511296"/>
+            <a:off x="1993392" y="3511296"/>
             <a:ext cx="3840480" cy="329184"/>
           </a:xfrm>
           <a:prstGeom prst="rect">
@@ -5111,7 +5693,7 @@
         </p:nvSpPr>
         <p:spPr>
           <a:xfrm>
-            <a:off x="502920" y="3931920"/>
+            <a:off x="566928" y="3931920"/>
             <a:ext cx="1280160" cy="292608"/>
           </a:xfrm>
           <a:prstGeom prst="roundRect">
@@ -5133,7 +5715,7 @@
         </p:nvSpPr>
         <p:spPr>
           <a:xfrm>
-            <a:off x="502920" y="3931920"/>
+            <a:off x="566928" y="3931920"/>
             <a:ext cx="1280160" cy="292608"/>
           </a:xfrm>
           <a:prstGeom prst="rect">
@@ -5172,7 +5754,7 @@
         </p:nvSpPr>
         <p:spPr>
           <a:xfrm>
-            <a:off x="1929384" y="3913632"/>
+            <a:off x="1993392" y="3913632"/>
             <a:ext cx="3840480" cy="329184"/>
           </a:xfrm>
           <a:prstGeom prst="rect">
@@ -5211,7 +5793,7 @@
         </p:nvSpPr>
         <p:spPr>
           <a:xfrm>
-            <a:off x="502920" y="4334256"/>
+            <a:off x="566928" y="4334256"/>
             <a:ext cx="1280160" cy="292608"/>
           </a:xfrm>
           <a:prstGeom prst="roundRect">
@@ -5233,7 +5815,7 @@
         </p:nvSpPr>
         <p:spPr>
           <a:xfrm>
-            <a:off x="502920" y="4334256"/>
+            <a:off x="566928" y="4334256"/>
             <a:ext cx="1280160" cy="292608"/>
           </a:xfrm>
           <a:prstGeom prst="rect">
@@ -5272,7 +5854,7 @@
         </p:nvSpPr>
         <p:spPr>
           <a:xfrm>
-            <a:off x="1929384" y="4315968"/>
+            <a:off x="1993392" y="4315968"/>
             <a:ext cx="3840480" cy="329184"/>
           </a:xfrm>
           <a:prstGeom prst="rect">
@@ -5414,7 +5996,7 @@
         </p:nvSpPr>
         <p:spPr>
           <a:xfrm>
-            <a:off x="502920" y="5760720"/>
+            <a:off x="566928" y="5760720"/>
             <a:ext cx="11057839" cy="457200"/>
           </a:xfrm>
           <a:prstGeom prst="rect">
@@ -5434,7 +6016,7 @@
         </p:nvSpPr>
         <p:spPr>
           <a:xfrm>
-            <a:off x="685800" y="5806440"/>
+            <a:off x="749808" y="5806440"/>
             <a:ext cx="10692079" cy="365760"/>
           </a:xfrm>
           <a:prstGeom prst="rect">
@@ -5473,7 +6055,7 @@
         </p:nvSpPr>
         <p:spPr>
           <a:xfrm>
-            <a:off x="502920" y="6382512"/>
+            <a:off x="566928" y="6382512"/>
             <a:ext cx="7315200" cy="219456"/>
           </a:xfrm>
           <a:prstGeom prst="rect">
@@ -5512,7 +6094,7 @@
         </p:nvSpPr>
         <p:spPr>
           <a:xfrm>
-            <a:off x="10774375" y="6382512"/>
+            <a:off x="10710367" y="6382512"/>
             <a:ext cx="914400" cy="219456"/>
           </a:xfrm>
           <a:prstGeom prst="rect">
@@ -5537,7 +6119,7 @@
                 <a:ea typeface="Arial" pitchFamily="34" charset="-122"/>
                 <a:cs typeface="Arial" pitchFamily="34" charset="-120"/>
               </a:rPr>
-              <a:t>12</a:t>
+              <a:t>13</a:t>
             </a:r>
             <a:endParaRPr lang="en-US" sz="900" dirty="0"/>
           </a:p>
@@ -5583,7 +6165,7 @@
         </p:nvSpPr>
         <p:spPr>
           <a:xfrm>
-            <a:off x="502920" y="457200"/>
+            <a:off x="566928" y="457200"/>
             <a:ext cx="384048" cy="384048"/>
           </a:xfrm>
           <a:prstGeom prst="ellipse">
@@ -5603,7 +6185,7 @@
         </p:nvSpPr>
         <p:spPr>
           <a:xfrm>
-            <a:off x="502920" y="457200"/>
+            <a:off x="566928" y="457200"/>
             <a:ext cx="384048" cy="384048"/>
           </a:xfrm>
           <a:prstGeom prst="rect">
@@ -5642,7 +6224,7 @@
         </p:nvSpPr>
         <p:spPr>
           <a:xfrm>
-            <a:off x="1069848" y="457200"/>
+            <a:off x="1133856" y="457200"/>
             <a:ext cx="10490911" cy="182880"/>
           </a:xfrm>
           <a:prstGeom prst="rect">
@@ -5681,7 +6263,7 @@
         </p:nvSpPr>
         <p:spPr>
           <a:xfrm>
-            <a:off x="1069848" y="640080"/>
+            <a:off x="1133856" y="640080"/>
             <a:ext cx="10490911" cy="365760"/>
           </a:xfrm>
           <a:prstGeom prst="rect">
@@ -5691,7 +6273,9 @@
           <a:ln/>
         </p:spPr>
         <p:txBody>
-          <a:bodyPr wrap="square" lIns="0" tIns="0" rIns="0" bIns="0" rtlCol="0" anchor="ctr"/>
+          <a:bodyPr wrap="square" lIns="0" tIns="0" rIns="0" bIns="0" rtlCol="0" anchor="ctr">
+            <a:normAutofit/>
+          </a:bodyPr>
           <a:lstStyle/>
           <a:p>
             <a:pPr indent="0" marL="0">
@@ -5720,17 +6304,19 @@
         </p:nvSpPr>
         <p:spPr>
           <a:xfrm>
-            <a:off x="502920" y="1188720"/>
-            <a:ext cx="11057839" cy="457200"/>
-          </a:xfrm>
-          <a:prstGeom prst="rect">
-            <a:avLst/>
-          </a:prstGeom>
-          <a:noFill/>
-          <a:ln/>
-        </p:spPr>
-        <p:txBody>
-          <a:bodyPr wrap="square" rtlCol="0" anchor="ctr"/>
+            <a:off x="566928" y="1188720"/>
+            <a:ext cx="11057839" cy="219075"/>
+          </a:xfrm>
+          <a:prstGeom prst="rect">
+            <a:avLst/>
+          </a:prstGeom>
+          <a:noFill/>
+          <a:ln/>
+        </p:spPr>
+        <p:txBody>
+          <a:bodyPr wrap="square" lIns="0" tIns="0" rIns="0" bIns="0" rtlCol="0" anchor="ctr">
+            <a:normAutofit/>
+          </a:bodyPr>
           <a:lstStyle/>
           <a:p>
             <a:pPr indent="0" marL="0">
@@ -5759,7 +6345,7 @@
         </p:nvSpPr>
         <p:spPr>
           <a:xfrm>
-            <a:off x="502920" y="1691640"/>
+            <a:off x="566928" y="1480947"/>
             <a:ext cx="11057839" cy="0"/>
           </a:xfrm>
           <a:prstGeom prst="line">
@@ -5782,7 +6368,7 @@
         </p:nvSpPr>
         <p:spPr>
           <a:xfrm>
-            <a:off x="502920" y="1965960"/>
+            <a:off x="566928" y="1618107"/>
             <a:ext cx="2641016" cy="960120"/>
           </a:xfrm>
           <a:prstGeom prst="roundRect">
@@ -5809,7 +6395,7 @@
         </p:nvSpPr>
         <p:spPr>
           <a:xfrm>
-            <a:off x="667512" y="2093976"/>
+            <a:off x="731520" y="1746123"/>
             <a:ext cx="2311832" cy="201168"/>
           </a:xfrm>
           <a:prstGeom prst="rect">
@@ -5819,7 +6405,9 @@
           <a:ln/>
         </p:spPr>
         <p:txBody>
-          <a:bodyPr wrap="square" lIns="0" tIns="0" rIns="0" bIns="0" rtlCol="0" anchor="ctr"/>
+          <a:bodyPr wrap="square" lIns="0" tIns="0" rIns="0" bIns="0" rtlCol="0" anchor="ctr">
+            <a:normAutofit/>
+          </a:bodyPr>
           <a:lstStyle/>
           <a:p>
             <a:pPr indent="0" marL="0">
@@ -5848,8 +6436,8 @@
         </p:nvSpPr>
         <p:spPr>
           <a:xfrm>
-            <a:off x="667512" y="2313432"/>
-            <a:ext cx="2311832" cy="274320"/>
+            <a:off x="731520" y="1965579"/>
+            <a:ext cx="2311832" cy="279400"/>
           </a:xfrm>
           <a:prstGeom prst="rect">
             <a:avLst/>
@@ -5892,7 +6480,7 @@
         </p:nvSpPr>
         <p:spPr>
           <a:xfrm>
-            <a:off x="3308528" y="1965960"/>
+            <a:off x="3372536" y="1618107"/>
             <a:ext cx="2641016" cy="960120"/>
           </a:xfrm>
           <a:prstGeom prst="roundRect">
@@ -5919,7 +6507,7 @@
         </p:nvSpPr>
         <p:spPr>
           <a:xfrm>
-            <a:off x="3473120" y="2093976"/>
+            <a:off x="3537128" y="1746123"/>
             <a:ext cx="2311832" cy="201168"/>
           </a:xfrm>
           <a:prstGeom prst="rect">
@@ -5929,7 +6517,9 @@
           <a:ln/>
         </p:spPr>
         <p:txBody>
-          <a:bodyPr wrap="square" lIns="0" tIns="0" rIns="0" bIns="0" rtlCol="0" anchor="ctr"/>
+          <a:bodyPr wrap="square" lIns="0" tIns="0" rIns="0" bIns="0" rtlCol="0" anchor="ctr">
+            <a:normAutofit/>
+          </a:bodyPr>
           <a:lstStyle/>
           <a:p>
             <a:pPr indent="0" marL="0">
@@ -5958,8 +6548,8 @@
         </p:nvSpPr>
         <p:spPr>
           <a:xfrm>
-            <a:off x="3473120" y="2313432"/>
-            <a:ext cx="2311832" cy="274320"/>
+            <a:off x="3537128" y="1965579"/>
+            <a:ext cx="2311832" cy="279400"/>
           </a:xfrm>
           <a:prstGeom prst="rect">
             <a:avLst/>
@@ -6002,7 +6592,7 @@
         </p:nvSpPr>
         <p:spPr>
           <a:xfrm>
-            <a:off x="6114136" y="1965960"/>
+            <a:off x="6178144" y="1618107"/>
             <a:ext cx="2641016" cy="960120"/>
           </a:xfrm>
           <a:prstGeom prst="roundRect">
@@ -6029,7 +6619,7 @@
         </p:nvSpPr>
         <p:spPr>
           <a:xfrm>
-            <a:off x="6278728" y="2093976"/>
+            <a:off x="6342736" y="1746123"/>
             <a:ext cx="2311832" cy="201168"/>
           </a:xfrm>
           <a:prstGeom prst="rect">
@@ -6039,7 +6629,9 @@
           <a:ln/>
         </p:spPr>
         <p:txBody>
-          <a:bodyPr wrap="square" lIns="0" tIns="0" rIns="0" bIns="0" rtlCol="0" anchor="ctr"/>
+          <a:bodyPr wrap="square" lIns="0" tIns="0" rIns="0" bIns="0" rtlCol="0" anchor="ctr">
+            <a:normAutofit/>
+          </a:bodyPr>
           <a:lstStyle/>
           <a:p>
             <a:pPr indent="0" marL="0">
@@ -6068,8 +6660,8 @@
         </p:nvSpPr>
         <p:spPr>
           <a:xfrm>
-            <a:off x="6278728" y="2313432"/>
-            <a:ext cx="2311832" cy="274320"/>
+            <a:off x="6342736" y="1965579"/>
+            <a:ext cx="2311832" cy="279400"/>
           </a:xfrm>
           <a:prstGeom prst="rect">
             <a:avLst/>
@@ -6112,7 +6704,7 @@
         </p:nvSpPr>
         <p:spPr>
           <a:xfrm>
-            <a:off x="8919743" y="1965960"/>
+            <a:off x="8983751" y="1618107"/>
             <a:ext cx="2641016" cy="960120"/>
           </a:xfrm>
           <a:prstGeom prst="roundRect">
@@ -6139,7 +6731,7 @@
         </p:nvSpPr>
         <p:spPr>
           <a:xfrm>
-            <a:off x="9084335" y="2093976"/>
+            <a:off x="9148343" y="1746123"/>
             <a:ext cx="2311832" cy="201168"/>
           </a:xfrm>
           <a:prstGeom prst="rect">
@@ -6149,7 +6741,9 @@
           <a:ln/>
         </p:spPr>
         <p:txBody>
-          <a:bodyPr wrap="square" lIns="0" tIns="0" rIns="0" bIns="0" rtlCol="0" anchor="ctr"/>
+          <a:bodyPr wrap="square" lIns="0" tIns="0" rIns="0" bIns="0" rtlCol="0" anchor="ctr">
+            <a:normAutofit/>
+          </a:bodyPr>
           <a:lstStyle/>
           <a:p>
             <a:pPr indent="0" marL="0">
@@ -6178,8 +6772,8 @@
         </p:nvSpPr>
         <p:spPr>
           <a:xfrm>
-            <a:off x="9084335" y="2313432"/>
-            <a:ext cx="2311832" cy="274320"/>
+            <a:off x="9148343" y="1965579"/>
+            <a:ext cx="2311832" cy="279400"/>
           </a:xfrm>
           <a:prstGeom prst="rect">
             <a:avLst/>
@@ -6222,7 +6816,7 @@
         </p:nvSpPr>
         <p:spPr>
           <a:xfrm>
-            <a:off x="502920" y="3090672"/>
+            <a:off x="566928" y="2742819"/>
             <a:ext cx="2641016" cy="960120"/>
           </a:xfrm>
           <a:prstGeom prst="roundRect">
@@ -6249,7 +6843,7 @@
         </p:nvSpPr>
         <p:spPr>
           <a:xfrm>
-            <a:off x="667512" y="3218688"/>
+            <a:off x="731520" y="2870835"/>
             <a:ext cx="2311832" cy="201168"/>
           </a:xfrm>
           <a:prstGeom prst="rect">
@@ -6259,7 +6853,9 @@
           <a:ln/>
         </p:spPr>
         <p:txBody>
-          <a:bodyPr wrap="square" lIns="0" tIns="0" rIns="0" bIns="0" rtlCol="0" anchor="ctr"/>
+          <a:bodyPr wrap="square" lIns="0" tIns="0" rIns="0" bIns="0" rtlCol="0" anchor="ctr">
+            <a:normAutofit/>
+          </a:bodyPr>
           <a:lstStyle/>
           <a:p>
             <a:pPr indent="0" marL="0">
@@ -6288,8 +6884,8 @@
         </p:nvSpPr>
         <p:spPr>
           <a:xfrm>
-            <a:off x="667512" y="3438144"/>
-            <a:ext cx="2311832" cy="274320"/>
+            <a:off x="731520" y="3090291"/>
+            <a:ext cx="2311832" cy="279400"/>
           </a:xfrm>
           <a:prstGeom prst="rect">
             <a:avLst/>
@@ -6332,7 +6928,7 @@
         </p:nvSpPr>
         <p:spPr>
           <a:xfrm>
-            <a:off x="3308528" y="3090672"/>
+            <a:off x="3372536" y="2742819"/>
             <a:ext cx="2641016" cy="960120"/>
           </a:xfrm>
           <a:prstGeom prst="roundRect">
@@ -6359,7 +6955,7 @@
         </p:nvSpPr>
         <p:spPr>
           <a:xfrm>
-            <a:off x="3473120" y="3218688"/>
+            <a:off x="3537128" y="2870835"/>
             <a:ext cx="2311832" cy="201168"/>
           </a:xfrm>
           <a:prstGeom prst="rect">
@@ -6369,7 +6965,9 @@
           <a:ln/>
         </p:spPr>
         <p:txBody>
-          <a:bodyPr wrap="square" lIns="0" tIns="0" rIns="0" bIns="0" rtlCol="0" anchor="ctr"/>
+          <a:bodyPr wrap="square" lIns="0" tIns="0" rIns="0" bIns="0" rtlCol="0" anchor="ctr">
+            <a:normAutofit/>
+          </a:bodyPr>
           <a:lstStyle/>
           <a:p>
             <a:pPr indent="0" marL="0">
@@ -6398,8 +6996,8 @@
         </p:nvSpPr>
         <p:spPr>
           <a:xfrm>
-            <a:off x="3473120" y="3438144"/>
-            <a:ext cx="2311832" cy="274320"/>
+            <a:off x="3537128" y="3090291"/>
+            <a:ext cx="2311832" cy="279400"/>
           </a:xfrm>
           <a:prstGeom prst="rect">
             <a:avLst/>
@@ -6442,7 +7040,7 @@
         </p:nvSpPr>
         <p:spPr>
           <a:xfrm>
-            <a:off x="6114136" y="3090672"/>
+            <a:off x="6178144" y="2742819"/>
             <a:ext cx="2641016" cy="960120"/>
           </a:xfrm>
           <a:prstGeom prst="roundRect">
@@ -6469,7 +7067,7 @@
         </p:nvSpPr>
         <p:spPr>
           <a:xfrm>
-            <a:off x="6278728" y="3218688"/>
+            <a:off x="6342736" y="2870835"/>
             <a:ext cx="2311832" cy="201168"/>
           </a:xfrm>
           <a:prstGeom prst="rect">
@@ -6479,7 +7077,9 @@
           <a:ln/>
         </p:spPr>
         <p:txBody>
-          <a:bodyPr wrap="square" lIns="0" tIns="0" rIns="0" bIns="0" rtlCol="0" anchor="ctr"/>
+          <a:bodyPr wrap="square" lIns="0" tIns="0" rIns="0" bIns="0" rtlCol="0" anchor="ctr">
+            <a:normAutofit/>
+          </a:bodyPr>
           <a:lstStyle/>
           <a:p>
             <a:pPr indent="0" marL="0">
@@ -6508,8 +7108,8 @@
         </p:nvSpPr>
         <p:spPr>
           <a:xfrm>
-            <a:off x="6278728" y="3438144"/>
-            <a:ext cx="2311832" cy="274320"/>
+            <a:off x="6342736" y="3090291"/>
+            <a:ext cx="2311832" cy="279400"/>
           </a:xfrm>
           <a:prstGeom prst="rect">
             <a:avLst/>
@@ -6552,7 +7152,7 @@
         </p:nvSpPr>
         <p:spPr>
           <a:xfrm>
-            <a:off x="502920" y="4306824"/>
+            <a:off x="566928" y="3958971"/>
             <a:ext cx="11057839" cy="274320"/>
           </a:xfrm>
           <a:prstGeom prst="rect">
@@ -6591,12 +7191,12 @@
         </p:nvSpPr>
         <p:spPr>
           <a:xfrm>
-            <a:off x="502920" y="4636008"/>
-            <a:ext cx="11057839" cy="396240"/>
+            <a:off x="566928" y="4288155"/>
+            <a:ext cx="11057839" cy="512191"/>
           </a:xfrm>
           <a:prstGeom prst="roundRect">
             <a:avLst>
-              <a:gd name="adj" fmla="val 11538"/>
+              <a:gd name="adj" fmla="val 8926"/>
             </a:avLst>
           </a:prstGeom>
           <a:solidFill>
@@ -6618,12 +7218,12 @@
         </p:nvSpPr>
         <p:spPr>
           <a:xfrm>
-            <a:off x="612648" y="4709160"/>
-            <a:ext cx="411480" cy="249936"/>
+            <a:off x="676656" y="4361371"/>
+            <a:ext cx="411480" cy="365760"/>
           </a:xfrm>
           <a:prstGeom prst="roundRect">
             <a:avLst>
-              <a:gd name="adj" fmla="val 14634"/>
+              <a:gd name="adj" fmla="val 10000"/>
             </a:avLst>
           </a:prstGeom>
           <a:solidFill>
@@ -6645,8 +7245,8 @@
         </p:nvSpPr>
         <p:spPr>
           <a:xfrm>
-            <a:off x="612648" y="4709160"/>
-            <a:ext cx="411480" cy="249936"/>
+            <a:off x="676656" y="4361371"/>
+            <a:ext cx="411480" cy="365760"/>
           </a:xfrm>
           <a:prstGeom prst="rect">
             <a:avLst/>
@@ -6684,8 +7284,8 @@
         </p:nvSpPr>
         <p:spPr>
           <a:xfrm>
-            <a:off x="1143000" y="4672584"/>
-            <a:ext cx="10280599" cy="323088"/>
+            <a:off x="1207008" y="4324731"/>
+            <a:ext cx="10280599" cy="439039"/>
           </a:xfrm>
           <a:prstGeom prst="rect">
             <a:avLst/>
@@ -6701,7 +7301,7 @@
               <a:buNone/>
             </a:pPr>
             <a:r>
-              <a:rPr lang="en-US" sz="1000" dirty="0">
+              <a:rPr lang="en-US" sz="1150" dirty="0">
                 <a:solidFill>
                   <a:srgbClr val="10161F"/>
                 </a:solidFill>
@@ -6711,7 +7311,7 @@
               </a:rPr>
               <a:t>입지 가치: 대중교통 역세권 입지, 해당 권역 업무·상업 중심지 배후 수요 확보</a:t>
             </a:r>
-            <a:endParaRPr lang="en-US" sz="1000" dirty="0"/>
+            <a:endParaRPr lang="en-US" sz="1150" dirty="0"/>
           </a:p>
         </p:txBody>
       </p:sp>
@@ -6723,12 +7323,12 @@
         </p:nvSpPr>
         <p:spPr>
           <a:xfrm>
-            <a:off x="502920" y="5114544"/>
-            <a:ext cx="11057839" cy="396240"/>
+            <a:off x="566928" y="4882642"/>
+            <a:ext cx="11057839" cy="512191"/>
           </a:xfrm>
           <a:prstGeom prst="roundRect">
             <a:avLst>
-              <a:gd name="adj" fmla="val 11538"/>
+              <a:gd name="adj" fmla="val 8926"/>
             </a:avLst>
           </a:prstGeom>
           <a:solidFill>
@@ -6750,12 +7350,12 @@
         </p:nvSpPr>
         <p:spPr>
           <a:xfrm>
-            <a:off x="612648" y="5187696"/>
-            <a:ext cx="411480" cy="249936"/>
+            <a:off x="676656" y="4955858"/>
+            <a:ext cx="411480" cy="365760"/>
           </a:xfrm>
           <a:prstGeom prst="roundRect">
             <a:avLst>
-              <a:gd name="adj" fmla="val 14634"/>
+              <a:gd name="adj" fmla="val 10000"/>
             </a:avLst>
           </a:prstGeom>
           <a:solidFill>
@@ -6777,8 +7377,8 @@
         </p:nvSpPr>
         <p:spPr>
           <a:xfrm>
-            <a:off x="612648" y="5187696"/>
-            <a:ext cx="411480" cy="249936"/>
+            <a:off x="676656" y="4955858"/>
+            <a:ext cx="411480" cy="365760"/>
           </a:xfrm>
           <a:prstGeom prst="rect">
             <a:avLst/>
@@ -6816,8 +7416,8 @@
         </p:nvSpPr>
         <p:spPr>
           <a:xfrm>
-            <a:off x="1143000" y="5151120"/>
-            <a:ext cx="10280599" cy="323088"/>
+            <a:off x="1207008" y="4919218"/>
+            <a:ext cx="10280599" cy="439039"/>
           </a:xfrm>
           <a:prstGeom prst="rect">
             <a:avLst/>
@@ -6833,7 +7433,7 @@
               <a:buNone/>
             </a:pPr>
             <a:r>
-              <a:rPr lang="en-US" sz="1000" dirty="0">
+              <a:rPr lang="en-US" sz="1150" dirty="0">
                 <a:solidFill>
                   <a:srgbClr val="10161F"/>
                 </a:solidFill>
@@ -6843,7 +7443,7 @@
               </a:rPr>
               <a:t>자산 규모: 해당 권역 소재 단독 빌딩 매입 기회</a:t>
             </a:r>
-            <a:endParaRPr lang="en-US" sz="1000" dirty="0"/>
+            <a:endParaRPr lang="en-US" sz="1150" dirty="0"/>
           </a:p>
         </p:txBody>
       </p:sp>
@@ -6855,12 +7455,12 @@
         </p:nvSpPr>
         <p:spPr>
           <a:xfrm>
-            <a:off x="502920" y="5593080"/>
-            <a:ext cx="11057839" cy="396240"/>
+            <a:off x="566928" y="5477129"/>
+            <a:ext cx="11057839" cy="512191"/>
           </a:xfrm>
           <a:prstGeom prst="roundRect">
             <a:avLst>
-              <a:gd name="adj" fmla="val 11538"/>
+              <a:gd name="adj" fmla="val 8926"/>
             </a:avLst>
           </a:prstGeom>
           <a:solidFill>
@@ -6882,12 +7482,12 @@
         </p:nvSpPr>
         <p:spPr>
           <a:xfrm>
-            <a:off x="612648" y="5666232"/>
-            <a:ext cx="411480" cy="249936"/>
+            <a:off x="676656" y="5550345"/>
+            <a:ext cx="411480" cy="365760"/>
           </a:xfrm>
           <a:prstGeom prst="roundRect">
             <a:avLst>
-              <a:gd name="adj" fmla="val 14634"/>
+              <a:gd name="adj" fmla="val 10000"/>
             </a:avLst>
           </a:prstGeom>
           <a:solidFill>
@@ -6909,8 +7509,8 @@
         </p:nvSpPr>
         <p:spPr>
           <a:xfrm>
-            <a:off x="612648" y="5666232"/>
-            <a:ext cx="411480" cy="249936"/>
+            <a:off x="676656" y="5550345"/>
+            <a:ext cx="411480" cy="365760"/>
           </a:xfrm>
           <a:prstGeom prst="rect">
             <a:avLst/>
@@ -6948,8 +7548,8 @@
         </p:nvSpPr>
         <p:spPr>
           <a:xfrm>
-            <a:off x="1143000" y="5629656"/>
-            <a:ext cx="10280599" cy="323088"/>
+            <a:off x="1207008" y="5513705"/>
+            <a:ext cx="10280599" cy="439039"/>
           </a:xfrm>
           <a:prstGeom prst="rect">
             <a:avLst/>
@@ -6965,7 +7565,7 @@
               <a:buNone/>
             </a:pPr>
             <a:r>
-              <a:rPr lang="en-US" sz="1000" dirty="0">
+              <a:rPr lang="en-US" sz="1150" dirty="0">
                 <a:solidFill>
                   <a:srgbClr val="10161F"/>
                 </a:solidFill>
@@ -6975,7 +7575,7 @@
               </a:rPr>
               <a:t>수익 안정성: 안정적 임대수익 기반 투자 매물</a:t>
             </a:r>
-            <a:endParaRPr lang="en-US" sz="1000" dirty="0"/>
+            <a:endParaRPr lang="en-US" sz="1150" dirty="0"/>
           </a:p>
         </p:txBody>
       </p:sp>
@@ -6987,7 +7587,7 @@
         </p:nvSpPr>
         <p:spPr>
           <a:xfrm>
-            <a:off x="502920" y="6382512"/>
+            <a:off x="566928" y="6382512"/>
             <a:ext cx="7315200" cy="219456"/>
           </a:xfrm>
           <a:prstGeom prst="rect">
@@ -7026,7 +7626,7 @@
         </p:nvSpPr>
         <p:spPr>
           <a:xfrm>
-            <a:off x="10774375" y="6382512"/>
+            <a:off x="10710367" y="6382512"/>
             <a:ext cx="914400" cy="219456"/>
           </a:xfrm>
           <a:prstGeom prst="rect">
@@ -7097,7 +7697,7 @@
         </p:nvSpPr>
         <p:spPr>
           <a:xfrm>
-            <a:off x="502920" y="457200"/>
+            <a:off x="566928" y="457200"/>
             <a:ext cx="384048" cy="384048"/>
           </a:xfrm>
           <a:prstGeom prst="ellipse">
@@ -7117,7 +7717,7 @@
         </p:nvSpPr>
         <p:spPr>
           <a:xfrm>
-            <a:off x="502920" y="457200"/>
+            <a:off x="566928" y="457200"/>
             <a:ext cx="384048" cy="384048"/>
           </a:xfrm>
           <a:prstGeom prst="rect">
@@ -7156,7 +7756,7 @@
         </p:nvSpPr>
         <p:spPr>
           <a:xfrm>
-            <a:off x="1069848" y="457200"/>
+            <a:off x="1133856" y="457200"/>
             <a:ext cx="10490911" cy="182880"/>
           </a:xfrm>
           <a:prstGeom prst="rect">
@@ -7195,7 +7795,7 @@
         </p:nvSpPr>
         <p:spPr>
           <a:xfrm>
-            <a:off x="1069848" y="640080"/>
+            <a:off x="1133856" y="640080"/>
             <a:ext cx="10490911" cy="365760"/>
           </a:xfrm>
           <a:prstGeom prst="rect">
@@ -7205,7 +7805,9 @@
           <a:ln/>
         </p:spPr>
         <p:txBody>
-          <a:bodyPr wrap="square" lIns="0" tIns="0" rIns="0" bIns="0" rtlCol="0" anchor="ctr"/>
+          <a:bodyPr wrap="square" lIns="0" tIns="0" rIns="0" bIns="0" rtlCol="0" anchor="ctr">
+            <a:normAutofit/>
+          </a:bodyPr>
           <a:lstStyle/>
           <a:p>
             <a:pPr indent="0" marL="0">
@@ -7242,7 +7844,7 @@
         </p:blipFill>
         <p:spPr>
           <a:xfrm>
-            <a:off x="502920" y="1481328"/>
+            <a:off x="566928" y="1481328"/>
             <a:ext cx="5120640" cy="4114800"/>
           </a:xfrm>
           <a:prstGeom prst="rect">
@@ -7258,7 +7860,7 @@
         </p:nvSpPr>
         <p:spPr>
           <a:xfrm>
-            <a:off x="5989320" y="1481328"/>
+            <a:off x="6053328" y="1481328"/>
             <a:ext cx="1560003" cy="457200"/>
           </a:xfrm>
           <a:prstGeom prst="rect">
@@ -7268,7 +7870,9 @@
           <a:ln/>
         </p:spPr>
         <p:txBody>
-          <a:bodyPr wrap="square" lIns="0" tIns="0" rIns="0" bIns="0" rtlCol="0" anchor="ctr"/>
+          <a:bodyPr wrap="square" lIns="0" tIns="0" rIns="0" bIns="0" rtlCol="0" anchor="ctr">
+            <a:normAutofit/>
+          </a:bodyPr>
           <a:lstStyle/>
           <a:p>
             <a:pPr indent="0" marL="0">
@@ -7300,7 +7904,7 @@
         </p:nvSpPr>
         <p:spPr>
           <a:xfrm>
-            <a:off x="7549323" y="1481328"/>
+            <a:off x="7613331" y="1481328"/>
             <a:ext cx="4011436" cy="457200"/>
           </a:xfrm>
           <a:prstGeom prst="rect">
@@ -7310,7 +7914,9 @@
           <a:ln/>
         </p:spPr>
         <p:txBody>
-          <a:bodyPr wrap="square" lIns="0" tIns="0" rIns="0" bIns="0" rtlCol="0" anchor="ctr"/>
+          <a:bodyPr wrap="square" lIns="0" tIns="0" rIns="0" bIns="0" rtlCol="0" anchor="ctr">
+            <a:normAutofit/>
+          </a:bodyPr>
           <a:lstStyle/>
           <a:p>
             <a:pPr indent="0" marL="0">
@@ -7342,7 +7948,7 @@
         </p:nvSpPr>
         <p:spPr>
           <a:xfrm>
-            <a:off x="5989320" y="1938528"/>
+            <a:off x="6053328" y="1938528"/>
             <a:ext cx="5571439" cy="0"/>
           </a:xfrm>
           <a:prstGeom prst="line">
@@ -7365,7 +7971,7 @@
         </p:nvSpPr>
         <p:spPr>
           <a:xfrm>
-            <a:off x="5989320" y="1938528"/>
+            <a:off x="6053328" y="1938528"/>
             <a:ext cx="1560003" cy="457200"/>
           </a:xfrm>
           <a:prstGeom prst="rect">
@@ -7375,7 +7981,9 @@
           <a:ln/>
         </p:spPr>
         <p:txBody>
-          <a:bodyPr wrap="square" lIns="0" tIns="0" rIns="0" bIns="0" rtlCol="0" anchor="ctr"/>
+          <a:bodyPr wrap="square" lIns="0" tIns="0" rIns="0" bIns="0" rtlCol="0" anchor="ctr">
+            <a:normAutofit/>
+          </a:bodyPr>
           <a:lstStyle/>
           <a:p>
             <a:pPr indent="0" marL="0">
@@ -7407,7 +8015,7 @@
         </p:nvSpPr>
         <p:spPr>
           <a:xfrm>
-            <a:off x="7549323" y="1938528"/>
+            <a:off x="7613331" y="1938528"/>
             <a:ext cx="4011436" cy="457200"/>
           </a:xfrm>
           <a:prstGeom prst="rect">
@@ -7417,7 +8025,9 @@
           <a:ln/>
         </p:spPr>
         <p:txBody>
-          <a:bodyPr wrap="square" lIns="0" tIns="0" rIns="0" bIns="0" rtlCol="0" anchor="ctr"/>
+          <a:bodyPr wrap="square" lIns="0" tIns="0" rIns="0" bIns="0" rtlCol="0" anchor="ctr">
+            <a:normAutofit/>
+          </a:bodyPr>
           <a:lstStyle/>
           <a:p>
             <a:pPr indent="0" marL="0">
@@ -7449,7 +8059,7 @@
         </p:nvSpPr>
         <p:spPr>
           <a:xfrm>
-            <a:off x="5989320" y="2505456"/>
+            <a:off x="6053328" y="2505456"/>
             <a:ext cx="5571439" cy="658368"/>
           </a:xfrm>
           <a:prstGeom prst="roundRect">
@@ -7471,7 +8081,7 @@
         </p:nvSpPr>
         <p:spPr>
           <a:xfrm>
-            <a:off x="5989320" y="2560320"/>
+            <a:off x="6053328" y="2560320"/>
             <a:ext cx="36576" cy="548640"/>
           </a:xfrm>
           <a:prstGeom prst="rect">
@@ -7491,7 +8101,7 @@
         </p:nvSpPr>
         <p:spPr>
           <a:xfrm>
-            <a:off x="6135624" y="2596896"/>
+            <a:off x="6199632" y="2596896"/>
             <a:ext cx="5315407" cy="201168"/>
           </a:xfrm>
           <a:prstGeom prst="rect">
@@ -7530,7 +8140,7 @@
         </p:nvSpPr>
         <p:spPr>
           <a:xfrm>
-            <a:off x="6135624" y="2798064"/>
+            <a:off x="6199632" y="2798064"/>
             <a:ext cx="5315407" cy="329184"/>
           </a:xfrm>
           <a:prstGeom prst="rect">
@@ -7573,7 +8183,7 @@
         </p:nvSpPr>
         <p:spPr>
           <a:xfrm>
-            <a:off x="502920" y="6382512"/>
+            <a:off x="566928" y="6382512"/>
             <a:ext cx="7315200" cy="219456"/>
           </a:xfrm>
           <a:prstGeom prst="rect">
@@ -7612,7 +8222,7 @@
         </p:nvSpPr>
         <p:spPr>
           <a:xfrm>
-            <a:off x="10774375" y="6382512"/>
+            <a:off x="10710367" y="6382512"/>
             <a:ext cx="914400" cy="219456"/>
           </a:xfrm>
           <a:prstGeom prst="rect">
@@ -7683,7 +8293,7 @@
         </p:nvSpPr>
         <p:spPr>
           <a:xfrm>
-            <a:off x="502920" y="457200"/>
+            <a:off x="566928" y="457200"/>
             <a:ext cx="384048" cy="384048"/>
           </a:xfrm>
           <a:prstGeom prst="ellipse">
@@ -7703,7 +8313,7 @@
         </p:nvSpPr>
         <p:spPr>
           <a:xfrm>
-            <a:off x="502920" y="457200"/>
+            <a:off x="566928" y="457200"/>
             <a:ext cx="384048" cy="384048"/>
           </a:xfrm>
           <a:prstGeom prst="rect">
@@ -7742,7 +8352,7 @@
         </p:nvSpPr>
         <p:spPr>
           <a:xfrm>
-            <a:off x="1069848" y="457200"/>
+            <a:off x="1133856" y="457200"/>
             <a:ext cx="10490911" cy="182880"/>
           </a:xfrm>
           <a:prstGeom prst="rect">
@@ -7781,7 +8391,7 @@
         </p:nvSpPr>
         <p:spPr>
           <a:xfrm>
-            <a:off x="1069848" y="640080"/>
+            <a:off x="1133856" y="640080"/>
             <a:ext cx="10490911" cy="365760"/>
           </a:xfrm>
           <a:prstGeom prst="rect">
@@ -7791,6 +8401,47 @@
           <a:ln/>
         </p:spPr>
         <p:txBody>
+          <a:bodyPr wrap="square" lIns="0" tIns="0" rIns="0" bIns="0" rtlCol="0" anchor="ctr">
+            <a:normAutofit/>
+          </a:bodyPr>
+          <a:lstStyle/>
+          <a:p>
+            <a:pPr indent="0" marL="0">
+              <a:buNone/>
+            </a:pPr>
+            <a:r>
+              <a:rPr lang="en-US" sz="2300" b="1" dirty="0">
+                <a:solidFill>
+                  <a:srgbClr val="10161F"/>
+                </a:solidFill>
+                <a:latin typeface="Pretendard" pitchFamily="34" charset="0"/>
+                <a:ea typeface="Pretendard" pitchFamily="34" charset="-122"/>
+                <a:cs typeface="Pretendard" pitchFamily="34" charset="-120"/>
+              </a:rPr>
+              <a:t>토지 현황</a:t>
+            </a:r>
+            <a:endParaRPr lang="en-US" sz="2300" dirty="0"/>
+          </a:p>
+        </p:txBody>
+      </p:sp>
+      <p:sp>
+        <p:nvSpPr>
+          <p:cNvPr id="6" name="Text 4"/>
+          <p:cNvSpPr/>
+          <p:nvPr/>
+        </p:nvSpPr>
+        <p:spPr>
+          <a:xfrm>
+            <a:off x="566928" y="1371600"/>
+            <a:ext cx="6858000" cy="237744"/>
+          </a:xfrm>
+          <a:prstGeom prst="rect">
+            <a:avLst/>
+          </a:prstGeom>
+          <a:noFill/>
+          <a:ln/>
+        </p:spPr>
+        <p:txBody>
           <a:bodyPr wrap="square" lIns="0" tIns="0" rIns="0" bIns="0" rtlCol="0" anchor="ctr"/>
           <a:lstStyle/>
           <a:p>
@@ -7798,7 +8449,7 @@
               <a:buNone/>
             </a:pPr>
             <a:r>
-              <a:rPr lang="en-US" sz="2300" b="1" dirty="0">
+              <a:rPr lang="en-US" sz="1100" b="1" dirty="0">
                 <a:solidFill>
                   <a:srgbClr val="10161F"/>
                 </a:solidFill>
@@ -7808,45 +8459,6 @@
               </a:rPr>
               <a:t>토지 현황</a:t>
             </a:r>
-            <a:endParaRPr lang="en-US" sz="2300" dirty="0"/>
-          </a:p>
-        </p:txBody>
-      </p:sp>
-      <p:sp>
-        <p:nvSpPr>
-          <p:cNvPr id="6" name="Text 4"/>
-          <p:cNvSpPr/>
-          <p:nvPr/>
-        </p:nvSpPr>
-        <p:spPr>
-          <a:xfrm>
-            <a:off x="502920" y="1371600"/>
-            <a:ext cx="6858000" cy="237744"/>
-          </a:xfrm>
-          <a:prstGeom prst="rect">
-            <a:avLst/>
-          </a:prstGeom>
-          <a:noFill/>
-          <a:ln/>
-        </p:spPr>
-        <p:txBody>
-          <a:bodyPr wrap="square" lIns="0" tIns="0" rIns="0" bIns="0" rtlCol="0" anchor="ctr"/>
-          <a:lstStyle/>
-          <a:p>
-            <a:pPr indent="0" marL="0">
-              <a:buNone/>
-            </a:pPr>
-            <a:r>
-              <a:rPr lang="en-US" sz="1100" b="1" dirty="0">
-                <a:solidFill>
-                  <a:srgbClr val="10161F"/>
-                </a:solidFill>
-                <a:latin typeface="Pretendard" pitchFamily="34" charset="0"/>
-                <a:ea typeface="Pretendard" pitchFamily="34" charset="-122"/>
-                <a:cs typeface="Pretendard" pitchFamily="34" charset="-120"/>
-              </a:rPr>
-              <a:t>토지 현황</a:t>
-            </a:r>
             <a:endParaRPr lang="en-US" sz="1100" dirty="0"/>
           </a:p>
         </p:txBody>
@@ -7859,7 +8471,7 @@
         </p:nvSpPr>
         <p:spPr>
           <a:xfrm>
-            <a:off x="502920" y="1645920"/>
+            <a:off x="566928" y="1645920"/>
             <a:ext cx="1920240" cy="402336"/>
           </a:xfrm>
           <a:prstGeom prst="rect">
@@ -7869,7 +8481,9 @@
           <a:ln/>
         </p:spPr>
         <p:txBody>
-          <a:bodyPr wrap="square" lIns="0" tIns="0" rIns="0" bIns="0" rtlCol="0" anchor="ctr"/>
+          <a:bodyPr wrap="square" lIns="0" tIns="0" rIns="0" bIns="0" rtlCol="0" anchor="ctr">
+            <a:normAutofit/>
+          </a:bodyPr>
           <a:lstStyle/>
           <a:p>
             <a:pPr indent="0" marL="0">
@@ -7901,7 +8515,7 @@
         </p:nvSpPr>
         <p:spPr>
           <a:xfrm>
-            <a:off x="2423160" y="1645920"/>
+            <a:off x="2487168" y="1645920"/>
             <a:ext cx="4937760" cy="402336"/>
           </a:xfrm>
           <a:prstGeom prst="rect">
@@ -7911,7 +8525,9 @@
           <a:ln/>
         </p:spPr>
         <p:txBody>
-          <a:bodyPr wrap="square" lIns="0" tIns="0" rIns="0" bIns="0" rtlCol="0" anchor="ctr"/>
+          <a:bodyPr wrap="square" lIns="0" tIns="0" rIns="0" bIns="0" rtlCol="0" anchor="ctr">
+            <a:normAutofit/>
+          </a:bodyPr>
           <a:lstStyle/>
           <a:p>
             <a:pPr indent="0" marL="0">
@@ -7943,7 +8559,7 @@
         </p:nvSpPr>
         <p:spPr>
           <a:xfrm>
-            <a:off x="7540600" y="1371600"/>
+            <a:off x="7604608" y="1371600"/>
             <a:ext cx="0" cy="4754880"/>
           </a:xfrm>
           <a:prstGeom prst="line">
@@ -7966,7 +8582,7 @@
         </p:nvSpPr>
         <p:spPr>
           <a:xfrm>
-            <a:off x="7720279" y="1645920"/>
+            <a:off x="7784287" y="1645920"/>
             <a:ext cx="3840480" cy="2103120"/>
           </a:xfrm>
           <a:prstGeom prst="roundRect">
@@ -7988,7 +8604,7 @@
         </p:nvSpPr>
         <p:spPr>
           <a:xfrm>
-            <a:off x="7720279" y="1700784"/>
+            <a:off x="7784287" y="1700784"/>
             <a:ext cx="36576" cy="1993392"/>
           </a:xfrm>
           <a:prstGeom prst="rect">
@@ -8008,7 +8624,7 @@
         </p:nvSpPr>
         <p:spPr>
           <a:xfrm>
-            <a:off x="7866583" y="1737360"/>
+            <a:off x="7930591" y="1737360"/>
             <a:ext cx="3584448" cy="201168"/>
           </a:xfrm>
           <a:prstGeom prst="rect">
@@ -8047,7 +8663,7 @@
         </p:nvSpPr>
         <p:spPr>
           <a:xfrm>
-            <a:off x="7866583" y="1938528"/>
+            <a:off x="7930591" y="1938528"/>
             <a:ext cx="3584448" cy="1773936"/>
           </a:xfrm>
           <a:prstGeom prst="rect">
@@ -8090,7 +8706,7 @@
         </p:nvSpPr>
         <p:spPr>
           <a:xfrm>
-            <a:off x="7720279" y="3977640"/>
+            <a:off x="7784287" y="3977640"/>
             <a:ext cx="3840480" cy="2148840"/>
           </a:xfrm>
           <a:prstGeom prst="roundRect">
@@ -8112,7 +8728,7 @@
         </p:nvSpPr>
         <p:spPr>
           <a:xfrm>
-            <a:off x="7720279" y="4032504"/>
+            <a:off x="7784287" y="4032504"/>
             <a:ext cx="36576" cy="2039112"/>
           </a:xfrm>
           <a:prstGeom prst="rect">
@@ -8132,7 +8748,7 @@
         </p:nvSpPr>
         <p:spPr>
           <a:xfrm>
-            <a:off x="7866583" y="4069080"/>
+            <a:off x="7930591" y="4069080"/>
             <a:ext cx="3584448" cy="201168"/>
           </a:xfrm>
           <a:prstGeom prst="rect">
@@ -8171,7 +8787,7 @@
         </p:nvSpPr>
         <p:spPr>
           <a:xfrm>
-            <a:off x="7866583" y="4270248"/>
+            <a:off x="7930591" y="4270248"/>
             <a:ext cx="3584448" cy="1819656"/>
           </a:xfrm>
           <a:prstGeom prst="rect">
@@ -8262,7 +8878,7 @@
         </p:nvSpPr>
         <p:spPr>
           <a:xfrm>
-            <a:off x="502920" y="6382512"/>
+            <a:off x="566928" y="6382512"/>
             <a:ext cx="7315200" cy="219456"/>
           </a:xfrm>
           <a:prstGeom prst="rect">
@@ -8301,7 +8917,7 @@
         </p:nvSpPr>
         <p:spPr>
           <a:xfrm>
-            <a:off x="10774375" y="6382512"/>
+            <a:off x="10710367" y="6382512"/>
             <a:ext cx="914400" cy="219456"/>
           </a:xfrm>
           <a:prstGeom prst="rect">
@@ -8372,7 +8988,7 @@
         </p:nvSpPr>
         <p:spPr>
           <a:xfrm>
-            <a:off x="502920" y="457200"/>
+            <a:off x="566928" y="457200"/>
             <a:ext cx="384048" cy="384048"/>
           </a:xfrm>
           <a:prstGeom prst="ellipse">
@@ -8392,7 +9008,7 @@
         </p:nvSpPr>
         <p:spPr>
           <a:xfrm>
-            <a:off x="502920" y="457200"/>
+            <a:off x="566928" y="457200"/>
             <a:ext cx="384048" cy="384048"/>
           </a:xfrm>
           <a:prstGeom prst="rect">
@@ -8431,7 +9047,7 @@
         </p:nvSpPr>
         <p:spPr>
           <a:xfrm>
-            <a:off x="1069848" y="457200"/>
+            <a:off x="1133856" y="457200"/>
             <a:ext cx="10490911" cy="182880"/>
           </a:xfrm>
           <a:prstGeom prst="rect">
@@ -8470,7 +9086,7 @@
         </p:nvSpPr>
         <p:spPr>
           <a:xfrm>
-            <a:off x="1069848" y="640080"/>
+            <a:off x="1133856" y="640080"/>
             <a:ext cx="10490911" cy="365760"/>
           </a:xfrm>
           <a:prstGeom prst="rect">
@@ -8480,6 +9096,47 @@
           <a:ln/>
         </p:spPr>
         <p:txBody>
+          <a:bodyPr wrap="square" lIns="0" tIns="0" rIns="0" bIns="0" rtlCol="0" anchor="ctr">
+            <a:normAutofit/>
+          </a:bodyPr>
+          <a:lstStyle/>
+          <a:p>
+            <a:pPr indent="0" marL="0">
+              <a:buNone/>
+            </a:pPr>
+            <a:r>
+              <a:rPr lang="en-US" sz="2300" b="1" dirty="0">
+                <a:solidFill>
+                  <a:srgbClr val="10161F"/>
+                </a:solidFill>
+                <a:latin typeface="Pretendard" pitchFamily="34" charset="0"/>
+                <a:ea typeface="Pretendard" pitchFamily="34" charset="-122"/>
+                <a:cs typeface="Pretendard" pitchFamily="34" charset="-120"/>
+              </a:rPr>
+              <a:t>건물 개요</a:t>
+            </a:r>
+            <a:endParaRPr lang="en-US" sz="2300" dirty="0"/>
+          </a:p>
+        </p:txBody>
+      </p:sp>
+      <p:sp>
+        <p:nvSpPr>
+          <p:cNvPr id="6" name="Text 4"/>
+          <p:cNvSpPr/>
+          <p:nvPr/>
+        </p:nvSpPr>
+        <p:spPr>
+          <a:xfrm>
+            <a:off x="566928" y="1371600"/>
+            <a:ext cx="6858000" cy="237744"/>
+          </a:xfrm>
+          <a:prstGeom prst="rect">
+            <a:avLst/>
+          </a:prstGeom>
+          <a:noFill/>
+          <a:ln/>
+        </p:spPr>
+        <p:txBody>
           <a:bodyPr wrap="square" lIns="0" tIns="0" rIns="0" bIns="0" rtlCol="0" anchor="ctr"/>
           <a:lstStyle/>
           <a:p>
@@ -8487,7 +9144,7 @@
               <a:buNone/>
             </a:pPr>
             <a:r>
-              <a:rPr lang="en-US" sz="2300" b="1" dirty="0">
+              <a:rPr lang="en-US" sz="1100" b="1" dirty="0">
                 <a:solidFill>
                   <a:srgbClr val="10161F"/>
                 </a:solidFill>
@@ -8495,45 +9152,6 @@
                 <a:ea typeface="Pretendard" pitchFamily="34" charset="-122"/>
                 <a:cs typeface="Pretendard" pitchFamily="34" charset="-120"/>
               </a:rPr>
-              <a:t>건물 개요</a:t>
-            </a:r>
-            <a:endParaRPr lang="en-US" sz="2300" dirty="0"/>
-          </a:p>
-        </p:txBody>
-      </p:sp>
-      <p:sp>
-        <p:nvSpPr>
-          <p:cNvPr id="6" name="Text 4"/>
-          <p:cNvSpPr/>
-          <p:nvPr/>
-        </p:nvSpPr>
-        <p:spPr>
-          <a:xfrm>
-            <a:off x="502920" y="1371600"/>
-            <a:ext cx="6858000" cy="237744"/>
-          </a:xfrm>
-          <a:prstGeom prst="rect">
-            <a:avLst/>
-          </a:prstGeom>
-          <a:noFill/>
-          <a:ln/>
-        </p:spPr>
-        <p:txBody>
-          <a:bodyPr wrap="square" lIns="0" tIns="0" rIns="0" bIns="0" rtlCol="0" anchor="ctr"/>
-          <a:lstStyle/>
-          <a:p>
-            <a:pPr indent="0" marL="0">
-              <a:buNone/>
-            </a:pPr>
-            <a:r>
-              <a:rPr lang="en-US" sz="1100" b="1" dirty="0">
-                <a:solidFill>
-                  <a:srgbClr val="10161F"/>
-                </a:solidFill>
-                <a:latin typeface="Pretendard" pitchFamily="34" charset="0"/>
-                <a:ea typeface="Pretendard" pitchFamily="34" charset="-122"/>
-                <a:cs typeface="Pretendard" pitchFamily="34" charset="-120"/>
-              </a:rPr>
               <a:t>건축물 개요 및 물리 스펙</a:t>
             </a:r>
             <a:endParaRPr lang="en-US" sz="1100" dirty="0"/>
@@ -8548,7 +9166,7 @@
         </p:nvSpPr>
         <p:spPr>
           <a:xfrm>
-            <a:off x="502920" y="1645920"/>
+            <a:off x="566928" y="1645920"/>
             <a:ext cx="1920240" cy="402336"/>
           </a:xfrm>
           <a:prstGeom prst="rect">
@@ -8558,7 +9176,9 @@
           <a:ln/>
         </p:spPr>
         <p:txBody>
-          <a:bodyPr wrap="square" lIns="0" tIns="0" rIns="0" bIns="0" rtlCol="0" anchor="ctr"/>
+          <a:bodyPr wrap="square" lIns="0" tIns="0" rIns="0" bIns="0" rtlCol="0" anchor="ctr">
+            <a:normAutofit/>
+          </a:bodyPr>
           <a:lstStyle/>
           <a:p>
             <a:pPr indent="0" marL="0">
@@ -8590,7 +9210,7 @@
         </p:nvSpPr>
         <p:spPr>
           <a:xfrm>
-            <a:off x="2423160" y="1645920"/>
+            <a:off x="2487168" y="1645920"/>
             <a:ext cx="4937760" cy="402336"/>
           </a:xfrm>
           <a:prstGeom prst="rect">
@@ -8600,7 +9220,9 @@
           <a:ln/>
         </p:spPr>
         <p:txBody>
-          <a:bodyPr wrap="square" lIns="0" tIns="0" rIns="0" bIns="0" rtlCol="0" anchor="ctr"/>
+          <a:bodyPr wrap="square" lIns="0" tIns="0" rIns="0" bIns="0" rtlCol="0" anchor="ctr">
+            <a:normAutofit/>
+          </a:bodyPr>
           <a:lstStyle/>
           <a:p>
             <a:pPr indent="0" marL="0">
@@ -8632,7 +9254,7 @@
         </p:nvSpPr>
         <p:spPr>
           <a:xfrm>
-            <a:off x="502920" y="2048256"/>
+            <a:off x="566928" y="2048256"/>
             <a:ext cx="6858000" cy="0"/>
           </a:xfrm>
           <a:prstGeom prst="line">
@@ -8655,7 +9277,7 @@
         </p:nvSpPr>
         <p:spPr>
           <a:xfrm>
-            <a:off x="502920" y="2048256"/>
+            <a:off x="566928" y="2048256"/>
             <a:ext cx="1920240" cy="402336"/>
           </a:xfrm>
           <a:prstGeom prst="rect">
@@ -8665,7 +9287,9 @@
           <a:ln/>
         </p:spPr>
         <p:txBody>
-          <a:bodyPr wrap="square" lIns="0" tIns="0" rIns="0" bIns="0" rtlCol="0" anchor="ctr"/>
+          <a:bodyPr wrap="square" lIns="0" tIns="0" rIns="0" bIns="0" rtlCol="0" anchor="ctr">
+            <a:normAutofit/>
+          </a:bodyPr>
           <a:lstStyle/>
           <a:p>
             <a:pPr indent="0" marL="0">
@@ -8697,7 +9321,7 @@
         </p:nvSpPr>
         <p:spPr>
           <a:xfrm>
-            <a:off x="2423160" y="2048256"/>
+            <a:off x="2487168" y="2048256"/>
             <a:ext cx="4937760" cy="402336"/>
           </a:xfrm>
           <a:prstGeom prst="rect">
@@ -8707,7 +9331,9 @@
           <a:ln/>
         </p:spPr>
         <p:txBody>
-          <a:bodyPr wrap="square" lIns="0" tIns="0" rIns="0" bIns="0" rtlCol="0" anchor="ctr"/>
+          <a:bodyPr wrap="square" lIns="0" tIns="0" rIns="0" bIns="0" rtlCol="0" anchor="ctr">
+            <a:normAutofit/>
+          </a:bodyPr>
           <a:lstStyle/>
           <a:p>
             <a:pPr indent="0" marL="0">
@@ -8739,7 +9365,7 @@
         </p:nvSpPr>
         <p:spPr>
           <a:xfrm>
-            <a:off x="7540600" y="1371600"/>
+            <a:off x="7604608" y="1371600"/>
             <a:ext cx="0" cy="4754880"/>
           </a:xfrm>
           <a:prstGeom prst="line">
@@ -8762,7 +9388,7 @@
         </p:nvSpPr>
         <p:spPr>
           <a:xfrm>
-            <a:off x="7720279" y="1645920"/>
+            <a:off x="7784287" y="1645920"/>
             <a:ext cx="3840480" cy="1645920"/>
           </a:xfrm>
           <a:prstGeom prst="roundRect">
@@ -8784,7 +9410,7 @@
         </p:nvSpPr>
         <p:spPr>
           <a:xfrm>
-            <a:off x="7720279" y="1700784"/>
+            <a:off x="7784287" y="1700784"/>
             <a:ext cx="36576" cy="1536192"/>
           </a:xfrm>
           <a:prstGeom prst="rect">
@@ -8804,7 +9430,7 @@
         </p:nvSpPr>
         <p:spPr>
           <a:xfrm>
-            <a:off x="7866583" y="1737360"/>
+            <a:off x="7930591" y="1737360"/>
             <a:ext cx="3584448" cy="201168"/>
           </a:xfrm>
           <a:prstGeom prst="rect">
@@ -8832,7 +9458,7 @@
         </p:nvSpPr>
         <p:spPr>
           <a:xfrm>
-            <a:off x="7866583" y="1938528"/>
+            <a:off x="7930591" y="1938528"/>
             <a:ext cx="3584448" cy="1316736"/>
           </a:xfrm>
           <a:prstGeom prst="rect">
@@ -8874,7 +9500,7 @@
         </p:nvSpPr>
         <p:spPr>
           <a:xfrm>
-            <a:off x="502920" y="6382512"/>
+            <a:off x="566928" y="6382512"/>
             <a:ext cx="7315200" cy="219456"/>
           </a:xfrm>
           <a:prstGeom prst="rect">
@@ -8913,7 +9539,7 @@
         </p:nvSpPr>
         <p:spPr>
           <a:xfrm>
-            <a:off x="10774375" y="6382512"/>
+            <a:off x="10710367" y="6382512"/>
             <a:ext cx="914400" cy="219456"/>
           </a:xfrm>
           <a:prstGeom prst="rect">
@@ -8984,7 +9610,7 @@
         </p:nvSpPr>
         <p:spPr>
           <a:xfrm>
-            <a:off x="502920" y="457200"/>
+            <a:off x="566928" y="457200"/>
             <a:ext cx="384048" cy="384048"/>
           </a:xfrm>
           <a:prstGeom prst="ellipse">
@@ -9004,7 +9630,7 @@
         </p:nvSpPr>
         <p:spPr>
           <a:xfrm>
-            <a:off x="502920" y="457200"/>
+            <a:off x="566928" y="457200"/>
             <a:ext cx="384048" cy="384048"/>
           </a:xfrm>
           <a:prstGeom prst="rect">
@@ -9043,7 +9669,7 @@
         </p:nvSpPr>
         <p:spPr>
           <a:xfrm>
-            <a:off x="1069848" y="457200"/>
+            <a:off x="1133856" y="457200"/>
             <a:ext cx="10490911" cy="182880"/>
           </a:xfrm>
           <a:prstGeom prst="rect">
@@ -9082,7 +9708,7 @@
         </p:nvSpPr>
         <p:spPr>
           <a:xfrm>
-            <a:off x="1069848" y="640080"/>
+            <a:off x="1133856" y="640080"/>
             <a:ext cx="10490911" cy="365760"/>
           </a:xfrm>
           <a:prstGeom prst="rect">
@@ -9092,6 +9718,47 @@
           <a:ln/>
         </p:spPr>
         <p:txBody>
+          <a:bodyPr wrap="square" lIns="0" tIns="0" rIns="0" bIns="0" rtlCol="0" anchor="ctr">
+            <a:normAutofit/>
+          </a:bodyPr>
+          <a:lstStyle/>
+          <a:p>
+            <a:pPr indent="0" marL="0">
+              <a:buNone/>
+            </a:pPr>
+            <a:r>
+              <a:rPr lang="en-US" sz="2300" b="1" dirty="0">
+                <a:solidFill>
+                  <a:srgbClr val="10161F"/>
+                </a:solidFill>
+                <a:latin typeface="Pretendard" pitchFamily="34" charset="0"/>
+                <a:ea typeface="Pretendard" pitchFamily="34" charset="-122"/>
+                <a:cs typeface="Pretendard" pitchFamily="34" charset="-120"/>
+              </a:rPr>
+              <a:t>사용계획</a:t>
+            </a:r>
+            <a:endParaRPr lang="en-US" sz="2300" dirty="0"/>
+          </a:p>
+        </p:txBody>
+      </p:sp>
+      <p:sp>
+        <p:nvSpPr>
+          <p:cNvPr id="6" name="Text 4"/>
+          <p:cNvSpPr/>
+          <p:nvPr/>
+        </p:nvSpPr>
+        <p:spPr>
+          <a:xfrm>
+            <a:off x="566928" y="1371600"/>
+            <a:ext cx="6858000" cy="237744"/>
+          </a:xfrm>
+          <a:prstGeom prst="rect">
+            <a:avLst/>
+          </a:prstGeom>
+          <a:noFill/>
+          <a:ln/>
+        </p:spPr>
+        <p:txBody>
           <a:bodyPr wrap="square" lIns="0" tIns="0" rIns="0" bIns="0" rtlCol="0" anchor="ctr"/>
           <a:lstStyle/>
           <a:p>
@@ -9099,7 +9766,7 @@
               <a:buNone/>
             </a:pPr>
             <a:r>
-              <a:rPr lang="en-US" sz="2300" b="1" dirty="0">
+              <a:rPr lang="en-US" sz="1100" b="1" dirty="0">
                 <a:solidFill>
                   <a:srgbClr val="10161F"/>
                 </a:solidFill>
@@ -9107,45 +9774,6 @@
                 <a:ea typeface="Pretendard" pitchFamily="34" charset="-122"/>
                 <a:cs typeface="Pretendard" pitchFamily="34" charset="-120"/>
               </a:rPr>
-              <a:t>사용계획</a:t>
-            </a:r>
-            <a:endParaRPr lang="en-US" sz="2300" dirty="0"/>
-          </a:p>
-        </p:txBody>
-      </p:sp>
-      <p:sp>
-        <p:nvSpPr>
-          <p:cNvPr id="6" name="Text 4"/>
-          <p:cNvSpPr/>
-          <p:nvPr/>
-        </p:nvSpPr>
-        <p:spPr>
-          <a:xfrm>
-            <a:off x="502920" y="1371600"/>
-            <a:ext cx="6858000" cy="237744"/>
-          </a:xfrm>
-          <a:prstGeom prst="rect">
-            <a:avLst/>
-          </a:prstGeom>
-          <a:noFill/>
-          <a:ln/>
-        </p:spPr>
-        <p:txBody>
-          <a:bodyPr wrap="square" lIns="0" tIns="0" rIns="0" bIns="0" rtlCol="0" anchor="ctr"/>
-          <a:lstStyle/>
-          <a:p>
-            <a:pPr indent="0" marL="0">
-              <a:buNone/>
-            </a:pPr>
-            <a:r>
-              <a:rPr lang="en-US" sz="1100" b="1" dirty="0">
-                <a:solidFill>
-                  <a:srgbClr val="10161F"/>
-                </a:solidFill>
-                <a:latin typeface="Pretendard" pitchFamily="34" charset="0"/>
-                <a:ea typeface="Pretendard" pitchFamily="34" charset="-122"/>
-                <a:cs typeface="Pretendard" pitchFamily="34" charset="-120"/>
-              </a:rPr>
               <a:t>건축물 개요 및 물리 스펙</a:t>
             </a:r>
             <a:endParaRPr lang="en-US" sz="1100" dirty="0"/>
@@ -9160,7 +9788,7 @@
         </p:nvSpPr>
         <p:spPr>
           <a:xfrm>
-            <a:off x="502920" y="1645920"/>
+            <a:off x="566928" y="1645920"/>
             <a:ext cx="6858000" cy="402336"/>
           </a:xfrm>
           <a:prstGeom prst="rect">
@@ -9170,7 +9798,9 @@
           <a:ln/>
         </p:spPr>
         <p:txBody>
-          <a:bodyPr wrap="square" lIns="0" tIns="0" rIns="0" bIns="0" rtlCol="0" anchor="ctr"/>
+          <a:bodyPr wrap="square" lIns="0" tIns="0" rIns="0" bIns="0" rtlCol="0" anchor="ctr">
+            <a:normAutofit/>
+          </a:bodyPr>
           <a:lstStyle/>
           <a:p>
             <a:pPr indent="0" marL="0">
@@ -9202,7 +9832,7 @@
         </p:nvSpPr>
         <p:spPr>
           <a:xfrm>
-            <a:off x="502920" y="2048256"/>
+            <a:off x="566928" y="2048256"/>
             <a:ext cx="6858000" cy="0"/>
           </a:xfrm>
           <a:prstGeom prst="line">
@@ -9225,7 +9855,7 @@
         </p:nvSpPr>
         <p:spPr>
           <a:xfrm>
-            <a:off x="502920" y="2048256"/>
+            <a:off x="566928" y="2048256"/>
             <a:ext cx="6858000" cy="402336"/>
           </a:xfrm>
           <a:prstGeom prst="rect">
@@ -9235,7 +9865,9 @@
           <a:ln/>
         </p:spPr>
         <p:txBody>
-          <a:bodyPr wrap="square" lIns="0" tIns="0" rIns="0" bIns="0" rtlCol="0" anchor="ctr"/>
+          <a:bodyPr wrap="square" lIns="0" tIns="0" rIns="0" bIns="0" rtlCol="0" anchor="ctr">
+            <a:normAutofit/>
+          </a:bodyPr>
           <a:lstStyle/>
           <a:p>
             <a:pPr indent="0" marL="0">
@@ -9267,7 +9899,7 @@
         </p:nvSpPr>
         <p:spPr>
           <a:xfrm>
-            <a:off x="7540600" y="1371600"/>
+            <a:off x="7604608" y="1371600"/>
             <a:ext cx="0" cy="4754880"/>
           </a:xfrm>
           <a:prstGeom prst="line">
@@ -9290,7 +9922,7 @@
         </p:nvSpPr>
         <p:spPr>
           <a:xfrm>
-            <a:off x="7720279" y="1645920"/>
+            <a:off x="7784287" y="1645920"/>
             <a:ext cx="3840480" cy="1645920"/>
           </a:xfrm>
           <a:prstGeom prst="roundRect">
@@ -9312,7 +9944,7 @@
         </p:nvSpPr>
         <p:spPr>
           <a:xfrm>
-            <a:off x="7720279" y="1700784"/>
+            <a:off x="7784287" y="1700784"/>
             <a:ext cx="36576" cy="1536192"/>
           </a:xfrm>
           <a:prstGeom prst="rect">
@@ -9332,7 +9964,7 @@
         </p:nvSpPr>
         <p:spPr>
           <a:xfrm>
-            <a:off x="7866583" y="1737360"/>
+            <a:off x="7930591" y="1737360"/>
             <a:ext cx="3584448" cy="201168"/>
           </a:xfrm>
           <a:prstGeom prst="rect">
@@ -9360,7 +9992,7 @@
         </p:nvSpPr>
         <p:spPr>
           <a:xfrm>
-            <a:off x="7866583" y="1938528"/>
+            <a:off x="7930591" y="1938528"/>
             <a:ext cx="3584448" cy="1316736"/>
           </a:xfrm>
           <a:prstGeom prst="rect">
@@ -9402,7 +10034,7 @@
         </p:nvSpPr>
         <p:spPr>
           <a:xfrm>
-            <a:off x="502920" y="6382512"/>
+            <a:off x="566928" y="6382512"/>
             <a:ext cx="7315200" cy="219456"/>
           </a:xfrm>
           <a:prstGeom prst="rect">
@@ -9441,7 +10073,7 @@
         </p:nvSpPr>
         <p:spPr>
           <a:xfrm>
-            <a:off x="10774375" y="6382512"/>
+            <a:off x="10710367" y="6382512"/>
             <a:ext cx="914400" cy="219456"/>
           </a:xfrm>
           <a:prstGeom prst="rect">
@@ -9512,7 +10144,7 @@
         </p:nvSpPr>
         <p:spPr>
           <a:xfrm>
-            <a:off x="502920" y="457200"/>
+            <a:off x="566928" y="457200"/>
             <a:ext cx="384048" cy="384048"/>
           </a:xfrm>
           <a:prstGeom prst="ellipse">
@@ -9532,7 +10164,7 @@
         </p:nvSpPr>
         <p:spPr>
           <a:xfrm>
-            <a:off x="502920" y="457200"/>
+            <a:off x="566928" y="457200"/>
             <a:ext cx="384048" cy="384048"/>
           </a:xfrm>
           <a:prstGeom prst="rect">
@@ -9571,7 +10203,7 @@
         </p:nvSpPr>
         <p:spPr>
           <a:xfrm>
-            <a:off x="1069848" y="457200"/>
+            <a:off x="1133856" y="457200"/>
             <a:ext cx="10490911" cy="182880"/>
           </a:xfrm>
           <a:prstGeom prst="rect">
@@ -9596,7 +10228,7 @@
                 <a:ea typeface="Arial" pitchFamily="34" charset="-122"/>
                 <a:cs typeface="Arial" pitchFamily="34" charset="-120"/>
               </a:rPr>
-              <a:t>Capital</a:t>
+              <a:t>Commute</a:t>
             </a:r>
             <a:endParaRPr lang="en-US" sz="950" dirty="0"/>
           </a:p>
@@ -9610,7 +10242,7 @@
         </p:nvSpPr>
         <p:spPr>
           <a:xfrm>
-            <a:off x="1069848" y="640080"/>
+            <a:off x="1133856" y="640080"/>
             <a:ext cx="10490911" cy="365760"/>
           </a:xfrm>
           <a:prstGeom prst="rect">
@@ -9620,7 +10252,9 @@
           <a:ln/>
         </p:spPr>
         <p:txBody>
-          <a:bodyPr wrap="square" lIns="0" tIns="0" rIns="0" bIns="0" rtlCol="0" anchor="ctr"/>
+          <a:bodyPr wrap="square" lIns="0" tIns="0" rIns="0" bIns="0" rtlCol="0" anchor="ctr">
+            <a:normAutofit/>
+          </a:bodyPr>
           <a:lstStyle/>
           <a:p>
             <a:pPr indent="0" marL="0">
@@ -9635,7 +10269,7 @@
                 <a:ea typeface="Pretendard" pitchFamily="34" charset="-122"/>
                 <a:cs typeface="Pretendard" pitchFamily="34" charset="-120"/>
               </a:rPr>
-              <a:t>자본구조</a:t>
+              <a:t>통근·접근성</a:t>
             </a:r>
             <a:endParaRPr lang="en-US" sz="2300" dirty="0"/>
           </a:p>
@@ -9649,12 +10283,12 @@
         </p:nvSpPr>
         <p:spPr>
           <a:xfrm>
-            <a:off x="502920" y="1417320"/>
-            <a:ext cx="5391760" cy="4389120"/>
+            <a:off x="566928" y="1481328"/>
+            <a:ext cx="5120640" cy="4114800"/>
           </a:xfrm>
           <a:prstGeom prst="roundRect">
             <a:avLst>
-              <a:gd name="adj" fmla="val 1250"/>
+              <a:gd name="adj" fmla="val 1333"/>
             </a:avLst>
           </a:prstGeom>
           <a:solidFill>
@@ -9670,14 +10304,41 @@
       </p:sp>
       <p:sp>
         <p:nvSpPr>
-          <p:cNvPr id="7" name="Text 5"/>
-          <p:cNvSpPr/>
-          <p:nvPr/>
-        </p:nvSpPr>
-        <p:spPr>
-          <a:xfrm>
-            <a:off x="731520" y="1618488"/>
-            <a:ext cx="4934560" cy="320040"/>
+          <p:cNvPr id="7" name="Shape 5"/>
+          <p:cNvSpPr/>
+          <p:nvPr/>
+        </p:nvSpPr>
+        <p:spPr>
+          <a:xfrm>
+            <a:off x="822960" y="1700784"/>
+            <a:ext cx="1316736" cy="219456"/>
+          </a:xfrm>
+          <a:prstGeom prst="roundRect">
+            <a:avLst>
+              <a:gd name="adj" fmla="val 50000"/>
+            </a:avLst>
+          </a:prstGeom>
+          <a:solidFill>
+            <a:srgbClr val="BEE3F8"/>
+          </a:solidFill>
+          <a:ln w="6350">
+            <a:solidFill>
+              <a:srgbClr val="2B6CB0"/>
+            </a:solidFill>
+            <a:prstDash val="solid"/>
+          </a:ln>
+        </p:spPr>
+      </p:sp>
+      <p:sp>
+        <p:nvSpPr>
+          <p:cNvPr id="8" name="Text 6"/>
+          <p:cNvSpPr/>
+          <p:nvPr/>
+        </p:nvSpPr>
+        <p:spPr>
+          <a:xfrm>
+            <a:off x="822960" y="1700784"/>
+            <a:ext cx="1316736" cy="219456"/>
           </a:xfrm>
           <a:prstGeom prst="rect">
             <a:avLst/>
@@ -9689,43 +10350,82 @@
           <a:bodyPr wrap="square" lIns="0" tIns="0" rIns="0" bIns="0" rtlCol="0" anchor="ctr"/>
           <a:lstStyle/>
           <a:p>
+            <a:pPr algn="ctr" indent="0" marL="0">
+              <a:buNone/>
+            </a:pPr>
+            <a:r>
+              <a:rPr lang="en-US" sz="850" b="1" dirty="0">
+                <a:solidFill>
+                  <a:srgbClr val="2B6CB0"/>
+                </a:solidFill>
+                <a:latin typeface="Pretendard" pitchFamily="34" charset="0"/>
+                <a:ea typeface="Pretendard" pitchFamily="34" charset="-122"/>
+                <a:cs typeface="Pretendard" pitchFamily="34" charset="-120"/>
+              </a:rPr>
+              <a:t>[ 권역 입지 분석 ]</a:t>
+            </a:r>
+            <a:endParaRPr lang="en-US" sz="850" dirty="0"/>
+          </a:p>
+        </p:txBody>
+      </p:sp>
+      <p:sp>
+        <p:nvSpPr>
+          <p:cNvPr id="9" name="Text 7"/>
+          <p:cNvSpPr/>
+          <p:nvPr/>
+        </p:nvSpPr>
+        <p:spPr>
+          <a:xfrm>
+            <a:off x="822960" y="1993392"/>
+            <a:ext cx="4608576" cy="274320"/>
+          </a:xfrm>
+          <a:prstGeom prst="rect">
+            <a:avLst/>
+          </a:prstGeom>
+          <a:noFill/>
+          <a:ln/>
+        </p:spPr>
+        <p:txBody>
+          <a:bodyPr wrap="square" lIns="0" tIns="0" rIns="0" bIns="0" rtlCol="0" anchor="ctr"/>
+          <a:lstStyle/>
+          <a:p>
             <a:pPr indent="0" marL="0">
               <a:buNone/>
             </a:pPr>
             <a:r>
-              <a:rPr lang="en-US" sz="1350" b="1" dirty="0">
-                <a:solidFill>
-                  <a:srgbClr val="977024"/>
-                </a:solidFill>
-                <a:latin typeface="Pretendard" pitchFamily="34" charset="0"/>
-                <a:ea typeface="Pretendard" pitchFamily="34" charset="-122"/>
-                <a:cs typeface="Pretendard" pitchFamily="34" charset="-120"/>
-              </a:rPr>
-              <a:t>1. 총취득원가 및 자기자본 소요</a:t>
-            </a:r>
-            <a:endParaRPr lang="en-US" sz="1350" dirty="0"/>
-          </a:p>
-        </p:txBody>
-      </p:sp>
-      <p:sp>
-        <p:nvSpPr>
-          <p:cNvPr id="8" name="Text 6"/>
-          <p:cNvSpPr/>
-          <p:nvPr/>
-        </p:nvSpPr>
-        <p:spPr>
-          <a:xfrm>
-            <a:off x="731520" y="2011680"/>
-            <a:ext cx="2269897" cy="475488"/>
-          </a:xfrm>
-          <a:prstGeom prst="rect">
-            <a:avLst/>
-          </a:prstGeom>
-          <a:noFill/>
-          <a:ln/>
-        </p:spPr>
-        <p:txBody>
-          <a:bodyPr wrap="square" lIns="0" tIns="0" rIns="0" bIns="0" rtlCol="0" anchor="ctr"/>
+              <a:rPr lang="en-US" sz="1200" b="1" dirty="0">
+                <a:solidFill>
+                  <a:srgbClr val="10161F"/>
+                </a:solidFill>
+                <a:latin typeface="Pretendard" pitchFamily="34" charset="0"/>
+                <a:ea typeface="Pretendard" pitchFamily="34" charset="-122"/>
+                <a:cs typeface="Pretendard" pitchFamily="34" charset="-120"/>
+              </a:rPr>
+              <a:t>교통망 및 입지 인프라 실사 안내</a:t>
+            </a:r>
+            <a:endParaRPr lang="en-US" sz="1200" dirty="0"/>
+          </a:p>
+        </p:txBody>
+      </p:sp>
+      <p:sp>
+        <p:nvSpPr>
+          <p:cNvPr id="10" name="Text 8"/>
+          <p:cNvSpPr/>
+          <p:nvPr/>
+        </p:nvSpPr>
+        <p:spPr>
+          <a:xfrm>
+            <a:off x="822960" y="2304288"/>
+            <a:ext cx="4608576" cy="411480"/>
+          </a:xfrm>
+          <a:prstGeom prst="rect">
+            <a:avLst/>
+          </a:prstGeom>
+          <a:noFill/>
+          <a:ln/>
+        </p:spPr>
+        <p:txBody>
+          <a:bodyPr wrap="square" lIns="0" tIns="0" rIns="0" bIns="0" rtlCol="0" anchor="t"/>
           <a:lstStyle/>
           <a:p>
             <a:pPr indent="0" marL="0">
@@ -9735,39 +10435,312 @@
               <a:buNone/>
             </a:pPr>
             <a:r>
-              <a:rPr lang="en-US" sz="1150" dirty="0">
-                <a:solidFill>
-                  <a:srgbClr val="718096"/>
-                </a:solidFill>
-                <a:latin typeface="Pretendard" pitchFamily="34" charset="0"/>
-                <a:ea typeface="Pretendard" pitchFamily="34" charset="-122"/>
-                <a:cs typeface="Pretendard" pitchFamily="34" charset="-120"/>
-              </a:rPr>
-              <a:t>매매 희망가 (A)</a:t>
-            </a:r>
-            <a:endParaRPr lang="en-US" sz="1150" dirty="0"/>
-          </a:p>
-        </p:txBody>
-      </p:sp>
-      <p:sp>
-        <p:nvSpPr>
-          <p:cNvPr id="9" name="Text 7"/>
-          <p:cNvSpPr/>
-          <p:nvPr/>
-        </p:nvSpPr>
-        <p:spPr>
-          <a:xfrm>
-            <a:off x="3001417" y="2011680"/>
-            <a:ext cx="2664662" cy="475488"/>
-          </a:xfrm>
-          <a:prstGeom prst="rect">
-            <a:avLst/>
-          </a:prstGeom>
-          <a:noFill/>
-          <a:ln/>
-        </p:spPr>
-        <p:txBody>
-          <a:bodyPr wrap="square" lIns="0" tIns="0" rIns="0" bIns="0" rtlCol="0" anchor="ctr"/>
+              <a:rPr lang="en-US" sz="950" dirty="0">
+                <a:solidFill>
+                  <a:srgbClr val="4A5568"/>
+                </a:solidFill>
+                <a:latin typeface="Pretendard" pitchFamily="34" charset="0"/>
+                <a:ea typeface="Pretendard" pitchFamily="34" charset="-122"/>
+                <a:cs typeface="Pretendard" pitchFamily="34" charset="-120"/>
+              </a:rPr>
+              <a:t>대상 자산의 대중교통 접근성 및 반경 1km 내 비즈니스·상업 인프라 집적도를 현장 조사 기준으로 검증합니다.</a:t>
+            </a:r>
+            <a:endParaRPr lang="en-US" sz="950" dirty="0"/>
+          </a:p>
+        </p:txBody>
+      </p:sp>
+      <p:sp>
+        <p:nvSpPr>
+          <p:cNvPr id="11" name="Shape 9"/>
+          <p:cNvSpPr/>
+          <p:nvPr/>
+        </p:nvSpPr>
+        <p:spPr>
+          <a:xfrm>
+            <a:off x="822960" y="2770632"/>
+            <a:ext cx="4608576" cy="0"/>
+          </a:xfrm>
+          <a:prstGeom prst="line">
+            <a:avLst/>
+          </a:prstGeom>
+          <a:noFill/>
+          <a:ln w="5080">
+            <a:solidFill>
+              <a:srgbClr val="CBD5E0"/>
+            </a:solidFill>
+            <a:prstDash val="solid"/>
+          </a:ln>
+        </p:spPr>
+      </p:sp>
+      <p:sp>
+        <p:nvSpPr>
+          <p:cNvPr id="12" name="Shape 10"/>
+          <p:cNvSpPr/>
+          <p:nvPr/>
+        </p:nvSpPr>
+        <p:spPr>
+          <a:xfrm>
+            <a:off x="859536" y="2916936"/>
+            <a:ext cx="64008" cy="64008"/>
+          </a:xfrm>
+          <a:prstGeom prst="rect">
+            <a:avLst/>
+          </a:prstGeom>
+          <a:solidFill>
+            <a:srgbClr val="B98A2E"/>
+          </a:solidFill>
+          <a:ln/>
+        </p:spPr>
+      </p:sp>
+      <p:sp>
+        <p:nvSpPr>
+          <p:cNvPr id="13" name="Text 11"/>
+          <p:cNvSpPr/>
+          <p:nvPr/>
+        </p:nvSpPr>
+        <p:spPr>
+          <a:xfrm>
+            <a:off x="987552" y="2862072"/>
+            <a:ext cx="4389120" cy="592074"/>
+          </a:xfrm>
+          <a:prstGeom prst="rect">
+            <a:avLst/>
+          </a:prstGeom>
+          <a:noFill/>
+          <a:ln/>
+        </p:spPr>
+        <p:txBody>
+          <a:bodyPr wrap="square" lIns="0" tIns="0" rIns="0" bIns="0" rtlCol="0" anchor="t"/>
+          <a:lstStyle/>
+          <a:p>
+            <a:pPr indent="0" marL="0">
+              <a:lnSpc>
+                <a:spcPct val="112000"/>
+              </a:lnSpc>
+              <a:buNone/>
+            </a:pPr>
+            <a:r>
+              <a:rPr lang="en-US" sz="920" dirty="0">
+                <a:solidFill>
+                  <a:srgbClr val="10161F"/>
+                </a:solidFill>
+                <a:latin typeface="Pretendard" pitchFamily="34" charset="0"/>
+                <a:ea typeface="Pretendard" pitchFamily="34" charset="-122"/>
+                <a:cs typeface="Pretendard" pitchFamily="34" charset="-120"/>
+              </a:rPr>
+              <a:t>주요 간선도로 및 광역 대중교통(지하철·버스) 환승 노선 접근성 실사</a:t>
+            </a:r>
+            <a:endParaRPr lang="en-US" sz="920" dirty="0"/>
+          </a:p>
+        </p:txBody>
+      </p:sp>
+      <p:sp>
+        <p:nvSpPr>
+          <p:cNvPr id="14" name="Shape 12"/>
+          <p:cNvSpPr/>
+          <p:nvPr/>
+        </p:nvSpPr>
+        <p:spPr>
+          <a:xfrm>
+            <a:off x="859536" y="3545586"/>
+            <a:ext cx="64008" cy="64008"/>
+          </a:xfrm>
+          <a:prstGeom prst="rect">
+            <a:avLst/>
+          </a:prstGeom>
+          <a:solidFill>
+            <a:srgbClr val="B98A2E"/>
+          </a:solidFill>
+          <a:ln/>
+        </p:spPr>
+      </p:sp>
+      <p:sp>
+        <p:nvSpPr>
+          <p:cNvPr id="15" name="Text 13"/>
+          <p:cNvSpPr/>
+          <p:nvPr/>
+        </p:nvSpPr>
+        <p:spPr>
+          <a:xfrm>
+            <a:off x="987552" y="3490722"/>
+            <a:ext cx="4389120" cy="592074"/>
+          </a:xfrm>
+          <a:prstGeom prst="rect">
+            <a:avLst/>
+          </a:prstGeom>
+          <a:noFill/>
+          <a:ln/>
+        </p:spPr>
+        <p:txBody>
+          <a:bodyPr wrap="square" lIns="0" tIns="0" rIns="0" bIns="0" rtlCol="0" anchor="t"/>
+          <a:lstStyle/>
+          <a:p>
+            <a:pPr indent="0" marL="0">
+              <a:lnSpc>
+                <a:spcPct val="112000"/>
+              </a:lnSpc>
+              <a:buNone/>
+            </a:pPr>
+            <a:r>
+              <a:rPr lang="en-US" sz="920" dirty="0">
+                <a:solidFill>
+                  <a:srgbClr val="10161F"/>
+                </a:solidFill>
+                <a:latin typeface="Pretendard" pitchFamily="34" charset="0"/>
+                <a:ea typeface="Pretendard" pitchFamily="34" charset="-122"/>
+                <a:cs typeface="Pretendard" pitchFamily="34" charset="-120"/>
+              </a:rPr>
+              <a:t>도보 5분~10분 반경 유동인구 집객 동선 및 배후 수요층 집중도 평가</a:t>
+            </a:r>
+            <a:endParaRPr lang="en-US" sz="920" dirty="0"/>
+          </a:p>
+        </p:txBody>
+      </p:sp>
+      <p:sp>
+        <p:nvSpPr>
+          <p:cNvPr id="16" name="Shape 14"/>
+          <p:cNvSpPr/>
+          <p:nvPr/>
+        </p:nvSpPr>
+        <p:spPr>
+          <a:xfrm>
+            <a:off x="859536" y="4174236"/>
+            <a:ext cx="64008" cy="64008"/>
+          </a:xfrm>
+          <a:prstGeom prst="rect">
+            <a:avLst/>
+          </a:prstGeom>
+          <a:solidFill>
+            <a:srgbClr val="B98A2E"/>
+          </a:solidFill>
+          <a:ln/>
+        </p:spPr>
+      </p:sp>
+      <p:sp>
+        <p:nvSpPr>
+          <p:cNvPr id="17" name="Text 15"/>
+          <p:cNvSpPr/>
+          <p:nvPr/>
+        </p:nvSpPr>
+        <p:spPr>
+          <a:xfrm>
+            <a:off x="987552" y="4119372"/>
+            <a:ext cx="4389120" cy="592074"/>
+          </a:xfrm>
+          <a:prstGeom prst="rect">
+            <a:avLst/>
+          </a:prstGeom>
+          <a:noFill/>
+          <a:ln/>
+        </p:spPr>
+        <p:txBody>
+          <a:bodyPr wrap="square" lIns="0" tIns="0" rIns="0" bIns="0" rtlCol="0" anchor="t"/>
+          <a:lstStyle/>
+          <a:p>
+            <a:pPr indent="0" marL="0">
+              <a:lnSpc>
+                <a:spcPct val="112000"/>
+              </a:lnSpc>
+              <a:buNone/>
+            </a:pPr>
+            <a:r>
+              <a:rPr lang="en-US" sz="920" dirty="0">
+                <a:solidFill>
+                  <a:srgbClr val="10161F"/>
+                </a:solidFill>
+                <a:latin typeface="Pretendard" pitchFamily="34" charset="0"/>
+                <a:ea typeface="Pretendard" pitchFamily="34" charset="-122"/>
+                <a:cs typeface="Pretendard" pitchFamily="34" charset="-120"/>
+              </a:rPr>
+              <a:t>주변 주요 앵커 오피스 및 핵심 상업시설 인지도·집객 영향력 분석</a:t>
+            </a:r>
+            <a:endParaRPr lang="en-US" sz="920" dirty="0"/>
+          </a:p>
+        </p:txBody>
+      </p:sp>
+      <p:sp>
+        <p:nvSpPr>
+          <p:cNvPr id="18" name="Shape 16"/>
+          <p:cNvSpPr/>
+          <p:nvPr/>
+        </p:nvSpPr>
+        <p:spPr>
+          <a:xfrm>
+            <a:off x="859536" y="4802886"/>
+            <a:ext cx="64008" cy="64008"/>
+          </a:xfrm>
+          <a:prstGeom prst="rect">
+            <a:avLst/>
+          </a:prstGeom>
+          <a:solidFill>
+            <a:srgbClr val="B98A2E"/>
+          </a:solidFill>
+          <a:ln/>
+        </p:spPr>
+      </p:sp>
+      <p:sp>
+        <p:nvSpPr>
+          <p:cNvPr id="19" name="Text 17"/>
+          <p:cNvSpPr/>
+          <p:nvPr/>
+        </p:nvSpPr>
+        <p:spPr>
+          <a:xfrm>
+            <a:off x="987552" y="4748022"/>
+            <a:ext cx="4389120" cy="592074"/>
+          </a:xfrm>
+          <a:prstGeom prst="rect">
+            <a:avLst/>
+          </a:prstGeom>
+          <a:noFill/>
+          <a:ln/>
+        </p:spPr>
+        <p:txBody>
+          <a:bodyPr wrap="square" lIns="0" tIns="0" rIns="0" bIns="0" rtlCol="0" anchor="t"/>
+          <a:lstStyle/>
+          <a:p>
+            <a:pPr indent="0" marL="0">
+              <a:lnSpc>
+                <a:spcPct val="112000"/>
+              </a:lnSpc>
+              <a:buNone/>
+            </a:pPr>
+            <a:r>
+              <a:rPr lang="en-US" sz="920" dirty="0">
+                <a:solidFill>
+                  <a:srgbClr val="10161F"/>
+                </a:solidFill>
+                <a:latin typeface="Pretendard" pitchFamily="34" charset="0"/>
+                <a:ea typeface="Pretendard" pitchFamily="34" charset="-122"/>
+                <a:cs typeface="Pretendard" pitchFamily="34" charset="-120"/>
+              </a:rPr>
+              <a:t>향후 인근 도시교통계획망 신설 및 도로 확장 개발 호재 영향 점검</a:t>
+            </a:r>
+            <a:endParaRPr lang="en-US" sz="920" dirty="0"/>
+          </a:p>
+        </p:txBody>
+      </p:sp>
+      <p:sp>
+        <p:nvSpPr>
+          <p:cNvPr id="20" name="Text 18"/>
+          <p:cNvSpPr/>
+          <p:nvPr/>
+        </p:nvSpPr>
+        <p:spPr>
+          <a:xfrm>
+            <a:off x="6053328" y="1481328"/>
+            <a:ext cx="1560003" cy="347472"/>
+          </a:xfrm>
+          <a:prstGeom prst="rect">
+            <a:avLst/>
+          </a:prstGeom>
+          <a:noFill/>
+          <a:ln/>
+        </p:spPr>
+        <p:txBody>
+          <a:bodyPr wrap="square" lIns="0" tIns="0" rIns="0" bIns="0" rtlCol="0" anchor="ctr">
+            <a:normAutofit/>
+          </a:bodyPr>
           <a:lstStyle/>
           <a:p>
             <a:pPr indent="0" marL="0">
@@ -9777,7 +10750,51 @@
               <a:buNone/>
             </a:pPr>
             <a:r>
-              <a:rPr lang="en-US" sz="1150" b="1" dirty="0">
+              <a:rPr lang="en-US" sz="1100" dirty="0">
+                <a:solidFill>
+                  <a:srgbClr val="718096"/>
+                </a:solidFill>
+                <a:latin typeface="Pretendard" pitchFamily="34" charset="0"/>
+                <a:ea typeface="Pretendard" pitchFamily="34" charset="-122"/>
+                <a:cs typeface="Pretendard" pitchFamily="34" charset="-120"/>
+              </a:rPr>
+              <a:t>소재 권역</a:t>
+            </a:r>
+            <a:endParaRPr lang="en-US" sz="1100" dirty="0"/>
+          </a:p>
+        </p:txBody>
+      </p:sp>
+      <p:sp>
+        <p:nvSpPr>
+          <p:cNvPr id="21" name="Text 19"/>
+          <p:cNvSpPr/>
+          <p:nvPr/>
+        </p:nvSpPr>
+        <p:spPr>
+          <a:xfrm>
+            <a:off x="7613331" y="1481328"/>
+            <a:ext cx="4011436" cy="347472"/>
+          </a:xfrm>
+          <a:prstGeom prst="rect">
+            <a:avLst/>
+          </a:prstGeom>
+          <a:noFill/>
+          <a:ln/>
+        </p:spPr>
+        <p:txBody>
+          <a:bodyPr wrap="square" lIns="0" tIns="0" rIns="0" bIns="0" rtlCol="0" anchor="ctr">
+            <a:normAutofit/>
+          </a:bodyPr>
+          <a:lstStyle/>
+          <a:p>
+            <a:pPr indent="0" marL="0">
+              <a:lnSpc>
+                <a:spcPct val="115000"/>
+              </a:lnSpc>
+              <a:buNone/>
+            </a:pPr>
+            <a:r>
+              <a:rPr lang="en-US" sz="1100" b="1" dirty="0">
                 <a:solidFill>
                   <a:srgbClr val="10161F"/>
                 </a:solidFill>
@@ -9785,22 +10802,22 @@
                 <a:ea typeface="Pretendard" pitchFamily="34" charset="-122"/>
                 <a:cs typeface="Pretendard" pitchFamily="34" charset="-120"/>
               </a:rPr>
-              <a:t>135억 원</a:t>
-            </a:r>
-            <a:endParaRPr lang="en-US" sz="1150" dirty="0"/>
-          </a:p>
-        </p:txBody>
-      </p:sp>
-      <p:sp>
-        <p:nvSpPr>
-          <p:cNvPr id="10" name="Shape 8"/>
-          <p:cNvSpPr/>
-          <p:nvPr/>
-        </p:nvSpPr>
-        <p:spPr>
-          <a:xfrm>
-            <a:off x="731520" y="2487168"/>
-            <a:ext cx="4934560" cy="0"/>
+              <a:t>도심 핵심 권역</a:t>
+            </a:r>
+            <a:endParaRPr lang="en-US" sz="1100" dirty="0"/>
+          </a:p>
+        </p:txBody>
+      </p:sp>
+      <p:sp>
+        <p:nvSpPr>
+          <p:cNvPr id="22" name="Shape 20"/>
+          <p:cNvSpPr/>
+          <p:nvPr/>
+        </p:nvSpPr>
+        <p:spPr>
+          <a:xfrm>
+            <a:off x="6053328" y="1828800"/>
+            <a:ext cx="5571439" cy="0"/>
           </a:xfrm>
           <a:prstGeom prst="line">
             <a:avLst/>
@@ -9816,23 +10833,25 @@
       </p:sp>
       <p:sp>
         <p:nvSpPr>
-          <p:cNvPr id="11" name="Text 9"/>
-          <p:cNvSpPr/>
-          <p:nvPr/>
-        </p:nvSpPr>
-        <p:spPr>
-          <a:xfrm>
-            <a:off x="731520" y="2487168"/>
-            <a:ext cx="2269897" cy="475488"/>
-          </a:xfrm>
-          <a:prstGeom prst="rect">
-            <a:avLst/>
-          </a:prstGeom>
-          <a:noFill/>
-          <a:ln/>
-        </p:spPr>
-        <p:txBody>
-          <a:bodyPr wrap="square" lIns="0" tIns="0" rIns="0" bIns="0" rtlCol="0" anchor="ctr"/>
+          <p:cNvPr id="23" name="Text 21"/>
+          <p:cNvSpPr/>
+          <p:nvPr/>
+        </p:nvSpPr>
+        <p:spPr>
+          <a:xfrm>
+            <a:off x="6053328" y="1828800"/>
+            <a:ext cx="1560003" cy="347472"/>
+          </a:xfrm>
+          <a:prstGeom prst="rect">
+            <a:avLst/>
+          </a:prstGeom>
+          <a:noFill/>
+          <a:ln/>
+        </p:spPr>
+        <p:txBody>
+          <a:bodyPr wrap="square" lIns="0" tIns="0" rIns="0" bIns="0" rtlCol="0" anchor="ctr">
+            <a:normAutofit/>
+          </a:bodyPr>
           <a:lstStyle/>
           <a:p>
             <a:pPr indent="0" marL="0">
@@ -9842,7 +10861,7 @@
               <a:buNone/>
             </a:pPr>
             <a:r>
-              <a:rPr lang="en-US" sz="1150" dirty="0">
+              <a:rPr lang="en-US" sz="1100" dirty="0">
                 <a:solidFill>
                   <a:srgbClr val="718096"/>
                 </a:solidFill>
@@ -9850,31 +10869,33 @@
                 <a:ea typeface="Pretendard" pitchFamily="34" charset="-122"/>
                 <a:cs typeface="Pretendard" pitchFamily="34" charset="-120"/>
               </a:rPr>
-              <a:t>취득세 (4.6% 법정)</a:t>
-            </a:r>
-            <a:endParaRPr lang="en-US" sz="1150" dirty="0"/>
-          </a:p>
-        </p:txBody>
-      </p:sp>
-      <p:sp>
-        <p:nvSpPr>
-          <p:cNvPr id="12" name="Text 10"/>
-          <p:cNvSpPr/>
-          <p:nvPr/>
-        </p:nvSpPr>
-        <p:spPr>
-          <a:xfrm>
-            <a:off x="3001417" y="2487168"/>
-            <a:ext cx="2664662" cy="475488"/>
-          </a:xfrm>
-          <a:prstGeom prst="rect">
-            <a:avLst/>
-          </a:prstGeom>
-          <a:noFill/>
-          <a:ln/>
-        </p:spPr>
-        <p:txBody>
-          <a:bodyPr wrap="square" lIns="0" tIns="0" rIns="0" bIns="0" rtlCol="0" anchor="ctr"/>
+              <a:t>대중교통</a:t>
+            </a:r>
+            <a:endParaRPr lang="en-US" sz="1100" dirty="0"/>
+          </a:p>
+        </p:txBody>
+      </p:sp>
+      <p:sp>
+        <p:nvSpPr>
+          <p:cNvPr id="24" name="Text 22"/>
+          <p:cNvSpPr/>
+          <p:nvPr/>
+        </p:nvSpPr>
+        <p:spPr>
+          <a:xfrm>
+            <a:off x="7613331" y="1828800"/>
+            <a:ext cx="4011436" cy="347472"/>
+          </a:xfrm>
+          <a:prstGeom prst="rect">
+            <a:avLst/>
+          </a:prstGeom>
+          <a:noFill/>
+          <a:ln/>
+        </p:spPr>
+        <p:txBody>
+          <a:bodyPr wrap="square" lIns="0" tIns="0" rIns="0" bIns="0" rtlCol="0" anchor="ctr">
+            <a:normAutofit/>
+          </a:bodyPr>
           <a:lstStyle/>
           <a:p>
             <a:pPr indent="0" marL="0">
@@ -9884,7 +10905,7 @@
               <a:buNone/>
             </a:pPr>
             <a:r>
-              <a:rPr lang="en-US" sz="1150" b="1" dirty="0">
+              <a:rPr lang="en-US" sz="1100" b="1" dirty="0">
                 <a:solidFill>
                   <a:srgbClr val="10161F"/>
                 </a:solidFill>
@@ -9892,22 +10913,22 @@
                 <a:ea typeface="Pretendard" pitchFamily="34" charset="-122"/>
                 <a:cs typeface="Pretendard" pitchFamily="34" charset="-120"/>
               </a:rPr>
-              <a:t>6.21억 원</a:t>
-            </a:r>
-            <a:endParaRPr lang="en-US" sz="1150" dirty="0"/>
-          </a:p>
-        </p:txBody>
-      </p:sp>
-      <p:sp>
-        <p:nvSpPr>
-          <p:cNvPr id="13" name="Shape 11"/>
-          <p:cNvSpPr/>
-          <p:nvPr/>
-        </p:nvSpPr>
-        <p:spPr>
-          <a:xfrm>
-            <a:off x="731520" y="2962656"/>
-            <a:ext cx="4934560" cy="0"/>
+              <a:t>지하철 및 간선버스 노선 인접</a:t>
+            </a:r>
+            <a:endParaRPr lang="en-US" sz="1100" dirty="0"/>
+          </a:p>
+        </p:txBody>
+      </p:sp>
+      <p:sp>
+        <p:nvSpPr>
+          <p:cNvPr id="25" name="Shape 23"/>
+          <p:cNvSpPr/>
+          <p:nvPr/>
+        </p:nvSpPr>
+        <p:spPr>
+          <a:xfrm>
+            <a:off x="6053328" y="2176272"/>
+            <a:ext cx="5571439" cy="0"/>
           </a:xfrm>
           <a:prstGeom prst="line">
             <a:avLst/>
@@ -9923,23 +10944,25 @@
       </p:sp>
       <p:sp>
         <p:nvSpPr>
-          <p:cNvPr id="14" name="Text 12"/>
-          <p:cNvSpPr/>
-          <p:nvPr/>
-        </p:nvSpPr>
-        <p:spPr>
-          <a:xfrm>
-            <a:off x="731520" y="2962656"/>
-            <a:ext cx="2269897" cy="475488"/>
-          </a:xfrm>
-          <a:prstGeom prst="rect">
-            <a:avLst/>
-          </a:prstGeom>
-          <a:noFill/>
-          <a:ln/>
-        </p:spPr>
-        <p:txBody>
-          <a:bodyPr wrap="square" lIns="0" tIns="0" rIns="0" bIns="0" rtlCol="0" anchor="ctr"/>
+          <p:cNvPr id="26" name="Text 24"/>
+          <p:cNvSpPr/>
+          <p:nvPr/>
+        </p:nvSpPr>
+        <p:spPr>
+          <a:xfrm>
+            <a:off x="6053328" y="2176272"/>
+            <a:ext cx="1560003" cy="347472"/>
+          </a:xfrm>
+          <a:prstGeom prst="rect">
+            <a:avLst/>
+          </a:prstGeom>
+          <a:noFill/>
+          <a:ln/>
+        </p:spPr>
+        <p:txBody>
+          <a:bodyPr wrap="square" lIns="0" tIns="0" rIns="0" bIns="0" rtlCol="0" anchor="ctr">
+            <a:normAutofit/>
+          </a:bodyPr>
           <a:lstStyle/>
           <a:p>
             <a:pPr indent="0" marL="0">
@@ -9949,7 +10972,7 @@
               <a:buNone/>
             </a:pPr>
             <a:r>
-              <a:rPr lang="en-US" sz="1150" dirty="0">
+              <a:rPr lang="en-US" sz="1100" dirty="0">
                 <a:solidFill>
                   <a:srgbClr val="718096"/>
                 </a:solidFill>
@@ -9957,31 +10980,33 @@
                 <a:ea typeface="Pretendard" pitchFamily="34" charset="-122"/>
                 <a:cs typeface="Pretendard" pitchFamily="34" charset="-120"/>
               </a:rPr>
-              <a:t>중개보수 (0.9% 한도)</a:t>
-            </a:r>
-            <a:endParaRPr lang="en-US" sz="1150" dirty="0"/>
-          </a:p>
-        </p:txBody>
-      </p:sp>
-      <p:sp>
-        <p:nvSpPr>
-          <p:cNvPr id="15" name="Text 13"/>
-          <p:cNvSpPr/>
-          <p:nvPr/>
-        </p:nvSpPr>
-        <p:spPr>
-          <a:xfrm>
-            <a:off x="3001417" y="2962656"/>
-            <a:ext cx="2664662" cy="475488"/>
-          </a:xfrm>
-          <a:prstGeom prst="rect">
-            <a:avLst/>
-          </a:prstGeom>
-          <a:noFill/>
-          <a:ln/>
-        </p:spPr>
-        <p:txBody>
-          <a:bodyPr wrap="square" lIns="0" tIns="0" rIns="0" bIns="0" rtlCol="0" anchor="ctr"/>
+              <a:t>주변 인프라</a:t>
+            </a:r>
+            <a:endParaRPr lang="en-US" sz="1100" dirty="0"/>
+          </a:p>
+        </p:txBody>
+      </p:sp>
+      <p:sp>
+        <p:nvSpPr>
+          <p:cNvPr id="27" name="Text 25"/>
+          <p:cNvSpPr/>
+          <p:nvPr/>
+        </p:nvSpPr>
+        <p:spPr>
+          <a:xfrm>
+            <a:off x="7613331" y="2176272"/>
+            <a:ext cx="4011436" cy="347472"/>
+          </a:xfrm>
+          <a:prstGeom prst="rect">
+            <a:avLst/>
+          </a:prstGeom>
+          <a:noFill/>
+          <a:ln/>
+        </p:spPr>
+        <p:txBody>
+          <a:bodyPr wrap="square" lIns="0" tIns="0" rIns="0" bIns="0" rtlCol="0" anchor="ctr">
+            <a:normAutofit/>
+          </a:bodyPr>
           <a:lstStyle/>
           <a:p>
             <a:pPr indent="0" marL="0">
@@ -9991,7 +11016,7 @@
               <a:buNone/>
             </a:pPr>
             <a:r>
-              <a:rPr lang="en-US" sz="1150" b="1" dirty="0">
+              <a:rPr lang="en-US" sz="1100" b="1" dirty="0">
                 <a:solidFill>
                   <a:srgbClr val="10161F"/>
                 </a:solidFill>
@@ -9999,45 +11024,22 @@
                 <a:ea typeface="Pretendard" pitchFamily="34" charset="-122"/>
                 <a:cs typeface="Pretendard" pitchFamily="34" charset="-120"/>
               </a:rPr>
-              <a:t>1.22억 원</a:t>
-            </a:r>
-            <a:endParaRPr lang="en-US" sz="1150" dirty="0"/>
-          </a:p>
-        </p:txBody>
-      </p:sp>
-      <p:sp>
-        <p:nvSpPr>
-          <p:cNvPr id="16" name="Shape 14"/>
-          <p:cNvSpPr/>
-          <p:nvPr/>
-        </p:nvSpPr>
-        <p:spPr>
-          <a:xfrm>
-            <a:off x="731520" y="3438144"/>
-            <a:ext cx="4934560" cy="0"/>
-          </a:xfrm>
-          <a:prstGeom prst="line">
-            <a:avLst/>
-          </a:prstGeom>
-          <a:noFill/>
-          <a:ln w="3810">
-            <a:solidFill>
-              <a:srgbClr val="CBD5E0"/>
-            </a:solidFill>
-            <a:prstDash val="solid"/>
-          </a:ln>
-        </p:spPr>
-      </p:sp>
-      <p:sp>
-        <p:nvSpPr>
-          <p:cNvPr id="17" name="Text 15"/>
-          <p:cNvSpPr/>
-          <p:nvPr/>
-        </p:nvSpPr>
-        <p:spPr>
-          <a:xfrm>
-            <a:off x="731520" y="3438144"/>
-            <a:ext cx="2269897" cy="475488"/>
+              <a:t>업무 및 상업 편의시설 밀집</a:t>
+            </a:r>
+            <a:endParaRPr lang="en-US" sz="1100" dirty="0"/>
+          </a:p>
+        </p:txBody>
+      </p:sp>
+      <p:sp>
+        <p:nvSpPr>
+          <p:cNvPr id="28" name="Text 26"/>
+          <p:cNvSpPr/>
+          <p:nvPr/>
+        </p:nvSpPr>
+        <p:spPr>
+          <a:xfrm>
+            <a:off x="566928" y="6382512"/>
+            <a:ext cx="7315200" cy="219456"/>
           </a:xfrm>
           <a:prstGeom prst="rect">
             <a:avLst/>
@@ -10050,13 +11052,10 @@
           <a:lstStyle/>
           <a:p>
             <a:pPr indent="0" marL="0">
-              <a:lnSpc>
-                <a:spcPct val="115000"/>
-              </a:lnSpc>
-              <a:buNone/>
-            </a:pPr>
-            <a:r>
-              <a:rPr lang="en-US" sz="1150" dirty="0">
+              <a:buNone/>
+            </a:pPr>
+            <a:r>
+              <a:rPr lang="en-US" sz="800" dirty="0">
                 <a:solidFill>
                   <a:srgbClr val="718096"/>
                 </a:solidFill>
@@ -10064,22 +11063,22 @@
                 <a:ea typeface="Pretendard" pitchFamily="34" charset="-122"/>
                 <a:cs typeface="Pretendard" pitchFamily="34" charset="-120"/>
               </a:rPr>
-              <a:t>총취득원가 (A + 세/비용)</a:t>
-            </a:r>
-            <a:endParaRPr lang="en-US" sz="1150" dirty="0"/>
-          </a:p>
-        </p:txBody>
-      </p:sp>
-      <p:sp>
-        <p:nvSpPr>
-          <p:cNvPr id="18" name="Text 16"/>
-          <p:cNvSpPr/>
-          <p:nvPr/>
-        </p:nvSpPr>
-        <p:spPr>
-          <a:xfrm>
-            <a:off x="3001417" y="3438144"/>
-            <a:ext cx="2664662" cy="475488"/>
+              <a:t>크리딜</a:t>
+            </a:r>
+            <a:endParaRPr lang="en-US" sz="800" dirty="0"/>
+          </a:p>
+        </p:txBody>
+      </p:sp>
+      <p:sp>
+        <p:nvSpPr>
+          <p:cNvPr id="29" name="Text 27"/>
+          <p:cNvSpPr/>
+          <p:nvPr/>
+        </p:nvSpPr>
+        <p:spPr>
+          <a:xfrm>
+            <a:off x="10710367" y="6382512"/>
+            <a:ext cx="914400" cy="219456"/>
           </a:xfrm>
           <a:prstGeom prst="rect">
             <a:avLst/>
@@ -10091,14 +11090,182 @@
           <a:bodyPr wrap="square" lIns="0" tIns="0" rIns="0" bIns="0" rtlCol="0" anchor="ctr"/>
           <a:lstStyle/>
           <a:p>
+            <a:pPr algn="r" indent="0" marL="0">
+              <a:buNone/>
+            </a:pPr>
+            <a:r>
+              <a:rPr lang="en-US" sz="900" b="1" dirty="0">
+                <a:solidFill>
+                  <a:srgbClr val="B98A2E"/>
+                </a:solidFill>
+                <a:latin typeface="Arial" pitchFamily="34" charset="0"/>
+                <a:ea typeface="Arial" pitchFamily="34" charset="-122"/>
+                <a:cs typeface="Arial" pitchFamily="34" charset="-120"/>
+              </a:rPr>
+              <a:t>7</a:t>
+            </a:r>
+            <a:endParaRPr lang="en-US" sz="900" dirty="0"/>
+          </a:p>
+        </p:txBody>
+      </p:sp>
+    </p:spTree>
+  </p:cSld>
+  <p:clrMapOvr>
+    <a:masterClrMapping/>
+  </p:clrMapOvr>
+</p:sld>
+</file>
+
+<file path=ppt/slides/slide8.xml><?xml version="1.0" encoding="utf-8"?>
+<p:sld xmlns:a="http://schemas.openxmlformats.org/drawingml/2006/main" xmlns:r="http://schemas.openxmlformats.org/officeDocument/2006/relationships" xmlns:p="http://schemas.openxmlformats.org/presentationml/2006/main">
+  <p:cSld name="Slide 8">
+    <p:bg>
+      <p:bgPr>
+        <a:solidFill>
+          <a:srgbClr val="FFFFFF"/>
+        </a:solidFill>
+      </p:bgPr>
+    </p:bg>
+    <p:spTree>
+      <p:nvGrpSpPr>
+        <p:cNvPr id="1" name=""/>
+        <p:cNvGrpSpPr/>
+        <p:nvPr/>
+      </p:nvGrpSpPr>
+      <p:grpSpPr>
+        <a:xfrm>
+          <a:off x="0" y="0"/>
+          <a:ext cx="0" cy="0"/>
+          <a:chOff x="0" y="0"/>
+          <a:chExt cx="0" cy="0"/>
+        </a:xfrm>
+      </p:grpSpPr>
+      <p:sp>
+        <p:nvSpPr>
+          <p:cNvPr id="2" name="Shape 0"/>
+          <p:cNvSpPr/>
+          <p:nvPr/>
+        </p:nvSpPr>
+        <p:spPr>
+          <a:xfrm>
+            <a:off x="566928" y="457200"/>
+            <a:ext cx="384048" cy="384048"/>
+          </a:xfrm>
+          <a:prstGeom prst="ellipse">
+            <a:avLst/>
+          </a:prstGeom>
+          <a:solidFill>
+            <a:srgbClr val="B98A2E"/>
+          </a:solidFill>
+          <a:ln/>
+        </p:spPr>
+      </p:sp>
+      <p:sp>
+        <p:nvSpPr>
+          <p:cNvPr id="3" name="Text 1"/>
+          <p:cNvSpPr/>
+          <p:nvPr/>
+        </p:nvSpPr>
+        <p:spPr>
+          <a:xfrm>
+            <a:off x="566928" y="457200"/>
+            <a:ext cx="384048" cy="384048"/>
+          </a:xfrm>
+          <a:prstGeom prst="rect">
+            <a:avLst/>
+          </a:prstGeom>
+          <a:noFill/>
+          <a:ln/>
+        </p:spPr>
+        <p:txBody>
+          <a:bodyPr wrap="square" lIns="0" tIns="0" rIns="0" bIns="0" rtlCol="0" anchor="ctr"/>
+          <a:lstStyle/>
+          <a:p>
+            <a:pPr algn="ctr" indent="0" marL="0">
+              <a:buNone/>
+            </a:pPr>
+            <a:r>
+              <a:rPr lang="en-US" sz="1300" b="1" dirty="0">
+                <a:solidFill>
+                  <a:srgbClr val="FFFFFF"/>
+                </a:solidFill>
+                <a:latin typeface="Arial" pitchFamily="34" charset="0"/>
+                <a:ea typeface="Arial" pitchFamily="34" charset="-122"/>
+                <a:cs typeface="Arial" pitchFamily="34" charset="-120"/>
+              </a:rPr>
+              <a:t>08</a:t>
+            </a:r>
+            <a:endParaRPr lang="en-US" sz="1300" dirty="0"/>
+          </a:p>
+        </p:txBody>
+      </p:sp>
+      <p:sp>
+        <p:nvSpPr>
+          <p:cNvPr id="4" name="Text 2"/>
+          <p:cNvSpPr/>
+          <p:nvPr/>
+        </p:nvSpPr>
+        <p:spPr>
+          <a:xfrm>
+            <a:off x="1133856" y="457200"/>
+            <a:ext cx="10490911" cy="182880"/>
+          </a:xfrm>
+          <a:prstGeom prst="rect">
+            <a:avLst/>
+          </a:prstGeom>
+          <a:noFill/>
+          <a:ln/>
+        </p:spPr>
+        <p:txBody>
+          <a:bodyPr wrap="square" lIns="0" tIns="0" rIns="0" bIns="0" rtlCol="0" anchor="ctr"/>
+          <a:lstStyle/>
+          <a:p>
             <a:pPr indent="0" marL="0">
-              <a:lnSpc>
-                <a:spcPct val="115000"/>
-              </a:lnSpc>
-              <a:buNone/>
-            </a:pPr>
-            <a:r>
-              <a:rPr lang="en-US" sz="1150" b="1" dirty="0">
+              <a:buNone/>
+            </a:pPr>
+            <a:r>
+              <a:rPr lang="en-US" sz="950" b="1" spc="200" kern="0" dirty="0">
+                <a:solidFill>
+                  <a:srgbClr val="B98A2E"/>
+                </a:solidFill>
+                <a:latin typeface="Arial" pitchFamily="34" charset="0"/>
+                <a:ea typeface="Arial" pitchFamily="34" charset="-122"/>
+                <a:cs typeface="Arial" pitchFamily="34" charset="-120"/>
+              </a:rPr>
+              <a:t>Capital</a:t>
+            </a:r>
+            <a:endParaRPr lang="en-US" sz="950" dirty="0"/>
+          </a:p>
+        </p:txBody>
+      </p:sp>
+      <p:sp>
+        <p:nvSpPr>
+          <p:cNvPr id="5" name="Text 3"/>
+          <p:cNvSpPr/>
+          <p:nvPr/>
+        </p:nvSpPr>
+        <p:spPr>
+          <a:xfrm>
+            <a:off x="1133856" y="640080"/>
+            <a:ext cx="10490911" cy="365760"/>
+          </a:xfrm>
+          <a:prstGeom prst="rect">
+            <a:avLst/>
+          </a:prstGeom>
+          <a:noFill/>
+          <a:ln/>
+        </p:spPr>
+        <p:txBody>
+          <a:bodyPr wrap="square" lIns="0" tIns="0" rIns="0" bIns="0" rtlCol="0" anchor="ctr">
+            <a:normAutofit/>
+          </a:bodyPr>
+          <a:lstStyle/>
+          <a:p>
+            <a:pPr indent="0" marL="0">
+              <a:buNone/>
+            </a:pPr>
+            <a:r>
+              <a:rPr lang="en-US" sz="2300" b="1" dirty="0">
                 <a:solidFill>
                   <a:srgbClr val="10161F"/>
                 </a:solidFill>
@@ -10106,342 +11273,21 @@
                 <a:ea typeface="Pretendard" pitchFamily="34" charset="-122"/>
                 <a:cs typeface="Pretendard" pitchFamily="34" charset="-120"/>
               </a:rPr>
-              <a:t>142.4억 원</a:t>
-            </a:r>
-            <a:endParaRPr lang="en-US" sz="1150" dirty="0"/>
-          </a:p>
-        </p:txBody>
-      </p:sp>
-      <p:sp>
-        <p:nvSpPr>
-          <p:cNvPr id="19" name="Shape 17"/>
-          <p:cNvSpPr/>
-          <p:nvPr/>
-        </p:nvSpPr>
-        <p:spPr>
-          <a:xfrm>
-            <a:off x="731520" y="3913632"/>
-            <a:ext cx="4934560" cy="0"/>
-          </a:xfrm>
-          <a:prstGeom prst="line">
-            <a:avLst/>
-          </a:prstGeom>
-          <a:noFill/>
-          <a:ln w="3810">
-            <a:solidFill>
-              <a:srgbClr val="CBD5E0"/>
-            </a:solidFill>
-            <a:prstDash val="solid"/>
-          </a:ln>
-        </p:spPr>
-      </p:sp>
-      <p:sp>
-        <p:nvSpPr>
-          <p:cNvPr id="20" name="Text 18"/>
-          <p:cNvSpPr/>
-          <p:nvPr/>
-        </p:nvSpPr>
-        <p:spPr>
-          <a:xfrm>
-            <a:off x="731520" y="3913632"/>
-            <a:ext cx="2269897" cy="475488"/>
-          </a:xfrm>
-          <a:prstGeom prst="rect">
-            <a:avLst/>
-          </a:prstGeom>
-          <a:noFill/>
-          <a:ln/>
-        </p:spPr>
-        <p:txBody>
-          <a:bodyPr wrap="square" lIns="0" tIns="0" rIns="0" bIns="0" rtlCol="0" anchor="ctr"/>
-          <a:lstStyle/>
-          <a:p>
-            <a:pPr indent="0" marL="0">
-              <a:lnSpc>
-                <a:spcPct val="115000"/>
-              </a:lnSpc>
-              <a:buNone/>
-            </a:pPr>
-            <a:r>
-              <a:rPr lang="en-US" sz="1150" dirty="0">
-                <a:solidFill>
-                  <a:srgbClr val="718096"/>
-                </a:solidFill>
-                <a:latin typeface="Pretendard" pitchFamily="34" charset="0"/>
-                <a:ea typeface="Pretendard" pitchFamily="34" charset="-122"/>
-                <a:cs typeface="Pretendard" pitchFamily="34" charset="-120"/>
-              </a:rPr>
-              <a:t>(-) 임대보증금 승계</a:t>
-            </a:r>
-            <a:endParaRPr lang="en-US" sz="1150" dirty="0"/>
-          </a:p>
-        </p:txBody>
-      </p:sp>
-      <p:sp>
-        <p:nvSpPr>
-          <p:cNvPr id="21" name="Text 19"/>
-          <p:cNvSpPr/>
-          <p:nvPr/>
-        </p:nvSpPr>
-        <p:spPr>
-          <a:xfrm>
-            <a:off x="3001417" y="3913632"/>
-            <a:ext cx="2664662" cy="475488"/>
-          </a:xfrm>
-          <a:prstGeom prst="rect">
-            <a:avLst/>
-          </a:prstGeom>
-          <a:noFill/>
-          <a:ln/>
-        </p:spPr>
-        <p:txBody>
-          <a:bodyPr wrap="square" lIns="0" tIns="0" rIns="0" bIns="0" rtlCol="0" anchor="ctr"/>
-          <a:lstStyle/>
-          <a:p>
-            <a:pPr indent="0" marL="0">
-              <a:lnSpc>
-                <a:spcPct val="115000"/>
-              </a:lnSpc>
-              <a:buNone/>
-            </a:pPr>
-            <a:r>
-              <a:rPr lang="en-US" sz="1150" b="1" dirty="0">
-                <a:solidFill>
-                  <a:srgbClr val="10161F"/>
-                </a:solidFill>
-                <a:latin typeface="Pretendard" pitchFamily="34" charset="0"/>
-                <a:ea typeface="Pretendard" pitchFamily="34" charset="-122"/>
-                <a:cs typeface="Pretendard" pitchFamily="34" charset="-120"/>
-              </a:rPr>
-              <a:t>-</a:t>
-            </a:r>
-            <a:endParaRPr lang="en-US" sz="1150" dirty="0"/>
-          </a:p>
-        </p:txBody>
-      </p:sp>
-      <p:sp>
-        <p:nvSpPr>
-          <p:cNvPr id="22" name="Shape 20"/>
-          <p:cNvSpPr/>
-          <p:nvPr/>
-        </p:nvSpPr>
-        <p:spPr>
-          <a:xfrm>
-            <a:off x="731520" y="4389120"/>
-            <a:ext cx="4934560" cy="0"/>
-          </a:xfrm>
-          <a:prstGeom prst="line">
-            <a:avLst/>
-          </a:prstGeom>
-          <a:noFill/>
-          <a:ln w="3810">
-            <a:solidFill>
-              <a:srgbClr val="CBD5E0"/>
-            </a:solidFill>
-            <a:prstDash val="solid"/>
-          </a:ln>
-        </p:spPr>
-      </p:sp>
-      <p:sp>
-        <p:nvSpPr>
-          <p:cNvPr id="23" name="Text 21"/>
-          <p:cNvSpPr/>
-          <p:nvPr/>
-        </p:nvSpPr>
-        <p:spPr>
-          <a:xfrm>
-            <a:off x="731520" y="4389120"/>
-            <a:ext cx="2269897" cy="475488"/>
-          </a:xfrm>
-          <a:prstGeom prst="rect">
-            <a:avLst/>
-          </a:prstGeom>
-          <a:noFill/>
-          <a:ln/>
-        </p:spPr>
-        <p:txBody>
-          <a:bodyPr wrap="square" lIns="0" tIns="0" rIns="0" bIns="0" rtlCol="0" anchor="ctr"/>
-          <a:lstStyle/>
-          <a:p>
-            <a:pPr indent="0" marL="0">
-              <a:lnSpc>
-                <a:spcPct val="115000"/>
-              </a:lnSpc>
-              <a:buNone/>
-            </a:pPr>
-            <a:r>
-              <a:rPr lang="en-US" sz="1150" dirty="0">
-                <a:solidFill>
-                  <a:srgbClr val="718096"/>
-                </a:solidFill>
-                <a:latin typeface="Pretendard" pitchFamily="34" charset="0"/>
-                <a:ea typeface="Pretendard" pitchFamily="34" charset="-122"/>
-                <a:cs typeface="Pretendard" pitchFamily="34" charset="-120"/>
-              </a:rPr>
-              <a:t>(-) 담보대출 조달</a:t>
-            </a:r>
-            <a:endParaRPr lang="en-US" sz="1150" dirty="0"/>
-          </a:p>
-        </p:txBody>
-      </p:sp>
-      <p:sp>
-        <p:nvSpPr>
-          <p:cNvPr id="24" name="Text 22"/>
-          <p:cNvSpPr/>
-          <p:nvPr/>
-        </p:nvSpPr>
-        <p:spPr>
-          <a:xfrm>
-            <a:off x="3001417" y="4389120"/>
-            <a:ext cx="2664662" cy="475488"/>
-          </a:xfrm>
-          <a:prstGeom prst="rect">
-            <a:avLst/>
-          </a:prstGeom>
-          <a:noFill/>
-          <a:ln/>
-        </p:spPr>
-        <p:txBody>
-          <a:bodyPr wrap="square" lIns="0" tIns="0" rIns="0" bIns="0" rtlCol="0" anchor="ctr"/>
-          <a:lstStyle/>
-          <a:p>
-            <a:pPr indent="0" marL="0">
-              <a:lnSpc>
-                <a:spcPct val="115000"/>
-              </a:lnSpc>
-              <a:buNone/>
-            </a:pPr>
-            <a:r>
-              <a:rPr lang="en-US" sz="1150" b="1" dirty="0">
-                <a:solidFill>
-                  <a:srgbClr val="10161F"/>
-                </a:solidFill>
-                <a:latin typeface="Pretendard" pitchFamily="34" charset="0"/>
-                <a:ea typeface="Pretendard" pitchFamily="34" charset="-122"/>
-                <a:cs typeface="Pretendard" pitchFamily="34" charset="-120"/>
-              </a:rPr>
-              <a:t>67.5억 원</a:t>
-            </a:r>
-            <a:endParaRPr lang="en-US" sz="1150" dirty="0"/>
-          </a:p>
-        </p:txBody>
-      </p:sp>
-      <p:sp>
-        <p:nvSpPr>
-          <p:cNvPr id="25" name="Shape 23"/>
-          <p:cNvSpPr/>
-          <p:nvPr/>
-        </p:nvSpPr>
-        <p:spPr>
-          <a:xfrm>
-            <a:off x="731520" y="4864608"/>
-            <a:ext cx="4934560" cy="0"/>
-          </a:xfrm>
-          <a:prstGeom prst="line">
-            <a:avLst/>
-          </a:prstGeom>
-          <a:noFill/>
-          <a:ln w="3810">
-            <a:solidFill>
-              <a:srgbClr val="CBD5E0"/>
-            </a:solidFill>
-            <a:prstDash val="solid"/>
-          </a:ln>
-        </p:spPr>
-      </p:sp>
-      <p:sp>
-        <p:nvSpPr>
-          <p:cNvPr id="26" name="Text 24"/>
-          <p:cNvSpPr/>
-          <p:nvPr/>
-        </p:nvSpPr>
-        <p:spPr>
-          <a:xfrm>
-            <a:off x="731520" y="4864608"/>
-            <a:ext cx="2269897" cy="475488"/>
-          </a:xfrm>
-          <a:prstGeom prst="rect">
-            <a:avLst/>
-          </a:prstGeom>
-          <a:noFill/>
-          <a:ln/>
-        </p:spPr>
-        <p:txBody>
-          <a:bodyPr wrap="square" lIns="0" tIns="0" rIns="0" bIns="0" rtlCol="0" anchor="ctr"/>
-          <a:lstStyle/>
-          <a:p>
-            <a:pPr indent="0" marL="0">
-              <a:lnSpc>
-                <a:spcPct val="115000"/>
-              </a:lnSpc>
-              <a:buNone/>
-            </a:pPr>
-            <a:r>
-              <a:rPr lang="en-US" sz="1150" dirty="0">
-                <a:solidFill>
-                  <a:srgbClr val="718096"/>
-                </a:solidFill>
-                <a:latin typeface="Pretendard" pitchFamily="34" charset="0"/>
-                <a:ea typeface="Pretendard" pitchFamily="34" charset="-122"/>
-                <a:cs typeface="Pretendard" pitchFamily="34" charset="-120"/>
-              </a:rPr>
-              <a:t>실투자금 (Net Equity)</a:t>
-            </a:r>
-            <a:endParaRPr lang="en-US" sz="1150" dirty="0"/>
-          </a:p>
-        </p:txBody>
-      </p:sp>
-      <p:sp>
-        <p:nvSpPr>
-          <p:cNvPr id="27" name="Text 25"/>
-          <p:cNvSpPr/>
-          <p:nvPr/>
-        </p:nvSpPr>
-        <p:spPr>
-          <a:xfrm>
-            <a:off x="3001417" y="4864608"/>
-            <a:ext cx="2664662" cy="475488"/>
-          </a:xfrm>
-          <a:prstGeom prst="rect">
-            <a:avLst/>
-          </a:prstGeom>
-          <a:noFill/>
-          <a:ln/>
-        </p:spPr>
-        <p:txBody>
-          <a:bodyPr wrap="square" lIns="0" tIns="0" rIns="0" bIns="0" rtlCol="0" anchor="ctr"/>
-          <a:lstStyle/>
-          <a:p>
-            <a:pPr indent="0" marL="0">
-              <a:lnSpc>
-                <a:spcPct val="115000"/>
-              </a:lnSpc>
-              <a:buNone/>
-            </a:pPr>
-            <a:r>
-              <a:rPr lang="en-US" sz="1150" b="1" dirty="0">
-                <a:solidFill>
-                  <a:srgbClr val="10161F"/>
-                </a:solidFill>
-                <a:latin typeface="Pretendard" pitchFamily="34" charset="0"/>
-                <a:ea typeface="Pretendard" pitchFamily="34" charset="-122"/>
-                <a:cs typeface="Pretendard" pitchFamily="34" charset="-120"/>
-              </a:rPr>
-              <a:t>74.9억 원</a:t>
-            </a:r>
-            <a:endParaRPr lang="en-US" sz="1150" dirty="0"/>
-          </a:p>
-        </p:txBody>
-      </p:sp>
-      <p:sp>
-        <p:nvSpPr>
-          <p:cNvPr id="28" name="Shape 26"/>
-          <p:cNvSpPr/>
-          <p:nvPr/>
-        </p:nvSpPr>
-        <p:spPr>
-          <a:xfrm>
-            <a:off x="6169000" y="1417320"/>
+              <a:t>자본구조</a:t>
+            </a:r>
+            <a:endParaRPr lang="en-US" sz="2300" dirty="0"/>
+          </a:p>
+        </p:txBody>
+      </p:sp>
+      <p:sp>
+        <p:nvSpPr>
+          <p:cNvPr id="6" name="Shape 4"/>
+          <p:cNvSpPr/>
+          <p:nvPr/>
+        </p:nvSpPr>
+        <p:spPr>
+          <a:xfrm>
+            <a:off x="566928" y="1417320"/>
             <a:ext cx="5391760" cy="4389120"/>
           </a:xfrm>
           <a:prstGeom prst="roundRect">
@@ -10462,13 +11308,833 @@
       </p:sp>
       <p:sp>
         <p:nvSpPr>
+          <p:cNvPr id="7" name="Text 5"/>
+          <p:cNvSpPr/>
+          <p:nvPr/>
+        </p:nvSpPr>
+        <p:spPr>
+          <a:xfrm>
+            <a:off x="795528" y="1618488"/>
+            <a:ext cx="4934560" cy="320040"/>
+          </a:xfrm>
+          <a:prstGeom prst="rect">
+            <a:avLst/>
+          </a:prstGeom>
+          <a:noFill/>
+          <a:ln/>
+        </p:spPr>
+        <p:txBody>
+          <a:bodyPr wrap="square" lIns="0" tIns="0" rIns="0" bIns="0" rtlCol="0" anchor="ctr"/>
+          <a:lstStyle/>
+          <a:p>
+            <a:pPr indent="0" marL="0">
+              <a:buNone/>
+            </a:pPr>
+            <a:r>
+              <a:rPr lang="en-US" sz="1350" b="1" dirty="0">
+                <a:solidFill>
+                  <a:srgbClr val="977024"/>
+                </a:solidFill>
+                <a:latin typeface="Pretendard" pitchFamily="34" charset="0"/>
+                <a:ea typeface="Pretendard" pitchFamily="34" charset="-122"/>
+                <a:cs typeface="Pretendard" pitchFamily="34" charset="-120"/>
+              </a:rPr>
+              <a:t>1. 총취득원가 및 자기자본 소요</a:t>
+            </a:r>
+            <a:endParaRPr lang="en-US" sz="1350" dirty="0"/>
+          </a:p>
+        </p:txBody>
+      </p:sp>
+      <p:sp>
+        <p:nvSpPr>
+          <p:cNvPr id="8" name="Text 6"/>
+          <p:cNvSpPr/>
+          <p:nvPr/>
+        </p:nvSpPr>
+        <p:spPr>
+          <a:xfrm>
+            <a:off x="795528" y="2011680"/>
+            <a:ext cx="2269897" cy="475488"/>
+          </a:xfrm>
+          <a:prstGeom prst="rect">
+            <a:avLst/>
+          </a:prstGeom>
+          <a:noFill/>
+          <a:ln/>
+        </p:spPr>
+        <p:txBody>
+          <a:bodyPr wrap="square" lIns="0" tIns="0" rIns="0" bIns="0" rtlCol="0" anchor="ctr">
+            <a:normAutofit/>
+          </a:bodyPr>
+          <a:lstStyle/>
+          <a:p>
+            <a:pPr indent="0" marL="0">
+              <a:lnSpc>
+                <a:spcPct val="115000"/>
+              </a:lnSpc>
+              <a:buNone/>
+            </a:pPr>
+            <a:r>
+              <a:rPr lang="en-US" sz="1150" dirty="0">
+                <a:solidFill>
+                  <a:srgbClr val="718096"/>
+                </a:solidFill>
+                <a:latin typeface="Pretendard" pitchFamily="34" charset="0"/>
+                <a:ea typeface="Pretendard" pitchFamily="34" charset="-122"/>
+                <a:cs typeface="Pretendard" pitchFamily="34" charset="-120"/>
+              </a:rPr>
+              <a:t>매매 희망가 (A)</a:t>
+            </a:r>
+            <a:endParaRPr lang="en-US" sz="1150" dirty="0"/>
+          </a:p>
+        </p:txBody>
+      </p:sp>
+      <p:sp>
+        <p:nvSpPr>
+          <p:cNvPr id="9" name="Text 7"/>
+          <p:cNvSpPr/>
+          <p:nvPr/>
+        </p:nvSpPr>
+        <p:spPr>
+          <a:xfrm>
+            <a:off x="3065425" y="2011680"/>
+            <a:ext cx="2664662" cy="475488"/>
+          </a:xfrm>
+          <a:prstGeom prst="rect">
+            <a:avLst/>
+          </a:prstGeom>
+          <a:noFill/>
+          <a:ln/>
+        </p:spPr>
+        <p:txBody>
+          <a:bodyPr wrap="square" lIns="0" tIns="0" rIns="0" bIns="0" rtlCol="0" anchor="ctr">
+            <a:normAutofit/>
+          </a:bodyPr>
+          <a:lstStyle/>
+          <a:p>
+            <a:pPr indent="0" marL="0">
+              <a:lnSpc>
+                <a:spcPct val="115000"/>
+              </a:lnSpc>
+              <a:buNone/>
+            </a:pPr>
+            <a:r>
+              <a:rPr lang="en-US" sz="1150" b="1" dirty="0">
+                <a:solidFill>
+                  <a:srgbClr val="10161F"/>
+                </a:solidFill>
+                <a:latin typeface="Pretendard" pitchFamily="34" charset="0"/>
+                <a:ea typeface="Pretendard" pitchFamily="34" charset="-122"/>
+                <a:cs typeface="Pretendard" pitchFamily="34" charset="-120"/>
+              </a:rPr>
+              <a:t>135억 원</a:t>
+            </a:r>
+            <a:endParaRPr lang="en-US" sz="1150" dirty="0"/>
+          </a:p>
+        </p:txBody>
+      </p:sp>
+      <p:sp>
+        <p:nvSpPr>
+          <p:cNvPr id="10" name="Shape 8"/>
+          <p:cNvSpPr/>
+          <p:nvPr/>
+        </p:nvSpPr>
+        <p:spPr>
+          <a:xfrm>
+            <a:off x="795528" y="2487168"/>
+            <a:ext cx="4934560" cy="0"/>
+          </a:xfrm>
+          <a:prstGeom prst="line">
+            <a:avLst/>
+          </a:prstGeom>
+          <a:noFill/>
+          <a:ln w="3810">
+            <a:solidFill>
+              <a:srgbClr val="CBD5E0"/>
+            </a:solidFill>
+            <a:prstDash val="solid"/>
+          </a:ln>
+        </p:spPr>
+      </p:sp>
+      <p:sp>
+        <p:nvSpPr>
+          <p:cNvPr id="11" name="Text 9"/>
+          <p:cNvSpPr/>
+          <p:nvPr/>
+        </p:nvSpPr>
+        <p:spPr>
+          <a:xfrm>
+            <a:off x="795528" y="2487168"/>
+            <a:ext cx="2269897" cy="475488"/>
+          </a:xfrm>
+          <a:prstGeom prst="rect">
+            <a:avLst/>
+          </a:prstGeom>
+          <a:noFill/>
+          <a:ln/>
+        </p:spPr>
+        <p:txBody>
+          <a:bodyPr wrap="square" lIns="0" tIns="0" rIns="0" bIns="0" rtlCol="0" anchor="ctr">
+            <a:normAutofit/>
+          </a:bodyPr>
+          <a:lstStyle/>
+          <a:p>
+            <a:pPr indent="0" marL="0">
+              <a:lnSpc>
+                <a:spcPct val="115000"/>
+              </a:lnSpc>
+              <a:buNone/>
+            </a:pPr>
+            <a:r>
+              <a:rPr lang="en-US" sz="1150" dirty="0">
+                <a:solidFill>
+                  <a:srgbClr val="718096"/>
+                </a:solidFill>
+                <a:latin typeface="Pretendard" pitchFamily="34" charset="0"/>
+                <a:ea typeface="Pretendard" pitchFamily="34" charset="-122"/>
+                <a:cs typeface="Pretendard" pitchFamily="34" charset="-120"/>
+              </a:rPr>
+              <a:t>취득세 (4.6% 법정)</a:t>
+            </a:r>
+            <a:endParaRPr lang="en-US" sz="1150" dirty="0"/>
+          </a:p>
+        </p:txBody>
+      </p:sp>
+      <p:sp>
+        <p:nvSpPr>
+          <p:cNvPr id="12" name="Text 10"/>
+          <p:cNvSpPr/>
+          <p:nvPr/>
+        </p:nvSpPr>
+        <p:spPr>
+          <a:xfrm>
+            <a:off x="3065425" y="2487168"/>
+            <a:ext cx="2664662" cy="475488"/>
+          </a:xfrm>
+          <a:prstGeom prst="rect">
+            <a:avLst/>
+          </a:prstGeom>
+          <a:noFill/>
+          <a:ln/>
+        </p:spPr>
+        <p:txBody>
+          <a:bodyPr wrap="square" lIns="0" tIns="0" rIns="0" bIns="0" rtlCol="0" anchor="ctr">
+            <a:normAutofit/>
+          </a:bodyPr>
+          <a:lstStyle/>
+          <a:p>
+            <a:pPr indent="0" marL="0">
+              <a:lnSpc>
+                <a:spcPct val="115000"/>
+              </a:lnSpc>
+              <a:buNone/>
+            </a:pPr>
+            <a:r>
+              <a:rPr lang="en-US" sz="1150" b="1" dirty="0">
+                <a:solidFill>
+                  <a:srgbClr val="10161F"/>
+                </a:solidFill>
+                <a:latin typeface="Pretendard" pitchFamily="34" charset="0"/>
+                <a:ea typeface="Pretendard" pitchFamily="34" charset="-122"/>
+                <a:cs typeface="Pretendard" pitchFamily="34" charset="-120"/>
+              </a:rPr>
+              <a:t>6.21억 원</a:t>
+            </a:r>
+            <a:endParaRPr lang="en-US" sz="1150" dirty="0"/>
+          </a:p>
+        </p:txBody>
+      </p:sp>
+      <p:sp>
+        <p:nvSpPr>
+          <p:cNvPr id="13" name="Shape 11"/>
+          <p:cNvSpPr/>
+          <p:nvPr/>
+        </p:nvSpPr>
+        <p:spPr>
+          <a:xfrm>
+            <a:off x="795528" y="2962656"/>
+            <a:ext cx="4934560" cy="0"/>
+          </a:xfrm>
+          <a:prstGeom prst="line">
+            <a:avLst/>
+          </a:prstGeom>
+          <a:noFill/>
+          <a:ln w="3810">
+            <a:solidFill>
+              <a:srgbClr val="CBD5E0"/>
+            </a:solidFill>
+            <a:prstDash val="solid"/>
+          </a:ln>
+        </p:spPr>
+      </p:sp>
+      <p:sp>
+        <p:nvSpPr>
+          <p:cNvPr id="14" name="Text 12"/>
+          <p:cNvSpPr/>
+          <p:nvPr/>
+        </p:nvSpPr>
+        <p:spPr>
+          <a:xfrm>
+            <a:off x="795528" y="2962656"/>
+            <a:ext cx="2269897" cy="475488"/>
+          </a:xfrm>
+          <a:prstGeom prst="rect">
+            <a:avLst/>
+          </a:prstGeom>
+          <a:noFill/>
+          <a:ln/>
+        </p:spPr>
+        <p:txBody>
+          <a:bodyPr wrap="square" lIns="0" tIns="0" rIns="0" bIns="0" rtlCol="0" anchor="ctr">
+            <a:normAutofit/>
+          </a:bodyPr>
+          <a:lstStyle/>
+          <a:p>
+            <a:pPr indent="0" marL="0">
+              <a:lnSpc>
+                <a:spcPct val="115000"/>
+              </a:lnSpc>
+              <a:buNone/>
+            </a:pPr>
+            <a:r>
+              <a:rPr lang="en-US" sz="1150" dirty="0">
+                <a:solidFill>
+                  <a:srgbClr val="718096"/>
+                </a:solidFill>
+                <a:latin typeface="Pretendard" pitchFamily="34" charset="0"/>
+                <a:ea typeface="Pretendard" pitchFamily="34" charset="-122"/>
+                <a:cs typeface="Pretendard" pitchFamily="34" charset="-120"/>
+              </a:rPr>
+              <a:t>중개보수 (0.9% 한도)</a:t>
+            </a:r>
+            <a:endParaRPr lang="en-US" sz="1150" dirty="0"/>
+          </a:p>
+        </p:txBody>
+      </p:sp>
+      <p:sp>
+        <p:nvSpPr>
+          <p:cNvPr id="15" name="Text 13"/>
+          <p:cNvSpPr/>
+          <p:nvPr/>
+        </p:nvSpPr>
+        <p:spPr>
+          <a:xfrm>
+            <a:off x="3065425" y="2962656"/>
+            <a:ext cx="2664662" cy="475488"/>
+          </a:xfrm>
+          <a:prstGeom prst="rect">
+            <a:avLst/>
+          </a:prstGeom>
+          <a:noFill/>
+          <a:ln/>
+        </p:spPr>
+        <p:txBody>
+          <a:bodyPr wrap="square" lIns="0" tIns="0" rIns="0" bIns="0" rtlCol="0" anchor="ctr">
+            <a:normAutofit/>
+          </a:bodyPr>
+          <a:lstStyle/>
+          <a:p>
+            <a:pPr indent="0" marL="0">
+              <a:lnSpc>
+                <a:spcPct val="115000"/>
+              </a:lnSpc>
+              <a:buNone/>
+            </a:pPr>
+            <a:r>
+              <a:rPr lang="en-US" sz="1150" b="1" dirty="0">
+                <a:solidFill>
+                  <a:srgbClr val="10161F"/>
+                </a:solidFill>
+                <a:latin typeface="Pretendard" pitchFamily="34" charset="0"/>
+                <a:ea typeface="Pretendard" pitchFamily="34" charset="-122"/>
+                <a:cs typeface="Pretendard" pitchFamily="34" charset="-120"/>
+              </a:rPr>
+              <a:t>1.22억 원</a:t>
+            </a:r>
+            <a:endParaRPr lang="en-US" sz="1150" dirty="0"/>
+          </a:p>
+        </p:txBody>
+      </p:sp>
+      <p:sp>
+        <p:nvSpPr>
+          <p:cNvPr id="16" name="Shape 14"/>
+          <p:cNvSpPr/>
+          <p:nvPr/>
+        </p:nvSpPr>
+        <p:spPr>
+          <a:xfrm>
+            <a:off x="795528" y="3438144"/>
+            <a:ext cx="4934560" cy="0"/>
+          </a:xfrm>
+          <a:prstGeom prst="line">
+            <a:avLst/>
+          </a:prstGeom>
+          <a:noFill/>
+          <a:ln w="3810">
+            <a:solidFill>
+              <a:srgbClr val="CBD5E0"/>
+            </a:solidFill>
+            <a:prstDash val="solid"/>
+          </a:ln>
+        </p:spPr>
+      </p:sp>
+      <p:sp>
+        <p:nvSpPr>
+          <p:cNvPr id="17" name="Text 15"/>
+          <p:cNvSpPr/>
+          <p:nvPr/>
+        </p:nvSpPr>
+        <p:spPr>
+          <a:xfrm>
+            <a:off x="795528" y="3438144"/>
+            <a:ext cx="2269897" cy="475488"/>
+          </a:xfrm>
+          <a:prstGeom prst="rect">
+            <a:avLst/>
+          </a:prstGeom>
+          <a:noFill/>
+          <a:ln/>
+        </p:spPr>
+        <p:txBody>
+          <a:bodyPr wrap="square" lIns="0" tIns="0" rIns="0" bIns="0" rtlCol="0" anchor="ctr">
+            <a:normAutofit/>
+          </a:bodyPr>
+          <a:lstStyle/>
+          <a:p>
+            <a:pPr indent="0" marL="0">
+              <a:lnSpc>
+                <a:spcPct val="115000"/>
+              </a:lnSpc>
+              <a:buNone/>
+            </a:pPr>
+            <a:r>
+              <a:rPr lang="en-US" sz="1150" dirty="0">
+                <a:solidFill>
+                  <a:srgbClr val="718096"/>
+                </a:solidFill>
+                <a:latin typeface="Pretendard" pitchFamily="34" charset="0"/>
+                <a:ea typeface="Pretendard" pitchFamily="34" charset="-122"/>
+                <a:cs typeface="Pretendard" pitchFamily="34" charset="-120"/>
+              </a:rPr>
+              <a:t>총취득원가 (A + 세/비용)</a:t>
+            </a:r>
+            <a:endParaRPr lang="en-US" sz="1150" dirty="0"/>
+          </a:p>
+        </p:txBody>
+      </p:sp>
+      <p:sp>
+        <p:nvSpPr>
+          <p:cNvPr id="18" name="Text 16"/>
+          <p:cNvSpPr/>
+          <p:nvPr/>
+        </p:nvSpPr>
+        <p:spPr>
+          <a:xfrm>
+            <a:off x="3065425" y="3438144"/>
+            <a:ext cx="2664662" cy="475488"/>
+          </a:xfrm>
+          <a:prstGeom prst="rect">
+            <a:avLst/>
+          </a:prstGeom>
+          <a:noFill/>
+          <a:ln/>
+        </p:spPr>
+        <p:txBody>
+          <a:bodyPr wrap="square" lIns="0" tIns="0" rIns="0" bIns="0" rtlCol="0" anchor="ctr">
+            <a:normAutofit/>
+          </a:bodyPr>
+          <a:lstStyle/>
+          <a:p>
+            <a:pPr indent="0" marL="0">
+              <a:lnSpc>
+                <a:spcPct val="115000"/>
+              </a:lnSpc>
+              <a:buNone/>
+            </a:pPr>
+            <a:r>
+              <a:rPr lang="en-US" sz="1150" b="1" dirty="0">
+                <a:solidFill>
+                  <a:srgbClr val="10161F"/>
+                </a:solidFill>
+                <a:latin typeface="Pretendard" pitchFamily="34" charset="0"/>
+                <a:ea typeface="Pretendard" pitchFamily="34" charset="-122"/>
+                <a:cs typeface="Pretendard" pitchFamily="34" charset="-120"/>
+              </a:rPr>
+              <a:t>142.4억 원</a:t>
+            </a:r>
+            <a:endParaRPr lang="en-US" sz="1150" dirty="0"/>
+          </a:p>
+        </p:txBody>
+      </p:sp>
+      <p:sp>
+        <p:nvSpPr>
+          <p:cNvPr id="19" name="Shape 17"/>
+          <p:cNvSpPr/>
+          <p:nvPr/>
+        </p:nvSpPr>
+        <p:spPr>
+          <a:xfrm>
+            <a:off x="795528" y="3913632"/>
+            <a:ext cx="4934560" cy="0"/>
+          </a:xfrm>
+          <a:prstGeom prst="line">
+            <a:avLst/>
+          </a:prstGeom>
+          <a:noFill/>
+          <a:ln w="3810">
+            <a:solidFill>
+              <a:srgbClr val="CBD5E0"/>
+            </a:solidFill>
+            <a:prstDash val="solid"/>
+          </a:ln>
+        </p:spPr>
+      </p:sp>
+      <p:sp>
+        <p:nvSpPr>
+          <p:cNvPr id="20" name="Text 18"/>
+          <p:cNvSpPr/>
+          <p:nvPr/>
+        </p:nvSpPr>
+        <p:spPr>
+          <a:xfrm>
+            <a:off x="795528" y="3913632"/>
+            <a:ext cx="2269897" cy="475488"/>
+          </a:xfrm>
+          <a:prstGeom prst="rect">
+            <a:avLst/>
+          </a:prstGeom>
+          <a:noFill/>
+          <a:ln/>
+        </p:spPr>
+        <p:txBody>
+          <a:bodyPr wrap="square" lIns="0" tIns="0" rIns="0" bIns="0" rtlCol="0" anchor="ctr">
+            <a:normAutofit/>
+          </a:bodyPr>
+          <a:lstStyle/>
+          <a:p>
+            <a:pPr indent="0" marL="0">
+              <a:lnSpc>
+                <a:spcPct val="115000"/>
+              </a:lnSpc>
+              <a:buNone/>
+            </a:pPr>
+            <a:r>
+              <a:rPr lang="en-US" sz="1150" dirty="0">
+                <a:solidFill>
+                  <a:srgbClr val="718096"/>
+                </a:solidFill>
+                <a:latin typeface="Pretendard" pitchFamily="34" charset="0"/>
+                <a:ea typeface="Pretendard" pitchFamily="34" charset="-122"/>
+                <a:cs typeface="Pretendard" pitchFamily="34" charset="-120"/>
+              </a:rPr>
+              <a:t>(-) 임대보증금 승계</a:t>
+            </a:r>
+            <a:endParaRPr lang="en-US" sz="1150" dirty="0"/>
+          </a:p>
+        </p:txBody>
+      </p:sp>
+      <p:sp>
+        <p:nvSpPr>
+          <p:cNvPr id="21" name="Text 19"/>
+          <p:cNvSpPr/>
+          <p:nvPr/>
+        </p:nvSpPr>
+        <p:spPr>
+          <a:xfrm>
+            <a:off x="3065425" y="3913632"/>
+            <a:ext cx="2664662" cy="475488"/>
+          </a:xfrm>
+          <a:prstGeom prst="rect">
+            <a:avLst/>
+          </a:prstGeom>
+          <a:noFill/>
+          <a:ln/>
+        </p:spPr>
+        <p:txBody>
+          <a:bodyPr wrap="square" lIns="0" tIns="0" rIns="0" bIns="0" rtlCol="0" anchor="ctr">
+            <a:normAutofit/>
+          </a:bodyPr>
+          <a:lstStyle/>
+          <a:p>
+            <a:pPr indent="0" marL="0">
+              <a:lnSpc>
+                <a:spcPct val="115000"/>
+              </a:lnSpc>
+              <a:buNone/>
+            </a:pPr>
+            <a:r>
+              <a:rPr lang="en-US" sz="1150" b="1" dirty="0">
+                <a:solidFill>
+                  <a:srgbClr val="10161F"/>
+                </a:solidFill>
+                <a:latin typeface="Pretendard" pitchFamily="34" charset="0"/>
+                <a:ea typeface="Pretendard" pitchFamily="34" charset="-122"/>
+                <a:cs typeface="Pretendard" pitchFamily="34" charset="-120"/>
+              </a:rPr>
+              <a:t>-</a:t>
+            </a:r>
+            <a:endParaRPr lang="en-US" sz="1150" dirty="0"/>
+          </a:p>
+        </p:txBody>
+      </p:sp>
+      <p:sp>
+        <p:nvSpPr>
+          <p:cNvPr id="22" name="Shape 20"/>
+          <p:cNvSpPr/>
+          <p:nvPr/>
+        </p:nvSpPr>
+        <p:spPr>
+          <a:xfrm>
+            <a:off x="795528" y="4389120"/>
+            <a:ext cx="4934560" cy="0"/>
+          </a:xfrm>
+          <a:prstGeom prst="line">
+            <a:avLst/>
+          </a:prstGeom>
+          <a:noFill/>
+          <a:ln w="3810">
+            <a:solidFill>
+              <a:srgbClr val="CBD5E0"/>
+            </a:solidFill>
+            <a:prstDash val="solid"/>
+          </a:ln>
+        </p:spPr>
+      </p:sp>
+      <p:sp>
+        <p:nvSpPr>
+          <p:cNvPr id="23" name="Text 21"/>
+          <p:cNvSpPr/>
+          <p:nvPr/>
+        </p:nvSpPr>
+        <p:spPr>
+          <a:xfrm>
+            <a:off x="795528" y="4389120"/>
+            <a:ext cx="2269897" cy="475488"/>
+          </a:xfrm>
+          <a:prstGeom prst="rect">
+            <a:avLst/>
+          </a:prstGeom>
+          <a:noFill/>
+          <a:ln/>
+        </p:spPr>
+        <p:txBody>
+          <a:bodyPr wrap="square" lIns="0" tIns="0" rIns="0" bIns="0" rtlCol="0" anchor="ctr">
+            <a:normAutofit/>
+          </a:bodyPr>
+          <a:lstStyle/>
+          <a:p>
+            <a:pPr indent="0" marL="0">
+              <a:lnSpc>
+                <a:spcPct val="115000"/>
+              </a:lnSpc>
+              <a:buNone/>
+            </a:pPr>
+            <a:r>
+              <a:rPr lang="en-US" sz="1150" dirty="0">
+                <a:solidFill>
+                  <a:srgbClr val="718096"/>
+                </a:solidFill>
+                <a:latin typeface="Pretendard" pitchFamily="34" charset="0"/>
+                <a:ea typeface="Pretendard" pitchFamily="34" charset="-122"/>
+                <a:cs typeface="Pretendard" pitchFamily="34" charset="-120"/>
+              </a:rPr>
+              <a:t>(-) 담보대출 조달</a:t>
+            </a:r>
+            <a:endParaRPr lang="en-US" sz="1150" dirty="0"/>
+          </a:p>
+        </p:txBody>
+      </p:sp>
+      <p:sp>
+        <p:nvSpPr>
+          <p:cNvPr id="24" name="Text 22"/>
+          <p:cNvSpPr/>
+          <p:nvPr/>
+        </p:nvSpPr>
+        <p:spPr>
+          <a:xfrm>
+            <a:off x="3065425" y="4389120"/>
+            <a:ext cx="2664662" cy="475488"/>
+          </a:xfrm>
+          <a:prstGeom prst="rect">
+            <a:avLst/>
+          </a:prstGeom>
+          <a:noFill/>
+          <a:ln/>
+        </p:spPr>
+        <p:txBody>
+          <a:bodyPr wrap="square" lIns="0" tIns="0" rIns="0" bIns="0" rtlCol="0" anchor="ctr">
+            <a:normAutofit/>
+          </a:bodyPr>
+          <a:lstStyle/>
+          <a:p>
+            <a:pPr indent="0" marL="0">
+              <a:lnSpc>
+                <a:spcPct val="115000"/>
+              </a:lnSpc>
+              <a:buNone/>
+            </a:pPr>
+            <a:r>
+              <a:rPr lang="en-US" sz="1150" b="1" dirty="0">
+                <a:solidFill>
+                  <a:srgbClr val="10161F"/>
+                </a:solidFill>
+                <a:latin typeface="Pretendard" pitchFamily="34" charset="0"/>
+                <a:ea typeface="Pretendard" pitchFamily="34" charset="-122"/>
+                <a:cs typeface="Pretendard" pitchFamily="34" charset="-120"/>
+              </a:rPr>
+              <a:t>67.5억 원</a:t>
+            </a:r>
+            <a:endParaRPr lang="en-US" sz="1150" dirty="0"/>
+          </a:p>
+        </p:txBody>
+      </p:sp>
+      <p:sp>
+        <p:nvSpPr>
+          <p:cNvPr id="25" name="Shape 23"/>
+          <p:cNvSpPr/>
+          <p:nvPr/>
+        </p:nvSpPr>
+        <p:spPr>
+          <a:xfrm>
+            <a:off x="795528" y="4864608"/>
+            <a:ext cx="4934560" cy="0"/>
+          </a:xfrm>
+          <a:prstGeom prst="line">
+            <a:avLst/>
+          </a:prstGeom>
+          <a:noFill/>
+          <a:ln w="3810">
+            <a:solidFill>
+              <a:srgbClr val="CBD5E0"/>
+            </a:solidFill>
+            <a:prstDash val="solid"/>
+          </a:ln>
+        </p:spPr>
+      </p:sp>
+      <p:sp>
+        <p:nvSpPr>
+          <p:cNvPr id="26" name="Text 24"/>
+          <p:cNvSpPr/>
+          <p:nvPr/>
+        </p:nvSpPr>
+        <p:spPr>
+          <a:xfrm>
+            <a:off x="795528" y="4864608"/>
+            <a:ext cx="2269897" cy="475488"/>
+          </a:xfrm>
+          <a:prstGeom prst="rect">
+            <a:avLst/>
+          </a:prstGeom>
+          <a:noFill/>
+          <a:ln/>
+        </p:spPr>
+        <p:txBody>
+          <a:bodyPr wrap="square" lIns="0" tIns="0" rIns="0" bIns="0" rtlCol="0" anchor="ctr">
+            <a:normAutofit/>
+          </a:bodyPr>
+          <a:lstStyle/>
+          <a:p>
+            <a:pPr indent="0" marL="0">
+              <a:lnSpc>
+                <a:spcPct val="115000"/>
+              </a:lnSpc>
+              <a:buNone/>
+            </a:pPr>
+            <a:r>
+              <a:rPr lang="en-US" sz="1150" dirty="0">
+                <a:solidFill>
+                  <a:srgbClr val="718096"/>
+                </a:solidFill>
+                <a:latin typeface="Pretendard" pitchFamily="34" charset="0"/>
+                <a:ea typeface="Pretendard" pitchFamily="34" charset="-122"/>
+                <a:cs typeface="Pretendard" pitchFamily="34" charset="-120"/>
+              </a:rPr>
+              <a:t>실투자금 (Net Equity)</a:t>
+            </a:r>
+            <a:endParaRPr lang="en-US" sz="1150" dirty="0"/>
+          </a:p>
+        </p:txBody>
+      </p:sp>
+      <p:sp>
+        <p:nvSpPr>
+          <p:cNvPr id="27" name="Text 25"/>
+          <p:cNvSpPr/>
+          <p:nvPr/>
+        </p:nvSpPr>
+        <p:spPr>
+          <a:xfrm>
+            <a:off x="3065425" y="4864608"/>
+            <a:ext cx="2664662" cy="475488"/>
+          </a:xfrm>
+          <a:prstGeom prst="rect">
+            <a:avLst/>
+          </a:prstGeom>
+          <a:noFill/>
+          <a:ln/>
+        </p:spPr>
+        <p:txBody>
+          <a:bodyPr wrap="square" lIns="0" tIns="0" rIns="0" bIns="0" rtlCol="0" anchor="ctr">
+            <a:normAutofit/>
+          </a:bodyPr>
+          <a:lstStyle/>
+          <a:p>
+            <a:pPr indent="0" marL="0">
+              <a:lnSpc>
+                <a:spcPct val="115000"/>
+              </a:lnSpc>
+              <a:buNone/>
+            </a:pPr>
+            <a:r>
+              <a:rPr lang="en-US" sz="1150" b="1" dirty="0">
+                <a:solidFill>
+                  <a:srgbClr val="10161F"/>
+                </a:solidFill>
+                <a:latin typeface="Pretendard" pitchFamily="34" charset="0"/>
+                <a:ea typeface="Pretendard" pitchFamily="34" charset="-122"/>
+                <a:cs typeface="Pretendard" pitchFamily="34" charset="-120"/>
+              </a:rPr>
+              <a:t>74.9억 원</a:t>
+            </a:r>
+            <a:endParaRPr lang="en-US" sz="1150" dirty="0"/>
+          </a:p>
+        </p:txBody>
+      </p:sp>
+      <p:sp>
+        <p:nvSpPr>
+          <p:cNvPr id="28" name="Shape 26"/>
+          <p:cNvSpPr/>
+          <p:nvPr/>
+        </p:nvSpPr>
+        <p:spPr>
+          <a:xfrm>
+            <a:off x="6233008" y="1417320"/>
+            <a:ext cx="5391760" cy="4389120"/>
+          </a:xfrm>
+          <a:prstGeom prst="roundRect">
+            <a:avLst>
+              <a:gd name="adj" fmla="val 1250"/>
+            </a:avLst>
+          </a:prstGeom>
+          <a:solidFill>
+            <a:srgbClr val="F7FAFC"/>
+          </a:solidFill>
+          <a:ln w="6350">
+            <a:solidFill>
+              <a:srgbClr val="CBD5E0"/>
+            </a:solidFill>
+            <a:prstDash val="solid"/>
+          </a:ln>
+        </p:spPr>
+      </p:sp>
+      <p:sp>
+        <p:nvSpPr>
           <p:cNvPr id="29" name="Text 27"/>
           <p:cNvSpPr/>
           <p:nvPr/>
         </p:nvSpPr>
         <p:spPr>
           <a:xfrm>
-            <a:off x="6397600" y="1618488"/>
+            <a:off x="6461608" y="1618488"/>
             <a:ext cx="4934560" cy="320040"/>
           </a:xfrm>
           <a:prstGeom prst="rect">
@@ -10501,7 +12167,7 @@
       </p:sp>
       <p:graphicFrame>
         <p:nvGraphicFramePr>
-          <p:cNvPr id="8" name="Table 0"/>
+          <p:cNvPr id="9" name="Table 0"/>
           <p:cNvGraphicFramePr>
             <a:graphicFrameLocks noGrp="1"/>
           </p:cNvGraphicFramePr>
@@ -10514,7 +12180,7 @@
           </p:nvPr>
         </p:nvGraphicFramePr>
         <p:xfrm>
-          <a:off x="6397600" y="2057400"/>
+          <a:off x="6461608" y="2057400"/>
           <a:ext cx="4934560" cy="914400"/>
         </p:xfrm>
         <a:graphic>
@@ -12021,7 +13687,7 @@
         </p:nvSpPr>
         <p:spPr>
           <a:xfrm>
-            <a:off x="6397600" y="4069080"/>
+            <a:off x="6461608" y="4069080"/>
             <a:ext cx="4934560" cy="1463040"/>
           </a:xfrm>
           <a:prstGeom prst="roundRect">
@@ -12043,7 +13709,7 @@
         </p:nvSpPr>
         <p:spPr>
           <a:xfrm>
-            <a:off x="6397600" y="4123944"/>
+            <a:off x="6461608" y="4123944"/>
             <a:ext cx="36576" cy="1353312"/>
           </a:xfrm>
           <a:prstGeom prst="rect">
@@ -12063,7 +13729,7 @@
         </p:nvSpPr>
         <p:spPr>
           <a:xfrm>
-            <a:off x="6543904" y="4160520"/>
+            <a:off x="6607912" y="4160520"/>
             <a:ext cx="4678528" cy="201168"/>
           </a:xfrm>
           <a:prstGeom prst="rect">
@@ -12102,7 +13768,7 @@
         </p:nvSpPr>
         <p:spPr>
           <a:xfrm>
-            <a:off x="6543904" y="4361688"/>
+            <a:off x="6607912" y="4361688"/>
             <a:ext cx="4678528" cy="1133856"/>
           </a:xfrm>
           <a:prstGeom prst="rect">
@@ -12144,7 +13810,7 @@
         </p:nvSpPr>
         <p:spPr>
           <a:xfrm>
-            <a:off x="502920" y="6382512"/>
+            <a:off x="566928" y="6382512"/>
             <a:ext cx="7315200" cy="219456"/>
           </a:xfrm>
           <a:prstGeom prst="rect">
@@ -12183,362 +13849,7 @@
         </p:nvSpPr>
         <p:spPr>
           <a:xfrm>
-            <a:off x="10774375" y="6382512"/>
-            <a:ext cx="914400" cy="219456"/>
-          </a:xfrm>
-          <a:prstGeom prst="rect">
-            <a:avLst/>
-          </a:prstGeom>
-          <a:noFill/>
-          <a:ln/>
-        </p:spPr>
-        <p:txBody>
-          <a:bodyPr wrap="square" lIns="0" tIns="0" rIns="0" bIns="0" rtlCol="0" anchor="ctr"/>
-          <a:lstStyle/>
-          <a:p>
-            <a:pPr algn="r" indent="0" marL="0">
-              <a:buNone/>
-            </a:pPr>
-            <a:r>
-              <a:rPr lang="en-US" sz="900" b="1" dirty="0">
-                <a:solidFill>
-                  <a:srgbClr val="B98A2E"/>
-                </a:solidFill>
-                <a:latin typeface="Arial" pitchFamily="34" charset="0"/>
-                <a:ea typeface="Arial" pitchFamily="34" charset="-122"/>
-                <a:cs typeface="Arial" pitchFamily="34" charset="-120"/>
-              </a:rPr>
-              <a:t>7</a:t>
-            </a:r>
-            <a:endParaRPr lang="en-US" sz="900" dirty="0"/>
-          </a:p>
-        </p:txBody>
-      </p:sp>
-    </p:spTree>
-  </p:cSld>
-  <p:clrMapOvr>
-    <a:masterClrMapping/>
-  </p:clrMapOvr>
-</p:sld>
-</file>
-
-<file path=ppt/slides/slide8.xml><?xml version="1.0" encoding="utf-8"?>
-<p:sld xmlns:a="http://schemas.openxmlformats.org/drawingml/2006/main" xmlns:r="http://schemas.openxmlformats.org/officeDocument/2006/relationships" xmlns:p="http://schemas.openxmlformats.org/presentationml/2006/main">
-  <p:cSld name="Slide 8">
-    <p:bg>
-      <p:bgPr>
-        <a:solidFill>
-          <a:srgbClr val="FFFFFF"/>
-        </a:solidFill>
-      </p:bgPr>
-    </p:bg>
-    <p:spTree>
-      <p:nvGrpSpPr>
-        <p:cNvPr id="1" name=""/>
-        <p:cNvGrpSpPr/>
-        <p:nvPr/>
-      </p:nvGrpSpPr>
-      <p:grpSpPr>
-        <a:xfrm>
-          <a:off x="0" y="0"/>
-          <a:ext cx="0" cy="0"/>
-          <a:chOff x="0" y="0"/>
-          <a:chExt cx="0" cy="0"/>
-        </a:xfrm>
-      </p:grpSpPr>
-      <p:sp>
-        <p:nvSpPr>
-          <p:cNvPr id="2" name="Shape 0"/>
-          <p:cNvSpPr/>
-          <p:nvPr/>
-        </p:nvSpPr>
-        <p:spPr>
-          <a:xfrm>
-            <a:off x="502920" y="457200"/>
-            <a:ext cx="384048" cy="384048"/>
-          </a:xfrm>
-          <a:prstGeom prst="ellipse">
-            <a:avLst/>
-          </a:prstGeom>
-          <a:solidFill>
-            <a:srgbClr val="B98A2E"/>
-          </a:solidFill>
-          <a:ln/>
-        </p:spPr>
-      </p:sp>
-      <p:sp>
-        <p:nvSpPr>
-          <p:cNvPr id="3" name="Text 1"/>
-          <p:cNvSpPr/>
-          <p:nvPr/>
-        </p:nvSpPr>
-        <p:spPr>
-          <a:xfrm>
-            <a:off x="502920" y="457200"/>
-            <a:ext cx="384048" cy="384048"/>
-          </a:xfrm>
-          <a:prstGeom prst="rect">
-            <a:avLst/>
-          </a:prstGeom>
-          <a:noFill/>
-          <a:ln/>
-        </p:spPr>
-        <p:txBody>
-          <a:bodyPr wrap="square" lIns="0" tIns="0" rIns="0" bIns="0" rtlCol="0" anchor="ctr"/>
-          <a:lstStyle/>
-          <a:p>
-            <a:pPr algn="ctr" indent="0" marL="0">
-              <a:buNone/>
-            </a:pPr>
-            <a:r>
-              <a:rPr lang="en-US" sz="1300" b="1" dirty="0">
-                <a:solidFill>
-                  <a:srgbClr val="FFFFFF"/>
-                </a:solidFill>
-                <a:latin typeface="Arial" pitchFamily="34" charset="0"/>
-                <a:ea typeface="Arial" pitchFamily="34" charset="-122"/>
-                <a:cs typeface="Arial" pitchFamily="34" charset="-120"/>
-              </a:rPr>
-              <a:t>08</a:t>
-            </a:r>
-            <a:endParaRPr lang="en-US" sz="1300" dirty="0"/>
-          </a:p>
-        </p:txBody>
-      </p:sp>
-      <p:sp>
-        <p:nvSpPr>
-          <p:cNvPr id="4" name="Text 2"/>
-          <p:cNvSpPr/>
-          <p:nvPr/>
-        </p:nvSpPr>
-        <p:spPr>
-          <a:xfrm>
-            <a:off x="1069848" y="457200"/>
-            <a:ext cx="10490911" cy="182880"/>
-          </a:xfrm>
-          <a:prstGeom prst="rect">
-            <a:avLst/>
-          </a:prstGeom>
-          <a:noFill/>
-          <a:ln/>
-        </p:spPr>
-        <p:txBody>
-          <a:bodyPr wrap="square" lIns="0" tIns="0" rIns="0" bIns="0" rtlCol="0" anchor="ctr"/>
-          <a:lstStyle/>
-          <a:p>
-            <a:pPr indent="0" marL="0">
-              <a:buNone/>
-            </a:pPr>
-            <a:r>
-              <a:rPr lang="en-US" sz="950" b="1" spc="200" kern="0" dirty="0">
-                <a:solidFill>
-                  <a:srgbClr val="B98A2E"/>
-                </a:solidFill>
-                <a:latin typeface="Arial" pitchFamily="34" charset="0"/>
-                <a:ea typeface="Arial" pitchFamily="34" charset="-122"/>
-                <a:cs typeface="Arial" pitchFamily="34" charset="-120"/>
-              </a:rPr>
-              <a:t>Thesis</a:t>
-            </a:r>
-            <a:endParaRPr lang="en-US" sz="950" dirty="0"/>
-          </a:p>
-        </p:txBody>
-      </p:sp>
-      <p:sp>
-        <p:nvSpPr>
-          <p:cNvPr id="5" name="Text 3"/>
-          <p:cNvSpPr/>
-          <p:nvPr/>
-        </p:nvSpPr>
-        <p:spPr>
-          <a:xfrm>
-            <a:off x="1069848" y="640080"/>
-            <a:ext cx="10490911" cy="365760"/>
-          </a:xfrm>
-          <a:prstGeom prst="rect">
-            <a:avLst/>
-          </a:prstGeom>
-          <a:noFill/>
-          <a:ln/>
-        </p:spPr>
-        <p:txBody>
-          <a:bodyPr wrap="square" lIns="0" tIns="0" rIns="0" bIns="0" rtlCol="0" anchor="ctr"/>
-          <a:lstStyle/>
-          <a:p>
-            <a:pPr indent="0" marL="0">
-              <a:buNone/>
-            </a:pPr>
-            <a:r>
-              <a:rPr lang="en-US" sz="2300" b="1" dirty="0">
-                <a:solidFill>
-                  <a:srgbClr val="10161F"/>
-                </a:solidFill>
-                <a:latin typeface="Pretendard" pitchFamily="34" charset="0"/>
-                <a:ea typeface="Pretendard" pitchFamily="34" charset="-122"/>
-                <a:cs typeface="Pretendard" pitchFamily="34" charset="-120"/>
-              </a:rPr>
-              <a:t>투자 논거</a:t>
-            </a:r>
-            <a:endParaRPr lang="en-US" sz="2300" dirty="0"/>
-          </a:p>
-        </p:txBody>
-      </p:sp>
-      <p:sp>
-        <p:nvSpPr>
-          <p:cNvPr id="6" name="Shape 4"/>
-          <p:cNvSpPr/>
-          <p:nvPr/>
-        </p:nvSpPr>
-        <p:spPr>
-          <a:xfrm>
-            <a:off x="502920" y="4937760"/>
-            <a:ext cx="11057839" cy="804672"/>
-          </a:xfrm>
-          <a:prstGeom prst="roundRect">
-            <a:avLst>
-              <a:gd name="adj" fmla="val 6818"/>
-            </a:avLst>
-          </a:prstGeom>
-          <a:solidFill>
-            <a:srgbClr val="F3EBDA"/>
-          </a:solidFill>
-          <a:ln w="10160">
-            <a:solidFill>
-              <a:srgbClr val="D9B668"/>
-            </a:solidFill>
-            <a:prstDash val="solid"/>
-          </a:ln>
-        </p:spPr>
-      </p:sp>
-      <p:sp>
-        <p:nvSpPr>
-          <p:cNvPr id="7" name="Text 5"/>
-          <p:cNvSpPr/>
-          <p:nvPr/>
-        </p:nvSpPr>
-        <p:spPr>
-          <a:xfrm>
-            <a:off x="685800" y="5047488"/>
-            <a:ext cx="1691640" cy="256032"/>
-          </a:xfrm>
-          <a:prstGeom prst="rect">
-            <a:avLst/>
-          </a:prstGeom>
-          <a:noFill/>
-          <a:ln/>
-        </p:spPr>
-        <p:txBody>
-          <a:bodyPr wrap="square" lIns="0" tIns="0" rIns="0" bIns="0" rtlCol="0" anchor="ctr"/>
-          <a:lstStyle/>
-          <a:p>
-            <a:pPr indent="0" marL="0">
-              <a:buNone/>
-            </a:pPr>
-            <a:r>
-              <a:rPr lang="en-US" sz="1050" b="1" dirty="0">
-                <a:solidFill>
-                  <a:srgbClr val="977024"/>
-                </a:solidFill>
-                <a:latin typeface="Pretendard" pitchFamily="34" charset="0"/>
-                <a:ea typeface="Pretendard" pitchFamily="34" charset="-122"/>
-                <a:cs typeface="Pretendard" pitchFamily="34" charset="-120"/>
-              </a:rPr>
-              <a:t>종합 가치 제안</a:t>
-            </a:r>
-            <a:endParaRPr lang="en-US" sz="1050" dirty="0"/>
-          </a:p>
-        </p:txBody>
-      </p:sp>
-      <p:sp>
-        <p:nvSpPr>
-          <p:cNvPr id="8" name="Text 6"/>
-          <p:cNvSpPr/>
-          <p:nvPr/>
-        </p:nvSpPr>
-        <p:spPr>
-          <a:xfrm>
-            <a:off x="2423160" y="5010912"/>
-            <a:ext cx="8954719" cy="658368"/>
-          </a:xfrm>
-          <a:prstGeom prst="rect">
-            <a:avLst/>
-          </a:prstGeom>
-          <a:noFill/>
-          <a:ln/>
-        </p:spPr>
-        <p:txBody>
-          <a:bodyPr wrap="square" lIns="0" tIns="0" rIns="0" bIns="0" rtlCol="0" anchor="ctr"/>
-          <a:lstStyle/>
-          <a:p>
-            <a:pPr indent="0" marL="0">
-              <a:lnSpc>
-                <a:spcPct val="125000"/>
-              </a:lnSpc>
-              <a:buNone/>
-            </a:pPr>
-            <a:r>
-              <a:rPr lang="en-US" sz="1100" dirty="0">
-                <a:solidFill>
-                  <a:srgbClr val="10161F"/>
-                </a:solidFill>
-                <a:latin typeface="Pretendard" pitchFamily="34" charset="0"/>
-                <a:ea typeface="Pretendard" pitchFamily="34" charset="-122"/>
-                <a:cs typeface="Pretendard" pitchFamily="34" charset="-120"/>
-              </a:rPr>
-              <a:t>성수 IT산업 거점으로서의 입지 가치와 통사옥 희소성을 갖추고 있습니다.</a:t>
-            </a:r>
-            <a:endParaRPr lang="en-US" sz="1100" dirty="0"/>
-          </a:p>
-        </p:txBody>
-      </p:sp>
-      <p:sp>
-        <p:nvSpPr>
-          <p:cNvPr id="9" name="Text 7"/>
-          <p:cNvSpPr/>
-          <p:nvPr/>
-        </p:nvSpPr>
-        <p:spPr>
-          <a:xfrm>
-            <a:off x="502920" y="6382512"/>
-            <a:ext cx="7315200" cy="219456"/>
-          </a:xfrm>
-          <a:prstGeom prst="rect">
-            <a:avLst/>
-          </a:prstGeom>
-          <a:noFill/>
-          <a:ln/>
-        </p:spPr>
-        <p:txBody>
-          <a:bodyPr wrap="square" lIns="0" tIns="0" rIns="0" bIns="0" rtlCol="0" anchor="ctr"/>
-          <a:lstStyle/>
-          <a:p>
-            <a:pPr indent="0" marL="0">
-              <a:buNone/>
-            </a:pPr>
-            <a:r>
-              <a:rPr lang="en-US" sz="800" dirty="0">
-                <a:solidFill>
-                  <a:srgbClr val="718096"/>
-                </a:solidFill>
-                <a:latin typeface="Pretendard" pitchFamily="34" charset="0"/>
-                <a:ea typeface="Pretendard" pitchFamily="34" charset="-122"/>
-                <a:cs typeface="Pretendard" pitchFamily="34" charset="-120"/>
-              </a:rPr>
-              <a:t>크리딜</a:t>
-            </a:r>
-            <a:endParaRPr lang="en-US" sz="800" dirty="0"/>
-          </a:p>
-        </p:txBody>
-      </p:sp>
-      <p:sp>
-        <p:nvSpPr>
-          <p:cNvPr id="10" name="Text 8"/>
-          <p:cNvSpPr/>
-          <p:nvPr/>
-        </p:nvSpPr>
-        <p:spPr>
-          <a:xfrm>
-            <a:off x="10774375" y="6382512"/>
+            <a:off x="10710367" y="6382512"/>
             <a:ext cx="914400" cy="219456"/>
           </a:xfrm>
           <a:prstGeom prst="rect">
@@ -12609,7 +13920,7 @@
         </p:nvSpPr>
         <p:spPr>
           <a:xfrm>
-            <a:off x="502920" y="457200"/>
+            <a:off x="566928" y="457200"/>
             <a:ext cx="384048" cy="384048"/>
           </a:xfrm>
           <a:prstGeom prst="ellipse">
@@ -12629,7 +13940,7 @@
         </p:nvSpPr>
         <p:spPr>
           <a:xfrm>
-            <a:off x="502920" y="457200"/>
+            <a:off x="566928" y="457200"/>
             <a:ext cx="384048" cy="384048"/>
           </a:xfrm>
           <a:prstGeom prst="rect">
@@ -12668,7 +13979,7 @@
         </p:nvSpPr>
         <p:spPr>
           <a:xfrm>
-            <a:off x="1069848" y="457200"/>
+            <a:off x="1133856" y="457200"/>
             <a:ext cx="10490911" cy="182880"/>
           </a:xfrm>
           <a:prstGeom prst="rect">
@@ -12693,7 +14004,7 @@
                 <a:ea typeface="Arial" pitchFamily="34" charset="-122"/>
                 <a:cs typeface="Arial" pitchFamily="34" charset="-120"/>
               </a:rPr>
-              <a:t>Risk</a:t>
+              <a:t>Thesis</a:t>
             </a:r>
             <a:endParaRPr lang="en-US" sz="950" dirty="0"/>
           </a:p>
@@ -12707,7 +14018,7 @@
         </p:nvSpPr>
         <p:spPr>
           <a:xfrm>
-            <a:off x="1069848" y="640080"/>
+            <a:off x="1133856" y="640080"/>
             <a:ext cx="10490911" cy="365760"/>
           </a:xfrm>
           <a:prstGeom prst="rect">
@@ -12717,7 +14028,9 @@
           <a:ln/>
         </p:spPr>
         <p:txBody>
-          <a:bodyPr wrap="square" lIns="0" tIns="0" rIns="0" bIns="0" rtlCol="0" anchor="ctr"/>
+          <a:bodyPr wrap="square" lIns="0" tIns="0" rIns="0" bIns="0" rtlCol="0" anchor="ctr">
+            <a:normAutofit/>
+          </a:bodyPr>
           <a:lstStyle/>
           <a:p>
             <a:pPr indent="0" marL="0">
@@ -12732,7 +14045,7 @@
                 <a:ea typeface="Pretendard" pitchFamily="34" charset="-122"/>
                 <a:cs typeface="Pretendard" pitchFamily="34" charset="-120"/>
               </a:rPr>
-              <a:t>리스크</a:t>
+              <a:t>투자 논거</a:t>
             </a:r>
             <a:endParaRPr lang="en-US" sz="2300" dirty="0"/>
           </a:p>
@@ -12746,20 +14059,20 @@
         </p:nvSpPr>
         <p:spPr>
           <a:xfrm>
-            <a:off x="502920" y="1417320"/>
-            <a:ext cx="11057839" cy="3657600"/>
+            <a:off x="566928" y="4937760"/>
+            <a:ext cx="11057839" cy="804672"/>
           </a:xfrm>
           <a:prstGeom prst="roundRect">
             <a:avLst>
-              <a:gd name="adj" fmla="val 1500"/>
+              <a:gd name="adj" fmla="val 6818"/>
             </a:avLst>
           </a:prstGeom>
           <a:solidFill>
-            <a:srgbClr val="F7FAFC"/>
+            <a:srgbClr val="F3EBDA"/>
           </a:solidFill>
-          <a:ln w="6350">
+          <a:ln w="10160">
             <a:solidFill>
-              <a:srgbClr val="CBD5E0"/>
+              <a:srgbClr val="D9B668"/>
             </a:solidFill>
             <a:prstDash val="solid"/>
           </a:ln>
@@ -12767,23 +14080,42 @@
       </p:sp>
       <p:sp>
         <p:nvSpPr>
-          <p:cNvPr id="7" name="Shape 5"/>
-          <p:cNvSpPr/>
-          <p:nvPr/>
-        </p:nvSpPr>
-        <p:spPr>
-          <a:xfrm>
-            <a:off x="502920" y="1417320"/>
-            <a:ext cx="11057839" cy="45720"/>
-          </a:xfrm>
-          <a:prstGeom prst="rect">
-            <a:avLst/>
-          </a:prstGeom>
-          <a:solidFill>
-            <a:srgbClr val="B98A2E"/>
-          </a:solidFill>
-          <a:ln/>
-        </p:spPr>
+          <p:cNvPr id="7" name="Text 5"/>
+          <p:cNvSpPr/>
+          <p:nvPr/>
+        </p:nvSpPr>
+        <p:spPr>
+          <a:xfrm>
+            <a:off x="749808" y="5047488"/>
+            <a:ext cx="1691640" cy="256032"/>
+          </a:xfrm>
+          <a:prstGeom prst="rect">
+            <a:avLst/>
+          </a:prstGeom>
+          <a:noFill/>
+          <a:ln/>
+        </p:spPr>
+        <p:txBody>
+          <a:bodyPr wrap="square" lIns="0" tIns="0" rIns="0" bIns="0" rtlCol="0" anchor="ctr"/>
+          <a:lstStyle/>
+          <a:p>
+            <a:pPr indent="0" marL="0">
+              <a:buNone/>
+            </a:pPr>
+            <a:r>
+              <a:rPr lang="en-US" sz="1050" b="1" dirty="0">
+                <a:solidFill>
+                  <a:srgbClr val="977024"/>
+                </a:solidFill>
+                <a:latin typeface="Pretendard" pitchFamily="34" charset="0"/>
+                <a:ea typeface="Pretendard" pitchFamily="34" charset="-122"/>
+                <a:cs typeface="Pretendard" pitchFamily="34" charset="-120"/>
+              </a:rPr>
+              <a:t>종합 가치 제안</a:t>
+            </a:r>
+            <a:endParaRPr lang="en-US" sz="1050" dirty="0"/>
+          </a:p>
+        </p:txBody>
       </p:sp>
       <p:sp>
         <p:nvSpPr>
@@ -12793,8 +14125,8 @@
         </p:nvSpPr>
         <p:spPr>
           <a:xfrm>
-            <a:off x="731520" y="1618488"/>
-            <a:ext cx="10600639" cy="292608"/>
+            <a:off x="2487168" y="5010912"/>
+            <a:ext cx="8954719" cy="658368"/>
           </a:xfrm>
           <a:prstGeom prst="rect">
             <a:avLst/>
@@ -12807,20 +14139,23 @@
           <a:lstStyle/>
           <a:p>
             <a:pPr indent="0" marL="0">
-              <a:buNone/>
-            </a:pPr>
-            <a:r>
-              <a:rPr lang="en-US" sz="1350" b="1" dirty="0">
-                <a:solidFill>
-                  <a:srgbClr val="977024"/>
-                </a:solidFill>
-                <a:latin typeface="Pretendard" pitchFamily="34" charset="0"/>
-                <a:ea typeface="Pretendard" pitchFamily="34" charset="-122"/>
-                <a:cs typeface="Pretendard" pitchFamily="34" charset="-120"/>
-              </a:rPr>
-              <a:t>준공업 용도제한</a:t>
-            </a:r>
-            <a:endParaRPr lang="en-US" sz="1350" dirty="0"/>
+              <a:lnSpc>
+                <a:spcPct val="125000"/>
+              </a:lnSpc>
+              <a:buNone/>
+            </a:pPr>
+            <a:r>
+              <a:rPr lang="en-US" sz="1100" dirty="0">
+                <a:solidFill>
+                  <a:srgbClr val="10161F"/>
+                </a:solidFill>
+                <a:latin typeface="Pretendard" pitchFamily="34" charset="0"/>
+                <a:ea typeface="Pretendard" pitchFamily="34" charset="-122"/>
+                <a:cs typeface="Pretendard" pitchFamily="34" charset="-120"/>
+              </a:rPr>
+              <a:t>성수 IT산업 거점으로서의 입지 가치와 통사옥 희소성을 갖추고 있습니다.</a:t>
+            </a:r>
+            <a:endParaRPr lang="en-US" sz="1100" dirty="0"/>
           </a:p>
         </p:txBody>
       </p:sp>
@@ -12832,36 +14167,34 @@
         </p:nvSpPr>
         <p:spPr>
           <a:xfrm>
-            <a:off x="731520" y="1947672"/>
-            <a:ext cx="10600639" cy="365760"/>
-          </a:xfrm>
-          <a:prstGeom prst="rect">
-            <a:avLst/>
-          </a:prstGeom>
-          <a:noFill/>
-          <a:ln/>
-        </p:spPr>
-        <p:txBody>
-          <a:bodyPr wrap="square" lIns="0" tIns="0" rIns="0" bIns="0" rtlCol="0" anchor="ctr">
-            <a:normAutofit/>
-          </a:bodyPr>
+            <a:off x="566928" y="6382512"/>
+            <a:ext cx="7315200" cy="219456"/>
+          </a:xfrm>
+          <a:prstGeom prst="rect">
+            <a:avLst/>
+          </a:prstGeom>
+          <a:noFill/>
+          <a:ln/>
+        </p:spPr>
+        <p:txBody>
+          <a:bodyPr wrap="square" lIns="0" tIns="0" rIns="0" bIns="0" rtlCol="0" anchor="ctr"/>
           <a:lstStyle/>
           <a:p>
             <a:pPr indent="0" marL="0">
               <a:buNone/>
             </a:pPr>
             <a:r>
-              <a:rPr lang="en-US" sz="1250" b="1" dirty="0">
-                <a:solidFill>
-                  <a:srgbClr val="10161F"/>
-                </a:solidFill>
-                <a:latin typeface="Pretendard" pitchFamily="34" charset="0"/>
-                <a:ea typeface="Pretendard" pitchFamily="34" charset="-122"/>
-                <a:cs typeface="Pretendard" pitchFamily="34" charset="-120"/>
-              </a:rPr>
-              <a:t>IT 허용</a:t>
-            </a:r>
-            <a:endParaRPr lang="en-US" sz="1250" dirty="0"/>
+              <a:rPr lang="en-US" sz="800" dirty="0">
+                <a:solidFill>
+                  <a:srgbClr val="718096"/>
+                </a:solidFill>
+                <a:latin typeface="Pretendard" pitchFamily="34" charset="0"/>
+                <a:ea typeface="Pretendard" pitchFamily="34" charset="-122"/>
+                <a:cs typeface="Pretendard" pitchFamily="34" charset="-120"/>
+              </a:rPr>
+              <a:t>크리딜</a:t>
+            </a:r>
+            <a:endParaRPr lang="en-US" sz="800" dirty="0"/>
           </a:p>
         </p:txBody>
       </p:sp>
@@ -12873,157 +14206,7 @@
         </p:nvSpPr>
         <p:spPr>
           <a:xfrm>
-            <a:off x="731520" y="2377440"/>
-            <a:ext cx="10600639" cy="2606040"/>
-          </a:xfrm>
-          <a:prstGeom prst="rect">
-            <a:avLst/>
-          </a:prstGeom>
-          <a:noFill/>
-          <a:ln/>
-        </p:spPr>
-        <p:txBody>
-          <a:bodyPr wrap="square" lIns="0" tIns="0" rIns="0" bIns="0" rtlCol="0" anchor="t">
-            <a:normAutofit/>
-          </a:bodyPr>
-          <a:lstStyle/>
-          <a:p>
-            <a:pPr marL="342900" indent="-342900">
-              <a:lnSpc>
-                <a:spcPct val="115000"/>
-              </a:lnSpc>
-              <a:buSzPct val="100000"/>
-              <a:buChar char="•"/>
-            </a:pPr>
-            <a:r>
-              <a:rPr lang="en-US" sz="1100" dirty="0">
-                <a:solidFill>
-                  <a:srgbClr val="10161F"/>
-                </a:solidFill>
-                <a:latin typeface="Pretendard" pitchFamily="34" charset="0"/>
-                <a:ea typeface="Pretendard" pitchFamily="34" charset="-122"/>
-                <a:cs typeface="Pretendard" pitchFamily="34" charset="-120"/>
-              </a:rPr>
-              <a:t>사전 확인 완료</a:t>
-            </a:r>
-            <a:endParaRPr lang="en-US" sz="1100" dirty="0"/>
-          </a:p>
-        </p:txBody>
-      </p:sp>
-      <p:sp>
-        <p:nvSpPr>
-          <p:cNvPr id="11" name="Shape 9"/>
-          <p:cNvSpPr/>
-          <p:nvPr/>
-        </p:nvSpPr>
-        <p:spPr>
-          <a:xfrm>
-            <a:off x="502920" y="5193792"/>
-            <a:ext cx="11057839" cy="621792"/>
-          </a:xfrm>
-          <a:prstGeom prst="roundRect">
-            <a:avLst>
-              <a:gd name="adj" fmla="val 8824"/>
-            </a:avLst>
-          </a:prstGeom>
-          <a:solidFill>
-            <a:srgbClr val="F7FAFC"/>
-          </a:solidFill>
-          <a:ln w="6350">
-            <a:solidFill>
-              <a:srgbClr val="CBD5E0"/>
-            </a:solidFill>
-            <a:prstDash val="solid"/>
-          </a:ln>
-        </p:spPr>
-      </p:sp>
-      <p:sp>
-        <p:nvSpPr>
-          <p:cNvPr id="12" name="Text 10"/>
-          <p:cNvSpPr/>
-          <p:nvPr/>
-        </p:nvSpPr>
-        <p:spPr>
-          <a:xfrm>
-            <a:off x="731520" y="5193792"/>
-            <a:ext cx="10600639" cy="621792"/>
-          </a:xfrm>
-          <a:prstGeom prst="rect">
-            <a:avLst/>
-          </a:prstGeom>
-          <a:noFill/>
-          <a:ln/>
-        </p:spPr>
-        <p:txBody>
-          <a:bodyPr wrap="square" lIns="0" tIns="0" rIns="0" bIns="0" rtlCol="0" anchor="ctr"/>
-          <a:lstStyle/>
-          <a:p>
-            <a:pPr indent="0" marL="0">
-              <a:buNone/>
-            </a:pPr>
-            <a:r>
-              <a:rPr lang="en-US" sz="1100" dirty="0">
-                <a:solidFill>
-                  <a:srgbClr val="10161F"/>
-                </a:solidFill>
-                <a:latin typeface="Pretendard" pitchFamily="34" charset="0"/>
-                <a:ea typeface="Pretendard" pitchFamily="34" charset="-122"/>
-                <a:cs typeface="Pretendard" pitchFamily="34" charset="-120"/>
-              </a:rPr>
-              <a:t>※ 본 리스크 체크는 공부 및 브로커 확인 기반이며, 매수 전 전문 실사팀(변호사/건축사)을 통한 정밀 실사가 필요합니다.</a:t>
-            </a:r>
-            <a:endParaRPr lang="en-US" sz="1100" dirty="0"/>
-          </a:p>
-        </p:txBody>
-      </p:sp>
-      <p:sp>
-        <p:nvSpPr>
-          <p:cNvPr id="13" name="Text 11"/>
-          <p:cNvSpPr/>
-          <p:nvPr/>
-        </p:nvSpPr>
-        <p:spPr>
-          <a:xfrm>
-            <a:off x="502920" y="6382512"/>
-            <a:ext cx="7315200" cy="219456"/>
-          </a:xfrm>
-          <a:prstGeom prst="rect">
-            <a:avLst/>
-          </a:prstGeom>
-          <a:noFill/>
-          <a:ln/>
-        </p:spPr>
-        <p:txBody>
-          <a:bodyPr wrap="square" lIns="0" tIns="0" rIns="0" bIns="0" rtlCol="0" anchor="ctr"/>
-          <a:lstStyle/>
-          <a:p>
-            <a:pPr indent="0" marL="0">
-              <a:buNone/>
-            </a:pPr>
-            <a:r>
-              <a:rPr lang="en-US" sz="800" dirty="0">
-                <a:solidFill>
-                  <a:srgbClr val="718096"/>
-                </a:solidFill>
-                <a:latin typeface="Pretendard" pitchFamily="34" charset="0"/>
-                <a:ea typeface="Pretendard" pitchFamily="34" charset="-122"/>
-                <a:cs typeface="Pretendard" pitchFamily="34" charset="-120"/>
-              </a:rPr>
-              <a:t>크리딜</a:t>
-            </a:r>
-            <a:endParaRPr lang="en-US" sz="800" dirty="0"/>
-          </a:p>
-        </p:txBody>
-      </p:sp>
-      <p:sp>
-        <p:nvSpPr>
-          <p:cNvPr id="14" name="Text 12"/>
-          <p:cNvSpPr/>
-          <p:nvPr/>
-        </p:nvSpPr>
-        <p:spPr>
-          <a:xfrm>
-            <a:off x="10774375" y="6382512"/>
+            <a:off x="10710367" y="6382512"/>
             <a:ext cx="914400" cy="219456"/>
           </a:xfrm>
           <a:prstGeom prst="rect">

--- a/docs/test/stress/e2e-outputs/owner_occupied_basic_pr03.pptx
+++ b/docs/test/stress/e2e-outputs/owner_occupied_basic_pr03.pptx
@@ -17,10 +17,9 @@
     <p:sldId id="265" r:id="rId11"/>
     <p:sldId id="266" r:id="rId12"/>
     <p:sldId id="267" r:id="rId13"/>
-    <p:sldId id="268" r:id="rId14"/>
   </p:sldIdLst>
   <p:notesMasterIdLst>
-    <p:notesMasterId r:id="rId15"/>
+    <p:notesMasterId r:id="rId14"/>
   </p:notesMasterIdLst>
   <p:sldSz cx="12192000" cy="6858000"/>
   <p:notesSz cx="6858000" cy="12192000"/>
@@ -802,94 +801,6 @@
             <a:fld id="{F7021451-1387-4CA6-816F-3879F97B5CBC}" type="slidenum">
               <a:rPr lang="en-US"/>
               <a:t>12</a:t>
-            </a:fld>
-            <a:endParaRPr lang="en-US"/>
-          </a:p>
-        </p:txBody>
-      </p:sp>
-    </p:spTree>
-    <p:extLst>
-      <p:ext uri="{BB962C8B-B14F-4D97-AF65-F5344CB8AC3E}">
-        <p14:creationId xmlns:p14="http://schemas.microsoft.com/office/powerpoint/2010/main" val="1024086991"/>
-      </p:ext>
-    </p:extLst>
-  </p:cSld>
-  <p:clrMapOvr>
-    <a:masterClrMapping/>
-  </p:clrMapOvr>
-</p:notes>
-</file>
-
-<file path=ppt/notesSlides/notesSlide13.xml><?xml version="1.0" encoding="utf-8"?>
-<p:notes xmlns:a="http://schemas.openxmlformats.org/drawingml/2006/main" xmlns:r="http://schemas.openxmlformats.org/officeDocument/2006/relationships" xmlns:p="http://schemas.openxmlformats.org/presentationml/2006/main">
-  <p:cSld>
-    <p:spTree>
-      <p:nvGrpSpPr>
-        <p:cNvPr id="1" name=""/>
-        <p:cNvGrpSpPr/>
-        <p:nvPr/>
-      </p:nvGrpSpPr>
-      <p:grpSpPr>
-        <a:xfrm>
-          <a:off x="0" y="0"/>
-          <a:ext cx="0" cy="0"/>
-          <a:chOff x="0" y="0"/>
-          <a:chExt cx="0" cy="0"/>
-        </a:xfrm>
-      </p:grpSpPr>
-      <p:sp>
-        <p:nvSpPr>
-          <p:cNvPr id="2" name="Slide Image Placeholder 1"/>
-          <p:cNvSpPr>
-            <a:spLocks noGrp="1" noRot="1" noChangeAspect="1"/>
-          </p:cNvSpPr>
-          <p:nvPr>
-            <p:ph type="sldImg"/>
-          </p:nvPr>
-        </p:nvSpPr>
-        <p:spPr/>
-      </p:sp>
-      <p:sp>
-        <p:nvSpPr>
-          <p:cNvPr id="3" name="Notes Placeholder 2"/>
-          <p:cNvSpPr>
-            <a:spLocks noGrp="1"/>
-          </p:cNvSpPr>
-          <p:nvPr>
-            <p:ph type="body" idx="1"/>
-          </p:nvPr>
-        </p:nvSpPr>
-        <p:spPr/>
-        <p:txBody>
-          <a:bodyPr/>
-          <a:lstStyle/>
-          <a:p>
-            <a:r>
-              <a:rPr lang="en-US" dirty="0"/>
-              <a:t/>
-            </a:r>
-            <a:endParaRPr lang="en-US" dirty="0"/>
-          </a:p>
-        </p:txBody>
-      </p:sp>
-      <p:sp>
-        <p:nvSpPr>
-          <p:cNvPr id="4" name="Slide Number Placeholder 3"/>
-          <p:cNvSpPr>
-            <a:spLocks noGrp="1"/>
-          </p:cNvSpPr>
-          <p:nvPr>
-            <p:ph type="sldNum" sz="quarter" idx="10"/>
-          </p:nvPr>
-        </p:nvSpPr>
-        <p:spPr/>
-        <p:txBody>
-          <a:bodyPr/>
-          <a:lstStyle/>
-          <a:p>
-            <a:fld id="{F7021451-1387-4CA6-816F-3879F97B5CBC}" type="slidenum">
-              <a:rPr lang="en-US"/>
-              <a:t>13</a:t>
             </a:fld>
             <a:endParaRPr lang="en-US"/>
           </a:p>
@@ -2196,10 +2107,15 @@
           <a:ln/>
         </p:spPr>
         <p:txBody>
-          <a:bodyPr wrap="square" lIns="0" tIns="0" rIns="0" bIns="0" rtlCol="0" anchor="ctr"/>
+          <a:bodyPr wrap="square" lIns="0" tIns="0" rIns="0" bIns="0" rtlCol="0" anchor="ctr">
+            <a:normAutofit/>
+          </a:bodyPr>
           <a:lstStyle/>
           <a:p>
             <a:pPr algn="l" indent="0" marL="0">
+              <a:lnSpc>
+                <a:spcPct val="100000"/>
+              </a:lnSpc>
               <a:buNone/>
             </a:pPr>
             <a:r>
@@ -2724,7 +2640,7 @@
                 <a:ea typeface="Arial" pitchFamily="34" charset="-122"/>
                 <a:cs typeface="Arial" pitchFamily="34" charset="-120"/>
               </a:rPr>
-              <a:t>Risk</a:t>
+              <a:t>Checklist</a:t>
             </a:r>
             <a:endParaRPr lang="en-US" sz="950" dirty="0"/>
           </a:p>
@@ -2765,7 +2681,7 @@
                 <a:ea typeface="Pretendard" pitchFamily="34" charset="-122"/>
                 <a:cs typeface="Pretendard" pitchFamily="34" charset="-120"/>
               </a:rPr>
-              <a:t>리스크</a:t>
+              <a:t>실사 체크리스트</a:t>
             </a:r>
             <a:endParaRPr lang="en-US" sz="2300" dirty="0"/>
           </a:p>
@@ -2773,26 +2689,63 @@
       </p:sp>
       <p:sp>
         <p:nvSpPr>
-          <p:cNvPr id="6" name="Shape 4"/>
-          <p:cNvSpPr/>
-          <p:nvPr/>
-        </p:nvSpPr>
-        <p:spPr>
-          <a:xfrm>
-            <a:off x="566928" y="1417320"/>
-            <a:ext cx="11057839" cy="3657600"/>
-          </a:xfrm>
-          <a:prstGeom prst="roundRect">
-            <a:avLst>
-              <a:gd name="adj" fmla="val 1500"/>
-            </a:avLst>
+          <p:cNvPr id="6" name="Text 4"/>
+          <p:cNvSpPr/>
+          <p:nvPr/>
+        </p:nvSpPr>
+        <p:spPr>
+          <a:xfrm>
+            <a:off x="566928" y="1371600"/>
+            <a:ext cx="11057839" cy="237744"/>
+          </a:xfrm>
+          <a:prstGeom prst="rect">
+            <a:avLst/>
+          </a:prstGeom>
+          <a:noFill/>
+          <a:ln/>
+        </p:spPr>
+        <p:txBody>
+          <a:bodyPr wrap="square" lIns="0" tIns="0" rIns="0" bIns="0" rtlCol="0" anchor="ctr"/>
+          <a:lstStyle/>
+          <a:p>
+            <a:pPr indent="0" marL="0">
+              <a:buNone/>
+            </a:pPr>
+            <a:r>
+              <a:rPr lang="en-US" sz="1100" b="1" dirty="0">
+                <a:solidFill>
+                  <a:srgbClr val="10161F"/>
+                </a:solidFill>
+                <a:latin typeface="Pretendard" pitchFamily="34" charset="0"/>
+                <a:ea typeface="Pretendard" pitchFamily="34" charset="-122"/>
+                <a:cs typeface="Pretendard" pitchFamily="34" charset="-120"/>
+              </a:rPr>
+              <a:t>거래 안정성 확보를 위한 필수 법률·물리·임대차 실사 점검 항목 (총 6건)</a:t>
+            </a:r>
+            <a:endParaRPr lang="en-US" sz="1100" dirty="0"/>
+          </a:p>
+        </p:txBody>
+      </p:sp>
+      <p:sp>
+        <p:nvSpPr>
+          <p:cNvPr id="7" name="Shape 5"/>
+          <p:cNvSpPr/>
+          <p:nvPr/>
+        </p:nvSpPr>
+        <p:spPr>
+          <a:xfrm>
+            <a:off x="566928" y="1719072"/>
+            <a:ext cx="5368900" cy="749808"/>
+          </a:xfrm>
+          <a:prstGeom prst="rect">
+            <a:avLst/>
           </a:prstGeom>
           <a:solidFill>
             <a:srgbClr val="F7FAFC"/>
           </a:solidFill>
           <a:ln w="6350">
             <a:solidFill>
-              <a:srgbClr val="CBD5E0"/>
+              <a:srgbClr val="D9B668"/>
             </a:solidFill>
             <a:prstDash val="solid"/>
           </a:ln>
@@ -2800,91 +2753,92 @@
       </p:sp>
       <p:sp>
         <p:nvSpPr>
-          <p:cNvPr id="7" name="Shape 5"/>
-          <p:cNvSpPr/>
-          <p:nvPr/>
-        </p:nvSpPr>
-        <p:spPr>
-          <a:xfrm>
-            <a:off x="566928" y="1417320"/>
-            <a:ext cx="11057839" cy="45720"/>
+          <p:cNvPr id="8" name="Shape 6"/>
+          <p:cNvSpPr/>
+          <p:nvPr/>
+        </p:nvSpPr>
+        <p:spPr>
+          <a:xfrm>
+            <a:off x="704088" y="1947672"/>
+            <a:ext cx="292608" cy="292608"/>
           </a:xfrm>
           <a:prstGeom prst="rect">
             <a:avLst/>
           </a:prstGeom>
           <a:solidFill>
-            <a:srgbClr val="B98A2E"/>
+            <a:srgbClr val="977024"/>
           </a:solidFill>
           <a:ln/>
         </p:spPr>
       </p:sp>
       <p:sp>
         <p:nvSpPr>
-          <p:cNvPr id="8" name="Text 6"/>
-          <p:cNvSpPr/>
-          <p:nvPr/>
-        </p:nvSpPr>
-        <p:spPr>
-          <a:xfrm>
-            <a:off x="795528" y="1618488"/>
-            <a:ext cx="10600639" cy="292608"/>
-          </a:xfrm>
-          <a:prstGeom prst="rect">
-            <a:avLst/>
-          </a:prstGeom>
-          <a:noFill/>
-          <a:ln/>
-        </p:spPr>
-        <p:txBody>
-          <a:bodyPr wrap="square" lIns="0" tIns="0" rIns="0" bIns="0" rtlCol="0" anchor="ctr"/>
-          <a:lstStyle/>
-          <a:p>
-            <a:pPr indent="0" marL="0">
-              <a:buNone/>
-            </a:pPr>
-            <a:r>
-              <a:rPr lang="en-US" sz="1350" b="1" dirty="0">
-                <a:solidFill>
-                  <a:srgbClr val="977024"/>
-                </a:solidFill>
-                <a:latin typeface="Pretendard" pitchFamily="34" charset="0"/>
-                <a:ea typeface="Pretendard" pitchFamily="34" charset="-122"/>
-                <a:cs typeface="Pretendard" pitchFamily="34" charset="-120"/>
-              </a:rPr>
-              <a:t>준공업 용도제한</a:t>
-            </a:r>
-            <a:endParaRPr lang="en-US" sz="1350" dirty="0"/>
-          </a:p>
-        </p:txBody>
-      </p:sp>
-      <p:sp>
-        <p:nvSpPr>
           <p:cNvPr id="9" name="Text 7"/>
           <p:cNvSpPr/>
           <p:nvPr/>
         </p:nvSpPr>
         <p:spPr>
           <a:xfrm>
-            <a:off x="795528" y="1947672"/>
-            <a:ext cx="10600639" cy="365760"/>
-          </a:xfrm>
-          <a:prstGeom prst="rect">
-            <a:avLst/>
-          </a:prstGeom>
-          <a:noFill/>
-          <a:ln/>
-        </p:spPr>
-        <p:txBody>
-          <a:bodyPr wrap="square" lIns="0" tIns="0" rIns="0" bIns="0" rtlCol="0" anchor="ctr">
-            <a:normAutofit/>
-          </a:bodyPr>
-          <a:lstStyle/>
-          <a:p>
-            <a:pPr indent="0" marL="0">
-              <a:buNone/>
-            </a:pPr>
-            <a:r>
-              <a:rPr lang="en-US" sz="1250" b="1" dirty="0">
+            <a:off x="704088" y="1947672"/>
+            <a:ext cx="292608" cy="292608"/>
+          </a:xfrm>
+          <a:prstGeom prst="rect">
+            <a:avLst/>
+          </a:prstGeom>
+          <a:noFill/>
+          <a:ln/>
+        </p:spPr>
+        <p:txBody>
+          <a:bodyPr wrap="square" rtlCol="0" anchor="ctr"/>
+          <a:lstStyle/>
+          <a:p>
+            <a:pPr algn="ctr" indent="0" marL="0">
+              <a:buNone/>
+            </a:pPr>
+            <a:r>
+              <a:rPr lang="en-US" sz="1050" b="1" dirty="0">
+                <a:solidFill>
+                  <a:srgbClr val="FFFFFF"/>
+                </a:solidFill>
+                <a:latin typeface="Pretendard" pitchFamily="34" charset="0"/>
+                <a:ea typeface="Pretendard" pitchFamily="34" charset="-122"/>
+                <a:cs typeface="Pretendard" pitchFamily="34" charset="-120"/>
+              </a:rPr>
+              <a:t>✓</a:t>
+            </a:r>
+            <a:endParaRPr lang="en-US" sz="1050" dirty="0"/>
+          </a:p>
+        </p:txBody>
+      </p:sp>
+      <p:sp>
+        <p:nvSpPr>
+          <p:cNvPr id="10" name="Text 8"/>
+          <p:cNvSpPr/>
+          <p:nvPr/>
+        </p:nvSpPr>
+        <p:spPr>
+          <a:xfrm>
+            <a:off x="1097280" y="1792224"/>
+            <a:ext cx="4710532" cy="603504"/>
+          </a:xfrm>
+          <a:prstGeom prst="rect">
+            <a:avLst/>
+          </a:prstGeom>
+          <a:noFill/>
+          <a:ln/>
+        </p:spPr>
+        <p:txBody>
+          <a:bodyPr wrap="square" rtlCol="0" anchor="ctr"/>
+          <a:lstStyle/>
+          <a:p>
+            <a:pPr indent="0" marL="0">
+              <a:lnSpc>
+                <a:spcPct val="110000"/>
+              </a:lnSpc>
+              <a:buNone/>
+            </a:pPr>
+            <a:r>
+              <a:rPr lang="en-US" sz="950" dirty="0">
                 <a:solidFill>
                   <a:srgbClr val="10161F"/>
                 </a:solidFill>
@@ -2892,54 +2846,9 @@
                 <a:ea typeface="Pretendard" pitchFamily="34" charset="-122"/>
                 <a:cs typeface="Pretendard" pitchFamily="34" charset="-120"/>
               </a:rPr>
-              <a:t>IT 허용</a:t>
-            </a:r>
-            <a:endParaRPr lang="en-US" sz="1250" dirty="0"/>
-          </a:p>
-        </p:txBody>
-      </p:sp>
-      <p:sp>
-        <p:nvSpPr>
-          <p:cNvPr id="10" name="Text 8"/>
-          <p:cNvSpPr/>
-          <p:nvPr/>
-        </p:nvSpPr>
-        <p:spPr>
-          <a:xfrm>
-            <a:off x="795528" y="2377440"/>
-            <a:ext cx="10600639" cy="2606040"/>
-          </a:xfrm>
-          <a:prstGeom prst="rect">
-            <a:avLst/>
-          </a:prstGeom>
-          <a:noFill/>
-          <a:ln/>
-        </p:spPr>
-        <p:txBody>
-          <a:bodyPr wrap="square" lIns="0" tIns="0" rIns="0" bIns="0" rtlCol="0" anchor="t">
-            <a:normAutofit/>
-          </a:bodyPr>
-          <a:lstStyle/>
-          <a:p>
-            <a:pPr marL="342900" indent="-342900">
-              <a:lnSpc>
-                <a:spcPct val="115000"/>
-              </a:lnSpc>
-              <a:buSzPct val="100000"/>
-              <a:buChar char="•"/>
-            </a:pPr>
-            <a:r>
-              <a:rPr lang="en-US" sz="1100" dirty="0">
-                <a:solidFill>
-                  <a:srgbClr val="10161F"/>
-                </a:solidFill>
-                <a:latin typeface="Pretendard" pitchFamily="34" charset="0"/>
-                <a:ea typeface="Pretendard" pitchFamily="34" charset="-122"/>
-                <a:cs typeface="Pretendard" pitchFamily="34" charset="-120"/>
-              </a:rPr>
-              <a:t>사전 확인 완료</a:t>
-            </a:r>
-            <a:endParaRPr lang="en-US" sz="1100" dirty="0"/>
+              <a:t>등기부등본 갑구/을구 권리관계 및 근저당 채권최고액 전액 말소 조건 원본 대조</a:t>
+            </a:r>
+            <a:endParaRPr lang="en-US" sz="950" dirty="0"/>
           </a:p>
         </p:txBody>
       </p:sp>
@@ -2951,20 +2860,18 @@
         </p:nvSpPr>
         <p:spPr>
           <a:xfrm>
-            <a:off x="566928" y="5193792"/>
-            <a:ext cx="11057839" cy="621792"/>
-          </a:xfrm>
-          <a:prstGeom prst="roundRect">
-            <a:avLst>
-              <a:gd name="adj" fmla="val 8824"/>
-            </a:avLst>
+            <a:off x="566928" y="2542032"/>
+            <a:ext cx="5368900" cy="749808"/>
+          </a:xfrm>
+          <a:prstGeom prst="rect">
+            <a:avLst/>
           </a:prstGeom>
           <a:solidFill>
             <a:srgbClr val="F7FAFC"/>
           </a:solidFill>
           <a:ln w="6350">
             <a:solidFill>
-              <a:srgbClr val="CBD5E0"/>
+              <a:srgbClr val="D9B668"/>
             </a:solidFill>
             <a:prstDash val="solid"/>
           </a:ln>
@@ -2972,30 +2879,92 @@
       </p:sp>
       <p:sp>
         <p:nvSpPr>
-          <p:cNvPr id="12" name="Text 10"/>
-          <p:cNvSpPr/>
-          <p:nvPr/>
-        </p:nvSpPr>
-        <p:spPr>
-          <a:xfrm>
-            <a:off x="795528" y="5193792"/>
-            <a:ext cx="10600639" cy="621792"/>
-          </a:xfrm>
-          <a:prstGeom prst="rect">
-            <a:avLst/>
-          </a:prstGeom>
-          <a:noFill/>
-          <a:ln/>
-        </p:spPr>
-        <p:txBody>
-          <a:bodyPr wrap="square" lIns="0" tIns="0" rIns="0" bIns="0" rtlCol="0" anchor="ctr"/>
-          <a:lstStyle/>
-          <a:p>
-            <a:pPr indent="0" marL="0">
-              <a:buNone/>
-            </a:pPr>
-            <a:r>
-              <a:rPr lang="en-US" sz="1100" dirty="0">
+          <p:cNvPr id="12" name="Shape 10"/>
+          <p:cNvSpPr/>
+          <p:nvPr/>
+        </p:nvSpPr>
+        <p:spPr>
+          <a:xfrm>
+            <a:off x="704088" y="2770632"/>
+            <a:ext cx="292608" cy="292608"/>
+          </a:xfrm>
+          <a:prstGeom prst="rect">
+            <a:avLst/>
+          </a:prstGeom>
+          <a:solidFill>
+            <a:srgbClr val="977024"/>
+          </a:solidFill>
+          <a:ln/>
+        </p:spPr>
+      </p:sp>
+      <p:sp>
+        <p:nvSpPr>
+          <p:cNvPr id="13" name="Text 11"/>
+          <p:cNvSpPr/>
+          <p:nvPr/>
+        </p:nvSpPr>
+        <p:spPr>
+          <a:xfrm>
+            <a:off x="704088" y="2770632"/>
+            <a:ext cx="292608" cy="292608"/>
+          </a:xfrm>
+          <a:prstGeom prst="rect">
+            <a:avLst/>
+          </a:prstGeom>
+          <a:noFill/>
+          <a:ln/>
+        </p:spPr>
+        <p:txBody>
+          <a:bodyPr wrap="square" rtlCol="0" anchor="ctr"/>
+          <a:lstStyle/>
+          <a:p>
+            <a:pPr algn="ctr" indent="0" marL="0">
+              <a:buNone/>
+            </a:pPr>
+            <a:r>
+              <a:rPr lang="en-US" sz="1050" b="1" dirty="0">
+                <a:solidFill>
+                  <a:srgbClr val="FFFFFF"/>
+                </a:solidFill>
+                <a:latin typeface="Pretendard" pitchFamily="34" charset="0"/>
+                <a:ea typeface="Pretendard" pitchFamily="34" charset="-122"/>
+                <a:cs typeface="Pretendard" pitchFamily="34" charset="-120"/>
+              </a:rPr>
+              <a:t>✓</a:t>
+            </a:r>
+            <a:endParaRPr lang="en-US" sz="1050" dirty="0"/>
+          </a:p>
+        </p:txBody>
+      </p:sp>
+      <p:sp>
+        <p:nvSpPr>
+          <p:cNvPr id="14" name="Text 12"/>
+          <p:cNvSpPr/>
+          <p:nvPr/>
+        </p:nvSpPr>
+        <p:spPr>
+          <a:xfrm>
+            <a:off x="1097280" y="2615184"/>
+            <a:ext cx="4710532" cy="603504"/>
+          </a:xfrm>
+          <a:prstGeom prst="rect">
+            <a:avLst/>
+          </a:prstGeom>
+          <a:noFill/>
+          <a:ln/>
+        </p:spPr>
+        <p:txBody>
+          <a:bodyPr wrap="square" rtlCol="0" anchor="ctr"/>
+          <a:lstStyle/>
+          <a:p>
+            <a:pPr indent="0" marL="0">
+              <a:lnSpc>
+                <a:spcPct val="110000"/>
+              </a:lnSpc>
+              <a:buNone/>
+            </a:pPr>
+            <a:r>
+              <a:rPr lang="en-US" sz="950" dirty="0">
                 <a:solidFill>
                   <a:srgbClr val="10161F"/>
                 </a:solidFill>
@@ -3003,15 +2972,578 @@
                 <a:ea typeface="Pretendard" pitchFamily="34" charset="-122"/>
                 <a:cs typeface="Pretendard" pitchFamily="34" charset="-120"/>
               </a:rPr>
-              <a:t>※ 본 리스크 체크는 공부 및 브로커 확인 기반이며, 매수 전 전문 실사팀(변호사/건축사)을 통한 정밀 실사가 필요합니다.</a:t>
-            </a:r>
-            <a:endParaRPr lang="en-US" sz="1100" dirty="0"/>
-          </a:p>
-        </p:txBody>
-      </p:sp>
-      <p:sp>
-        <p:nvSpPr>
-          <p:cNvPr id="13" name="Text 11"/>
+              <a:t>임대차 원본 계약서 검토 (보증금, 월임대료, 관리비 실입금 내역 및 제소전화해조서)</a:t>
+            </a:r>
+            <a:endParaRPr lang="en-US" sz="950" dirty="0"/>
+          </a:p>
+        </p:txBody>
+      </p:sp>
+      <p:sp>
+        <p:nvSpPr>
+          <p:cNvPr id="15" name="Shape 13"/>
+          <p:cNvSpPr/>
+          <p:nvPr/>
+        </p:nvSpPr>
+        <p:spPr>
+          <a:xfrm>
+            <a:off x="566928" y="3364992"/>
+            <a:ext cx="5368900" cy="749808"/>
+          </a:xfrm>
+          <a:prstGeom prst="rect">
+            <a:avLst/>
+          </a:prstGeom>
+          <a:solidFill>
+            <a:srgbClr val="F7FAFC"/>
+          </a:solidFill>
+          <a:ln w="6350">
+            <a:solidFill>
+              <a:srgbClr val="D9B668"/>
+            </a:solidFill>
+            <a:prstDash val="solid"/>
+          </a:ln>
+        </p:spPr>
+      </p:sp>
+      <p:sp>
+        <p:nvSpPr>
+          <p:cNvPr id="16" name="Shape 14"/>
+          <p:cNvSpPr/>
+          <p:nvPr/>
+        </p:nvSpPr>
+        <p:spPr>
+          <a:xfrm>
+            <a:off x="704088" y="3593592"/>
+            <a:ext cx="292608" cy="292608"/>
+          </a:xfrm>
+          <a:prstGeom prst="rect">
+            <a:avLst/>
+          </a:prstGeom>
+          <a:solidFill>
+            <a:srgbClr val="977024"/>
+          </a:solidFill>
+          <a:ln/>
+        </p:spPr>
+      </p:sp>
+      <p:sp>
+        <p:nvSpPr>
+          <p:cNvPr id="17" name="Text 15"/>
+          <p:cNvSpPr/>
+          <p:nvPr/>
+        </p:nvSpPr>
+        <p:spPr>
+          <a:xfrm>
+            <a:off x="704088" y="3593592"/>
+            <a:ext cx="292608" cy="292608"/>
+          </a:xfrm>
+          <a:prstGeom prst="rect">
+            <a:avLst/>
+          </a:prstGeom>
+          <a:noFill/>
+          <a:ln/>
+        </p:spPr>
+        <p:txBody>
+          <a:bodyPr wrap="square" rtlCol="0" anchor="ctr"/>
+          <a:lstStyle/>
+          <a:p>
+            <a:pPr algn="ctr" indent="0" marL="0">
+              <a:buNone/>
+            </a:pPr>
+            <a:r>
+              <a:rPr lang="en-US" sz="1050" b="1" dirty="0">
+                <a:solidFill>
+                  <a:srgbClr val="FFFFFF"/>
+                </a:solidFill>
+                <a:latin typeface="Pretendard" pitchFamily="34" charset="0"/>
+                <a:ea typeface="Pretendard" pitchFamily="34" charset="-122"/>
+                <a:cs typeface="Pretendard" pitchFamily="34" charset="-120"/>
+              </a:rPr>
+              <a:t>✓</a:t>
+            </a:r>
+            <a:endParaRPr lang="en-US" sz="1050" dirty="0"/>
+          </a:p>
+        </p:txBody>
+      </p:sp>
+      <p:sp>
+        <p:nvSpPr>
+          <p:cNvPr id="18" name="Text 16"/>
+          <p:cNvSpPr/>
+          <p:nvPr/>
+        </p:nvSpPr>
+        <p:spPr>
+          <a:xfrm>
+            <a:off x="1097280" y="3438144"/>
+            <a:ext cx="4710532" cy="603504"/>
+          </a:xfrm>
+          <a:prstGeom prst="rect">
+            <a:avLst/>
+          </a:prstGeom>
+          <a:noFill/>
+          <a:ln/>
+        </p:spPr>
+        <p:txBody>
+          <a:bodyPr wrap="square" rtlCol="0" anchor="ctr"/>
+          <a:lstStyle/>
+          <a:p>
+            <a:pPr indent="0" marL="0">
+              <a:lnSpc>
+                <a:spcPct val="110000"/>
+              </a:lnSpc>
+              <a:buNone/>
+            </a:pPr>
+            <a:r>
+              <a:rPr lang="en-US" sz="950" dirty="0">
+                <a:solidFill>
+                  <a:srgbClr val="10161F"/>
+                </a:solidFill>
+                <a:latin typeface="Pretendard" pitchFamily="34" charset="0"/>
+                <a:ea typeface="Pretendard" pitchFamily="34" charset="-122"/>
+                <a:cs typeface="Pretendard" pitchFamily="34" charset="-120"/>
+              </a:rPr>
+              <a:t>건축물대장상 위반건축물 등재 여부 및 불법 증축·용도변경 이행강제금 납부 이력 점검</a:t>
+            </a:r>
+            <a:endParaRPr lang="en-US" sz="950" dirty="0"/>
+          </a:p>
+        </p:txBody>
+      </p:sp>
+      <p:sp>
+        <p:nvSpPr>
+          <p:cNvPr id="19" name="Shape 17"/>
+          <p:cNvSpPr/>
+          <p:nvPr/>
+        </p:nvSpPr>
+        <p:spPr>
+          <a:xfrm>
+            <a:off x="6255868" y="1719072"/>
+            <a:ext cx="5368900" cy="749808"/>
+          </a:xfrm>
+          <a:prstGeom prst="rect">
+            <a:avLst/>
+          </a:prstGeom>
+          <a:solidFill>
+            <a:srgbClr val="F7FAFC"/>
+          </a:solidFill>
+          <a:ln w="6350">
+            <a:solidFill>
+              <a:srgbClr val="D9B668"/>
+            </a:solidFill>
+            <a:prstDash val="solid"/>
+          </a:ln>
+        </p:spPr>
+      </p:sp>
+      <p:sp>
+        <p:nvSpPr>
+          <p:cNvPr id="20" name="Shape 18"/>
+          <p:cNvSpPr/>
+          <p:nvPr/>
+        </p:nvSpPr>
+        <p:spPr>
+          <a:xfrm>
+            <a:off x="6393028" y="1947672"/>
+            <a:ext cx="292608" cy="292608"/>
+          </a:xfrm>
+          <a:prstGeom prst="rect">
+            <a:avLst/>
+          </a:prstGeom>
+          <a:solidFill>
+            <a:srgbClr val="977024"/>
+          </a:solidFill>
+          <a:ln/>
+        </p:spPr>
+      </p:sp>
+      <p:sp>
+        <p:nvSpPr>
+          <p:cNvPr id="21" name="Text 19"/>
+          <p:cNvSpPr/>
+          <p:nvPr/>
+        </p:nvSpPr>
+        <p:spPr>
+          <a:xfrm>
+            <a:off x="6393028" y="1947672"/>
+            <a:ext cx="292608" cy="292608"/>
+          </a:xfrm>
+          <a:prstGeom prst="rect">
+            <a:avLst/>
+          </a:prstGeom>
+          <a:noFill/>
+          <a:ln/>
+        </p:spPr>
+        <p:txBody>
+          <a:bodyPr wrap="square" rtlCol="0" anchor="ctr"/>
+          <a:lstStyle/>
+          <a:p>
+            <a:pPr algn="ctr" indent="0" marL="0">
+              <a:buNone/>
+            </a:pPr>
+            <a:r>
+              <a:rPr lang="en-US" sz="1050" b="1" dirty="0">
+                <a:solidFill>
+                  <a:srgbClr val="FFFFFF"/>
+                </a:solidFill>
+                <a:latin typeface="Pretendard" pitchFamily="34" charset="0"/>
+                <a:ea typeface="Pretendard" pitchFamily="34" charset="-122"/>
+                <a:cs typeface="Pretendard" pitchFamily="34" charset="-120"/>
+              </a:rPr>
+              <a:t>✓</a:t>
+            </a:r>
+            <a:endParaRPr lang="en-US" sz="1050" dirty="0"/>
+          </a:p>
+        </p:txBody>
+      </p:sp>
+      <p:sp>
+        <p:nvSpPr>
+          <p:cNvPr id="22" name="Text 20"/>
+          <p:cNvSpPr/>
+          <p:nvPr/>
+        </p:nvSpPr>
+        <p:spPr>
+          <a:xfrm>
+            <a:off x="6786220" y="1792224"/>
+            <a:ext cx="4710532" cy="603504"/>
+          </a:xfrm>
+          <a:prstGeom prst="rect">
+            <a:avLst/>
+          </a:prstGeom>
+          <a:noFill/>
+          <a:ln/>
+        </p:spPr>
+        <p:txBody>
+          <a:bodyPr wrap="square" rtlCol="0" anchor="ctr"/>
+          <a:lstStyle/>
+          <a:p>
+            <a:pPr indent="0" marL="0">
+              <a:lnSpc>
+                <a:spcPct val="110000"/>
+              </a:lnSpc>
+              <a:buNone/>
+            </a:pPr>
+            <a:r>
+              <a:rPr lang="en-US" sz="950" dirty="0">
+                <a:solidFill>
+                  <a:srgbClr val="10161F"/>
+                </a:solidFill>
+                <a:latin typeface="Pretendard" pitchFamily="34" charset="0"/>
+                <a:ea typeface="Pretendard" pitchFamily="34" charset="-122"/>
+                <a:cs typeface="Pretendard" pitchFamily="34" charset="-120"/>
+              </a:rPr>
+              <a:t>토지이용계획확인원상 도시계획시설 저촉, 건축선 후퇴, 지구단위계획 특별계획구역 확인</a:t>
+            </a:r>
+            <a:endParaRPr lang="en-US" sz="950" dirty="0"/>
+          </a:p>
+        </p:txBody>
+      </p:sp>
+      <p:sp>
+        <p:nvSpPr>
+          <p:cNvPr id="23" name="Shape 21"/>
+          <p:cNvSpPr/>
+          <p:nvPr/>
+        </p:nvSpPr>
+        <p:spPr>
+          <a:xfrm>
+            <a:off x="6255868" y="2542032"/>
+            <a:ext cx="5368900" cy="749808"/>
+          </a:xfrm>
+          <a:prstGeom prst="rect">
+            <a:avLst/>
+          </a:prstGeom>
+          <a:solidFill>
+            <a:srgbClr val="F7FAFC"/>
+          </a:solidFill>
+          <a:ln w="6350">
+            <a:solidFill>
+              <a:srgbClr val="D9B668"/>
+            </a:solidFill>
+            <a:prstDash val="solid"/>
+          </a:ln>
+        </p:spPr>
+      </p:sp>
+      <p:sp>
+        <p:nvSpPr>
+          <p:cNvPr id="24" name="Shape 22"/>
+          <p:cNvSpPr/>
+          <p:nvPr/>
+        </p:nvSpPr>
+        <p:spPr>
+          <a:xfrm>
+            <a:off x="6393028" y="2770632"/>
+            <a:ext cx="292608" cy="292608"/>
+          </a:xfrm>
+          <a:prstGeom prst="rect">
+            <a:avLst/>
+          </a:prstGeom>
+          <a:solidFill>
+            <a:srgbClr val="977024"/>
+          </a:solidFill>
+          <a:ln/>
+        </p:spPr>
+      </p:sp>
+      <p:sp>
+        <p:nvSpPr>
+          <p:cNvPr id="25" name="Text 23"/>
+          <p:cNvSpPr/>
+          <p:nvPr/>
+        </p:nvSpPr>
+        <p:spPr>
+          <a:xfrm>
+            <a:off x="6393028" y="2770632"/>
+            <a:ext cx="292608" cy="292608"/>
+          </a:xfrm>
+          <a:prstGeom prst="rect">
+            <a:avLst/>
+          </a:prstGeom>
+          <a:noFill/>
+          <a:ln/>
+        </p:spPr>
+        <p:txBody>
+          <a:bodyPr wrap="square" rtlCol="0" anchor="ctr"/>
+          <a:lstStyle/>
+          <a:p>
+            <a:pPr algn="ctr" indent="0" marL="0">
+              <a:buNone/>
+            </a:pPr>
+            <a:r>
+              <a:rPr lang="en-US" sz="1050" b="1" dirty="0">
+                <a:solidFill>
+                  <a:srgbClr val="FFFFFF"/>
+                </a:solidFill>
+                <a:latin typeface="Pretendard" pitchFamily="34" charset="0"/>
+                <a:ea typeface="Pretendard" pitchFamily="34" charset="-122"/>
+                <a:cs typeface="Pretendard" pitchFamily="34" charset="-120"/>
+              </a:rPr>
+              <a:t>✓</a:t>
+            </a:r>
+            <a:endParaRPr lang="en-US" sz="1050" dirty="0"/>
+          </a:p>
+        </p:txBody>
+      </p:sp>
+      <p:sp>
+        <p:nvSpPr>
+          <p:cNvPr id="26" name="Text 24"/>
+          <p:cNvSpPr/>
+          <p:nvPr/>
+        </p:nvSpPr>
+        <p:spPr>
+          <a:xfrm>
+            <a:off x="6786220" y="2615184"/>
+            <a:ext cx="4710532" cy="603504"/>
+          </a:xfrm>
+          <a:prstGeom prst="rect">
+            <a:avLst/>
+          </a:prstGeom>
+          <a:noFill/>
+          <a:ln/>
+        </p:spPr>
+        <p:txBody>
+          <a:bodyPr wrap="square" rtlCol="0" anchor="ctr"/>
+          <a:lstStyle/>
+          <a:p>
+            <a:pPr indent="0" marL="0">
+              <a:lnSpc>
+                <a:spcPct val="110000"/>
+              </a:lnSpc>
+              <a:buNone/>
+            </a:pPr>
+            <a:r>
+              <a:rPr lang="en-US" sz="950" dirty="0">
+                <a:solidFill>
+                  <a:srgbClr val="10161F"/>
+                </a:solidFill>
+                <a:latin typeface="Pretendard" pitchFamily="34" charset="0"/>
+                <a:ea typeface="Pretendard" pitchFamily="34" charset="-122"/>
+                <a:cs typeface="Pretendard" pitchFamily="34" charset="-120"/>
+              </a:rPr>
+              <a:t>기계식 주차기 정기 안전점검 합격증, 승강기 검사필증, 소방 완비증명서 실물 실사</a:t>
+            </a:r>
+            <a:endParaRPr lang="en-US" sz="950" dirty="0"/>
+          </a:p>
+        </p:txBody>
+      </p:sp>
+      <p:sp>
+        <p:nvSpPr>
+          <p:cNvPr id="27" name="Shape 25"/>
+          <p:cNvSpPr/>
+          <p:nvPr/>
+        </p:nvSpPr>
+        <p:spPr>
+          <a:xfrm>
+            <a:off x="6255868" y="3364992"/>
+            <a:ext cx="5368900" cy="749808"/>
+          </a:xfrm>
+          <a:prstGeom prst="rect">
+            <a:avLst/>
+          </a:prstGeom>
+          <a:solidFill>
+            <a:srgbClr val="F7FAFC"/>
+          </a:solidFill>
+          <a:ln w="6350">
+            <a:solidFill>
+              <a:srgbClr val="D9B668"/>
+            </a:solidFill>
+            <a:prstDash val="solid"/>
+          </a:ln>
+        </p:spPr>
+      </p:sp>
+      <p:sp>
+        <p:nvSpPr>
+          <p:cNvPr id="28" name="Shape 26"/>
+          <p:cNvSpPr/>
+          <p:nvPr/>
+        </p:nvSpPr>
+        <p:spPr>
+          <a:xfrm>
+            <a:off x="6393028" y="3593592"/>
+            <a:ext cx="292608" cy="292608"/>
+          </a:xfrm>
+          <a:prstGeom prst="rect">
+            <a:avLst/>
+          </a:prstGeom>
+          <a:solidFill>
+            <a:srgbClr val="977024"/>
+          </a:solidFill>
+          <a:ln/>
+        </p:spPr>
+      </p:sp>
+      <p:sp>
+        <p:nvSpPr>
+          <p:cNvPr id="29" name="Text 27"/>
+          <p:cNvSpPr/>
+          <p:nvPr/>
+        </p:nvSpPr>
+        <p:spPr>
+          <a:xfrm>
+            <a:off x="6393028" y="3593592"/>
+            <a:ext cx="292608" cy="292608"/>
+          </a:xfrm>
+          <a:prstGeom prst="rect">
+            <a:avLst/>
+          </a:prstGeom>
+          <a:noFill/>
+          <a:ln/>
+        </p:spPr>
+        <p:txBody>
+          <a:bodyPr wrap="square" rtlCol="0" anchor="ctr"/>
+          <a:lstStyle/>
+          <a:p>
+            <a:pPr algn="ctr" indent="0" marL="0">
+              <a:buNone/>
+            </a:pPr>
+            <a:r>
+              <a:rPr lang="en-US" sz="1050" b="1" dirty="0">
+                <a:solidFill>
+                  <a:srgbClr val="FFFFFF"/>
+                </a:solidFill>
+                <a:latin typeface="Pretendard" pitchFamily="34" charset="0"/>
+                <a:ea typeface="Pretendard" pitchFamily="34" charset="-122"/>
+                <a:cs typeface="Pretendard" pitchFamily="34" charset="-120"/>
+              </a:rPr>
+              <a:t>✓</a:t>
+            </a:r>
+            <a:endParaRPr lang="en-US" sz="1050" dirty="0"/>
+          </a:p>
+        </p:txBody>
+      </p:sp>
+      <p:sp>
+        <p:nvSpPr>
+          <p:cNvPr id="30" name="Text 28"/>
+          <p:cNvSpPr/>
+          <p:nvPr/>
+        </p:nvSpPr>
+        <p:spPr>
+          <a:xfrm>
+            <a:off x="6786220" y="3438144"/>
+            <a:ext cx="4710532" cy="603504"/>
+          </a:xfrm>
+          <a:prstGeom prst="rect">
+            <a:avLst/>
+          </a:prstGeom>
+          <a:noFill/>
+          <a:ln/>
+        </p:spPr>
+        <p:txBody>
+          <a:bodyPr wrap="square" rtlCol="0" anchor="ctr"/>
+          <a:lstStyle/>
+          <a:p>
+            <a:pPr indent="0" marL="0">
+              <a:lnSpc>
+                <a:spcPct val="110000"/>
+              </a:lnSpc>
+              <a:buNone/>
+            </a:pPr>
+            <a:r>
+              <a:rPr lang="en-US" sz="950" dirty="0">
+                <a:solidFill>
+                  <a:srgbClr val="10161F"/>
+                </a:solidFill>
+                <a:latin typeface="Pretendard" pitchFamily="34" charset="0"/>
+                <a:ea typeface="Pretendard" pitchFamily="34" charset="-122"/>
+                <a:cs typeface="Pretendard" pitchFamily="34" charset="-120"/>
+              </a:rPr>
+              <a:t>정화조 용량 대비 현 업종 적합성 및 하수도 원인자부담금 추가 부과 대상 여부 확인</a:t>
+            </a:r>
+            <a:endParaRPr lang="en-US" sz="950" dirty="0"/>
+          </a:p>
+        </p:txBody>
+      </p:sp>
+      <p:sp>
+        <p:nvSpPr>
+          <p:cNvPr id="31" name="Shape 29"/>
+          <p:cNvSpPr/>
+          <p:nvPr/>
+        </p:nvSpPr>
+        <p:spPr>
+          <a:xfrm>
+            <a:off x="566928" y="5349240"/>
+            <a:ext cx="11057839" cy="457200"/>
+          </a:xfrm>
+          <a:prstGeom prst="rect">
+            <a:avLst/>
+          </a:prstGeom>
+          <a:solidFill>
+            <a:srgbClr val="D9B668"/>
+          </a:solidFill>
+          <a:ln/>
+        </p:spPr>
+      </p:sp>
+      <p:sp>
+        <p:nvSpPr>
+          <p:cNvPr id="32" name="Text 30"/>
+          <p:cNvSpPr/>
+          <p:nvPr/>
+        </p:nvSpPr>
+        <p:spPr>
+          <a:xfrm>
+            <a:off x="749808" y="5422392"/>
+            <a:ext cx="10692079" cy="310896"/>
+          </a:xfrm>
+          <a:prstGeom prst="rect">
+            <a:avLst/>
+          </a:prstGeom>
+          <a:noFill/>
+          <a:ln/>
+        </p:spPr>
+        <p:txBody>
+          <a:bodyPr wrap="square" rtlCol="0" anchor="ctr"/>
+          <a:lstStyle/>
+          <a:p>
+            <a:pPr indent="0" marL="0">
+              <a:buNone/>
+            </a:pPr>
+            <a:r>
+              <a:rPr lang="en-US" sz="950" b="1" dirty="0">
+                <a:solidFill>
+                  <a:srgbClr val="977024"/>
+                </a:solidFill>
+                <a:latin typeface="Pretendard" pitchFamily="34" charset="0"/>
+                <a:ea typeface="Pretendard" pitchFamily="34" charset="-122"/>
+                <a:cs typeface="Pretendard" pitchFamily="34" charset="-120"/>
+              </a:rPr>
+              <a:t>※ 본 체크리스트는 계약 전 매수인의 안전한 자산 인수를 위한 필수 확인 사항이며, 실사(Due Diligence) 결과에 따라 매매 조건 및 잔금 일정이 조정될 수 있습니다.</a:t>
+            </a:r>
+            <a:endParaRPr lang="en-US" sz="950" dirty="0"/>
+          </a:p>
+        </p:txBody>
+      </p:sp>
+      <p:sp>
+        <p:nvSpPr>
+          <p:cNvPr id="33" name="Text 31"/>
           <p:cNvSpPr/>
           <p:nvPr/>
         </p:nvSpPr>
@@ -3050,7 +3582,7 @@
       </p:sp>
       <p:sp>
         <p:nvSpPr>
-          <p:cNvPr id="14" name="Text 12"/>
+          <p:cNvPr id="34" name="Text 32"/>
           <p:cNvSpPr/>
           <p:nvPr/>
         </p:nvSpPr>
@@ -3211,7 +3743,7 @@
                 <a:ea typeface="Arial" pitchFamily="34" charset="-122"/>
                 <a:cs typeface="Arial" pitchFamily="34" charset="-120"/>
               </a:rPr>
-              <a:t>Checklist</a:t>
+              <a:t>Process</a:t>
             </a:r>
             <a:endParaRPr lang="en-US" sz="950" dirty="0"/>
           </a:p>
@@ -3252,7 +3784,7 @@
                 <a:ea typeface="Pretendard" pitchFamily="34" charset="-122"/>
                 <a:cs typeface="Pretendard" pitchFamily="34" charset="-120"/>
               </a:rPr>
-              <a:t>실사 체크리스트</a:t>
+              <a:t>진행 절차</a:t>
             </a:r>
             <a:endParaRPr lang="en-US" sz="2300" dirty="0"/>
           </a:p>
@@ -3260,63 +3792,26 @@
       </p:sp>
       <p:sp>
         <p:nvSpPr>
-          <p:cNvPr id="6" name="Text 4"/>
-          <p:cNvSpPr/>
-          <p:nvPr/>
-        </p:nvSpPr>
-        <p:spPr>
-          <a:xfrm>
-            <a:off x="566928" y="1371600"/>
-            <a:ext cx="11057839" cy="237744"/>
-          </a:xfrm>
-          <a:prstGeom prst="rect">
-            <a:avLst/>
-          </a:prstGeom>
-          <a:noFill/>
-          <a:ln/>
-        </p:spPr>
-        <p:txBody>
-          <a:bodyPr wrap="square" lIns="0" tIns="0" rIns="0" bIns="0" rtlCol="0" anchor="ctr"/>
-          <a:lstStyle/>
-          <a:p>
-            <a:pPr indent="0" marL="0">
-              <a:buNone/>
-            </a:pPr>
-            <a:r>
-              <a:rPr lang="en-US" sz="1100" b="1" dirty="0">
-                <a:solidFill>
-                  <a:srgbClr val="10161F"/>
-                </a:solidFill>
-                <a:latin typeface="Pretendard" pitchFamily="34" charset="0"/>
-                <a:ea typeface="Pretendard" pitchFamily="34" charset="-122"/>
-                <a:cs typeface="Pretendard" pitchFamily="34" charset="-120"/>
-              </a:rPr>
-              <a:t>거래 안정성 확보를 위한 필수 법률·물리·임대차 실사 점검 항목 (총 6건)</a:t>
-            </a:r>
-            <a:endParaRPr lang="en-US" sz="1100" dirty="0"/>
-          </a:p>
-        </p:txBody>
-      </p:sp>
-      <p:sp>
-        <p:nvSpPr>
-          <p:cNvPr id="7" name="Shape 5"/>
-          <p:cNvSpPr/>
-          <p:nvPr/>
-        </p:nvSpPr>
-        <p:spPr>
-          <a:xfrm>
-            <a:off x="566928" y="1719072"/>
-            <a:ext cx="5368900" cy="749808"/>
-          </a:xfrm>
-          <a:prstGeom prst="rect">
-            <a:avLst/>
+          <p:cNvPr id="6" name="Shape 4"/>
+          <p:cNvSpPr/>
+          <p:nvPr/>
+        </p:nvSpPr>
+        <p:spPr>
+          <a:xfrm>
+            <a:off x="566928" y="1572768"/>
+            <a:ext cx="11057839" cy="3200400"/>
+          </a:xfrm>
+          <a:prstGeom prst="roundRect">
+            <a:avLst>
+              <a:gd name="adj" fmla="val 1714"/>
+            </a:avLst>
           </a:prstGeom>
           <a:solidFill>
             <a:srgbClr val="F7FAFC"/>
           </a:solidFill>
           <a:ln w="6350">
             <a:solidFill>
-              <a:srgbClr val="D9B668"/>
+              <a:srgbClr val="CBD5E0"/>
             </a:solidFill>
             <a:prstDash val="solid"/>
           </a:ln>
@@ -3324,34 +3819,73 @@
       </p:sp>
       <p:sp>
         <p:nvSpPr>
-          <p:cNvPr id="8" name="Shape 6"/>
-          <p:cNvSpPr/>
-          <p:nvPr/>
-        </p:nvSpPr>
-        <p:spPr>
-          <a:xfrm>
-            <a:off x="704088" y="1947672"/>
-            <a:ext cx="292608" cy="292608"/>
-          </a:xfrm>
-          <a:prstGeom prst="rect">
+          <p:cNvPr id="7" name="Shape 5"/>
+          <p:cNvSpPr/>
+          <p:nvPr/>
+        </p:nvSpPr>
+        <p:spPr>
+          <a:xfrm>
+            <a:off x="786384" y="1792224"/>
+            <a:ext cx="438912" cy="438912"/>
+          </a:xfrm>
+          <a:prstGeom prst="ellipse">
             <a:avLst/>
           </a:prstGeom>
           <a:solidFill>
-            <a:srgbClr val="977024"/>
+            <a:srgbClr val="B98A2E"/>
           </a:solidFill>
           <a:ln/>
         </p:spPr>
       </p:sp>
       <p:sp>
         <p:nvSpPr>
+          <p:cNvPr id="8" name="Text 6"/>
+          <p:cNvSpPr/>
+          <p:nvPr/>
+        </p:nvSpPr>
+        <p:spPr>
+          <a:xfrm>
+            <a:off x="786384" y="1792224"/>
+            <a:ext cx="438912" cy="438912"/>
+          </a:xfrm>
+          <a:prstGeom prst="rect">
+            <a:avLst/>
+          </a:prstGeom>
+          <a:noFill/>
+          <a:ln/>
+        </p:spPr>
+        <p:txBody>
+          <a:bodyPr wrap="square" lIns="0" tIns="0" rIns="0" bIns="0" rtlCol="0" anchor="ctr"/>
+          <a:lstStyle/>
+          <a:p>
+            <a:pPr algn="ctr" indent="0" marL="0">
+              <a:buNone/>
+            </a:pPr>
+            <a:r>
+              <a:rPr lang="en-US" sz="1400" b="1" dirty="0">
+                <a:solidFill>
+                  <a:srgbClr val="FFFFFF"/>
+                </a:solidFill>
+                <a:latin typeface="Arial" pitchFamily="34" charset="0"/>
+                <a:ea typeface="Arial" pitchFamily="34" charset="-122"/>
+                <a:cs typeface="Arial" pitchFamily="34" charset="-120"/>
+              </a:rPr>
+              <a:t>01</a:t>
+            </a:r>
+            <a:endParaRPr lang="en-US" sz="1400" dirty="0"/>
+          </a:p>
+        </p:txBody>
+      </p:sp>
+      <p:sp>
+        <p:nvSpPr>
           <p:cNvPr id="9" name="Text 7"/>
           <p:cNvSpPr/>
           <p:nvPr/>
         </p:nvSpPr>
         <p:spPr>
           <a:xfrm>
-            <a:off x="704088" y="1947672"/>
-            <a:ext cx="292608" cy="292608"/>
+            <a:off x="786384" y="2304288"/>
+            <a:ext cx="10618927" cy="365760"/>
           </a:xfrm>
           <a:prstGeom prst="rect">
             <a:avLst/>
@@ -3363,21 +3897,21 @@
           <a:bodyPr wrap="square" rtlCol="0" anchor="ctr"/>
           <a:lstStyle/>
           <a:p>
-            <a:pPr algn="ctr" indent="0" marL="0">
-              <a:buNone/>
-            </a:pPr>
-            <a:r>
-              <a:rPr lang="en-US" sz="1050" b="1" dirty="0">
-                <a:solidFill>
-                  <a:srgbClr val="FFFFFF"/>
-                </a:solidFill>
-                <a:latin typeface="Pretendard" pitchFamily="34" charset="0"/>
-                <a:ea typeface="Pretendard" pitchFamily="34" charset="-122"/>
-                <a:cs typeface="Pretendard" pitchFamily="34" charset="-120"/>
-              </a:rPr>
-              <a:t>✓</a:t>
-            </a:r>
-            <a:endParaRPr lang="en-US" sz="1050" dirty="0"/>
+            <a:pPr indent="0" marL="0">
+              <a:buNone/>
+            </a:pPr>
+            <a:r>
+              <a:rPr lang="en-US" sz="1600" b="1" dirty="0">
+                <a:solidFill>
+                  <a:srgbClr val="10161F"/>
+                </a:solidFill>
+                <a:latin typeface="Pretendard" pitchFamily="34" charset="0"/>
+                <a:ea typeface="Pretendard" pitchFamily="34" charset="-122"/>
+                <a:cs typeface="Pretendard" pitchFamily="34" charset="-120"/>
+              </a:rPr>
+              <a:t>1단계</a:t>
+            </a:r>
+            <a:endParaRPr lang="en-US" sz="1600" dirty="0"/>
           </a:p>
         </p:txBody>
       </p:sp>
@@ -3389,27 +3923,24 @@
         </p:nvSpPr>
         <p:spPr>
           <a:xfrm>
-            <a:off x="1097280" y="1792224"/>
-            <a:ext cx="4710532" cy="603504"/>
-          </a:xfrm>
-          <a:prstGeom prst="rect">
-            <a:avLst/>
-          </a:prstGeom>
-          <a:noFill/>
-          <a:ln/>
-        </p:spPr>
-        <p:txBody>
-          <a:bodyPr wrap="square" rtlCol="0" anchor="ctr"/>
-          <a:lstStyle/>
-          <a:p>
-            <a:pPr indent="0" marL="0">
-              <a:lnSpc>
-                <a:spcPct val="110000"/>
-              </a:lnSpc>
-              <a:buNone/>
-            </a:pPr>
-            <a:r>
-              <a:rPr lang="en-US" sz="950" dirty="0">
+            <a:off x="786384" y="2761488"/>
+            <a:ext cx="10618927" cy="1828800"/>
+          </a:xfrm>
+          <a:prstGeom prst="rect">
+            <a:avLst/>
+          </a:prstGeom>
+          <a:noFill/>
+          <a:ln/>
+        </p:spPr>
+        <p:txBody>
+          <a:bodyPr wrap="square" rtlCol="0" anchor="t"/>
+          <a:lstStyle/>
+          <a:p>
+            <a:pPr indent="0" marL="0">
+              <a:buNone/>
+            </a:pPr>
+            <a:r>
+              <a:rPr lang="en-US" sz="1100" dirty="0">
                 <a:solidFill>
                   <a:srgbClr val="10161F"/>
                 </a:solidFill>
@@ -3417,125 +3948,16 @@
                 <a:ea typeface="Pretendard" pitchFamily="34" charset="-122"/>
                 <a:cs typeface="Pretendard" pitchFamily="34" charset="-120"/>
               </a:rPr>
-              <a:t>등기부등본 갑구/을구 권리관계 및 근저당 채권최고액 전액 말소 조건 원본 대조</a:t>
-            </a:r>
-            <a:endParaRPr lang="en-US" sz="950" dirty="0"/>
-          </a:p>
-        </p:txBody>
-      </p:sp>
-      <p:sp>
-        <p:nvSpPr>
-          <p:cNvPr id="11" name="Shape 9"/>
-          <p:cNvSpPr/>
-          <p:nvPr/>
-        </p:nvSpPr>
-        <p:spPr>
-          <a:xfrm>
-            <a:off x="566928" y="2542032"/>
-            <a:ext cx="5368900" cy="749808"/>
-          </a:xfrm>
-          <a:prstGeom prst="rect">
-            <a:avLst/>
-          </a:prstGeom>
-          <a:solidFill>
-            <a:srgbClr val="F7FAFC"/>
-          </a:solidFill>
-          <a:ln w="6350">
-            <a:solidFill>
-              <a:srgbClr val="D9B668"/>
-            </a:solidFill>
-            <a:prstDash val="solid"/>
-          </a:ln>
-        </p:spPr>
-      </p:sp>
-      <p:sp>
-        <p:nvSpPr>
-          <p:cNvPr id="12" name="Shape 10"/>
-          <p:cNvSpPr/>
-          <p:nvPr/>
-        </p:nvSpPr>
-        <p:spPr>
-          <a:xfrm>
-            <a:off x="704088" y="2770632"/>
-            <a:ext cx="292608" cy="292608"/>
-          </a:xfrm>
-          <a:prstGeom prst="rect">
-            <a:avLst/>
-          </a:prstGeom>
-          <a:solidFill>
-            <a:srgbClr val="977024"/>
-          </a:solidFill>
-          <a:ln/>
-        </p:spPr>
-      </p:sp>
-      <p:sp>
-        <p:nvSpPr>
-          <p:cNvPr id="13" name="Text 11"/>
-          <p:cNvSpPr/>
-          <p:nvPr/>
-        </p:nvSpPr>
-        <p:spPr>
-          <a:xfrm>
-            <a:off x="704088" y="2770632"/>
-            <a:ext cx="292608" cy="292608"/>
-          </a:xfrm>
-          <a:prstGeom prst="rect">
-            <a:avLst/>
-          </a:prstGeom>
-          <a:noFill/>
-          <a:ln/>
-        </p:spPr>
-        <p:txBody>
-          <a:bodyPr wrap="square" rtlCol="0" anchor="ctr"/>
-          <a:lstStyle/>
-          <a:p>
-            <a:pPr algn="ctr" indent="0" marL="0">
-              <a:buNone/>
-            </a:pPr>
-            <a:r>
-              <a:rPr lang="en-US" sz="1050" b="1" dirty="0">
-                <a:solidFill>
-                  <a:srgbClr val="FFFFFF"/>
-                </a:solidFill>
-                <a:latin typeface="Pretendard" pitchFamily="34" charset="0"/>
-                <a:ea typeface="Pretendard" pitchFamily="34" charset="-122"/>
-                <a:cs typeface="Pretendard" pitchFamily="34" charset="-120"/>
-              </a:rPr>
-              <a:t>✓</a:t>
-            </a:r>
-            <a:endParaRPr lang="en-US" sz="1050" dirty="0"/>
-          </a:p>
-        </p:txBody>
-      </p:sp>
-      <p:sp>
-        <p:nvSpPr>
-          <p:cNvPr id="14" name="Text 12"/>
-          <p:cNvSpPr/>
-          <p:nvPr/>
-        </p:nvSpPr>
-        <p:spPr>
-          <a:xfrm>
-            <a:off x="1097280" y="2615184"/>
-            <a:ext cx="4710532" cy="603504"/>
-          </a:xfrm>
-          <a:prstGeom prst="rect">
-            <a:avLst/>
-          </a:prstGeom>
-          <a:noFill/>
-          <a:ln/>
-        </p:spPr>
-        <p:txBody>
-          <a:bodyPr wrap="square" rtlCol="0" anchor="ctr"/>
-          <a:lstStyle/>
-          <a:p>
-            <a:pPr indent="0" marL="0">
-              <a:lnSpc>
-                <a:spcPct val="110000"/>
-              </a:lnSpc>
-              <a:buNone/>
-            </a:pPr>
-            <a:r>
-              <a:rPr lang="en-US" sz="950" dirty="0">
+              <a:t>사옥 활용 레이아웃 설계 및 인테리어 비용 산정을 권장</a:t>
+            </a:r>
+            <a:endParaRPr lang="en-US" sz="1100" dirty="0"/>
+          </a:p>
+          <a:p>
+            <a:pPr indent="0" marL="0">
+              <a:buNone/>
+            </a:pPr>
+            <a:r>
+              <a:rPr lang="en-US" sz="1100" dirty="0">
                 <a:solidFill>
                   <a:srgbClr val="10161F"/>
                 </a:solidFill>
@@ -3543,578 +3965,15 @@
                 <a:ea typeface="Pretendard" pitchFamily="34" charset="-122"/>
                 <a:cs typeface="Pretendard" pitchFamily="34" charset="-120"/>
               </a:rPr>
-              <a:t>임대차 원본 계약서 검토 (보증금, 월임대료, 관리비 실입금 내역 및 제소전화해조서)</a:t>
-            </a:r>
-            <a:endParaRPr lang="en-US" sz="950" dirty="0"/>
-          </a:p>
-        </p:txBody>
-      </p:sp>
-      <p:sp>
-        <p:nvSpPr>
-          <p:cNvPr id="15" name="Shape 13"/>
-          <p:cNvSpPr/>
-          <p:nvPr/>
-        </p:nvSpPr>
-        <p:spPr>
-          <a:xfrm>
-            <a:off x="566928" y="3364992"/>
-            <a:ext cx="5368900" cy="749808"/>
-          </a:xfrm>
-          <a:prstGeom prst="rect">
-            <a:avLst/>
-          </a:prstGeom>
-          <a:solidFill>
-            <a:srgbClr val="F7FAFC"/>
-          </a:solidFill>
-          <a:ln w="6350">
-            <a:solidFill>
-              <a:srgbClr val="D9B668"/>
-            </a:solidFill>
-            <a:prstDash val="solid"/>
-          </a:ln>
-        </p:spPr>
-      </p:sp>
-      <p:sp>
-        <p:nvSpPr>
-          <p:cNvPr id="16" name="Shape 14"/>
-          <p:cNvSpPr/>
-          <p:nvPr/>
-        </p:nvSpPr>
-        <p:spPr>
-          <a:xfrm>
-            <a:off x="704088" y="3593592"/>
-            <a:ext cx="292608" cy="292608"/>
-          </a:xfrm>
-          <a:prstGeom prst="rect">
-            <a:avLst/>
-          </a:prstGeom>
-          <a:solidFill>
-            <a:srgbClr val="977024"/>
-          </a:solidFill>
-          <a:ln/>
-        </p:spPr>
-      </p:sp>
-      <p:sp>
-        <p:nvSpPr>
-          <p:cNvPr id="17" name="Text 15"/>
-          <p:cNvSpPr/>
-          <p:nvPr/>
-        </p:nvSpPr>
-        <p:spPr>
-          <a:xfrm>
-            <a:off x="704088" y="3593592"/>
-            <a:ext cx="292608" cy="292608"/>
-          </a:xfrm>
-          <a:prstGeom prst="rect">
-            <a:avLst/>
-          </a:prstGeom>
-          <a:noFill/>
-          <a:ln/>
-        </p:spPr>
-        <p:txBody>
-          <a:bodyPr wrap="square" rtlCol="0" anchor="ctr"/>
-          <a:lstStyle/>
-          <a:p>
-            <a:pPr algn="ctr" indent="0" marL="0">
-              <a:buNone/>
-            </a:pPr>
-            <a:r>
-              <a:rPr lang="en-US" sz="1050" b="1" dirty="0">
-                <a:solidFill>
-                  <a:srgbClr val="FFFFFF"/>
-                </a:solidFill>
-                <a:latin typeface="Pretendard" pitchFamily="34" charset="0"/>
-                <a:ea typeface="Pretendard" pitchFamily="34" charset="-122"/>
-                <a:cs typeface="Pretendard" pitchFamily="34" charset="-120"/>
-              </a:rPr>
-              <a:t>✓</a:t>
-            </a:r>
-            <a:endParaRPr lang="en-US" sz="1050" dirty="0"/>
-          </a:p>
-        </p:txBody>
-      </p:sp>
-      <p:sp>
-        <p:nvSpPr>
-          <p:cNvPr id="18" name="Text 16"/>
-          <p:cNvSpPr/>
-          <p:nvPr/>
-        </p:nvSpPr>
-        <p:spPr>
-          <a:xfrm>
-            <a:off x="1097280" y="3438144"/>
-            <a:ext cx="4710532" cy="603504"/>
-          </a:xfrm>
-          <a:prstGeom prst="rect">
-            <a:avLst/>
-          </a:prstGeom>
-          <a:noFill/>
-          <a:ln/>
-        </p:spPr>
-        <p:txBody>
-          <a:bodyPr wrap="square" rtlCol="0" anchor="ctr"/>
-          <a:lstStyle/>
-          <a:p>
-            <a:pPr indent="0" marL="0">
-              <a:lnSpc>
-                <a:spcPct val="110000"/>
-              </a:lnSpc>
-              <a:buNone/>
-            </a:pPr>
-            <a:r>
-              <a:rPr lang="en-US" sz="950" dirty="0">
-                <a:solidFill>
-                  <a:srgbClr val="10161F"/>
-                </a:solidFill>
-                <a:latin typeface="Pretendard" pitchFamily="34" charset="0"/>
-                <a:ea typeface="Pretendard" pitchFamily="34" charset="-122"/>
-                <a:cs typeface="Pretendard" pitchFamily="34" charset="-120"/>
-              </a:rPr>
-              <a:t>건축물대장상 위반건축물 등재 여부 및 불법 증축·용도변경 이행강제금 납부 이력 점검</a:t>
-            </a:r>
-            <a:endParaRPr lang="en-US" sz="950" dirty="0"/>
-          </a:p>
-        </p:txBody>
-      </p:sp>
-      <p:sp>
-        <p:nvSpPr>
-          <p:cNvPr id="19" name="Shape 17"/>
-          <p:cNvSpPr/>
-          <p:nvPr/>
-        </p:nvSpPr>
-        <p:spPr>
-          <a:xfrm>
-            <a:off x="6255868" y="1719072"/>
-            <a:ext cx="5368900" cy="749808"/>
-          </a:xfrm>
-          <a:prstGeom prst="rect">
-            <a:avLst/>
-          </a:prstGeom>
-          <a:solidFill>
-            <a:srgbClr val="F7FAFC"/>
-          </a:solidFill>
-          <a:ln w="6350">
-            <a:solidFill>
-              <a:srgbClr val="D9B668"/>
-            </a:solidFill>
-            <a:prstDash val="solid"/>
-          </a:ln>
-        </p:spPr>
-      </p:sp>
-      <p:sp>
-        <p:nvSpPr>
-          <p:cNvPr id="20" name="Shape 18"/>
-          <p:cNvSpPr/>
-          <p:nvPr/>
-        </p:nvSpPr>
-        <p:spPr>
-          <a:xfrm>
-            <a:off x="6393028" y="1947672"/>
-            <a:ext cx="292608" cy="292608"/>
-          </a:xfrm>
-          <a:prstGeom prst="rect">
-            <a:avLst/>
-          </a:prstGeom>
-          <a:solidFill>
-            <a:srgbClr val="977024"/>
-          </a:solidFill>
-          <a:ln/>
-        </p:spPr>
-      </p:sp>
-      <p:sp>
-        <p:nvSpPr>
-          <p:cNvPr id="21" name="Text 19"/>
-          <p:cNvSpPr/>
-          <p:nvPr/>
-        </p:nvSpPr>
-        <p:spPr>
-          <a:xfrm>
-            <a:off x="6393028" y="1947672"/>
-            <a:ext cx="292608" cy="292608"/>
-          </a:xfrm>
-          <a:prstGeom prst="rect">
-            <a:avLst/>
-          </a:prstGeom>
-          <a:noFill/>
-          <a:ln/>
-        </p:spPr>
-        <p:txBody>
-          <a:bodyPr wrap="square" rtlCol="0" anchor="ctr"/>
-          <a:lstStyle/>
-          <a:p>
-            <a:pPr algn="ctr" indent="0" marL="0">
-              <a:buNone/>
-            </a:pPr>
-            <a:r>
-              <a:rPr lang="en-US" sz="1050" b="1" dirty="0">
-                <a:solidFill>
-                  <a:srgbClr val="FFFFFF"/>
-                </a:solidFill>
-                <a:latin typeface="Pretendard" pitchFamily="34" charset="0"/>
-                <a:ea typeface="Pretendard" pitchFamily="34" charset="-122"/>
-                <a:cs typeface="Pretendard" pitchFamily="34" charset="-120"/>
-              </a:rPr>
-              <a:t>✓</a:t>
-            </a:r>
-            <a:endParaRPr lang="en-US" sz="1050" dirty="0"/>
-          </a:p>
-        </p:txBody>
-      </p:sp>
-      <p:sp>
-        <p:nvSpPr>
-          <p:cNvPr id="22" name="Text 20"/>
-          <p:cNvSpPr/>
-          <p:nvPr/>
-        </p:nvSpPr>
-        <p:spPr>
-          <a:xfrm>
-            <a:off x="6786220" y="1792224"/>
-            <a:ext cx="4710532" cy="603504"/>
-          </a:xfrm>
-          <a:prstGeom prst="rect">
-            <a:avLst/>
-          </a:prstGeom>
-          <a:noFill/>
-          <a:ln/>
-        </p:spPr>
-        <p:txBody>
-          <a:bodyPr wrap="square" rtlCol="0" anchor="ctr"/>
-          <a:lstStyle/>
-          <a:p>
-            <a:pPr indent="0" marL="0">
-              <a:lnSpc>
-                <a:spcPct val="110000"/>
-              </a:lnSpc>
-              <a:buNone/>
-            </a:pPr>
-            <a:r>
-              <a:rPr lang="en-US" sz="950" dirty="0">
-                <a:solidFill>
-                  <a:srgbClr val="10161F"/>
-                </a:solidFill>
-                <a:latin typeface="Pretendard" pitchFamily="34" charset="0"/>
-                <a:ea typeface="Pretendard" pitchFamily="34" charset="-122"/>
-                <a:cs typeface="Pretendard" pitchFamily="34" charset="-120"/>
-              </a:rPr>
-              <a:t>토지이용계획확인원상 도시계획시설 저촉, 건축선 후퇴, 지구단위계획 특별계획구역 확인</a:t>
-            </a:r>
-            <a:endParaRPr lang="en-US" sz="950" dirty="0"/>
-          </a:p>
-        </p:txBody>
-      </p:sp>
-      <p:sp>
-        <p:nvSpPr>
-          <p:cNvPr id="23" name="Shape 21"/>
-          <p:cNvSpPr/>
-          <p:nvPr/>
-        </p:nvSpPr>
-        <p:spPr>
-          <a:xfrm>
-            <a:off x="6255868" y="2542032"/>
-            <a:ext cx="5368900" cy="749808"/>
-          </a:xfrm>
-          <a:prstGeom prst="rect">
-            <a:avLst/>
-          </a:prstGeom>
-          <a:solidFill>
-            <a:srgbClr val="F7FAFC"/>
-          </a:solidFill>
-          <a:ln w="6350">
-            <a:solidFill>
-              <a:srgbClr val="D9B668"/>
-            </a:solidFill>
-            <a:prstDash val="solid"/>
-          </a:ln>
-        </p:spPr>
-      </p:sp>
-      <p:sp>
-        <p:nvSpPr>
-          <p:cNvPr id="24" name="Shape 22"/>
-          <p:cNvSpPr/>
-          <p:nvPr/>
-        </p:nvSpPr>
-        <p:spPr>
-          <a:xfrm>
-            <a:off x="6393028" y="2770632"/>
-            <a:ext cx="292608" cy="292608"/>
-          </a:xfrm>
-          <a:prstGeom prst="rect">
-            <a:avLst/>
-          </a:prstGeom>
-          <a:solidFill>
-            <a:srgbClr val="977024"/>
-          </a:solidFill>
-          <a:ln/>
-        </p:spPr>
-      </p:sp>
-      <p:sp>
-        <p:nvSpPr>
-          <p:cNvPr id="25" name="Text 23"/>
-          <p:cNvSpPr/>
-          <p:nvPr/>
-        </p:nvSpPr>
-        <p:spPr>
-          <a:xfrm>
-            <a:off x="6393028" y="2770632"/>
-            <a:ext cx="292608" cy="292608"/>
-          </a:xfrm>
-          <a:prstGeom prst="rect">
-            <a:avLst/>
-          </a:prstGeom>
-          <a:noFill/>
-          <a:ln/>
-        </p:spPr>
-        <p:txBody>
-          <a:bodyPr wrap="square" rtlCol="0" anchor="ctr"/>
-          <a:lstStyle/>
-          <a:p>
-            <a:pPr algn="ctr" indent="0" marL="0">
-              <a:buNone/>
-            </a:pPr>
-            <a:r>
-              <a:rPr lang="en-US" sz="1050" b="1" dirty="0">
-                <a:solidFill>
-                  <a:srgbClr val="FFFFFF"/>
-                </a:solidFill>
-                <a:latin typeface="Pretendard" pitchFamily="34" charset="0"/>
-                <a:ea typeface="Pretendard" pitchFamily="34" charset="-122"/>
-                <a:cs typeface="Pretendard" pitchFamily="34" charset="-120"/>
-              </a:rPr>
-              <a:t>✓</a:t>
-            </a:r>
-            <a:endParaRPr lang="en-US" sz="1050" dirty="0"/>
-          </a:p>
-        </p:txBody>
-      </p:sp>
-      <p:sp>
-        <p:nvSpPr>
-          <p:cNvPr id="26" name="Text 24"/>
-          <p:cNvSpPr/>
-          <p:nvPr/>
-        </p:nvSpPr>
-        <p:spPr>
-          <a:xfrm>
-            <a:off x="6786220" y="2615184"/>
-            <a:ext cx="4710532" cy="603504"/>
-          </a:xfrm>
-          <a:prstGeom prst="rect">
-            <a:avLst/>
-          </a:prstGeom>
-          <a:noFill/>
-          <a:ln/>
-        </p:spPr>
-        <p:txBody>
-          <a:bodyPr wrap="square" rtlCol="0" anchor="ctr"/>
-          <a:lstStyle/>
-          <a:p>
-            <a:pPr indent="0" marL="0">
-              <a:lnSpc>
-                <a:spcPct val="110000"/>
-              </a:lnSpc>
-              <a:buNone/>
-            </a:pPr>
-            <a:r>
-              <a:rPr lang="en-US" sz="950" dirty="0">
-                <a:solidFill>
-                  <a:srgbClr val="10161F"/>
-                </a:solidFill>
-                <a:latin typeface="Pretendard" pitchFamily="34" charset="0"/>
-                <a:ea typeface="Pretendard" pitchFamily="34" charset="-122"/>
-                <a:cs typeface="Pretendard" pitchFamily="34" charset="-120"/>
-              </a:rPr>
-              <a:t>기계식 주차기 정기 안전점검 합격증, 승강기 검사필증, 소방 완비증명서 실물 실사</a:t>
-            </a:r>
-            <a:endParaRPr lang="en-US" sz="950" dirty="0"/>
-          </a:p>
-        </p:txBody>
-      </p:sp>
-      <p:sp>
-        <p:nvSpPr>
-          <p:cNvPr id="27" name="Shape 25"/>
-          <p:cNvSpPr/>
-          <p:nvPr/>
-        </p:nvSpPr>
-        <p:spPr>
-          <a:xfrm>
-            <a:off x="6255868" y="3364992"/>
-            <a:ext cx="5368900" cy="749808"/>
-          </a:xfrm>
-          <a:prstGeom prst="rect">
-            <a:avLst/>
-          </a:prstGeom>
-          <a:solidFill>
-            <a:srgbClr val="F7FAFC"/>
-          </a:solidFill>
-          <a:ln w="6350">
-            <a:solidFill>
-              <a:srgbClr val="D9B668"/>
-            </a:solidFill>
-            <a:prstDash val="solid"/>
-          </a:ln>
-        </p:spPr>
-      </p:sp>
-      <p:sp>
-        <p:nvSpPr>
-          <p:cNvPr id="28" name="Shape 26"/>
-          <p:cNvSpPr/>
-          <p:nvPr/>
-        </p:nvSpPr>
-        <p:spPr>
-          <a:xfrm>
-            <a:off x="6393028" y="3593592"/>
-            <a:ext cx="292608" cy="292608"/>
-          </a:xfrm>
-          <a:prstGeom prst="rect">
-            <a:avLst/>
-          </a:prstGeom>
-          <a:solidFill>
-            <a:srgbClr val="977024"/>
-          </a:solidFill>
-          <a:ln/>
-        </p:spPr>
-      </p:sp>
-      <p:sp>
-        <p:nvSpPr>
-          <p:cNvPr id="29" name="Text 27"/>
-          <p:cNvSpPr/>
-          <p:nvPr/>
-        </p:nvSpPr>
-        <p:spPr>
-          <a:xfrm>
-            <a:off x="6393028" y="3593592"/>
-            <a:ext cx="292608" cy="292608"/>
-          </a:xfrm>
-          <a:prstGeom prst="rect">
-            <a:avLst/>
-          </a:prstGeom>
-          <a:noFill/>
-          <a:ln/>
-        </p:spPr>
-        <p:txBody>
-          <a:bodyPr wrap="square" rtlCol="0" anchor="ctr"/>
-          <a:lstStyle/>
-          <a:p>
-            <a:pPr algn="ctr" indent="0" marL="0">
-              <a:buNone/>
-            </a:pPr>
-            <a:r>
-              <a:rPr lang="en-US" sz="1050" b="1" dirty="0">
-                <a:solidFill>
-                  <a:srgbClr val="FFFFFF"/>
-                </a:solidFill>
-                <a:latin typeface="Pretendard" pitchFamily="34" charset="0"/>
-                <a:ea typeface="Pretendard" pitchFamily="34" charset="-122"/>
-                <a:cs typeface="Pretendard" pitchFamily="34" charset="-120"/>
-              </a:rPr>
-              <a:t>✓</a:t>
-            </a:r>
-            <a:endParaRPr lang="en-US" sz="1050" dirty="0"/>
-          </a:p>
-        </p:txBody>
-      </p:sp>
-      <p:sp>
-        <p:nvSpPr>
-          <p:cNvPr id="30" name="Text 28"/>
-          <p:cNvSpPr/>
-          <p:nvPr/>
-        </p:nvSpPr>
-        <p:spPr>
-          <a:xfrm>
-            <a:off x="6786220" y="3438144"/>
-            <a:ext cx="4710532" cy="603504"/>
-          </a:xfrm>
-          <a:prstGeom prst="rect">
-            <a:avLst/>
-          </a:prstGeom>
-          <a:noFill/>
-          <a:ln/>
-        </p:spPr>
-        <p:txBody>
-          <a:bodyPr wrap="square" rtlCol="0" anchor="ctr"/>
-          <a:lstStyle/>
-          <a:p>
-            <a:pPr indent="0" marL="0">
-              <a:lnSpc>
-                <a:spcPct val="110000"/>
-              </a:lnSpc>
-              <a:buNone/>
-            </a:pPr>
-            <a:r>
-              <a:rPr lang="en-US" sz="950" dirty="0">
-                <a:solidFill>
-                  <a:srgbClr val="10161F"/>
-                </a:solidFill>
-                <a:latin typeface="Pretendard" pitchFamily="34" charset="0"/>
-                <a:ea typeface="Pretendard" pitchFamily="34" charset="-122"/>
-                <a:cs typeface="Pretendard" pitchFamily="34" charset="-120"/>
-              </a:rPr>
-              <a:t>정화조 용량 대비 현 업종 적합성 및 하수도 원인자부담금 추가 부과 대상 여부 확인</a:t>
-            </a:r>
-            <a:endParaRPr lang="en-US" sz="950" dirty="0"/>
-          </a:p>
-        </p:txBody>
-      </p:sp>
-      <p:sp>
-        <p:nvSpPr>
-          <p:cNvPr id="31" name="Shape 29"/>
-          <p:cNvSpPr/>
-          <p:nvPr/>
-        </p:nvSpPr>
-        <p:spPr>
-          <a:xfrm>
-            <a:off x="566928" y="5349240"/>
-            <a:ext cx="11057839" cy="457200"/>
-          </a:xfrm>
-          <a:prstGeom prst="rect">
-            <a:avLst/>
-          </a:prstGeom>
-          <a:solidFill>
-            <a:srgbClr val="D9B668"/>
-          </a:solidFill>
-          <a:ln/>
-        </p:spPr>
-      </p:sp>
-      <p:sp>
-        <p:nvSpPr>
-          <p:cNvPr id="32" name="Text 30"/>
-          <p:cNvSpPr/>
-          <p:nvPr/>
-        </p:nvSpPr>
-        <p:spPr>
-          <a:xfrm>
-            <a:off x="749808" y="5422392"/>
-            <a:ext cx="10692079" cy="310896"/>
-          </a:xfrm>
-          <a:prstGeom prst="rect">
-            <a:avLst/>
-          </a:prstGeom>
-          <a:noFill/>
-          <a:ln/>
-        </p:spPr>
-        <p:txBody>
-          <a:bodyPr wrap="square" rtlCol="0" anchor="ctr"/>
-          <a:lstStyle/>
-          <a:p>
-            <a:pPr indent="0" marL="0">
-              <a:buNone/>
-            </a:pPr>
-            <a:r>
-              <a:rPr lang="en-US" sz="950" b="1" dirty="0">
-                <a:solidFill>
-                  <a:srgbClr val="977024"/>
-                </a:solidFill>
-                <a:latin typeface="Pretendard" pitchFamily="34" charset="0"/>
-                <a:ea typeface="Pretendard" pitchFamily="34" charset="-122"/>
-                <a:cs typeface="Pretendard" pitchFamily="34" charset="-120"/>
-              </a:rPr>
-              <a:t>※ 본 체크리스트는 계약 전 매수인의 안전한 자산 인수를 위한 필수 확인 사항이며, 실사(Due Diligence) 결과에 따라 매매 조건 및 잔금 일정이 조정될 수 있습니다.</a:t>
-            </a:r>
-            <a:endParaRPr lang="en-US" sz="950" dirty="0"/>
-          </a:p>
-        </p:txBody>
-      </p:sp>
-      <p:sp>
-        <p:nvSpPr>
-          <p:cNvPr id="33" name="Text 31"/>
+              <a:t>사옥 활용 레이아웃 설계 및 인테리어 비용 산정을 권장합니다.</a:t>
+            </a:r>
+            <a:endParaRPr lang="en-US" sz="1100" dirty="0"/>
+          </a:p>
+        </p:txBody>
+      </p:sp>
+      <p:sp>
+        <p:nvSpPr>
+          <p:cNvPr id="11" name="Text 9"/>
           <p:cNvSpPr/>
           <p:nvPr/>
         </p:nvSpPr>
@@ -4153,7 +4012,7 @@
       </p:sp>
       <p:sp>
         <p:nvSpPr>
-          <p:cNvPr id="34" name="Text 32"/>
+          <p:cNvPr id="12" name="Text 10"/>
           <p:cNvSpPr/>
           <p:nvPr/>
         </p:nvSpPr>
@@ -4201,436 +4060,6 @@
 <file path=ppt/slides/slide12.xml><?xml version="1.0" encoding="utf-8"?>
 <p:sld xmlns:a="http://schemas.openxmlformats.org/drawingml/2006/main" xmlns:r="http://schemas.openxmlformats.org/officeDocument/2006/relationships" xmlns:p="http://schemas.openxmlformats.org/presentationml/2006/main">
   <p:cSld name="Slide 12">
-    <p:bg>
-      <p:bgPr>
-        <a:solidFill>
-          <a:srgbClr val="FFFFFF"/>
-        </a:solidFill>
-      </p:bgPr>
-    </p:bg>
-    <p:spTree>
-      <p:nvGrpSpPr>
-        <p:cNvPr id="1" name=""/>
-        <p:cNvGrpSpPr/>
-        <p:nvPr/>
-      </p:nvGrpSpPr>
-      <p:grpSpPr>
-        <a:xfrm>
-          <a:off x="0" y="0"/>
-          <a:ext cx="0" cy="0"/>
-          <a:chOff x="0" y="0"/>
-          <a:chExt cx="0" cy="0"/>
-        </a:xfrm>
-      </p:grpSpPr>
-      <p:sp>
-        <p:nvSpPr>
-          <p:cNvPr id="2" name="Shape 0"/>
-          <p:cNvSpPr/>
-          <p:nvPr/>
-        </p:nvSpPr>
-        <p:spPr>
-          <a:xfrm>
-            <a:off x="566928" y="457200"/>
-            <a:ext cx="384048" cy="384048"/>
-          </a:xfrm>
-          <a:prstGeom prst="ellipse">
-            <a:avLst/>
-          </a:prstGeom>
-          <a:solidFill>
-            <a:srgbClr val="B98A2E"/>
-          </a:solidFill>
-          <a:ln/>
-        </p:spPr>
-      </p:sp>
-      <p:sp>
-        <p:nvSpPr>
-          <p:cNvPr id="3" name="Text 1"/>
-          <p:cNvSpPr/>
-          <p:nvPr/>
-        </p:nvSpPr>
-        <p:spPr>
-          <a:xfrm>
-            <a:off x="566928" y="457200"/>
-            <a:ext cx="384048" cy="384048"/>
-          </a:xfrm>
-          <a:prstGeom prst="rect">
-            <a:avLst/>
-          </a:prstGeom>
-          <a:noFill/>
-          <a:ln/>
-        </p:spPr>
-        <p:txBody>
-          <a:bodyPr wrap="square" lIns="0" tIns="0" rIns="0" bIns="0" rtlCol="0" anchor="ctr"/>
-          <a:lstStyle/>
-          <a:p>
-            <a:pPr algn="ctr" indent="0" marL="0">
-              <a:buNone/>
-            </a:pPr>
-            <a:r>
-              <a:rPr lang="en-US" sz="1300" b="1" dirty="0">
-                <a:solidFill>
-                  <a:srgbClr val="FFFFFF"/>
-                </a:solidFill>
-                <a:latin typeface="Arial" pitchFamily="34" charset="0"/>
-                <a:ea typeface="Arial" pitchFamily="34" charset="-122"/>
-                <a:cs typeface="Arial" pitchFamily="34" charset="-120"/>
-              </a:rPr>
-              <a:t>12</a:t>
-            </a:r>
-            <a:endParaRPr lang="en-US" sz="1300" dirty="0"/>
-          </a:p>
-        </p:txBody>
-      </p:sp>
-      <p:sp>
-        <p:nvSpPr>
-          <p:cNvPr id="4" name="Text 2"/>
-          <p:cNvSpPr/>
-          <p:nvPr/>
-        </p:nvSpPr>
-        <p:spPr>
-          <a:xfrm>
-            <a:off x="1133856" y="457200"/>
-            <a:ext cx="10490911" cy="182880"/>
-          </a:xfrm>
-          <a:prstGeom prst="rect">
-            <a:avLst/>
-          </a:prstGeom>
-          <a:noFill/>
-          <a:ln/>
-        </p:spPr>
-        <p:txBody>
-          <a:bodyPr wrap="square" lIns="0" tIns="0" rIns="0" bIns="0" rtlCol="0" anchor="ctr"/>
-          <a:lstStyle/>
-          <a:p>
-            <a:pPr indent="0" marL="0">
-              <a:buNone/>
-            </a:pPr>
-            <a:r>
-              <a:rPr lang="en-US" sz="950" b="1" spc="200" kern="0" dirty="0">
-                <a:solidFill>
-                  <a:srgbClr val="B98A2E"/>
-                </a:solidFill>
-                <a:latin typeface="Arial" pitchFamily="34" charset="0"/>
-                <a:ea typeface="Arial" pitchFamily="34" charset="-122"/>
-                <a:cs typeface="Arial" pitchFamily="34" charset="-120"/>
-              </a:rPr>
-              <a:t>Process</a:t>
-            </a:r>
-            <a:endParaRPr lang="en-US" sz="950" dirty="0"/>
-          </a:p>
-        </p:txBody>
-      </p:sp>
-      <p:sp>
-        <p:nvSpPr>
-          <p:cNvPr id="5" name="Text 3"/>
-          <p:cNvSpPr/>
-          <p:nvPr/>
-        </p:nvSpPr>
-        <p:spPr>
-          <a:xfrm>
-            <a:off x="1133856" y="640080"/>
-            <a:ext cx="10490911" cy="365760"/>
-          </a:xfrm>
-          <a:prstGeom prst="rect">
-            <a:avLst/>
-          </a:prstGeom>
-          <a:noFill/>
-          <a:ln/>
-        </p:spPr>
-        <p:txBody>
-          <a:bodyPr wrap="square" lIns="0" tIns="0" rIns="0" bIns="0" rtlCol="0" anchor="ctr">
-            <a:normAutofit/>
-          </a:bodyPr>
-          <a:lstStyle/>
-          <a:p>
-            <a:pPr indent="0" marL="0">
-              <a:buNone/>
-            </a:pPr>
-            <a:r>
-              <a:rPr lang="en-US" sz="2300" b="1" dirty="0">
-                <a:solidFill>
-                  <a:srgbClr val="10161F"/>
-                </a:solidFill>
-                <a:latin typeface="Pretendard" pitchFamily="34" charset="0"/>
-                <a:ea typeface="Pretendard" pitchFamily="34" charset="-122"/>
-                <a:cs typeface="Pretendard" pitchFamily="34" charset="-120"/>
-              </a:rPr>
-              <a:t>진행 절차</a:t>
-            </a:r>
-            <a:endParaRPr lang="en-US" sz="2300" dirty="0"/>
-          </a:p>
-        </p:txBody>
-      </p:sp>
-      <p:sp>
-        <p:nvSpPr>
-          <p:cNvPr id="6" name="Shape 4"/>
-          <p:cNvSpPr/>
-          <p:nvPr/>
-        </p:nvSpPr>
-        <p:spPr>
-          <a:xfrm>
-            <a:off x="566928" y="1572768"/>
-            <a:ext cx="11057839" cy="3200400"/>
-          </a:xfrm>
-          <a:prstGeom prst="roundRect">
-            <a:avLst>
-              <a:gd name="adj" fmla="val 1714"/>
-            </a:avLst>
-          </a:prstGeom>
-          <a:solidFill>
-            <a:srgbClr val="F7FAFC"/>
-          </a:solidFill>
-          <a:ln w="6350">
-            <a:solidFill>
-              <a:srgbClr val="CBD5E0"/>
-            </a:solidFill>
-            <a:prstDash val="solid"/>
-          </a:ln>
-        </p:spPr>
-      </p:sp>
-      <p:sp>
-        <p:nvSpPr>
-          <p:cNvPr id="7" name="Shape 5"/>
-          <p:cNvSpPr/>
-          <p:nvPr/>
-        </p:nvSpPr>
-        <p:spPr>
-          <a:xfrm>
-            <a:off x="786384" y="1792224"/>
-            <a:ext cx="438912" cy="438912"/>
-          </a:xfrm>
-          <a:prstGeom prst="ellipse">
-            <a:avLst/>
-          </a:prstGeom>
-          <a:solidFill>
-            <a:srgbClr val="B98A2E"/>
-          </a:solidFill>
-          <a:ln/>
-        </p:spPr>
-      </p:sp>
-      <p:sp>
-        <p:nvSpPr>
-          <p:cNvPr id="8" name="Text 6"/>
-          <p:cNvSpPr/>
-          <p:nvPr/>
-        </p:nvSpPr>
-        <p:spPr>
-          <a:xfrm>
-            <a:off x="786384" y="1792224"/>
-            <a:ext cx="438912" cy="438912"/>
-          </a:xfrm>
-          <a:prstGeom prst="rect">
-            <a:avLst/>
-          </a:prstGeom>
-          <a:noFill/>
-          <a:ln/>
-        </p:spPr>
-        <p:txBody>
-          <a:bodyPr wrap="square" lIns="0" tIns="0" rIns="0" bIns="0" rtlCol="0" anchor="ctr"/>
-          <a:lstStyle/>
-          <a:p>
-            <a:pPr algn="ctr" indent="0" marL="0">
-              <a:buNone/>
-            </a:pPr>
-            <a:r>
-              <a:rPr lang="en-US" sz="1400" b="1" dirty="0">
-                <a:solidFill>
-                  <a:srgbClr val="FFFFFF"/>
-                </a:solidFill>
-                <a:latin typeface="Arial" pitchFamily="34" charset="0"/>
-                <a:ea typeface="Arial" pitchFamily="34" charset="-122"/>
-                <a:cs typeface="Arial" pitchFamily="34" charset="-120"/>
-              </a:rPr>
-              <a:t>01</a:t>
-            </a:r>
-            <a:endParaRPr lang="en-US" sz="1400" dirty="0"/>
-          </a:p>
-        </p:txBody>
-      </p:sp>
-      <p:sp>
-        <p:nvSpPr>
-          <p:cNvPr id="9" name="Text 7"/>
-          <p:cNvSpPr/>
-          <p:nvPr/>
-        </p:nvSpPr>
-        <p:spPr>
-          <a:xfrm>
-            <a:off x="786384" y="2304288"/>
-            <a:ext cx="10618927" cy="365760"/>
-          </a:xfrm>
-          <a:prstGeom prst="rect">
-            <a:avLst/>
-          </a:prstGeom>
-          <a:noFill/>
-          <a:ln/>
-        </p:spPr>
-        <p:txBody>
-          <a:bodyPr wrap="square" rtlCol="0" anchor="ctr"/>
-          <a:lstStyle/>
-          <a:p>
-            <a:pPr indent="0" marL="0">
-              <a:buNone/>
-            </a:pPr>
-            <a:r>
-              <a:rPr lang="en-US" sz="1600" b="1" dirty="0">
-                <a:solidFill>
-                  <a:srgbClr val="10161F"/>
-                </a:solidFill>
-                <a:latin typeface="Pretendard" pitchFamily="34" charset="0"/>
-                <a:ea typeface="Pretendard" pitchFamily="34" charset="-122"/>
-                <a:cs typeface="Pretendard" pitchFamily="34" charset="-120"/>
-              </a:rPr>
-              <a:t>1단계</a:t>
-            </a:r>
-            <a:endParaRPr lang="en-US" sz="1600" dirty="0"/>
-          </a:p>
-        </p:txBody>
-      </p:sp>
-      <p:sp>
-        <p:nvSpPr>
-          <p:cNvPr id="10" name="Text 8"/>
-          <p:cNvSpPr/>
-          <p:nvPr/>
-        </p:nvSpPr>
-        <p:spPr>
-          <a:xfrm>
-            <a:off x="786384" y="2761488"/>
-            <a:ext cx="10618927" cy="1828800"/>
-          </a:xfrm>
-          <a:prstGeom prst="rect">
-            <a:avLst/>
-          </a:prstGeom>
-          <a:noFill/>
-          <a:ln/>
-        </p:spPr>
-        <p:txBody>
-          <a:bodyPr wrap="square" rtlCol="0" anchor="t"/>
-          <a:lstStyle/>
-          <a:p>
-            <a:pPr indent="0" marL="0">
-              <a:buNone/>
-            </a:pPr>
-            <a:r>
-              <a:rPr lang="en-US" sz="1100" dirty="0">
-                <a:solidFill>
-                  <a:srgbClr val="10161F"/>
-                </a:solidFill>
-                <a:latin typeface="Pretendard" pitchFamily="34" charset="0"/>
-                <a:ea typeface="Pretendard" pitchFamily="34" charset="-122"/>
-                <a:cs typeface="Pretendard" pitchFamily="34" charset="-120"/>
-              </a:rPr>
-              <a:t>사옥 활용 레이아웃 설계 및 인테리어 비용 산정을 권장</a:t>
-            </a:r>
-            <a:endParaRPr lang="en-US" sz="1100" dirty="0"/>
-          </a:p>
-          <a:p>
-            <a:pPr indent="0" marL="0">
-              <a:buNone/>
-            </a:pPr>
-            <a:r>
-              <a:rPr lang="en-US" sz="1100" dirty="0">
-                <a:solidFill>
-                  <a:srgbClr val="10161F"/>
-                </a:solidFill>
-                <a:latin typeface="Pretendard" pitchFamily="34" charset="0"/>
-                <a:ea typeface="Pretendard" pitchFamily="34" charset="-122"/>
-                <a:cs typeface="Pretendard" pitchFamily="34" charset="-120"/>
-              </a:rPr>
-              <a:t>사옥 활용 레이아웃 설계 및 인테리어 비용 산정을 권장합니다.</a:t>
-            </a:r>
-            <a:endParaRPr lang="en-US" sz="1100" dirty="0"/>
-          </a:p>
-        </p:txBody>
-      </p:sp>
-      <p:sp>
-        <p:nvSpPr>
-          <p:cNvPr id="11" name="Text 9"/>
-          <p:cNvSpPr/>
-          <p:nvPr/>
-        </p:nvSpPr>
-        <p:spPr>
-          <a:xfrm>
-            <a:off x="566928" y="6382512"/>
-            <a:ext cx="7315200" cy="219456"/>
-          </a:xfrm>
-          <a:prstGeom prst="rect">
-            <a:avLst/>
-          </a:prstGeom>
-          <a:noFill/>
-          <a:ln/>
-        </p:spPr>
-        <p:txBody>
-          <a:bodyPr wrap="square" lIns="0" tIns="0" rIns="0" bIns="0" rtlCol="0" anchor="ctr"/>
-          <a:lstStyle/>
-          <a:p>
-            <a:pPr indent="0" marL="0">
-              <a:buNone/>
-            </a:pPr>
-            <a:r>
-              <a:rPr lang="en-US" sz="800" dirty="0">
-                <a:solidFill>
-                  <a:srgbClr val="718096"/>
-                </a:solidFill>
-                <a:latin typeface="Pretendard" pitchFamily="34" charset="0"/>
-                <a:ea typeface="Pretendard" pitchFamily="34" charset="-122"/>
-                <a:cs typeface="Pretendard" pitchFamily="34" charset="-120"/>
-              </a:rPr>
-              <a:t>크리딜</a:t>
-            </a:r>
-            <a:endParaRPr lang="en-US" sz="800" dirty="0"/>
-          </a:p>
-        </p:txBody>
-      </p:sp>
-      <p:sp>
-        <p:nvSpPr>
-          <p:cNvPr id="12" name="Text 10"/>
-          <p:cNvSpPr/>
-          <p:nvPr/>
-        </p:nvSpPr>
-        <p:spPr>
-          <a:xfrm>
-            <a:off x="10710367" y="6382512"/>
-            <a:ext cx="914400" cy="219456"/>
-          </a:xfrm>
-          <a:prstGeom prst="rect">
-            <a:avLst/>
-          </a:prstGeom>
-          <a:noFill/>
-          <a:ln/>
-        </p:spPr>
-        <p:txBody>
-          <a:bodyPr wrap="square" lIns="0" tIns="0" rIns="0" bIns="0" rtlCol="0" anchor="ctr"/>
-          <a:lstStyle/>
-          <a:p>
-            <a:pPr algn="r" indent="0" marL="0">
-              <a:buNone/>
-            </a:pPr>
-            <a:r>
-              <a:rPr lang="en-US" sz="900" b="1" dirty="0">
-                <a:solidFill>
-                  <a:srgbClr val="B98A2E"/>
-                </a:solidFill>
-                <a:latin typeface="Arial" pitchFamily="34" charset="0"/>
-                <a:ea typeface="Arial" pitchFamily="34" charset="-122"/>
-                <a:cs typeface="Arial" pitchFamily="34" charset="-120"/>
-              </a:rPr>
-              <a:t>12</a:t>
-            </a:r>
-            <a:endParaRPr lang="en-US" sz="900" dirty="0"/>
-          </a:p>
-        </p:txBody>
-      </p:sp>
-    </p:spTree>
-  </p:cSld>
-  <p:clrMapOvr>
-    <a:masterClrMapping/>
-  </p:clrMapOvr>
-</p:sld>
-</file>
-
-<file path=ppt/slides/slide13.xml><?xml version="1.0" encoding="utf-8"?>
-<p:sld xmlns:a="http://schemas.openxmlformats.org/drawingml/2006/main" xmlns:r="http://schemas.openxmlformats.org/officeDocument/2006/relationships" xmlns:p="http://schemas.openxmlformats.org/presentationml/2006/main">
-  <p:cSld name="Slide 13">
     <p:bg>
       <p:bgPr>
         <a:solidFill>
@@ -4705,7 +4134,7 @@
                 <a:ea typeface="Arial" pitchFamily="34" charset="-122"/>
                 <a:cs typeface="Arial" pitchFamily="34" charset="-120"/>
               </a:rPr>
-              <a:t>13</a:t>
+              <a:t>12</a:t>
             </a:r>
             <a:endParaRPr lang="en-US" sz="1300" dirty="0"/>
           </a:p>
@@ -6119,7 +5548,7 @@
                 <a:ea typeface="Arial" pitchFamily="34" charset="-122"/>
                 <a:cs typeface="Arial" pitchFamily="34" charset="-120"/>
               </a:rPr>
-              <a:t>13</a:t>
+              <a:t>12</a:t>
             </a:r>
             <a:endParaRPr lang="en-US" sz="900" dirty="0"/>
           </a:p>
@@ -6750,7 +6179,7 @@
               <a:buNone/>
             </a:pPr>
             <a:r>
-              <a:rPr lang="en-US" sz="850" dirty="0">
+              <a:rPr lang="en-US" sz="950" dirty="0">
                 <a:solidFill>
                   <a:srgbClr val="718096"/>
                 </a:solidFill>
@@ -6758,9 +6187,9 @@
                 <a:ea typeface="Pretendard" pitchFamily="34" charset="-122"/>
                 <a:cs typeface="Pretendard" pitchFamily="34" charset="-120"/>
               </a:rPr>
-              <a:t>연 수익률(Cap Rate)</a:t>
-            </a:r>
-            <a:endParaRPr lang="en-US" sz="850" dirty="0"/>
+              <a:t>연 수익률</a:t>
+            </a:r>
+            <a:endParaRPr lang="en-US" sz="950" dirty="0"/>
           </a:p>
         </p:txBody>
       </p:sp>
@@ -6862,7 +6291,7 @@
               <a:buNone/>
             </a:pPr>
             <a:r>
-              <a:rPr lang="en-US" sz="950" dirty="0">
+              <a:rPr lang="en-US" sz="850" dirty="0">
                 <a:solidFill>
                   <a:srgbClr val="718096"/>
                 </a:solidFill>
@@ -6870,9 +6299,9 @@
                 <a:ea typeface="Pretendard" pitchFamily="34" charset="-122"/>
                 <a:cs typeface="Pretendard" pitchFamily="34" charset="-120"/>
               </a:rPr>
-              <a:t>실투자금</a:t>
-            </a:r>
-            <a:endParaRPr lang="en-US" sz="950" dirty="0"/>
+              <a:t>실투자금 (취득비용 포함)</a:t>
+            </a:r>
+            <a:endParaRPr lang="en-US" sz="850" dirty="0"/>
           </a:p>
         </p:txBody>
       </p:sp>
@@ -7134,11 +6563,11 @@
                 <a:solidFill>
                   <a:srgbClr val="10161F"/>
                 </a:solidFill>
-                <a:latin typeface="Pretendard" pitchFamily="34" charset="0"/>
-                <a:ea typeface="Pretendard" pitchFamily="34" charset="-122"/>
-                <a:cs typeface="Pretendard" pitchFamily="34" charset="-120"/>
-              </a:rPr>
-              <a:t>확인 중</a:t>
+                <a:latin typeface="Arial" pitchFamily="34" charset="0"/>
+                <a:ea typeface="Arial" pitchFamily="34" charset="-122"/>
+                <a:cs typeface="Arial" pitchFamily="34" charset="-120"/>
+              </a:rPr>
+              <a:t>-</a:t>
             </a:r>
             <a:endParaRPr lang="en-US" sz="2200" dirty="0"/>
           </a:p>
@@ -7294,7 +6723,9 @@
           <a:ln/>
         </p:spPr>
         <p:txBody>
-          <a:bodyPr wrap="square" lIns="0" tIns="0" rIns="0" bIns="0" rtlCol="0" anchor="ctr"/>
+          <a:bodyPr wrap="square" lIns="0" tIns="0" rIns="0" bIns="0" rtlCol="0" anchor="ctr">
+            <a:normAutofit/>
+          </a:bodyPr>
           <a:lstStyle/>
           <a:p>
             <a:pPr indent="0" marL="0">
@@ -7426,7 +6857,9 @@
           <a:ln/>
         </p:spPr>
         <p:txBody>
-          <a:bodyPr wrap="square" lIns="0" tIns="0" rIns="0" bIns="0" rtlCol="0" anchor="ctr"/>
+          <a:bodyPr wrap="square" lIns="0" tIns="0" rIns="0" bIns="0" rtlCol="0" anchor="ctr">
+            <a:normAutofit/>
+          </a:bodyPr>
           <a:lstStyle/>
           <a:p>
             <a:pPr indent="0" marL="0">
@@ -7441,7 +6874,7 @@
                 <a:ea typeface="Pretendard" pitchFamily="34" charset="-122"/>
                 <a:cs typeface="Pretendard" pitchFamily="34" charset="-120"/>
               </a:rPr>
-              <a:t>자산 규모: 해당 권역 소재 단독 빌딩 매입 기회</a:t>
+              <a:t>안정적 현금흐름: 전 층 임차인 운영 기반의 안정적 월 임대수익 창출</a:t>
             </a:r>
             <a:endParaRPr lang="en-US" sz="1150" dirty="0"/>
           </a:p>
@@ -7558,7 +6991,9 @@
           <a:ln/>
         </p:spPr>
         <p:txBody>
-          <a:bodyPr wrap="square" lIns="0" tIns="0" rIns="0" bIns="0" rtlCol="0" anchor="ctr"/>
+          <a:bodyPr wrap="square" lIns="0" tIns="0" rIns="0" bIns="0" rtlCol="0" anchor="ctr">
+            <a:normAutofit/>
+          </a:bodyPr>
           <a:lstStyle/>
           <a:p>
             <a:pPr indent="0" marL="0">
@@ -7573,7 +7008,7 @@
                 <a:ea typeface="Pretendard" pitchFamily="34" charset="-122"/>
                 <a:cs typeface="Pretendard" pitchFamily="34" charset="-120"/>
               </a:rPr>
-              <a:t>수익 안정성: 안정적 임대수익 기반 투자 매물</a:t>
+              <a:t>자산 규모: 해당 권역 소재 단독 빌딩 매입 기회</a:t>
             </a:r>
             <a:endParaRPr lang="en-US" sz="1150" dirty="0"/>
           </a:p>
@@ -7854,7 +7289,183 @@
       </p:pic>
       <p:sp>
         <p:nvSpPr>
-          <p:cNvPr id="7" name="Text 4"/>
+          <p:cNvPr id="7" name="Shape 4"/>
+          <p:cNvSpPr/>
+          <p:nvPr/>
+        </p:nvSpPr>
+        <p:spPr>
+          <a:xfrm>
+            <a:off x="704088" y="5184648"/>
+            <a:ext cx="3200400" cy="320040"/>
+          </a:xfrm>
+          <a:prstGeom prst="roundRect">
+            <a:avLst>
+              <a:gd name="adj" fmla="val 11429"/>
+            </a:avLst>
+          </a:prstGeom>
+          <a:solidFill>
+            <a:srgbClr val="FFFFFF">
+              <a:alpha val="90000"/>
+            </a:srgbClr>
+          </a:solidFill>
+          <a:ln w="10160">
+            <a:solidFill>
+              <a:srgbClr val="CBD5E1"/>
+            </a:solidFill>
+            <a:prstDash val="solid"/>
+          </a:ln>
+        </p:spPr>
+      </p:sp>
+      <p:sp>
+        <p:nvSpPr>
+          <p:cNvPr id="8" name="Text 5"/>
+          <p:cNvSpPr/>
+          <p:nvPr/>
+        </p:nvSpPr>
+        <p:spPr>
+          <a:xfrm>
+            <a:off x="749808" y="5202936"/>
+            <a:ext cx="3108960" cy="274320"/>
+          </a:xfrm>
+          <a:prstGeom prst="rect">
+            <a:avLst/>
+          </a:prstGeom>
+          <a:noFill/>
+          <a:ln/>
+        </p:spPr>
+        <p:txBody>
+          <a:bodyPr wrap="square" rtlCol="0" anchor="ctr"/>
+          <a:lstStyle/>
+          <a:p>
+            <a:pPr indent="0" marL="0">
+              <a:buNone/>
+            </a:pPr>
+            <a:r>
+              <a:rPr lang="en-US" sz="900" b="1" dirty="0">
+                <a:solidFill>
+                  <a:srgbClr val="B8860B"/>
+                </a:solidFill>
+                <a:latin typeface="Pretendard" pitchFamily="34" charset="0"/>
+                <a:ea typeface="Pretendard" pitchFamily="34" charset="-122"/>
+                <a:cs typeface="Pretendard" pitchFamily="34" charset="-120"/>
+              </a:rPr>
+              <a:t>★ </a:t>
+            </a:r>
+            <a:pPr indent="0" marL="0">
+              <a:buNone/>
+            </a:pPr>
+            <a:r>
+              <a:rPr lang="en-US" sz="850" b="1" dirty="0">
+                <a:solidFill>
+                  <a:srgbClr val="1E293B"/>
+                </a:solidFill>
+                <a:latin typeface="Pretendard" pitchFamily="34" charset="0"/>
+                <a:ea typeface="Pretendard" pitchFamily="34" charset="-122"/>
+                <a:cs typeface="Pretendard" pitchFamily="34" charset="-120"/>
+              </a:rPr>
+              <a:t>대상 자산(본건)   </a:t>
+            </a:r>
+            <a:pPr indent="0" marL="0">
+              <a:buNone/>
+            </a:pPr>
+            <a:r>
+              <a:rPr lang="en-US" sz="1000" b="1" dirty="0">
+                <a:solidFill>
+                  <a:srgbClr val="B8860B"/>
+                </a:solidFill>
+                <a:latin typeface="Pretendard" pitchFamily="34" charset="0"/>
+                <a:ea typeface="Pretendard" pitchFamily="34" charset="-122"/>
+                <a:cs typeface="Pretendard" pitchFamily="34" charset="-120"/>
+              </a:rPr>
+              <a:t>╌ </a:t>
+            </a:r>
+            <a:pPr indent="0" marL="0">
+              <a:buNone/>
+            </a:pPr>
+            <a:r>
+              <a:rPr lang="en-US" sz="850" dirty="0">
+                <a:solidFill>
+                  <a:srgbClr val="475569"/>
+                </a:solidFill>
+                <a:latin typeface="Pretendard" pitchFamily="34" charset="0"/>
+                <a:ea typeface="Pretendard" pitchFamily="34" charset="-122"/>
+                <a:cs typeface="Pretendard" pitchFamily="34" charset="-120"/>
+              </a:rPr>
+              <a:t>도보 5분 반경 (약 400m)</a:t>
+            </a:r>
+            <a:endParaRPr lang="en-US" sz="900" dirty="0"/>
+          </a:p>
+        </p:txBody>
+      </p:sp>
+      <p:sp>
+        <p:nvSpPr>
+          <p:cNvPr id="9" name="Shape 6"/>
+          <p:cNvSpPr/>
+          <p:nvPr/>
+        </p:nvSpPr>
+        <p:spPr>
+          <a:xfrm>
+            <a:off x="2715768" y="3739896"/>
+            <a:ext cx="822960" cy="219456"/>
+          </a:xfrm>
+          <a:prstGeom prst="roundRect">
+            <a:avLst>
+              <a:gd name="adj" fmla="val 16667"/>
+            </a:avLst>
+          </a:prstGeom>
+          <a:solidFill>
+            <a:srgbClr val="132A3A"/>
+          </a:solidFill>
+          <a:ln w="12700">
+            <a:solidFill>
+              <a:srgbClr val="FFFFFF"/>
+            </a:solidFill>
+            <a:prstDash val="solid"/>
+          </a:ln>
+        </p:spPr>
+      </p:sp>
+      <p:sp>
+        <p:nvSpPr>
+          <p:cNvPr id="10" name="Text 7"/>
+          <p:cNvSpPr/>
+          <p:nvPr/>
+        </p:nvSpPr>
+        <p:spPr>
+          <a:xfrm>
+            <a:off x="2715768" y="3739896"/>
+            <a:ext cx="822960" cy="219456"/>
+          </a:xfrm>
+          <a:prstGeom prst="rect">
+            <a:avLst/>
+          </a:prstGeom>
+          <a:noFill/>
+          <a:ln/>
+        </p:spPr>
+        <p:txBody>
+          <a:bodyPr wrap="square" rtlCol="0" anchor="ctr"/>
+          <a:lstStyle/>
+          <a:p>
+            <a:pPr algn="ctr" indent="0" marL="0">
+              <a:buNone/>
+            </a:pPr>
+            <a:r>
+              <a:rPr lang="en-US" sz="900" b="1" dirty="0">
+                <a:solidFill>
+                  <a:srgbClr val="FFFFFF"/>
+                </a:solidFill>
+                <a:latin typeface="Pretendard" pitchFamily="34" charset="0"/>
+                <a:ea typeface="Pretendard" pitchFamily="34" charset="-122"/>
+                <a:cs typeface="Pretendard" pitchFamily="34" charset="-120"/>
+              </a:rPr>
+              <a:t>★ 본건</a:t>
+            </a:r>
+            <a:endParaRPr lang="en-US" sz="900" dirty="0"/>
+          </a:p>
+        </p:txBody>
+      </p:sp>
+      <p:sp>
+        <p:nvSpPr>
+          <p:cNvPr id="11" name="Text 8"/>
           <p:cNvSpPr/>
           <p:nvPr/>
         </p:nvSpPr>
@@ -7898,7 +7509,7 @@
       </p:sp>
       <p:sp>
         <p:nvSpPr>
-          <p:cNvPr id="8" name="Text 5"/>
+          <p:cNvPr id="12" name="Text 9"/>
           <p:cNvSpPr/>
           <p:nvPr/>
         </p:nvSpPr>
@@ -7942,7 +7553,7 @@
       </p:sp>
       <p:sp>
         <p:nvSpPr>
-          <p:cNvPr id="9" name="Shape 6"/>
+          <p:cNvPr id="13" name="Shape 10"/>
           <p:cNvSpPr/>
           <p:nvPr/>
         </p:nvSpPr>
@@ -7965,7 +7576,7 @@
       </p:sp>
       <p:sp>
         <p:nvSpPr>
-          <p:cNvPr id="10" name="Text 7"/>
+          <p:cNvPr id="14" name="Text 11"/>
           <p:cNvSpPr/>
           <p:nvPr/>
         </p:nvSpPr>
@@ -8009,7 +7620,7 @@
       </p:sp>
       <p:sp>
         <p:nvSpPr>
-          <p:cNvPr id="11" name="Text 8"/>
+          <p:cNvPr id="15" name="Text 12"/>
           <p:cNvSpPr/>
           <p:nvPr/>
         </p:nvSpPr>
@@ -8053,7 +7664,7 @@
       </p:sp>
       <p:sp>
         <p:nvSpPr>
-          <p:cNvPr id="12" name="Shape 9"/>
+          <p:cNvPr id="16" name="Shape 13"/>
           <p:cNvSpPr/>
           <p:nvPr/>
         </p:nvSpPr>
@@ -8075,7 +7686,7 @@
       </p:sp>
       <p:sp>
         <p:nvSpPr>
-          <p:cNvPr id="13" name="Shape 10"/>
+          <p:cNvPr id="17" name="Shape 14"/>
           <p:cNvSpPr/>
           <p:nvPr/>
         </p:nvSpPr>
@@ -8095,7 +7706,7 @@
       </p:sp>
       <p:sp>
         <p:nvSpPr>
-          <p:cNvPr id="14" name="Text 11"/>
+          <p:cNvPr id="18" name="Text 15"/>
           <p:cNvSpPr/>
           <p:nvPr/>
         </p:nvSpPr>
@@ -8134,7 +7745,7 @@
       </p:sp>
       <p:sp>
         <p:nvSpPr>
-          <p:cNvPr id="15" name="Text 12"/>
+          <p:cNvPr id="19" name="Text 16"/>
           <p:cNvSpPr/>
           <p:nvPr/>
         </p:nvSpPr>
@@ -8177,7 +7788,7 @@
       </p:sp>
       <p:sp>
         <p:nvSpPr>
-          <p:cNvPr id="16" name="Text 13"/>
+          <p:cNvPr id="20" name="Text 17"/>
           <p:cNvSpPr/>
           <p:nvPr/>
         </p:nvSpPr>
@@ -8216,7 +7827,7 @@
       </p:sp>
       <p:sp>
         <p:nvSpPr>
-          <p:cNvPr id="17" name="Text 14"/>
+          <p:cNvPr id="21" name="Text 18"/>
           <p:cNvSpPr/>
           <p:nvPr/>
         </p:nvSpPr>
@@ -11232,7 +10843,7 @@
                 <a:ea typeface="Arial" pitchFamily="34" charset="-122"/>
                 <a:cs typeface="Arial" pitchFamily="34" charset="-120"/>
               </a:rPr>
-              <a:t>Capital</a:t>
+              <a:t>Thesis</a:t>
             </a:r>
             <a:endParaRPr lang="en-US" sz="950" dirty="0"/>
           </a:p>
@@ -11273,7 +10884,7 @@
                 <a:ea typeface="Pretendard" pitchFamily="34" charset="-122"/>
                 <a:cs typeface="Pretendard" pitchFamily="34" charset="-120"/>
               </a:rPr>
-              <a:t>자본구조</a:t>
+              <a:t>투자 논거</a:t>
             </a:r>
             <a:endParaRPr lang="en-US" sz="2300" dirty="0"/>
           </a:p>
@@ -11287,20 +10898,20 @@
         </p:nvSpPr>
         <p:spPr>
           <a:xfrm>
-            <a:off x="566928" y="1417320"/>
-            <a:ext cx="5391760" cy="4389120"/>
+            <a:off x="566928" y="4937760"/>
+            <a:ext cx="11057839" cy="804672"/>
           </a:xfrm>
           <a:prstGeom prst="roundRect">
             <a:avLst>
-              <a:gd name="adj" fmla="val 1250"/>
+              <a:gd name="adj" fmla="val 6818"/>
             </a:avLst>
           </a:prstGeom>
           <a:solidFill>
-            <a:srgbClr val="F7FAFC"/>
+            <a:srgbClr val="F3EBDA"/>
           </a:solidFill>
-          <a:ln w="6350">
+          <a:ln w="10160">
             <a:solidFill>
-              <a:srgbClr val="CBD5E0"/>
+              <a:srgbClr val="D9B668"/>
             </a:solidFill>
             <a:prstDash val="solid"/>
           </a:ln>
@@ -11314,8 +10925,8 @@
         </p:nvSpPr>
         <p:spPr>
           <a:xfrm>
-            <a:off x="795528" y="1618488"/>
-            <a:ext cx="4934560" cy="320040"/>
+            <a:off x="749808" y="5047488"/>
+            <a:ext cx="1691640" cy="256032"/>
           </a:xfrm>
           <a:prstGeom prst="rect">
             <a:avLst/>
@@ -11331,7 +10942,7 @@
               <a:buNone/>
             </a:pPr>
             <a:r>
-              <a:rPr lang="en-US" sz="1350" b="1" dirty="0">
+              <a:rPr lang="en-US" sz="1050" b="1" dirty="0">
                 <a:solidFill>
                   <a:srgbClr val="977024"/>
                 </a:solidFill>
@@ -11339,9 +10950,9 @@
                 <a:ea typeface="Pretendard" pitchFamily="34" charset="-122"/>
                 <a:cs typeface="Pretendard" pitchFamily="34" charset="-120"/>
               </a:rPr>
-              <a:t>1. 총취득원가 및 자기자본 소요</a:t>
-            </a:r>
-            <a:endParaRPr lang="en-US" sz="1350" dirty="0"/>
+              <a:t>종합 가치 제안</a:t>
+            </a:r>
+            <a:endParaRPr lang="en-US" sz="1050" dirty="0"/>
           </a:p>
         </p:txBody>
       </p:sp>
@@ -11353,2458 +10964,43 @@
         </p:nvSpPr>
         <p:spPr>
           <a:xfrm>
-            <a:off x="795528" y="2011680"/>
-            <a:ext cx="2269897" cy="475488"/>
-          </a:xfrm>
-          <a:prstGeom prst="rect">
-            <a:avLst/>
-          </a:prstGeom>
-          <a:noFill/>
-          <a:ln/>
-        </p:spPr>
-        <p:txBody>
-          <a:bodyPr wrap="square" lIns="0" tIns="0" rIns="0" bIns="0" rtlCol="0" anchor="ctr">
-            <a:normAutofit/>
-          </a:bodyPr>
+            <a:off x="2487168" y="5010912"/>
+            <a:ext cx="8954719" cy="658368"/>
+          </a:xfrm>
+          <a:prstGeom prst="rect">
+            <a:avLst/>
+          </a:prstGeom>
+          <a:noFill/>
+          <a:ln/>
+        </p:spPr>
+        <p:txBody>
+          <a:bodyPr wrap="square" lIns="0" tIns="0" rIns="0" bIns="0" rtlCol="0" anchor="ctr"/>
           <a:lstStyle/>
           <a:p>
             <a:pPr indent="0" marL="0">
               <a:lnSpc>
-                <a:spcPct val="115000"/>
+                <a:spcPct val="125000"/>
               </a:lnSpc>
               <a:buNone/>
             </a:pPr>
             <a:r>
-              <a:rPr lang="en-US" sz="1150" dirty="0">
-                <a:solidFill>
-                  <a:srgbClr val="718096"/>
-                </a:solidFill>
-                <a:latin typeface="Pretendard" pitchFamily="34" charset="0"/>
-                <a:ea typeface="Pretendard" pitchFamily="34" charset="-122"/>
-                <a:cs typeface="Pretendard" pitchFamily="34" charset="-120"/>
-              </a:rPr>
-              <a:t>매매 희망가 (A)</a:t>
-            </a:r>
-            <a:endParaRPr lang="en-US" sz="1150" dirty="0"/>
+              <a:rPr lang="en-US" sz="1100" dirty="0">
+                <a:solidFill>
+                  <a:srgbClr val="10161F"/>
+                </a:solidFill>
+                <a:latin typeface="Pretendard" pitchFamily="34" charset="0"/>
+                <a:ea typeface="Pretendard" pitchFamily="34" charset="-122"/>
+                <a:cs typeface="Pretendard" pitchFamily="34" charset="-120"/>
+              </a:rPr>
+              <a:t>성수 IT산업 거점으로서의 입지 가치와 통사옥 희소성을 갖추고 있습니다.</a:t>
+            </a:r>
+            <a:endParaRPr lang="en-US" sz="1100" dirty="0"/>
           </a:p>
         </p:txBody>
       </p:sp>
       <p:sp>
         <p:nvSpPr>
           <p:cNvPr id="9" name="Text 7"/>
-          <p:cNvSpPr/>
-          <p:nvPr/>
-        </p:nvSpPr>
-        <p:spPr>
-          <a:xfrm>
-            <a:off x="3065425" y="2011680"/>
-            <a:ext cx="2664662" cy="475488"/>
-          </a:xfrm>
-          <a:prstGeom prst="rect">
-            <a:avLst/>
-          </a:prstGeom>
-          <a:noFill/>
-          <a:ln/>
-        </p:spPr>
-        <p:txBody>
-          <a:bodyPr wrap="square" lIns="0" tIns="0" rIns="0" bIns="0" rtlCol="0" anchor="ctr">
-            <a:normAutofit/>
-          </a:bodyPr>
-          <a:lstStyle/>
-          <a:p>
-            <a:pPr indent="0" marL="0">
-              <a:lnSpc>
-                <a:spcPct val="115000"/>
-              </a:lnSpc>
-              <a:buNone/>
-            </a:pPr>
-            <a:r>
-              <a:rPr lang="en-US" sz="1150" b="1" dirty="0">
-                <a:solidFill>
-                  <a:srgbClr val="10161F"/>
-                </a:solidFill>
-                <a:latin typeface="Pretendard" pitchFamily="34" charset="0"/>
-                <a:ea typeface="Pretendard" pitchFamily="34" charset="-122"/>
-                <a:cs typeface="Pretendard" pitchFamily="34" charset="-120"/>
-              </a:rPr>
-              <a:t>135억 원</a:t>
-            </a:r>
-            <a:endParaRPr lang="en-US" sz="1150" dirty="0"/>
-          </a:p>
-        </p:txBody>
-      </p:sp>
-      <p:sp>
-        <p:nvSpPr>
-          <p:cNvPr id="10" name="Shape 8"/>
-          <p:cNvSpPr/>
-          <p:nvPr/>
-        </p:nvSpPr>
-        <p:spPr>
-          <a:xfrm>
-            <a:off x="795528" y="2487168"/>
-            <a:ext cx="4934560" cy="0"/>
-          </a:xfrm>
-          <a:prstGeom prst="line">
-            <a:avLst/>
-          </a:prstGeom>
-          <a:noFill/>
-          <a:ln w="3810">
-            <a:solidFill>
-              <a:srgbClr val="CBD5E0"/>
-            </a:solidFill>
-            <a:prstDash val="solid"/>
-          </a:ln>
-        </p:spPr>
-      </p:sp>
-      <p:sp>
-        <p:nvSpPr>
-          <p:cNvPr id="11" name="Text 9"/>
-          <p:cNvSpPr/>
-          <p:nvPr/>
-        </p:nvSpPr>
-        <p:spPr>
-          <a:xfrm>
-            <a:off x="795528" y="2487168"/>
-            <a:ext cx="2269897" cy="475488"/>
-          </a:xfrm>
-          <a:prstGeom prst="rect">
-            <a:avLst/>
-          </a:prstGeom>
-          <a:noFill/>
-          <a:ln/>
-        </p:spPr>
-        <p:txBody>
-          <a:bodyPr wrap="square" lIns="0" tIns="0" rIns="0" bIns="0" rtlCol="0" anchor="ctr">
-            <a:normAutofit/>
-          </a:bodyPr>
-          <a:lstStyle/>
-          <a:p>
-            <a:pPr indent="0" marL="0">
-              <a:lnSpc>
-                <a:spcPct val="115000"/>
-              </a:lnSpc>
-              <a:buNone/>
-            </a:pPr>
-            <a:r>
-              <a:rPr lang="en-US" sz="1150" dirty="0">
-                <a:solidFill>
-                  <a:srgbClr val="718096"/>
-                </a:solidFill>
-                <a:latin typeface="Pretendard" pitchFamily="34" charset="0"/>
-                <a:ea typeface="Pretendard" pitchFamily="34" charset="-122"/>
-                <a:cs typeface="Pretendard" pitchFamily="34" charset="-120"/>
-              </a:rPr>
-              <a:t>취득세 (4.6% 법정)</a:t>
-            </a:r>
-            <a:endParaRPr lang="en-US" sz="1150" dirty="0"/>
-          </a:p>
-        </p:txBody>
-      </p:sp>
-      <p:sp>
-        <p:nvSpPr>
-          <p:cNvPr id="12" name="Text 10"/>
-          <p:cNvSpPr/>
-          <p:nvPr/>
-        </p:nvSpPr>
-        <p:spPr>
-          <a:xfrm>
-            <a:off x="3065425" y="2487168"/>
-            <a:ext cx="2664662" cy="475488"/>
-          </a:xfrm>
-          <a:prstGeom prst="rect">
-            <a:avLst/>
-          </a:prstGeom>
-          <a:noFill/>
-          <a:ln/>
-        </p:spPr>
-        <p:txBody>
-          <a:bodyPr wrap="square" lIns="0" tIns="0" rIns="0" bIns="0" rtlCol="0" anchor="ctr">
-            <a:normAutofit/>
-          </a:bodyPr>
-          <a:lstStyle/>
-          <a:p>
-            <a:pPr indent="0" marL="0">
-              <a:lnSpc>
-                <a:spcPct val="115000"/>
-              </a:lnSpc>
-              <a:buNone/>
-            </a:pPr>
-            <a:r>
-              <a:rPr lang="en-US" sz="1150" b="1" dirty="0">
-                <a:solidFill>
-                  <a:srgbClr val="10161F"/>
-                </a:solidFill>
-                <a:latin typeface="Pretendard" pitchFamily="34" charset="0"/>
-                <a:ea typeface="Pretendard" pitchFamily="34" charset="-122"/>
-                <a:cs typeface="Pretendard" pitchFamily="34" charset="-120"/>
-              </a:rPr>
-              <a:t>6.21억 원</a:t>
-            </a:r>
-            <a:endParaRPr lang="en-US" sz="1150" dirty="0"/>
-          </a:p>
-        </p:txBody>
-      </p:sp>
-      <p:sp>
-        <p:nvSpPr>
-          <p:cNvPr id="13" name="Shape 11"/>
-          <p:cNvSpPr/>
-          <p:nvPr/>
-        </p:nvSpPr>
-        <p:spPr>
-          <a:xfrm>
-            <a:off x="795528" y="2962656"/>
-            <a:ext cx="4934560" cy="0"/>
-          </a:xfrm>
-          <a:prstGeom prst="line">
-            <a:avLst/>
-          </a:prstGeom>
-          <a:noFill/>
-          <a:ln w="3810">
-            <a:solidFill>
-              <a:srgbClr val="CBD5E0"/>
-            </a:solidFill>
-            <a:prstDash val="solid"/>
-          </a:ln>
-        </p:spPr>
-      </p:sp>
-      <p:sp>
-        <p:nvSpPr>
-          <p:cNvPr id="14" name="Text 12"/>
-          <p:cNvSpPr/>
-          <p:nvPr/>
-        </p:nvSpPr>
-        <p:spPr>
-          <a:xfrm>
-            <a:off x="795528" y="2962656"/>
-            <a:ext cx="2269897" cy="475488"/>
-          </a:xfrm>
-          <a:prstGeom prst="rect">
-            <a:avLst/>
-          </a:prstGeom>
-          <a:noFill/>
-          <a:ln/>
-        </p:spPr>
-        <p:txBody>
-          <a:bodyPr wrap="square" lIns="0" tIns="0" rIns="0" bIns="0" rtlCol="0" anchor="ctr">
-            <a:normAutofit/>
-          </a:bodyPr>
-          <a:lstStyle/>
-          <a:p>
-            <a:pPr indent="0" marL="0">
-              <a:lnSpc>
-                <a:spcPct val="115000"/>
-              </a:lnSpc>
-              <a:buNone/>
-            </a:pPr>
-            <a:r>
-              <a:rPr lang="en-US" sz="1150" dirty="0">
-                <a:solidFill>
-                  <a:srgbClr val="718096"/>
-                </a:solidFill>
-                <a:latin typeface="Pretendard" pitchFamily="34" charset="0"/>
-                <a:ea typeface="Pretendard" pitchFamily="34" charset="-122"/>
-                <a:cs typeface="Pretendard" pitchFamily="34" charset="-120"/>
-              </a:rPr>
-              <a:t>중개보수 (0.9% 한도)</a:t>
-            </a:r>
-            <a:endParaRPr lang="en-US" sz="1150" dirty="0"/>
-          </a:p>
-        </p:txBody>
-      </p:sp>
-      <p:sp>
-        <p:nvSpPr>
-          <p:cNvPr id="15" name="Text 13"/>
-          <p:cNvSpPr/>
-          <p:nvPr/>
-        </p:nvSpPr>
-        <p:spPr>
-          <a:xfrm>
-            <a:off x="3065425" y="2962656"/>
-            <a:ext cx="2664662" cy="475488"/>
-          </a:xfrm>
-          <a:prstGeom prst="rect">
-            <a:avLst/>
-          </a:prstGeom>
-          <a:noFill/>
-          <a:ln/>
-        </p:spPr>
-        <p:txBody>
-          <a:bodyPr wrap="square" lIns="0" tIns="0" rIns="0" bIns="0" rtlCol="0" anchor="ctr">
-            <a:normAutofit/>
-          </a:bodyPr>
-          <a:lstStyle/>
-          <a:p>
-            <a:pPr indent="0" marL="0">
-              <a:lnSpc>
-                <a:spcPct val="115000"/>
-              </a:lnSpc>
-              <a:buNone/>
-            </a:pPr>
-            <a:r>
-              <a:rPr lang="en-US" sz="1150" b="1" dirty="0">
-                <a:solidFill>
-                  <a:srgbClr val="10161F"/>
-                </a:solidFill>
-                <a:latin typeface="Pretendard" pitchFamily="34" charset="0"/>
-                <a:ea typeface="Pretendard" pitchFamily="34" charset="-122"/>
-                <a:cs typeface="Pretendard" pitchFamily="34" charset="-120"/>
-              </a:rPr>
-              <a:t>1.22억 원</a:t>
-            </a:r>
-            <a:endParaRPr lang="en-US" sz="1150" dirty="0"/>
-          </a:p>
-        </p:txBody>
-      </p:sp>
-      <p:sp>
-        <p:nvSpPr>
-          <p:cNvPr id="16" name="Shape 14"/>
-          <p:cNvSpPr/>
-          <p:nvPr/>
-        </p:nvSpPr>
-        <p:spPr>
-          <a:xfrm>
-            <a:off x="795528" y="3438144"/>
-            <a:ext cx="4934560" cy="0"/>
-          </a:xfrm>
-          <a:prstGeom prst="line">
-            <a:avLst/>
-          </a:prstGeom>
-          <a:noFill/>
-          <a:ln w="3810">
-            <a:solidFill>
-              <a:srgbClr val="CBD5E0"/>
-            </a:solidFill>
-            <a:prstDash val="solid"/>
-          </a:ln>
-        </p:spPr>
-      </p:sp>
-      <p:sp>
-        <p:nvSpPr>
-          <p:cNvPr id="17" name="Text 15"/>
-          <p:cNvSpPr/>
-          <p:nvPr/>
-        </p:nvSpPr>
-        <p:spPr>
-          <a:xfrm>
-            <a:off x="795528" y="3438144"/>
-            <a:ext cx="2269897" cy="475488"/>
-          </a:xfrm>
-          <a:prstGeom prst="rect">
-            <a:avLst/>
-          </a:prstGeom>
-          <a:noFill/>
-          <a:ln/>
-        </p:spPr>
-        <p:txBody>
-          <a:bodyPr wrap="square" lIns="0" tIns="0" rIns="0" bIns="0" rtlCol="0" anchor="ctr">
-            <a:normAutofit/>
-          </a:bodyPr>
-          <a:lstStyle/>
-          <a:p>
-            <a:pPr indent="0" marL="0">
-              <a:lnSpc>
-                <a:spcPct val="115000"/>
-              </a:lnSpc>
-              <a:buNone/>
-            </a:pPr>
-            <a:r>
-              <a:rPr lang="en-US" sz="1150" dirty="0">
-                <a:solidFill>
-                  <a:srgbClr val="718096"/>
-                </a:solidFill>
-                <a:latin typeface="Pretendard" pitchFamily="34" charset="0"/>
-                <a:ea typeface="Pretendard" pitchFamily="34" charset="-122"/>
-                <a:cs typeface="Pretendard" pitchFamily="34" charset="-120"/>
-              </a:rPr>
-              <a:t>총취득원가 (A + 세/비용)</a:t>
-            </a:r>
-            <a:endParaRPr lang="en-US" sz="1150" dirty="0"/>
-          </a:p>
-        </p:txBody>
-      </p:sp>
-      <p:sp>
-        <p:nvSpPr>
-          <p:cNvPr id="18" name="Text 16"/>
-          <p:cNvSpPr/>
-          <p:nvPr/>
-        </p:nvSpPr>
-        <p:spPr>
-          <a:xfrm>
-            <a:off x="3065425" y="3438144"/>
-            <a:ext cx="2664662" cy="475488"/>
-          </a:xfrm>
-          <a:prstGeom prst="rect">
-            <a:avLst/>
-          </a:prstGeom>
-          <a:noFill/>
-          <a:ln/>
-        </p:spPr>
-        <p:txBody>
-          <a:bodyPr wrap="square" lIns="0" tIns="0" rIns="0" bIns="0" rtlCol="0" anchor="ctr">
-            <a:normAutofit/>
-          </a:bodyPr>
-          <a:lstStyle/>
-          <a:p>
-            <a:pPr indent="0" marL="0">
-              <a:lnSpc>
-                <a:spcPct val="115000"/>
-              </a:lnSpc>
-              <a:buNone/>
-            </a:pPr>
-            <a:r>
-              <a:rPr lang="en-US" sz="1150" b="1" dirty="0">
-                <a:solidFill>
-                  <a:srgbClr val="10161F"/>
-                </a:solidFill>
-                <a:latin typeface="Pretendard" pitchFamily="34" charset="0"/>
-                <a:ea typeface="Pretendard" pitchFamily="34" charset="-122"/>
-                <a:cs typeface="Pretendard" pitchFamily="34" charset="-120"/>
-              </a:rPr>
-              <a:t>142.4억 원</a:t>
-            </a:r>
-            <a:endParaRPr lang="en-US" sz="1150" dirty="0"/>
-          </a:p>
-        </p:txBody>
-      </p:sp>
-      <p:sp>
-        <p:nvSpPr>
-          <p:cNvPr id="19" name="Shape 17"/>
-          <p:cNvSpPr/>
-          <p:nvPr/>
-        </p:nvSpPr>
-        <p:spPr>
-          <a:xfrm>
-            <a:off x="795528" y="3913632"/>
-            <a:ext cx="4934560" cy="0"/>
-          </a:xfrm>
-          <a:prstGeom prst="line">
-            <a:avLst/>
-          </a:prstGeom>
-          <a:noFill/>
-          <a:ln w="3810">
-            <a:solidFill>
-              <a:srgbClr val="CBD5E0"/>
-            </a:solidFill>
-            <a:prstDash val="solid"/>
-          </a:ln>
-        </p:spPr>
-      </p:sp>
-      <p:sp>
-        <p:nvSpPr>
-          <p:cNvPr id="20" name="Text 18"/>
-          <p:cNvSpPr/>
-          <p:nvPr/>
-        </p:nvSpPr>
-        <p:spPr>
-          <a:xfrm>
-            <a:off x="795528" y="3913632"/>
-            <a:ext cx="2269897" cy="475488"/>
-          </a:xfrm>
-          <a:prstGeom prst="rect">
-            <a:avLst/>
-          </a:prstGeom>
-          <a:noFill/>
-          <a:ln/>
-        </p:spPr>
-        <p:txBody>
-          <a:bodyPr wrap="square" lIns="0" tIns="0" rIns="0" bIns="0" rtlCol="0" anchor="ctr">
-            <a:normAutofit/>
-          </a:bodyPr>
-          <a:lstStyle/>
-          <a:p>
-            <a:pPr indent="0" marL="0">
-              <a:lnSpc>
-                <a:spcPct val="115000"/>
-              </a:lnSpc>
-              <a:buNone/>
-            </a:pPr>
-            <a:r>
-              <a:rPr lang="en-US" sz="1150" dirty="0">
-                <a:solidFill>
-                  <a:srgbClr val="718096"/>
-                </a:solidFill>
-                <a:latin typeface="Pretendard" pitchFamily="34" charset="0"/>
-                <a:ea typeface="Pretendard" pitchFamily="34" charset="-122"/>
-                <a:cs typeface="Pretendard" pitchFamily="34" charset="-120"/>
-              </a:rPr>
-              <a:t>(-) 임대보증금 승계</a:t>
-            </a:r>
-            <a:endParaRPr lang="en-US" sz="1150" dirty="0"/>
-          </a:p>
-        </p:txBody>
-      </p:sp>
-      <p:sp>
-        <p:nvSpPr>
-          <p:cNvPr id="21" name="Text 19"/>
-          <p:cNvSpPr/>
-          <p:nvPr/>
-        </p:nvSpPr>
-        <p:spPr>
-          <a:xfrm>
-            <a:off x="3065425" y="3913632"/>
-            <a:ext cx="2664662" cy="475488"/>
-          </a:xfrm>
-          <a:prstGeom prst="rect">
-            <a:avLst/>
-          </a:prstGeom>
-          <a:noFill/>
-          <a:ln/>
-        </p:spPr>
-        <p:txBody>
-          <a:bodyPr wrap="square" lIns="0" tIns="0" rIns="0" bIns="0" rtlCol="0" anchor="ctr">
-            <a:normAutofit/>
-          </a:bodyPr>
-          <a:lstStyle/>
-          <a:p>
-            <a:pPr indent="0" marL="0">
-              <a:lnSpc>
-                <a:spcPct val="115000"/>
-              </a:lnSpc>
-              <a:buNone/>
-            </a:pPr>
-            <a:r>
-              <a:rPr lang="en-US" sz="1150" b="1" dirty="0">
-                <a:solidFill>
-                  <a:srgbClr val="10161F"/>
-                </a:solidFill>
-                <a:latin typeface="Pretendard" pitchFamily="34" charset="0"/>
-                <a:ea typeface="Pretendard" pitchFamily="34" charset="-122"/>
-                <a:cs typeface="Pretendard" pitchFamily="34" charset="-120"/>
-              </a:rPr>
-              <a:t>-</a:t>
-            </a:r>
-            <a:endParaRPr lang="en-US" sz="1150" dirty="0"/>
-          </a:p>
-        </p:txBody>
-      </p:sp>
-      <p:sp>
-        <p:nvSpPr>
-          <p:cNvPr id="22" name="Shape 20"/>
-          <p:cNvSpPr/>
-          <p:nvPr/>
-        </p:nvSpPr>
-        <p:spPr>
-          <a:xfrm>
-            <a:off x="795528" y="4389120"/>
-            <a:ext cx="4934560" cy="0"/>
-          </a:xfrm>
-          <a:prstGeom prst="line">
-            <a:avLst/>
-          </a:prstGeom>
-          <a:noFill/>
-          <a:ln w="3810">
-            <a:solidFill>
-              <a:srgbClr val="CBD5E0"/>
-            </a:solidFill>
-            <a:prstDash val="solid"/>
-          </a:ln>
-        </p:spPr>
-      </p:sp>
-      <p:sp>
-        <p:nvSpPr>
-          <p:cNvPr id="23" name="Text 21"/>
-          <p:cNvSpPr/>
-          <p:nvPr/>
-        </p:nvSpPr>
-        <p:spPr>
-          <a:xfrm>
-            <a:off x="795528" y="4389120"/>
-            <a:ext cx="2269897" cy="475488"/>
-          </a:xfrm>
-          <a:prstGeom prst="rect">
-            <a:avLst/>
-          </a:prstGeom>
-          <a:noFill/>
-          <a:ln/>
-        </p:spPr>
-        <p:txBody>
-          <a:bodyPr wrap="square" lIns="0" tIns="0" rIns="0" bIns="0" rtlCol="0" anchor="ctr">
-            <a:normAutofit/>
-          </a:bodyPr>
-          <a:lstStyle/>
-          <a:p>
-            <a:pPr indent="0" marL="0">
-              <a:lnSpc>
-                <a:spcPct val="115000"/>
-              </a:lnSpc>
-              <a:buNone/>
-            </a:pPr>
-            <a:r>
-              <a:rPr lang="en-US" sz="1150" dirty="0">
-                <a:solidFill>
-                  <a:srgbClr val="718096"/>
-                </a:solidFill>
-                <a:latin typeface="Pretendard" pitchFamily="34" charset="0"/>
-                <a:ea typeface="Pretendard" pitchFamily="34" charset="-122"/>
-                <a:cs typeface="Pretendard" pitchFamily="34" charset="-120"/>
-              </a:rPr>
-              <a:t>(-) 담보대출 조달</a:t>
-            </a:r>
-            <a:endParaRPr lang="en-US" sz="1150" dirty="0"/>
-          </a:p>
-        </p:txBody>
-      </p:sp>
-      <p:sp>
-        <p:nvSpPr>
-          <p:cNvPr id="24" name="Text 22"/>
-          <p:cNvSpPr/>
-          <p:nvPr/>
-        </p:nvSpPr>
-        <p:spPr>
-          <a:xfrm>
-            <a:off x="3065425" y="4389120"/>
-            <a:ext cx="2664662" cy="475488"/>
-          </a:xfrm>
-          <a:prstGeom prst="rect">
-            <a:avLst/>
-          </a:prstGeom>
-          <a:noFill/>
-          <a:ln/>
-        </p:spPr>
-        <p:txBody>
-          <a:bodyPr wrap="square" lIns="0" tIns="0" rIns="0" bIns="0" rtlCol="0" anchor="ctr">
-            <a:normAutofit/>
-          </a:bodyPr>
-          <a:lstStyle/>
-          <a:p>
-            <a:pPr indent="0" marL="0">
-              <a:lnSpc>
-                <a:spcPct val="115000"/>
-              </a:lnSpc>
-              <a:buNone/>
-            </a:pPr>
-            <a:r>
-              <a:rPr lang="en-US" sz="1150" b="1" dirty="0">
-                <a:solidFill>
-                  <a:srgbClr val="10161F"/>
-                </a:solidFill>
-                <a:latin typeface="Pretendard" pitchFamily="34" charset="0"/>
-                <a:ea typeface="Pretendard" pitchFamily="34" charset="-122"/>
-                <a:cs typeface="Pretendard" pitchFamily="34" charset="-120"/>
-              </a:rPr>
-              <a:t>67.5억 원</a:t>
-            </a:r>
-            <a:endParaRPr lang="en-US" sz="1150" dirty="0"/>
-          </a:p>
-        </p:txBody>
-      </p:sp>
-      <p:sp>
-        <p:nvSpPr>
-          <p:cNvPr id="25" name="Shape 23"/>
-          <p:cNvSpPr/>
-          <p:nvPr/>
-        </p:nvSpPr>
-        <p:spPr>
-          <a:xfrm>
-            <a:off x="795528" y="4864608"/>
-            <a:ext cx="4934560" cy="0"/>
-          </a:xfrm>
-          <a:prstGeom prst="line">
-            <a:avLst/>
-          </a:prstGeom>
-          <a:noFill/>
-          <a:ln w="3810">
-            <a:solidFill>
-              <a:srgbClr val="CBD5E0"/>
-            </a:solidFill>
-            <a:prstDash val="solid"/>
-          </a:ln>
-        </p:spPr>
-      </p:sp>
-      <p:sp>
-        <p:nvSpPr>
-          <p:cNvPr id="26" name="Text 24"/>
-          <p:cNvSpPr/>
-          <p:nvPr/>
-        </p:nvSpPr>
-        <p:spPr>
-          <a:xfrm>
-            <a:off x="795528" y="4864608"/>
-            <a:ext cx="2269897" cy="475488"/>
-          </a:xfrm>
-          <a:prstGeom prst="rect">
-            <a:avLst/>
-          </a:prstGeom>
-          <a:noFill/>
-          <a:ln/>
-        </p:spPr>
-        <p:txBody>
-          <a:bodyPr wrap="square" lIns="0" tIns="0" rIns="0" bIns="0" rtlCol="0" anchor="ctr">
-            <a:normAutofit/>
-          </a:bodyPr>
-          <a:lstStyle/>
-          <a:p>
-            <a:pPr indent="0" marL="0">
-              <a:lnSpc>
-                <a:spcPct val="115000"/>
-              </a:lnSpc>
-              <a:buNone/>
-            </a:pPr>
-            <a:r>
-              <a:rPr lang="en-US" sz="1150" dirty="0">
-                <a:solidFill>
-                  <a:srgbClr val="718096"/>
-                </a:solidFill>
-                <a:latin typeface="Pretendard" pitchFamily="34" charset="0"/>
-                <a:ea typeface="Pretendard" pitchFamily="34" charset="-122"/>
-                <a:cs typeface="Pretendard" pitchFamily="34" charset="-120"/>
-              </a:rPr>
-              <a:t>실투자금 (Net Equity)</a:t>
-            </a:r>
-            <a:endParaRPr lang="en-US" sz="1150" dirty="0"/>
-          </a:p>
-        </p:txBody>
-      </p:sp>
-      <p:sp>
-        <p:nvSpPr>
-          <p:cNvPr id="27" name="Text 25"/>
-          <p:cNvSpPr/>
-          <p:nvPr/>
-        </p:nvSpPr>
-        <p:spPr>
-          <a:xfrm>
-            <a:off x="3065425" y="4864608"/>
-            <a:ext cx="2664662" cy="475488"/>
-          </a:xfrm>
-          <a:prstGeom prst="rect">
-            <a:avLst/>
-          </a:prstGeom>
-          <a:noFill/>
-          <a:ln/>
-        </p:spPr>
-        <p:txBody>
-          <a:bodyPr wrap="square" lIns="0" tIns="0" rIns="0" bIns="0" rtlCol="0" anchor="ctr">
-            <a:normAutofit/>
-          </a:bodyPr>
-          <a:lstStyle/>
-          <a:p>
-            <a:pPr indent="0" marL="0">
-              <a:lnSpc>
-                <a:spcPct val="115000"/>
-              </a:lnSpc>
-              <a:buNone/>
-            </a:pPr>
-            <a:r>
-              <a:rPr lang="en-US" sz="1150" b="1" dirty="0">
-                <a:solidFill>
-                  <a:srgbClr val="10161F"/>
-                </a:solidFill>
-                <a:latin typeface="Pretendard" pitchFamily="34" charset="0"/>
-                <a:ea typeface="Pretendard" pitchFamily="34" charset="-122"/>
-                <a:cs typeface="Pretendard" pitchFamily="34" charset="-120"/>
-              </a:rPr>
-              <a:t>74.9억 원</a:t>
-            </a:r>
-            <a:endParaRPr lang="en-US" sz="1150" dirty="0"/>
-          </a:p>
-        </p:txBody>
-      </p:sp>
-      <p:sp>
-        <p:nvSpPr>
-          <p:cNvPr id="28" name="Shape 26"/>
-          <p:cNvSpPr/>
-          <p:nvPr/>
-        </p:nvSpPr>
-        <p:spPr>
-          <a:xfrm>
-            <a:off x="6233008" y="1417320"/>
-            <a:ext cx="5391760" cy="4389120"/>
-          </a:xfrm>
-          <a:prstGeom prst="roundRect">
-            <a:avLst>
-              <a:gd name="adj" fmla="val 1250"/>
-            </a:avLst>
-          </a:prstGeom>
-          <a:solidFill>
-            <a:srgbClr val="F7FAFC"/>
-          </a:solidFill>
-          <a:ln w="6350">
-            <a:solidFill>
-              <a:srgbClr val="CBD5E0"/>
-            </a:solidFill>
-            <a:prstDash val="solid"/>
-          </a:ln>
-        </p:spPr>
-      </p:sp>
-      <p:sp>
-        <p:nvSpPr>
-          <p:cNvPr id="29" name="Text 27"/>
-          <p:cNvSpPr/>
-          <p:nvPr/>
-        </p:nvSpPr>
-        <p:spPr>
-          <a:xfrm>
-            <a:off x="6461608" y="1618488"/>
-            <a:ext cx="4934560" cy="320040"/>
-          </a:xfrm>
-          <a:prstGeom prst="rect">
-            <a:avLst/>
-          </a:prstGeom>
-          <a:noFill/>
-          <a:ln/>
-        </p:spPr>
-        <p:txBody>
-          <a:bodyPr wrap="square" lIns="0" tIns="0" rIns="0" bIns="0" rtlCol="0" anchor="ctr"/>
-          <a:lstStyle/>
-          <a:p>
-            <a:pPr indent="0" marL="0">
-              <a:buNone/>
-            </a:pPr>
-            <a:r>
-              <a:rPr lang="en-US" sz="1350" b="1" dirty="0">
-                <a:solidFill>
-                  <a:srgbClr val="977024"/>
-                </a:solidFill>
-                <a:latin typeface="Pretendard" pitchFamily="34" charset="0"/>
-                <a:ea typeface="Pretendard" pitchFamily="34" charset="-122"/>
-                <a:cs typeface="Pretendard" pitchFamily="34" charset="-120"/>
-              </a:rPr>
-              <a:t>2. LTV 시나리오별 레버리지 효과</a:t>
-            </a:r>
-            <a:endParaRPr lang="en-US" sz="1350" dirty="0"/>
-          </a:p>
-        </p:txBody>
-      </p:sp>
-      <p:graphicFrame>
-        <p:nvGraphicFramePr>
-          <p:cNvPr id="9" name="Table 0"/>
-          <p:cNvGraphicFramePr>
-            <a:graphicFrameLocks noGrp="1"/>
-          </p:cNvGraphicFramePr>
-          <p:nvPr>
-            <p:extLst>
-              <p:ext uri="{D42A27DB-BD31-4B8C-83A1-F6EECF244321}">
-                <p14:modId xmlns:p14="http://schemas.microsoft.com/office/powerpoint/2010/main" val="1579011935"/>
-              </p:ext>
-            </p:extLst>
-          </p:nvPr>
-        </p:nvGraphicFramePr>
-        <p:xfrm>
-          <a:off x="6461608" y="2057400"/>
-          <a:ext cx="4934560" cy="914400"/>
-        </p:xfrm>
-        <a:graphic>
-          <a:graphicData uri="http://schemas.openxmlformats.org/drawingml/2006/table">
-            <a:tbl>
-              <a:tblPr/>
-              <a:tblGrid>
-                <a:gridCol w="1463040"/>
-                <a:gridCol w="1005840"/>
-                <a:gridCol w="1280160"/>
-                <a:gridCol w="1280160"/>
-              </a:tblGrid>
-              <a:tr h="457200">
-                <a:tc>
-                  <a:txBody>
-                    <a:bodyPr/>
-                    <a:lstStyle/>
-                    <a:p>
-                      <a:pPr indent="0" marL="0">
-                        <a:buNone/>
-                      </a:pPr>
-                      <a:r>
-                        <a:rPr lang="en-US" sz="1100" b="1" dirty="0">
-                          <a:solidFill>
-                            <a:srgbClr val="FFFFFF"/>
-                          </a:solidFill>
-                          <a:latin typeface="Pretendard" pitchFamily="34" charset="0"/>
-                          <a:ea typeface="Pretendard" pitchFamily="34" charset="-122"/>
-                          <a:cs typeface="Pretendard" pitchFamily="34" charset="-120"/>
-                        </a:rPr>
-                        <a:t>구분</a:t>
-                      </a:r>
-                      <a:endParaRPr lang="en-US" sz="1100" dirty="0">
-                        <a:latin typeface="Pretendard" charset="0"/>
-                        <a:ea typeface="Pretendard" charset="0"/>
-                        <a:cs typeface="Pretendard" charset="0"/>
-                      </a:endParaRPr>
-                    </a:p>
-                  </a:txBody>
-                  <a:tcPr marL="50800" marR="50800" marT="25400" marB="25400" anchor="ctr">
-                    <a:lnL w="3810" cap="flat" cmpd="sng" algn="ctr">
-                      <a:solidFill>
-                        <a:srgbClr val="CBD5E0"/>
-                      </a:solidFill>
-                      <a:prstDash val="solid"/>
-                      <a:round/>
-                      <a:headEnd type="none" w="med" len="med"/>
-                      <a:tailEnd type="none" w="med" len="med"/>
-                    </a:lnL>
-                    <a:lnR w="3810" cap="flat" cmpd="sng" algn="ctr">
-                      <a:solidFill>
-                        <a:srgbClr val="CBD5E0"/>
-                      </a:solidFill>
-                      <a:prstDash val="solid"/>
-                      <a:round/>
-                      <a:headEnd type="none" w="med" len="med"/>
-                      <a:tailEnd type="none" w="med" len="med"/>
-                    </a:lnR>
-                    <a:lnT w="3810" cap="flat" cmpd="sng" algn="ctr">
-                      <a:solidFill>
-                        <a:srgbClr val="CBD5E0"/>
-                      </a:solidFill>
-                      <a:prstDash val="solid"/>
-                      <a:round/>
-                      <a:headEnd type="none" w="med" len="med"/>
-                      <a:tailEnd type="none" w="med" len="med"/>
-                    </a:lnT>
-                    <a:lnB w="3810" cap="flat" cmpd="sng" algn="ctr">
-                      <a:solidFill>
-                        <a:srgbClr val="CBD5E0"/>
-                      </a:solidFill>
-                      <a:prstDash val="solid"/>
-                      <a:round/>
-                      <a:headEnd type="none" w="med" len="med"/>
-                      <a:tailEnd type="none" w="med" len="med"/>
-                    </a:lnB>
-                    <a:solidFill>
-                      <a:srgbClr val="10161F"/>
-                    </a:solidFill>
-                  </a:tcPr>
-                </a:tc>
-                <a:tc>
-                  <a:txBody>
-                    <a:bodyPr/>
-                    <a:lstStyle/>
-                    <a:p>
-                      <a:pPr indent="0" marL="0">
-                        <a:buNone/>
-                      </a:pPr>
-                      <a:r>
-                        <a:rPr lang="en-US" sz="1100" b="1" dirty="0">
-                          <a:solidFill>
-                            <a:srgbClr val="FFFFFF"/>
-                          </a:solidFill>
-                          <a:latin typeface="Pretendard" pitchFamily="34" charset="0"/>
-                          <a:ea typeface="Pretendard" pitchFamily="34" charset="-122"/>
-                          <a:cs typeface="Pretendard" pitchFamily="34" charset="-120"/>
-                        </a:rPr>
-                        <a:t>대출비율</a:t>
-                      </a:r>
-                      <a:endParaRPr lang="en-US" sz="1100" dirty="0">
-                        <a:latin typeface="Pretendard" charset="0"/>
-                        <a:ea typeface="Pretendard" charset="0"/>
-                        <a:cs typeface="Pretendard" charset="0"/>
-                      </a:endParaRPr>
-                    </a:p>
-                  </a:txBody>
-                  <a:tcPr marL="50800" marR="50800" marT="25400" marB="25400" anchor="ctr">
-                    <a:lnL w="3810" cap="flat" cmpd="sng" algn="ctr">
-                      <a:solidFill>
-                        <a:srgbClr val="CBD5E0"/>
-                      </a:solidFill>
-                      <a:prstDash val="solid"/>
-                      <a:round/>
-                      <a:headEnd type="none" w="med" len="med"/>
-                      <a:tailEnd type="none" w="med" len="med"/>
-                    </a:lnL>
-                    <a:lnR w="3810" cap="flat" cmpd="sng" algn="ctr">
-                      <a:solidFill>
-                        <a:srgbClr val="CBD5E0"/>
-                      </a:solidFill>
-                      <a:prstDash val="solid"/>
-                      <a:round/>
-                      <a:headEnd type="none" w="med" len="med"/>
-                      <a:tailEnd type="none" w="med" len="med"/>
-                    </a:lnR>
-                    <a:lnT w="3810" cap="flat" cmpd="sng" algn="ctr">
-                      <a:solidFill>
-                        <a:srgbClr val="CBD5E0"/>
-                      </a:solidFill>
-                      <a:prstDash val="solid"/>
-                      <a:round/>
-                      <a:headEnd type="none" w="med" len="med"/>
-                      <a:tailEnd type="none" w="med" len="med"/>
-                    </a:lnT>
-                    <a:lnB w="3810" cap="flat" cmpd="sng" algn="ctr">
-                      <a:solidFill>
-                        <a:srgbClr val="CBD5E0"/>
-                      </a:solidFill>
-                      <a:prstDash val="solid"/>
-                      <a:round/>
-                      <a:headEnd type="none" w="med" len="med"/>
-                      <a:tailEnd type="none" w="med" len="med"/>
-                    </a:lnB>
-                    <a:solidFill>
-                      <a:srgbClr val="10161F"/>
-                    </a:solidFill>
-                  </a:tcPr>
-                </a:tc>
-                <a:tc>
-                  <a:txBody>
-                    <a:bodyPr/>
-                    <a:lstStyle/>
-                    <a:p>
-                      <a:pPr indent="0" marL="0">
-                        <a:buNone/>
-                      </a:pPr>
-                      <a:r>
-                        <a:rPr lang="en-US" sz="1100" b="1" dirty="0">
-                          <a:solidFill>
-                            <a:srgbClr val="FFFFFF"/>
-                          </a:solidFill>
-                          <a:latin typeface="Pretendard" pitchFamily="34" charset="0"/>
-                          <a:ea typeface="Pretendard" pitchFamily="34" charset="-122"/>
-                          <a:cs typeface="Pretendard" pitchFamily="34" charset="-120"/>
-                        </a:rPr>
-                        <a:t>실투자금</a:t>
-                      </a:r>
-                      <a:endParaRPr lang="en-US" sz="1100" dirty="0">
-                        <a:latin typeface="Pretendard" charset="0"/>
-                        <a:ea typeface="Pretendard" charset="0"/>
-                        <a:cs typeface="Pretendard" charset="0"/>
-                      </a:endParaRPr>
-                    </a:p>
-                  </a:txBody>
-                  <a:tcPr marL="50800" marR="50800" marT="25400" marB="25400" anchor="ctr">
-                    <a:lnL w="3810" cap="flat" cmpd="sng" algn="ctr">
-                      <a:solidFill>
-                        <a:srgbClr val="CBD5E0"/>
-                      </a:solidFill>
-                      <a:prstDash val="solid"/>
-                      <a:round/>
-                      <a:headEnd type="none" w="med" len="med"/>
-                      <a:tailEnd type="none" w="med" len="med"/>
-                    </a:lnL>
-                    <a:lnR w="3810" cap="flat" cmpd="sng" algn="ctr">
-                      <a:solidFill>
-                        <a:srgbClr val="CBD5E0"/>
-                      </a:solidFill>
-                      <a:prstDash val="solid"/>
-                      <a:round/>
-                      <a:headEnd type="none" w="med" len="med"/>
-                      <a:tailEnd type="none" w="med" len="med"/>
-                    </a:lnR>
-                    <a:lnT w="3810" cap="flat" cmpd="sng" algn="ctr">
-                      <a:solidFill>
-                        <a:srgbClr val="CBD5E0"/>
-                      </a:solidFill>
-                      <a:prstDash val="solid"/>
-                      <a:round/>
-                      <a:headEnd type="none" w="med" len="med"/>
-                      <a:tailEnd type="none" w="med" len="med"/>
-                    </a:lnT>
-                    <a:lnB w="3810" cap="flat" cmpd="sng" algn="ctr">
-                      <a:solidFill>
-                        <a:srgbClr val="CBD5E0"/>
-                      </a:solidFill>
-                      <a:prstDash val="solid"/>
-                      <a:round/>
-                      <a:headEnd type="none" w="med" len="med"/>
-                      <a:tailEnd type="none" w="med" len="med"/>
-                    </a:lnB>
-                    <a:solidFill>
-                      <a:srgbClr val="10161F"/>
-                    </a:solidFill>
-                  </a:tcPr>
-                </a:tc>
-                <a:tc>
-                  <a:txBody>
-                    <a:bodyPr/>
-                    <a:lstStyle/>
-                    <a:p>
-                      <a:pPr indent="0" marL="0">
-                        <a:buNone/>
-                      </a:pPr>
-                      <a:r>
-                        <a:rPr lang="en-US" sz="1100" b="1" dirty="0">
-                          <a:solidFill>
-                            <a:srgbClr val="FFFFFF"/>
-                          </a:solidFill>
-                          <a:latin typeface="Pretendard" pitchFamily="34" charset="0"/>
-                          <a:ea typeface="Pretendard" pitchFamily="34" charset="-122"/>
-                          <a:cs typeface="Pretendard" pitchFamily="34" charset="-120"/>
-                        </a:rPr>
-                        <a:t>예상수익률</a:t>
-                      </a:r>
-                      <a:endParaRPr lang="en-US" sz="1100" dirty="0">
-                        <a:latin typeface="Pretendard" charset="0"/>
-                        <a:ea typeface="Pretendard" charset="0"/>
-                        <a:cs typeface="Pretendard" charset="0"/>
-                      </a:endParaRPr>
-                    </a:p>
-                  </a:txBody>
-                  <a:tcPr marL="50800" marR="50800" marT="25400" marB="25400" anchor="ctr">
-                    <a:lnL w="3810" cap="flat" cmpd="sng" algn="ctr">
-                      <a:solidFill>
-                        <a:srgbClr val="CBD5E0"/>
-                      </a:solidFill>
-                      <a:prstDash val="solid"/>
-                      <a:round/>
-                      <a:headEnd type="none" w="med" len="med"/>
-                      <a:tailEnd type="none" w="med" len="med"/>
-                    </a:lnL>
-                    <a:lnR w="3810" cap="flat" cmpd="sng" algn="ctr">
-                      <a:solidFill>
-                        <a:srgbClr val="CBD5E0"/>
-                      </a:solidFill>
-                      <a:prstDash val="solid"/>
-                      <a:round/>
-                      <a:headEnd type="none" w="med" len="med"/>
-                      <a:tailEnd type="none" w="med" len="med"/>
-                    </a:lnR>
-                    <a:lnT w="3810" cap="flat" cmpd="sng" algn="ctr">
-                      <a:solidFill>
-                        <a:srgbClr val="CBD5E0"/>
-                      </a:solidFill>
-                      <a:prstDash val="solid"/>
-                      <a:round/>
-                      <a:headEnd type="none" w="med" len="med"/>
-                      <a:tailEnd type="none" w="med" len="med"/>
-                    </a:lnT>
-                    <a:lnB w="3810" cap="flat" cmpd="sng" algn="ctr">
-                      <a:solidFill>
-                        <a:srgbClr val="CBD5E0"/>
-                      </a:solidFill>
-                      <a:prstDash val="solid"/>
-                      <a:round/>
-                      <a:headEnd type="none" w="med" len="med"/>
-                      <a:tailEnd type="none" w="med" len="med"/>
-                    </a:lnB>
-                    <a:solidFill>
-                      <a:srgbClr val="10161F"/>
-                    </a:solidFill>
-                  </a:tcPr>
-                </a:tc>
-              </a:tr>
-              <a:tr h="457200">
-                <a:tc>
-                  <a:txBody>
-                    <a:bodyPr/>
-                    <a:lstStyle/>
-                    <a:p>
-                      <a:pPr indent="0" marL="0">
-                        <a:buNone/>
-                      </a:pPr>
-                      <a:r>
-                        <a:rPr lang="en-US" sz="1100" b="1" dirty="0">
-                          <a:solidFill>
-                            <a:srgbClr val="10161F"/>
-                          </a:solidFill>
-                          <a:latin typeface="Pretendard" pitchFamily="34" charset="0"/>
-                          <a:ea typeface="Pretendard" pitchFamily="34" charset="-122"/>
-                          <a:cs typeface="Pretendard" pitchFamily="34" charset="-120"/>
-                        </a:rPr>
-                        <a:t>전액 </a:t>
-                      </a:r>
-                      <a:pPr indent="0" marL="0">
-                        <a:buNone/>
-                      </a:pPr>
-                      <a:r>
-                        <a:rPr lang="en-US" sz="1100" b="1" dirty="0">
-                          <a:solidFill>
-                            <a:srgbClr val="10161F"/>
-                          </a:solidFill>
-                          <a:latin typeface="Pretendard" pitchFamily="34" charset="0"/>
-                          <a:ea typeface="Pretendard" pitchFamily="34" charset="-122"/>
-                          <a:cs typeface="Pretendard" pitchFamily="34" charset="-120"/>
-                        </a:rPr>
-                        <a:t>자기자본 </a:t>
-                      </a:r>
-                      <a:pPr indent="0" marL="0">
-                        <a:buNone/>
-                      </a:pPr>
-                      <a:r>
-                        <a:rPr lang="en-US" sz="1100" b="1" dirty="0">
-                          <a:solidFill>
-                            <a:srgbClr val="10161F"/>
-                          </a:solidFill>
-                          <a:latin typeface="Pretendard" pitchFamily="34" charset="0"/>
-                          <a:ea typeface="Pretendard" pitchFamily="34" charset="-122"/>
-                          <a:cs typeface="Pretendard" pitchFamily="34" charset="-120"/>
-                        </a:rPr>
-                        <a:t>(무차입)</a:t>
-                      </a:r>
-                      <a:endParaRPr lang="en-US" sz="1100" dirty="0">
-                        <a:latin typeface="Pretendard" charset="0"/>
-                        <a:ea typeface="Pretendard" charset="0"/>
-                        <a:cs typeface="Pretendard" charset="0"/>
-                      </a:endParaRPr>
-                    </a:p>
-                  </a:txBody>
-                  <a:tcPr marL="50800" marR="50800" marT="25400" marB="25400" anchor="ctr">
-                    <a:lnL w="3810" cap="flat" cmpd="sng" algn="ctr">
-                      <a:solidFill>
-                        <a:srgbClr val="CBD5E0"/>
-                      </a:solidFill>
-                      <a:prstDash val="solid"/>
-                      <a:round/>
-                      <a:headEnd type="none" w="med" len="med"/>
-                      <a:tailEnd type="none" w="med" len="med"/>
-                    </a:lnL>
-                    <a:lnR w="3810" cap="flat" cmpd="sng" algn="ctr">
-                      <a:solidFill>
-                        <a:srgbClr val="CBD5E0"/>
-                      </a:solidFill>
-                      <a:prstDash val="solid"/>
-                      <a:round/>
-                      <a:headEnd type="none" w="med" len="med"/>
-                      <a:tailEnd type="none" w="med" len="med"/>
-                    </a:lnR>
-                    <a:lnT w="3810" cap="flat" cmpd="sng" algn="ctr">
-                      <a:solidFill>
-                        <a:srgbClr val="CBD5E0"/>
-                      </a:solidFill>
-                      <a:prstDash val="solid"/>
-                      <a:round/>
-                      <a:headEnd type="none" w="med" len="med"/>
-                      <a:tailEnd type="none" w="med" len="med"/>
-                    </a:lnT>
-                    <a:lnB w="3810" cap="flat" cmpd="sng" algn="ctr">
-                      <a:solidFill>
-                        <a:srgbClr val="CBD5E0"/>
-                      </a:solidFill>
-                      <a:prstDash val="solid"/>
-                      <a:round/>
-                      <a:headEnd type="none" w="med" len="med"/>
-                      <a:tailEnd type="none" w="med" len="med"/>
-                    </a:lnB>
-                    <a:solidFill>
-                      <a:srgbClr val="FFFFFF"/>
-                    </a:solidFill>
-                  </a:tcPr>
-                </a:tc>
-                <a:tc>
-                  <a:txBody>
-                    <a:bodyPr/>
-                    <a:lstStyle/>
-                    <a:p>
-                      <a:pPr indent="0" marL="0">
-                        <a:buNone/>
-                      </a:pPr>
-                      <a:r>
-                        <a:rPr lang="en-US" sz="1100" dirty="0">
-                          <a:solidFill>
-                            <a:srgbClr val="10161F"/>
-                          </a:solidFill>
-                          <a:latin typeface="Pretendard" pitchFamily="34" charset="0"/>
-                          <a:ea typeface="Pretendard" pitchFamily="34" charset="-122"/>
-                          <a:cs typeface="Pretendard" pitchFamily="34" charset="-120"/>
-                        </a:rPr>
-                        <a:t>0%</a:t>
-                      </a:r>
-                      <a:endParaRPr lang="en-US" sz="1100" dirty="0">
-                        <a:latin typeface="Pretendard" charset="0"/>
-                        <a:ea typeface="Pretendard" charset="0"/>
-                        <a:cs typeface="Pretendard" charset="0"/>
-                      </a:endParaRPr>
-                    </a:p>
-                  </a:txBody>
-                  <a:tcPr marL="50800" marR="50800" marT="25400" marB="25400" anchor="ctr">
-                    <a:lnL w="3810" cap="flat" cmpd="sng" algn="ctr">
-                      <a:solidFill>
-                        <a:srgbClr val="CBD5E0"/>
-                      </a:solidFill>
-                      <a:prstDash val="solid"/>
-                      <a:round/>
-                      <a:headEnd type="none" w="med" len="med"/>
-                      <a:tailEnd type="none" w="med" len="med"/>
-                    </a:lnL>
-                    <a:lnR w="3810" cap="flat" cmpd="sng" algn="ctr">
-                      <a:solidFill>
-                        <a:srgbClr val="CBD5E0"/>
-                      </a:solidFill>
-                      <a:prstDash val="solid"/>
-                      <a:round/>
-                      <a:headEnd type="none" w="med" len="med"/>
-                      <a:tailEnd type="none" w="med" len="med"/>
-                    </a:lnR>
-                    <a:lnT w="3810" cap="flat" cmpd="sng" algn="ctr">
-                      <a:solidFill>
-                        <a:srgbClr val="CBD5E0"/>
-                      </a:solidFill>
-                      <a:prstDash val="solid"/>
-                      <a:round/>
-                      <a:headEnd type="none" w="med" len="med"/>
-                      <a:tailEnd type="none" w="med" len="med"/>
-                    </a:lnT>
-                    <a:lnB w="3810" cap="flat" cmpd="sng" algn="ctr">
-                      <a:solidFill>
-                        <a:srgbClr val="CBD5E0"/>
-                      </a:solidFill>
-                      <a:prstDash val="solid"/>
-                      <a:round/>
-                      <a:headEnd type="none" w="med" len="med"/>
-                      <a:tailEnd type="none" w="med" len="med"/>
-                    </a:lnB>
-                    <a:solidFill>
-                      <a:srgbClr val="FFFFFF"/>
-                    </a:solidFill>
-                  </a:tcPr>
-                </a:tc>
-                <a:tc>
-                  <a:txBody>
-                    <a:bodyPr/>
-                    <a:lstStyle/>
-                    <a:p>
-                      <a:pPr indent="0" marL="0">
-                        <a:buNone/>
-                      </a:pPr>
-                      <a:r>
-                        <a:rPr lang="en-US" sz="1100" dirty="0">
-                          <a:solidFill>
-                            <a:srgbClr val="10161F"/>
-                          </a:solidFill>
-                          <a:latin typeface="Pretendard" pitchFamily="34" charset="0"/>
-                          <a:ea typeface="Pretendard" pitchFamily="34" charset="-122"/>
-                          <a:cs typeface="Pretendard" pitchFamily="34" charset="-120"/>
-                        </a:rPr>
-                        <a:t>142.4억</a:t>
-                      </a:r>
-                      <a:endParaRPr lang="en-US" sz="1100" dirty="0">
-                        <a:latin typeface="Pretendard" charset="0"/>
-                        <a:ea typeface="Pretendard" charset="0"/>
-                        <a:cs typeface="Pretendard" charset="0"/>
-                      </a:endParaRPr>
-                    </a:p>
-                  </a:txBody>
-                  <a:tcPr marL="50800" marR="50800" marT="25400" marB="25400" anchor="ctr">
-                    <a:lnL w="3810" cap="flat" cmpd="sng" algn="ctr">
-                      <a:solidFill>
-                        <a:srgbClr val="CBD5E0"/>
-                      </a:solidFill>
-                      <a:prstDash val="solid"/>
-                      <a:round/>
-                      <a:headEnd type="none" w="med" len="med"/>
-                      <a:tailEnd type="none" w="med" len="med"/>
-                    </a:lnL>
-                    <a:lnR w="3810" cap="flat" cmpd="sng" algn="ctr">
-                      <a:solidFill>
-                        <a:srgbClr val="CBD5E0"/>
-                      </a:solidFill>
-                      <a:prstDash val="solid"/>
-                      <a:round/>
-                      <a:headEnd type="none" w="med" len="med"/>
-                      <a:tailEnd type="none" w="med" len="med"/>
-                    </a:lnR>
-                    <a:lnT w="3810" cap="flat" cmpd="sng" algn="ctr">
-                      <a:solidFill>
-                        <a:srgbClr val="CBD5E0"/>
-                      </a:solidFill>
-                      <a:prstDash val="solid"/>
-                      <a:round/>
-                      <a:headEnd type="none" w="med" len="med"/>
-                      <a:tailEnd type="none" w="med" len="med"/>
-                    </a:lnT>
-                    <a:lnB w="3810" cap="flat" cmpd="sng" algn="ctr">
-                      <a:solidFill>
-                        <a:srgbClr val="CBD5E0"/>
-                      </a:solidFill>
-                      <a:prstDash val="solid"/>
-                      <a:round/>
-                      <a:headEnd type="none" w="med" len="med"/>
-                      <a:tailEnd type="none" w="med" len="med"/>
-                    </a:lnB>
-                    <a:solidFill>
-                      <a:srgbClr val="FFFFFF"/>
-                    </a:solidFill>
-                  </a:tcPr>
-                </a:tc>
-                <a:tc>
-                  <a:txBody>
-                    <a:bodyPr/>
-                    <a:lstStyle/>
-                    <a:p>
-                      <a:pPr indent="0" marL="0">
-                        <a:buNone/>
-                      </a:pPr>
-                      <a:r>
-                        <a:rPr lang="en-US" sz="1100" dirty="0">
-                          <a:solidFill>
-                            <a:srgbClr val="10161F"/>
-                          </a:solidFill>
-                          <a:latin typeface="Pretendard" pitchFamily="34" charset="0"/>
-                          <a:ea typeface="Pretendard" pitchFamily="34" charset="-122"/>
-                          <a:cs typeface="Pretendard" pitchFamily="34" charset="-120"/>
-                        </a:rPr>
-                        <a:t>-</a:t>
-                      </a:r>
-                      <a:endParaRPr lang="en-US" sz="1100" dirty="0">
-                        <a:latin typeface="Pretendard" charset="0"/>
-                        <a:ea typeface="Pretendard" charset="0"/>
-                        <a:cs typeface="Pretendard" charset="0"/>
-                      </a:endParaRPr>
-                    </a:p>
-                  </a:txBody>
-                  <a:tcPr marL="50800" marR="50800" marT="25400" marB="25400" anchor="ctr">
-                    <a:lnL w="3810" cap="flat" cmpd="sng" algn="ctr">
-                      <a:solidFill>
-                        <a:srgbClr val="CBD5E0"/>
-                      </a:solidFill>
-                      <a:prstDash val="solid"/>
-                      <a:round/>
-                      <a:headEnd type="none" w="med" len="med"/>
-                      <a:tailEnd type="none" w="med" len="med"/>
-                    </a:lnL>
-                    <a:lnR w="3810" cap="flat" cmpd="sng" algn="ctr">
-                      <a:solidFill>
-                        <a:srgbClr val="CBD5E0"/>
-                      </a:solidFill>
-                      <a:prstDash val="solid"/>
-                      <a:round/>
-                      <a:headEnd type="none" w="med" len="med"/>
-                      <a:tailEnd type="none" w="med" len="med"/>
-                    </a:lnR>
-                    <a:lnT w="3810" cap="flat" cmpd="sng" algn="ctr">
-                      <a:solidFill>
-                        <a:srgbClr val="CBD5E0"/>
-                      </a:solidFill>
-                      <a:prstDash val="solid"/>
-                      <a:round/>
-                      <a:headEnd type="none" w="med" len="med"/>
-                      <a:tailEnd type="none" w="med" len="med"/>
-                    </a:lnT>
-                    <a:lnB w="3810" cap="flat" cmpd="sng" algn="ctr">
-                      <a:solidFill>
-                        <a:srgbClr val="CBD5E0"/>
-                      </a:solidFill>
-                      <a:prstDash val="solid"/>
-                      <a:round/>
-                      <a:headEnd type="none" w="med" len="med"/>
-                      <a:tailEnd type="none" w="med" len="med"/>
-                    </a:lnB>
-                    <a:solidFill>
-                      <a:srgbClr val="FFFFFF"/>
-                    </a:solidFill>
-                  </a:tcPr>
-                </a:tc>
-              </a:tr>
-              <a:tr h="457200">
-                <a:tc>
-                  <a:txBody>
-                    <a:bodyPr/>
-                    <a:lstStyle/>
-                    <a:p>
-                      <a:pPr indent="0" marL="0">
-                        <a:buNone/>
-                      </a:pPr>
-                      <a:r>
-                        <a:rPr lang="en-US" sz="1100" b="1" dirty="0">
-                          <a:solidFill>
-                            <a:srgbClr val="10161F"/>
-                          </a:solidFill>
-                          <a:latin typeface="Pretendard" pitchFamily="34" charset="0"/>
-                          <a:ea typeface="Pretendard" pitchFamily="34" charset="-122"/>
-                          <a:cs typeface="Pretendard" pitchFamily="34" charset="-120"/>
-                        </a:rPr>
-                        <a:t>보수적 </a:t>
-                      </a:r>
-                      <a:pPr indent="0" marL="0">
-                        <a:buNone/>
-                      </a:pPr>
-                      <a:r>
-                        <a:rPr lang="en-US" sz="1100" b="1" dirty="0">
-                          <a:solidFill>
-                            <a:srgbClr val="10161F"/>
-                          </a:solidFill>
-                          <a:latin typeface="Pretendard" pitchFamily="34" charset="0"/>
-                          <a:ea typeface="Pretendard" pitchFamily="34" charset="-122"/>
-                          <a:cs typeface="Pretendard" pitchFamily="34" charset="-120"/>
-                        </a:rPr>
-                        <a:t>차입 </a:t>
-                      </a:r>
-                      <a:pPr indent="0" marL="0">
-                        <a:buNone/>
-                      </a:pPr>
-                      <a:r>
-                        <a:rPr lang="en-US" sz="1100" b="1" dirty="0">
-                          <a:solidFill>
-                            <a:srgbClr val="10161F"/>
-                          </a:solidFill>
-                          <a:latin typeface="Pretendard" pitchFamily="34" charset="0"/>
-                          <a:ea typeface="Pretendard" pitchFamily="34" charset="-122"/>
-                          <a:cs typeface="Pretendard" pitchFamily="34" charset="-120"/>
-                        </a:rPr>
-                        <a:t>(안정형)</a:t>
-                      </a:r>
-                      <a:endParaRPr lang="en-US" sz="1100" dirty="0">
-                        <a:latin typeface="Pretendard" charset="0"/>
-                        <a:ea typeface="Pretendard" charset="0"/>
-                        <a:cs typeface="Pretendard" charset="0"/>
-                      </a:endParaRPr>
-                    </a:p>
-                  </a:txBody>
-                  <a:tcPr marL="50800" marR="50800" marT="25400" marB="25400" anchor="ctr">
-                    <a:lnL w="3810" cap="flat" cmpd="sng" algn="ctr">
-                      <a:solidFill>
-                        <a:srgbClr val="CBD5E0"/>
-                      </a:solidFill>
-                      <a:prstDash val="solid"/>
-                      <a:round/>
-                      <a:headEnd type="none" w="med" len="med"/>
-                      <a:tailEnd type="none" w="med" len="med"/>
-                    </a:lnL>
-                    <a:lnR w="3810" cap="flat" cmpd="sng" algn="ctr">
-                      <a:solidFill>
-                        <a:srgbClr val="CBD5E0"/>
-                      </a:solidFill>
-                      <a:prstDash val="solid"/>
-                      <a:round/>
-                      <a:headEnd type="none" w="med" len="med"/>
-                      <a:tailEnd type="none" w="med" len="med"/>
-                    </a:lnR>
-                    <a:lnT w="3810" cap="flat" cmpd="sng" algn="ctr">
-                      <a:solidFill>
-                        <a:srgbClr val="CBD5E0"/>
-                      </a:solidFill>
-                      <a:prstDash val="solid"/>
-                      <a:round/>
-                      <a:headEnd type="none" w="med" len="med"/>
-                      <a:tailEnd type="none" w="med" len="med"/>
-                    </a:lnT>
-                    <a:lnB w="3810" cap="flat" cmpd="sng" algn="ctr">
-                      <a:solidFill>
-                        <a:srgbClr val="CBD5E0"/>
-                      </a:solidFill>
-                      <a:prstDash val="solid"/>
-                      <a:round/>
-                      <a:headEnd type="none" w="med" len="med"/>
-                      <a:tailEnd type="none" w="med" len="med"/>
-                    </a:lnB>
-                    <a:solidFill>
-                      <a:srgbClr val="F7FAFC"/>
-                    </a:solidFill>
-                  </a:tcPr>
-                </a:tc>
-                <a:tc>
-                  <a:txBody>
-                    <a:bodyPr/>
-                    <a:lstStyle/>
-                    <a:p>
-                      <a:pPr indent="0" marL="0">
-                        <a:buNone/>
-                      </a:pPr>
-                      <a:r>
-                        <a:rPr lang="en-US" sz="1100" dirty="0">
-                          <a:solidFill>
-                            <a:srgbClr val="10161F"/>
-                          </a:solidFill>
-                          <a:latin typeface="Pretendard" pitchFamily="34" charset="0"/>
-                          <a:ea typeface="Pretendard" pitchFamily="34" charset="-122"/>
-                          <a:cs typeface="Pretendard" pitchFamily="34" charset="-120"/>
-                        </a:rPr>
-                        <a:t>40%</a:t>
-                      </a:r>
-                      <a:endParaRPr lang="en-US" sz="1100" dirty="0">
-                        <a:latin typeface="Pretendard" charset="0"/>
-                        <a:ea typeface="Pretendard" charset="0"/>
-                        <a:cs typeface="Pretendard" charset="0"/>
-                      </a:endParaRPr>
-                    </a:p>
-                  </a:txBody>
-                  <a:tcPr marL="50800" marR="50800" marT="25400" marB="25400" anchor="ctr">
-                    <a:lnL w="3810" cap="flat" cmpd="sng" algn="ctr">
-                      <a:solidFill>
-                        <a:srgbClr val="CBD5E0"/>
-                      </a:solidFill>
-                      <a:prstDash val="solid"/>
-                      <a:round/>
-                      <a:headEnd type="none" w="med" len="med"/>
-                      <a:tailEnd type="none" w="med" len="med"/>
-                    </a:lnL>
-                    <a:lnR w="3810" cap="flat" cmpd="sng" algn="ctr">
-                      <a:solidFill>
-                        <a:srgbClr val="CBD5E0"/>
-                      </a:solidFill>
-                      <a:prstDash val="solid"/>
-                      <a:round/>
-                      <a:headEnd type="none" w="med" len="med"/>
-                      <a:tailEnd type="none" w="med" len="med"/>
-                    </a:lnR>
-                    <a:lnT w="3810" cap="flat" cmpd="sng" algn="ctr">
-                      <a:solidFill>
-                        <a:srgbClr val="CBD5E0"/>
-                      </a:solidFill>
-                      <a:prstDash val="solid"/>
-                      <a:round/>
-                      <a:headEnd type="none" w="med" len="med"/>
-                      <a:tailEnd type="none" w="med" len="med"/>
-                    </a:lnT>
-                    <a:lnB w="3810" cap="flat" cmpd="sng" algn="ctr">
-                      <a:solidFill>
-                        <a:srgbClr val="CBD5E0"/>
-                      </a:solidFill>
-                      <a:prstDash val="solid"/>
-                      <a:round/>
-                      <a:headEnd type="none" w="med" len="med"/>
-                      <a:tailEnd type="none" w="med" len="med"/>
-                    </a:lnB>
-                    <a:solidFill>
-                      <a:srgbClr val="F7FAFC"/>
-                    </a:solidFill>
-                  </a:tcPr>
-                </a:tc>
-                <a:tc>
-                  <a:txBody>
-                    <a:bodyPr/>
-                    <a:lstStyle/>
-                    <a:p>
-                      <a:pPr indent="0" marL="0">
-                        <a:buNone/>
-                      </a:pPr>
-                      <a:r>
-                        <a:rPr lang="en-US" sz="1100" dirty="0">
-                          <a:solidFill>
-                            <a:srgbClr val="10161F"/>
-                          </a:solidFill>
-                          <a:latin typeface="Pretendard" pitchFamily="34" charset="0"/>
-                          <a:ea typeface="Pretendard" pitchFamily="34" charset="-122"/>
-                          <a:cs typeface="Pretendard" pitchFamily="34" charset="-120"/>
-                        </a:rPr>
-                        <a:t>88.4억</a:t>
-                      </a:r>
-                      <a:endParaRPr lang="en-US" sz="1100" dirty="0">
-                        <a:latin typeface="Pretendard" charset="0"/>
-                        <a:ea typeface="Pretendard" charset="0"/>
-                        <a:cs typeface="Pretendard" charset="0"/>
-                      </a:endParaRPr>
-                    </a:p>
-                  </a:txBody>
-                  <a:tcPr marL="50800" marR="50800" marT="25400" marB="25400" anchor="ctr">
-                    <a:lnL w="3810" cap="flat" cmpd="sng" algn="ctr">
-                      <a:solidFill>
-                        <a:srgbClr val="CBD5E0"/>
-                      </a:solidFill>
-                      <a:prstDash val="solid"/>
-                      <a:round/>
-                      <a:headEnd type="none" w="med" len="med"/>
-                      <a:tailEnd type="none" w="med" len="med"/>
-                    </a:lnL>
-                    <a:lnR w="3810" cap="flat" cmpd="sng" algn="ctr">
-                      <a:solidFill>
-                        <a:srgbClr val="CBD5E0"/>
-                      </a:solidFill>
-                      <a:prstDash val="solid"/>
-                      <a:round/>
-                      <a:headEnd type="none" w="med" len="med"/>
-                      <a:tailEnd type="none" w="med" len="med"/>
-                    </a:lnR>
-                    <a:lnT w="3810" cap="flat" cmpd="sng" algn="ctr">
-                      <a:solidFill>
-                        <a:srgbClr val="CBD5E0"/>
-                      </a:solidFill>
-                      <a:prstDash val="solid"/>
-                      <a:round/>
-                      <a:headEnd type="none" w="med" len="med"/>
-                      <a:tailEnd type="none" w="med" len="med"/>
-                    </a:lnT>
-                    <a:lnB w="3810" cap="flat" cmpd="sng" algn="ctr">
-                      <a:solidFill>
-                        <a:srgbClr val="CBD5E0"/>
-                      </a:solidFill>
-                      <a:prstDash val="solid"/>
-                      <a:round/>
-                      <a:headEnd type="none" w="med" len="med"/>
-                      <a:tailEnd type="none" w="med" len="med"/>
-                    </a:lnB>
-                    <a:solidFill>
-                      <a:srgbClr val="F7FAFC"/>
-                    </a:solidFill>
-                  </a:tcPr>
-                </a:tc>
-                <a:tc>
-                  <a:txBody>
-                    <a:bodyPr/>
-                    <a:lstStyle/>
-                    <a:p>
-                      <a:pPr indent="0" marL="0">
-                        <a:buNone/>
-                      </a:pPr>
-                      <a:r>
-                        <a:rPr lang="en-US" sz="1100" dirty="0">
-                          <a:solidFill>
-                            <a:srgbClr val="10161F"/>
-                          </a:solidFill>
-                          <a:latin typeface="Pretendard" pitchFamily="34" charset="0"/>
-                          <a:ea typeface="Pretendard" pitchFamily="34" charset="-122"/>
-                          <a:cs typeface="Pretendard" pitchFamily="34" charset="-120"/>
-                        </a:rPr>
-                        <a:t>-</a:t>
-                      </a:r>
-                      <a:endParaRPr lang="en-US" sz="1100" dirty="0">
-                        <a:latin typeface="Pretendard" charset="0"/>
-                        <a:ea typeface="Pretendard" charset="0"/>
-                        <a:cs typeface="Pretendard" charset="0"/>
-                      </a:endParaRPr>
-                    </a:p>
-                  </a:txBody>
-                  <a:tcPr marL="50800" marR="50800" marT="25400" marB="25400" anchor="ctr">
-                    <a:lnL w="3810" cap="flat" cmpd="sng" algn="ctr">
-                      <a:solidFill>
-                        <a:srgbClr val="CBD5E0"/>
-                      </a:solidFill>
-                      <a:prstDash val="solid"/>
-                      <a:round/>
-                      <a:headEnd type="none" w="med" len="med"/>
-                      <a:tailEnd type="none" w="med" len="med"/>
-                    </a:lnL>
-                    <a:lnR w="3810" cap="flat" cmpd="sng" algn="ctr">
-                      <a:solidFill>
-                        <a:srgbClr val="CBD5E0"/>
-                      </a:solidFill>
-                      <a:prstDash val="solid"/>
-                      <a:round/>
-                      <a:headEnd type="none" w="med" len="med"/>
-                      <a:tailEnd type="none" w="med" len="med"/>
-                    </a:lnR>
-                    <a:lnT w="3810" cap="flat" cmpd="sng" algn="ctr">
-                      <a:solidFill>
-                        <a:srgbClr val="CBD5E0"/>
-                      </a:solidFill>
-                      <a:prstDash val="solid"/>
-                      <a:round/>
-                      <a:headEnd type="none" w="med" len="med"/>
-                      <a:tailEnd type="none" w="med" len="med"/>
-                    </a:lnT>
-                    <a:lnB w="3810" cap="flat" cmpd="sng" algn="ctr">
-                      <a:solidFill>
-                        <a:srgbClr val="CBD5E0"/>
-                      </a:solidFill>
-                      <a:prstDash val="solid"/>
-                      <a:round/>
-                      <a:headEnd type="none" w="med" len="med"/>
-                      <a:tailEnd type="none" w="med" len="med"/>
-                    </a:lnB>
-                    <a:solidFill>
-                      <a:srgbClr val="F7FAFC"/>
-                    </a:solidFill>
-                  </a:tcPr>
-                </a:tc>
-              </a:tr>
-              <a:tr h="457200">
-                <a:tc>
-                  <a:txBody>
-                    <a:bodyPr/>
-                    <a:lstStyle/>
-                    <a:p>
-                      <a:pPr indent="0" marL="0">
-                        <a:buNone/>
-                      </a:pPr>
-                      <a:r>
-                        <a:rPr lang="en-US" sz="1100" b="1" dirty="0">
-                          <a:solidFill>
-                            <a:srgbClr val="10161F"/>
-                          </a:solidFill>
-                          <a:latin typeface="Pretendard" pitchFamily="34" charset="0"/>
-                          <a:ea typeface="Pretendard" pitchFamily="34" charset="-122"/>
-                          <a:cs typeface="Pretendard" pitchFamily="34" charset="-120"/>
-                        </a:rPr>
-                        <a:t>표준 </a:t>
-                      </a:r>
-                      <a:pPr indent="0" marL="0">
-                        <a:buNone/>
-                      </a:pPr>
-                      <a:r>
-                        <a:rPr lang="en-US" sz="1100" b="1" dirty="0">
-                          <a:solidFill>
-                            <a:srgbClr val="10161F"/>
-                          </a:solidFill>
-                          <a:latin typeface="Pretendard" pitchFamily="34" charset="0"/>
-                          <a:ea typeface="Pretendard" pitchFamily="34" charset="-122"/>
-                          <a:cs typeface="Pretendard" pitchFamily="34" charset="-120"/>
-                        </a:rPr>
-                        <a:t>차입 </a:t>
-                      </a:r>
-                      <a:pPr indent="0" marL="0">
-                        <a:buNone/>
-                      </a:pPr>
-                      <a:r>
-                        <a:rPr lang="en-US" sz="1100" b="1" dirty="0">
-                          <a:solidFill>
-                            <a:srgbClr val="10161F"/>
-                          </a:solidFill>
-                          <a:latin typeface="Pretendard" pitchFamily="34" charset="0"/>
-                          <a:ea typeface="Pretendard" pitchFamily="34" charset="-122"/>
-                          <a:cs typeface="Pretendard" pitchFamily="34" charset="-120"/>
-                        </a:rPr>
-                        <a:t>(기본형)</a:t>
-                      </a:r>
-                      <a:endParaRPr lang="en-US" sz="1100" dirty="0">
-                        <a:latin typeface="Pretendard" charset="0"/>
-                        <a:ea typeface="Pretendard" charset="0"/>
-                        <a:cs typeface="Pretendard" charset="0"/>
-                      </a:endParaRPr>
-                    </a:p>
-                  </a:txBody>
-                  <a:tcPr marL="50800" marR="50800" marT="25400" marB="25400" anchor="ctr">
-                    <a:lnL w="3810" cap="flat" cmpd="sng" algn="ctr">
-                      <a:solidFill>
-                        <a:srgbClr val="CBD5E0"/>
-                      </a:solidFill>
-                      <a:prstDash val="solid"/>
-                      <a:round/>
-                      <a:headEnd type="none" w="med" len="med"/>
-                      <a:tailEnd type="none" w="med" len="med"/>
-                    </a:lnL>
-                    <a:lnR w="3810" cap="flat" cmpd="sng" algn="ctr">
-                      <a:solidFill>
-                        <a:srgbClr val="CBD5E0"/>
-                      </a:solidFill>
-                      <a:prstDash val="solid"/>
-                      <a:round/>
-                      <a:headEnd type="none" w="med" len="med"/>
-                      <a:tailEnd type="none" w="med" len="med"/>
-                    </a:lnR>
-                    <a:lnT w="3810" cap="flat" cmpd="sng" algn="ctr">
-                      <a:solidFill>
-                        <a:srgbClr val="CBD5E0"/>
-                      </a:solidFill>
-                      <a:prstDash val="solid"/>
-                      <a:round/>
-                      <a:headEnd type="none" w="med" len="med"/>
-                      <a:tailEnd type="none" w="med" len="med"/>
-                    </a:lnT>
-                    <a:lnB w="3810" cap="flat" cmpd="sng" algn="ctr">
-                      <a:solidFill>
-                        <a:srgbClr val="CBD5E0"/>
-                      </a:solidFill>
-                      <a:prstDash val="solid"/>
-                      <a:round/>
-                      <a:headEnd type="none" w="med" len="med"/>
-                      <a:tailEnd type="none" w="med" len="med"/>
-                    </a:lnB>
-                    <a:solidFill>
-                      <a:srgbClr val="FFFFFF"/>
-                    </a:solidFill>
-                  </a:tcPr>
-                </a:tc>
-                <a:tc>
-                  <a:txBody>
-                    <a:bodyPr/>
-                    <a:lstStyle/>
-                    <a:p>
-                      <a:pPr indent="0" marL="0">
-                        <a:buNone/>
-                      </a:pPr>
-                      <a:r>
-                        <a:rPr lang="en-US" sz="1100" dirty="0">
-                          <a:solidFill>
-                            <a:srgbClr val="10161F"/>
-                          </a:solidFill>
-                          <a:latin typeface="Pretendard" pitchFamily="34" charset="0"/>
-                          <a:ea typeface="Pretendard" pitchFamily="34" charset="-122"/>
-                          <a:cs typeface="Pretendard" pitchFamily="34" charset="-120"/>
-                        </a:rPr>
-                        <a:t>50%</a:t>
-                      </a:r>
-                      <a:endParaRPr lang="en-US" sz="1100" dirty="0">
-                        <a:latin typeface="Pretendard" charset="0"/>
-                        <a:ea typeface="Pretendard" charset="0"/>
-                        <a:cs typeface="Pretendard" charset="0"/>
-                      </a:endParaRPr>
-                    </a:p>
-                  </a:txBody>
-                  <a:tcPr marL="50800" marR="50800" marT="25400" marB="25400" anchor="ctr">
-                    <a:lnL w="3810" cap="flat" cmpd="sng" algn="ctr">
-                      <a:solidFill>
-                        <a:srgbClr val="CBD5E0"/>
-                      </a:solidFill>
-                      <a:prstDash val="solid"/>
-                      <a:round/>
-                      <a:headEnd type="none" w="med" len="med"/>
-                      <a:tailEnd type="none" w="med" len="med"/>
-                    </a:lnL>
-                    <a:lnR w="3810" cap="flat" cmpd="sng" algn="ctr">
-                      <a:solidFill>
-                        <a:srgbClr val="CBD5E0"/>
-                      </a:solidFill>
-                      <a:prstDash val="solid"/>
-                      <a:round/>
-                      <a:headEnd type="none" w="med" len="med"/>
-                      <a:tailEnd type="none" w="med" len="med"/>
-                    </a:lnR>
-                    <a:lnT w="3810" cap="flat" cmpd="sng" algn="ctr">
-                      <a:solidFill>
-                        <a:srgbClr val="CBD5E0"/>
-                      </a:solidFill>
-                      <a:prstDash val="solid"/>
-                      <a:round/>
-                      <a:headEnd type="none" w="med" len="med"/>
-                      <a:tailEnd type="none" w="med" len="med"/>
-                    </a:lnT>
-                    <a:lnB w="3810" cap="flat" cmpd="sng" algn="ctr">
-                      <a:solidFill>
-                        <a:srgbClr val="CBD5E0"/>
-                      </a:solidFill>
-                      <a:prstDash val="solid"/>
-                      <a:round/>
-                      <a:headEnd type="none" w="med" len="med"/>
-                      <a:tailEnd type="none" w="med" len="med"/>
-                    </a:lnB>
-                    <a:solidFill>
-                      <a:srgbClr val="FFFFFF"/>
-                    </a:solidFill>
-                  </a:tcPr>
-                </a:tc>
-                <a:tc>
-                  <a:txBody>
-                    <a:bodyPr/>
-                    <a:lstStyle/>
-                    <a:p>
-                      <a:pPr indent="0" marL="0">
-                        <a:buNone/>
-                      </a:pPr>
-                      <a:r>
-                        <a:rPr lang="en-US" sz="1100" dirty="0">
-                          <a:solidFill>
-                            <a:srgbClr val="10161F"/>
-                          </a:solidFill>
-                          <a:latin typeface="Pretendard" pitchFamily="34" charset="0"/>
-                          <a:ea typeface="Pretendard" pitchFamily="34" charset="-122"/>
-                          <a:cs typeface="Pretendard" pitchFamily="34" charset="-120"/>
-                        </a:rPr>
-                        <a:t>74.9억</a:t>
-                      </a:r>
-                      <a:endParaRPr lang="en-US" sz="1100" dirty="0">
-                        <a:latin typeface="Pretendard" charset="0"/>
-                        <a:ea typeface="Pretendard" charset="0"/>
-                        <a:cs typeface="Pretendard" charset="0"/>
-                      </a:endParaRPr>
-                    </a:p>
-                  </a:txBody>
-                  <a:tcPr marL="50800" marR="50800" marT="25400" marB="25400" anchor="ctr">
-                    <a:lnL w="3810" cap="flat" cmpd="sng" algn="ctr">
-                      <a:solidFill>
-                        <a:srgbClr val="CBD5E0"/>
-                      </a:solidFill>
-                      <a:prstDash val="solid"/>
-                      <a:round/>
-                      <a:headEnd type="none" w="med" len="med"/>
-                      <a:tailEnd type="none" w="med" len="med"/>
-                    </a:lnL>
-                    <a:lnR w="3810" cap="flat" cmpd="sng" algn="ctr">
-                      <a:solidFill>
-                        <a:srgbClr val="CBD5E0"/>
-                      </a:solidFill>
-                      <a:prstDash val="solid"/>
-                      <a:round/>
-                      <a:headEnd type="none" w="med" len="med"/>
-                      <a:tailEnd type="none" w="med" len="med"/>
-                    </a:lnR>
-                    <a:lnT w="3810" cap="flat" cmpd="sng" algn="ctr">
-                      <a:solidFill>
-                        <a:srgbClr val="CBD5E0"/>
-                      </a:solidFill>
-                      <a:prstDash val="solid"/>
-                      <a:round/>
-                      <a:headEnd type="none" w="med" len="med"/>
-                      <a:tailEnd type="none" w="med" len="med"/>
-                    </a:lnT>
-                    <a:lnB w="3810" cap="flat" cmpd="sng" algn="ctr">
-                      <a:solidFill>
-                        <a:srgbClr val="CBD5E0"/>
-                      </a:solidFill>
-                      <a:prstDash val="solid"/>
-                      <a:round/>
-                      <a:headEnd type="none" w="med" len="med"/>
-                      <a:tailEnd type="none" w="med" len="med"/>
-                    </a:lnB>
-                    <a:solidFill>
-                      <a:srgbClr val="FFFFFF"/>
-                    </a:solidFill>
-                  </a:tcPr>
-                </a:tc>
-                <a:tc>
-                  <a:txBody>
-                    <a:bodyPr/>
-                    <a:lstStyle/>
-                    <a:p>
-                      <a:pPr indent="0" marL="0">
-                        <a:buNone/>
-                      </a:pPr>
-                      <a:r>
-                        <a:rPr lang="en-US" sz="1100" dirty="0">
-                          <a:solidFill>
-                            <a:srgbClr val="10161F"/>
-                          </a:solidFill>
-                          <a:latin typeface="Pretendard" pitchFamily="34" charset="0"/>
-                          <a:ea typeface="Pretendard" pitchFamily="34" charset="-122"/>
-                          <a:cs typeface="Pretendard" pitchFamily="34" charset="-120"/>
-                        </a:rPr>
-                        <a:t>-</a:t>
-                      </a:r>
-                      <a:endParaRPr lang="en-US" sz="1100" dirty="0">
-                        <a:latin typeface="Pretendard" charset="0"/>
-                        <a:ea typeface="Pretendard" charset="0"/>
-                        <a:cs typeface="Pretendard" charset="0"/>
-                      </a:endParaRPr>
-                    </a:p>
-                  </a:txBody>
-                  <a:tcPr marL="50800" marR="50800" marT="25400" marB="25400" anchor="ctr">
-                    <a:lnL w="3810" cap="flat" cmpd="sng" algn="ctr">
-                      <a:solidFill>
-                        <a:srgbClr val="CBD5E0"/>
-                      </a:solidFill>
-                      <a:prstDash val="solid"/>
-                      <a:round/>
-                      <a:headEnd type="none" w="med" len="med"/>
-                      <a:tailEnd type="none" w="med" len="med"/>
-                    </a:lnL>
-                    <a:lnR w="3810" cap="flat" cmpd="sng" algn="ctr">
-                      <a:solidFill>
-                        <a:srgbClr val="CBD5E0"/>
-                      </a:solidFill>
-                      <a:prstDash val="solid"/>
-                      <a:round/>
-                      <a:headEnd type="none" w="med" len="med"/>
-                      <a:tailEnd type="none" w="med" len="med"/>
-                    </a:lnR>
-                    <a:lnT w="3810" cap="flat" cmpd="sng" algn="ctr">
-                      <a:solidFill>
-                        <a:srgbClr val="CBD5E0"/>
-                      </a:solidFill>
-                      <a:prstDash val="solid"/>
-                      <a:round/>
-                      <a:headEnd type="none" w="med" len="med"/>
-                      <a:tailEnd type="none" w="med" len="med"/>
-                    </a:lnT>
-                    <a:lnB w="3810" cap="flat" cmpd="sng" algn="ctr">
-                      <a:solidFill>
-                        <a:srgbClr val="CBD5E0"/>
-                      </a:solidFill>
-                      <a:prstDash val="solid"/>
-                      <a:round/>
-                      <a:headEnd type="none" w="med" len="med"/>
-                      <a:tailEnd type="none" w="med" len="med"/>
-                    </a:lnB>
-                    <a:solidFill>
-                      <a:srgbClr val="FFFFFF"/>
-                    </a:solidFill>
-                  </a:tcPr>
-                </a:tc>
-              </a:tr>
-              <a:tr h="457200">
-                <a:tc>
-                  <a:txBody>
-                    <a:bodyPr/>
-                    <a:lstStyle/>
-                    <a:p>
-                      <a:pPr indent="0" marL="0">
-                        <a:buNone/>
-                      </a:pPr>
-                      <a:r>
-                        <a:rPr lang="en-US" sz="1100" b="1" dirty="0">
-                          <a:solidFill>
-                            <a:srgbClr val="10161F"/>
-                          </a:solidFill>
-                          <a:latin typeface="Pretendard" pitchFamily="34" charset="0"/>
-                          <a:ea typeface="Pretendard" pitchFamily="34" charset="-122"/>
-                          <a:cs typeface="Pretendard" pitchFamily="34" charset="-120"/>
-                        </a:rPr>
-                        <a:t>적극적 </a:t>
-                      </a:r>
-                      <a:pPr indent="0" marL="0">
-                        <a:buNone/>
-                      </a:pPr>
-                      <a:r>
-                        <a:rPr lang="en-US" sz="1100" b="1" dirty="0">
-                          <a:solidFill>
-                            <a:srgbClr val="10161F"/>
-                          </a:solidFill>
-                          <a:latin typeface="Pretendard" pitchFamily="34" charset="0"/>
-                          <a:ea typeface="Pretendard" pitchFamily="34" charset="-122"/>
-                          <a:cs typeface="Pretendard" pitchFamily="34" charset="-120"/>
-                        </a:rPr>
-                        <a:t>차입 </a:t>
-                      </a:r>
-                      <a:pPr indent="0" marL="0">
-                        <a:buNone/>
-                      </a:pPr>
-                      <a:r>
-                        <a:rPr lang="en-US" sz="1100" b="1" dirty="0">
-                          <a:solidFill>
-                            <a:srgbClr val="10161F"/>
-                          </a:solidFill>
-                          <a:latin typeface="Pretendard" pitchFamily="34" charset="0"/>
-                          <a:ea typeface="Pretendard" pitchFamily="34" charset="-122"/>
-                          <a:cs typeface="Pretendard" pitchFamily="34" charset="-120"/>
-                        </a:rPr>
-                        <a:t>(레버리지)</a:t>
-                      </a:r>
-                      <a:endParaRPr lang="en-US" sz="1100" dirty="0">
-                        <a:latin typeface="Pretendard" charset="0"/>
-                        <a:ea typeface="Pretendard" charset="0"/>
-                        <a:cs typeface="Pretendard" charset="0"/>
-                      </a:endParaRPr>
-                    </a:p>
-                  </a:txBody>
-                  <a:tcPr marL="50800" marR="50800" marT="25400" marB="25400" anchor="ctr">
-                    <a:lnL w="3810" cap="flat" cmpd="sng" algn="ctr">
-                      <a:solidFill>
-                        <a:srgbClr val="CBD5E0"/>
-                      </a:solidFill>
-                      <a:prstDash val="solid"/>
-                      <a:round/>
-                      <a:headEnd type="none" w="med" len="med"/>
-                      <a:tailEnd type="none" w="med" len="med"/>
-                    </a:lnL>
-                    <a:lnR w="3810" cap="flat" cmpd="sng" algn="ctr">
-                      <a:solidFill>
-                        <a:srgbClr val="CBD5E0"/>
-                      </a:solidFill>
-                      <a:prstDash val="solid"/>
-                      <a:round/>
-                      <a:headEnd type="none" w="med" len="med"/>
-                      <a:tailEnd type="none" w="med" len="med"/>
-                    </a:lnR>
-                    <a:lnT w="3810" cap="flat" cmpd="sng" algn="ctr">
-                      <a:solidFill>
-                        <a:srgbClr val="CBD5E0"/>
-                      </a:solidFill>
-                      <a:prstDash val="solid"/>
-                      <a:round/>
-                      <a:headEnd type="none" w="med" len="med"/>
-                      <a:tailEnd type="none" w="med" len="med"/>
-                    </a:lnT>
-                    <a:lnB w="3810" cap="flat" cmpd="sng" algn="ctr">
-                      <a:solidFill>
-                        <a:srgbClr val="CBD5E0"/>
-                      </a:solidFill>
-                      <a:prstDash val="solid"/>
-                      <a:round/>
-                      <a:headEnd type="none" w="med" len="med"/>
-                      <a:tailEnd type="none" w="med" len="med"/>
-                    </a:lnB>
-                    <a:solidFill>
-                      <a:srgbClr val="F7FAFC"/>
-                    </a:solidFill>
-                  </a:tcPr>
-                </a:tc>
-                <a:tc>
-                  <a:txBody>
-                    <a:bodyPr/>
-                    <a:lstStyle/>
-                    <a:p>
-                      <a:pPr indent="0" marL="0">
-                        <a:buNone/>
-                      </a:pPr>
-                      <a:r>
-                        <a:rPr lang="en-US" sz="1100" dirty="0">
-                          <a:solidFill>
-                            <a:srgbClr val="10161F"/>
-                          </a:solidFill>
-                          <a:latin typeface="Pretendard" pitchFamily="34" charset="0"/>
-                          <a:ea typeface="Pretendard" pitchFamily="34" charset="-122"/>
-                          <a:cs typeface="Pretendard" pitchFamily="34" charset="-120"/>
-                        </a:rPr>
-                        <a:t>60%</a:t>
-                      </a:r>
-                      <a:endParaRPr lang="en-US" sz="1100" dirty="0">
-                        <a:latin typeface="Pretendard" charset="0"/>
-                        <a:ea typeface="Pretendard" charset="0"/>
-                        <a:cs typeface="Pretendard" charset="0"/>
-                      </a:endParaRPr>
-                    </a:p>
-                  </a:txBody>
-                  <a:tcPr marL="50800" marR="50800" marT="25400" marB="25400" anchor="ctr">
-                    <a:lnL w="3810" cap="flat" cmpd="sng" algn="ctr">
-                      <a:solidFill>
-                        <a:srgbClr val="CBD5E0"/>
-                      </a:solidFill>
-                      <a:prstDash val="solid"/>
-                      <a:round/>
-                      <a:headEnd type="none" w="med" len="med"/>
-                      <a:tailEnd type="none" w="med" len="med"/>
-                    </a:lnL>
-                    <a:lnR w="3810" cap="flat" cmpd="sng" algn="ctr">
-                      <a:solidFill>
-                        <a:srgbClr val="CBD5E0"/>
-                      </a:solidFill>
-                      <a:prstDash val="solid"/>
-                      <a:round/>
-                      <a:headEnd type="none" w="med" len="med"/>
-                      <a:tailEnd type="none" w="med" len="med"/>
-                    </a:lnR>
-                    <a:lnT w="3810" cap="flat" cmpd="sng" algn="ctr">
-                      <a:solidFill>
-                        <a:srgbClr val="CBD5E0"/>
-                      </a:solidFill>
-                      <a:prstDash val="solid"/>
-                      <a:round/>
-                      <a:headEnd type="none" w="med" len="med"/>
-                      <a:tailEnd type="none" w="med" len="med"/>
-                    </a:lnT>
-                    <a:lnB w="3810" cap="flat" cmpd="sng" algn="ctr">
-                      <a:solidFill>
-                        <a:srgbClr val="CBD5E0"/>
-                      </a:solidFill>
-                      <a:prstDash val="solid"/>
-                      <a:round/>
-                      <a:headEnd type="none" w="med" len="med"/>
-                      <a:tailEnd type="none" w="med" len="med"/>
-                    </a:lnB>
-                    <a:solidFill>
-                      <a:srgbClr val="F7FAFC"/>
-                    </a:solidFill>
-                  </a:tcPr>
-                </a:tc>
-                <a:tc>
-                  <a:txBody>
-                    <a:bodyPr/>
-                    <a:lstStyle/>
-                    <a:p>
-                      <a:pPr indent="0" marL="0">
-                        <a:buNone/>
-                      </a:pPr>
-                      <a:r>
-                        <a:rPr lang="en-US" sz="1100" dirty="0">
-                          <a:solidFill>
-                            <a:srgbClr val="10161F"/>
-                          </a:solidFill>
-                          <a:latin typeface="Pretendard" pitchFamily="34" charset="0"/>
-                          <a:ea typeface="Pretendard" pitchFamily="34" charset="-122"/>
-                          <a:cs typeface="Pretendard" pitchFamily="34" charset="-120"/>
-                        </a:rPr>
-                        <a:t>61.4억</a:t>
-                      </a:r>
-                      <a:endParaRPr lang="en-US" sz="1100" dirty="0">
-                        <a:latin typeface="Pretendard" charset="0"/>
-                        <a:ea typeface="Pretendard" charset="0"/>
-                        <a:cs typeface="Pretendard" charset="0"/>
-                      </a:endParaRPr>
-                    </a:p>
-                  </a:txBody>
-                  <a:tcPr marL="50800" marR="50800" marT="25400" marB="25400" anchor="ctr">
-                    <a:lnL w="3810" cap="flat" cmpd="sng" algn="ctr">
-                      <a:solidFill>
-                        <a:srgbClr val="CBD5E0"/>
-                      </a:solidFill>
-                      <a:prstDash val="solid"/>
-                      <a:round/>
-                      <a:headEnd type="none" w="med" len="med"/>
-                      <a:tailEnd type="none" w="med" len="med"/>
-                    </a:lnL>
-                    <a:lnR w="3810" cap="flat" cmpd="sng" algn="ctr">
-                      <a:solidFill>
-                        <a:srgbClr val="CBD5E0"/>
-                      </a:solidFill>
-                      <a:prstDash val="solid"/>
-                      <a:round/>
-                      <a:headEnd type="none" w="med" len="med"/>
-                      <a:tailEnd type="none" w="med" len="med"/>
-                    </a:lnR>
-                    <a:lnT w="3810" cap="flat" cmpd="sng" algn="ctr">
-                      <a:solidFill>
-                        <a:srgbClr val="CBD5E0"/>
-                      </a:solidFill>
-                      <a:prstDash val="solid"/>
-                      <a:round/>
-                      <a:headEnd type="none" w="med" len="med"/>
-                      <a:tailEnd type="none" w="med" len="med"/>
-                    </a:lnT>
-                    <a:lnB w="3810" cap="flat" cmpd="sng" algn="ctr">
-                      <a:solidFill>
-                        <a:srgbClr val="CBD5E0"/>
-                      </a:solidFill>
-                      <a:prstDash val="solid"/>
-                      <a:round/>
-                      <a:headEnd type="none" w="med" len="med"/>
-                      <a:tailEnd type="none" w="med" len="med"/>
-                    </a:lnB>
-                    <a:solidFill>
-                      <a:srgbClr val="F7FAFC"/>
-                    </a:solidFill>
-                  </a:tcPr>
-                </a:tc>
-                <a:tc>
-                  <a:txBody>
-                    <a:bodyPr/>
-                    <a:lstStyle/>
-                    <a:p>
-                      <a:pPr indent="0" marL="0">
-                        <a:buNone/>
-                      </a:pPr>
-                      <a:r>
-                        <a:rPr lang="en-US" sz="1100" dirty="0">
-                          <a:solidFill>
-                            <a:srgbClr val="10161F"/>
-                          </a:solidFill>
-                          <a:latin typeface="Pretendard" pitchFamily="34" charset="0"/>
-                          <a:ea typeface="Pretendard" pitchFamily="34" charset="-122"/>
-                          <a:cs typeface="Pretendard" pitchFamily="34" charset="-120"/>
-                        </a:rPr>
-                        <a:t>-</a:t>
-                      </a:r>
-                      <a:endParaRPr lang="en-US" sz="1100" dirty="0">
-                        <a:latin typeface="Pretendard" charset="0"/>
-                        <a:ea typeface="Pretendard" charset="0"/>
-                        <a:cs typeface="Pretendard" charset="0"/>
-                      </a:endParaRPr>
-                    </a:p>
-                  </a:txBody>
-                  <a:tcPr marL="50800" marR="50800" marT="25400" marB="25400" anchor="ctr">
-                    <a:lnL w="3810" cap="flat" cmpd="sng" algn="ctr">
-                      <a:solidFill>
-                        <a:srgbClr val="CBD5E0"/>
-                      </a:solidFill>
-                      <a:prstDash val="solid"/>
-                      <a:round/>
-                      <a:headEnd type="none" w="med" len="med"/>
-                      <a:tailEnd type="none" w="med" len="med"/>
-                    </a:lnL>
-                    <a:lnR w="3810" cap="flat" cmpd="sng" algn="ctr">
-                      <a:solidFill>
-                        <a:srgbClr val="CBD5E0"/>
-                      </a:solidFill>
-                      <a:prstDash val="solid"/>
-                      <a:round/>
-                      <a:headEnd type="none" w="med" len="med"/>
-                      <a:tailEnd type="none" w="med" len="med"/>
-                    </a:lnR>
-                    <a:lnT w="3810" cap="flat" cmpd="sng" algn="ctr">
-                      <a:solidFill>
-                        <a:srgbClr val="CBD5E0"/>
-                      </a:solidFill>
-                      <a:prstDash val="solid"/>
-                      <a:round/>
-                      <a:headEnd type="none" w="med" len="med"/>
-                      <a:tailEnd type="none" w="med" len="med"/>
-                    </a:lnT>
-                    <a:lnB w="3810" cap="flat" cmpd="sng" algn="ctr">
-                      <a:solidFill>
-                        <a:srgbClr val="CBD5E0"/>
-                      </a:solidFill>
-                      <a:prstDash val="solid"/>
-                      <a:round/>
-                      <a:headEnd type="none" w="med" len="med"/>
-                      <a:tailEnd type="none" w="med" len="med"/>
-                    </a:lnB>
-                    <a:solidFill>
-                      <a:srgbClr val="F7FAFC"/>
-                    </a:solidFill>
-                  </a:tcPr>
-                </a:tc>
-              </a:tr>
-            </a:tbl>
-          </a:graphicData>
-        </a:graphic>
-      </p:graphicFrame>
-      <p:sp>
-        <p:nvSpPr>
-          <p:cNvPr id="31" name="Shape 28"/>
-          <p:cNvSpPr/>
-          <p:nvPr/>
-        </p:nvSpPr>
-        <p:spPr>
-          <a:xfrm>
-            <a:off x="6461608" y="4069080"/>
-            <a:ext cx="4934560" cy="1463040"/>
-          </a:xfrm>
-          <a:prstGeom prst="roundRect">
-            <a:avLst>
-              <a:gd name="adj" fmla="val 3750"/>
-            </a:avLst>
-          </a:prstGeom>
-          <a:solidFill>
-            <a:srgbClr val="FEEBC8"/>
-          </a:solidFill>
-          <a:ln/>
-        </p:spPr>
-      </p:sp>
-      <p:sp>
-        <p:nvSpPr>
-          <p:cNvPr id="32" name="Shape 29"/>
-          <p:cNvSpPr/>
-          <p:nvPr/>
-        </p:nvSpPr>
-        <p:spPr>
-          <a:xfrm>
-            <a:off x="6461608" y="4123944"/>
-            <a:ext cx="36576" cy="1353312"/>
-          </a:xfrm>
-          <a:prstGeom prst="rect">
-            <a:avLst/>
-          </a:prstGeom>
-          <a:solidFill>
-            <a:srgbClr val="9C4221"/>
-          </a:solidFill>
-          <a:ln/>
-        </p:spPr>
-      </p:sp>
-      <p:sp>
-        <p:nvSpPr>
-          <p:cNvPr id="33" name="Text 30"/>
-          <p:cNvSpPr/>
-          <p:nvPr/>
-        </p:nvSpPr>
-        <p:spPr>
-          <a:xfrm>
-            <a:off x="6607912" y="4160520"/>
-            <a:ext cx="4678528" cy="201168"/>
-          </a:xfrm>
-          <a:prstGeom prst="rect">
-            <a:avLst/>
-          </a:prstGeom>
-          <a:noFill/>
-          <a:ln/>
-        </p:spPr>
-        <p:txBody>
-          <a:bodyPr wrap="square" lIns="0" tIns="0" rIns="0" bIns="0" rtlCol="0" anchor="ctr"/>
-          <a:lstStyle/>
-          <a:p>
-            <a:pPr indent="0" marL="0">
-              <a:buNone/>
-            </a:pPr>
-            <a:r>
-              <a:rPr lang="en-US" sz="1050" b="1" dirty="0">
-                <a:solidFill>
-                  <a:srgbClr val="9C4221"/>
-                </a:solidFill>
-                <a:latin typeface="Pretendard" pitchFamily="34" charset="0"/>
-                <a:ea typeface="Pretendard" pitchFamily="34" charset="-122"/>
-                <a:cs typeface="Pretendard" pitchFamily="34" charset="-120"/>
-              </a:rPr>
-              <a:t>역레버리지 유의 구간</a:t>
-            </a:r>
-            <a:endParaRPr lang="en-US" sz="1050" dirty="0"/>
-          </a:p>
-        </p:txBody>
-      </p:sp>
-      <p:sp>
-        <p:nvSpPr>
-          <p:cNvPr id="34" name="Text 31"/>
-          <p:cNvSpPr/>
-          <p:nvPr/>
-        </p:nvSpPr>
-        <p:spPr>
-          <a:xfrm>
-            <a:off x="6607912" y="4361688"/>
-            <a:ext cx="4678528" cy="1133856"/>
-          </a:xfrm>
-          <a:prstGeom prst="rect">
-            <a:avLst/>
-          </a:prstGeom>
-          <a:noFill/>
-          <a:ln/>
-        </p:spPr>
-        <p:txBody>
-          <a:bodyPr wrap="square" lIns="0" tIns="0" rIns="0" bIns="0" rtlCol="0" anchor="t"/>
-          <a:lstStyle/>
-          <a:p>
-            <a:pPr indent="0" marL="0">
-              <a:lnSpc>
-                <a:spcPct val="108000"/>
-              </a:lnSpc>
-              <a:buNone/>
-            </a:pPr>
-            <a:r>
-              <a:rPr lang="en-US" sz="980" dirty="0">
-                <a:solidFill>
-                  <a:srgbClr val="10161F"/>
-                </a:solidFill>
-                <a:latin typeface="Pretendard" pitchFamily="34" charset="0"/>
-                <a:ea typeface="Pretendard" pitchFamily="34" charset="-122"/>
-                <a:cs typeface="Pretendard" pitchFamily="34" charset="-120"/>
-              </a:rPr>
-              <a:t>차입 금리가 자산 총수익률을 상회하여 대출 실행 시 자기자본수익률이 하락할 수 있습니다. 에쿼티 비중 확대를 권장합니다.</a:t>
-            </a:r>
-            <a:endParaRPr lang="en-US" sz="980" dirty="0"/>
-          </a:p>
-        </p:txBody>
-      </p:sp>
-      <p:sp>
-        <p:nvSpPr>
-          <p:cNvPr id="35" name="Text 32"/>
           <p:cNvSpPr/>
           <p:nvPr/>
         </p:nvSpPr>
@@ -13843,7 +11039,7 @@
       </p:sp>
       <p:sp>
         <p:nvSpPr>
-          <p:cNvPr id="36" name="Text 33"/>
+          <p:cNvPr id="10" name="Text 8"/>
           <p:cNvSpPr/>
           <p:nvPr/>
         </p:nvSpPr>
@@ -14004,7 +11200,7 @@
                 <a:ea typeface="Arial" pitchFamily="34" charset="-122"/>
                 <a:cs typeface="Arial" pitchFamily="34" charset="-120"/>
               </a:rPr>
-              <a:t>Thesis</a:t>
+              <a:t>Risk</a:t>
             </a:r>
             <a:endParaRPr lang="en-US" sz="950" dirty="0"/>
           </a:p>
@@ -14045,7 +11241,7 @@
                 <a:ea typeface="Pretendard" pitchFamily="34" charset="-122"/>
                 <a:cs typeface="Pretendard" pitchFamily="34" charset="-120"/>
               </a:rPr>
-              <a:t>투자 논거</a:t>
+              <a:t>리스크</a:t>
             </a:r>
             <a:endParaRPr lang="en-US" sz="2300" dirty="0"/>
           </a:p>
@@ -14059,20 +11255,20 @@
         </p:nvSpPr>
         <p:spPr>
           <a:xfrm>
-            <a:off x="566928" y="4937760"/>
-            <a:ext cx="11057839" cy="804672"/>
+            <a:off x="566928" y="1417320"/>
+            <a:ext cx="11057839" cy="3657600"/>
           </a:xfrm>
           <a:prstGeom prst="roundRect">
             <a:avLst>
-              <a:gd name="adj" fmla="val 6818"/>
+              <a:gd name="adj" fmla="val 1500"/>
             </a:avLst>
           </a:prstGeom>
           <a:solidFill>
-            <a:srgbClr val="F3EBDA"/>
+            <a:srgbClr val="F7FAFC"/>
           </a:solidFill>
-          <a:ln w="10160">
+          <a:ln w="6350">
             <a:solidFill>
-              <a:srgbClr val="D9B668"/>
+              <a:srgbClr val="CBD5E0"/>
             </a:solidFill>
             <a:prstDash val="solid"/>
           </a:ln>
@@ -14080,14 +11276,34 @@
       </p:sp>
       <p:sp>
         <p:nvSpPr>
-          <p:cNvPr id="7" name="Text 5"/>
-          <p:cNvSpPr/>
-          <p:nvPr/>
-        </p:nvSpPr>
-        <p:spPr>
-          <a:xfrm>
-            <a:off x="749808" y="5047488"/>
-            <a:ext cx="1691640" cy="256032"/>
+          <p:cNvPr id="7" name="Shape 5"/>
+          <p:cNvSpPr/>
+          <p:nvPr/>
+        </p:nvSpPr>
+        <p:spPr>
+          <a:xfrm>
+            <a:off x="566928" y="1417320"/>
+            <a:ext cx="11057839" cy="45720"/>
+          </a:xfrm>
+          <a:prstGeom prst="rect">
+            <a:avLst/>
+          </a:prstGeom>
+          <a:solidFill>
+            <a:srgbClr val="B98A2E"/>
+          </a:solidFill>
+          <a:ln/>
+        </p:spPr>
+      </p:sp>
+      <p:sp>
+        <p:nvSpPr>
+          <p:cNvPr id="8" name="Text 6"/>
+          <p:cNvSpPr/>
+          <p:nvPr/>
+        </p:nvSpPr>
+        <p:spPr>
+          <a:xfrm>
+            <a:off x="795528" y="1618488"/>
+            <a:ext cx="10600639" cy="292608"/>
           </a:xfrm>
           <a:prstGeom prst="rect">
             <a:avLst/>
@@ -14103,7 +11319,7 @@
               <a:buNone/>
             </a:pPr>
             <a:r>
-              <a:rPr lang="en-US" sz="1050" b="1" dirty="0">
+              <a:rPr lang="en-US" sz="1350" b="1" dirty="0">
                 <a:solidFill>
                   <a:srgbClr val="977024"/>
                 </a:solidFill>
@@ -14111,22 +11327,135 @@
                 <a:ea typeface="Pretendard" pitchFamily="34" charset="-122"/>
                 <a:cs typeface="Pretendard" pitchFamily="34" charset="-120"/>
               </a:rPr>
-              <a:t>종합 가치 제안</a:t>
-            </a:r>
-            <a:endParaRPr lang="en-US" sz="1050" dirty="0"/>
-          </a:p>
-        </p:txBody>
-      </p:sp>
-      <p:sp>
-        <p:nvSpPr>
-          <p:cNvPr id="8" name="Text 6"/>
-          <p:cNvSpPr/>
-          <p:nvPr/>
-        </p:nvSpPr>
-        <p:spPr>
-          <a:xfrm>
-            <a:off x="2487168" y="5010912"/>
-            <a:ext cx="8954719" cy="658368"/>
+              <a:t>준공업 용도제한</a:t>
+            </a:r>
+            <a:endParaRPr lang="en-US" sz="1350" dirty="0"/>
+          </a:p>
+        </p:txBody>
+      </p:sp>
+      <p:sp>
+        <p:nvSpPr>
+          <p:cNvPr id="9" name="Text 7"/>
+          <p:cNvSpPr/>
+          <p:nvPr/>
+        </p:nvSpPr>
+        <p:spPr>
+          <a:xfrm>
+            <a:off x="795528" y="1947672"/>
+            <a:ext cx="10600639" cy="365760"/>
+          </a:xfrm>
+          <a:prstGeom prst="rect">
+            <a:avLst/>
+          </a:prstGeom>
+          <a:noFill/>
+          <a:ln/>
+        </p:spPr>
+        <p:txBody>
+          <a:bodyPr wrap="square" lIns="0" tIns="0" rIns="0" bIns="0" rtlCol="0" anchor="ctr">
+            <a:normAutofit/>
+          </a:bodyPr>
+          <a:lstStyle/>
+          <a:p>
+            <a:pPr indent="0" marL="0">
+              <a:buNone/>
+            </a:pPr>
+            <a:r>
+              <a:rPr lang="en-US" sz="1250" b="1" dirty="0">
+                <a:solidFill>
+                  <a:srgbClr val="10161F"/>
+                </a:solidFill>
+                <a:latin typeface="Pretendard" pitchFamily="34" charset="0"/>
+                <a:ea typeface="Pretendard" pitchFamily="34" charset="-122"/>
+                <a:cs typeface="Pretendard" pitchFamily="34" charset="-120"/>
+              </a:rPr>
+              <a:t>IT 허용</a:t>
+            </a:r>
+            <a:endParaRPr lang="en-US" sz="1250" dirty="0"/>
+          </a:p>
+        </p:txBody>
+      </p:sp>
+      <p:sp>
+        <p:nvSpPr>
+          <p:cNvPr id="10" name="Text 8"/>
+          <p:cNvSpPr/>
+          <p:nvPr/>
+        </p:nvSpPr>
+        <p:spPr>
+          <a:xfrm>
+            <a:off x="795528" y="2377440"/>
+            <a:ext cx="10600639" cy="2606040"/>
+          </a:xfrm>
+          <a:prstGeom prst="rect">
+            <a:avLst/>
+          </a:prstGeom>
+          <a:noFill/>
+          <a:ln/>
+        </p:spPr>
+        <p:txBody>
+          <a:bodyPr wrap="square" lIns="0" tIns="0" rIns="0" bIns="0" rtlCol="0" anchor="t">
+            <a:normAutofit/>
+          </a:bodyPr>
+          <a:lstStyle/>
+          <a:p>
+            <a:pPr marL="342900" indent="-342900">
+              <a:lnSpc>
+                <a:spcPct val="115000"/>
+              </a:lnSpc>
+              <a:buSzPct val="100000"/>
+              <a:buChar char="•"/>
+            </a:pPr>
+            <a:r>
+              <a:rPr lang="en-US" sz="1100" dirty="0">
+                <a:solidFill>
+                  <a:srgbClr val="10161F"/>
+                </a:solidFill>
+                <a:latin typeface="Pretendard" pitchFamily="34" charset="0"/>
+                <a:ea typeface="Pretendard" pitchFamily="34" charset="-122"/>
+                <a:cs typeface="Pretendard" pitchFamily="34" charset="-120"/>
+              </a:rPr>
+              <a:t>사전 확인 완료</a:t>
+            </a:r>
+            <a:endParaRPr lang="en-US" sz="1100" dirty="0"/>
+          </a:p>
+        </p:txBody>
+      </p:sp>
+      <p:sp>
+        <p:nvSpPr>
+          <p:cNvPr id="11" name="Shape 9"/>
+          <p:cNvSpPr/>
+          <p:nvPr/>
+        </p:nvSpPr>
+        <p:spPr>
+          <a:xfrm>
+            <a:off x="566928" y="5193792"/>
+            <a:ext cx="11057839" cy="621792"/>
+          </a:xfrm>
+          <a:prstGeom prst="roundRect">
+            <a:avLst>
+              <a:gd name="adj" fmla="val 8824"/>
+            </a:avLst>
+          </a:prstGeom>
+          <a:solidFill>
+            <a:srgbClr val="F7FAFC"/>
+          </a:solidFill>
+          <a:ln w="6350">
+            <a:solidFill>
+              <a:srgbClr val="CBD5E0"/>
+            </a:solidFill>
+            <a:prstDash val="solid"/>
+          </a:ln>
+        </p:spPr>
+      </p:sp>
+      <p:sp>
+        <p:nvSpPr>
+          <p:cNvPr id="12" name="Text 10"/>
+          <p:cNvSpPr/>
+          <p:nvPr/>
+        </p:nvSpPr>
+        <p:spPr>
+          <a:xfrm>
+            <a:off x="795528" y="5193792"/>
+            <a:ext cx="10600639" cy="621792"/>
           </a:xfrm>
           <a:prstGeom prst="rect">
             <a:avLst/>
@@ -14139,9 +11468,6 @@
           <a:lstStyle/>
           <a:p>
             <a:pPr indent="0" marL="0">
-              <a:lnSpc>
-                <a:spcPct val="125000"/>
-              </a:lnSpc>
               <a:buNone/>
             </a:pPr>
             <a:r>
@@ -14153,7 +11479,7 @@
                 <a:ea typeface="Pretendard" pitchFamily="34" charset="-122"/>
                 <a:cs typeface="Pretendard" pitchFamily="34" charset="-120"/>
               </a:rPr>
-              <a:t>성수 IT산업 거점으로서의 입지 가치와 통사옥 희소성을 갖추고 있습니다.</a:t>
+              <a:t>※ 본 리스크 체크는 공부 및 브로커 확인 기반이며, 매수 전 전문 실사팀(변호사/건축사)을 통한 정밀 실사가 필요합니다.</a:t>
             </a:r>
             <a:endParaRPr lang="en-US" sz="1100" dirty="0"/>
           </a:p>
@@ -14161,7 +11487,7 @@
       </p:sp>
       <p:sp>
         <p:nvSpPr>
-          <p:cNvPr id="9" name="Text 7"/>
+          <p:cNvPr id="13" name="Text 11"/>
           <p:cNvSpPr/>
           <p:nvPr/>
         </p:nvSpPr>
@@ -14200,7 +11526,7 @@
       </p:sp>
       <p:sp>
         <p:nvSpPr>
-          <p:cNvPr id="10" name="Text 8"/>
+          <p:cNvPr id="14" name="Text 12"/>
           <p:cNvSpPr/>
           <p:nvPr/>
         </p:nvSpPr>
